--- a/03_product/concepts/AI-Class-New-slide-deck-FINAL-2026-08-21-branded.pptx
+++ b/03_product/concepts/AI-Class-New-slide-deck-FINAL-2026-08-21-branded.pptx
@@ -15,9 +15,11 @@
     <p:sldId id="263" r:id="rId9"/>
     <p:sldId id="264" r:id="rId10"/>
     <p:sldId id="265" r:id="rId11"/>
+    <p:sldId id="266" r:id="rId12"/>
+    <p:sldId id="267" r:id="rId13"/>
   </p:sldIdLst>
   <p:notesMasterIdLst>
-    <p:notesMasterId r:id="rId12"/>
+    <p:notesMasterId r:id="rId14"/>
   </p:notesMasterIdLst>
   <p:sldSz cx="12188952" cy="6858000"/>
   <p:notesSz cx="6858000" cy="12188952"/>
@@ -623,6 +625,182 @@
             <a:fld id="{F7021451-1387-4CA6-816F-3879F97B5CBC}" type="slidenum">
               <a:rPr lang="en-US"/>
               <a:t>10</a:t>
+            </a:fld>
+            <a:endParaRPr lang="en-US"/>
+          </a:p>
+        </p:txBody>
+      </p:sp>
+    </p:spTree>
+    <p:extLst>
+      <p:ext uri="{BB962C8B-B14F-4D97-AF65-F5344CB8AC3E}">
+        <p14:creationId xmlns:p14="http://schemas.microsoft.com/office/powerpoint/2010/main" val="1024086991"/>
+      </p:ext>
+    </p:extLst>
+  </p:cSld>
+  <p:clrMapOvr>
+    <a:masterClrMapping/>
+  </p:clrMapOvr>
+</p:notes>
+</file>
+
+<file path=ppt/notesSlides/notesSlide11.xml><?xml version="1.0" encoding="utf-8"?>
+<p:notes xmlns:a="http://schemas.openxmlformats.org/drawingml/2006/main" xmlns:r="http://schemas.openxmlformats.org/officeDocument/2006/relationships" xmlns:p="http://schemas.openxmlformats.org/presentationml/2006/main">
+  <p:cSld>
+    <p:spTree>
+      <p:nvGrpSpPr>
+        <p:cNvPr id="1" name=""/>
+        <p:cNvGrpSpPr/>
+        <p:nvPr/>
+      </p:nvGrpSpPr>
+      <p:grpSpPr>
+        <a:xfrm>
+          <a:off x="0" y="0"/>
+          <a:ext cx="0" cy="0"/>
+          <a:chOff x="0" y="0"/>
+          <a:chExt cx="0" cy="0"/>
+        </a:xfrm>
+      </p:grpSpPr>
+      <p:sp>
+        <p:nvSpPr>
+          <p:cNvPr id="2" name="Slide Image Placeholder 1"/>
+          <p:cNvSpPr>
+            <a:spLocks noGrp="1" noRot="1" noChangeAspect="1"/>
+          </p:cNvSpPr>
+          <p:nvPr>
+            <p:ph type="sldImg"/>
+          </p:nvPr>
+        </p:nvSpPr>
+        <p:spPr/>
+      </p:sp>
+      <p:sp>
+        <p:nvSpPr>
+          <p:cNvPr id="3" name="Notes Placeholder 2"/>
+          <p:cNvSpPr>
+            <a:spLocks noGrp="1"/>
+          </p:cNvSpPr>
+          <p:nvPr>
+            <p:ph type="body" idx="1"/>
+          </p:nvPr>
+        </p:nvSpPr>
+        <p:spPr/>
+        <p:txBody>
+          <a:bodyPr/>
+          <a:lstStyle/>
+          <a:p>
+            <a:r>
+              <a:rPr lang="en-US" dirty="0"/>
+              <a:t/>
+            </a:r>
+            <a:endParaRPr lang="en-US" dirty="0"/>
+          </a:p>
+        </p:txBody>
+      </p:sp>
+      <p:sp>
+        <p:nvSpPr>
+          <p:cNvPr id="4" name="Slide Number Placeholder 3"/>
+          <p:cNvSpPr>
+            <a:spLocks noGrp="1"/>
+          </p:cNvSpPr>
+          <p:nvPr>
+            <p:ph type="sldNum" sz="quarter" idx="10"/>
+          </p:nvPr>
+        </p:nvSpPr>
+        <p:spPr/>
+        <p:txBody>
+          <a:bodyPr/>
+          <a:lstStyle/>
+          <a:p>
+            <a:fld id="{F7021451-1387-4CA6-816F-3879F97B5CBC}" type="slidenum">
+              <a:rPr lang="en-US"/>
+              <a:t>11</a:t>
+            </a:fld>
+            <a:endParaRPr lang="en-US"/>
+          </a:p>
+        </p:txBody>
+      </p:sp>
+    </p:spTree>
+    <p:extLst>
+      <p:ext uri="{BB962C8B-B14F-4D97-AF65-F5344CB8AC3E}">
+        <p14:creationId xmlns:p14="http://schemas.microsoft.com/office/powerpoint/2010/main" val="1024086991"/>
+      </p:ext>
+    </p:extLst>
+  </p:cSld>
+  <p:clrMapOvr>
+    <a:masterClrMapping/>
+  </p:clrMapOvr>
+</p:notes>
+</file>
+
+<file path=ppt/notesSlides/notesSlide12.xml><?xml version="1.0" encoding="utf-8"?>
+<p:notes xmlns:a="http://schemas.openxmlformats.org/drawingml/2006/main" xmlns:r="http://schemas.openxmlformats.org/officeDocument/2006/relationships" xmlns:p="http://schemas.openxmlformats.org/presentationml/2006/main">
+  <p:cSld>
+    <p:spTree>
+      <p:nvGrpSpPr>
+        <p:cNvPr id="1" name=""/>
+        <p:cNvGrpSpPr/>
+        <p:nvPr/>
+      </p:nvGrpSpPr>
+      <p:grpSpPr>
+        <a:xfrm>
+          <a:off x="0" y="0"/>
+          <a:ext cx="0" cy="0"/>
+          <a:chOff x="0" y="0"/>
+          <a:chExt cx="0" cy="0"/>
+        </a:xfrm>
+      </p:grpSpPr>
+      <p:sp>
+        <p:nvSpPr>
+          <p:cNvPr id="2" name="Slide Image Placeholder 1"/>
+          <p:cNvSpPr>
+            <a:spLocks noGrp="1" noRot="1" noChangeAspect="1"/>
+          </p:cNvSpPr>
+          <p:nvPr>
+            <p:ph type="sldImg"/>
+          </p:nvPr>
+        </p:nvSpPr>
+        <p:spPr/>
+      </p:sp>
+      <p:sp>
+        <p:nvSpPr>
+          <p:cNvPr id="3" name="Notes Placeholder 2"/>
+          <p:cNvSpPr>
+            <a:spLocks noGrp="1"/>
+          </p:cNvSpPr>
+          <p:nvPr>
+            <p:ph type="body" idx="1"/>
+          </p:nvPr>
+        </p:nvSpPr>
+        <p:spPr/>
+        <p:txBody>
+          <a:bodyPr/>
+          <a:lstStyle/>
+          <a:p>
+            <a:r>
+              <a:rPr lang="en-US" dirty="0"/>
+              <a:t/>
+            </a:r>
+            <a:endParaRPr lang="en-US" dirty="0"/>
+          </a:p>
+        </p:txBody>
+      </p:sp>
+      <p:sp>
+        <p:nvSpPr>
+          <p:cNvPr id="4" name="Slide Number Placeholder 3"/>
+          <p:cNvSpPr>
+            <a:spLocks noGrp="1"/>
+          </p:cNvSpPr>
+          <p:nvPr>
+            <p:ph type="sldNum" sz="quarter" idx="10"/>
+          </p:nvPr>
+        </p:nvSpPr>
+        <p:spPr/>
+        <p:txBody>
+          <a:bodyPr/>
+          <a:lstStyle/>
+          <a:p>
+            <a:fld id="{F7021451-1387-4CA6-816F-3879F97B5CBC}" type="slidenum">
+              <a:rPr lang="en-US"/>
+              <a:t>12</a:t>
             </a:fld>
             <a:endParaRPr lang="en-US"/>
           </a:p>
@@ -1985,7 +2163,7 @@
                 <a:ea typeface="Noto Sans" pitchFamily="34" charset="-122"/>
                 <a:cs typeface="Noto Sans" pitchFamily="34" charset="-120"/>
               </a:rPr>
-              <a:t>PHẦN 4 — SƠ ĐỒ PHÂN CHIA TRÁCH NHIỆM</a:t>
+              <a:t>PHẦN 2 — ĐỊNH HƯỚNG CONCEPT SẢN PHẨM</a:t>
             </a:r>
             <a:endParaRPr lang="en-US" sz="1100" dirty="0"/>
           </a:p>
@@ -2024,7 +2202,7 @@
                 <a:ea typeface="Noto Sans" pitchFamily="34" charset="-122"/>
                 <a:cs typeface="Noto Sans" pitchFamily="34" charset="-120"/>
               </a:rPr>
-              <a:t>Phân chia trách nhiệm theo 4 bộ phận</a:t>
+              <a:t>Concept 3: Gia sư AI 1:1 (MỚI)</a:t>
             </a:r>
             <a:endParaRPr lang="en-US" sz="2600" dirty="0"/>
           </a:p>
@@ -2074,9 +2252,1979 @@
           </a:prstGeom>
         </p:spPr>
       </p:pic>
+      <p:sp>
+        <p:nvSpPr>
+          <p:cNvPr id="6" name="Text 3"/>
+          <p:cNvSpPr/>
+          <p:nvPr/>
+        </p:nvSpPr>
+        <p:spPr>
+          <a:xfrm>
+            <a:off x="502920" y="1280160"/>
+            <a:ext cx="11183112" cy="384048"/>
+          </a:xfrm>
+          <a:prstGeom prst="rect">
+            <a:avLst/>
+          </a:prstGeom>
+          <a:noFill/>
+          <a:ln/>
+        </p:spPr>
+        <p:txBody>
+          <a:bodyPr wrap="square" rtlCol="0" anchor="ctr"/>
+          <a:lstStyle/>
+          <a:p>
+            <a:pPr indent="0" marL="0">
+              <a:buNone/>
+            </a:pPr>
+            <a:r>
+              <a:rPr lang="en-US" sz="1050" i="1" dirty="0">
+                <a:solidFill>
+                  <a:srgbClr val="5B6472"/>
+                </a:solidFill>
+                <a:latin typeface="Noto Sans" pitchFamily="34" charset="0"/>
+                <a:ea typeface="Noto Sans" pitchFamily="34" charset="-122"/>
+                <a:cs typeface="Noto Sans" pitchFamily="34" charset="-120"/>
+              </a:rPr>
+              <a:t>AI là gia sư chính, không chỉ hỗ trợ lớp học như Concept 1/Concept 2.</a:t>
+            </a:r>
+            <a:endParaRPr lang="en-US" sz="1050" dirty="0"/>
+          </a:p>
+        </p:txBody>
+      </p:sp>
+      <p:sp>
+        <p:nvSpPr>
+          <p:cNvPr id="7" name="Shape 4"/>
+          <p:cNvSpPr/>
+          <p:nvPr/>
+        </p:nvSpPr>
+        <p:spPr>
+          <a:xfrm>
+            <a:off x="502920" y="1664208"/>
+            <a:ext cx="73152" cy="1417320"/>
+          </a:xfrm>
+          <a:prstGeom prst="rect">
+            <a:avLst/>
+          </a:prstGeom>
+          <a:solidFill>
+            <a:srgbClr val="004671"/>
+          </a:solidFill>
+          <a:ln/>
+        </p:spPr>
+      </p:sp>
+      <p:sp>
+        <p:nvSpPr>
+          <p:cNvPr id="8" name="Text 5"/>
+          <p:cNvSpPr/>
+          <p:nvPr/>
+        </p:nvSpPr>
+        <p:spPr>
+          <a:xfrm>
+            <a:off x="731520" y="1664208"/>
+            <a:ext cx="10954512" cy="1463040"/>
+          </a:xfrm>
+          <a:prstGeom prst="rect">
+            <a:avLst/>
+          </a:prstGeom>
+          <a:noFill/>
+          <a:ln/>
+        </p:spPr>
+        <p:txBody>
+          <a:bodyPr wrap="square" rtlCol="0" anchor="t"/>
+          <a:lstStyle/>
+          <a:p>
+            <a:pPr indent="0" marL="0">
+              <a:lnSpc>
+                <a:spcPct val="102000"/>
+              </a:lnSpc>
+              <a:spcAft>
+                <a:spcPts val="200"/>
+              </a:spcAft>
+              <a:buNone/>
+            </a:pPr>
+            <a:r>
+              <a:rPr lang="en-US" sz="1300" b="1" dirty="0">
+                <a:solidFill>
+                  <a:srgbClr val="004671"/>
+                </a:solidFill>
+                <a:latin typeface="Noto Sans" pitchFamily="34" charset="0"/>
+                <a:ea typeface="Noto Sans" pitchFamily="34" charset="-122"/>
+                <a:cs typeface="Noto Sans" pitchFamily="34" charset="-120"/>
+              </a:rPr>
+              <a:t>Option 3.1 — AI nhân hoá “giáo viên ngôi sao”</a:t>
+            </a:r>
+            <a:endParaRPr lang="en-US" sz="1300" dirty="0"/>
+          </a:p>
+          <a:p>
+            <a:pPr marL="342900" indent="-342900">
+              <a:lnSpc>
+                <a:spcPct val="102000"/>
+              </a:lnSpc>
+              <a:spcAft>
+                <a:spcPts val="300"/>
+              </a:spcAft>
+              <a:buSzPct val="100000"/>
+              <a:buChar char="•"/>
+            </a:pPr>
+            <a:r>
+              <a:rPr lang="en-US" sz="1100" dirty="0">
+                <a:solidFill>
+                  <a:srgbClr val="22333F"/>
+                </a:solidFill>
+                <a:latin typeface="Noto Sans" pitchFamily="34" charset="0"/>
+                <a:ea typeface="Noto Sans" pitchFamily="34" charset="-122"/>
+                <a:cs typeface="Noto Sans" pitchFamily="34" charset="-120"/>
+              </a:rPr>
+              <a:t>Concept: AI Tutor dạy học mang giọng nói/phong cách một GV ngôi sao + AI Practice + AI Speak + Edupia Club + GVCN</a:t>
+            </a:r>
+            <a:endParaRPr lang="en-US" sz="1300" dirty="0"/>
+          </a:p>
+          <a:p>
+            <a:pPr marL="342900" indent="-342900">
+              <a:lnSpc>
+                <a:spcPct val="102000"/>
+              </a:lnSpc>
+              <a:spcAft>
+                <a:spcPts val="300"/>
+              </a:spcAft>
+              <a:buSzPct val="100000"/>
+              <a:buChar char="•"/>
+            </a:pPr>
+            <a:r>
+              <a:rPr lang="en-US" sz="1100" dirty="0">
+                <a:solidFill>
+                  <a:srgbClr val="22333F"/>
+                </a:solidFill>
+                <a:latin typeface="Noto Sans" pitchFamily="34" charset="0"/>
+                <a:ea typeface="Noto Sans" pitchFamily="34" charset="-122"/>
+                <a:cs typeface="Noto Sans" pitchFamily="34" charset="-120"/>
+              </a:rPr>
+              <a:t>Tiền lệ thị trường: Không tìm được sản phẩm nào đúng cấu hình (K-12 + AI-Tutor + giá đại trà)</a:t>
+            </a:r>
+            <a:endParaRPr lang="en-US" sz="1300" dirty="0"/>
+          </a:p>
+        </p:txBody>
+      </p:sp>
+      <p:sp>
+        <p:nvSpPr>
+          <p:cNvPr id="9" name="Shape 6"/>
+          <p:cNvSpPr/>
+          <p:nvPr/>
+        </p:nvSpPr>
+        <p:spPr>
+          <a:xfrm>
+            <a:off x="502920" y="3310128"/>
+            <a:ext cx="73152" cy="1417320"/>
+          </a:xfrm>
+          <a:prstGeom prst="rect">
+            <a:avLst/>
+          </a:prstGeom>
+          <a:solidFill>
+            <a:srgbClr val="3B81B1"/>
+          </a:solidFill>
+          <a:ln/>
+        </p:spPr>
+      </p:sp>
+      <p:sp>
+        <p:nvSpPr>
+          <p:cNvPr id="10" name="Text 7"/>
+          <p:cNvSpPr/>
+          <p:nvPr/>
+        </p:nvSpPr>
+        <p:spPr>
+          <a:xfrm>
+            <a:off x="731520" y="3310128"/>
+            <a:ext cx="10954512" cy="1463040"/>
+          </a:xfrm>
+          <a:prstGeom prst="rect">
+            <a:avLst/>
+          </a:prstGeom>
+          <a:noFill/>
+          <a:ln/>
+        </p:spPr>
+        <p:txBody>
+          <a:bodyPr wrap="square" rtlCol="0" anchor="t"/>
+          <a:lstStyle/>
+          <a:p>
+            <a:pPr indent="0" marL="0">
+              <a:lnSpc>
+                <a:spcPct val="102000"/>
+              </a:lnSpc>
+              <a:spcAft>
+                <a:spcPts val="200"/>
+              </a:spcAft>
+              <a:buNone/>
+            </a:pPr>
+            <a:r>
+              <a:rPr lang="en-US" sz="1300" b="1" dirty="0">
+                <a:solidFill>
+                  <a:srgbClr val="004671"/>
+                </a:solidFill>
+                <a:latin typeface="Noto Sans" pitchFamily="34" charset="0"/>
+                <a:ea typeface="Noto Sans" pitchFamily="34" charset="-122"/>
+                <a:cs typeface="Noto Sans" pitchFamily="34" charset="-120"/>
+              </a:rPr>
+              <a:t>Option 3.2 — AI tích hợp mascot + gamification</a:t>
+            </a:r>
+            <a:endParaRPr lang="en-US" sz="1300" dirty="0"/>
+          </a:p>
+          <a:p>
+            <a:pPr marL="342900" indent="-342900">
+              <a:lnSpc>
+                <a:spcPct val="102000"/>
+              </a:lnSpc>
+              <a:spcAft>
+                <a:spcPts val="300"/>
+              </a:spcAft>
+              <a:buSzPct val="100000"/>
+              <a:buChar char="•"/>
+            </a:pPr>
+            <a:r>
+              <a:rPr lang="en-US" sz="1100" dirty="0">
+                <a:solidFill>
+                  <a:srgbClr val="22333F"/>
+                </a:solidFill>
+                <a:latin typeface="Noto Sans" pitchFamily="34" charset="0"/>
+                <a:ea typeface="Noto Sans" pitchFamily="34" charset="-122"/>
+                <a:cs typeface="Noto Sans" pitchFamily="34" charset="-120"/>
+              </a:rPr>
+              <a:t>Concept: AI nhúng trong nhân vật mascot, gắn cơ chế trò chơi hoá — mascot phản ánh dữ liệu học và tương tác với học sinh</a:t>
+            </a:r>
+            <a:endParaRPr lang="en-US" sz="1300" dirty="0"/>
+          </a:p>
+          <a:p>
+            <a:pPr marL="342900" indent="-342900">
+              <a:lnSpc>
+                <a:spcPct val="102000"/>
+              </a:lnSpc>
+              <a:spcAft>
+                <a:spcPts val="300"/>
+              </a:spcAft>
+              <a:buSzPct val="100000"/>
+              <a:buChar char="•"/>
+            </a:pPr>
+            <a:r>
+              <a:rPr lang="en-US" sz="1100" dirty="0">
+                <a:solidFill>
+                  <a:srgbClr val="22333F"/>
+                </a:solidFill>
+                <a:latin typeface="Noto Sans" pitchFamily="34" charset="0"/>
+                <a:ea typeface="Noto Sans" pitchFamily="34" charset="-122"/>
+                <a:cs typeface="Noto Sans" pitchFamily="34" charset="-120"/>
+              </a:rPr>
+              <a:t>Tiền lệ thị trường: Có — Duolingo, Prodigy</a:t>
+            </a:r>
+            <a:endParaRPr lang="en-US" sz="1300" dirty="0"/>
+          </a:p>
+        </p:txBody>
+      </p:sp>
+      <p:sp>
+        <p:nvSpPr>
+          <p:cNvPr id="11" name="Shape 8"/>
+          <p:cNvSpPr/>
+          <p:nvPr/>
+        </p:nvSpPr>
+        <p:spPr>
+          <a:xfrm>
+            <a:off x="502920" y="5623560"/>
+            <a:ext cx="11183112" cy="621792"/>
+          </a:xfrm>
+          <a:prstGeom prst="rect">
+            <a:avLst/>
+          </a:prstGeom>
+          <a:solidFill>
+            <a:srgbClr val="004671"/>
+          </a:solidFill>
+          <a:ln/>
+        </p:spPr>
+      </p:sp>
+      <p:sp>
+        <p:nvSpPr>
+          <p:cNvPr id="12" name="Text 9"/>
+          <p:cNvSpPr/>
+          <p:nvPr/>
+        </p:nvSpPr>
+        <p:spPr>
+          <a:xfrm>
+            <a:off x="731520" y="5623560"/>
+            <a:ext cx="10725912" cy="621792"/>
+          </a:xfrm>
+          <a:prstGeom prst="rect">
+            <a:avLst/>
+          </a:prstGeom>
+          <a:noFill/>
+          <a:ln/>
+        </p:spPr>
+        <p:txBody>
+          <a:bodyPr wrap="square" rtlCol="0" anchor="ctr"/>
+          <a:lstStyle/>
+          <a:p>
+            <a:pPr indent="0" marL="0">
+              <a:buNone/>
+            </a:pPr>
+            <a:r>
+              <a:rPr lang="en-US" sz="1150" i="1" dirty="0">
+                <a:solidFill>
+                  <a:srgbClr val="FFFFFF"/>
+                </a:solidFill>
+                <a:latin typeface="Noto Sans" pitchFamily="34" charset="0"/>
+                <a:ea typeface="Noto Sans" pitchFamily="34" charset="-122"/>
+                <a:cs typeface="Noto Sans" pitchFamily="34" charset="-120"/>
+              </a:rPr>
+              <a:t>USP: “Gia sư AI 1:1 luôn sẵn sàng, theo dõi và đồng hành cùng con trong quá trình học — mẫu hình ‘AI song hành’ đã vận hành thật ở quy mô lớn tại thị trường khác, lần đầu áp dụng tại Việt Nam.”</a:t>
+            </a:r>
+            <a:endParaRPr lang="en-US" sz="1150" dirty="0"/>
+          </a:p>
+        </p:txBody>
+      </p:sp>
+      <p:pic>
+        <p:nvPicPr>
+          <p:cNvPr id="13" name="Image 1" descr="C:\Users\landa\AppData\Local\Temp\claude\c--Users-landa--Personal--D---n-AI-Class-new\8a85e8a7-bdeb-42d6-9168-79c96b849bd1\scratchpad\pptx-gen\logo-icon-only.png">    </p:cNvPr>
+          <p:cNvPicPr>
+            <a:picLocks noChangeAspect="1"/>
+          </p:cNvPicPr>
+          <p:nvPr/>
+        </p:nvPicPr>
+        <p:blipFill>
+          <a:blip r:embed="rId2"/>
+          <a:stretch>
+            <a:fillRect/>
+          </a:stretch>
+        </p:blipFill>
+        <p:spPr>
+          <a:xfrm>
+            <a:off x="502920" y="6473952"/>
+            <a:ext cx="237744" cy="237744"/>
+          </a:xfrm>
+          <a:prstGeom prst="rect">
+            <a:avLst/>
+          </a:prstGeom>
+        </p:spPr>
+      </p:pic>
+      <p:sp>
+        <p:nvSpPr>
+          <p:cNvPr id="14" name="Text 10"/>
+          <p:cNvSpPr/>
+          <p:nvPr/>
+        </p:nvSpPr>
+        <p:spPr>
+          <a:xfrm>
+            <a:off x="795528" y="6473952"/>
+            <a:ext cx="3657600" cy="256032"/>
+          </a:xfrm>
+          <a:prstGeom prst="rect">
+            <a:avLst/>
+          </a:prstGeom>
+          <a:noFill/>
+          <a:ln/>
+        </p:spPr>
+        <p:txBody>
+          <a:bodyPr wrap="square" rtlCol="0" anchor="ctr"/>
+          <a:lstStyle/>
+          <a:p>
+            <a:pPr indent="0" marL="0">
+              <a:buNone/>
+            </a:pPr>
+            <a:r>
+              <a:rPr lang="en-US" sz="800" spc="100" kern="0" dirty="0">
+                <a:solidFill>
+                  <a:srgbClr val="5B6472"/>
+                </a:solidFill>
+                <a:latin typeface="Noto Sans" pitchFamily="34" charset="0"/>
+                <a:ea typeface="Noto Sans" pitchFamily="34" charset="-122"/>
+                <a:cs typeface="Noto Sans" pitchFamily="34" charset="-120"/>
+              </a:rPr>
+              <a:t>EDUPIA  AI CLASS NEW</a:t>
+            </a:r>
+            <a:endParaRPr lang="en-US" sz="800" dirty="0"/>
+          </a:p>
+        </p:txBody>
+      </p:sp>
+      <p:sp>
+        <p:nvSpPr>
+          <p:cNvPr id="15" name="Text 11"/>
+          <p:cNvSpPr/>
+          <p:nvPr/>
+        </p:nvSpPr>
+        <p:spPr>
+          <a:xfrm>
+            <a:off x="10789920" y="6473952"/>
+            <a:ext cx="914400" cy="256032"/>
+          </a:xfrm>
+          <a:prstGeom prst="rect">
+            <a:avLst/>
+          </a:prstGeom>
+          <a:noFill/>
+          <a:ln/>
+        </p:spPr>
+        <p:txBody>
+          <a:bodyPr wrap="square" rtlCol="0" anchor="ctr"/>
+          <a:lstStyle/>
+          <a:p>
+            <a:pPr algn="r" indent="0" marL="0">
+              <a:buNone/>
+            </a:pPr>
+            <a:r>
+              <a:rPr lang="en-US" sz="850" dirty="0">
+                <a:solidFill>
+                  <a:srgbClr val="5B6472"/>
+                </a:solidFill>
+                <a:latin typeface="Noto Sans" pitchFamily="34" charset="0"/>
+                <a:ea typeface="Noto Sans" pitchFamily="34" charset="-122"/>
+                <a:cs typeface="Noto Sans" pitchFamily="34" charset="-120"/>
+              </a:rPr>
+              <a:t>9 / 11</a:t>
+            </a:r>
+            <a:endParaRPr lang="en-US" sz="850" dirty="0"/>
+          </a:p>
+        </p:txBody>
+      </p:sp>
+    </p:spTree>
+  </p:cSld>
+  <p:clrMapOvr>
+    <a:masterClrMapping/>
+  </p:clrMapOvr>
+</p:sld>
+</file>
+
+<file path=ppt/slides/slide11.xml><?xml version="1.0" encoding="utf-8"?>
+<p:sld xmlns:a="http://schemas.openxmlformats.org/drawingml/2006/main" xmlns:r="http://schemas.openxmlformats.org/officeDocument/2006/relationships" xmlns:p="http://schemas.openxmlformats.org/presentationml/2006/main">
+  <p:cSld name="Slide 11">
+    <p:bg>
+      <p:bgPr>
+        <a:solidFill>
+          <a:srgbClr val="FFFFFF"/>
+        </a:solidFill>
+      </p:bgPr>
+    </p:bg>
+    <p:spTree>
+      <p:nvGrpSpPr>
+        <p:cNvPr id="1" name=""/>
+        <p:cNvGrpSpPr/>
+        <p:nvPr/>
+      </p:nvGrpSpPr>
+      <p:grpSpPr>
+        <a:xfrm>
+          <a:off x="0" y="0"/>
+          <a:ext cx="0" cy="0"/>
+          <a:chOff x="0" y="0"/>
+          <a:chExt cx="0" cy="0"/>
+        </a:xfrm>
+      </p:grpSpPr>
+      <p:sp>
+        <p:nvSpPr>
+          <p:cNvPr id="2" name="Text 0"/>
+          <p:cNvSpPr/>
+          <p:nvPr/>
+        </p:nvSpPr>
+        <p:spPr>
+          <a:xfrm>
+            <a:off x="502920" y="292608"/>
+            <a:ext cx="11183112" cy="274320"/>
+          </a:xfrm>
+          <a:prstGeom prst="rect">
+            <a:avLst/>
+          </a:prstGeom>
+          <a:noFill/>
+          <a:ln/>
+        </p:spPr>
+        <p:txBody>
+          <a:bodyPr wrap="square" rtlCol="0" anchor="ctr"/>
+          <a:lstStyle/>
+          <a:p>
+            <a:pPr indent="0" marL="0">
+              <a:buNone/>
+            </a:pPr>
+            <a:r>
+              <a:rPr lang="en-US" sz="1100" b="1" spc="120" kern="0" dirty="0">
+                <a:solidFill>
+                  <a:srgbClr val="3B81B1"/>
+                </a:solidFill>
+                <a:latin typeface="Noto Sans" pitchFamily="34" charset="0"/>
+                <a:ea typeface="Noto Sans" pitchFamily="34" charset="-122"/>
+                <a:cs typeface="Noto Sans" pitchFamily="34" charset="-120"/>
+              </a:rPr>
+              <a:t>PHẦN 3 — KẾ HOẠCH TRIỂN KHAI</a:t>
+            </a:r>
+            <a:endParaRPr lang="en-US" sz="1100" dirty="0"/>
+          </a:p>
+        </p:txBody>
+      </p:sp>
+      <p:sp>
+        <p:nvSpPr>
+          <p:cNvPr id="3" name="Text 1"/>
+          <p:cNvSpPr/>
+          <p:nvPr/>
+        </p:nvSpPr>
+        <p:spPr>
+          <a:xfrm>
+            <a:off x="502920" y="548640"/>
+            <a:ext cx="10085832" cy="640080"/>
+          </a:xfrm>
+          <a:prstGeom prst="rect">
+            <a:avLst/>
+          </a:prstGeom>
+          <a:noFill/>
+          <a:ln/>
+        </p:spPr>
+        <p:txBody>
+          <a:bodyPr wrap="square" rtlCol="0" anchor="ctr"/>
+          <a:lstStyle/>
+          <a:p>
+            <a:pPr indent="0" marL="0">
+              <a:buNone/>
+            </a:pPr>
+            <a:r>
+              <a:rPr lang="en-US" sz="2600" b="1" dirty="0">
+                <a:solidFill>
+                  <a:srgbClr val="004671"/>
+                </a:solidFill>
+                <a:latin typeface="Noto Sans" pitchFamily="34" charset="0"/>
+                <a:ea typeface="Noto Sans" pitchFamily="34" charset="-122"/>
+                <a:cs typeface="Noto Sans" pitchFamily="34" charset="-120"/>
+              </a:rPr>
+              <a:t>Lộ trình triển khai (2026 - 2027)</a:t>
+            </a:r>
+            <a:endParaRPr lang="en-US" sz="2600" dirty="0"/>
+          </a:p>
+        </p:txBody>
+      </p:sp>
+      <p:sp>
+        <p:nvSpPr>
+          <p:cNvPr id="4" name="Shape 2"/>
+          <p:cNvSpPr/>
+          <p:nvPr/>
+        </p:nvSpPr>
+        <p:spPr>
+          <a:xfrm>
+            <a:off x="502920" y="1170432"/>
+            <a:ext cx="777240" cy="45720"/>
+          </a:xfrm>
+          <a:prstGeom prst="rect">
+            <a:avLst/>
+          </a:prstGeom>
+          <a:solidFill>
+            <a:srgbClr val="A5BE00"/>
+          </a:solidFill>
+          <a:ln/>
+        </p:spPr>
+      </p:sp>
+      <p:pic>
+        <p:nvPicPr>
+          <p:cNvPr id="5" name="Image 0" descr="C:\Users\landa\AppData\Local\Temp\claude\c--Users-landa--Personal--D---n-AI-Class-new\8a85e8a7-bdeb-42d6-9168-79c96b849bd1\scratchpad\pptx-gen\logo-icon-only.png">    </p:cNvPr>
+          <p:cNvPicPr>
+            <a:picLocks noChangeAspect="1"/>
+          </p:cNvPicPr>
+          <p:nvPr/>
+        </p:nvPicPr>
+        <p:blipFill>
+          <a:blip r:embed="rId1"/>
+          <a:stretch>
+            <a:fillRect/>
+          </a:stretch>
+        </p:blipFill>
+        <p:spPr>
+          <a:xfrm>
+            <a:off x="11292840" y="365760"/>
+            <a:ext cx="502920" cy="502920"/>
+          </a:xfrm>
+          <a:prstGeom prst="rect">
+            <a:avLst/>
+          </a:prstGeom>
+        </p:spPr>
+      </p:pic>
       <p:graphicFrame>
         <p:nvGraphicFramePr>
-          <p:cNvPr id="11" name="Table 0"/>
+          <p:cNvPr id="12" name="Table 0"/>
+          <p:cNvGraphicFramePr>
+            <a:graphicFrameLocks noGrp="1"/>
+          </p:cNvGraphicFramePr>
+          <p:nvPr>
+            <p:extLst>
+              <p:ext uri="{D42A27DB-BD31-4B8C-83A1-F6EECF244321}">
+                <p14:modId xmlns:p14="http://schemas.microsoft.com/office/powerpoint/2010/main" val="1579011935"/>
+              </p:ext>
+            </p:extLst>
+          </p:nvPr>
+        </p:nvGraphicFramePr>
+        <p:xfrm>
+          <a:off x="502920" y="1371600"/>
+          <a:ext cx="11183112" cy="5029200"/>
+        </p:xfrm>
+        <a:graphic>
+          <a:graphicData uri="http://schemas.openxmlformats.org/drawingml/2006/table">
+            <a:tbl>
+              <a:tblPr/>
+              <a:tblGrid>
+                <a:gridCol w="2834640"/>
+                <a:gridCol w="8348472"/>
+              </a:tblGrid>
+              <a:tr h="628650">
+                <a:tc>
+                  <a:txBody>
+                    <a:bodyPr/>
+                    <a:lstStyle/>
+                    <a:p>
+                      <a:pPr indent="0" marL="0">
+                        <a:buNone/>
+                      </a:pPr>
+                      <a:r>
+                        <a:rPr lang="en-US" sz="1200" b="1" dirty="0">
+                          <a:solidFill>
+                            <a:srgbClr val="FFFFFF"/>
+                          </a:solidFill>
+                          <a:latin typeface="Noto Sans" pitchFamily="34" charset="0"/>
+                          <a:ea typeface="Noto Sans" pitchFamily="34" charset="-122"/>
+                          <a:cs typeface="Noto Sans" pitchFamily="34" charset="-120"/>
+                        </a:rPr>
+                        <a:t>Mốc</a:t>
+                      </a:r>
+                      <a:endParaRPr lang="en-US" sz="1200" dirty="0">
+                        <a:latin typeface="Noto Sans" charset="0"/>
+                        <a:ea typeface="Noto Sans" charset="0"/>
+                        <a:cs typeface="Noto Sans" charset="0"/>
+                      </a:endParaRPr>
+                    </a:p>
+                  </a:txBody>
+                  <a:tcPr marL="101600" marR="101600" marT="63500" marB="63500" anchor="t">
+                    <a:lnL w="9525" cap="flat" cmpd="sng" algn="ctr">
+                      <a:solidFill>
+                        <a:srgbClr val="DCE7EA"/>
+                      </a:solidFill>
+                      <a:prstDash val="solid"/>
+                      <a:round/>
+                      <a:headEnd type="none" w="med" len="med"/>
+                      <a:tailEnd type="none" w="med" len="med"/>
+                    </a:lnL>
+                    <a:lnR w="9525" cap="flat" cmpd="sng" algn="ctr">
+                      <a:solidFill>
+                        <a:srgbClr val="DCE7EA"/>
+                      </a:solidFill>
+                      <a:prstDash val="solid"/>
+                      <a:round/>
+                      <a:headEnd type="none" w="med" len="med"/>
+                      <a:tailEnd type="none" w="med" len="med"/>
+                    </a:lnR>
+                    <a:lnT w="9525" cap="flat" cmpd="sng" algn="ctr">
+                      <a:solidFill>
+                        <a:srgbClr val="DCE7EA"/>
+                      </a:solidFill>
+                      <a:prstDash val="solid"/>
+                      <a:round/>
+                      <a:headEnd type="none" w="med" len="med"/>
+                      <a:tailEnd type="none" w="med" len="med"/>
+                    </a:lnT>
+                    <a:lnB w="9525" cap="flat" cmpd="sng" algn="ctr">
+                      <a:solidFill>
+                        <a:srgbClr val="DCE7EA"/>
+                      </a:solidFill>
+                      <a:prstDash val="solid"/>
+                      <a:round/>
+                      <a:headEnd type="none" w="med" len="med"/>
+                      <a:tailEnd type="none" w="med" len="med"/>
+                    </a:lnB>
+                    <a:solidFill>
+                      <a:srgbClr val="004671"/>
+                    </a:solidFill>
+                  </a:tcPr>
+                </a:tc>
+                <a:tc>
+                  <a:txBody>
+                    <a:bodyPr/>
+                    <a:lstStyle/>
+                    <a:p>
+                      <a:pPr indent="0" marL="0">
+                        <a:buNone/>
+                      </a:pPr>
+                      <a:r>
+                        <a:rPr lang="en-US" sz="1200" b="1" dirty="0">
+                          <a:solidFill>
+                            <a:srgbClr val="FFFFFF"/>
+                          </a:solidFill>
+                          <a:latin typeface="Noto Sans" pitchFamily="34" charset="0"/>
+                          <a:ea typeface="Noto Sans" pitchFamily="34" charset="-122"/>
+                          <a:cs typeface="Noto Sans" pitchFamily="34" charset="-120"/>
+                        </a:rPr>
+                        <a:t>Nội dung</a:t>
+                      </a:r>
+                      <a:endParaRPr lang="en-US" sz="1200" dirty="0">
+                        <a:latin typeface="Noto Sans" charset="0"/>
+                        <a:ea typeface="Noto Sans" charset="0"/>
+                        <a:cs typeface="Noto Sans" charset="0"/>
+                      </a:endParaRPr>
+                    </a:p>
+                  </a:txBody>
+                  <a:tcPr marL="101600" marR="101600" marT="63500" marB="63500" anchor="t">
+                    <a:lnL w="9525" cap="flat" cmpd="sng" algn="ctr">
+                      <a:solidFill>
+                        <a:srgbClr val="DCE7EA"/>
+                      </a:solidFill>
+                      <a:prstDash val="solid"/>
+                      <a:round/>
+                      <a:headEnd type="none" w="med" len="med"/>
+                      <a:tailEnd type="none" w="med" len="med"/>
+                    </a:lnL>
+                    <a:lnR w="9525" cap="flat" cmpd="sng" algn="ctr">
+                      <a:solidFill>
+                        <a:srgbClr val="DCE7EA"/>
+                      </a:solidFill>
+                      <a:prstDash val="solid"/>
+                      <a:round/>
+                      <a:headEnd type="none" w="med" len="med"/>
+                      <a:tailEnd type="none" w="med" len="med"/>
+                    </a:lnR>
+                    <a:lnT w="9525" cap="flat" cmpd="sng" algn="ctr">
+                      <a:solidFill>
+                        <a:srgbClr val="DCE7EA"/>
+                      </a:solidFill>
+                      <a:prstDash val="solid"/>
+                      <a:round/>
+                      <a:headEnd type="none" w="med" len="med"/>
+                      <a:tailEnd type="none" w="med" len="med"/>
+                    </a:lnT>
+                    <a:lnB w="9525" cap="flat" cmpd="sng" algn="ctr">
+                      <a:solidFill>
+                        <a:srgbClr val="DCE7EA"/>
+                      </a:solidFill>
+                      <a:prstDash val="solid"/>
+                      <a:round/>
+                      <a:headEnd type="none" w="med" len="med"/>
+                      <a:tailEnd type="none" w="med" len="med"/>
+                    </a:lnB>
+                    <a:solidFill>
+                      <a:srgbClr val="004671"/>
+                    </a:solidFill>
+                  </a:tcPr>
+                </a:tc>
+              </a:tr>
+              <a:tr h="628650">
+                <a:tc>
+                  <a:txBody>
+                    <a:bodyPr/>
+                    <a:lstStyle/>
+                    <a:p>
+                      <a:pPr indent="0" marL="0">
+                        <a:buNone/>
+                      </a:pPr>
+                      <a:r>
+                        <a:rPr lang="en-US" sz="1200" b="1" dirty="0">
+                          <a:solidFill>
+                            <a:srgbClr val="004671"/>
+                          </a:solidFill>
+                          <a:latin typeface="Noto Sans" pitchFamily="34" charset="0"/>
+                          <a:ea typeface="Noto Sans" pitchFamily="34" charset="-122"/>
+                          <a:cs typeface="Noto Sans" pitchFamily="34" charset="-120"/>
+                        </a:rPr>
+                        <a:t>Trước 31/08/2026</a:t>
+                      </a:r>
+                      <a:endParaRPr lang="en-US" sz="1200" dirty="0">
+                        <a:latin typeface="Noto Sans" charset="0"/>
+                        <a:ea typeface="Noto Sans" charset="0"/>
+                        <a:cs typeface="Noto Sans" charset="0"/>
+                      </a:endParaRPr>
+                    </a:p>
+                  </a:txBody>
+                  <a:tcPr marL="101600" marR="101600" marT="63500" marB="63500" anchor="t">
+                    <a:lnL w="9525" cap="flat" cmpd="sng" algn="ctr">
+                      <a:solidFill>
+                        <a:srgbClr val="DCE7EA"/>
+                      </a:solidFill>
+                      <a:prstDash val="solid"/>
+                      <a:round/>
+                      <a:headEnd type="none" w="med" len="med"/>
+                      <a:tailEnd type="none" w="med" len="med"/>
+                    </a:lnL>
+                    <a:lnR w="9525" cap="flat" cmpd="sng" algn="ctr">
+                      <a:solidFill>
+                        <a:srgbClr val="DCE7EA"/>
+                      </a:solidFill>
+                      <a:prstDash val="solid"/>
+                      <a:round/>
+                      <a:headEnd type="none" w="med" len="med"/>
+                      <a:tailEnd type="none" w="med" len="med"/>
+                    </a:lnR>
+                    <a:lnT w="9525" cap="flat" cmpd="sng" algn="ctr">
+                      <a:solidFill>
+                        <a:srgbClr val="DCE7EA"/>
+                      </a:solidFill>
+                      <a:prstDash val="solid"/>
+                      <a:round/>
+                      <a:headEnd type="none" w="med" len="med"/>
+                      <a:tailEnd type="none" w="med" len="med"/>
+                    </a:lnT>
+                    <a:lnB w="9525" cap="flat" cmpd="sng" algn="ctr">
+                      <a:solidFill>
+                        <a:srgbClr val="DCE7EA"/>
+                      </a:solidFill>
+                      <a:prstDash val="solid"/>
+                      <a:round/>
+                      <a:headEnd type="none" w="med" len="med"/>
+                      <a:tailEnd type="none" w="med" len="med"/>
+                    </a:lnB>
+                    <a:solidFill>
+                      <a:srgbClr val="FFFFFF"/>
+                    </a:solidFill>
+                  </a:tcPr>
+                </a:tc>
+                <a:tc>
+                  <a:txBody>
+                    <a:bodyPr/>
+                    <a:lstStyle/>
+                    <a:p>
+                      <a:pPr indent="0" marL="0">
+                        <a:buNone/>
+                      </a:pPr>
+                      <a:r>
+                        <a:rPr lang="en-US" sz="1200" dirty="0">
+                          <a:solidFill>
+                            <a:srgbClr val="22333F"/>
+                          </a:solidFill>
+                          <a:latin typeface="Noto Sans" pitchFamily="34" charset="0"/>
+                          <a:ea typeface="Noto Sans" pitchFamily="34" charset="-122"/>
+                          <a:cs typeface="Noto Sans" pitchFamily="34" charset="-120"/>
+                        </a:rPr>
+                        <a:t>Trình bày slide concept trước BOD/team</a:t>
+                      </a:r>
+                      <a:endParaRPr lang="en-US" sz="1200" dirty="0">
+                        <a:latin typeface="Noto Sans" charset="0"/>
+                        <a:ea typeface="Noto Sans" charset="0"/>
+                        <a:cs typeface="Noto Sans" charset="0"/>
+                      </a:endParaRPr>
+                    </a:p>
+                  </a:txBody>
+                  <a:tcPr marL="101600" marR="101600" marT="63500" marB="63500" anchor="t">
+                    <a:lnL w="9525" cap="flat" cmpd="sng" algn="ctr">
+                      <a:solidFill>
+                        <a:srgbClr val="DCE7EA"/>
+                      </a:solidFill>
+                      <a:prstDash val="solid"/>
+                      <a:round/>
+                      <a:headEnd type="none" w="med" len="med"/>
+                      <a:tailEnd type="none" w="med" len="med"/>
+                    </a:lnL>
+                    <a:lnR w="9525" cap="flat" cmpd="sng" algn="ctr">
+                      <a:solidFill>
+                        <a:srgbClr val="DCE7EA"/>
+                      </a:solidFill>
+                      <a:prstDash val="solid"/>
+                      <a:round/>
+                      <a:headEnd type="none" w="med" len="med"/>
+                      <a:tailEnd type="none" w="med" len="med"/>
+                    </a:lnR>
+                    <a:lnT w="9525" cap="flat" cmpd="sng" algn="ctr">
+                      <a:solidFill>
+                        <a:srgbClr val="DCE7EA"/>
+                      </a:solidFill>
+                      <a:prstDash val="solid"/>
+                      <a:round/>
+                      <a:headEnd type="none" w="med" len="med"/>
+                      <a:tailEnd type="none" w="med" len="med"/>
+                    </a:lnT>
+                    <a:lnB w="9525" cap="flat" cmpd="sng" algn="ctr">
+                      <a:solidFill>
+                        <a:srgbClr val="DCE7EA"/>
+                      </a:solidFill>
+                      <a:prstDash val="solid"/>
+                      <a:round/>
+                      <a:headEnd type="none" w="med" len="med"/>
+                      <a:tailEnd type="none" w="med" len="med"/>
+                    </a:lnB>
+                    <a:solidFill>
+                      <a:srgbClr val="FFFFFF"/>
+                    </a:solidFill>
+                  </a:tcPr>
+                </a:tc>
+              </a:tr>
+              <a:tr h="628650">
+                <a:tc>
+                  <a:txBody>
+                    <a:bodyPr/>
+                    <a:lstStyle/>
+                    <a:p>
+                      <a:pPr indent="0" marL="0">
+                        <a:buNone/>
+                      </a:pPr>
+                      <a:r>
+                        <a:rPr lang="en-US" sz="1200" b="1" dirty="0">
+                          <a:solidFill>
+                            <a:srgbClr val="004671"/>
+                          </a:solidFill>
+                          <a:latin typeface="Noto Sans" pitchFamily="34" charset="0"/>
+                          <a:ea typeface="Noto Sans" pitchFamily="34" charset="-122"/>
+                          <a:cs typeface="Noto Sans" pitchFamily="34" charset="-120"/>
+                        </a:rPr>
+                        <a:t>01–15/09/2026</a:t>
+                      </a:r>
+                      <a:endParaRPr lang="en-US" sz="1200" dirty="0">
+                        <a:latin typeface="Noto Sans" charset="0"/>
+                        <a:ea typeface="Noto Sans" charset="0"/>
+                        <a:cs typeface="Noto Sans" charset="0"/>
+                      </a:endParaRPr>
+                    </a:p>
+                  </a:txBody>
+                  <a:tcPr marL="101600" marR="101600" marT="63500" marB="63500" anchor="t">
+                    <a:lnL w="9525" cap="flat" cmpd="sng" algn="ctr">
+                      <a:solidFill>
+                        <a:srgbClr val="DCE7EA"/>
+                      </a:solidFill>
+                      <a:prstDash val="solid"/>
+                      <a:round/>
+                      <a:headEnd type="none" w="med" len="med"/>
+                      <a:tailEnd type="none" w="med" len="med"/>
+                    </a:lnL>
+                    <a:lnR w="9525" cap="flat" cmpd="sng" algn="ctr">
+                      <a:solidFill>
+                        <a:srgbClr val="DCE7EA"/>
+                      </a:solidFill>
+                      <a:prstDash val="solid"/>
+                      <a:round/>
+                      <a:headEnd type="none" w="med" len="med"/>
+                      <a:tailEnd type="none" w="med" len="med"/>
+                    </a:lnR>
+                    <a:lnT w="9525" cap="flat" cmpd="sng" algn="ctr">
+                      <a:solidFill>
+                        <a:srgbClr val="DCE7EA"/>
+                      </a:solidFill>
+                      <a:prstDash val="solid"/>
+                      <a:round/>
+                      <a:headEnd type="none" w="med" len="med"/>
+                      <a:tailEnd type="none" w="med" len="med"/>
+                    </a:lnT>
+                    <a:lnB w="9525" cap="flat" cmpd="sng" algn="ctr">
+                      <a:solidFill>
+                        <a:srgbClr val="DCE7EA"/>
+                      </a:solidFill>
+                      <a:prstDash val="solid"/>
+                      <a:round/>
+                      <a:headEnd type="none" w="med" len="med"/>
+                      <a:tailEnd type="none" w="med" len="med"/>
+                    </a:lnB>
+                    <a:solidFill>
+                      <a:srgbClr val="F2FAFB"/>
+                    </a:solidFill>
+                  </a:tcPr>
+                </a:tc>
+                <a:tc>
+                  <a:txBody>
+                    <a:bodyPr/>
+                    <a:lstStyle/>
+                    <a:p>
+                      <a:pPr indent="0" marL="0">
+                        <a:buNone/>
+                      </a:pPr>
+                      <a:r>
+                        <a:rPr lang="en-US" sz="1200" dirty="0">
+                          <a:solidFill>
+                            <a:srgbClr val="22333F"/>
+                          </a:solidFill>
+                          <a:latin typeface="Noto Sans" pitchFamily="34" charset="0"/>
+                          <a:ea typeface="Noto Sans" pitchFamily="34" charset="-122"/>
+                          <a:cs typeface="Noto Sans" pitchFamily="34" charset="-120"/>
+                        </a:rPr>
+                        <a:t>Xây bảng hỏi và phương án khảo sát</a:t>
+                      </a:r>
+                      <a:endParaRPr lang="en-US" sz="1200" dirty="0">
+                        <a:latin typeface="Noto Sans" charset="0"/>
+                        <a:ea typeface="Noto Sans" charset="0"/>
+                        <a:cs typeface="Noto Sans" charset="0"/>
+                      </a:endParaRPr>
+                    </a:p>
+                  </a:txBody>
+                  <a:tcPr marL="101600" marR="101600" marT="63500" marB="63500" anchor="t">
+                    <a:lnL w="9525" cap="flat" cmpd="sng" algn="ctr">
+                      <a:solidFill>
+                        <a:srgbClr val="DCE7EA"/>
+                      </a:solidFill>
+                      <a:prstDash val="solid"/>
+                      <a:round/>
+                      <a:headEnd type="none" w="med" len="med"/>
+                      <a:tailEnd type="none" w="med" len="med"/>
+                    </a:lnL>
+                    <a:lnR w="9525" cap="flat" cmpd="sng" algn="ctr">
+                      <a:solidFill>
+                        <a:srgbClr val="DCE7EA"/>
+                      </a:solidFill>
+                      <a:prstDash val="solid"/>
+                      <a:round/>
+                      <a:headEnd type="none" w="med" len="med"/>
+                      <a:tailEnd type="none" w="med" len="med"/>
+                    </a:lnR>
+                    <a:lnT w="9525" cap="flat" cmpd="sng" algn="ctr">
+                      <a:solidFill>
+                        <a:srgbClr val="DCE7EA"/>
+                      </a:solidFill>
+                      <a:prstDash val="solid"/>
+                      <a:round/>
+                      <a:headEnd type="none" w="med" len="med"/>
+                      <a:tailEnd type="none" w="med" len="med"/>
+                    </a:lnT>
+                    <a:lnB w="9525" cap="flat" cmpd="sng" algn="ctr">
+                      <a:solidFill>
+                        <a:srgbClr val="DCE7EA"/>
+                      </a:solidFill>
+                      <a:prstDash val="solid"/>
+                      <a:round/>
+                      <a:headEnd type="none" w="med" len="med"/>
+                      <a:tailEnd type="none" w="med" len="med"/>
+                    </a:lnB>
+                    <a:solidFill>
+                      <a:srgbClr val="F2FAFB"/>
+                    </a:solidFill>
+                  </a:tcPr>
+                </a:tc>
+              </a:tr>
+              <a:tr h="628650">
+                <a:tc>
+                  <a:txBody>
+                    <a:bodyPr/>
+                    <a:lstStyle/>
+                    <a:p>
+                      <a:pPr indent="0" marL="0">
+                        <a:buNone/>
+                      </a:pPr>
+                      <a:r>
+                        <a:rPr lang="en-US" sz="1200" b="1" dirty="0">
+                          <a:solidFill>
+                            <a:srgbClr val="004671"/>
+                          </a:solidFill>
+                          <a:latin typeface="Noto Sans" pitchFamily="34" charset="0"/>
+                          <a:ea typeface="Noto Sans" pitchFamily="34" charset="-122"/>
+                          <a:cs typeface="Noto Sans" pitchFamily="34" charset="-120"/>
+                        </a:rPr>
+                        <a:t>15/09–15/10/2026</a:t>
+                      </a:r>
+                      <a:endParaRPr lang="en-US" sz="1200" dirty="0">
+                        <a:latin typeface="Noto Sans" charset="0"/>
+                        <a:ea typeface="Noto Sans" charset="0"/>
+                        <a:cs typeface="Noto Sans" charset="0"/>
+                      </a:endParaRPr>
+                    </a:p>
+                  </a:txBody>
+                  <a:tcPr marL="101600" marR="101600" marT="63500" marB="63500" anchor="t">
+                    <a:lnL w="9525" cap="flat" cmpd="sng" algn="ctr">
+                      <a:solidFill>
+                        <a:srgbClr val="DCE7EA"/>
+                      </a:solidFill>
+                      <a:prstDash val="solid"/>
+                      <a:round/>
+                      <a:headEnd type="none" w="med" len="med"/>
+                      <a:tailEnd type="none" w="med" len="med"/>
+                    </a:lnL>
+                    <a:lnR w="9525" cap="flat" cmpd="sng" algn="ctr">
+                      <a:solidFill>
+                        <a:srgbClr val="DCE7EA"/>
+                      </a:solidFill>
+                      <a:prstDash val="solid"/>
+                      <a:round/>
+                      <a:headEnd type="none" w="med" len="med"/>
+                      <a:tailEnd type="none" w="med" len="med"/>
+                    </a:lnR>
+                    <a:lnT w="9525" cap="flat" cmpd="sng" algn="ctr">
+                      <a:solidFill>
+                        <a:srgbClr val="DCE7EA"/>
+                      </a:solidFill>
+                      <a:prstDash val="solid"/>
+                      <a:round/>
+                      <a:headEnd type="none" w="med" len="med"/>
+                      <a:tailEnd type="none" w="med" len="med"/>
+                    </a:lnT>
+                    <a:lnB w="9525" cap="flat" cmpd="sng" algn="ctr">
+                      <a:solidFill>
+                        <a:srgbClr val="DCE7EA"/>
+                      </a:solidFill>
+                      <a:prstDash val="solid"/>
+                      <a:round/>
+                      <a:headEnd type="none" w="med" len="med"/>
+                      <a:tailEnd type="none" w="med" len="med"/>
+                    </a:lnB>
+                    <a:solidFill>
+                      <a:srgbClr val="FFFFFF"/>
+                    </a:solidFill>
+                  </a:tcPr>
+                </a:tc>
+                <a:tc>
+                  <a:txBody>
+                    <a:bodyPr/>
+                    <a:lstStyle/>
+                    <a:p>
+                      <a:pPr indent="0" marL="0">
+                        <a:buNone/>
+                      </a:pPr>
+                      <a:r>
+                        <a:rPr lang="en-US" sz="1200" dirty="0">
+                          <a:solidFill>
+                            <a:srgbClr val="22333F"/>
+                          </a:solidFill>
+                          <a:latin typeface="Noto Sans" pitchFamily="34" charset="0"/>
+                          <a:ea typeface="Noto Sans" pitchFamily="34" charset="-122"/>
+                          <a:cs typeface="Noto Sans" pitchFamily="34" charset="-120"/>
+                        </a:rPr>
+                        <a:t>Khảo sát thực tế phụ huynh Tier 3/4 — 500 qua điện thoại + 100 trực tiếp tận nhà</a:t>
+                      </a:r>
+                      <a:endParaRPr lang="en-US" sz="1200" dirty="0">
+                        <a:latin typeface="Noto Sans" charset="0"/>
+                        <a:ea typeface="Noto Sans" charset="0"/>
+                        <a:cs typeface="Noto Sans" charset="0"/>
+                      </a:endParaRPr>
+                    </a:p>
+                  </a:txBody>
+                  <a:tcPr marL="101600" marR="101600" marT="63500" marB="63500" anchor="t">
+                    <a:lnL w="9525" cap="flat" cmpd="sng" algn="ctr">
+                      <a:solidFill>
+                        <a:srgbClr val="DCE7EA"/>
+                      </a:solidFill>
+                      <a:prstDash val="solid"/>
+                      <a:round/>
+                      <a:headEnd type="none" w="med" len="med"/>
+                      <a:tailEnd type="none" w="med" len="med"/>
+                    </a:lnL>
+                    <a:lnR w="9525" cap="flat" cmpd="sng" algn="ctr">
+                      <a:solidFill>
+                        <a:srgbClr val="DCE7EA"/>
+                      </a:solidFill>
+                      <a:prstDash val="solid"/>
+                      <a:round/>
+                      <a:headEnd type="none" w="med" len="med"/>
+                      <a:tailEnd type="none" w="med" len="med"/>
+                    </a:lnR>
+                    <a:lnT w="9525" cap="flat" cmpd="sng" algn="ctr">
+                      <a:solidFill>
+                        <a:srgbClr val="DCE7EA"/>
+                      </a:solidFill>
+                      <a:prstDash val="solid"/>
+                      <a:round/>
+                      <a:headEnd type="none" w="med" len="med"/>
+                      <a:tailEnd type="none" w="med" len="med"/>
+                    </a:lnT>
+                    <a:lnB w="9525" cap="flat" cmpd="sng" algn="ctr">
+                      <a:solidFill>
+                        <a:srgbClr val="DCE7EA"/>
+                      </a:solidFill>
+                      <a:prstDash val="solid"/>
+                      <a:round/>
+                      <a:headEnd type="none" w="med" len="med"/>
+                      <a:tailEnd type="none" w="med" len="med"/>
+                    </a:lnB>
+                    <a:solidFill>
+                      <a:srgbClr val="FFFFFF"/>
+                    </a:solidFill>
+                  </a:tcPr>
+                </a:tc>
+              </a:tr>
+              <a:tr h="628650">
+                <a:tc>
+                  <a:txBody>
+                    <a:bodyPr/>
+                    <a:lstStyle/>
+                    <a:p>
+                      <a:pPr indent="0" marL="0">
+                        <a:buNone/>
+                      </a:pPr>
+                      <a:r>
+                        <a:rPr lang="en-US" sz="1200" b="1" dirty="0">
+                          <a:solidFill>
+                            <a:srgbClr val="004671"/>
+                          </a:solidFill>
+                          <a:latin typeface="Noto Sans" pitchFamily="34" charset="0"/>
+                          <a:ea typeface="Noto Sans" pitchFamily="34" charset="-122"/>
+                          <a:cs typeface="Noto Sans" pitchFamily="34" charset="-120"/>
+                        </a:rPr>
+                        <a:t>15/10–30/10/2026</a:t>
+                      </a:r>
+                      <a:endParaRPr lang="en-US" sz="1200" dirty="0">
+                        <a:latin typeface="Noto Sans" charset="0"/>
+                        <a:ea typeface="Noto Sans" charset="0"/>
+                        <a:cs typeface="Noto Sans" charset="0"/>
+                      </a:endParaRPr>
+                    </a:p>
+                  </a:txBody>
+                  <a:tcPr marL="101600" marR="101600" marT="63500" marB="63500" anchor="t">
+                    <a:lnL w="9525" cap="flat" cmpd="sng" algn="ctr">
+                      <a:solidFill>
+                        <a:srgbClr val="DCE7EA"/>
+                      </a:solidFill>
+                      <a:prstDash val="solid"/>
+                      <a:round/>
+                      <a:headEnd type="none" w="med" len="med"/>
+                      <a:tailEnd type="none" w="med" len="med"/>
+                    </a:lnL>
+                    <a:lnR w="9525" cap="flat" cmpd="sng" algn="ctr">
+                      <a:solidFill>
+                        <a:srgbClr val="DCE7EA"/>
+                      </a:solidFill>
+                      <a:prstDash val="solid"/>
+                      <a:round/>
+                      <a:headEnd type="none" w="med" len="med"/>
+                      <a:tailEnd type="none" w="med" len="med"/>
+                    </a:lnR>
+                    <a:lnT w="9525" cap="flat" cmpd="sng" algn="ctr">
+                      <a:solidFill>
+                        <a:srgbClr val="DCE7EA"/>
+                      </a:solidFill>
+                      <a:prstDash val="solid"/>
+                      <a:round/>
+                      <a:headEnd type="none" w="med" len="med"/>
+                      <a:tailEnd type="none" w="med" len="med"/>
+                    </a:lnT>
+                    <a:lnB w="9525" cap="flat" cmpd="sng" algn="ctr">
+                      <a:solidFill>
+                        <a:srgbClr val="DCE7EA"/>
+                      </a:solidFill>
+                      <a:prstDash val="solid"/>
+                      <a:round/>
+                      <a:headEnd type="none" w="med" len="med"/>
+                      <a:tailEnd type="none" w="med" len="med"/>
+                    </a:lnB>
+                    <a:solidFill>
+                      <a:srgbClr val="F2FAFB"/>
+                    </a:solidFill>
+                  </a:tcPr>
+                </a:tc>
+                <a:tc>
+                  <a:txBody>
+                    <a:bodyPr/>
+                    <a:lstStyle/>
+                    <a:p>
+                      <a:pPr indent="0" marL="0">
+                        <a:buNone/>
+                      </a:pPr>
+                      <a:r>
+                        <a:rPr lang="en-US" sz="1200" dirty="0">
+                          <a:solidFill>
+                            <a:srgbClr val="22333F"/>
+                          </a:solidFill>
+                          <a:latin typeface="Noto Sans" pitchFamily="34" charset="0"/>
+                          <a:ea typeface="Noto Sans" pitchFamily="34" charset="-122"/>
+                          <a:cs typeface="Noto Sans" pitchFamily="34" charset="-120"/>
+                        </a:rPr>
+                        <a:t>Xử lý kết quả khảo sát, chọn phương án concept, xây kịch bản bán hàng, chuẩn bị Marketing, đào tạo Sale</a:t>
+                      </a:r>
+                      <a:endParaRPr lang="en-US" sz="1200" dirty="0">
+                        <a:latin typeface="Noto Sans" charset="0"/>
+                        <a:ea typeface="Noto Sans" charset="0"/>
+                        <a:cs typeface="Noto Sans" charset="0"/>
+                      </a:endParaRPr>
+                    </a:p>
+                  </a:txBody>
+                  <a:tcPr marL="101600" marR="101600" marT="63500" marB="63500" anchor="t">
+                    <a:lnL w="9525" cap="flat" cmpd="sng" algn="ctr">
+                      <a:solidFill>
+                        <a:srgbClr val="DCE7EA"/>
+                      </a:solidFill>
+                      <a:prstDash val="solid"/>
+                      <a:round/>
+                      <a:headEnd type="none" w="med" len="med"/>
+                      <a:tailEnd type="none" w="med" len="med"/>
+                    </a:lnL>
+                    <a:lnR w="9525" cap="flat" cmpd="sng" algn="ctr">
+                      <a:solidFill>
+                        <a:srgbClr val="DCE7EA"/>
+                      </a:solidFill>
+                      <a:prstDash val="solid"/>
+                      <a:round/>
+                      <a:headEnd type="none" w="med" len="med"/>
+                      <a:tailEnd type="none" w="med" len="med"/>
+                    </a:lnR>
+                    <a:lnT w="9525" cap="flat" cmpd="sng" algn="ctr">
+                      <a:solidFill>
+                        <a:srgbClr val="DCE7EA"/>
+                      </a:solidFill>
+                      <a:prstDash val="solid"/>
+                      <a:round/>
+                      <a:headEnd type="none" w="med" len="med"/>
+                      <a:tailEnd type="none" w="med" len="med"/>
+                    </a:lnT>
+                    <a:lnB w="9525" cap="flat" cmpd="sng" algn="ctr">
+                      <a:solidFill>
+                        <a:srgbClr val="DCE7EA"/>
+                      </a:solidFill>
+                      <a:prstDash val="solid"/>
+                      <a:round/>
+                      <a:headEnd type="none" w="med" len="med"/>
+                      <a:tailEnd type="none" w="med" len="med"/>
+                    </a:lnB>
+                    <a:solidFill>
+                      <a:srgbClr val="F2FAFB"/>
+                    </a:solidFill>
+                  </a:tcPr>
+                </a:tc>
+              </a:tr>
+              <a:tr h="628650">
+                <a:tc>
+                  <a:txBody>
+                    <a:bodyPr/>
+                    <a:lstStyle/>
+                    <a:p>
+                      <a:pPr indent="0" marL="0">
+                        <a:buNone/>
+                      </a:pPr>
+                      <a:r>
+                        <a:rPr lang="en-US" sz="1200" b="1" dirty="0">
+                          <a:solidFill>
+                            <a:srgbClr val="004671"/>
+                          </a:solidFill>
+                          <a:latin typeface="Noto Sans" pitchFamily="34" charset="0"/>
+                          <a:ea typeface="Noto Sans" pitchFamily="34" charset="-122"/>
+                          <a:cs typeface="Noto Sans" pitchFamily="34" charset="-120"/>
+                        </a:rPr>
+                        <a:t>Tháng 11/2026</a:t>
+                      </a:r>
+                      <a:endParaRPr lang="en-US" sz="1200" dirty="0">
+                        <a:latin typeface="Noto Sans" charset="0"/>
+                        <a:ea typeface="Noto Sans" charset="0"/>
+                        <a:cs typeface="Noto Sans" charset="0"/>
+                      </a:endParaRPr>
+                    </a:p>
+                  </a:txBody>
+                  <a:tcPr marL="101600" marR="101600" marT="63500" marB="63500" anchor="t">
+                    <a:lnL w="9525" cap="flat" cmpd="sng" algn="ctr">
+                      <a:solidFill>
+                        <a:srgbClr val="DCE7EA"/>
+                      </a:solidFill>
+                      <a:prstDash val="solid"/>
+                      <a:round/>
+                      <a:headEnd type="none" w="med" len="med"/>
+                      <a:tailEnd type="none" w="med" len="med"/>
+                    </a:lnL>
+                    <a:lnR w="9525" cap="flat" cmpd="sng" algn="ctr">
+                      <a:solidFill>
+                        <a:srgbClr val="DCE7EA"/>
+                      </a:solidFill>
+                      <a:prstDash val="solid"/>
+                      <a:round/>
+                      <a:headEnd type="none" w="med" len="med"/>
+                      <a:tailEnd type="none" w="med" len="med"/>
+                    </a:lnR>
+                    <a:lnT w="9525" cap="flat" cmpd="sng" algn="ctr">
+                      <a:solidFill>
+                        <a:srgbClr val="DCE7EA"/>
+                      </a:solidFill>
+                      <a:prstDash val="solid"/>
+                      <a:round/>
+                      <a:headEnd type="none" w="med" len="med"/>
+                      <a:tailEnd type="none" w="med" len="med"/>
+                    </a:lnT>
+                    <a:lnB w="9525" cap="flat" cmpd="sng" algn="ctr">
+                      <a:solidFill>
+                        <a:srgbClr val="DCE7EA"/>
+                      </a:solidFill>
+                      <a:prstDash val="solid"/>
+                      <a:round/>
+                      <a:headEnd type="none" w="med" len="med"/>
+                      <a:tailEnd type="none" w="med" len="med"/>
+                    </a:lnB>
+                    <a:solidFill>
+                      <a:srgbClr val="FFFFFF"/>
+                    </a:solidFill>
+                  </a:tcPr>
+                </a:tc>
+                <a:tc>
+                  <a:txBody>
+                    <a:bodyPr/>
+                    <a:lstStyle/>
+                    <a:p>
+                      <a:pPr indent="0" marL="0">
+                        <a:buNone/>
+                      </a:pPr>
+                      <a:r>
+                        <a:rPr lang="en-US" sz="1200" dirty="0">
+                          <a:solidFill>
+                            <a:srgbClr val="22333F"/>
+                          </a:solidFill>
+                          <a:latin typeface="Noto Sans" pitchFamily="34" charset="0"/>
+                          <a:ea typeface="Noto Sans" pitchFamily="34" charset="-122"/>
+                          <a:cs typeface="Noto Sans" pitchFamily="34" charset="-120"/>
+                        </a:rPr>
+                        <a:t>Test bán vòng 1 — quảng cáo + Sale gọi điện, thu tiền thật để đo tỷ lệ chốt; sau đó hoàn tiền + tặng 1 tháng học trải nghiệm</a:t>
+                      </a:r>
+                      <a:endParaRPr lang="en-US" sz="1200" dirty="0">
+                        <a:latin typeface="Noto Sans" charset="0"/>
+                        <a:ea typeface="Noto Sans" charset="0"/>
+                        <a:cs typeface="Noto Sans" charset="0"/>
+                      </a:endParaRPr>
+                    </a:p>
+                  </a:txBody>
+                  <a:tcPr marL="101600" marR="101600" marT="63500" marB="63500" anchor="t">
+                    <a:lnL w="9525" cap="flat" cmpd="sng" algn="ctr">
+                      <a:solidFill>
+                        <a:srgbClr val="DCE7EA"/>
+                      </a:solidFill>
+                      <a:prstDash val="solid"/>
+                      <a:round/>
+                      <a:headEnd type="none" w="med" len="med"/>
+                      <a:tailEnd type="none" w="med" len="med"/>
+                    </a:lnL>
+                    <a:lnR w="9525" cap="flat" cmpd="sng" algn="ctr">
+                      <a:solidFill>
+                        <a:srgbClr val="DCE7EA"/>
+                      </a:solidFill>
+                      <a:prstDash val="solid"/>
+                      <a:round/>
+                      <a:headEnd type="none" w="med" len="med"/>
+                      <a:tailEnd type="none" w="med" len="med"/>
+                    </a:lnR>
+                    <a:lnT w="9525" cap="flat" cmpd="sng" algn="ctr">
+                      <a:solidFill>
+                        <a:srgbClr val="DCE7EA"/>
+                      </a:solidFill>
+                      <a:prstDash val="solid"/>
+                      <a:round/>
+                      <a:headEnd type="none" w="med" len="med"/>
+                      <a:tailEnd type="none" w="med" len="med"/>
+                    </a:lnT>
+                    <a:lnB w="9525" cap="flat" cmpd="sng" algn="ctr">
+                      <a:solidFill>
+                        <a:srgbClr val="DCE7EA"/>
+                      </a:solidFill>
+                      <a:prstDash val="solid"/>
+                      <a:round/>
+                      <a:headEnd type="none" w="med" len="med"/>
+                      <a:tailEnd type="none" w="med" len="med"/>
+                    </a:lnB>
+                    <a:solidFill>
+                      <a:srgbClr val="FFFFFF"/>
+                    </a:solidFill>
+                  </a:tcPr>
+                </a:tc>
+              </a:tr>
+              <a:tr h="628650">
+                <a:tc>
+                  <a:txBody>
+                    <a:bodyPr/>
+                    <a:lstStyle/>
+                    <a:p>
+                      <a:pPr indent="0" marL="0">
+                        <a:buNone/>
+                      </a:pPr>
+                      <a:r>
+                        <a:rPr lang="en-US" sz="1200" b="1" dirty="0">
+                          <a:solidFill>
+                            <a:srgbClr val="004671"/>
+                          </a:solidFill>
+                          <a:latin typeface="Noto Sans" pitchFamily="34" charset="0"/>
+                          <a:ea typeface="Noto Sans" pitchFamily="34" charset="-122"/>
+                          <a:cs typeface="Noto Sans" pitchFamily="34" charset="-120"/>
+                        </a:rPr>
+                        <a:t>Tháng 12/2026</a:t>
+                      </a:r>
+                      <a:endParaRPr lang="en-US" sz="1200" dirty="0">
+                        <a:latin typeface="Noto Sans" charset="0"/>
+                        <a:ea typeface="Noto Sans" charset="0"/>
+                        <a:cs typeface="Noto Sans" charset="0"/>
+                      </a:endParaRPr>
+                    </a:p>
+                  </a:txBody>
+                  <a:tcPr marL="101600" marR="101600" marT="63500" marB="63500" anchor="t">
+                    <a:lnL w="9525" cap="flat" cmpd="sng" algn="ctr">
+                      <a:solidFill>
+                        <a:srgbClr val="DCE7EA"/>
+                      </a:solidFill>
+                      <a:prstDash val="solid"/>
+                      <a:round/>
+                      <a:headEnd type="none" w="med" len="med"/>
+                      <a:tailEnd type="none" w="med" len="med"/>
+                    </a:lnL>
+                    <a:lnR w="9525" cap="flat" cmpd="sng" algn="ctr">
+                      <a:solidFill>
+                        <a:srgbClr val="DCE7EA"/>
+                      </a:solidFill>
+                      <a:prstDash val="solid"/>
+                      <a:round/>
+                      <a:headEnd type="none" w="med" len="med"/>
+                      <a:tailEnd type="none" w="med" len="med"/>
+                    </a:lnR>
+                    <a:lnT w="9525" cap="flat" cmpd="sng" algn="ctr">
+                      <a:solidFill>
+                        <a:srgbClr val="DCE7EA"/>
+                      </a:solidFill>
+                      <a:prstDash val="solid"/>
+                      <a:round/>
+                      <a:headEnd type="none" w="med" len="med"/>
+                      <a:tailEnd type="none" w="med" len="med"/>
+                    </a:lnT>
+                    <a:lnB w="9525" cap="flat" cmpd="sng" algn="ctr">
+                      <a:solidFill>
+                        <a:srgbClr val="DCE7EA"/>
+                      </a:solidFill>
+                      <a:prstDash val="solid"/>
+                      <a:round/>
+                      <a:headEnd type="none" w="med" len="med"/>
+                      <a:tailEnd type="none" w="med" len="med"/>
+                    </a:lnB>
+                    <a:solidFill>
+                      <a:srgbClr val="F2FAFB"/>
+                    </a:solidFill>
+                  </a:tcPr>
+                </a:tc>
+                <a:tc>
+                  <a:txBody>
+                    <a:bodyPr/>
+                    <a:lstStyle/>
+                    <a:p>
+                      <a:pPr indent="0" marL="0">
+                        <a:buNone/>
+                      </a:pPr>
+                      <a:r>
+                        <a:rPr lang="en-US" sz="1200" dirty="0">
+                          <a:solidFill>
+                            <a:srgbClr val="22333F"/>
+                          </a:solidFill>
+                          <a:latin typeface="Noto Sans" pitchFamily="34" charset="0"/>
+                          <a:ea typeface="Noto Sans" pitchFamily="34" charset="-122"/>
+                          <a:cs typeface="Noto Sans" pitchFamily="34" charset="-120"/>
+                        </a:rPr>
+                        <a:t>Làm mịn kịch bản/sản phẩm theo phản hồi vòng 1 → test bán vòng 2</a:t>
+                      </a:r>
+                      <a:endParaRPr lang="en-US" sz="1200" dirty="0">
+                        <a:latin typeface="Noto Sans" charset="0"/>
+                        <a:ea typeface="Noto Sans" charset="0"/>
+                        <a:cs typeface="Noto Sans" charset="0"/>
+                      </a:endParaRPr>
+                    </a:p>
+                  </a:txBody>
+                  <a:tcPr marL="101600" marR="101600" marT="63500" marB="63500" anchor="t">
+                    <a:lnL w="9525" cap="flat" cmpd="sng" algn="ctr">
+                      <a:solidFill>
+                        <a:srgbClr val="DCE7EA"/>
+                      </a:solidFill>
+                      <a:prstDash val="solid"/>
+                      <a:round/>
+                      <a:headEnd type="none" w="med" len="med"/>
+                      <a:tailEnd type="none" w="med" len="med"/>
+                    </a:lnL>
+                    <a:lnR w="9525" cap="flat" cmpd="sng" algn="ctr">
+                      <a:solidFill>
+                        <a:srgbClr val="DCE7EA"/>
+                      </a:solidFill>
+                      <a:prstDash val="solid"/>
+                      <a:round/>
+                      <a:headEnd type="none" w="med" len="med"/>
+                      <a:tailEnd type="none" w="med" len="med"/>
+                    </a:lnR>
+                    <a:lnT w="9525" cap="flat" cmpd="sng" algn="ctr">
+                      <a:solidFill>
+                        <a:srgbClr val="DCE7EA"/>
+                      </a:solidFill>
+                      <a:prstDash val="solid"/>
+                      <a:round/>
+                      <a:headEnd type="none" w="med" len="med"/>
+                      <a:tailEnd type="none" w="med" len="med"/>
+                    </a:lnT>
+                    <a:lnB w="9525" cap="flat" cmpd="sng" algn="ctr">
+                      <a:solidFill>
+                        <a:srgbClr val="DCE7EA"/>
+                      </a:solidFill>
+                      <a:prstDash val="solid"/>
+                      <a:round/>
+                      <a:headEnd type="none" w="med" len="med"/>
+                      <a:tailEnd type="none" w="med" len="med"/>
+                    </a:lnB>
+                    <a:solidFill>
+                      <a:srgbClr val="F2FAFB"/>
+                    </a:solidFill>
+                  </a:tcPr>
+                </a:tc>
+              </a:tr>
+              <a:tr h="628650">
+                <a:tc>
+                  <a:txBody>
+                    <a:bodyPr/>
+                    <a:lstStyle/>
+                    <a:p>
+                      <a:pPr indent="0" marL="0">
+                        <a:buNone/>
+                      </a:pPr>
+                      <a:r>
+                        <a:rPr lang="en-US" sz="1200" b="1" dirty="0">
+                          <a:solidFill>
+                            <a:srgbClr val="004671"/>
+                          </a:solidFill>
+                          <a:latin typeface="Noto Sans" pitchFamily="34" charset="0"/>
+                          <a:ea typeface="Noto Sans" pitchFamily="34" charset="-122"/>
+                          <a:cs typeface="Noto Sans" pitchFamily="34" charset="-120"/>
+                        </a:rPr>
+                        <a:t>Tháng 1/2027</a:t>
+                      </a:r>
+                      <a:endParaRPr lang="en-US" sz="1200" dirty="0">
+                        <a:latin typeface="Noto Sans" charset="0"/>
+                        <a:ea typeface="Noto Sans" charset="0"/>
+                        <a:cs typeface="Noto Sans" charset="0"/>
+                      </a:endParaRPr>
+                    </a:p>
+                  </a:txBody>
+                  <a:tcPr marL="101600" marR="101600" marT="63500" marB="63500" anchor="t">
+                    <a:lnL w="9525" cap="flat" cmpd="sng" algn="ctr">
+                      <a:solidFill>
+                        <a:srgbClr val="DCE7EA"/>
+                      </a:solidFill>
+                      <a:prstDash val="solid"/>
+                      <a:round/>
+                      <a:headEnd type="none" w="med" len="med"/>
+                      <a:tailEnd type="none" w="med" len="med"/>
+                    </a:lnL>
+                    <a:lnR w="9525" cap="flat" cmpd="sng" algn="ctr">
+                      <a:solidFill>
+                        <a:srgbClr val="DCE7EA"/>
+                      </a:solidFill>
+                      <a:prstDash val="solid"/>
+                      <a:round/>
+                      <a:headEnd type="none" w="med" len="med"/>
+                      <a:tailEnd type="none" w="med" len="med"/>
+                    </a:lnR>
+                    <a:lnT w="9525" cap="flat" cmpd="sng" algn="ctr">
+                      <a:solidFill>
+                        <a:srgbClr val="DCE7EA"/>
+                      </a:solidFill>
+                      <a:prstDash val="solid"/>
+                      <a:round/>
+                      <a:headEnd type="none" w="med" len="med"/>
+                      <a:tailEnd type="none" w="med" len="med"/>
+                    </a:lnT>
+                    <a:lnB w="9525" cap="flat" cmpd="sng" algn="ctr">
+                      <a:solidFill>
+                        <a:srgbClr val="DCE7EA"/>
+                      </a:solidFill>
+                      <a:prstDash val="solid"/>
+                      <a:round/>
+                      <a:headEnd type="none" w="med" len="med"/>
+                      <a:tailEnd type="none" w="med" len="med"/>
+                    </a:lnB>
+                    <a:solidFill>
+                      <a:srgbClr val="FFFFFF"/>
+                    </a:solidFill>
+                  </a:tcPr>
+                </a:tc>
+                <a:tc>
+                  <a:txBody>
+                    <a:bodyPr/>
+                    <a:lstStyle/>
+                    <a:p>
+                      <a:pPr indent="0" marL="0">
+                        <a:buNone/>
+                      </a:pPr>
+                      <a:r>
+                        <a:rPr lang="en-US" sz="1200" dirty="0">
+                          <a:solidFill>
+                            <a:srgbClr val="22333F"/>
+                          </a:solidFill>
+                          <a:latin typeface="Noto Sans" pitchFamily="34" charset="0"/>
+                          <a:ea typeface="Noto Sans" pitchFamily="34" charset="-122"/>
+                          <a:cs typeface="Noto Sans" pitchFamily="34" charset="-120"/>
+                        </a:rPr>
+                        <a:t>Đổ nguồn lực chính thức code/hoàn thiện sản phẩm — 1-6 tháng tuỳ concept được chọn</a:t>
+                      </a:r>
+                      <a:endParaRPr lang="en-US" sz="1200" dirty="0">
+                        <a:latin typeface="Noto Sans" charset="0"/>
+                        <a:ea typeface="Noto Sans" charset="0"/>
+                        <a:cs typeface="Noto Sans" charset="0"/>
+                      </a:endParaRPr>
+                    </a:p>
+                  </a:txBody>
+                  <a:tcPr marL="101600" marR="101600" marT="63500" marB="63500" anchor="t">
+                    <a:lnL w="9525" cap="flat" cmpd="sng" algn="ctr">
+                      <a:solidFill>
+                        <a:srgbClr val="DCE7EA"/>
+                      </a:solidFill>
+                      <a:prstDash val="solid"/>
+                      <a:round/>
+                      <a:headEnd type="none" w="med" len="med"/>
+                      <a:tailEnd type="none" w="med" len="med"/>
+                    </a:lnL>
+                    <a:lnR w="9525" cap="flat" cmpd="sng" algn="ctr">
+                      <a:solidFill>
+                        <a:srgbClr val="DCE7EA"/>
+                      </a:solidFill>
+                      <a:prstDash val="solid"/>
+                      <a:round/>
+                      <a:headEnd type="none" w="med" len="med"/>
+                      <a:tailEnd type="none" w="med" len="med"/>
+                    </a:lnR>
+                    <a:lnT w="9525" cap="flat" cmpd="sng" algn="ctr">
+                      <a:solidFill>
+                        <a:srgbClr val="DCE7EA"/>
+                      </a:solidFill>
+                      <a:prstDash val="solid"/>
+                      <a:round/>
+                      <a:headEnd type="none" w="med" len="med"/>
+                      <a:tailEnd type="none" w="med" len="med"/>
+                    </a:lnT>
+                    <a:lnB w="9525" cap="flat" cmpd="sng" algn="ctr">
+                      <a:solidFill>
+                        <a:srgbClr val="DCE7EA"/>
+                      </a:solidFill>
+                      <a:prstDash val="solid"/>
+                      <a:round/>
+                      <a:headEnd type="none" w="med" len="med"/>
+                      <a:tailEnd type="none" w="med" len="med"/>
+                    </a:lnB>
+                    <a:solidFill>
+                      <a:srgbClr val="FFFFFF"/>
+                    </a:solidFill>
+                  </a:tcPr>
+                </a:tc>
+              </a:tr>
+            </a:tbl>
+          </a:graphicData>
+        </a:graphic>
+      </p:graphicFrame>
+      <p:pic>
+        <p:nvPicPr>
+          <p:cNvPr id="7" name="Image 1" descr="C:\Users\landa\AppData\Local\Temp\claude\c--Users-landa--Personal--D---n-AI-Class-new\8a85e8a7-bdeb-42d6-9168-79c96b849bd1\scratchpad\pptx-gen\logo-icon-only.png">    </p:cNvPr>
+          <p:cNvPicPr>
+            <a:picLocks noChangeAspect="1"/>
+          </p:cNvPicPr>
+          <p:nvPr/>
+        </p:nvPicPr>
+        <p:blipFill>
+          <a:blip r:embed="rId2"/>
+          <a:stretch>
+            <a:fillRect/>
+          </a:stretch>
+        </p:blipFill>
+        <p:spPr>
+          <a:xfrm>
+            <a:off x="502920" y="6473952"/>
+            <a:ext cx="237744" cy="237744"/>
+          </a:xfrm>
+          <a:prstGeom prst="rect">
+            <a:avLst/>
+          </a:prstGeom>
+        </p:spPr>
+      </p:pic>
+      <p:sp>
+        <p:nvSpPr>
+          <p:cNvPr id="8" name="Text 3"/>
+          <p:cNvSpPr/>
+          <p:nvPr/>
+        </p:nvSpPr>
+        <p:spPr>
+          <a:xfrm>
+            <a:off x="795528" y="6473952"/>
+            <a:ext cx="3657600" cy="256032"/>
+          </a:xfrm>
+          <a:prstGeom prst="rect">
+            <a:avLst/>
+          </a:prstGeom>
+          <a:noFill/>
+          <a:ln/>
+        </p:spPr>
+        <p:txBody>
+          <a:bodyPr wrap="square" rtlCol="0" anchor="ctr"/>
+          <a:lstStyle/>
+          <a:p>
+            <a:pPr indent="0" marL="0">
+              <a:buNone/>
+            </a:pPr>
+            <a:r>
+              <a:rPr lang="en-US" sz="800" spc="100" kern="0" dirty="0">
+                <a:solidFill>
+                  <a:srgbClr val="5B6472"/>
+                </a:solidFill>
+                <a:latin typeface="Noto Sans" pitchFamily="34" charset="0"/>
+                <a:ea typeface="Noto Sans" pitchFamily="34" charset="-122"/>
+                <a:cs typeface="Noto Sans" pitchFamily="34" charset="-120"/>
+              </a:rPr>
+              <a:t>EDUPIA  AI CLASS NEW</a:t>
+            </a:r>
+            <a:endParaRPr lang="en-US" sz="800" dirty="0"/>
+          </a:p>
+        </p:txBody>
+      </p:sp>
+      <p:sp>
+        <p:nvSpPr>
+          <p:cNvPr id="9" name="Text 4"/>
+          <p:cNvSpPr/>
+          <p:nvPr/>
+        </p:nvSpPr>
+        <p:spPr>
+          <a:xfrm>
+            <a:off x="10789920" y="6473952"/>
+            <a:ext cx="914400" cy="256032"/>
+          </a:xfrm>
+          <a:prstGeom prst="rect">
+            <a:avLst/>
+          </a:prstGeom>
+          <a:noFill/>
+          <a:ln/>
+        </p:spPr>
+        <p:txBody>
+          <a:bodyPr wrap="square" rtlCol="0" anchor="ctr"/>
+          <a:lstStyle/>
+          <a:p>
+            <a:pPr algn="r" indent="0" marL="0">
+              <a:buNone/>
+            </a:pPr>
+            <a:r>
+              <a:rPr lang="en-US" sz="850" dirty="0">
+                <a:solidFill>
+                  <a:srgbClr val="5B6472"/>
+                </a:solidFill>
+                <a:latin typeface="Noto Sans" pitchFamily="34" charset="0"/>
+                <a:ea typeface="Noto Sans" pitchFamily="34" charset="-122"/>
+                <a:cs typeface="Noto Sans" pitchFamily="34" charset="-120"/>
+              </a:rPr>
+              <a:t>10 / 11</a:t>
+            </a:r>
+            <a:endParaRPr lang="en-US" sz="850" dirty="0"/>
+          </a:p>
+        </p:txBody>
+      </p:sp>
+    </p:spTree>
+  </p:cSld>
+  <p:clrMapOvr>
+    <a:masterClrMapping/>
+  </p:clrMapOvr>
+</p:sld>
+</file>
+
+<file path=ppt/slides/slide12.xml><?xml version="1.0" encoding="utf-8"?>
+<p:sld xmlns:a="http://schemas.openxmlformats.org/drawingml/2006/main" xmlns:r="http://schemas.openxmlformats.org/officeDocument/2006/relationships" xmlns:p="http://schemas.openxmlformats.org/presentationml/2006/main">
+  <p:cSld name="Slide 12">
+    <p:bg>
+      <p:bgPr>
+        <a:solidFill>
+          <a:srgbClr val="FFFFFF"/>
+        </a:solidFill>
+      </p:bgPr>
+    </p:bg>
+    <p:spTree>
+      <p:nvGrpSpPr>
+        <p:cNvPr id="1" name=""/>
+        <p:cNvGrpSpPr/>
+        <p:nvPr/>
+      </p:nvGrpSpPr>
+      <p:grpSpPr>
+        <a:xfrm>
+          <a:off x="0" y="0"/>
+          <a:ext cx="0" cy="0"/>
+          <a:chOff x="0" y="0"/>
+          <a:chExt cx="0" cy="0"/>
+        </a:xfrm>
+      </p:grpSpPr>
+      <p:sp>
+        <p:nvSpPr>
+          <p:cNvPr id="2" name="Text 0"/>
+          <p:cNvSpPr/>
+          <p:nvPr/>
+        </p:nvSpPr>
+        <p:spPr>
+          <a:xfrm>
+            <a:off x="502920" y="292608"/>
+            <a:ext cx="11183112" cy="274320"/>
+          </a:xfrm>
+          <a:prstGeom prst="rect">
+            <a:avLst/>
+          </a:prstGeom>
+          <a:noFill/>
+          <a:ln/>
+        </p:spPr>
+        <p:txBody>
+          <a:bodyPr wrap="square" rtlCol="0" anchor="ctr"/>
+          <a:lstStyle/>
+          <a:p>
+            <a:pPr indent="0" marL="0">
+              <a:buNone/>
+            </a:pPr>
+            <a:r>
+              <a:rPr lang="en-US" sz="1100" b="1" spc="120" kern="0" dirty="0">
+                <a:solidFill>
+                  <a:srgbClr val="3B81B1"/>
+                </a:solidFill>
+                <a:latin typeface="Noto Sans" pitchFamily="34" charset="0"/>
+                <a:ea typeface="Noto Sans" pitchFamily="34" charset="-122"/>
+                <a:cs typeface="Noto Sans" pitchFamily="34" charset="-120"/>
+              </a:rPr>
+              <a:t>PHẦN 4 — SƠ ĐỒ PHÂN CHIA TRÁCH NHIỆM</a:t>
+            </a:r>
+            <a:endParaRPr lang="en-US" sz="1100" dirty="0"/>
+          </a:p>
+        </p:txBody>
+      </p:sp>
+      <p:sp>
+        <p:nvSpPr>
+          <p:cNvPr id="3" name="Text 1"/>
+          <p:cNvSpPr/>
+          <p:nvPr/>
+        </p:nvSpPr>
+        <p:spPr>
+          <a:xfrm>
+            <a:off x="502920" y="548640"/>
+            <a:ext cx="10085832" cy="640080"/>
+          </a:xfrm>
+          <a:prstGeom prst="rect">
+            <a:avLst/>
+          </a:prstGeom>
+          <a:noFill/>
+          <a:ln/>
+        </p:spPr>
+        <p:txBody>
+          <a:bodyPr wrap="square" rtlCol="0" anchor="ctr"/>
+          <a:lstStyle/>
+          <a:p>
+            <a:pPr indent="0" marL="0">
+              <a:buNone/>
+            </a:pPr>
+            <a:r>
+              <a:rPr lang="en-US" sz="2600" b="1" dirty="0">
+                <a:solidFill>
+                  <a:srgbClr val="004671"/>
+                </a:solidFill>
+                <a:latin typeface="Noto Sans" pitchFamily="34" charset="0"/>
+                <a:ea typeface="Noto Sans" pitchFamily="34" charset="-122"/>
+                <a:cs typeface="Noto Sans" pitchFamily="34" charset="-120"/>
+              </a:rPr>
+              <a:t>Phân chia trách nhiệm theo 4 bộ phận</a:t>
+            </a:r>
+            <a:endParaRPr lang="en-US" sz="2600" dirty="0"/>
+          </a:p>
+        </p:txBody>
+      </p:sp>
+      <p:sp>
+        <p:nvSpPr>
+          <p:cNvPr id="4" name="Shape 2"/>
+          <p:cNvSpPr/>
+          <p:nvPr/>
+        </p:nvSpPr>
+        <p:spPr>
+          <a:xfrm>
+            <a:off x="502920" y="1170432"/>
+            <a:ext cx="777240" cy="45720"/>
+          </a:xfrm>
+          <a:prstGeom prst="rect">
+            <a:avLst/>
+          </a:prstGeom>
+          <a:solidFill>
+            <a:srgbClr val="A5BE00"/>
+          </a:solidFill>
+          <a:ln/>
+        </p:spPr>
+      </p:sp>
+      <p:pic>
+        <p:nvPicPr>
+          <p:cNvPr id="5" name="Image 0" descr="C:\Users\landa\AppData\Local\Temp\claude\c--Users-landa--Personal--D---n-AI-Class-new\8a85e8a7-bdeb-42d6-9168-79c96b849bd1\scratchpad\pptx-gen\logo-icon-only.png">    </p:cNvPr>
+          <p:cNvPicPr>
+            <a:picLocks noChangeAspect="1"/>
+          </p:cNvPicPr>
+          <p:nvPr/>
+        </p:nvPicPr>
+        <p:blipFill>
+          <a:blip r:embed="rId1"/>
+          <a:stretch>
+            <a:fillRect/>
+          </a:stretch>
+        </p:blipFill>
+        <p:spPr>
+          <a:xfrm>
+            <a:off x="11292840" y="365760"/>
+            <a:ext cx="502920" cy="502920"/>
+          </a:xfrm>
+          <a:prstGeom prst="rect">
+            <a:avLst/>
+          </a:prstGeom>
+        </p:spPr>
+      </p:pic>
+      <p:graphicFrame>
+        <p:nvGraphicFramePr>
+          <p:cNvPr id="13" name="Table 0"/>
           <p:cNvGraphicFramePr>
             <a:graphicFrameLocks noGrp="1"/>
           </p:cNvGraphicFramePr>
@@ -4597,7 +6745,7 @@
                 <a:ea typeface="Noto Sans" pitchFamily="34" charset="-122"/>
                 <a:cs typeface="Noto Sans" pitchFamily="34" charset="-120"/>
               </a:rPr>
-              <a:t>9 / 9</a:t>
+              <a:t>11 / 11</a:t>
             </a:r>
             <a:endParaRPr lang="en-US" sz="850" dirty="0"/>
           </a:p>
@@ -5314,7 +7462,7 @@
                 <a:ea typeface="Noto Sans" pitchFamily="34" charset="-122"/>
                 <a:cs typeface="Noto Sans" pitchFamily="34" charset="-120"/>
               </a:rPr>
-              <a:t>1 / 9</a:t>
+              <a:t>1 / 11</a:t>
             </a:r>
             <a:endParaRPr lang="en-US" sz="850" dirty="0"/>
           </a:p>
@@ -5818,7 +7966,7 @@
                 <a:ea typeface="Noto Sans" pitchFamily="34" charset="-122"/>
                 <a:cs typeface="Noto Sans" pitchFamily="34" charset="-120"/>
               </a:rPr>
-              <a:t>2 / 9</a:t>
+              <a:t>2 / 11</a:t>
             </a:r>
             <a:endParaRPr lang="en-US" sz="850" dirty="0"/>
           </a:p>
@@ -6498,7 +8646,7 @@
                 <a:ea typeface="Noto Sans" pitchFamily="34" charset="-122"/>
                 <a:cs typeface="Noto Sans" pitchFamily="34" charset="-120"/>
               </a:rPr>
-              <a:t>3 / 9</a:t>
+              <a:t>3 / 11</a:t>
             </a:r>
             <a:endParaRPr lang="en-US" sz="850" dirty="0"/>
           </a:p>
@@ -6608,7 +8756,7 @@
                 <a:ea typeface="Noto Sans" pitchFamily="34" charset="-122"/>
                 <a:cs typeface="Noto Sans" pitchFamily="34" charset="-120"/>
               </a:rPr>
-              <a:t>Tổng quan nhanh 3 định hướng</a:t>
+              <a:t>Khoảng trống thị trường</a:t>
             </a:r>
             <a:endParaRPr lang="en-US" sz="2600" dirty="0"/>
           </a:p>
@@ -6660,34 +8808,14 @@
       </p:pic>
       <p:sp>
         <p:nvSpPr>
-          <p:cNvPr id="6" name="Shape 3"/>
-          <p:cNvSpPr/>
-          <p:nvPr/>
-        </p:nvSpPr>
-        <p:spPr>
-          <a:xfrm>
-            <a:off x="502920" y="1371600"/>
-            <a:ext cx="3605784" cy="777240"/>
-          </a:xfrm>
-          <a:prstGeom prst="rect">
-            <a:avLst/>
-          </a:prstGeom>
-          <a:solidFill>
-            <a:srgbClr val="004671"/>
-          </a:solidFill>
-          <a:ln/>
-        </p:spPr>
-      </p:sp>
-      <p:sp>
-        <p:nvSpPr>
-          <p:cNvPr id="7" name="Text 4"/>
-          <p:cNvSpPr/>
-          <p:nvPr/>
-        </p:nvSpPr>
-        <p:spPr>
-          <a:xfrm>
-            <a:off x="667512" y="1444752"/>
-            <a:ext cx="3276600" cy="365760"/>
+          <p:cNvPr id="6" name="Text 3"/>
+          <p:cNvSpPr/>
+          <p:nvPr/>
+        </p:nvSpPr>
+        <p:spPr>
+          <a:xfrm>
+            <a:off x="502920" y="1280160"/>
+            <a:ext cx="11183112" cy="384048"/>
           </a:xfrm>
           <a:prstGeom prst="rect">
             <a:avLst/>
@@ -6703,30 +8831,117 @@
               <a:buNone/>
             </a:pPr>
             <a:r>
-              <a:rPr lang="en-US" sz="1600" b="1" dirty="0">
-                <a:solidFill>
-                  <a:srgbClr val="FFFFFF"/>
-                </a:solidFill>
-                <a:latin typeface="Noto Sans" pitchFamily="34" charset="0"/>
-                <a:ea typeface="Noto Sans" pitchFamily="34" charset="-122"/>
-                <a:cs typeface="Noto Sans" pitchFamily="34" charset="-120"/>
-              </a:rPr>
-              <a:t>Concept 1</a:t>
-            </a:r>
-            <a:endParaRPr lang="en-US" sz="1600" dirty="0"/>
-          </a:p>
-        </p:txBody>
-      </p:sp>
-      <p:sp>
-        <p:nvSpPr>
-          <p:cNvPr id="8" name="Text 5"/>
-          <p:cNvSpPr/>
-          <p:nvPr/>
-        </p:nvSpPr>
-        <p:spPr>
-          <a:xfrm>
-            <a:off x="667512" y="1792224"/>
-            <a:ext cx="3276600" cy="320040"/>
+              <a:rPr lang="en-US" sz="1050" i="1" dirty="0">
+                <a:solidFill>
+                  <a:srgbClr val="5B6472"/>
+                </a:solidFill>
+                <a:latin typeface="Noto Sans" pitchFamily="34" charset="0"/>
+                <a:ea typeface="Noto Sans" pitchFamily="34" charset="-122"/>
+                <a:cs typeface="Noto Sans" pitchFamily="34" charset="-120"/>
+              </a:rPr>
+              <a:t>Định vị các lựa chọn học tiếng Anh hiện có theo 2 trục: mức độ cá nhân hóa và chi phí — cho thấy khoảng trống ở đúng mức giá 390k mà chưa lựa chọn nào lấp đầy.</a:t>
+            </a:r>
+            <a:endParaRPr lang="en-US" sz="1050" dirty="0"/>
+          </a:p>
+        </p:txBody>
+      </p:sp>
+      <p:sp>
+        <p:nvSpPr>
+          <p:cNvPr id="7" name="Shape 4"/>
+          <p:cNvSpPr/>
+          <p:nvPr/>
+        </p:nvSpPr>
+        <p:spPr>
+          <a:xfrm>
+            <a:off x="4206240" y="5760720"/>
+            <a:ext cx="0" cy="-3959352"/>
+          </a:xfrm>
+          <a:prstGeom prst="line">
+            <a:avLst/>
+          </a:prstGeom>
+          <a:noFill/>
+          <a:ln w="22225">
+            <a:solidFill>
+              <a:srgbClr val="004671"/>
+            </a:solidFill>
+            <a:prstDash val="solid"/>
+            <a:tailEnd type="triangle"/>
+          </a:ln>
+        </p:spPr>
+      </p:sp>
+      <p:sp>
+        <p:nvSpPr>
+          <p:cNvPr id="8" name="Shape 5"/>
+          <p:cNvSpPr/>
+          <p:nvPr/>
+        </p:nvSpPr>
+        <p:spPr>
+          <a:xfrm>
+            <a:off x="4206240" y="5760720"/>
+            <a:ext cx="1463040" cy="0"/>
+          </a:xfrm>
+          <a:prstGeom prst="line">
+            <a:avLst/>
+          </a:prstGeom>
+          <a:noFill/>
+          <a:ln w="22225">
+            <a:solidFill>
+              <a:srgbClr val="004671"/>
+            </a:solidFill>
+            <a:prstDash val="solid"/>
+            <a:tailEnd type="triangle"/>
+          </a:ln>
+        </p:spPr>
+      </p:sp>
+      <p:sp>
+        <p:nvSpPr>
+          <p:cNvPr id="9" name="Text 6"/>
+          <p:cNvSpPr/>
+          <p:nvPr/>
+        </p:nvSpPr>
+        <p:spPr>
+          <a:xfrm>
+            <a:off x="2560320" y="1508760"/>
+            <a:ext cx="3291840" cy="274320"/>
+          </a:xfrm>
+          <a:prstGeom prst="rect">
+            <a:avLst/>
+          </a:prstGeom>
+          <a:noFill/>
+          <a:ln/>
+        </p:spPr>
+        <p:txBody>
+          <a:bodyPr wrap="square" rtlCol="0" anchor="ctr"/>
+          <a:lstStyle/>
+          <a:p>
+            <a:pPr algn="ctr" indent="0" marL="0">
+              <a:buNone/>
+            </a:pPr>
+            <a:r>
+              <a:rPr lang="en-US" sz="1050" b="1" dirty="0">
+                <a:solidFill>
+                  <a:srgbClr val="004671"/>
+                </a:solidFill>
+                <a:latin typeface="Noto Sans" pitchFamily="34" charset="0"/>
+                <a:ea typeface="Noto Sans" pitchFamily="34" charset="-122"/>
+                <a:cs typeface="Noto Sans" pitchFamily="34" charset="-120"/>
+              </a:rPr>
+              <a:t>MỨC ĐỘ CÁ NHÂN HÓA</a:t>
+            </a:r>
+            <a:endParaRPr lang="en-US" sz="1050" dirty="0"/>
+          </a:p>
+        </p:txBody>
+      </p:sp>
+      <p:sp>
+        <p:nvSpPr>
+          <p:cNvPr id="10" name="Text 7"/>
+          <p:cNvSpPr/>
+          <p:nvPr/>
+        </p:nvSpPr>
+        <p:spPr>
+          <a:xfrm>
+            <a:off x="5742432" y="5614416"/>
+            <a:ext cx="1188720" cy="292608"/>
           </a:xfrm>
           <a:prstGeom prst="rect">
             <a:avLst/>
@@ -6742,40 +8957,40 @@
               <a:buNone/>
             </a:pPr>
             <a:r>
-              <a:rPr lang="en-US" sz="1100" dirty="0">
-                <a:solidFill>
-                  <a:srgbClr val="E7F1F6"/>
-                </a:solidFill>
-                <a:latin typeface="Noto Sans" pitchFamily="34" charset="0"/>
-                <a:ea typeface="Noto Sans" pitchFamily="34" charset="-122"/>
-                <a:cs typeface="Noto Sans" pitchFamily="34" charset="-120"/>
-              </a:rPr>
-              <a:t>Làm mịn &amp; nâng cấp</a:t>
-            </a:r>
-            <a:endParaRPr lang="en-US" sz="1100" dirty="0"/>
-          </a:p>
-        </p:txBody>
-      </p:sp>
-      <p:sp>
-        <p:nvSpPr>
-          <p:cNvPr id="9" name="Shape 6"/>
-          <p:cNvSpPr/>
-          <p:nvPr/>
-        </p:nvSpPr>
-        <p:spPr>
-          <a:xfrm>
-            <a:off x="502920" y="2148840"/>
-            <a:ext cx="3605784" cy="3657600"/>
-          </a:xfrm>
-          <a:prstGeom prst="rect">
+              <a:rPr lang="en-US" sz="1050" b="1" dirty="0">
+                <a:solidFill>
+                  <a:srgbClr val="004671"/>
+                </a:solidFill>
+                <a:latin typeface="Noto Sans" pitchFamily="34" charset="0"/>
+                <a:ea typeface="Noto Sans" pitchFamily="34" charset="-122"/>
+                <a:cs typeface="Noto Sans" pitchFamily="34" charset="-120"/>
+              </a:rPr>
+              <a:t>CHI PHÍ</a:t>
+            </a:r>
+            <a:endParaRPr lang="en-US" sz="1050" dirty="0"/>
+          </a:p>
+        </p:txBody>
+      </p:sp>
+      <p:sp>
+        <p:nvSpPr>
+          <p:cNvPr id="11" name="Shape 8"/>
+          <p:cNvSpPr/>
+          <p:nvPr/>
+        </p:nvSpPr>
+        <p:spPr>
+          <a:xfrm>
+            <a:off x="4142232" y="5362956"/>
+            <a:ext cx="128016" cy="128016"/>
+          </a:xfrm>
+          <a:prstGeom prst="ellipse">
             <a:avLst/>
           </a:prstGeom>
           <a:solidFill>
-            <a:srgbClr val="F2FAFB"/>
+            <a:srgbClr val="3B81B1"/>
           </a:solidFill>
-          <a:ln w="12700">
+          <a:ln w="9525">
             <a:solidFill>
-              <a:srgbClr val="DCE7EA"/>
+              <a:srgbClr val="004671"/>
             </a:solidFill>
             <a:prstDash val="solid"/>
           </a:ln>
@@ -6783,14 +8998,14 @@
       </p:sp>
       <p:sp>
         <p:nvSpPr>
-          <p:cNvPr id="10" name="Text 7"/>
-          <p:cNvSpPr/>
-          <p:nvPr/>
-        </p:nvSpPr>
-        <p:spPr>
-          <a:xfrm>
-            <a:off x="667512" y="2331720"/>
-            <a:ext cx="3276600" cy="3337560"/>
+          <p:cNvPr id="12" name="Text 9"/>
+          <p:cNvSpPr/>
+          <p:nvPr/>
+        </p:nvSpPr>
+        <p:spPr>
+          <a:xfrm>
+            <a:off x="1874520" y="5253228"/>
+            <a:ext cx="2148840" cy="347472"/>
           </a:xfrm>
           <a:prstGeom prst="rect">
             <a:avLst/>
@@ -6799,269 +9014,86 @@
           <a:ln/>
         </p:spPr>
         <p:txBody>
-          <a:bodyPr wrap="square" rtlCol="0" anchor="t"/>
+          <a:bodyPr wrap="square" rtlCol="0" anchor="ctr"/>
+          <a:lstStyle/>
+          <a:p>
+            <a:pPr algn="r" indent="0" marL="0">
+              <a:buNone/>
+            </a:pPr>
+            <a:r>
+              <a:rPr lang="en-US" sz="1150" b="1" dirty="0">
+                <a:solidFill>
+                  <a:srgbClr val="004671"/>
+                </a:solidFill>
+                <a:latin typeface="Noto Sans" pitchFamily="34" charset="0"/>
+                <a:ea typeface="Noto Sans" pitchFamily="34" charset="-122"/>
+                <a:cs typeface="Noto Sans" pitchFamily="34" charset="-120"/>
+              </a:rPr>
+              <a:t>Self Learning</a:t>
+            </a:r>
+            <a:endParaRPr lang="en-US" sz="1150" dirty="0"/>
+          </a:p>
+        </p:txBody>
+      </p:sp>
+      <p:sp>
+        <p:nvSpPr>
+          <p:cNvPr id="13" name="Text 10"/>
+          <p:cNvSpPr/>
+          <p:nvPr/>
+        </p:nvSpPr>
+        <p:spPr>
+          <a:xfrm>
+            <a:off x="4434840" y="5253228"/>
+            <a:ext cx="3931920" cy="347472"/>
+          </a:xfrm>
+          <a:prstGeom prst="rect">
+            <a:avLst/>
+          </a:prstGeom>
+          <a:noFill/>
+          <a:ln/>
+        </p:spPr>
+        <p:txBody>
+          <a:bodyPr wrap="square" rtlCol="0" anchor="ctr"/>
           <a:lstStyle/>
           <a:p>
             <a:pPr indent="0" marL="0">
-              <a:lnSpc>
-                <a:spcPct val="105000"/>
-              </a:lnSpc>
-              <a:spcAft>
-                <a:spcPts val="200"/>
-              </a:spcAft>
               <a:buNone/>
             </a:pPr>
             <a:r>
-              <a:rPr lang="en-US" sz="1050" b="1" dirty="0">
-                <a:solidFill>
-                  <a:srgbClr val="004671"/>
-                </a:solidFill>
-                <a:latin typeface="Noto Sans" pitchFamily="34" charset="0"/>
-                <a:ea typeface="Noto Sans" pitchFamily="34" charset="-122"/>
-                <a:cs typeface="Noto Sans" pitchFamily="34" charset="-120"/>
-              </a:rPr>
-              <a:t>Concept chính</a:t>
-            </a:r>
-            <a:endParaRPr lang="en-US" sz="1050" dirty="0"/>
-          </a:p>
-          <a:p>
-            <a:pPr indent="0" marL="0">
-              <a:lnSpc>
-                <a:spcPct val="105000"/>
-              </a:lnSpc>
-              <a:spcAft>
-                <a:spcPts val="1000"/>
-              </a:spcAft>
-              <a:buNone/>
-            </a:pPr>
-            <a:r>
-              <a:rPr lang="en-US" sz="1050" dirty="0">
-                <a:solidFill>
-                  <a:srgbClr val="22333F"/>
-                </a:solidFill>
-                <a:latin typeface="Noto Sans" pitchFamily="34" charset="0"/>
-                <a:ea typeface="Noto Sans" pitchFamily="34" charset="-122"/>
-                <a:cs typeface="Noto Sans" pitchFamily="34" charset="-120"/>
-              </a:rPr>
-              <a:t>Giữ Big Class làm trung tâm + AI Practice + AI Speak + AI Club, nâng cấp AI hỗ trợ sâu dần</a:t>
-            </a:r>
-            <a:endParaRPr lang="en-US" sz="1050" dirty="0"/>
-          </a:p>
-          <a:p>
-            <a:pPr indent="0" marL="0">
-              <a:lnSpc>
-                <a:spcPct val="105000"/>
-              </a:lnSpc>
-              <a:spcAft>
-                <a:spcPts val="300"/>
-              </a:spcAft>
-              <a:buNone/>
-            </a:pPr>
-            <a:r>
-              <a:rPr lang="en-US" sz="1050" b="1" dirty="0">
-                <a:solidFill>
-                  <a:srgbClr val="004671"/>
-                </a:solidFill>
-                <a:latin typeface="Noto Sans" pitchFamily="34" charset="0"/>
-                <a:ea typeface="Noto Sans" pitchFamily="34" charset="-122"/>
-                <a:cs typeface="Noto Sans" pitchFamily="34" charset="-120"/>
-              </a:rPr>
-              <a:t>Các option</a:t>
-            </a:r>
-            <a:endParaRPr lang="en-US" sz="1050" dirty="0"/>
-          </a:p>
-          <a:p>
-            <a:pPr marL="342900" indent="-342900">
-              <a:lnSpc>
-                <a:spcPct val="105000"/>
-              </a:lnSpc>
-              <a:spcAft>
-                <a:spcPts val="500"/>
-              </a:spcAft>
-              <a:buSzPct val="100000"/>
-              <a:buChar char="•"/>
-            </a:pPr>
-            <a:r>
-              <a:rPr lang="en-US" sz="980" dirty="0">
-                <a:solidFill>
-                  <a:srgbClr val="22333F"/>
-                </a:solidFill>
-                <a:latin typeface="Noto Sans" pitchFamily="34" charset="0"/>
-                <a:ea typeface="Noto Sans" pitchFamily="34" charset="-122"/>
-                <a:cs typeface="Noto Sans" pitchFamily="34" charset="-120"/>
-              </a:rPr>
-              <a:t>Option 1.1: Nâng cấp chất lượng nội dung có sẵn, không đổi cấu trúc sản phẩm.</a:t>
-            </a:r>
-            <a:endParaRPr lang="en-US" sz="1050" dirty="0"/>
-          </a:p>
-          <a:p>
-            <a:pPr marL="342900" indent="-342900">
-              <a:lnSpc>
-                <a:spcPct val="105000"/>
-              </a:lnSpc>
-              <a:spcAft>
-                <a:spcPts val="500"/>
-              </a:spcAft>
-              <a:buSzPct val="100000"/>
-              <a:buChar char="•"/>
-            </a:pPr>
-            <a:r>
-              <a:rPr lang="en-US" sz="980" dirty="0">
-                <a:solidFill>
-                  <a:srgbClr val="22333F"/>
-                </a:solidFill>
-                <a:latin typeface="Noto Sans" pitchFamily="34" charset="0"/>
-                <a:ea typeface="Noto Sans" pitchFamily="34" charset="-122"/>
-                <a:cs typeface="Noto Sans" pitchFamily="34" charset="-120"/>
-              </a:rPr>
-              <a:t>Option 1.2: Đầu tư sâu vào tầng công nghệ AI chẩn đoán và cá nhân hóa + kế thừa toàn bộ Option 1.1</a:t>
-            </a:r>
-            <a:endParaRPr lang="en-US" sz="1050" dirty="0"/>
-          </a:p>
-          <a:p>
-            <a:pPr marL="342900" indent="-342900">
-              <a:lnSpc>
-                <a:spcPct val="105000"/>
-              </a:lnSpc>
-              <a:spcAft>
-                <a:spcPts val="500"/>
-              </a:spcAft>
-              <a:buSzPct val="100000"/>
-              <a:buChar char="•"/>
-            </a:pPr>
-            <a:r>
-              <a:rPr lang="en-US" sz="980" dirty="0">
-                <a:solidFill>
-                  <a:srgbClr val="22333F"/>
-                </a:solidFill>
-                <a:latin typeface="Noto Sans" pitchFamily="34" charset="0"/>
-                <a:ea typeface="Noto Sans" pitchFamily="34" charset="-122"/>
-                <a:cs typeface="Noto Sans" pitchFamily="34" charset="-120"/>
-              </a:rPr>
-              <a:t>Option 1.3: Nâng cấp mạnh tầng con người (GVCN chăm sóc thêm)</a:t>
-            </a:r>
-            <a:endParaRPr lang="en-US" sz="1050" dirty="0"/>
-          </a:p>
-        </p:txBody>
-      </p:sp>
-      <p:sp>
-        <p:nvSpPr>
-          <p:cNvPr id="11" name="Shape 8"/>
-          <p:cNvSpPr/>
-          <p:nvPr/>
-        </p:nvSpPr>
-        <p:spPr>
-          <a:xfrm>
-            <a:off x="4291584" y="1371600"/>
-            <a:ext cx="3605784" cy="777240"/>
-          </a:xfrm>
-          <a:prstGeom prst="rect">
+              <a:rPr lang="en-US" sz="1000" i="1" dirty="0">
+                <a:solidFill>
+                  <a:srgbClr val="5B6472"/>
+                </a:solidFill>
+                <a:latin typeface="Noto Sans" pitchFamily="34" charset="0"/>
+                <a:ea typeface="Noto Sans" pitchFamily="34" charset="-122"/>
+                <a:cs typeface="Noto Sans" pitchFamily="34" charset="-120"/>
+              </a:rPr>
+              <a:t>Edupia AI Class hiện tại (250k, tự học)</a:t>
+            </a:r>
+            <a:endParaRPr lang="en-US" sz="1000" dirty="0"/>
+          </a:p>
+        </p:txBody>
+      </p:sp>
+      <p:sp>
+        <p:nvSpPr>
+          <p:cNvPr id="14" name="Shape 11"/>
+          <p:cNvSpPr/>
+          <p:nvPr/>
+        </p:nvSpPr>
+        <p:spPr>
+          <a:xfrm>
+            <a:off x="4142232" y="4786884"/>
+            <a:ext cx="128016" cy="128016"/>
+          </a:xfrm>
+          <a:prstGeom prst="ellipse">
             <a:avLst/>
           </a:prstGeom>
           <a:solidFill>
             <a:srgbClr val="3B81B1"/>
           </a:solidFill>
-          <a:ln/>
-        </p:spPr>
-      </p:sp>
-      <p:sp>
-        <p:nvSpPr>
-          <p:cNvPr id="12" name="Text 9"/>
-          <p:cNvSpPr/>
-          <p:nvPr/>
-        </p:nvSpPr>
-        <p:spPr>
-          <a:xfrm>
-            <a:off x="4456176" y="1444752"/>
-            <a:ext cx="3276600" cy="365760"/>
-          </a:xfrm>
-          <a:prstGeom prst="rect">
-            <a:avLst/>
-          </a:prstGeom>
-          <a:noFill/>
-          <a:ln/>
-        </p:spPr>
-        <p:txBody>
-          <a:bodyPr wrap="square" rtlCol="0" anchor="ctr"/>
-          <a:lstStyle/>
-          <a:p>
-            <a:pPr indent="0" marL="0">
-              <a:buNone/>
-            </a:pPr>
-            <a:r>
-              <a:rPr lang="en-US" sz="1600" b="1" dirty="0">
-                <a:solidFill>
-                  <a:srgbClr val="FFFFFF"/>
-                </a:solidFill>
-                <a:latin typeface="Noto Sans" pitchFamily="34" charset="0"/>
-                <a:ea typeface="Noto Sans" pitchFamily="34" charset="-122"/>
-                <a:cs typeface="Noto Sans" pitchFamily="34" charset="-120"/>
-              </a:rPr>
-              <a:t>Concept 2</a:t>
-            </a:r>
-            <a:endParaRPr lang="en-US" sz="1600" dirty="0"/>
-          </a:p>
-        </p:txBody>
-      </p:sp>
-      <p:sp>
-        <p:nvSpPr>
-          <p:cNvPr id="13" name="Text 10"/>
-          <p:cNvSpPr/>
-          <p:nvPr/>
-        </p:nvSpPr>
-        <p:spPr>
-          <a:xfrm>
-            <a:off x="4456176" y="1792224"/>
-            <a:ext cx="3276600" cy="320040"/>
-          </a:xfrm>
-          <a:prstGeom prst="rect">
-            <a:avLst/>
-          </a:prstGeom>
-          <a:noFill/>
-          <a:ln/>
-        </p:spPr>
-        <p:txBody>
-          <a:bodyPr wrap="square" rtlCol="0" anchor="ctr"/>
-          <a:lstStyle/>
-          <a:p>
-            <a:pPr indent="0" marL="0">
-              <a:buNone/>
-            </a:pPr>
-            <a:r>
-              <a:rPr lang="en-US" sz="1100" dirty="0">
-                <a:solidFill>
-                  <a:srgbClr val="E7F1F6"/>
-                </a:solidFill>
-                <a:latin typeface="Noto Sans" pitchFamily="34" charset="0"/>
-                <a:ea typeface="Noto Sans" pitchFamily="34" charset="-122"/>
-                <a:cs typeface="Noto Sans" pitchFamily="34" charset="-120"/>
-              </a:rPr>
-              <a:t>Làm mịn + Thêm môn</a:t>
-            </a:r>
-            <a:endParaRPr lang="en-US" sz="1100" dirty="0"/>
-          </a:p>
-        </p:txBody>
-      </p:sp>
-      <p:sp>
-        <p:nvSpPr>
-          <p:cNvPr id="14" name="Shape 11"/>
-          <p:cNvSpPr/>
-          <p:nvPr/>
-        </p:nvSpPr>
-        <p:spPr>
-          <a:xfrm>
-            <a:off x="4291584" y="2148840"/>
-            <a:ext cx="3605784" cy="3657600"/>
-          </a:xfrm>
-          <a:prstGeom prst="rect">
-            <a:avLst/>
-          </a:prstGeom>
-          <a:solidFill>
-            <a:srgbClr val="F2FAFB"/>
-          </a:solidFill>
-          <a:ln w="12700">
+          <a:ln w="9525">
             <a:solidFill>
-              <a:srgbClr val="DCE7EA"/>
+              <a:srgbClr val="004671"/>
             </a:solidFill>
             <a:prstDash val="solid"/>
           </a:ln>
@@ -7075,8 +9107,8 @@
         </p:nvSpPr>
         <p:spPr>
           <a:xfrm>
-            <a:off x="4456176" y="2331720"/>
-            <a:ext cx="3276600" cy="3337560"/>
+            <a:off x="1874520" y="4677156"/>
+            <a:ext cx="2148840" cy="347472"/>
           </a:xfrm>
           <a:prstGeom prst="rect">
             <a:avLst/>
@@ -7085,157 +9117,37 @@
           <a:ln/>
         </p:spPr>
         <p:txBody>
-          <a:bodyPr wrap="square" rtlCol="0" anchor="t"/>
-          <a:lstStyle/>
-          <a:p>
-            <a:pPr indent="0" marL="0">
-              <a:lnSpc>
-                <a:spcPct val="105000"/>
-              </a:lnSpc>
-              <a:spcAft>
-                <a:spcPts val="200"/>
-              </a:spcAft>
+          <a:bodyPr wrap="square" rtlCol="0" anchor="ctr"/>
+          <a:lstStyle/>
+          <a:p>
+            <a:pPr algn="r" indent="0" marL="0">
               <a:buNone/>
             </a:pPr>
             <a:r>
-              <a:rPr lang="en-US" sz="1050" b="1" dirty="0">
-                <a:solidFill>
-                  <a:srgbClr val="3B81B1"/>
-                </a:solidFill>
-                <a:latin typeface="Noto Sans" pitchFamily="34" charset="0"/>
-                <a:ea typeface="Noto Sans" pitchFamily="34" charset="-122"/>
-                <a:cs typeface="Noto Sans" pitchFamily="34" charset="-120"/>
-              </a:rPr>
-              <a:t>Concept chính</a:t>
-            </a:r>
-            <a:endParaRPr lang="en-US" sz="1050" dirty="0"/>
-          </a:p>
-          <a:p>
-            <a:pPr indent="0" marL="0">
-              <a:lnSpc>
-                <a:spcPct val="105000"/>
-              </a:lnSpc>
-              <a:spcAft>
-                <a:spcPts val="1000"/>
-              </a:spcAft>
-              <a:buNone/>
-            </a:pPr>
-            <a:r>
-              <a:rPr lang="en-US" sz="1050" dirty="0">
-                <a:solidFill>
-                  <a:srgbClr val="22333F"/>
-                </a:solidFill>
-                <a:latin typeface="Noto Sans" pitchFamily="34" charset="0"/>
-                <a:ea typeface="Noto Sans" pitchFamily="34" charset="-122"/>
-                <a:cs typeface="Noto Sans" pitchFamily="34" charset="-120"/>
-              </a:rPr>
-              <a:t>Giữ nền Concept Big Class hiện tại, thêm 1 buổi Live/tuần môn khác</a:t>
-            </a:r>
-            <a:endParaRPr lang="en-US" sz="1050" dirty="0"/>
-          </a:p>
-          <a:p>
-            <a:pPr indent="0" marL="0">
-              <a:lnSpc>
-                <a:spcPct val="105000"/>
-              </a:lnSpc>
-              <a:spcAft>
-                <a:spcPts val="300"/>
-              </a:spcAft>
-              <a:buNone/>
-            </a:pPr>
-            <a:r>
-              <a:rPr lang="en-US" sz="1050" b="1" dirty="0">
-                <a:solidFill>
-                  <a:srgbClr val="3B81B1"/>
-                </a:solidFill>
-                <a:latin typeface="Noto Sans" pitchFamily="34" charset="0"/>
-                <a:ea typeface="Noto Sans" pitchFamily="34" charset="-122"/>
-                <a:cs typeface="Noto Sans" pitchFamily="34" charset="-120"/>
-              </a:rPr>
-              <a:t>Các option</a:t>
-            </a:r>
-            <a:endParaRPr lang="en-US" sz="1050" dirty="0"/>
-          </a:p>
-          <a:p>
-            <a:pPr marL="342900" indent="-342900">
-              <a:lnSpc>
-                <a:spcPct val="105000"/>
-              </a:lnSpc>
-              <a:spcAft>
-                <a:spcPts val="500"/>
-              </a:spcAft>
-              <a:buSzPct val="100000"/>
-              <a:buChar char="•"/>
-            </a:pPr>
-            <a:r>
-              <a:rPr lang="en-US" sz="980" dirty="0">
-                <a:solidFill>
-                  <a:srgbClr val="22333F"/>
-                </a:solidFill>
-                <a:latin typeface="Noto Sans" pitchFamily="34" charset="0"/>
-                <a:ea typeface="Noto Sans" pitchFamily="34" charset="-122"/>
-                <a:cs typeface="Noto Sans" pitchFamily="34" charset="-120"/>
-              </a:rPr>
-              <a:t>Option 2.1: Big Class + thêm môn học GDPT</a:t>
-            </a:r>
-            <a:endParaRPr lang="en-US" sz="1050" dirty="0"/>
-          </a:p>
-          <a:p>
-            <a:pPr marL="342900" indent="-342900">
-              <a:lnSpc>
-                <a:spcPct val="105000"/>
-              </a:lnSpc>
-              <a:spcAft>
-                <a:spcPts val="500"/>
-              </a:spcAft>
-              <a:buSzPct val="100000"/>
-              <a:buChar char="•"/>
-            </a:pPr>
-            <a:r>
-              <a:rPr lang="en-US" sz="980" dirty="0">
-                <a:solidFill>
-                  <a:srgbClr val="22333F"/>
-                </a:solidFill>
-                <a:latin typeface="Noto Sans" pitchFamily="34" charset="0"/>
-                <a:ea typeface="Noto Sans" pitchFamily="34" charset="-122"/>
-                <a:cs typeface="Noto Sans" pitchFamily="34" charset="-120"/>
-              </a:rPr>
-              <a:t>Option 2.2: Big Class + thêm môn khác (ngoài chương trình GDPT): STEM, STEAM, AI, Kỹ năng sống, …</a:t>
-            </a:r>
-            <a:endParaRPr lang="en-US" sz="1050" dirty="0"/>
-          </a:p>
-        </p:txBody>
-      </p:sp>
-      <p:sp>
-        <p:nvSpPr>
-          <p:cNvPr id="16" name="Shape 13"/>
-          <p:cNvSpPr/>
-          <p:nvPr/>
-        </p:nvSpPr>
-        <p:spPr>
-          <a:xfrm>
-            <a:off x="8080248" y="1371600"/>
-            <a:ext cx="3605784" cy="777240"/>
-          </a:xfrm>
-          <a:prstGeom prst="rect">
-            <a:avLst/>
-          </a:prstGeom>
-          <a:solidFill>
-            <a:srgbClr val="518E0D"/>
-          </a:solidFill>
-          <a:ln/>
-        </p:spPr>
-      </p:sp>
-      <p:sp>
-        <p:nvSpPr>
-          <p:cNvPr id="17" name="Text 14"/>
-          <p:cNvSpPr/>
-          <p:nvPr/>
-        </p:nvSpPr>
-        <p:spPr>
-          <a:xfrm>
-            <a:off x="8244840" y="1444752"/>
-            <a:ext cx="3276600" cy="365760"/>
+              <a:rPr lang="en-US" sz="1150" b="1" dirty="0">
+                <a:solidFill>
+                  <a:srgbClr val="004671"/>
+                </a:solidFill>
+                <a:latin typeface="Noto Sans" pitchFamily="34" charset="0"/>
+                <a:ea typeface="Noto Sans" pitchFamily="34" charset="-122"/>
+                <a:cs typeface="Noto Sans" pitchFamily="34" charset="-120"/>
+              </a:rPr>
+              <a:t>Big Class</a:t>
+            </a:r>
+            <a:endParaRPr lang="en-US" sz="1150" dirty="0"/>
+          </a:p>
+        </p:txBody>
+      </p:sp>
+      <p:sp>
+        <p:nvSpPr>
+          <p:cNvPr id="16" name="Text 13"/>
+          <p:cNvSpPr/>
+          <p:nvPr/>
+        </p:nvSpPr>
+        <p:spPr>
+          <a:xfrm>
+            <a:off x="4434840" y="4677156"/>
+            <a:ext cx="3931920" cy="347472"/>
           </a:xfrm>
           <a:prstGeom prst="rect">
             <a:avLst/>
@@ -7251,79 +9163,40 @@
               <a:buNone/>
             </a:pPr>
             <a:r>
-              <a:rPr lang="en-US" sz="1600" b="1" dirty="0">
-                <a:solidFill>
-                  <a:srgbClr val="FFFFFF"/>
-                </a:solidFill>
-                <a:latin typeface="Noto Sans" pitchFamily="34" charset="0"/>
-                <a:ea typeface="Noto Sans" pitchFamily="34" charset="-122"/>
-                <a:cs typeface="Noto Sans" pitchFamily="34" charset="-120"/>
-              </a:rPr>
-              <a:t>Concept 3</a:t>
-            </a:r>
-            <a:endParaRPr lang="en-US" sz="1600" dirty="0"/>
-          </a:p>
-        </p:txBody>
-      </p:sp>
-      <p:sp>
-        <p:nvSpPr>
-          <p:cNvPr id="18" name="Text 15"/>
-          <p:cNvSpPr/>
-          <p:nvPr/>
-        </p:nvSpPr>
-        <p:spPr>
-          <a:xfrm>
-            <a:off x="8244840" y="1792224"/>
-            <a:ext cx="3276600" cy="320040"/>
-          </a:xfrm>
-          <a:prstGeom prst="rect">
-            <a:avLst/>
-          </a:prstGeom>
-          <a:noFill/>
-          <a:ln/>
-        </p:spPr>
-        <p:txBody>
-          <a:bodyPr wrap="square" rtlCol="0" anchor="ctr"/>
-          <a:lstStyle/>
-          <a:p>
-            <a:pPr indent="0" marL="0">
-              <a:buNone/>
-            </a:pPr>
-            <a:r>
-              <a:rPr lang="en-US" sz="1100" dirty="0">
-                <a:solidFill>
-                  <a:srgbClr val="E7F1F6"/>
-                </a:solidFill>
-                <a:latin typeface="Noto Sans" pitchFamily="34" charset="0"/>
-                <a:ea typeface="Noto Sans" pitchFamily="34" charset="-122"/>
-                <a:cs typeface="Noto Sans" pitchFamily="34" charset="-120"/>
-              </a:rPr>
-              <a:t>Gia sư AI 1:1</a:t>
-            </a:r>
-            <a:endParaRPr lang="en-US" sz="1100" dirty="0"/>
-          </a:p>
-        </p:txBody>
-      </p:sp>
-      <p:sp>
-        <p:nvSpPr>
-          <p:cNvPr id="19" name="Shape 16"/>
-          <p:cNvSpPr/>
-          <p:nvPr/>
-        </p:nvSpPr>
-        <p:spPr>
-          <a:xfrm>
-            <a:off x="8080248" y="2148840"/>
-            <a:ext cx="3605784" cy="3657600"/>
-          </a:xfrm>
-          <a:prstGeom prst="rect">
+              <a:rPr lang="en-US" sz="1000" i="1" dirty="0">
+                <a:solidFill>
+                  <a:srgbClr val="5B6472"/>
+                </a:solidFill>
+                <a:latin typeface="Noto Sans" pitchFamily="34" charset="0"/>
+                <a:ea typeface="Noto Sans" pitchFamily="34" charset="-122"/>
+                <a:cs typeface="Noto Sans" pitchFamily="34" charset="-120"/>
+              </a:rPr>
+              <a:t>Lớp học nhóm đông, GV thật, chưa có AI hỗ trợ sâu</a:t>
+            </a:r>
+            <a:endParaRPr lang="en-US" sz="1000" dirty="0"/>
+          </a:p>
+        </p:txBody>
+      </p:sp>
+      <p:sp>
+        <p:nvSpPr>
+          <p:cNvPr id="17" name="Shape 14"/>
+          <p:cNvSpPr/>
+          <p:nvPr/>
+        </p:nvSpPr>
+        <p:spPr>
+          <a:xfrm>
+            <a:off x="4142232" y="4210812"/>
+            <a:ext cx="128016" cy="128016"/>
+          </a:xfrm>
+          <a:prstGeom prst="ellipse">
             <a:avLst/>
           </a:prstGeom>
           <a:solidFill>
-            <a:srgbClr val="F2FAFB"/>
+            <a:srgbClr val="3B81B1"/>
           </a:solidFill>
-          <a:ln w="12700">
+          <a:ln w="9525">
             <a:solidFill>
-              <a:srgbClr val="DCE7EA"/>
+              <a:srgbClr val="004671"/>
             </a:solidFill>
             <a:prstDash val="solid"/>
           </a:ln>
@@ -7331,14 +9204,14 @@
       </p:sp>
       <p:sp>
         <p:nvSpPr>
-          <p:cNvPr id="20" name="Text 17"/>
-          <p:cNvSpPr/>
-          <p:nvPr/>
-        </p:nvSpPr>
-        <p:spPr>
-          <a:xfrm>
-            <a:off x="8244840" y="2331720"/>
-            <a:ext cx="3276600" cy="3337560"/>
+          <p:cNvPr id="18" name="Text 15"/>
+          <p:cNvSpPr/>
+          <p:nvPr/>
+        </p:nvSpPr>
+        <p:spPr>
+          <a:xfrm>
+            <a:off x="1874520" y="4101084"/>
+            <a:ext cx="2148840" cy="347472"/>
           </a:xfrm>
           <a:prstGeom prst="rect">
             <a:avLst/>
@@ -7347,130 +9220,442 @@
           <a:ln/>
         </p:spPr>
         <p:txBody>
-          <a:bodyPr wrap="square" rtlCol="0" anchor="t"/>
+          <a:bodyPr wrap="square" rtlCol="0" anchor="ctr"/>
+          <a:lstStyle/>
+          <a:p>
+            <a:pPr algn="r" indent="0" marL="0">
+              <a:buNone/>
+            </a:pPr>
+            <a:r>
+              <a:rPr lang="en-US" sz="1150" b="1" dirty="0">
+                <a:solidFill>
+                  <a:srgbClr val="004671"/>
+                </a:solidFill>
+                <a:latin typeface="Noto Sans" pitchFamily="34" charset="0"/>
+                <a:ea typeface="Noto Sans" pitchFamily="34" charset="-122"/>
+                <a:cs typeface="Noto Sans" pitchFamily="34" charset="-120"/>
+              </a:rPr>
+              <a:t>Big Class + AI</a:t>
+            </a:r>
+            <a:endParaRPr lang="en-US" sz="1150" dirty="0"/>
+          </a:p>
+        </p:txBody>
+      </p:sp>
+      <p:sp>
+        <p:nvSpPr>
+          <p:cNvPr id="19" name="Text 16"/>
+          <p:cNvSpPr/>
+          <p:nvPr/>
+        </p:nvSpPr>
+        <p:spPr>
+          <a:xfrm>
+            <a:off x="4434840" y="4101084"/>
+            <a:ext cx="3931920" cy="347472"/>
+          </a:xfrm>
+          <a:prstGeom prst="rect">
+            <a:avLst/>
+          </a:prstGeom>
+          <a:noFill/>
+          <a:ln/>
+        </p:spPr>
+        <p:txBody>
+          <a:bodyPr wrap="square" rtlCol="0" anchor="ctr"/>
           <a:lstStyle/>
           <a:p>
             <a:pPr indent="0" marL="0">
+              <a:buNone/>
+            </a:pPr>
+            <a:r>
+              <a:rPr lang="en-US" sz="1000" i="1" dirty="0">
+                <a:solidFill>
+                  <a:srgbClr val="5B6472"/>
+                </a:solidFill>
+                <a:latin typeface="Noto Sans" pitchFamily="34" charset="0"/>
+                <a:ea typeface="Noto Sans" pitchFamily="34" charset="-122"/>
+                <a:cs typeface="Noto Sans" pitchFamily="34" charset="-120"/>
+              </a:rPr>
+              <a:t>Concept 1/2 — làm mịn &amp; nâng cấp trên nền Big Class</a:t>
+            </a:r>
+            <a:endParaRPr lang="en-US" sz="1000" dirty="0"/>
+          </a:p>
+        </p:txBody>
+      </p:sp>
+      <p:sp>
+        <p:nvSpPr>
+          <p:cNvPr id="20" name="Shape 17"/>
+          <p:cNvSpPr/>
+          <p:nvPr/>
+        </p:nvSpPr>
+        <p:spPr>
+          <a:xfrm>
+            <a:off x="3223260" y="3415284"/>
+            <a:ext cx="1965960" cy="566928"/>
+          </a:xfrm>
+          <a:prstGeom prst="roundRect">
+            <a:avLst>
+              <a:gd name="adj" fmla="val 9677"/>
+            </a:avLst>
+          </a:prstGeom>
+          <a:solidFill>
+            <a:srgbClr val="A5BE00"/>
+          </a:solidFill>
+          <a:ln w="15875">
+            <a:solidFill>
+              <a:srgbClr val="004671"/>
+            </a:solidFill>
+            <a:prstDash val="solid"/>
+          </a:ln>
+        </p:spPr>
+      </p:sp>
+      <p:sp>
+        <p:nvSpPr>
+          <p:cNvPr id="21" name="Text 18"/>
+          <p:cNvSpPr/>
+          <p:nvPr/>
+        </p:nvSpPr>
+        <p:spPr>
+          <a:xfrm>
+            <a:off x="3223260" y="3415284"/>
+            <a:ext cx="1965960" cy="566928"/>
+          </a:xfrm>
+          <a:prstGeom prst="rect">
+            <a:avLst/>
+          </a:prstGeom>
+          <a:noFill/>
+          <a:ln/>
+        </p:spPr>
+        <p:txBody>
+          <a:bodyPr wrap="square" rtlCol="0" anchor="ctr"/>
+          <a:lstStyle/>
+          <a:p>
+            <a:pPr algn="ctr" indent="0" marL="0">
               <a:lnSpc>
-                <a:spcPct val="105000"/>
+                <a:spcPct val="100000"/>
               </a:lnSpc>
-              <a:spcAft>
-                <a:spcPts val="200"/>
-              </a:spcAft>
               <a:buNone/>
             </a:pPr>
             <a:r>
+              <a:rPr lang="en-US" sz="1250" b="1" dirty="0">
+                <a:solidFill>
+                  <a:srgbClr val="004671"/>
+                </a:solidFill>
+                <a:latin typeface="Noto Sans" pitchFamily="34" charset="0"/>
+                <a:ea typeface="Noto Sans" pitchFamily="34" charset="-122"/>
+                <a:cs typeface="Noto Sans" pitchFamily="34" charset="-120"/>
+              </a:rPr>
+              <a:t>AI TUTOR</a:t>
+            </a:r>
+            <a:endParaRPr lang="en-US" sz="1250" dirty="0"/>
+          </a:p>
+          <a:p>
+            <a:pPr algn="ctr" indent="0" marL="0">
+              <a:lnSpc>
+                <a:spcPct val="100000"/>
+              </a:lnSpc>
+              <a:buNone/>
+            </a:pPr>
+            <a:r>
+              <a:rPr lang="en-US" sz="900" b="1" dirty="0">
+                <a:solidFill>
+                  <a:srgbClr val="004671"/>
+                </a:solidFill>
+                <a:latin typeface="Noto Sans" pitchFamily="34" charset="0"/>
+                <a:ea typeface="Noto Sans" pitchFamily="34" charset="-122"/>
+                <a:cs typeface="Noto Sans" pitchFamily="34" charset="-120"/>
+              </a:rPr>
+              <a:t>MARKET GAP @ 390K</a:t>
+            </a:r>
+            <a:endParaRPr lang="en-US" sz="1250" dirty="0"/>
+          </a:p>
+        </p:txBody>
+      </p:sp>
+      <p:sp>
+        <p:nvSpPr>
+          <p:cNvPr id="22" name="Text 19"/>
+          <p:cNvSpPr/>
+          <p:nvPr/>
+        </p:nvSpPr>
+        <p:spPr>
+          <a:xfrm>
+            <a:off x="5417820" y="3515868"/>
+            <a:ext cx="3931920" cy="365760"/>
+          </a:xfrm>
+          <a:prstGeom prst="rect">
+            <a:avLst/>
+          </a:prstGeom>
+          <a:noFill/>
+          <a:ln/>
+        </p:spPr>
+        <p:txBody>
+          <a:bodyPr wrap="square" rtlCol="0" anchor="ctr"/>
+          <a:lstStyle/>
+          <a:p>
+            <a:pPr indent="0" marL="0">
+              <a:buNone/>
+            </a:pPr>
+            <a:r>
               <a:rPr lang="en-US" sz="1050" b="1" dirty="0">
                 <a:solidFill>
-                  <a:srgbClr val="518E0D"/>
-                </a:solidFill>
-                <a:latin typeface="Noto Sans" pitchFamily="34" charset="0"/>
-                <a:ea typeface="Noto Sans" pitchFamily="34" charset="-122"/>
-                <a:cs typeface="Noto Sans" pitchFamily="34" charset="-120"/>
-              </a:rPr>
-              <a:t>Concept chính</a:t>
+                  <a:srgbClr val="004671"/>
+                </a:solidFill>
+                <a:latin typeface="Noto Sans" pitchFamily="34" charset="0"/>
+                <a:ea typeface="Noto Sans" pitchFamily="34" charset="-122"/>
+                <a:cs typeface="Noto Sans" pitchFamily="34" charset="-120"/>
+              </a:rPr>
+              <a:t>Concept 3 — chưa có lựa chọn nào lấp khoảng trống này</a:t>
             </a:r>
             <a:endParaRPr lang="en-US" sz="1050" dirty="0"/>
           </a:p>
+        </p:txBody>
+      </p:sp>
+      <p:sp>
+        <p:nvSpPr>
+          <p:cNvPr id="23" name="Shape 20"/>
+          <p:cNvSpPr/>
+          <p:nvPr/>
+        </p:nvSpPr>
+        <p:spPr>
+          <a:xfrm>
+            <a:off x="4142232" y="3058668"/>
+            <a:ext cx="128016" cy="128016"/>
+          </a:xfrm>
+          <a:prstGeom prst="ellipse">
+            <a:avLst/>
+          </a:prstGeom>
+          <a:solidFill>
+            <a:srgbClr val="3B81B1"/>
+          </a:solidFill>
+          <a:ln w="9525">
+            <a:solidFill>
+              <a:srgbClr val="004671"/>
+            </a:solidFill>
+            <a:prstDash val="solid"/>
+          </a:ln>
+        </p:spPr>
+      </p:sp>
+      <p:sp>
+        <p:nvSpPr>
+          <p:cNvPr id="24" name="Text 21"/>
+          <p:cNvSpPr/>
+          <p:nvPr/>
+        </p:nvSpPr>
+        <p:spPr>
+          <a:xfrm>
+            <a:off x="1874520" y="2948940"/>
+            <a:ext cx="2148840" cy="347472"/>
+          </a:xfrm>
+          <a:prstGeom prst="rect">
+            <a:avLst/>
+          </a:prstGeom>
+          <a:noFill/>
+          <a:ln/>
+        </p:spPr>
+        <p:txBody>
+          <a:bodyPr wrap="square" rtlCol="0" anchor="ctr"/>
+          <a:lstStyle/>
+          <a:p>
+            <a:pPr algn="r" indent="0" marL="0">
+              <a:buNone/>
+            </a:pPr>
+            <a:r>
+              <a:rPr lang="en-US" sz="1150" b="1" dirty="0">
+                <a:solidFill>
+                  <a:srgbClr val="004671"/>
+                </a:solidFill>
+                <a:latin typeface="Noto Sans" pitchFamily="34" charset="0"/>
+                <a:ea typeface="Noto Sans" pitchFamily="34" charset="-122"/>
+                <a:cs typeface="Noto Sans" pitchFamily="34" charset="-120"/>
+              </a:rPr>
+              <a:t>Small-Group Tutor</a:t>
+            </a:r>
+            <a:endParaRPr lang="en-US" sz="1150" dirty="0"/>
+          </a:p>
+        </p:txBody>
+      </p:sp>
+      <p:sp>
+        <p:nvSpPr>
+          <p:cNvPr id="25" name="Text 22"/>
+          <p:cNvSpPr/>
+          <p:nvPr/>
+        </p:nvSpPr>
+        <p:spPr>
+          <a:xfrm>
+            <a:off x="4434840" y="2948940"/>
+            <a:ext cx="3931920" cy="347472"/>
+          </a:xfrm>
+          <a:prstGeom prst="rect">
+            <a:avLst/>
+          </a:prstGeom>
+          <a:noFill/>
+          <a:ln/>
+        </p:spPr>
+        <p:txBody>
+          <a:bodyPr wrap="square" rtlCol="0" anchor="ctr"/>
+          <a:lstStyle/>
           <a:p>
             <a:pPr indent="0" marL="0">
-              <a:lnSpc>
-                <a:spcPct val="105000"/>
-              </a:lnSpc>
-              <a:spcAft>
-                <a:spcPts val="1000"/>
-              </a:spcAft>
               <a:buNone/>
             </a:pPr>
             <a:r>
-              <a:rPr lang="en-US" sz="1050" dirty="0">
-                <a:solidFill>
-                  <a:srgbClr val="22333F"/>
-                </a:solidFill>
-                <a:latin typeface="Noto Sans" pitchFamily="34" charset="0"/>
-                <a:ea typeface="Noto Sans" pitchFamily="34" charset="-122"/>
-                <a:cs typeface="Noto Sans" pitchFamily="34" charset="-120"/>
-              </a:rPr>
-              <a:t>AI Tutor 1-1 đóng vai trò gia sư chính trong các lớp học, không chỉ hỗ trợ lớp học</a:t>
-            </a:r>
-            <a:endParaRPr lang="en-US" sz="1050" dirty="0"/>
-          </a:p>
+              <a:rPr lang="en-US" sz="1000" i="1" dirty="0">
+                <a:solidFill>
+                  <a:srgbClr val="5B6472"/>
+                </a:solidFill>
+                <a:latin typeface="Noto Sans" pitchFamily="34" charset="0"/>
+                <a:ea typeface="Noto Sans" pitchFamily="34" charset="-122"/>
+                <a:cs typeface="Noto Sans" pitchFamily="34" charset="-120"/>
+              </a:rPr>
+              <a:t>Edupia Tutor 1-4/1-6</a:t>
+            </a:r>
+            <a:endParaRPr lang="en-US" sz="1000" dirty="0"/>
+          </a:p>
+        </p:txBody>
+      </p:sp>
+      <p:sp>
+        <p:nvSpPr>
+          <p:cNvPr id="26" name="Shape 23"/>
+          <p:cNvSpPr/>
+          <p:nvPr/>
+        </p:nvSpPr>
+        <p:spPr>
+          <a:xfrm>
+            <a:off x="4142232" y="2482596"/>
+            <a:ext cx="128016" cy="128016"/>
+          </a:xfrm>
+          <a:prstGeom prst="ellipse">
+            <a:avLst/>
+          </a:prstGeom>
+          <a:solidFill>
+            <a:srgbClr val="3B81B1"/>
+          </a:solidFill>
+          <a:ln w="9525">
+            <a:solidFill>
+              <a:srgbClr val="004671"/>
+            </a:solidFill>
+            <a:prstDash val="solid"/>
+          </a:ln>
+        </p:spPr>
+      </p:sp>
+      <p:sp>
+        <p:nvSpPr>
+          <p:cNvPr id="27" name="Text 24"/>
+          <p:cNvSpPr/>
+          <p:nvPr/>
+        </p:nvSpPr>
+        <p:spPr>
+          <a:xfrm>
+            <a:off x="1874520" y="2372868"/>
+            <a:ext cx="2148840" cy="347472"/>
+          </a:xfrm>
+          <a:prstGeom prst="rect">
+            <a:avLst/>
+          </a:prstGeom>
+          <a:noFill/>
+          <a:ln/>
+        </p:spPr>
+        <p:txBody>
+          <a:bodyPr wrap="square" rtlCol="0" anchor="ctr"/>
+          <a:lstStyle/>
+          <a:p>
+            <a:pPr algn="r" indent="0" marL="0">
+              <a:buNone/>
+            </a:pPr>
+            <a:r>
+              <a:rPr lang="en-US" sz="1150" b="1" dirty="0">
+                <a:solidFill>
+                  <a:srgbClr val="004671"/>
+                </a:solidFill>
+                <a:latin typeface="Noto Sans" pitchFamily="34" charset="0"/>
+                <a:ea typeface="Noto Sans" pitchFamily="34" charset="-122"/>
+                <a:cs typeface="Noto Sans" pitchFamily="34" charset="-120"/>
+              </a:rPr>
+              <a:t>Private Tutor</a:t>
+            </a:r>
+            <a:endParaRPr lang="en-US" sz="1150" dirty="0"/>
+          </a:p>
+        </p:txBody>
+      </p:sp>
+      <p:sp>
+        <p:nvSpPr>
+          <p:cNvPr id="28" name="Text 25"/>
+          <p:cNvSpPr/>
+          <p:nvPr/>
+        </p:nvSpPr>
+        <p:spPr>
+          <a:xfrm>
+            <a:off x="4434840" y="2372868"/>
+            <a:ext cx="3931920" cy="347472"/>
+          </a:xfrm>
+          <a:prstGeom prst="rect">
+            <a:avLst/>
+          </a:prstGeom>
+          <a:noFill/>
+          <a:ln/>
+        </p:spPr>
+        <p:txBody>
+          <a:bodyPr wrap="square" rtlCol="0" anchor="ctr"/>
+          <a:lstStyle/>
           <a:p>
             <a:pPr indent="0" marL="0">
-              <a:lnSpc>
-                <a:spcPct val="105000"/>
-              </a:lnSpc>
-              <a:spcAft>
-                <a:spcPts val="300"/>
-              </a:spcAft>
               <a:buNone/>
             </a:pPr>
             <a:r>
-              <a:rPr lang="en-US" sz="1050" b="1" dirty="0">
-                <a:solidFill>
-                  <a:srgbClr val="518E0D"/>
-                </a:solidFill>
-                <a:latin typeface="Noto Sans" pitchFamily="34" charset="0"/>
-                <a:ea typeface="Noto Sans" pitchFamily="34" charset="-122"/>
-                <a:cs typeface="Noto Sans" pitchFamily="34" charset="-120"/>
-              </a:rPr>
-              <a:t>Các option</a:t>
-            </a:r>
-            <a:endParaRPr lang="en-US" sz="1050" dirty="0"/>
-          </a:p>
-          <a:p>
-            <a:pPr marL="342900" indent="-342900">
-              <a:lnSpc>
-                <a:spcPct val="105000"/>
-              </a:lnSpc>
-              <a:spcAft>
-                <a:spcPts val="500"/>
-              </a:spcAft>
-              <a:buSzPct val="100000"/>
-              <a:buChar char="•"/>
-            </a:pPr>
-            <a:r>
-              <a:rPr lang="en-US" sz="980" dirty="0">
-                <a:solidFill>
-                  <a:srgbClr val="22333F"/>
-                </a:solidFill>
-                <a:latin typeface="Noto Sans" pitchFamily="34" charset="0"/>
-                <a:ea typeface="Noto Sans" pitchFamily="34" charset="-122"/>
-                <a:cs typeface="Noto Sans" pitchFamily="34" charset="-120"/>
-              </a:rPr>
-              <a:t>Option 3.1: AI nhân hoá “giáo viên ngôi sao”</a:t>
-            </a:r>
-            <a:endParaRPr lang="en-US" sz="1050" dirty="0"/>
-          </a:p>
-          <a:p>
-            <a:pPr marL="342900" indent="-342900">
-              <a:lnSpc>
-                <a:spcPct val="105000"/>
-              </a:lnSpc>
-              <a:spcAft>
-                <a:spcPts val="500"/>
-              </a:spcAft>
-              <a:buSzPct val="100000"/>
-              <a:buChar char="•"/>
-            </a:pPr>
-            <a:r>
-              <a:rPr lang="en-US" sz="980" dirty="0">
-                <a:solidFill>
-                  <a:srgbClr val="22333F"/>
-                </a:solidFill>
-                <a:latin typeface="Noto Sans" pitchFamily="34" charset="0"/>
-                <a:ea typeface="Noto Sans" pitchFamily="34" charset="-122"/>
-                <a:cs typeface="Noto Sans" pitchFamily="34" charset="-120"/>
-              </a:rPr>
-              <a:t>Option 3.2: AI tích hợp mascot + gamification</a:t>
-            </a:r>
-            <a:endParaRPr lang="en-US" sz="1050" dirty="0"/>
+              <a:rPr lang="en-US" sz="1000" i="1" dirty="0">
+                <a:solidFill>
+                  <a:srgbClr val="5B6472"/>
+                </a:solidFill>
+                <a:latin typeface="Noto Sans" pitchFamily="34" charset="0"/>
+                <a:ea typeface="Noto Sans" pitchFamily="34" charset="-122"/>
+                <a:cs typeface="Noto Sans" pitchFamily="34" charset="-120"/>
+              </a:rPr>
+              <a:t>Edupia Tutor 1-1</a:t>
+            </a:r>
+            <a:endParaRPr lang="en-US" sz="1000" dirty="0"/>
+          </a:p>
+        </p:txBody>
+      </p:sp>
+      <p:sp>
+        <p:nvSpPr>
+          <p:cNvPr id="29" name="Text 26"/>
+          <p:cNvSpPr/>
+          <p:nvPr/>
+        </p:nvSpPr>
+        <p:spPr>
+          <a:xfrm>
+            <a:off x="502920" y="5989320"/>
+            <a:ext cx="11183112" cy="384048"/>
+          </a:xfrm>
+          <a:prstGeom prst="rect">
+            <a:avLst/>
+          </a:prstGeom>
+          <a:noFill/>
+          <a:ln/>
+        </p:spPr>
+        <p:txBody>
+          <a:bodyPr wrap="square" rtlCol="0" anchor="ctr"/>
+          <a:lstStyle/>
+          <a:p>
+            <a:pPr indent="0" marL="0">
+              <a:buNone/>
+            </a:pPr>
+            <a:r>
+              <a:rPr lang="en-US" sz="950" i="1" dirty="0">
+                <a:solidFill>
+                  <a:srgbClr val="5B6472"/>
+                </a:solidFill>
+                <a:latin typeface="Noto Sans" pitchFamily="34" charset="0"/>
+                <a:ea typeface="Noto Sans" pitchFamily="34" charset="-122"/>
+                <a:cs typeface="Noto Sans" pitchFamily="34" charset="-120"/>
+              </a:rPr>
+              <a:t>Liên hệ: khoảng trống này là câu trả lời trực quan cho câu hỏi ở Slide 3 (“thị trường đang có phân khúc công ty đang bỏ lỡ”) — nằm giữa nhóm tự động hoá hoàn toàn (Self Learning → Big Class + AI) và nhóm gia sư người thật (Small-Group Tutor → Private Tutor).</a:t>
+            </a:r>
+            <a:endParaRPr lang="en-US" sz="950" dirty="0"/>
           </a:p>
         </p:txBody>
       </p:sp>
       <p:pic>
         <p:nvPicPr>
-          <p:cNvPr id="21" name="Image 1" descr="C:\Users\landa\AppData\Local\Temp\claude\c--Users-landa--Personal--D---n-AI-Class-new\8a85e8a7-bdeb-42d6-9168-79c96b849bd1\scratchpad\pptx-gen\logo-icon-only.png">    </p:cNvPr>
+          <p:cNvPr id="30" name="Image 1" descr="C:\Users\landa\AppData\Local\Temp\claude\c--Users-landa--Personal--D---n-AI-Class-new\8a85e8a7-bdeb-42d6-9168-79c96b849bd1\scratchpad\pptx-gen\logo-icon-only.png">    </p:cNvPr>
           <p:cNvPicPr>
             <a:picLocks noChangeAspect="1"/>
           </p:cNvPicPr>
@@ -7494,7 +9679,7 @@
       </p:pic>
       <p:sp>
         <p:nvSpPr>
-          <p:cNvPr id="22" name="Text 18"/>
+          <p:cNvPr id="31" name="Text 27"/>
           <p:cNvSpPr/>
           <p:nvPr/>
         </p:nvSpPr>
@@ -7533,7 +9718,7 @@
       </p:sp>
       <p:sp>
         <p:nvSpPr>
-          <p:cNvPr id="23" name="Text 19"/>
+          <p:cNvPr id="32" name="Text 28"/>
           <p:cNvSpPr/>
           <p:nvPr/>
         </p:nvSpPr>
@@ -7564,7 +9749,7 @@
                 <a:ea typeface="Noto Sans" pitchFamily="34" charset="-122"/>
                 <a:cs typeface="Noto Sans" pitchFamily="34" charset="-120"/>
               </a:rPr>
-              <a:t>4 / 9</a:t>
+              <a:t>4 / 11</a:t>
             </a:r>
             <a:endParaRPr lang="en-US" sz="850" dirty="0"/>
           </a:p>
@@ -7674,7 +9859,7 @@
                 <a:ea typeface="Noto Sans" pitchFamily="34" charset="-122"/>
                 <a:cs typeface="Noto Sans" pitchFamily="34" charset="-120"/>
               </a:rPr>
-              <a:t>Concept 1: Làm mịn và nâng cấp</a:t>
+              <a:t>Từ yếu tố tạo tiến bộ đến 3 hướng tạo giá trị</a:t>
             </a:r>
             <a:endParaRPr lang="en-US" sz="2600" dirty="0"/>
           </a:p>
@@ -7757,7 +9942,7 @@
                 <a:ea typeface="Noto Sans" pitchFamily="34" charset="-122"/>
                 <a:cs typeface="Noto Sans" pitchFamily="34" charset="-120"/>
               </a:rPr>
-              <a:t>Giữ nguyên Big Class + AI Practice + AI Speak + Edupia Club + GVCN hiện có — không đổi mô hình sản phẩm.</a:t>
+              <a:t>Giải thích khung tư duy đứng sau việc có đúng 3 định hướng concept — mỗi concept là một hướng tạo giá trị khác nhau, không phải 3 lựa chọn ngẫu nhiên.</a:t>
             </a:r>
             <a:endParaRPr lang="en-US" sz="1050" dirty="0"/>
           </a:p>
@@ -7771,11 +9956,103 @@
         </p:nvSpPr>
         <p:spPr>
           <a:xfrm>
-            <a:off x="502920" y="1664208"/>
-            <a:ext cx="73152" cy="1289304"/>
-          </a:xfrm>
-          <a:prstGeom prst="rect">
-            <a:avLst/>
+            <a:off x="2627711" y="1709928"/>
+            <a:ext cx="6933529" cy="438912"/>
+          </a:xfrm>
+          <a:prstGeom prst="roundRect">
+            <a:avLst>
+              <a:gd name="adj" fmla="val 10417"/>
+            </a:avLst>
+          </a:prstGeom>
+          <a:solidFill>
+            <a:srgbClr val="F2FAFB"/>
+          </a:solidFill>
+          <a:ln w="12700">
+            <a:solidFill>
+              <a:srgbClr val="004671"/>
+            </a:solidFill>
+            <a:prstDash val="solid"/>
+          </a:ln>
+        </p:spPr>
+      </p:sp>
+      <p:sp>
+        <p:nvSpPr>
+          <p:cNvPr id="8" name="Text 5"/>
+          <p:cNvSpPr/>
+          <p:nvPr/>
+        </p:nvSpPr>
+        <p:spPr>
+          <a:xfrm>
+            <a:off x="2627711" y="1709928"/>
+            <a:ext cx="6933529" cy="438912"/>
+          </a:xfrm>
+          <a:prstGeom prst="rect">
+            <a:avLst/>
+          </a:prstGeom>
+          <a:noFill/>
+          <a:ln/>
+        </p:spPr>
+        <p:txBody>
+          <a:bodyPr wrap="square" rtlCol="0" anchor="ctr"/>
+          <a:lstStyle/>
+          <a:p>
+            <a:pPr algn="ctr" indent="0" marL="0">
+              <a:buNone/>
+            </a:pPr>
+            <a:r>
+              <a:rPr lang="en-US" sz="1300" b="1" dirty="0">
+                <a:solidFill>
+                  <a:srgbClr val="004671"/>
+                </a:solidFill>
+                <a:latin typeface="Noto Sans" pitchFamily="34" charset="0"/>
+                <a:ea typeface="Noto Sans" pitchFamily="34" charset="-122"/>
+                <a:cs typeface="Noto Sans" pitchFamily="34" charset="-120"/>
+              </a:rPr>
+              <a:t>Teacher  +  AI  +  Environment  +  Accountability</a:t>
+            </a:r>
+            <a:endParaRPr lang="en-US" sz="1300" dirty="0"/>
+          </a:p>
+        </p:txBody>
+      </p:sp>
+      <p:sp>
+        <p:nvSpPr>
+          <p:cNvPr id="9" name="Shape 6"/>
+          <p:cNvSpPr/>
+          <p:nvPr/>
+        </p:nvSpPr>
+        <p:spPr>
+          <a:xfrm>
+            <a:off x="6094476" y="2148840"/>
+            <a:ext cx="0" cy="155448"/>
+          </a:xfrm>
+          <a:prstGeom prst="line">
+            <a:avLst/>
+          </a:prstGeom>
+          <a:noFill/>
+          <a:ln w="19050">
+            <a:solidFill>
+              <a:srgbClr val="004671"/>
+            </a:solidFill>
+            <a:prstDash val="solid"/>
+            <a:tailEnd type="triangle"/>
+          </a:ln>
+        </p:spPr>
+      </p:sp>
+      <p:sp>
+        <p:nvSpPr>
+          <p:cNvPr id="10" name="Shape 7"/>
+          <p:cNvSpPr/>
+          <p:nvPr/>
+        </p:nvSpPr>
+        <p:spPr>
+          <a:xfrm>
+            <a:off x="4081516" y="2304288"/>
+            <a:ext cx="4025920" cy="384048"/>
+          </a:xfrm>
+          <a:prstGeom prst="roundRect">
+            <a:avLst>
+              <a:gd name="adj" fmla="val 11905"/>
+            </a:avLst>
           </a:prstGeom>
           <a:solidFill>
             <a:srgbClr val="004671"/>
@@ -7785,14 +10062,14 @@
       </p:sp>
       <p:sp>
         <p:nvSpPr>
-          <p:cNvPr id="8" name="Text 5"/>
-          <p:cNvSpPr/>
-          <p:nvPr/>
-        </p:nvSpPr>
-        <p:spPr>
-          <a:xfrm>
-            <a:off x="731520" y="1664208"/>
-            <a:ext cx="10954512" cy="1289304"/>
+          <p:cNvPr id="11" name="Text 8"/>
+          <p:cNvSpPr/>
+          <p:nvPr/>
+        </p:nvSpPr>
+        <p:spPr>
+          <a:xfrm>
+            <a:off x="4081516" y="2304288"/>
+            <a:ext cx="4025920" cy="384048"/>
           </a:xfrm>
           <a:prstGeom prst="rect">
             <a:avLst/>
@@ -7801,44 +10078,399 @@
           <a:ln/>
         </p:spPr>
         <p:txBody>
-          <a:bodyPr wrap="square" rtlCol="0" anchor="t"/>
-          <a:lstStyle/>
-          <a:p>
-            <a:pPr indent="0" marL="0">
+          <a:bodyPr wrap="square" rtlCol="0" anchor="ctr"/>
+          <a:lstStyle/>
+          <a:p>
+            <a:pPr algn="ctr" indent="0" marL="0">
+              <a:buNone/>
+            </a:pPr>
+            <a:r>
+              <a:rPr lang="en-US" sz="1300" b="1" dirty="0">
+                <a:solidFill>
+                  <a:srgbClr val="FFFFFF"/>
+                </a:solidFill>
+                <a:latin typeface="Noto Sans" pitchFamily="34" charset="0"/>
+                <a:ea typeface="Noto Sans" pitchFamily="34" charset="-122"/>
+                <a:cs typeface="Noto Sans" pitchFamily="34" charset="-120"/>
+              </a:rPr>
+              <a:t>STUDENT PROGRESS</a:t>
+            </a:r>
+            <a:endParaRPr lang="en-US" sz="1300" dirty="0"/>
+          </a:p>
+        </p:txBody>
+      </p:sp>
+      <p:sp>
+        <p:nvSpPr>
+          <p:cNvPr id="12" name="Text 9"/>
+          <p:cNvSpPr/>
+          <p:nvPr/>
+        </p:nvSpPr>
+        <p:spPr>
+          <a:xfrm>
+            <a:off x="502920" y="2761488"/>
+            <a:ext cx="11183112" cy="292608"/>
+          </a:xfrm>
+          <a:prstGeom prst="rect">
+            <a:avLst/>
+          </a:prstGeom>
+          <a:noFill/>
+          <a:ln/>
+        </p:spPr>
+        <p:txBody>
+          <a:bodyPr wrap="square" rtlCol="0" anchor="ctr"/>
+          <a:lstStyle/>
+          <a:p>
+            <a:pPr algn="ctr" indent="0" marL="0">
+              <a:buNone/>
+            </a:pPr>
+            <a:r>
+              <a:rPr lang="en-US" sz="1200" b="1" i="1" dirty="0">
+                <a:solidFill>
+                  <a:srgbClr val="3B81B1"/>
+                </a:solidFill>
+                <a:latin typeface="Noto Sans" pitchFamily="34" charset="0"/>
+                <a:ea typeface="Noto Sans" pitchFamily="34" charset="-122"/>
+                <a:cs typeface="Noto Sans" pitchFamily="34" charset="-120"/>
+              </a:rPr>
+              <a:t>HOW CAN WE CREATE MORE VALUE?</a:t>
+            </a:r>
+            <a:endParaRPr lang="en-US" sz="1200" dirty="0"/>
+          </a:p>
+        </p:txBody>
+      </p:sp>
+      <p:sp>
+        <p:nvSpPr>
+          <p:cNvPr id="13" name="Shape 10"/>
+          <p:cNvSpPr/>
+          <p:nvPr/>
+        </p:nvSpPr>
+        <p:spPr>
+          <a:xfrm>
+            <a:off x="6094476" y="3054096"/>
+            <a:ext cx="0" cy="146304"/>
+          </a:xfrm>
+          <a:prstGeom prst="line">
+            <a:avLst/>
+          </a:prstGeom>
+          <a:noFill/>
+          <a:ln w="15875">
+            <a:solidFill>
+              <a:srgbClr val="5B6472"/>
+            </a:solidFill>
+            <a:prstDash val="solid"/>
+          </a:ln>
+        </p:spPr>
+      </p:sp>
+      <p:sp>
+        <p:nvSpPr>
+          <p:cNvPr id="14" name="Shape 11"/>
+          <p:cNvSpPr/>
+          <p:nvPr/>
+        </p:nvSpPr>
+        <p:spPr>
+          <a:xfrm>
+            <a:off x="2366772" y="3200400"/>
+            <a:ext cx="7455408" cy="0"/>
+          </a:xfrm>
+          <a:prstGeom prst="line">
+            <a:avLst/>
+          </a:prstGeom>
+          <a:noFill/>
+          <a:ln w="15875">
+            <a:solidFill>
+              <a:srgbClr val="5B6472"/>
+            </a:solidFill>
+            <a:prstDash val="solid"/>
+          </a:ln>
+        </p:spPr>
+      </p:sp>
+      <p:sp>
+        <p:nvSpPr>
+          <p:cNvPr id="15" name="Shape 12"/>
+          <p:cNvSpPr/>
+          <p:nvPr/>
+        </p:nvSpPr>
+        <p:spPr>
+          <a:xfrm>
+            <a:off x="2366772" y="3200400"/>
+            <a:ext cx="0" cy="164592"/>
+          </a:xfrm>
+          <a:prstGeom prst="line">
+            <a:avLst/>
+          </a:prstGeom>
+          <a:noFill/>
+          <a:ln w="15875">
+            <a:solidFill>
+              <a:srgbClr val="5B6472"/>
+            </a:solidFill>
+            <a:prstDash val="solid"/>
+            <a:tailEnd type="triangle"/>
+          </a:ln>
+        </p:spPr>
+      </p:sp>
+      <p:sp>
+        <p:nvSpPr>
+          <p:cNvPr id="16" name="Shape 13"/>
+          <p:cNvSpPr/>
+          <p:nvPr/>
+        </p:nvSpPr>
+        <p:spPr>
+          <a:xfrm>
+            <a:off x="6094476" y="3200400"/>
+            <a:ext cx="0" cy="164592"/>
+          </a:xfrm>
+          <a:prstGeom prst="line">
+            <a:avLst/>
+          </a:prstGeom>
+          <a:noFill/>
+          <a:ln w="15875">
+            <a:solidFill>
+              <a:srgbClr val="5B6472"/>
+            </a:solidFill>
+            <a:prstDash val="solid"/>
+            <a:tailEnd type="triangle"/>
+          </a:ln>
+        </p:spPr>
+      </p:sp>
+      <p:sp>
+        <p:nvSpPr>
+          <p:cNvPr id="17" name="Shape 14"/>
+          <p:cNvSpPr/>
+          <p:nvPr/>
+        </p:nvSpPr>
+        <p:spPr>
+          <a:xfrm>
+            <a:off x="9822180" y="3200400"/>
+            <a:ext cx="0" cy="164592"/>
+          </a:xfrm>
+          <a:prstGeom prst="line">
+            <a:avLst/>
+          </a:prstGeom>
+          <a:noFill/>
+          <a:ln w="15875">
+            <a:solidFill>
+              <a:srgbClr val="5B6472"/>
+            </a:solidFill>
+            <a:prstDash val="solid"/>
+            <a:tailEnd type="triangle"/>
+          </a:ln>
+        </p:spPr>
+      </p:sp>
+      <p:sp>
+        <p:nvSpPr>
+          <p:cNvPr id="18" name="Text 15"/>
+          <p:cNvSpPr/>
+          <p:nvPr/>
+        </p:nvSpPr>
+        <p:spPr>
+          <a:xfrm>
+            <a:off x="720852" y="3383280"/>
+            <a:ext cx="3291840" cy="347472"/>
+          </a:xfrm>
+          <a:prstGeom prst="rect">
+            <a:avLst/>
+          </a:prstGeom>
+          <a:noFill/>
+          <a:ln/>
+        </p:spPr>
+        <p:txBody>
+          <a:bodyPr wrap="square" rtlCol="0" anchor="ctr"/>
+          <a:lstStyle/>
+          <a:p>
+            <a:pPr algn="ctr" indent="0" marL="0">
+              <a:buNone/>
+            </a:pPr>
+            <a:r>
+              <a:rPr lang="en-US" sz="1700" b="1" dirty="0">
+                <a:solidFill>
+                  <a:srgbClr val="004671"/>
+                </a:solidFill>
+                <a:latin typeface="Noto Sans" pitchFamily="34" charset="0"/>
+                <a:ea typeface="Noto Sans" pitchFamily="34" charset="-122"/>
+                <a:cs typeface="Noto Sans" pitchFamily="34" charset="-120"/>
+              </a:rPr>
+              <a:t>DEEPEN</a:t>
+            </a:r>
+            <a:endParaRPr lang="en-US" sz="1700" dirty="0"/>
+          </a:p>
+        </p:txBody>
+      </p:sp>
+      <p:sp>
+        <p:nvSpPr>
+          <p:cNvPr id="19" name="Text 16"/>
+          <p:cNvSpPr/>
+          <p:nvPr/>
+        </p:nvSpPr>
+        <p:spPr>
+          <a:xfrm>
+            <a:off x="720852" y="3749040"/>
+            <a:ext cx="3291840" cy="502920"/>
+          </a:xfrm>
+          <a:prstGeom prst="rect">
+            <a:avLst/>
+          </a:prstGeom>
+          <a:noFill/>
+          <a:ln/>
+        </p:spPr>
+        <p:txBody>
+          <a:bodyPr wrap="square" rtlCol="0" anchor="ctr"/>
+          <a:lstStyle/>
+          <a:p>
+            <a:pPr algn="ctr" indent="0" marL="0">
               <a:lnSpc>
-                <a:spcPct val="102000"/>
+                <a:spcPct val="105000"/>
               </a:lnSpc>
-              <a:spcAft>
-                <a:spcPts val="200"/>
-              </a:spcAft>
               <a:buNone/>
             </a:pPr>
             <a:r>
-              <a:rPr lang="en-US" sz="1300" b="1" dirty="0">
-                <a:solidFill>
-                  <a:srgbClr val="004671"/>
-                </a:solidFill>
-                <a:latin typeface="Noto Sans" pitchFamily="34" charset="0"/>
-                <a:ea typeface="Noto Sans" pitchFamily="34" charset="-122"/>
-                <a:cs typeface="Noto Sans" pitchFamily="34" charset="-120"/>
-              </a:rPr>
-              <a:t>Option 1.1 — Nâng cấp chất lượng nội dung có sẵn, không đổi cấu trúc sản phẩm</a:t>
-            </a:r>
-            <a:endParaRPr lang="en-US" sz="1300" dirty="0"/>
-          </a:p>
-          <a:p>
-            <a:pPr marL="342900" indent="-342900">
+              <a:rPr lang="en-US" sz="1050" i="1" dirty="0">
+                <a:solidFill>
+                  <a:srgbClr val="5B6472"/>
+                </a:solidFill>
+                <a:latin typeface="Noto Sans" pitchFamily="34" charset="0"/>
+                <a:ea typeface="Noto Sans" pitchFamily="34" charset="-122"/>
+                <a:cs typeface="Noto Sans" pitchFamily="34" charset="-120"/>
+              </a:rPr>
+              <a:t>Làm tốt hơn</a:t>
+            </a:r>
+            <a:endParaRPr lang="en-US" sz="1050" dirty="0"/>
+          </a:p>
+          <a:p>
+            <a:pPr algn="ctr" indent="0" marL="0">
               <a:lnSpc>
-                <a:spcPct val="102000"/>
+                <a:spcPct val="105000"/>
               </a:lnSpc>
-              <a:spcAft>
-                <a:spcPts val="300"/>
-              </a:spcAft>
-              <a:buSzPct val="100000"/>
-              <a:buChar char="•"/>
-            </a:pPr>
-            <a:r>
-              <a:rPr lang="en-US" sz="1100" dirty="0">
+              <a:buNone/>
+            </a:pPr>
+            <a:r>
+              <a:rPr lang="en-US" sz="1050" i="1" dirty="0">
+                <a:solidFill>
+                  <a:srgbClr val="5B6472"/>
+                </a:solidFill>
+                <a:latin typeface="Noto Sans" pitchFamily="34" charset="0"/>
+                <a:ea typeface="Noto Sans" pitchFamily="34" charset="-122"/>
+                <a:cs typeface="Noto Sans" pitchFamily="34" charset="-120"/>
+              </a:rPr>
+              <a:t>mô hình hiện tại</a:t>
+            </a:r>
+            <a:endParaRPr lang="en-US" sz="1050" dirty="0"/>
+          </a:p>
+        </p:txBody>
+      </p:sp>
+      <p:sp>
+        <p:nvSpPr>
+          <p:cNvPr id="20" name="Shape 17"/>
+          <p:cNvSpPr/>
+          <p:nvPr/>
+        </p:nvSpPr>
+        <p:spPr>
+          <a:xfrm>
+            <a:off x="2366772" y="4279392"/>
+            <a:ext cx="0" cy="164592"/>
+          </a:xfrm>
+          <a:prstGeom prst="line">
+            <a:avLst/>
+          </a:prstGeom>
+          <a:noFill/>
+          <a:ln w="19050">
+            <a:solidFill>
+              <a:srgbClr val="004671"/>
+            </a:solidFill>
+            <a:prstDash val="solid"/>
+            <a:tailEnd type="triangle"/>
+          </a:ln>
+        </p:spPr>
+      </p:sp>
+      <p:sp>
+        <p:nvSpPr>
+          <p:cNvPr id="21" name="Shape 18"/>
+          <p:cNvSpPr/>
+          <p:nvPr/>
+        </p:nvSpPr>
+        <p:spPr>
+          <a:xfrm>
+            <a:off x="720852" y="4462272"/>
+            <a:ext cx="3291840" cy="457200"/>
+          </a:xfrm>
+          <a:prstGeom prst="roundRect">
+            <a:avLst>
+              <a:gd name="adj" fmla="val 10000"/>
+            </a:avLst>
+          </a:prstGeom>
+          <a:solidFill>
+            <a:srgbClr val="004671"/>
+          </a:solidFill>
+          <a:ln/>
+        </p:spPr>
+      </p:sp>
+      <p:sp>
+        <p:nvSpPr>
+          <p:cNvPr id="22" name="Text 19"/>
+          <p:cNvSpPr/>
+          <p:nvPr/>
+        </p:nvSpPr>
+        <p:spPr>
+          <a:xfrm>
+            <a:off x="720852" y="4462272"/>
+            <a:ext cx="3291840" cy="457200"/>
+          </a:xfrm>
+          <a:prstGeom prst="rect">
+            <a:avLst/>
+          </a:prstGeom>
+          <a:noFill/>
+          <a:ln/>
+        </p:spPr>
+        <p:txBody>
+          <a:bodyPr wrap="square" rtlCol="0" anchor="ctr"/>
+          <a:lstStyle/>
+          <a:p>
+            <a:pPr algn="ctr" indent="0" marL="0">
+              <a:buNone/>
+            </a:pPr>
+            <a:r>
+              <a:rPr lang="en-US" sz="1400" b="1" dirty="0">
+                <a:solidFill>
+                  <a:srgbClr val="FFFFFF"/>
+                </a:solidFill>
+                <a:latin typeface="Noto Sans" pitchFamily="34" charset="0"/>
+                <a:ea typeface="Noto Sans" pitchFamily="34" charset="-122"/>
+                <a:cs typeface="Noto Sans" pitchFamily="34" charset="-120"/>
+              </a:rPr>
+              <a:t>CONCEPT 1</a:t>
+            </a:r>
+            <a:endParaRPr lang="en-US" sz="1400" dirty="0"/>
+          </a:p>
+        </p:txBody>
+      </p:sp>
+      <p:sp>
+        <p:nvSpPr>
+          <p:cNvPr id="23" name="Text 20"/>
+          <p:cNvSpPr/>
+          <p:nvPr/>
+        </p:nvSpPr>
+        <p:spPr>
+          <a:xfrm>
+            <a:off x="720852" y="5010912"/>
+            <a:ext cx="3291840" cy="685800"/>
+          </a:xfrm>
+          <a:prstGeom prst="rect">
+            <a:avLst/>
+          </a:prstGeom>
+          <a:noFill/>
+          <a:ln/>
+        </p:spPr>
+        <p:txBody>
+          <a:bodyPr wrap="square" rtlCol="0" anchor="ctr"/>
+          <a:lstStyle/>
+          <a:p>
+            <a:pPr algn="ctr" indent="0" marL="0">
+              <a:lnSpc>
+                <a:spcPct val="108000"/>
+              </a:lnSpc>
+              <a:buNone/>
+            </a:pPr>
+            <a:r>
+              <a:rPr lang="en-US" sz="1050" dirty="0">
                 <a:solidFill>
                   <a:srgbClr val="22333F"/>
                 </a:solidFill>
@@ -7846,23 +10478,19 @@
                 <a:ea typeface="Noto Sans" pitchFamily="34" charset="-122"/>
                 <a:cs typeface="Noto Sans" pitchFamily="34" charset="-120"/>
               </a:rPr>
-              <a:t>Nâng cấp kho đề Practice + AI Mocktest</a:t>
-            </a:r>
-            <a:endParaRPr lang="en-US" sz="1300" dirty="0"/>
-          </a:p>
-          <a:p>
-            <a:pPr marL="342900" indent="-342900">
+              <a:t>Content (Option 1.1)</a:t>
+            </a:r>
+            <a:endParaRPr lang="en-US" sz="1050" dirty="0"/>
+          </a:p>
+          <a:p>
+            <a:pPr algn="ctr" indent="0" marL="0">
               <a:lnSpc>
-                <a:spcPct val="102000"/>
+                <a:spcPct val="108000"/>
               </a:lnSpc>
-              <a:spcAft>
-                <a:spcPts val="300"/>
-              </a:spcAft>
-              <a:buSzPct val="100000"/>
-              <a:buChar char="•"/>
-            </a:pPr>
-            <a:r>
-              <a:rPr lang="en-US" sz="1100" dirty="0">
+              <a:buNone/>
+            </a:pPr>
+            <a:r>
+              <a:rPr lang="en-US" sz="1050" dirty="0">
                 <a:solidFill>
                   <a:srgbClr val="22333F"/>
                 </a:solidFill>
@@ -7870,25 +10498,172 @@
                 <a:ea typeface="Noto Sans" pitchFamily="34" charset="-122"/>
                 <a:cs typeface="Noto Sans" pitchFamily="34" charset="-120"/>
               </a:rPr>
-              <a:t>Nâng cấp độ chính xác chấm-chữa phát âm Speak</a:t>
-            </a:r>
-            <a:endParaRPr lang="en-US" sz="1300" dirty="0"/>
-          </a:p>
-        </p:txBody>
-      </p:sp>
-      <p:sp>
-        <p:nvSpPr>
-          <p:cNvPr id="9" name="Shape 6"/>
-          <p:cNvSpPr/>
-          <p:nvPr/>
-        </p:nvSpPr>
-        <p:spPr>
-          <a:xfrm>
-            <a:off x="502920" y="3136392"/>
-            <a:ext cx="73152" cy="1289304"/>
-          </a:xfrm>
-          <a:prstGeom prst="rect">
-            <a:avLst/>
+              <a:t>+ AI (Option 1.2)</a:t>
+            </a:r>
+            <a:endParaRPr lang="en-US" sz="1050" dirty="0"/>
+          </a:p>
+          <a:p>
+            <a:pPr algn="ctr" indent="0" marL="0">
+              <a:lnSpc>
+                <a:spcPct val="108000"/>
+              </a:lnSpc>
+              <a:buNone/>
+            </a:pPr>
+            <a:r>
+              <a:rPr lang="en-US" sz="1050" dirty="0">
+                <a:solidFill>
+                  <a:srgbClr val="22333F"/>
+                </a:solidFill>
+                <a:latin typeface="Noto Sans" pitchFamily="34" charset="0"/>
+                <a:ea typeface="Noto Sans" pitchFamily="34" charset="-122"/>
+                <a:cs typeface="Noto Sans" pitchFamily="34" charset="-120"/>
+              </a:rPr>
+              <a:t>+ GVCN (Option 1.3)</a:t>
+            </a:r>
+            <a:endParaRPr lang="en-US" sz="1050" dirty="0"/>
+          </a:p>
+        </p:txBody>
+      </p:sp>
+      <p:sp>
+        <p:nvSpPr>
+          <p:cNvPr id="24" name="Text 21"/>
+          <p:cNvSpPr/>
+          <p:nvPr/>
+        </p:nvSpPr>
+        <p:spPr>
+          <a:xfrm>
+            <a:off x="4448556" y="3383280"/>
+            <a:ext cx="3291840" cy="347472"/>
+          </a:xfrm>
+          <a:prstGeom prst="rect">
+            <a:avLst/>
+          </a:prstGeom>
+          <a:noFill/>
+          <a:ln/>
+        </p:spPr>
+        <p:txBody>
+          <a:bodyPr wrap="square" rtlCol="0" anchor="ctr"/>
+          <a:lstStyle/>
+          <a:p>
+            <a:pPr algn="ctr" indent="0" marL="0">
+              <a:buNone/>
+            </a:pPr>
+            <a:r>
+              <a:rPr lang="en-US" sz="1700" b="1" dirty="0">
+                <a:solidFill>
+                  <a:srgbClr val="3B81B1"/>
+                </a:solidFill>
+                <a:latin typeface="Noto Sans" pitchFamily="34" charset="0"/>
+                <a:ea typeface="Noto Sans" pitchFamily="34" charset="-122"/>
+                <a:cs typeface="Noto Sans" pitchFamily="34" charset="-120"/>
+              </a:rPr>
+              <a:t>EXPAND</a:t>
+            </a:r>
+            <a:endParaRPr lang="en-US" sz="1700" dirty="0"/>
+          </a:p>
+        </p:txBody>
+      </p:sp>
+      <p:sp>
+        <p:nvSpPr>
+          <p:cNvPr id="25" name="Text 22"/>
+          <p:cNvSpPr/>
+          <p:nvPr/>
+        </p:nvSpPr>
+        <p:spPr>
+          <a:xfrm>
+            <a:off x="4448556" y="3749040"/>
+            <a:ext cx="3291840" cy="502920"/>
+          </a:xfrm>
+          <a:prstGeom prst="rect">
+            <a:avLst/>
+          </a:prstGeom>
+          <a:noFill/>
+          <a:ln/>
+        </p:spPr>
+        <p:txBody>
+          <a:bodyPr wrap="square" rtlCol="0" anchor="ctr"/>
+          <a:lstStyle/>
+          <a:p>
+            <a:pPr algn="ctr" indent="0" marL="0">
+              <a:lnSpc>
+                <a:spcPct val="105000"/>
+              </a:lnSpc>
+              <a:buNone/>
+            </a:pPr>
+            <a:r>
+              <a:rPr lang="en-US" sz="1050" i="1" dirty="0">
+                <a:solidFill>
+                  <a:srgbClr val="5B6472"/>
+                </a:solidFill>
+                <a:latin typeface="Noto Sans" pitchFamily="34" charset="0"/>
+                <a:ea typeface="Noto Sans" pitchFamily="34" charset="-122"/>
+                <a:cs typeface="Noto Sans" pitchFamily="34" charset="-120"/>
+              </a:rPr>
+              <a:t>Nhiều giá trị hơn</a:t>
+            </a:r>
+            <a:endParaRPr lang="en-US" sz="1050" dirty="0"/>
+          </a:p>
+          <a:p>
+            <a:pPr algn="ctr" indent="0" marL="0">
+              <a:lnSpc>
+                <a:spcPct val="105000"/>
+              </a:lnSpc>
+              <a:buNone/>
+            </a:pPr>
+            <a:r>
+              <a:rPr lang="en-US" sz="1050" i="1" dirty="0">
+                <a:solidFill>
+                  <a:srgbClr val="5B6472"/>
+                </a:solidFill>
+                <a:latin typeface="Noto Sans" pitchFamily="34" charset="0"/>
+                <a:ea typeface="Noto Sans" pitchFamily="34" charset="-122"/>
+                <a:cs typeface="Noto Sans" pitchFamily="34" charset="-120"/>
+              </a:rPr>
+              <a:t>cho gia đình</a:t>
+            </a:r>
+            <a:endParaRPr lang="en-US" sz="1050" dirty="0"/>
+          </a:p>
+        </p:txBody>
+      </p:sp>
+      <p:sp>
+        <p:nvSpPr>
+          <p:cNvPr id="26" name="Shape 23"/>
+          <p:cNvSpPr/>
+          <p:nvPr/>
+        </p:nvSpPr>
+        <p:spPr>
+          <a:xfrm>
+            <a:off x="6094476" y="4279392"/>
+            <a:ext cx="0" cy="164592"/>
+          </a:xfrm>
+          <a:prstGeom prst="line">
+            <a:avLst/>
+          </a:prstGeom>
+          <a:noFill/>
+          <a:ln w="19050">
+            <a:solidFill>
+              <a:srgbClr val="3B81B1"/>
+            </a:solidFill>
+            <a:prstDash val="solid"/>
+            <a:tailEnd type="triangle"/>
+          </a:ln>
+        </p:spPr>
+      </p:sp>
+      <p:sp>
+        <p:nvSpPr>
+          <p:cNvPr id="27" name="Shape 24"/>
+          <p:cNvSpPr/>
+          <p:nvPr/>
+        </p:nvSpPr>
+        <p:spPr>
+          <a:xfrm>
+            <a:off x="4448556" y="4462272"/>
+            <a:ext cx="3291840" cy="457200"/>
+          </a:xfrm>
+          <a:prstGeom prst="roundRect">
+            <a:avLst>
+              <a:gd name="adj" fmla="val 10000"/>
+            </a:avLst>
           </a:prstGeom>
           <a:solidFill>
             <a:srgbClr val="3B81B1"/>
@@ -7898,14 +10673,14 @@
       </p:sp>
       <p:sp>
         <p:nvSpPr>
-          <p:cNvPr id="10" name="Text 7"/>
-          <p:cNvSpPr/>
-          <p:nvPr/>
-        </p:nvSpPr>
-        <p:spPr>
-          <a:xfrm>
-            <a:off x="731520" y="3136392"/>
-            <a:ext cx="10954512" cy="1289304"/>
+          <p:cNvPr id="28" name="Text 25"/>
+          <p:cNvSpPr/>
+          <p:nvPr/>
+        </p:nvSpPr>
+        <p:spPr>
+          <a:xfrm>
+            <a:off x="4448556" y="4462272"/>
+            <a:ext cx="3291840" cy="457200"/>
           </a:xfrm>
           <a:prstGeom prst="rect">
             <a:avLst/>
@@ -7914,44 +10689,76 @@
           <a:ln/>
         </p:spPr>
         <p:txBody>
-          <a:bodyPr wrap="square" rtlCol="0" anchor="t"/>
-          <a:lstStyle/>
-          <a:p>
-            <a:pPr indent="0" marL="0">
+          <a:bodyPr wrap="square" rtlCol="0" anchor="ctr"/>
+          <a:lstStyle/>
+          <a:p>
+            <a:pPr algn="ctr" indent="0" marL="0">
+              <a:buNone/>
+            </a:pPr>
+            <a:r>
+              <a:rPr lang="en-US" sz="1400" b="1" dirty="0">
+                <a:solidFill>
+                  <a:srgbClr val="FFFFFF"/>
+                </a:solidFill>
+                <a:latin typeface="Noto Sans" pitchFamily="34" charset="0"/>
+                <a:ea typeface="Noto Sans" pitchFamily="34" charset="-122"/>
+                <a:cs typeface="Noto Sans" pitchFamily="34" charset="-120"/>
+              </a:rPr>
+              <a:t>CONCEPT 2</a:t>
+            </a:r>
+            <a:endParaRPr lang="en-US" sz="1400" dirty="0"/>
+          </a:p>
+        </p:txBody>
+      </p:sp>
+      <p:sp>
+        <p:nvSpPr>
+          <p:cNvPr id="29" name="Text 26"/>
+          <p:cNvSpPr/>
+          <p:nvPr/>
+        </p:nvSpPr>
+        <p:spPr>
+          <a:xfrm>
+            <a:off x="4448556" y="5010912"/>
+            <a:ext cx="3291840" cy="685800"/>
+          </a:xfrm>
+          <a:prstGeom prst="rect">
+            <a:avLst/>
+          </a:prstGeom>
+          <a:noFill/>
+          <a:ln/>
+        </p:spPr>
+        <p:txBody>
+          <a:bodyPr wrap="square" rtlCol="0" anchor="ctr"/>
+          <a:lstStyle/>
+          <a:p>
+            <a:pPr algn="ctr" indent="0" marL="0">
               <a:lnSpc>
-                <a:spcPct val="102000"/>
+                <a:spcPct val="108000"/>
               </a:lnSpc>
-              <a:spcAft>
-                <a:spcPts val="200"/>
-              </a:spcAft>
               <a:buNone/>
             </a:pPr>
             <a:r>
-              <a:rPr lang="en-US" sz="1300" b="1" dirty="0">
-                <a:solidFill>
-                  <a:srgbClr val="004671"/>
-                </a:solidFill>
-                <a:latin typeface="Noto Sans" pitchFamily="34" charset="0"/>
-                <a:ea typeface="Noto Sans" pitchFamily="34" charset="-122"/>
-                <a:cs typeface="Noto Sans" pitchFamily="34" charset="-120"/>
-              </a:rPr>
-              <a:t>Mức 1.2 — Đầu tư sâu vào tầng công nghệ AI chẩn đoán và cá nhân hóa</a:t>
-            </a:r>
-            <a:endParaRPr lang="en-US" sz="1300" dirty="0"/>
-          </a:p>
-          <a:p>
-            <a:pPr marL="342900" indent="-342900">
+              <a:rPr lang="en-US" sz="1050" dirty="0">
+                <a:solidFill>
+                  <a:srgbClr val="22333F"/>
+                </a:solidFill>
+                <a:latin typeface="Noto Sans" pitchFamily="34" charset="0"/>
+                <a:ea typeface="Noto Sans" pitchFamily="34" charset="-122"/>
+                <a:cs typeface="Noto Sans" pitchFamily="34" charset="-120"/>
+              </a:rPr>
+              <a:t>+ 1-2 môn học khác</a:t>
+            </a:r>
+            <a:endParaRPr lang="en-US" sz="1050" dirty="0"/>
+          </a:p>
+          <a:p>
+            <a:pPr algn="ctr" indent="0" marL="0">
               <a:lnSpc>
-                <a:spcPct val="102000"/>
+                <a:spcPct val="108000"/>
               </a:lnSpc>
-              <a:spcAft>
-                <a:spcPts val="300"/>
-              </a:spcAft>
-              <a:buSzPct val="100000"/>
-              <a:buChar char="•"/>
-            </a:pPr>
-            <a:r>
-              <a:rPr lang="en-US" sz="1100" dirty="0">
+              <a:buNone/>
+            </a:pPr>
+            <a:r>
+              <a:rPr lang="en-US" sz="1050" dirty="0">
                 <a:solidFill>
                   <a:srgbClr val="22333F"/>
                 </a:solidFill>
@@ -7959,97 +10766,152 @@
                 <a:ea typeface="Noto Sans" pitchFamily="34" charset="-122"/>
                 <a:cs typeface="Noto Sans" pitchFamily="34" charset="-120"/>
               </a:rPr>
-              <a:t>Kế thừa toàn bộ Option 1.1</a:t>
-            </a:r>
-            <a:endParaRPr lang="en-US" sz="1300" dirty="0"/>
-          </a:p>
-          <a:p>
-            <a:pPr marL="342900" indent="-342900">
+              <a:t>ngoài tiếng Anh</a:t>
+            </a:r>
+            <a:endParaRPr lang="en-US" sz="1050" dirty="0"/>
+          </a:p>
+        </p:txBody>
+      </p:sp>
+      <p:sp>
+        <p:nvSpPr>
+          <p:cNvPr id="30" name="Text 27"/>
+          <p:cNvSpPr/>
+          <p:nvPr/>
+        </p:nvSpPr>
+        <p:spPr>
+          <a:xfrm>
+            <a:off x="8176260" y="3383280"/>
+            <a:ext cx="3291840" cy="347472"/>
+          </a:xfrm>
+          <a:prstGeom prst="rect">
+            <a:avLst/>
+          </a:prstGeom>
+          <a:noFill/>
+          <a:ln/>
+        </p:spPr>
+        <p:txBody>
+          <a:bodyPr wrap="square" rtlCol="0" anchor="ctr"/>
+          <a:lstStyle/>
+          <a:p>
+            <a:pPr algn="ctr" indent="0" marL="0">
+              <a:buNone/>
+            </a:pPr>
+            <a:r>
+              <a:rPr lang="en-US" sz="1700" b="1" dirty="0">
+                <a:solidFill>
+                  <a:srgbClr val="518E0D"/>
+                </a:solidFill>
+                <a:latin typeface="Noto Sans" pitchFamily="34" charset="0"/>
+                <a:ea typeface="Noto Sans" pitchFamily="34" charset="-122"/>
+                <a:cs typeface="Noto Sans" pitchFamily="34" charset="-120"/>
+              </a:rPr>
+              <a:t>TRANSFORM</a:t>
+            </a:r>
+            <a:endParaRPr lang="en-US" sz="1700" dirty="0"/>
+          </a:p>
+        </p:txBody>
+      </p:sp>
+      <p:sp>
+        <p:nvSpPr>
+          <p:cNvPr id="31" name="Text 28"/>
+          <p:cNvSpPr/>
+          <p:nvPr/>
+        </p:nvSpPr>
+        <p:spPr>
+          <a:xfrm>
+            <a:off x="8176260" y="3749040"/>
+            <a:ext cx="3291840" cy="502920"/>
+          </a:xfrm>
+          <a:prstGeom prst="rect">
+            <a:avLst/>
+          </a:prstGeom>
+          <a:noFill/>
+          <a:ln/>
+        </p:spPr>
+        <p:txBody>
+          <a:bodyPr wrap="square" rtlCol="0" anchor="ctr"/>
+          <a:lstStyle/>
+          <a:p>
+            <a:pPr algn="ctr" indent="0" marL="0">
               <a:lnSpc>
-                <a:spcPct val="102000"/>
+                <a:spcPct val="105000"/>
               </a:lnSpc>
-              <a:spcAft>
-                <a:spcPts val="300"/>
-              </a:spcAft>
-              <a:buSzPct val="100000"/>
-              <a:buChar char="•"/>
-            </a:pPr>
-            <a:r>
-              <a:rPr lang="en-US" sz="1100" dirty="0">
-                <a:solidFill>
-                  <a:srgbClr val="22333F"/>
-                </a:solidFill>
-                <a:latin typeface="Noto Sans" pitchFamily="34" charset="0"/>
-                <a:ea typeface="Noto Sans" pitchFamily="34" charset="-122"/>
-                <a:cs typeface="Noto Sans" pitchFamily="34" charset="-120"/>
-              </a:rPr>
-              <a:t>AI Tutor 30 phút cố định sau Big Class</a:t>
-            </a:r>
-            <a:endParaRPr lang="en-US" sz="1300" dirty="0"/>
-          </a:p>
-          <a:p>
-            <a:pPr marL="342900" indent="-342900">
+              <a:buNone/>
+            </a:pPr>
+            <a:r>
+              <a:rPr lang="en-US" sz="1050" i="1" dirty="0">
+                <a:solidFill>
+                  <a:srgbClr val="5B6472"/>
+                </a:solidFill>
+                <a:latin typeface="Noto Sans" pitchFamily="34" charset="0"/>
+                <a:ea typeface="Noto Sans" pitchFamily="34" charset="-122"/>
+                <a:cs typeface="Noto Sans" pitchFamily="34" charset="-120"/>
+              </a:rPr>
+              <a:t>Thay đổi</a:t>
+            </a:r>
+            <a:endParaRPr lang="en-US" sz="1050" dirty="0"/>
+          </a:p>
+          <a:p>
+            <a:pPr algn="ctr" indent="0" marL="0">
               <a:lnSpc>
-                <a:spcPct val="102000"/>
+                <a:spcPct val="105000"/>
               </a:lnSpc>
-              <a:spcAft>
-                <a:spcPts val="300"/>
-              </a:spcAft>
-              <a:buSzPct val="100000"/>
-              <a:buChar char="•"/>
-            </a:pPr>
-            <a:r>
-              <a:rPr lang="en-US" sz="1100" dirty="0">
-                <a:solidFill>
-                  <a:srgbClr val="22333F"/>
-                </a:solidFill>
-                <a:latin typeface="Noto Sans" pitchFamily="34" charset="0"/>
-                <a:ea typeface="Noto Sans" pitchFamily="34" charset="-122"/>
-                <a:cs typeface="Noto Sans" pitchFamily="34" charset="-120"/>
-              </a:rPr>
-              <a:t>Adaptive Learning: tự động vá lỗ hổng theo 1.473 đơn vị kiến thức (NLO)</a:t>
-            </a:r>
-            <a:endParaRPr lang="en-US" sz="1300" dirty="0"/>
-          </a:p>
-          <a:p>
-            <a:pPr marL="342900" indent="-342900">
-              <a:lnSpc>
-                <a:spcPct val="102000"/>
-              </a:lnSpc>
-              <a:spcAft>
-                <a:spcPts val="300"/>
-              </a:spcAft>
-              <a:buSzPct val="100000"/>
-              <a:buChar char="•"/>
-            </a:pPr>
-            <a:r>
-              <a:rPr lang="en-US" sz="1100" dirty="0">
-                <a:solidFill>
-                  <a:srgbClr val="22333F"/>
-                </a:solidFill>
-                <a:latin typeface="Noto Sans" pitchFamily="34" charset="0"/>
-                <a:ea typeface="Noto Sans" pitchFamily="34" charset="-122"/>
-                <a:cs typeface="Noto Sans" pitchFamily="34" charset="-120"/>
-              </a:rPr>
-              <a:t>Parent Mode — Mastery Map: giao diện dành riêng cho phụ huynh để theo dõi tiến bộ của con</a:t>
-            </a:r>
-            <a:endParaRPr lang="en-US" sz="1300" dirty="0"/>
-          </a:p>
-        </p:txBody>
-      </p:sp>
-      <p:sp>
-        <p:nvSpPr>
-          <p:cNvPr id="11" name="Shape 8"/>
-          <p:cNvSpPr/>
-          <p:nvPr/>
-        </p:nvSpPr>
-        <p:spPr>
-          <a:xfrm>
-            <a:off x="502920" y="4608576"/>
-            <a:ext cx="73152" cy="1289304"/>
-          </a:xfrm>
-          <a:prstGeom prst="rect">
-            <a:avLst/>
+              <a:buNone/>
+            </a:pPr>
+            <a:r>
+              <a:rPr lang="en-US" sz="1050" i="1" dirty="0">
+                <a:solidFill>
+                  <a:srgbClr val="5B6472"/>
+                </a:solidFill>
+                <a:latin typeface="Noto Sans" pitchFamily="34" charset="0"/>
+                <a:ea typeface="Noto Sans" pitchFamily="34" charset="-122"/>
+                <a:cs typeface="Noto Sans" pitchFamily="34" charset="-120"/>
+              </a:rPr>
+              <a:t>mô hình</a:t>
+            </a:r>
+            <a:endParaRPr lang="en-US" sz="1050" dirty="0"/>
+          </a:p>
+        </p:txBody>
+      </p:sp>
+      <p:sp>
+        <p:nvSpPr>
+          <p:cNvPr id="32" name="Shape 29"/>
+          <p:cNvSpPr/>
+          <p:nvPr/>
+        </p:nvSpPr>
+        <p:spPr>
+          <a:xfrm>
+            <a:off x="9822180" y="4279392"/>
+            <a:ext cx="0" cy="164592"/>
+          </a:xfrm>
+          <a:prstGeom prst="line">
+            <a:avLst/>
+          </a:prstGeom>
+          <a:noFill/>
+          <a:ln w="19050">
+            <a:solidFill>
+              <a:srgbClr val="518E0D"/>
+            </a:solidFill>
+            <a:prstDash val="solid"/>
+            <a:tailEnd type="triangle"/>
+          </a:ln>
+        </p:spPr>
+      </p:sp>
+      <p:sp>
+        <p:nvSpPr>
+          <p:cNvPr id="33" name="Shape 30"/>
+          <p:cNvSpPr/>
+          <p:nvPr/>
+        </p:nvSpPr>
+        <p:spPr>
+          <a:xfrm>
+            <a:off x="8176260" y="4462272"/>
+            <a:ext cx="3291840" cy="457200"/>
+          </a:xfrm>
+          <a:prstGeom prst="roundRect">
+            <a:avLst>
+              <a:gd name="adj" fmla="val 10000"/>
+            </a:avLst>
           </a:prstGeom>
           <a:solidFill>
             <a:srgbClr val="518E0D"/>
@@ -8059,14 +10921,14 @@
       </p:sp>
       <p:sp>
         <p:nvSpPr>
-          <p:cNvPr id="12" name="Text 9"/>
-          <p:cNvSpPr/>
-          <p:nvPr/>
-        </p:nvSpPr>
-        <p:spPr>
-          <a:xfrm>
-            <a:off x="731520" y="4608576"/>
-            <a:ext cx="10954512" cy="1289304"/>
+          <p:cNvPr id="34" name="Text 31"/>
+          <p:cNvSpPr/>
+          <p:nvPr/>
+        </p:nvSpPr>
+        <p:spPr>
+          <a:xfrm>
+            <a:off x="8176260" y="4462272"/>
+            <a:ext cx="3291840" cy="457200"/>
           </a:xfrm>
           <a:prstGeom prst="rect">
             <a:avLst/>
@@ -8075,44 +10937,76 @@
           <a:ln/>
         </p:spPr>
         <p:txBody>
-          <a:bodyPr wrap="square" rtlCol="0" anchor="t"/>
-          <a:lstStyle/>
-          <a:p>
-            <a:pPr indent="0" marL="0">
+          <a:bodyPr wrap="square" rtlCol="0" anchor="ctr"/>
+          <a:lstStyle/>
+          <a:p>
+            <a:pPr algn="ctr" indent="0" marL="0">
+              <a:buNone/>
+            </a:pPr>
+            <a:r>
+              <a:rPr lang="en-US" sz="1400" b="1" dirty="0">
+                <a:solidFill>
+                  <a:srgbClr val="FFFFFF"/>
+                </a:solidFill>
+                <a:latin typeface="Noto Sans" pitchFamily="34" charset="0"/>
+                <a:ea typeface="Noto Sans" pitchFamily="34" charset="-122"/>
+                <a:cs typeface="Noto Sans" pitchFamily="34" charset="-120"/>
+              </a:rPr>
+              <a:t>CONCEPT 3</a:t>
+            </a:r>
+            <a:endParaRPr lang="en-US" sz="1400" dirty="0"/>
+          </a:p>
+        </p:txBody>
+      </p:sp>
+      <p:sp>
+        <p:nvSpPr>
+          <p:cNvPr id="35" name="Text 32"/>
+          <p:cNvSpPr/>
+          <p:nvPr/>
+        </p:nvSpPr>
+        <p:spPr>
+          <a:xfrm>
+            <a:off x="8176260" y="5010912"/>
+            <a:ext cx="3291840" cy="685800"/>
+          </a:xfrm>
+          <a:prstGeom prst="rect">
+            <a:avLst/>
+          </a:prstGeom>
+          <a:noFill/>
+          <a:ln/>
+        </p:spPr>
+        <p:txBody>
+          <a:bodyPr wrap="square" rtlCol="0" anchor="ctr"/>
+          <a:lstStyle/>
+          <a:p>
+            <a:pPr algn="ctr" indent="0" marL="0">
               <a:lnSpc>
-                <a:spcPct val="102000"/>
+                <a:spcPct val="108000"/>
               </a:lnSpc>
-              <a:spcAft>
-                <a:spcPts val="200"/>
-              </a:spcAft>
               <a:buNone/>
             </a:pPr>
             <a:r>
-              <a:rPr lang="en-US" sz="1300" b="1" dirty="0">
-                <a:solidFill>
-                  <a:srgbClr val="004671"/>
-                </a:solidFill>
-                <a:latin typeface="Noto Sans" pitchFamily="34" charset="0"/>
-                <a:ea typeface="Noto Sans" pitchFamily="34" charset="-122"/>
-                <a:cs typeface="Noto Sans" pitchFamily="34" charset="-120"/>
-              </a:rPr>
-              <a:t>Mức 1.3 — Nâng cấp mạnh con người</a:t>
-            </a:r>
-            <a:endParaRPr lang="en-US" sz="1300" dirty="0"/>
-          </a:p>
-          <a:p>
-            <a:pPr marL="342900" indent="-342900">
+              <a:rPr lang="en-US" sz="1050" dirty="0">
+                <a:solidFill>
+                  <a:srgbClr val="22333F"/>
+                </a:solidFill>
+                <a:latin typeface="Noto Sans" pitchFamily="34" charset="0"/>
+                <a:ea typeface="Noto Sans" pitchFamily="34" charset="-122"/>
+                <a:cs typeface="Noto Sans" pitchFamily="34" charset="-120"/>
+              </a:rPr>
+              <a:t>AI Tutor 1-1 đóng</a:t>
+            </a:r>
+            <a:endParaRPr lang="en-US" sz="1050" dirty="0"/>
+          </a:p>
+          <a:p>
+            <a:pPr algn="ctr" indent="0" marL="0">
               <a:lnSpc>
-                <a:spcPct val="102000"/>
+                <a:spcPct val="108000"/>
               </a:lnSpc>
-              <a:spcAft>
-                <a:spcPts val="300"/>
-              </a:spcAft>
-              <a:buSzPct val="100000"/>
-              <a:buChar char="•"/>
-            </a:pPr>
-            <a:r>
-              <a:rPr lang="en-US" sz="1100" dirty="0">
+              <a:buNone/>
+            </a:pPr>
+            <a:r>
+              <a:rPr lang="en-US" sz="1050" dirty="0">
                 <a:solidFill>
                   <a:srgbClr val="22333F"/>
                 </a:solidFill>
@@ -8120,66 +11014,22 @@
                 <a:ea typeface="Noto Sans" pitchFamily="34" charset="-122"/>
                 <a:cs typeface="Noto Sans" pitchFamily="34" charset="-120"/>
               </a:rPr>
-              <a:t>GVCN mở rộng: chủ động giao bài, theo sát tiến độ, giới hạn đổi GV (≤2 lần/6 tháng), tỷ lệ mục tiêu 1:2.000</a:t>
-            </a:r>
-            <a:endParaRPr lang="en-US" sz="1300" dirty="0"/>
-          </a:p>
-          <a:p>
-            <a:pPr marL="342900" indent="-342900">
-              <a:lnSpc>
-                <a:spcPct val="102000"/>
-              </a:lnSpc>
-              <a:spcAft>
-                <a:spcPts val="300"/>
-              </a:spcAft>
-              <a:buSzPct val="100000"/>
-              <a:buChar char="•"/>
-            </a:pPr>
-            <a:r>
-              <a:rPr lang="en-US" sz="1100" dirty="0">
-                <a:solidFill>
-                  <a:srgbClr val="22333F"/>
-                </a:solidFill>
-                <a:latin typeface="Noto Sans" pitchFamily="34" charset="0"/>
-                <a:ea typeface="Noto Sans" pitchFamily="34" charset="-122"/>
-                <a:cs typeface="Noto Sans" pitchFamily="34" charset="-120"/>
-              </a:rPr>
-              <a:t>Thông báo tình hình học sau mỗi buổi nếu có vấn đề (Zalo cá nhân)</a:t>
-            </a:r>
-            <a:endParaRPr lang="en-US" sz="1300" dirty="0"/>
-          </a:p>
-        </p:txBody>
-      </p:sp>
-      <p:sp>
-        <p:nvSpPr>
-          <p:cNvPr id="13" name="Shape 10"/>
-          <p:cNvSpPr/>
-          <p:nvPr/>
-        </p:nvSpPr>
-        <p:spPr>
-          <a:xfrm>
-            <a:off x="502920" y="5623560"/>
-            <a:ext cx="11183112" cy="621792"/>
-          </a:xfrm>
-          <a:prstGeom prst="rect">
-            <a:avLst/>
-          </a:prstGeom>
-          <a:solidFill>
-            <a:srgbClr val="004671"/>
-          </a:solidFill>
-          <a:ln/>
-        </p:spPr>
-      </p:sp>
-      <p:sp>
-        <p:nvSpPr>
-          <p:cNvPr id="14" name="Text 11"/>
-          <p:cNvSpPr/>
-          <p:nvPr/>
-        </p:nvSpPr>
-        <p:spPr>
-          <a:xfrm>
-            <a:off x="731520" y="5623560"/>
-            <a:ext cx="10725912" cy="621792"/>
+              <a:t>vai trò gia sư chính</a:t>
+            </a:r>
+            <a:endParaRPr lang="en-US" sz="1050" dirty="0"/>
+          </a:p>
+        </p:txBody>
+      </p:sp>
+      <p:sp>
+        <p:nvSpPr>
+          <p:cNvPr id="36" name="Text 33"/>
+          <p:cNvSpPr/>
+          <p:nvPr/>
+        </p:nvSpPr>
+        <p:spPr>
+          <a:xfrm>
+            <a:off x="502920" y="6035040"/>
+            <a:ext cx="11183112" cy="320040"/>
           </a:xfrm>
           <a:prstGeom prst="rect">
             <a:avLst/>
@@ -8191,27 +11041,27 @@
           <a:bodyPr wrap="square" rtlCol="0" anchor="ctr"/>
           <a:lstStyle/>
           <a:p>
-            <a:pPr indent="0" marL="0">
+            <a:pPr algn="ctr" indent="0" marL="0">
               <a:buNone/>
             </a:pPr>
             <a:r>
-              <a:rPr lang="en-US" sz="1150" i="1" dirty="0">
-                <a:solidFill>
-                  <a:srgbClr val="FFFFFF"/>
-                </a:solidFill>
-                <a:latin typeface="Noto Sans" pitchFamily="34" charset="0"/>
-                <a:ea typeface="Noto Sans" pitchFamily="34" charset="-122"/>
-                <a:cs typeface="Noto Sans" pitchFamily="34" charset="-120"/>
-              </a:rPr>
-              <a:t>USP: “Chương trình tiếng Anh trực tuyến có giáo viên thật và công cụ luyện tập, luyện nói được tối ưu bằng AI.”</a:t>
-            </a:r>
-            <a:endParaRPr lang="en-US" sz="1150" dirty="0"/>
+              <a:rPr lang="en-US" sz="950" i="1" dirty="0">
+                <a:solidFill>
+                  <a:srgbClr val="5B6472"/>
+                </a:solidFill>
+                <a:latin typeface="Noto Sans" pitchFamily="34" charset="0"/>
+                <a:ea typeface="Noto Sans" pitchFamily="34" charset="-122"/>
+                <a:cs typeface="Noto Sans" pitchFamily="34" charset="-120"/>
+              </a:rPr>
+              <a:t>Liên hệ: 3 hướng Deepen / Expand / Transform ánh xạ trực tiếp 1:1 với 3 Concept trình bày chi tiết ngay sau.</a:t>
+            </a:r>
+            <a:endParaRPr lang="en-US" sz="950" dirty="0"/>
           </a:p>
         </p:txBody>
       </p:sp>
       <p:pic>
         <p:nvPicPr>
-          <p:cNvPr id="15" name="Image 1" descr="C:\Users\landa\AppData\Local\Temp\claude\c--Users-landa--Personal--D---n-AI-Class-new\8a85e8a7-bdeb-42d6-9168-79c96b849bd1\scratchpad\pptx-gen\logo-icon-only.png">    </p:cNvPr>
+          <p:cNvPr id="37" name="Image 1" descr="C:\Users\landa\AppData\Local\Temp\claude\c--Users-landa--Personal--D---n-AI-Class-new\8a85e8a7-bdeb-42d6-9168-79c96b849bd1\scratchpad\pptx-gen\logo-icon-only.png">    </p:cNvPr>
           <p:cNvPicPr>
             <a:picLocks noChangeAspect="1"/>
           </p:cNvPicPr>
@@ -8235,7 +11085,7 @@
       </p:pic>
       <p:sp>
         <p:nvSpPr>
-          <p:cNvPr id="16" name="Text 12"/>
+          <p:cNvPr id="38" name="Text 34"/>
           <p:cNvSpPr/>
           <p:nvPr/>
         </p:nvSpPr>
@@ -8274,7 +11124,7 @@
       </p:sp>
       <p:sp>
         <p:nvSpPr>
-          <p:cNvPr id="17" name="Text 13"/>
+          <p:cNvPr id="39" name="Text 35"/>
           <p:cNvSpPr/>
           <p:nvPr/>
         </p:nvSpPr>
@@ -8305,7 +11155,7 @@
                 <a:ea typeface="Noto Sans" pitchFamily="34" charset="-122"/>
                 <a:cs typeface="Noto Sans" pitchFamily="34" charset="-120"/>
               </a:rPr>
-              <a:t>5 / 9</a:t>
+              <a:t>5 / 11</a:t>
             </a:r>
             <a:endParaRPr lang="en-US" sz="850" dirty="0"/>
           </a:p>
@@ -8415,7 +11265,7 @@
                 <a:ea typeface="Noto Sans" pitchFamily="34" charset="-122"/>
                 <a:cs typeface="Noto Sans" pitchFamily="34" charset="-120"/>
               </a:rPr>
-              <a:t>Concept 2: Làm mịn và thêm môn</a:t>
+              <a:t>Tổng quan nhanh 3 định hướng</a:t>
             </a:r>
             <a:endParaRPr lang="en-US" sz="2600" dirty="0"/>
           </a:p>
@@ -8467,53 +11317,14 @@
       </p:pic>
       <p:sp>
         <p:nvSpPr>
-          <p:cNvPr id="6" name="Text 3"/>
-          <p:cNvSpPr/>
-          <p:nvPr/>
-        </p:nvSpPr>
-        <p:spPr>
-          <a:xfrm>
-            <a:off x="502920" y="1280160"/>
-            <a:ext cx="11183112" cy="384048"/>
-          </a:xfrm>
-          <a:prstGeom prst="rect">
-            <a:avLst/>
-          </a:prstGeom>
-          <a:noFill/>
-          <a:ln/>
-        </p:spPr>
-        <p:txBody>
-          <a:bodyPr wrap="square" rtlCol="0" anchor="ctr"/>
-          <a:lstStyle/>
-          <a:p>
-            <a:pPr indent="0" marL="0">
-              <a:buNone/>
-            </a:pPr>
-            <a:r>
-              <a:rPr lang="en-US" sz="1050" i="1" dirty="0">
-                <a:solidFill>
-                  <a:srgbClr val="5B6472"/>
-                </a:solidFill>
-                <a:latin typeface="Noto Sans" pitchFamily="34" charset="0"/>
-                <a:ea typeface="Noto Sans" pitchFamily="34" charset="-122"/>
-                <a:cs typeface="Noto Sans" pitchFamily="34" charset="-120"/>
-              </a:rPr>
-              <a:t>Giữ nền Concept 1 nâng cấp làm mịn sản phẩm + thêm 1 buổi Live/tuần môn khác (ngoài tiếng Anh).</a:t>
-            </a:r>
-            <a:endParaRPr lang="en-US" sz="1050" dirty="0"/>
-          </a:p>
-        </p:txBody>
-      </p:sp>
-      <p:sp>
-        <p:nvSpPr>
-          <p:cNvPr id="7" name="Shape 4"/>
-          <p:cNvSpPr/>
-          <p:nvPr/>
-        </p:nvSpPr>
-        <p:spPr>
-          <a:xfrm>
-            <a:off x="502920" y="1664208"/>
-            <a:ext cx="73152" cy="1417320"/>
+          <p:cNvPr id="6" name="Shape 3"/>
+          <p:cNvSpPr/>
+          <p:nvPr/>
+        </p:nvSpPr>
+        <p:spPr>
+          <a:xfrm>
+            <a:off x="502920" y="1371600"/>
+            <a:ext cx="3605784" cy="777240"/>
           </a:xfrm>
           <a:prstGeom prst="rect">
             <a:avLst/>
@@ -8526,14 +11337,117 @@
       </p:sp>
       <p:sp>
         <p:nvSpPr>
+          <p:cNvPr id="7" name="Text 4"/>
+          <p:cNvSpPr/>
+          <p:nvPr/>
+        </p:nvSpPr>
+        <p:spPr>
+          <a:xfrm>
+            <a:off x="667512" y="1444752"/>
+            <a:ext cx="3276600" cy="365760"/>
+          </a:xfrm>
+          <a:prstGeom prst="rect">
+            <a:avLst/>
+          </a:prstGeom>
+          <a:noFill/>
+          <a:ln/>
+        </p:spPr>
+        <p:txBody>
+          <a:bodyPr wrap="square" rtlCol="0" anchor="ctr"/>
+          <a:lstStyle/>
+          <a:p>
+            <a:pPr indent="0" marL="0">
+              <a:buNone/>
+            </a:pPr>
+            <a:r>
+              <a:rPr lang="en-US" sz="1600" b="1" dirty="0">
+                <a:solidFill>
+                  <a:srgbClr val="FFFFFF"/>
+                </a:solidFill>
+                <a:latin typeface="Noto Sans" pitchFamily="34" charset="0"/>
+                <a:ea typeface="Noto Sans" pitchFamily="34" charset="-122"/>
+                <a:cs typeface="Noto Sans" pitchFamily="34" charset="-120"/>
+              </a:rPr>
+              <a:t>Concept 1</a:t>
+            </a:r>
+            <a:endParaRPr lang="en-US" sz="1600" dirty="0"/>
+          </a:p>
+        </p:txBody>
+      </p:sp>
+      <p:sp>
+        <p:nvSpPr>
           <p:cNvPr id="8" name="Text 5"/>
           <p:cNvSpPr/>
           <p:nvPr/>
         </p:nvSpPr>
         <p:spPr>
           <a:xfrm>
-            <a:off x="731520" y="1664208"/>
-            <a:ext cx="10954512" cy="1463040"/>
+            <a:off x="667512" y="1792224"/>
+            <a:ext cx="3276600" cy="320040"/>
+          </a:xfrm>
+          <a:prstGeom prst="rect">
+            <a:avLst/>
+          </a:prstGeom>
+          <a:noFill/>
+          <a:ln/>
+        </p:spPr>
+        <p:txBody>
+          <a:bodyPr wrap="square" rtlCol="0" anchor="ctr"/>
+          <a:lstStyle/>
+          <a:p>
+            <a:pPr indent="0" marL="0">
+              <a:buNone/>
+            </a:pPr>
+            <a:r>
+              <a:rPr lang="en-US" sz="1100" dirty="0">
+                <a:solidFill>
+                  <a:srgbClr val="E7F1F6"/>
+                </a:solidFill>
+                <a:latin typeface="Noto Sans" pitchFamily="34" charset="0"/>
+                <a:ea typeface="Noto Sans" pitchFamily="34" charset="-122"/>
+                <a:cs typeface="Noto Sans" pitchFamily="34" charset="-120"/>
+              </a:rPr>
+              <a:t>Làm mịn &amp; nâng cấp</a:t>
+            </a:r>
+            <a:endParaRPr lang="en-US" sz="1100" dirty="0"/>
+          </a:p>
+        </p:txBody>
+      </p:sp>
+      <p:sp>
+        <p:nvSpPr>
+          <p:cNvPr id="9" name="Shape 6"/>
+          <p:cNvSpPr/>
+          <p:nvPr/>
+        </p:nvSpPr>
+        <p:spPr>
+          <a:xfrm>
+            <a:off x="502920" y="2148840"/>
+            <a:ext cx="3605784" cy="3657600"/>
+          </a:xfrm>
+          <a:prstGeom prst="rect">
+            <a:avLst/>
+          </a:prstGeom>
+          <a:solidFill>
+            <a:srgbClr val="F2FAFB"/>
+          </a:solidFill>
+          <a:ln w="12700">
+            <a:solidFill>
+              <a:srgbClr val="DCE7EA"/>
+            </a:solidFill>
+            <a:prstDash val="solid"/>
+          </a:ln>
+        </p:spPr>
+      </p:sp>
+      <p:sp>
+        <p:nvSpPr>
+          <p:cNvPr id="10" name="Text 7"/>
+          <p:cNvSpPr/>
+          <p:nvPr/>
+        </p:nvSpPr>
+        <p:spPr>
+          <a:xfrm>
+            <a:off x="667512" y="2331720"/>
+            <a:ext cx="3276600" cy="3337560"/>
           </a:xfrm>
           <a:prstGeom prst="rect">
             <a:avLst/>
@@ -8547,7 +11461,7 @@
           <a:p>
             <a:pPr indent="0" marL="0">
               <a:lnSpc>
-                <a:spcPct val="102000"/>
+                <a:spcPct val="105000"/>
               </a:lnSpc>
               <a:spcAft>
                 <a:spcPts val="200"/>
@@ -8555,7 +11469,7 @@
               <a:buNone/>
             </a:pPr>
             <a:r>
-              <a:rPr lang="en-US" sz="1300" b="1" dirty="0">
+              <a:rPr lang="en-US" sz="1050" b="1" dirty="0">
                 <a:solidFill>
                   <a:srgbClr val="004671"/>
                 </a:solidFill>
@@ -8563,14 +11477,37 @@
                 <a:ea typeface="Noto Sans" pitchFamily="34" charset="-122"/>
                 <a:cs typeface="Noto Sans" pitchFamily="34" charset="-120"/>
               </a:rPr>
-              <a:t>Option 2.1 – Thêm môn học thuộc chương trình GDPT</a:t>
-            </a:r>
-            <a:endParaRPr lang="en-US" sz="1300" dirty="0"/>
+              <a:t>Concept chính</a:t>
+            </a:r>
+            <a:endParaRPr lang="en-US" sz="1050" dirty="0"/>
           </a:p>
           <a:p>
             <a:pPr indent="0" marL="0">
               <a:lnSpc>
-                <a:spcPct val="102000"/>
+                <a:spcPct val="105000"/>
+              </a:lnSpc>
+              <a:spcAft>
+                <a:spcPts val="1000"/>
+              </a:spcAft>
+              <a:buNone/>
+            </a:pPr>
+            <a:r>
+              <a:rPr lang="en-US" sz="1050" dirty="0">
+                <a:solidFill>
+                  <a:srgbClr val="22333F"/>
+                </a:solidFill>
+                <a:latin typeface="Noto Sans" pitchFamily="34" charset="0"/>
+                <a:ea typeface="Noto Sans" pitchFamily="34" charset="-122"/>
+                <a:cs typeface="Noto Sans" pitchFamily="34" charset="-120"/>
+              </a:rPr>
+              <a:t>Giữ Big Class làm trung tâm + AI Practice + AI Speak + AI Club, nâng cấp AI hỗ trợ sâu dần</a:t>
+            </a:r>
+            <a:endParaRPr lang="en-US" sz="1050" dirty="0"/>
+          </a:p>
+          <a:p>
+            <a:pPr indent="0" marL="0">
+              <a:lnSpc>
+                <a:spcPct val="105000"/>
               </a:lnSpc>
               <a:spcAft>
                 <a:spcPts val="300"/>
@@ -8578,31 +11515,31 @@
               <a:buNone/>
             </a:pPr>
             <a:r>
-              <a:rPr lang="en-US" sz="1000" i="1" dirty="0">
-                <a:solidFill>
-                  <a:srgbClr val="5B6472"/>
-                </a:solidFill>
-                <a:latin typeface="Noto Sans" pitchFamily="34" charset="0"/>
-                <a:ea typeface="Noto Sans" pitchFamily="34" charset="-122"/>
-                <a:cs typeface="Noto Sans" pitchFamily="34" charset="-120"/>
-              </a:rPr>
-              <a:t>(Toán, Tiếng Việt...)</a:t>
-            </a:r>
-            <a:endParaRPr lang="en-US" sz="1300" dirty="0"/>
+              <a:rPr lang="en-US" sz="1050" b="1" dirty="0">
+                <a:solidFill>
+                  <a:srgbClr val="004671"/>
+                </a:solidFill>
+                <a:latin typeface="Noto Sans" pitchFamily="34" charset="0"/>
+                <a:ea typeface="Noto Sans" pitchFamily="34" charset="-122"/>
+                <a:cs typeface="Noto Sans" pitchFamily="34" charset="-120"/>
+              </a:rPr>
+              <a:t>Các option</a:t>
+            </a:r>
+            <a:endParaRPr lang="en-US" sz="1050" dirty="0"/>
           </a:p>
           <a:p>
             <a:pPr marL="342900" indent="-342900">
               <a:lnSpc>
-                <a:spcPct val="102000"/>
+                <a:spcPct val="105000"/>
               </a:lnSpc>
               <a:spcAft>
-                <a:spcPts val="300"/>
+                <a:spcPts val="500"/>
               </a:spcAft>
               <a:buSzPct val="100000"/>
               <a:buChar char="•"/>
             </a:pPr>
             <a:r>
-              <a:rPr lang="en-US" sz="1100" dirty="0">
+              <a:rPr lang="en-US" sz="980" dirty="0">
                 <a:solidFill>
                   <a:srgbClr val="22333F"/>
                 </a:solidFill>
@@ -8610,23 +11547,23 @@
                 <a:ea typeface="Noto Sans" pitchFamily="34" charset="-122"/>
                 <a:cs typeface="Noto Sans" pitchFamily="34" charset="-120"/>
               </a:rPr>
-              <a:t>Giữ nguyên Big Class + AI Practice + AI Speak + Edupia Club + GVCN (môn tiếng Anh) hiện có</a:t>
-            </a:r>
-            <a:endParaRPr lang="en-US" sz="1300" dirty="0"/>
+              <a:t>Option 1.1: Nâng cấp chất lượng nội dung có sẵn, không đổi cấu trúc sản phẩm.</a:t>
+            </a:r>
+            <a:endParaRPr lang="en-US" sz="1050" dirty="0"/>
           </a:p>
           <a:p>
             <a:pPr marL="342900" indent="-342900">
               <a:lnSpc>
-                <a:spcPct val="102000"/>
+                <a:spcPct val="105000"/>
               </a:lnSpc>
               <a:spcAft>
-                <a:spcPts val="300"/>
+                <a:spcPts val="500"/>
               </a:spcAft>
               <a:buSzPct val="100000"/>
               <a:buChar char="•"/>
             </a:pPr>
             <a:r>
-              <a:rPr lang="en-US" sz="1100" dirty="0">
+              <a:rPr lang="en-US" sz="980" dirty="0">
                 <a:solidFill>
                   <a:srgbClr val="22333F"/>
                 </a:solidFill>
@@ -8634,22 +11571,46 @@
                 <a:ea typeface="Noto Sans" pitchFamily="34" charset="-122"/>
                 <a:cs typeface="Noto Sans" pitchFamily="34" charset="-120"/>
               </a:rPr>
-              <a:t>Thêm 1 buổi live 1 môn GDPT/tuần</a:t>
-            </a:r>
-            <a:endParaRPr lang="en-US" sz="1300" dirty="0"/>
-          </a:p>
-        </p:txBody>
-      </p:sp>
-      <p:sp>
-        <p:nvSpPr>
-          <p:cNvPr id="9" name="Shape 6"/>
-          <p:cNvSpPr/>
-          <p:nvPr/>
-        </p:nvSpPr>
-        <p:spPr>
-          <a:xfrm>
-            <a:off x="502920" y="3310128"/>
-            <a:ext cx="73152" cy="1417320"/>
+              <a:t>Option 1.2: Đầu tư sâu vào tầng công nghệ AI chẩn đoán và cá nhân hóa + kế thừa toàn bộ Option 1.1</a:t>
+            </a:r>
+            <a:endParaRPr lang="en-US" sz="1050" dirty="0"/>
+          </a:p>
+          <a:p>
+            <a:pPr marL="342900" indent="-342900">
+              <a:lnSpc>
+                <a:spcPct val="105000"/>
+              </a:lnSpc>
+              <a:spcAft>
+                <a:spcPts val="500"/>
+              </a:spcAft>
+              <a:buSzPct val="100000"/>
+              <a:buChar char="•"/>
+            </a:pPr>
+            <a:r>
+              <a:rPr lang="en-US" sz="980" dirty="0">
+                <a:solidFill>
+                  <a:srgbClr val="22333F"/>
+                </a:solidFill>
+                <a:latin typeface="Noto Sans" pitchFamily="34" charset="0"/>
+                <a:ea typeface="Noto Sans" pitchFamily="34" charset="-122"/>
+                <a:cs typeface="Noto Sans" pitchFamily="34" charset="-120"/>
+              </a:rPr>
+              <a:t>Option 1.3: Nâng cấp mạnh tầng con người (GVCN chăm sóc thêm)</a:t>
+            </a:r>
+            <a:endParaRPr lang="en-US" sz="1050" dirty="0"/>
+          </a:p>
+        </p:txBody>
+      </p:sp>
+      <p:sp>
+        <p:nvSpPr>
+          <p:cNvPr id="11" name="Shape 8"/>
+          <p:cNvSpPr/>
+          <p:nvPr/>
+        </p:nvSpPr>
+        <p:spPr>
+          <a:xfrm>
+            <a:off x="4291584" y="1371600"/>
+            <a:ext cx="3605784" cy="777240"/>
           </a:xfrm>
           <a:prstGeom prst="rect">
             <a:avLst/>
@@ -8662,14 +11623,117 @@
       </p:sp>
       <p:sp>
         <p:nvSpPr>
-          <p:cNvPr id="10" name="Text 7"/>
-          <p:cNvSpPr/>
-          <p:nvPr/>
-        </p:nvSpPr>
-        <p:spPr>
-          <a:xfrm>
-            <a:off x="731520" y="3310128"/>
-            <a:ext cx="10954512" cy="1463040"/>
+          <p:cNvPr id="12" name="Text 9"/>
+          <p:cNvSpPr/>
+          <p:nvPr/>
+        </p:nvSpPr>
+        <p:spPr>
+          <a:xfrm>
+            <a:off x="4456176" y="1444752"/>
+            <a:ext cx="3276600" cy="365760"/>
+          </a:xfrm>
+          <a:prstGeom prst="rect">
+            <a:avLst/>
+          </a:prstGeom>
+          <a:noFill/>
+          <a:ln/>
+        </p:spPr>
+        <p:txBody>
+          <a:bodyPr wrap="square" rtlCol="0" anchor="ctr"/>
+          <a:lstStyle/>
+          <a:p>
+            <a:pPr indent="0" marL="0">
+              <a:buNone/>
+            </a:pPr>
+            <a:r>
+              <a:rPr lang="en-US" sz="1600" b="1" dirty="0">
+                <a:solidFill>
+                  <a:srgbClr val="FFFFFF"/>
+                </a:solidFill>
+                <a:latin typeface="Noto Sans" pitchFamily="34" charset="0"/>
+                <a:ea typeface="Noto Sans" pitchFamily="34" charset="-122"/>
+                <a:cs typeface="Noto Sans" pitchFamily="34" charset="-120"/>
+              </a:rPr>
+              <a:t>Concept 2</a:t>
+            </a:r>
+            <a:endParaRPr lang="en-US" sz="1600" dirty="0"/>
+          </a:p>
+        </p:txBody>
+      </p:sp>
+      <p:sp>
+        <p:nvSpPr>
+          <p:cNvPr id="13" name="Text 10"/>
+          <p:cNvSpPr/>
+          <p:nvPr/>
+        </p:nvSpPr>
+        <p:spPr>
+          <a:xfrm>
+            <a:off x="4456176" y="1792224"/>
+            <a:ext cx="3276600" cy="320040"/>
+          </a:xfrm>
+          <a:prstGeom prst="rect">
+            <a:avLst/>
+          </a:prstGeom>
+          <a:noFill/>
+          <a:ln/>
+        </p:spPr>
+        <p:txBody>
+          <a:bodyPr wrap="square" rtlCol="0" anchor="ctr"/>
+          <a:lstStyle/>
+          <a:p>
+            <a:pPr indent="0" marL="0">
+              <a:buNone/>
+            </a:pPr>
+            <a:r>
+              <a:rPr lang="en-US" sz="1100" dirty="0">
+                <a:solidFill>
+                  <a:srgbClr val="E7F1F6"/>
+                </a:solidFill>
+                <a:latin typeface="Noto Sans" pitchFamily="34" charset="0"/>
+                <a:ea typeface="Noto Sans" pitchFamily="34" charset="-122"/>
+                <a:cs typeface="Noto Sans" pitchFamily="34" charset="-120"/>
+              </a:rPr>
+              <a:t>Làm mịn + Thêm môn</a:t>
+            </a:r>
+            <a:endParaRPr lang="en-US" sz="1100" dirty="0"/>
+          </a:p>
+        </p:txBody>
+      </p:sp>
+      <p:sp>
+        <p:nvSpPr>
+          <p:cNvPr id="14" name="Shape 11"/>
+          <p:cNvSpPr/>
+          <p:nvPr/>
+        </p:nvSpPr>
+        <p:spPr>
+          <a:xfrm>
+            <a:off x="4291584" y="2148840"/>
+            <a:ext cx="3605784" cy="3657600"/>
+          </a:xfrm>
+          <a:prstGeom prst="rect">
+            <a:avLst/>
+          </a:prstGeom>
+          <a:solidFill>
+            <a:srgbClr val="F2FAFB"/>
+          </a:solidFill>
+          <a:ln w="12700">
+            <a:solidFill>
+              <a:srgbClr val="DCE7EA"/>
+            </a:solidFill>
+            <a:prstDash val="solid"/>
+          </a:ln>
+        </p:spPr>
+      </p:sp>
+      <p:sp>
+        <p:nvSpPr>
+          <p:cNvPr id="15" name="Text 12"/>
+          <p:cNvSpPr/>
+          <p:nvPr/>
+        </p:nvSpPr>
+        <p:spPr>
+          <a:xfrm>
+            <a:off x="4456176" y="2331720"/>
+            <a:ext cx="3276600" cy="3337560"/>
           </a:xfrm>
           <a:prstGeom prst="rect">
             <a:avLst/>
@@ -8683,7 +11747,7 @@
           <a:p>
             <a:pPr indent="0" marL="0">
               <a:lnSpc>
-                <a:spcPct val="102000"/>
+                <a:spcPct val="105000"/>
               </a:lnSpc>
               <a:spcAft>
                 <a:spcPts val="200"/>
@@ -8691,31 +11755,77 @@
               <a:buNone/>
             </a:pPr>
             <a:r>
-              <a:rPr lang="en-US" sz="1300" b="1" dirty="0">
-                <a:solidFill>
-                  <a:srgbClr val="004671"/>
-                </a:solidFill>
-                <a:latin typeface="Noto Sans" pitchFamily="34" charset="0"/>
-                <a:ea typeface="Noto Sans" pitchFamily="34" charset="-122"/>
-                <a:cs typeface="Noto Sans" pitchFamily="34" charset="-120"/>
-              </a:rPr>
-              <a:t>Option 2.2 – Thêm môn khác ngoài chương trình GDPT: STEM/STEAM/AI cơ bản/Kỹ năng sống</a:t>
-            </a:r>
-            <a:endParaRPr lang="en-US" sz="1300" dirty="0"/>
-          </a:p>
-          <a:p>
-            <a:pPr marL="342900" indent="-342900">
+              <a:rPr lang="en-US" sz="1050" b="1" dirty="0">
+                <a:solidFill>
+                  <a:srgbClr val="3B81B1"/>
+                </a:solidFill>
+                <a:latin typeface="Noto Sans" pitchFamily="34" charset="0"/>
+                <a:ea typeface="Noto Sans" pitchFamily="34" charset="-122"/>
+                <a:cs typeface="Noto Sans" pitchFamily="34" charset="-120"/>
+              </a:rPr>
+              <a:t>Concept chính</a:t>
+            </a:r>
+            <a:endParaRPr lang="en-US" sz="1050" dirty="0"/>
+          </a:p>
+          <a:p>
+            <a:pPr indent="0" marL="0">
               <a:lnSpc>
-                <a:spcPct val="102000"/>
+                <a:spcPct val="105000"/>
+              </a:lnSpc>
+              <a:spcAft>
+                <a:spcPts val="1000"/>
+              </a:spcAft>
+              <a:buNone/>
+            </a:pPr>
+            <a:r>
+              <a:rPr lang="en-US" sz="1050" dirty="0">
+                <a:solidFill>
+                  <a:srgbClr val="22333F"/>
+                </a:solidFill>
+                <a:latin typeface="Noto Sans" pitchFamily="34" charset="0"/>
+                <a:ea typeface="Noto Sans" pitchFamily="34" charset="-122"/>
+                <a:cs typeface="Noto Sans" pitchFamily="34" charset="-120"/>
+              </a:rPr>
+              <a:t>Giữ nền Concept Big Class hiện tại, thêm 1 buổi Live/tuần môn khác</a:t>
+            </a:r>
+            <a:endParaRPr lang="en-US" sz="1050" dirty="0"/>
+          </a:p>
+          <a:p>
+            <a:pPr indent="0" marL="0">
+              <a:lnSpc>
+                <a:spcPct val="105000"/>
               </a:lnSpc>
               <a:spcAft>
                 <a:spcPts val="300"/>
               </a:spcAft>
+              <a:buNone/>
+            </a:pPr>
+            <a:r>
+              <a:rPr lang="en-US" sz="1050" b="1" dirty="0">
+                <a:solidFill>
+                  <a:srgbClr val="3B81B1"/>
+                </a:solidFill>
+                <a:latin typeface="Noto Sans" pitchFamily="34" charset="0"/>
+                <a:ea typeface="Noto Sans" pitchFamily="34" charset="-122"/>
+                <a:cs typeface="Noto Sans" pitchFamily="34" charset="-120"/>
+              </a:rPr>
+              <a:t>Các option</a:t>
+            </a:r>
+            <a:endParaRPr lang="en-US" sz="1050" dirty="0"/>
+          </a:p>
+          <a:p>
+            <a:pPr marL="342900" indent="-342900">
+              <a:lnSpc>
+                <a:spcPct val="105000"/>
+              </a:lnSpc>
+              <a:spcAft>
+                <a:spcPts val="500"/>
+              </a:spcAft>
               <a:buSzPct val="100000"/>
               <a:buChar char="•"/>
             </a:pPr>
             <a:r>
-              <a:rPr lang="en-US" sz="1100" dirty="0">
+              <a:rPr lang="en-US" sz="980" dirty="0">
                 <a:solidFill>
                   <a:srgbClr val="22333F"/>
                 </a:solidFill>
@@ -8723,23 +11833,261 @@
                 <a:ea typeface="Noto Sans" pitchFamily="34" charset="-122"/>
                 <a:cs typeface="Noto Sans" pitchFamily="34" charset="-120"/>
               </a:rPr>
-              <a:t>Giữ nguyên Big Class + AI Practice + AI Speak + Edupia Club + GVCN (môn tiếng Anh) hiện có</a:t>
-            </a:r>
-            <a:endParaRPr lang="en-US" sz="1300" dirty="0"/>
+              <a:t>Option 2.1: Big Class + thêm môn học GDPT</a:t>
+            </a:r>
+            <a:endParaRPr lang="en-US" sz="1050" dirty="0"/>
           </a:p>
           <a:p>
             <a:pPr marL="342900" indent="-342900">
               <a:lnSpc>
-                <a:spcPct val="102000"/>
+                <a:spcPct val="105000"/>
+              </a:lnSpc>
+              <a:spcAft>
+                <a:spcPts val="500"/>
+              </a:spcAft>
+              <a:buSzPct val="100000"/>
+              <a:buChar char="•"/>
+            </a:pPr>
+            <a:r>
+              <a:rPr lang="en-US" sz="980" dirty="0">
+                <a:solidFill>
+                  <a:srgbClr val="22333F"/>
+                </a:solidFill>
+                <a:latin typeface="Noto Sans" pitchFamily="34" charset="0"/>
+                <a:ea typeface="Noto Sans" pitchFamily="34" charset="-122"/>
+                <a:cs typeface="Noto Sans" pitchFamily="34" charset="-120"/>
+              </a:rPr>
+              <a:t>Option 2.2: Big Class + thêm môn khác (ngoài chương trình GDPT): STEM, STEAM, AI, Kỹ năng sống, …</a:t>
+            </a:r>
+            <a:endParaRPr lang="en-US" sz="1050" dirty="0"/>
+          </a:p>
+        </p:txBody>
+      </p:sp>
+      <p:sp>
+        <p:nvSpPr>
+          <p:cNvPr id="16" name="Shape 13"/>
+          <p:cNvSpPr/>
+          <p:nvPr/>
+        </p:nvSpPr>
+        <p:spPr>
+          <a:xfrm>
+            <a:off x="8080248" y="1371600"/>
+            <a:ext cx="3605784" cy="777240"/>
+          </a:xfrm>
+          <a:prstGeom prst="rect">
+            <a:avLst/>
+          </a:prstGeom>
+          <a:solidFill>
+            <a:srgbClr val="518E0D"/>
+          </a:solidFill>
+          <a:ln/>
+        </p:spPr>
+      </p:sp>
+      <p:sp>
+        <p:nvSpPr>
+          <p:cNvPr id="17" name="Text 14"/>
+          <p:cNvSpPr/>
+          <p:nvPr/>
+        </p:nvSpPr>
+        <p:spPr>
+          <a:xfrm>
+            <a:off x="8244840" y="1444752"/>
+            <a:ext cx="3276600" cy="365760"/>
+          </a:xfrm>
+          <a:prstGeom prst="rect">
+            <a:avLst/>
+          </a:prstGeom>
+          <a:noFill/>
+          <a:ln/>
+        </p:spPr>
+        <p:txBody>
+          <a:bodyPr wrap="square" rtlCol="0" anchor="ctr"/>
+          <a:lstStyle/>
+          <a:p>
+            <a:pPr indent="0" marL="0">
+              <a:buNone/>
+            </a:pPr>
+            <a:r>
+              <a:rPr lang="en-US" sz="1600" b="1" dirty="0">
+                <a:solidFill>
+                  <a:srgbClr val="FFFFFF"/>
+                </a:solidFill>
+                <a:latin typeface="Noto Sans" pitchFamily="34" charset="0"/>
+                <a:ea typeface="Noto Sans" pitchFamily="34" charset="-122"/>
+                <a:cs typeface="Noto Sans" pitchFamily="34" charset="-120"/>
+              </a:rPr>
+              <a:t>Concept 3</a:t>
+            </a:r>
+            <a:endParaRPr lang="en-US" sz="1600" dirty="0"/>
+          </a:p>
+        </p:txBody>
+      </p:sp>
+      <p:sp>
+        <p:nvSpPr>
+          <p:cNvPr id="18" name="Text 15"/>
+          <p:cNvSpPr/>
+          <p:nvPr/>
+        </p:nvSpPr>
+        <p:spPr>
+          <a:xfrm>
+            <a:off x="8244840" y="1792224"/>
+            <a:ext cx="3276600" cy="320040"/>
+          </a:xfrm>
+          <a:prstGeom prst="rect">
+            <a:avLst/>
+          </a:prstGeom>
+          <a:noFill/>
+          <a:ln/>
+        </p:spPr>
+        <p:txBody>
+          <a:bodyPr wrap="square" rtlCol="0" anchor="ctr"/>
+          <a:lstStyle/>
+          <a:p>
+            <a:pPr indent="0" marL="0">
+              <a:buNone/>
+            </a:pPr>
+            <a:r>
+              <a:rPr lang="en-US" sz="1100" dirty="0">
+                <a:solidFill>
+                  <a:srgbClr val="E7F1F6"/>
+                </a:solidFill>
+                <a:latin typeface="Noto Sans" pitchFamily="34" charset="0"/>
+                <a:ea typeface="Noto Sans" pitchFamily="34" charset="-122"/>
+                <a:cs typeface="Noto Sans" pitchFamily="34" charset="-120"/>
+              </a:rPr>
+              <a:t>Gia sư AI 1:1</a:t>
+            </a:r>
+            <a:endParaRPr lang="en-US" sz="1100" dirty="0"/>
+          </a:p>
+        </p:txBody>
+      </p:sp>
+      <p:sp>
+        <p:nvSpPr>
+          <p:cNvPr id="19" name="Shape 16"/>
+          <p:cNvSpPr/>
+          <p:nvPr/>
+        </p:nvSpPr>
+        <p:spPr>
+          <a:xfrm>
+            <a:off x="8080248" y="2148840"/>
+            <a:ext cx="3605784" cy="3657600"/>
+          </a:xfrm>
+          <a:prstGeom prst="rect">
+            <a:avLst/>
+          </a:prstGeom>
+          <a:solidFill>
+            <a:srgbClr val="F2FAFB"/>
+          </a:solidFill>
+          <a:ln w="12700">
+            <a:solidFill>
+              <a:srgbClr val="DCE7EA"/>
+            </a:solidFill>
+            <a:prstDash val="solid"/>
+          </a:ln>
+        </p:spPr>
+      </p:sp>
+      <p:sp>
+        <p:nvSpPr>
+          <p:cNvPr id="20" name="Text 17"/>
+          <p:cNvSpPr/>
+          <p:nvPr/>
+        </p:nvSpPr>
+        <p:spPr>
+          <a:xfrm>
+            <a:off x="8244840" y="2331720"/>
+            <a:ext cx="3276600" cy="3337560"/>
+          </a:xfrm>
+          <a:prstGeom prst="rect">
+            <a:avLst/>
+          </a:prstGeom>
+          <a:noFill/>
+          <a:ln/>
+        </p:spPr>
+        <p:txBody>
+          <a:bodyPr wrap="square" rtlCol="0" anchor="t"/>
+          <a:lstStyle/>
+          <a:p>
+            <a:pPr indent="0" marL="0">
+              <a:lnSpc>
+                <a:spcPct val="105000"/>
+              </a:lnSpc>
+              <a:spcAft>
+                <a:spcPts val="200"/>
+              </a:spcAft>
+              <a:buNone/>
+            </a:pPr>
+            <a:r>
+              <a:rPr lang="en-US" sz="1050" b="1" dirty="0">
+                <a:solidFill>
+                  <a:srgbClr val="518E0D"/>
+                </a:solidFill>
+                <a:latin typeface="Noto Sans" pitchFamily="34" charset="0"/>
+                <a:ea typeface="Noto Sans" pitchFamily="34" charset="-122"/>
+                <a:cs typeface="Noto Sans" pitchFamily="34" charset="-120"/>
+              </a:rPr>
+              <a:t>Concept chính</a:t>
+            </a:r>
+            <a:endParaRPr lang="en-US" sz="1050" dirty="0"/>
+          </a:p>
+          <a:p>
+            <a:pPr indent="0" marL="0">
+              <a:lnSpc>
+                <a:spcPct val="105000"/>
+              </a:lnSpc>
+              <a:spcAft>
+                <a:spcPts val="1000"/>
+              </a:spcAft>
+              <a:buNone/>
+            </a:pPr>
+            <a:r>
+              <a:rPr lang="en-US" sz="1050" dirty="0">
+                <a:solidFill>
+                  <a:srgbClr val="22333F"/>
+                </a:solidFill>
+                <a:latin typeface="Noto Sans" pitchFamily="34" charset="0"/>
+                <a:ea typeface="Noto Sans" pitchFamily="34" charset="-122"/>
+                <a:cs typeface="Noto Sans" pitchFamily="34" charset="-120"/>
+              </a:rPr>
+              <a:t>AI Tutor 1-1 đóng vai trò gia sư chính trong các lớp học, không chỉ hỗ trợ lớp học</a:t>
+            </a:r>
+            <a:endParaRPr lang="en-US" sz="1050" dirty="0"/>
+          </a:p>
+          <a:p>
+            <a:pPr indent="0" marL="0">
+              <a:lnSpc>
+                <a:spcPct val="105000"/>
               </a:lnSpc>
               <a:spcAft>
                 <a:spcPts val="300"/>
               </a:spcAft>
+              <a:buNone/>
+            </a:pPr>
+            <a:r>
+              <a:rPr lang="en-US" sz="1050" b="1" dirty="0">
+                <a:solidFill>
+                  <a:srgbClr val="518E0D"/>
+                </a:solidFill>
+                <a:latin typeface="Noto Sans" pitchFamily="34" charset="0"/>
+                <a:ea typeface="Noto Sans" pitchFamily="34" charset="-122"/>
+                <a:cs typeface="Noto Sans" pitchFamily="34" charset="-120"/>
+              </a:rPr>
+              <a:t>Các option</a:t>
+            </a:r>
+            <a:endParaRPr lang="en-US" sz="1050" dirty="0"/>
+          </a:p>
+          <a:p>
+            <a:pPr marL="342900" indent="-342900">
+              <a:lnSpc>
+                <a:spcPct val="105000"/>
+              </a:lnSpc>
+              <a:spcAft>
+                <a:spcPts val="500"/>
+              </a:spcAft>
               <a:buSzPct val="100000"/>
               <a:buChar char="•"/>
             </a:pPr>
             <a:r>
-              <a:rPr lang="en-US" sz="1100" dirty="0">
+              <a:rPr lang="en-US" sz="980" dirty="0">
                 <a:solidFill>
                   <a:srgbClr val="22333F"/>
                 </a:solidFill>
@@ -8747,74 +12095,39 @@
                 <a:ea typeface="Noto Sans" pitchFamily="34" charset="-122"/>
                 <a:cs typeface="Noto Sans" pitchFamily="34" charset="-120"/>
               </a:rPr>
-              <a:t>Thêm 1 buổi live 1 môn STEM/STEAM/AI cơ bản/Kỹ năng sống/tuần</a:t>
-            </a:r>
-            <a:endParaRPr lang="en-US" sz="1300" dirty="0"/>
-          </a:p>
-        </p:txBody>
-      </p:sp>
-      <p:sp>
-        <p:nvSpPr>
-          <p:cNvPr id="11" name="Shape 8"/>
-          <p:cNvSpPr/>
-          <p:nvPr/>
-        </p:nvSpPr>
-        <p:spPr>
-          <a:xfrm>
-            <a:off x="502920" y="5623560"/>
-            <a:ext cx="11183112" cy="621792"/>
-          </a:xfrm>
-          <a:prstGeom prst="rect">
-            <a:avLst/>
-          </a:prstGeom>
-          <a:solidFill>
-            <a:srgbClr val="004671"/>
-          </a:solidFill>
-          <a:ln/>
-        </p:spPr>
-      </p:sp>
-      <p:sp>
-        <p:nvSpPr>
-          <p:cNvPr id="12" name="Text 9"/>
-          <p:cNvSpPr/>
-          <p:nvPr/>
-        </p:nvSpPr>
-        <p:spPr>
-          <a:xfrm>
-            <a:off x="731520" y="5623560"/>
-            <a:ext cx="10725912" cy="621792"/>
-          </a:xfrm>
-          <a:prstGeom prst="rect">
-            <a:avLst/>
-          </a:prstGeom>
-          <a:noFill/>
-          <a:ln/>
-        </p:spPr>
-        <p:txBody>
-          <a:bodyPr wrap="square" rtlCol="0" anchor="ctr"/>
-          <a:lstStyle/>
-          <a:p>
-            <a:pPr indent="0" marL="0">
-              <a:buNone/>
-            </a:pPr>
-            <a:r>
-              <a:rPr lang="en-US" sz="1150" i="1" dirty="0">
-                <a:solidFill>
-                  <a:srgbClr val="FFFFFF"/>
-                </a:solidFill>
-                <a:latin typeface="Noto Sans" pitchFamily="34" charset="0"/>
-                <a:ea typeface="Noto Sans" pitchFamily="34" charset="-122"/>
-                <a:cs typeface="Noto Sans" pitchFamily="34" charset="-120"/>
-              </a:rPr>
-              <a:t>USP: “Chương trình tiếng Anh trực tuyến có thêm 1 buổi học với môn học khác mỗi tuần, giúp con phát triển toàn diện và phụ huynh không cần tìm thêm hoạt động bổ trợ ở nơi khác.”</a:t>
-            </a:r>
-            <a:endParaRPr lang="en-US" sz="1150" dirty="0"/>
+              <a:t>Option 3.1: AI nhân hoá “giáo viên ngôi sao”</a:t>
+            </a:r>
+            <a:endParaRPr lang="en-US" sz="1050" dirty="0"/>
+          </a:p>
+          <a:p>
+            <a:pPr marL="342900" indent="-342900">
+              <a:lnSpc>
+                <a:spcPct val="105000"/>
+              </a:lnSpc>
+              <a:spcAft>
+                <a:spcPts val="500"/>
+              </a:spcAft>
+              <a:buSzPct val="100000"/>
+              <a:buChar char="•"/>
+            </a:pPr>
+            <a:r>
+              <a:rPr lang="en-US" sz="980" dirty="0">
+                <a:solidFill>
+                  <a:srgbClr val="22333F"/>
+                </a:solidFill>
+                <a:latin typeface="Noto Sans" pitchFamily="34" charset="0"/>
+                <a:ea typeface="Noto Sans" pitchFamily="34" charset="-122"/>
+                <a:cs typeface="Noto Sans" pitchFamily="34" charset="-120"/>
+              </a:rPr>
+              <a:t>Option 3.2: AI tích hợp mascot + gamification</a:t>
+            </a:r>
+            <a:endParaRPr lang="en-US" sz="1050" dirty="0"/>
           </a:p>
         </p:txBody>
       </p:sp>
       <p:pic>
         <p:nvPicPr>
-          <p:cNvPr id="13" name="Image 1" descr="C:\Users\landa\AppData\Local\Temp\claude\c--Users-landa--Personal--D---n-AI-Class-new\8a85e8a7-bdeb-42d6-9168-79c96b849bd1\scratchpad\pptx-gen\logo-icon-only.png">    </p:cNvPr>
+          <p:cNvPr id="21" name="Image 1" descr="C:\Users\landa\AppData\Local\Temp\claude\c--Users-landa--Personal--D---n-AI-Class-new\8a85e8a7-bdeb-42d6-9168-79c96b849bd1\scratchpad\pptx-gen\logo-icon-only.png">    </p:cNvPr>
           <p:cNvPicPr>
             <a:picLocks noChangeAspect="1"/>
           </p:cNvPicPr>
@@ -8838,7 +12151,7 @@
       </p:pic>
       <p:sp>
         <p:nvSpPr>
-          <p:cNvPr id="14" name="Text 10"/>
+          <p:cNvPr id="22" name="Text 18"/>
           <p:cNvSpPr/>
           <p:nvPr/>
         </p:nvSpPr>
@@ -8877,7 +12190,7 @@
       </p:sp>
       <p:sp>
         <p:nvSpPr>
-          <p:cNvPr id="15" name="Text 11"/>
+          <p:cNvPr id="23" name="Text 19"/>
           <p:cNvSpPr/>
           <p:nvPr/>
         </p:nvSpPr>
@@ -8908,7 +12221,7 @@
                 <a:ea typeface="Noto Sans" pitchFamily="34" charset="-122"/>
                 <a:cs typeface="Noto Sans" pitchFamily="34" charset="-120"/>
               </a:rPr>
-              <a:t>6 / 9</a:t>
+              <a:t>6 / 11</a:t>
             </a:r>
             <a:endParaRPr lang="en-US" sz="850" dirty="0"/>
           </a:p>
@@ -9018,7 +12331,7 @@
                 <a:ea typeface="Noto Sans" pitchFamily="34" charset="-122"/>
                 <a:cs typeface="Noto Sans" pitchFamily="34" charset="-120"/>
               </a:rPr>
-              <a:t>Concept 3: Gia sư AI 1:1 (MỚI)</a:t>
+              <a:t>Concept 1: Làm mịn và nâng cấp</a:t>
             </a:r>
             <a:endParaRPr lang="en-US" sz="2600" dirty="0"/>
           </a:p>
@@ -9101,7 +12414,7 @@
                 <a:ea typeface="Noto Sans" pitchFamily="34" charset="-122"/>
                 <a:cs typeface="Noto Sans" pitchFamily="34" charset="-120"/>
               </a:rPr>
-              <a:t>AI là gia sư chính, không chỉ hỗ trợ lớp học như Concept 1/Concept 2.</a:t>
+              <a:t>Giữ nguyên Big Class + AI Practice + AI Speak + Edupia Club + GVCN hiện có — không đổi mô hình sản phẩm.</a:t>
             </a:r>
             <a:endParaRPr lang="en-US" sz="1050" dirty="0"/>
           </a:p>
@@ -9116,7 +12429,7 @@
         <p:spPr>
           <a:xfrm>
             <a:off x="502920" y="1664208"/>
-            <a:ext cx="73152" cy="1417320"/>
+            <a:ext cx="73152" cy="1289304"/>
           </a:xfrm>
           <a:prstGeom prst="rect">
             <a:avLst/>
@@ -9136,7 +12449,7 @@
         <p:spPr>
           <a:xfrm>
             <a:off x="731520" y="1664208"/>
-            <a:ext cx="10954512" cy="1463040"/>
+            <a:ext cx="10954512" cy="1289304"/>
           </a:xfrm>
           <a:prstGeom prst="rect">
             <a:avLst/>
@@ -9166,7 +12479,7 @@
                 <a:ea typeface="Noto Sans" pitchFamily="34" charset="-122"/>
                 <a:cs typeface="Noto Sans" pitchFamily="34" charset="-120"/>
               </a:rPr>
-              <a:t>Option 3.1 — AI nhân hoá “giáo viên ngôi sao”</a:t>
+              <a:t>Option 1.1 — Nâng cấp chất lượng nội dung có sẵn, không đổi cấu trúc sản phẩm</a:t>
             </a:r>
             <a:endParaRPr lang="en-US" sz="1300" dirty="0"/>
           </a:p>
@@ -9190,7 +12503,7 @@
                 <a:ea typeface="Noto Sans" pitchFamily="34" charset="-122"/>
                 <a:cs typeface="Noto Sans" pitchFamily="34" charset="-120"/>
               </a:rPr>
-              <a:t>Concept: AI Tutor dạy học mang giọng nói/phong cách một GV ngôi sao + AI Practice + AI Speak + Edupia Club + GVCN</a:t>
+              <a:t>Nâng cấp kho đề Practice + AI Mocktest</a:t>
             </a:r>
             <a:endParaRPr lang="en-US" sz="1300" dirty="0"/>
           </a:p>
@@ -9214,7 +12527,7 @@
                 <a:ea typeface="Noto Sans" pitchFamily="34" charset="-122"/>
                 <a:cs typeface="Noto Sans" pitchFamily="34" charset="-120"/>
               </a:rPr>
-              <a:t>Tiền lệ thị trường: Không tìm được sản phẩm nào đúng cấu hình (K-12 + AI-Tutor + giá đại trà)</a:t>
+              <a:t>Nâng cấp độ chính xác chấm-chữa phát âm Speak</a:t>
             </a:r>
             <a:endParaRPr lang="en-US" sz="1300" dirty="0"/>
           </a:p>
@@ -9228,8 +12541,8 @@
         </p:nvSpPr>
         <p:spPr>
           <a:xfrm>
-            <a:off x="502920" y="3310128"/>
-            <a:ext cx="73152" cy="1417320"/>
+            <a:off x="502920" y="3136392"/>
+            <a:ext cx="73152" cy="1289304"/>
           </a:xfrm>
           <a:prstGeom prst="rect">
             <a:avLst/>
@@ -9248,8 +12561,8 @@
         </p:nvSpPr>
         <p:spPr>
           <a:xfrm>
-            <a:off x="731520" y="3310128"/>
-            <a:ext cx="10954512" cy="1463040"/>
+            <a:off x="731520" y="3136392"/>
+            <a:ext cx="10954512" cy="1289304"/>
           </a:xfrm>
           <a:prstGeom prst="rect">
             <a:avLst/>
@@ -9279,7 +12592,7 @@
                 <a:ea typeface="Noto Sans" pitchFamily="34" charset="-122"/>
                 <a:cs typeface="Noto Sans" pitchFamily="34" charset="-120"/>
               </a:rPr>
-              <a:t>Option 3.2 — AI tích hợp mascot + gamification</a:t>
+              <a:t>Mức 1.2 — Đầu tư sâu vào tầng công nghệ AI chẩn đoán và cá nhân hóa</a:t>
             </a:r>
             <a:endParaRPr lang="en-US" sz="1300" dirty="0"/>
           </a:p>
@@ -9303,7 +12616,7 @@
                 <a:ea typeface="Noto Sans" pitchFamily="34" charset="-122"/>
                 <a:cs typeface="Noto Sans" pitchFamily="34" charset="-120"/>
               </a:rPr>
-              <a:t>Concept: AI nhúng trong nhân vật mascot, gắn cơ chế trò chơi hoá — mascot phản ánh dữ liệu học và tương tác với học sinh</a:t>
+              <a:t>Kế thừa toàn bộ Option 1.1</a:t>
             </a:r>
             <a:endParaRPr lang="en-US" sz="1300" dirty="0"/>
           </a:p>
@@ -9327,15 +12640,176 @@
                 <a:ea typeface="Noto Sans" pitchFamily="34" charset="-122"/>
                 <a:cs typeface="Noto Sans" pitchFamily="34" charset="-120"/>
               </a:rPr>
-              <a:t>Tiền lệ thị trường: Có — Duolingo, Prodigy</a:t>
+              <a:t>AI Tutor 30 phút cố định sau Big Class</a:t>
             </a:r>
             <a:endParaRPr lang="en-US" sz="1300" dirty="0"/>
           </a:p>
+          <a:p>
+            <a:pPr marL="342900" indent="-342900">
+              <a:lnSpc>
+                <a:spcPct val="102000"/>
+              </a:lnSpc>
+              <a:spcAft>
+                <a:spcPts val="300"/>
+              </a:spcAft>
+              <a:buSzPct val="100000"/>
+              <a:buChar char="•"/>
+            </a:pPr>
+            <a:r>
+              <a:rPr lang="en-US" sz="1100" dirty="0">
+                <a:solidFill>
+                  <a:srgbClr val="22333F"/>
+                </a:solidFill>
+                <a:latin typeface="Noto Sans" pitchFamily="34" charset="0"/>
+                <a:ea typeface="Noto Sans" pitchFamily="34" charset="-122"/>
+                <a:cs typeface="Noto Sans" pitchFamily="34" charset="-120"/>
+              </a:rPr>
+              <a:t>Adaptive Learning: tự động vá lỗ hổng theo 1.473 đơn vị kiến thức (NLO)</a:t>
+            </a:r>
+            <a:endParaRPr lang="en-US" sz="1300" dirty="0"/>
+          </a:p>
+          <a:p>
+            <a:pPr marL="342900" indent="-342900">
+              <a:lnSpc>
+                <a:spcPct val="102000"/>
+              </a:lnSpc>
+              <a:spcAft>
+                <a:spcPts val="300"/>
+              </a:spcAft>
+              <a:buSzPct val="100000"/>
+              <a:buChar char="•"/>
+            </a:pPr>
+            <a:r>
+              <a:rPr lang="en-US" sz="1100" dirty="0">
+                <a:solidFill>
+                  <a:srgbClr val="22333F"/>
+                </a:solidFill>
+                <a:latin typeface="Noto Sans" pitchFamily="34" charset="0"/>
+                <a:ea typeface="Noto Sans" pitchFamily="34" charset="-122"/>
+                <a:cs typeface="Noto Sans" pitchFamily="34" charset="-120"/>
+              </a:rPr>
+              <a:t>Parent Mode — Mastery Map: giao diện dành riêng cho phụ huynh để theo dõi tiến bộ của con</a:t>
+            </a:r>
+            <a:endParaRPr lang="en-US" sz="1300" dirty="0"/>
+          </a:p>
         </p:txBody>
       </p:sp>
       <p:sp>
         <p:nvSpPr>
           <p:cNvPr id="11" name="Shape 8"/>
+          <p:cNvSpPr/>
+          <p:nvPr/>
+        </p:nvSpPr>
+        <p:spPr>
+          <a:xfrm>
+            <a:off x="502920" y="4608576"/>
+            <a:ext cx="73152" cy="1289304"/>
+          </a:xfrm>
+          <a:prstGeom prst="rect">
+            <a:avLst/>
+          </a:prstGeom>
+          <a:solidFill>
+            <a:srgbClr val="518E0D"/>
+          </a:solidFill>
+          <a:ln/>
+        </p:spPr>
+      </p:sp>
+      <p:sp>
+        <p:nvSpPr>
+          <p:cNvPr id="12" name="Text 9"/>
+          <p:cNvSpPr/>
+          <p:nvPr/>
+        </p:nvSpPr>
+        <p:spPr>
+          <a:xfrm>
+            <a:off x="731520" y="4608576"/>
+            <a:ext cx="10954512" cy="1289304"/>
+          </a:xfrm>
+          <a:prstGeom prst="rect">
+            <a:avLst/>
+          </a:prstGeom>
+          <a:noFill/>
+          <a:ln/>
+        </p:spPr>
+        <p:txBody>
+          <a:bodyPr wrap="square" rtlCol="0" anchor="t"/>
+          <a:lstStyle/>
+          <a:p>
+            <a:pPr indent="0" marL="0">
+              <a:lnSpc>
+                <a:spcPct val="102000"/>
+              </a:lnSpc>
+              <a:spcAft>
+                <a:spcPts val="200"/>
+              </a:spcAft>
+              <a:buNone/>
+            </a:pPr>
+            <a:r>
+              <a:rPr lang="en-US" sz="1300" b="1" dirty="0">
+                <a:solidFill>
+                  <a:srgbClr val="004671"/>
+                </a:solidFill>
+                <a:latin typeface="Noto Sans" pitchFamily="34" charset="0"/>
+                <a:ea typeface="Noto Sans" pitchFamily="34" charset="-122"/>
+                <a:cs typeface="Noto Sans" pitchFamily="34" charset="-120"/>
+              </a:rPr>
+              <a:t>Mức 1.3 — Nâng cấp mạnh con người</a:t>
+            </a:r>
+            <a:endParaRPr lang="en-US" sz="1300" dirty="0"/>
+          </a:p>
+          <a:p>
+            <a:pPr marL="342900" indent="-342900">
+              <a:lnSpc>
+                <a:spcPct val="102000"/>
+              </a:lnSpc>
+              <a:spcAft>
+                <a:spcPts val="300"/>
+              </a:spcAft>
+              <a:buSzPct val="100000"/>
+              <a:buChar char="•"/>
+            </a:pPr>
+            <a:r>
+              <a:rPr lang="en-US" sz="1100" dirty="0">
+                <a:solidFill>
+                  <a:srgbClr val="22333F"/>
+                </a:solidFill>
+                <a:latin typeface="Noto Sans" pitchFamily="34" charset="0"/>
+                <a:ea typeface="Noto Sans" pitchFamily="34" charset="-122"/>
+                <a:cs typeface="Noto Sans" pitchFamily="34" charset="-120"/>
+              </a:rPr>
+              <a:t>GVCN mở rộng: chủ động giao bài, theo sát tiến độ, giới hạn đổi GV (≤2 lần/6 tháng), tỷ lệ mục tiêu 1:2.000</a:t>
+            </a:r>
+            <a:endParaRPr lang="en-US" sz="1300" dirty="0"/>
+          </a:p>
+          <a:p>
+            <a:pPr marL="342900" indent="-342900">
+              <a:lnSpc>
+                <a:spcPct val="102000"/>
+              </a:lnSpc>
+              <a:spcAft>
+                <a:spcPts val="300"/>
+              </a:spcAft>
+              <a:buSzPct val="100000"/>
+              <a:buChar char="•"/>
+            </a:pPr>
+            <a:r>
+              <a:rPr lang="en-US" sz="1100" dirty="0">
+                <a:solidFill>
+                  <a:srgbClr val="22333F"/>
+                </a:solidFill>
+                <a:latin typeface="Noto Sans" pitchFamily="34" charset="0"/>
+                <a:ea typeface="Noto Sans" pitchFamily="34" charset="-122"/>
+                <a:cs typeface="Noto Sans" pitchFamily="34" charset="-120"/>
+              </a:rPr>
+              <a:t>Thông báo tình hình học sau mỗi buổi nếu có vấn đề (Zalo cá nhân)</a:t>
+            </a:r>
+            <a:endParaRPr lang="en-US" sz="1300" dirty="0"/>
+          </a:p>
+        </p:txBody>
+      </p:sp>
+      <p:sp>
+        <p:nvSpPr>
+          <p:cNvPr id="13" name="Shape 10"/>
           <p:cNvSpPr/>
           <p:nvPr/>
         </p:nvSpPr>
@@ -9355,7 +12829,7 @@
       </p:sp>
       <p:sp>
         <p:nvSpPr>
-          <p:cNvPr id="12" name="Text 9"/>
+          <p:cNvPr id="14" name="Text 11"/>
           <p:cNvSpPr/>
           <p:nvPr/>
         </p:nvSpPr>
@@ -9386,7 +12860,7 @@
                 <a:ea typeface="Noto Sans" pitchFamily="34" charset="-122"/>
                 <a:cs typeface="Noto Sans" pitchFamily="34" charset="-120"/>
               </a:rPr>
-              <a:t>USP: “Gia sư AI 1:1 luôn sẵn sàng, theo dõi và đồng hành cùng con trong quá trình học — mẫu hình ‘AI song hành’ đã vận hành thật ở quy mô lớn tại thị trường khác, lần đầu áp dụng tại Việt Nam.”</a:t>
+              <a:t>USP: “Chương trình tiếng Anh trực tuyến có giáo viên thật và công cụ luyện tập, luyện nói được tối ưu bằng AI.”</a:t>
             </a:r>
             <a:endParaRPr lang="en-US" sz="1150" dirty="0"/>
           </a:p>
@@ -9394,7 +12868,7 @@
       </p:sp>
       <p:pic>
         <p:nvPicPr>
-          <p:cNvPr id="13" name="Image 1" descr="C:\Users\landa\AppData\Local\Temp\claude\c--Users-landa--Personal--D---n-AI-Class-new\8a85e8a7-bdeb-42d6-9168-79c96b849bd1\scratchpad\pptx-gen\logo-icon-only.png">    </p:cNvPr>
+          <p:cNvPr id="15" name="Image 1" descr="C:\Users\landa\AppData\Local\Temp\claude\c--Users-landa--Personal--D---n-AI-Class-new\8a85e8a7-bdeb-42d6-9168-79c96b849bd1\scratchpad\pptx-gen\logo-icon-only.png">    </p:cNvPr>
           <p:cNvPicPr>
             <a:picLocks noChangeAspect="1"/>
           </p:cNvPicPr>
@@ -9418,7 +12892,7 @@
       </p:pic>
       <p:sp>
         <p:nvSpPr>
-          <p:cNvPr id="14" name="Text 10"/>
+          <p:cNvPr id="16" name="Text 12"/>
           <p:cNvSpPr/>
           <p:nvPr/>
         </p:nvSpPr>
@@ -9457,7 +12931,7 @@
       </p:sp>
       <p:sp>
         <p:nvSpPr>
-          <p:cNvPr id="15" name="Text 11"/>
+          <p:cNvPr id="17" name="Text 13"/>
           <p:cNvSpPr/>
           <p:nvPr/>
         </p:nvSpPr>
@@ -9488,7 +12962,7 @@
                 <a:ea typeface="Noto Sans" pitchFamily="34" charset="-122"/>
                 <a:cs typeface="Noto Sans" pitchFamily="34" charset="-120"/>
               </a:rPr>
-              <a:t>7 / 9</a:t>
+              <a:t>7 / 11</a:t>
             </a:r>
             <a:endParaRPr lang="en-US" sz="850" dirty="0"/>
           </a:p>
@@ -9559,7 +13033,7 @@
                 <a:ea typeface="Noto Sans" pitchFamily="34" charset="-122"/>
                 <a:cs typeface="Noto Sans" pitchFamily="34" charset="-120"/>
               </a:rPr>
-              <a:t>PHẦN 3 — KẾ HOẠCH TRIỂN KHAI</a:t>
+              <a:t>PHẦN 2 — ĐỊNH HƯỚNG CONCEPT SẢN PHẨM</a:t>
             </a:r>
             <a:endParaRPr lang="en-US" sz="1100" dirty="0"/>
           </a:p>
@@ -9598,7 +13072,7 @@
                 <a:ea typeface="Noto Sans" pitchFamily="34" charset="-122"/>
                 <a:cs typeface="Noto Sans" pitchFamily="34" charset="-120"/>
               </a:rPr>
-              <a:t>Lộ trình triển khai (2026 - 2027)</a:t>
+              <a:t>Concept 2: Làm mịn và thêm môn</a:t>
             </a:r>
             <a:endParaRPr lang="en-US" sz="2600" dirty="0"/>
           </a:p>
@@ -9648,1143 +13122,356 @@
           </a:prstGeom>
         </p:spPr>
       </p:pic>
-      <p:graphicFrame>
-        <p:nvGraphicFramePr>
-          <p:cNvPr id="10" name="Table 0"/>
-          <p:cNvGraphicFramePr>
-            <a:graphicFrameLocks noGrp="1"/>
-          </p:cNvGraphicFramePr>
-          <p:nvPr>
-            <p:extLst>
-              <p:ext uri="{D42A27DB-BD31-4B8C-83A1-F6EECF244321}">
-                <p14:modId xmlns:p14="http://schemas.microsoft.com/office/powerpoint/2010/main" val="1579011935"/>
-              </p:ext>
-            </p:extLst>
-          </p:nvPr>
-        </p:nvGraphicFramePr>
-        <p:xfrm>
-          <a:off x="502920" y="1371600"/>
-          <a:ext cx="11183112" cy="5029200"/>
-        </p:xfrm>
-        <a:graphic>
-          <a:graphicData uri="http://schemas.openxmlformats.org/drawingml/2006/table">
-            <a:tbl>
-              <a:tblPr/>
-              <a:tblGrid>
-                <a:gridCol w="2834640"/>
-                <a:gridCol w="8348472"/>
-              </a:tblGrid>
-              <a:tr h="628650">
-                <a:tc>
-                  <a:txBody>
-                    <a:bodyPr/>
-                    <a:lstStyle/>
-                    <a:p>
-                      <a:pPr indent="0" marL="0">
-                        <a:buNone/>
-                      </a:pPr>
-                      <a:r>
-                        <a:rPr lang="en-US" sz="1200" b="1" dirty="0">
-                          <a:solidFill>
-                            <a:srgbClr val="FFFFFF"/>
-                          </a:solidFill>
-                          <a:latin typeface="Noto Sans" pitchFamily="34" charset="0"/>
-                          <a:ea typeface="Noto Sans" pitchFamily="34" charset="-122"/>
-                          <a:cs typeface="Noto Sans" pitchFamily="34" charset="-120"/>
-                        </a:rPr>
-                        <a:t>Mốc</a:t>
-                      </a:r>
-                      <a:endParaRPr lang="en-US" sz="1200" dirty="0">
-                        <a:latin typeface="Noto Sans" charset="0"/>
-                        <a:ea typeface="Noto Sans" charset="0"/>
-                        <a:cs typeface="Noto Sans" charset="0"/>
-                      </a:endParaRPr>
-                    </a:p>
-                  </a:txBody>
-                  <a:tcPr marL="101600" marR="101600" marT="63500" marB="63500" anchor="t">
-                    <a:lnL w="9525" cap="flat" cmpd="sng" algn="ctr">
-                      <a:solidFill>
-                        <a:srgbClr val="DCE7EA"/>
-                      </a:solidFill>
-                      <a:prstDash val="solid"/>
-                      <a:round/>
-                      <a:headEnd type="none" w="med" len="med"/>
-                      <a:tailEnd type="none" w="med" len="med"/>
-                    </a:lnL>
-                    <a:lnR w="9525" cap="flat" cmpd="sng" algn="ctr">
-                      <a:solidFill>
-                        <a:srgbClr val="DCE7EA"/>
-                      </a:solidFill>
-                      <a:prstDash val="solid"/>
-                      <a:round/>
-                      <a:headEnd type="none" w="med" len="med"/>
-                      <a:tailEnd type="none" w="med" len="med"/>
-                    </a:lnR>
-                    <a:lnT w="9525" cap="flat" cmpd="sng" algn="ctr">
-                      <a:solidFill>
-                        <a:srgbClr val="DCE7EA"/>
-                      </a:solidFill>
-                      <a:prstDash val="solid"/>
-                      <a:round/>
-                      <a:headEnd type="none" w="med" len="med"/>
-                      <a:tailEnd type="none" w="med" len="med"/>
-                    </a:lnT>
-                    <a:lnB w="9525" cap="flat" cmpd="sng" algn="ctr">
-                      <a:solidFill>
-                        <a:srgbClr val="DCE7EA"/>
-                      </a:solidFill>
-                      <a:prstDash val="solid"/>
-                      <a:round/>
-                      <a:headEnd type="none" w="med" len="med"/>
-                      <a:tailEnd type="none" w="med" len="med"/>
-                    </a:lnB>
-                    <a:solidFill>
-                      <a:srgbClr val="004671"/>
-                    </a:solidFill>
-                  </a:tcPr>
-                </a:tc>
-                <a:tc>
-                  <a:txBody>
-                    <a:bodyPr/>
-                    <a:lstStyle/>
-                    <a:p>
-                      <a:pPr indent="0" marL="0">
-                        <a:buNone/>
-                      </a:pPr>
-                      <a:r>
-                        <a:rPr lang="en-US" sz="1200" b="1" dirty="0">
-                          <a:solidFill>
-                            <a:srgbClr val="FFFFFF"/>
-                          </a:solidFill>
-                          <a:latin typeface="Noto Sans" pitchFamily="34" charset="0"/>
-                          <a:ea typeface="Noto Sans" pitchFamily="34" charset="-122"/>
-                          <a:cs typeface="Noto Sans" pitchFamily="34" charset="-120"/>
-                        </a:rPr>
-                        <a:t>Nội dung</a:t>
-                      </a:r>
-                      <a:endParaRPr lang="en-US" sz="1200" dirty="0">
-                        <a:latin typeface="Noto Sans" charset="0"/>
-                        <a:ea typeface="Noto Sans" charset="0"/>
-                        <a:cs typeface="Noto Sans" charset="0"/>
-                      </a:endParaRPr>
-                    </a:p>
-                  </a:txBody>
-                  <a:tcPr marL="101600" marR="101600" marT="63500" marB="63500" anchor="t">
-                    <a:lnL w="9525" cap="flat" cmpd="sng" algn="ctr">
-                      <a:solidFill>
-                        <a:srgbClr val="DCE7EA"/>
-                      </a:solidFill>
-                      <a:prstDash val="solid"/>
-                      <a:round/>
-                      <a:headEnd type="none" w="med" len="med"/>
-                      <a:tailEnd type="none" w="med" len="med"/>
-                    </a:lnL>
-                    <a:lnR w="9525" cap="flat" cmpd="sng" algn="ctr">
-                      <a:solidFill>
-                        <a:srgbClr val="DCE7EA"/>
-                      </a:solidFill>
-                      <a:prstDash val="solid"/>
-                      <a:round/>
-                      <a:headEnd type="none" w="med" len="med"/>
-                      <a:tailEnd type="none" w="med" len="med"/>
-                    </a:lnR>
-                    <a:lnT w="9525" cap="flat" cmpd="sng" algn="ctr">
-                      <a:solidFill>
-                        <a:srgbClr val="DCE7EA"/>
-                      </a:solidFill>
-                      <a:prstDash val="solid"/>
-                      <a:round/>
-                      <a:headEnd type="none" w="med" len="med"/>
-                      <a:tailEnd type="none" w="med" len="med"/>
-                    </a:lnT>
-                    <a:lnB w="9525" cap="flat" cmpd="sng" algn="ctr">
-                      <a:solidFill>
-                        <a:srgbClr val="DCE7EA"/>
-                      </a:solidFill>
-                      <a:prstDash val="solid"/>
-                      <a:round/>
-                      <a:headEnd type="none" w="med" len="med"/>
-                      <a:tailEnd type="none" w="med" len="med"/>
-                    </a:lnB>
-                    <a:solidFill>
-                      <a:srgbClr val="004671"/>
-                    </a:solidFill>
-                  </a:tcPr>
-                </a:tc>
-              </a:tr>
-              <a:tr h="628650">
-                <a:tc>
-                  <a:txBody>
-                    <a:bodyPr/>
-                    <a:lstStyle/>
-                    <a:p>
-                      <a:pPr indent="0" marL="0">
-                        <a:buNone/>
-                      </a:pPr>
-                      <a:r>
-                        <a:rPr lang="en-US" sz="1200" b="1" dirty="0">
-                          <a:solidFill>
-                            <a:srgbClr val="004671"/>
-                          </a:solidFill>
-                          <a:latin typeface="Noto Sans" pitchFamily="34" charset="0"/>
-                          <a:ea typeface="Noto Sans" pitchFamily="34" charset="-122"/>
-                          <a:cs typeface="Noto Sans" pitchFamily="34" charset="-120"/>
-                        </a:rPr>
-                        <a:t>Trước 31/08/2026</a:t>
-                      </a:r>
-                      <a:endParaRPr lang="en-US" sz="1200" dirty="0">
-                        <a:latin typeface="Noto Sans" charset="0"/>
-                        <a:ea typeface="Noto Sans" charset="0"/>
-                        <a:cs typeface="Noto Sans" charset="0"/>
-                      </a:endParaRPr>
-                    </a:p>
-                  </a:txBody>
-                  <a:tcPr marL="101600" marR="101600" marT="63500" marB="63500" anchor="t">
-                    <a:lnL w="9525" cap="flat" cmpd="sng" algn="ctr">
-                      <a:solidFill>
-                        <a:srgbClr val="DCE7EA"/>
-                      </a:solidFill>
-                      <a:prstDash val="solid"/>
-                      <a:round/>
-                      <a:headEnd type="none" w="med" len="med"/>
-                      <a:tailEnd type="none" w="med" len="med"/>
-                    </a:lnL>
-                    <a:lnR w="9525" cap="flat" cmpd="sng" algn="ctr">
-                      <a:solidFill>
-                        <a:srgbClr val="DCE7EA"/>
-                      </a:solidFill>
-                      <a:prstDash val="solid"/>
-                      <a:round/>
-                      <a:headEnd type="none" w="med" len="med"/>
-                      <a:tailEnd type="none" w="med" len="med"/>
-                    </a:lnR>
-                    <a:lnT w="9525" cap="flat" cmpd="sng" algn="ctr">
-                      <a:solidFill>
-                        <a:srgbClr val="DCE7EA"/>
-                      </a:solidFill>
-                      <a:prstDash val="solid"/>
-                      <a:round/>
-                      <a:headEnd type="none" w="med" len="med"/>
-                      <a:tailEnd type="none" w="med" len="med"/>
-                    </a:lnT>
-                    <a:lnB w="9525" cap="flat" cmpd="sng" algn="ctr">
-                      <a:solidFill>
-                        <a:srgbClr val="DCE7EA"/>
-                      </a:solidFill>
-                      <a:prstDash val="solid"/>
-                      <a:round/>
-                      <a:headEnd type="none" w="med" len="med"/>
-                      <a:tailEnd type="none" w="med" len="med"/>
-                    </a:lnB>
-                    <a:solidFill>
-                      <a:srgbClr val="FFFFFF"/>
-                    </a:solidFill>
-                  </a:tcPr>
-                </a:tc>
-                <a:tc>
-                  <a:txBody>
-                    <a:bodyPr/>
-                    <a:lstStyle/>
-                    <a:p>
-                      <a:pPr indent="0" marL="0">
-                        <a:buNone/>
-                      </a:pPr>
-                      <a:r>
-                        <a:rPr lang="en-US" sz="1200" dirty="0">
-                          <a:solidFill>
-                            <a:srgbClr val="22333F"/>
-                          </a:solidFill>
-                          <a:latin typeface="Noto Sans" pitchFamily="34" charset="0"/>
-                          <a:ea typeface="Noto Sans" pitchFamily="34" charset="-122"/>
-                          <a:cs typeface="Noto Sans" pitchFamily="34" charset="-120"/>
-                        </a:rPr>
-                        <a:t>Trình bày slide concept trước BOD/team</a:t>
-                      </a:r>
-                      <a:endParaRPr lang="en-US" sz="1200" dirty="0">
-                        <a:latin typeface="Noto Sans" charset="0"/>
-                        <a:ea typeface="Noto Sans" charset="0"/>
-                        <a:cs typeface="Noto Sans" charset="0"/>
-                      </a:endParaRPr>
-                    </a:p>
-                  </a:txBody>
-                  <a:tcPr marL="101600" marR="101600" marT="63500" marB="63500" anchor="t">
-                    <a:lnL w="9525" cap="flat" cmpd="sng" algn="ctr">
-                      <a:solidFill>
-                        <a:srgbClr val="DCE7EA"/>
-                      </a:solidFill>
-                      <a:prstDash val="solid"/>
-                      <a:round/>
-                      <a:headEnd type="none" w="med" len="med"/>
-                      <a:tailEnd type="none" w="med" len="med"/>
-                    </a:lnL>
-                    <a:lnR w="9525" cap="flat" cmpd="sng" algn="ctr">
-                      <a:solidFill>
-                        <a:srgbClr val="DCE7EA"/>
-                      </a:solidFill>
-                      <a:prstDash val="solid"/>
-                      <a:round/>
-                      <a:headEnd type="none" w="med" len="med"/>
-                      <a:tailEnd type="none" w="med" len="med"/>
-                    </a:lnR>
-                    <a:lnT w="9525" cap="flat" cmpd="sng" algn="ctr">
-                      <a:solidFill>
-                        <a:srgbClr val="DCE7EA"/>
-                      </a:solidFill>
-                      <a:prstDash val="solid"/>
-                      <a:round/>
-                      <a:headEnd type="none" w="med" len="med"/>
-                      <a:tailEnd type="none" w="med" len="med"/>
-                    </a:lnT>
-                    <a:lnB w="9525" cap="flat" cmpd="sng" algn="ctr">
-                      <a:solidFill>
-                        <a:srgbClr val="DCE7EA"/>
-                      </a:solidFill>
-                      <a:prstDash val="solid"/>
-                      <a:round/>
-                      <a:headEnd type="none" w="med" len="med"/>
-                      <a:tailEnd type="none" w="med" len="med"/>
-                    </a:lnB>
-                    <a:solidFill>
-                      <a:srgbClr val="FFFFFF"/>
-                    </a:solidFill>
-                  </a:tcPr>
-                </a:tc>
-              </a:tr>
-              <a:tr h="628650">
-                <a:tc>
-                  <a:txBody>
-                    <a:bodyPr/>
-                    <a:lstStyle/>
-                    <a:p>
-                      <a:pPr indent="0" marL="0">
-                        <a:buNone/>
-                      </a:pPr>
-                      <a:r>
-                        <a:rPr lang="en-US" sz="1200" b="1" dirty="0">
-                          <a:solidFill>
-                            <a:srgbClr val="004671"/>
-                          </a:solidFill>
-                          <a:latin typeface="Noto Sans" pitchFamily="34" charset="0"/>
-                          <a:ea typeface="Noto Sans" pitchFamily="34" charset="-122"/>
-                          <a:cs typeface="Noto Sans" pitchFamily="34" charset="-120"/>
-                        </a:rPr>
-                        <a:t>01–15/09/2026</a:t>
-                      </a:r>
-                      <a:endParaRPr lang="en-US" sz="1200" dirty="0">
-                        <a:latin typeface="Noto Sans" charset="0"/>
-                        <a:ea typeface="Noto Sans" charset="0"/>
-                        <a:cs typeface="Noto Sans" charset="0"/>
-                      </a:endParaRPr>
-                    </a:p>
-                  </a:txBody>
-                  <a:tcPr marL="101600" marR="101600" marT="63500" marB="63500" anchor="t">
-                    <a:lnL w="9525" cap="flat" cmpd="sng" algn="ctr">
-                      <a:solidFill>
-                        <a:srgbClr val="DCE7EA"/>
-                      </a:solidFill>
-                      <a:prstDash val="solid"/>
-                      <a:round/>
-                      <a:headEnd type="none" w="med" len="med"/>
-                      <a:tailEnd type="none" w="med" len="med"/>
-                    </a:lnL>
-                    <a:lnR w="9525" cap="flat" cmpd="sng" algn="ctr">
-                      <a:solidFill>
-                        <a:srgbClr val="DCE7EA"/>
-                      </a:solidFill>
-                      <a:prstDash val="solid"/>
-                      <a:round/>
-                      <a:headEnd type="none" w="med" len="med"/>
-                      <a:tailEnd type="none" w="med" len="med"/>
-                    </a:lnR>
-                    <a:lnT w="9525" cap="flat" cmpd="sng" algn="ctr">
-                      <a:solidFill>
-                        <a:srgbClr val="DCE7EA"/>
-                      </a:solidFill>
-                      <a:prstDash val="solid"/>
-                      <a:round/>
-                      <a:headEnd type="none" w="med" len="med"/>
-                      <a:tailEnd type="none" w="med" len="med"/>
-                    </a:lnT>
-                    <a:lnB w="9525" cap="flat" cmpd="sng" algn="ctr">
-                      <a:solidFill>
-                        <a:srgbClr val="DCE7EA"/>
-                      </a:solidFill>
-                      <a:prstDash val="solid"/>
-                      <a:round/>
-                      <a:headEnd type="none" w="med" len="med"/>
-                      <a:tailEnd type="none" w="med" len="med"/>
-                    </a:lnB>
-                    <a:solidFill>
-                      <a:srgbClr val="F2FAFB"/>
-                    </a:solidFill>
-                  </a:tcPr>
-                </a:tc>
-                <a:tc>
-                  <a:txBody>
-                    <a:bodyPr/>
-                    <a:lstStyle/>
-                    <a:p>
-                      <a:pPr indent="0" marL="0">
-                        <a:buNone/>
-                      </a:pPr>
-                      <a:r>
-                        <a:rPr lang="en-US" sz="1200" dirty="0">
-                          <a:solidFill>
-                            <a:srgbClr val="22333F"/>
-                          </a:solidFill>
-                          <a:latin typeface="Noto Sans" pitchFamily="34" charset="0"/>
-                          <a:ea typeface="Noto Sans" pitchFamily="34" charset="-122"/>
-                          <a:cs typeface="Noto Sans" pitchFamily="34" charset="-120"/>
-                        </a:rPr>
-                        <a:t>Xây bảng hỏi và phương án khảo sát</a:t>
-                      </a:r>
-                      <a:endParaRPr lang="en-US" sz="1200" dirty="0">
-                        <a:latin typeface="Noto Sans" charset="0"/>
-                        <a:ea typeface="Noto Sans" charset="0"/>
-                        <a:cs typeface="Noto Sans" charset="0"/>
-                      </a:endParaRPr>
-                    </a:p>
-                  </a:txBody>
-                  <a:tcPr marL="101600" marR="101600" marT="63500" marB="63500" anchor="t">
-                    <a:lnL w="9525" cap="flat" cmpd="sng" algn="ctr">
-                      <a:solidFill>
-                        <a:srgbClr val="DCE7EA"/>
-                      </a:solidFill>
-                      <a:prstDash val="solid"/>
-                      <a:round/>
-                      <a:headEnd type="none" w="med" len="med"/>
-                      <a:tailEnd type="none" w="med" len="med"/>
-                    </a:lnL>
-                    <a:lnR w="9525" cap="flat" cmpd="sng" algn="ctr">
-                      <a:solidFill>
-                        <a:srgbClr val="DCE7EA"/>
-                      </a:solidFill>
-                      <a:prstDash val="solid"/>
-                      <a:round/>
-                      <a:headEnd type="none" w="med" len="med"/>
-                      <a:tailEnd type="none" w="med" len="med"/>
-                    </a:lnR>
-                    <a:lnT w="9525" cap="flat" cmpd="sng" algn="ctr">
-                      <a:solidFill>
-                        <a:srgbClr val="DCE7EA"/>
-                      </a:solidFill>
-                      <a:prstDash val="solid"/>
-                      <a:round/>
-                      <a:headEnd type="none" w="med" len="med"/>
-                      <a:tailEnd type="none" w="med" len="med"/>
-                    </a:lnT>
-                    <a:lnB w="9525" cap="flat" cmpd="sng" algn="ctr">
-                      <a:solidFill>
-                        <a:srgbClr val="DCE7EA"/>
-                      </a:solidFill>
-                      <a:prstDash val="solid"/>
-                      <a:round/>
-                      <a:headEnd type="none" w="med" len="med"/>
-                      <a:tailEnd type="none" w="med" len="med"/>
-                    </a:lnB>
-                    <a:solidFill>
-                      <a:srgbClr val="F2FAFB"/>
-                    </a:solidFill>
-                  </a:tcPr>
-                </a:tc>
-              </a:tr>
-              <a:tr h="628650">
-                <a:tc>
-                  <a:txBody>
-                    <a:bodyPr/>
-                    <a:lstStyle/>
-                    <a:p>
-                      <a:pPr indent="0" marL="0">
-                        <a:buNone/>
-                      </a:pPr>
-                      <a:r>
-                        <a:rPr lang="en-US" sz="1200" b="1" dirty="0">
-                          <a:solidFill>
-                            <a:srgbClr val="004671"/>
-                          </a:solidFill>
-                          <a:latin typeface="Noto Sans" pitchFamily="34" charset="0"/>
-                          <a:ea typeface="Noto Sans" pitchFamily="34" charset="-122"/>
-                          <a:cs typeface="Noto Sans" pitchFamily="34" charset="-120"/>
-                        </a:rPr>
-                        <a:t>15/09–15/10/2026</a:t>
-                      </a:r>
-                      <a:endParaRPr lang="en-US" sz="1200" dirty="0">
-                        <a:latin typeface="Noto Sans" charset="0"/>
-                        <a:ea typeface="Noto Sans" charset="0"/>
-                        <a:cs typeface="Noto Sans" charset="0"/>
-                      </a:endParaRPr>
-                    </a:p>
-                  </a:txBody>
-                  <a:tcPr marL="101600" marR="101600" marT="63500" marB="63500" anchor="t">
-                    <a:lnL w="9525" cap="flat" cmpd="sng" algn="ctr">
-                      <a:solidFill>
-                        <a:srgbClr val="DCE7EA"/>
-                      </a:solidFill>
-                      <a:prstDash val="solid"/>
-                      <a:round/>
-                      <a:headEnd type="none" w="med" len="med"/>
-                      <a:tailEnd type="none" w="med" len="med"/>
-                    </a:lnL>
-                    <a:lnR w="9525" cap="flat" cmpd="sng" algn="ctr">
-                      <a:solidFill>
-                        <a:srgbClr val="DCE7EA"/>
-                      </a:solidFill>
-                      <a:prstDash val="solid"/>
-                      <a:round/>
-                      <a:headEnd type="none" w="med" len="med"/>
-                      <a:tailEnd type="none" w="med" len="med"/>
-                    </a:lnR>
-                    <a:lnT w="9525" cap="flat" cmpd="sng" algn="ctr">
-                      <a:solidFill>
-                        <a:srgbClr val="DCE7EA"/>
-                      </a:solidFill>
-                      <a:prstDash val="solid"/>
-                      <a:round/>
-                      <a:headEnd type="none" w="med" len="med"/>
-                      <a:tailEnd type="none" w="med" len="med"/>
-                    </a:lnT>
-                    <a:lnB w="9525" cap="flat" cmpd="sng" algn="ctr">
-                      <a:solidFill>
-                        <a:srgbClr val="DCE7EA"/>
-                      </a:solidFill>
-                      <a:prstDash val="solid"/>
-                      <a:round/>
-                      <a:headEnd type="none" w="med" len="med"/>
-                      <a:tailEnd type="none" w="med" len="med"/>
-                    </a:lnB>
-                    <a:solidFill>
-                      <a:srgbClr val="FFFFFF"/>
-                    </a:solidFill>
-                  </a:tcPr>
-                </a:tc>
-                <a:tc>
-                  <a:txBody>
-                    <a:bodyPr/>
-                    <a:lstStyle/>
-                    <a:p>
-                      <a:pPr indent="0" marL="0">
-                        <a:buNone/>
-                      </a:pPr>
-                      <a:r>
-                        <a:rPr lang="en-US" sz="1200" dirty="0">
-                          <a:solidFill>
-                            <a:srgbClr val="22333F"/>
-                          </a:solidFill>
-                          <a:latin typeface="Noto Sans" pitchFamily="34" charset="0"/>
-                          <a:ea typeface="Noto Sans" pitchFamily="34" charset="-122"/>
-                          <a:cs typeface="Noto Sans" pitchFamily="34" charset="-120"/>
-                        </a:rPr>
-                        <a:t>Khảo sát thực tế phụ huynh Tier 3/4 — 500 qua điện thoại + 100 trực tiếp tận nhà</a:t>
-                      </a:r>
-                      <a:endParaRPr lang="en-US" sz="1200" dirty="0">
-                        <a:latin typeface="Noto Sans" charset="0"/>
-                        <a:ea typeface="Noto Sans" charset="0"/>
-                        <a:cs typeface="Noto Sans" charset="0"/>
-                      </a:endParaRPr>
-                    </a:p>
-                  </a:txBody>
-                  <a:tcPr marL="101600" marR="101600" marT="63500" marB="63500" anchor="t">
-                    <a:lnL w="9525" cap="flat" cmpd="sng" algn="ctr">
-                      <a:solidFill>
-                        <a:srgbClr val="DCE7EA"/>
-                      </a:solidFill>
-                      <a:prstDash val="solid"/>
-                      <a:round/>
-                      <a:headEnd type="none" w="med" len="med"/>
-                      <a:tailEnd type="none" w="med" len="med"/>
-                    </a:lnL>
-                    <a:lnR w="9525" cap="flat" cmpd="sng" algn="ctr">
-                      <a:solidFill>
-                        <a:srgbClr val="DCE7EA"/>
-                      </a:solidFill>
-                      <a:prstDash val="solid"/>
-                      <a:round/>
-                      <a:headEnd type="none" w="med" len="med"/>
-                      <a:tailEnd type="none" w="med" len="med"/>
-                    </a:lnR>
-                    <a:lnT w="9525" cap="flat" cmpd="sng" algn="ctr">
-                      <a:solidFill>
-                        <a:srgbClr val="DCE7EA"/>
-                      </a:solidFill>
-                      <a:prstDash val="solid"/>
-                      <a:round/>
-                      <a:headEnd type="none" w="med" len="med"/>
-                      <a:tailEnd type="none" w="med" len="med"/>
-                    </a:lnT>
-                    <a:lnB w="9525" cap="flat" cmpd="sng" algn="ctr">
-                      <a:solidFill>
-                        <a:srgbClr val="DCE7EA"/>
-                      </a:solidFill>
-                      <a:prstDash val="solid"/>
-                      <a:round/>
-                      <a:headEnd type="none" w="med" len="med"/>
-                      <a:tailEnd type="none" w="med" len="med"/>
-                    </a:lnB>
-                    <a:solidFill>
-                      <a:srgbClr val="FFFFFF"/>
-                    </a:solidFill>
-                  </a:tcPr>
-                </a:tc>
-              </a:tr>
-              <a:tr h="628650">
-                <a:tc>
-                  <a:txBody>
-                    <a:bodyPr/>
-                    <a:lstStyle/>
-                    <a:p>
-                      <a:pPr indent="0" marL="0">
-                        <a:buNone/>
-                      </a:pPr>
-                      <a:r>
-                        <a:rPr lang="en-US" sz="1200" b="1" dirty="0">
-                          <a:solidFill>
-                            <a:srgbClr val="004671"/>
-                          </a:solidFill>
-                          <a:latin typeface="Noto Sans" pitchFamily="34" charset="0"/>
-                          <a:ea typeface="Noto Sans" pitchFamily="34" charset="-122"/>
-                          <a:cs typeface="Noto Sans" pitchFamily="34" charset="-120"/>
-                        </a:rPr>
-                        <a:t>15/10–30/10/2026</a:t>
-                      </a:r>
-                      <a:endParaRPr lang="en-US" sz="1200" dirty="0">
-                        <a:latin typeface="Noto Sans" charset="0"/>
-                        <a:ea typeface="Noto Sans" charset="0"/>
-                        <a:cs typeface="Noto Sans" charset="0"/>
-                      </a:endParaRPr>
-                    </a:p>
-                  </a:txBody>
-                  <a:tcPr marL="101600" marR="101600" marT="63500" marB="63500" anchor="t">
-                    <a:lnL w="9525" cap="flat" cmpd="sng" algn="ctr">
-                      <a:solidFill>
-                        <a:srgbClr val="DCE7EA"/>
-                      </a:solidFill>
-                      <a:prstDash val="solid"/>
-                      <a:round/>
-                      <a:headEnd type="none" w="med" len="med"/>
-                      <a:tailEnd type="none" w="med" len="med"/>
-                    </a:lnL>
-                    <a:lnR w="9525" cap="flat" cmpd="sng" algn="ctr">
-                      <a:solidFill>
-                        <a:srgbClr val="DCE7EA"/>
-                      </a:solidFill>
-                      <a:prstDash val="solid"/>
-                      <a:round/>
-                      <a:headEnd type="none" w="med" len="med"/>
-                      <a:tailEnd type="none" w="med" len="med"/>
-                    </a:lnR>
-                    <a:lnT w="9525" cap="flat" cmpd="sng" algn="ctr">
-                      <a:solidFill>
-                        <a:srgbClr val="DCE7EA"/>
-                      </a:solidFill>
-                      <a:prstDash val="solid"/>
-                      <a:round/>
-                      <a:headEnd type="none" w="med" len="med"/>
-                      <a:tailEnd type="none" w="med" len="med"/>
-                    </a:lnT>
-                    <a:lnB w="9525" cap="flat" cmpd="sng" algn="ctr">
-                      <a:solidFill>
-                        <a:srgbClr val="DCE7EA"/>
-                      </a:solidFill>
-                      <a:prstDash val="solid"/>
-                      <a:round/>
-                      <a:headEnd type="none" w="med" len="med"/>
-                      <a:tailEnd type="none" w="med" len="med"/>
-                    </a:lnB>
-                    <a:solidFill>
-                      <a:srgbClr val="F2FAFB"/>
-                    </a:solidFill>
-                  </a:tcPr>
-                </a:tc>
-                <a:tc>
-                  <a:txBody>
-                    <a:bodyPr/>
-                    <a:lstStyle/>
-                    <a:p>
-                      <a:pPr indent="0" marL="0">
-                        <a:buNone/>
-                      </a:pPr>
-                      <a:r>
-                        <a:rPr lang="en-US" sz="1200" dirty="0">
-                          <a:solidFill>
-                            <a:srgbClr val="22333F"/>
-                          </a:solidFill>
-                          <a:latin typeface="Noto Sans" pitchFamily="34" charset="0"/>
-                          <a:ea typeface="Noto Sans" pitchFamily="34" charset="-122"/>
-                          <a:cs typeface="Noto Sans" pitchFamily="34" charset="-120"/>
-                        </a:rPr>
-                        <a:t>Xử lý kết quả khảo sát, chọn phương án concept, xây kịch bản bán hàng, chuẩn bị Marketing, đào tạo Sale</a:t>
-                      </a:r>
-                      <a:endParaRPr lang="en-US" sz="1200" dirty="0">
-                        <a:latin typeface="Noto Sans" charset="0"/>
-                        <a:ea typeface="Noto Sans" charset="0"/>
-                        <a:cs typeface="Noto Sans" charset="0"/>
-                      </a:endParaRPr>
-                    </a:p>
-                  </a:txBody>
-                  <a:tcPr marL="101600" marR="101600" marT="63500" marB="63500" anchor="t">
-                    <a:lnL w="9525" cap="flat" cmpd="sng" algn="ctr">
-                      <a:solidFill>
-                        <a:srgbClr val="DCE7EA"/>
-                      </a:solidFill>
-                      <a:prstDash val="solid"/>
-                      <a:round/>
-                      <a:headEnd type="none" w="med" len="med"/>
-                      <a:tailEnd type="none" w="med" len="med"/>
-                    </a:lnL>
-                    <a:lnR w="9525" cap="flat" cmpd="sng" algn="ctr">
-                      <a:solidFill>
-                        <a:srgbClr val="DCE7EA"/>
-                      </a:solidFill>
-                      <a:prstDash val="solid"/>
-                      <a:round/>
-                      <a:headEnd type="none" w="med" len="med"/>
-                      <a:tailEnd type="none" w="med" len="med"/>
-                    </a:lnR>
-                    <a:lnT w="9525" cap="flat" cmpd="sng" algn="ctr">
-                      <a:solidFill>
-                        <a:srgbClr val="DCE7EA"/>
-                      </a:solidFill>
-                      <a:prstDash val="solid"/>
-                      <a:round/>
-                      <a:headEnd type="none" w="med" len="med"/>
-                      <a:tailEnd type="none" w="med" len="med"/>
-                    </a:lnT>
-                    <a:lnB w="9525" cap="flat" cmpd="sng" algn="ctr">
-                      <a:solidFill>
-                        <a:srgbClr val="DCE7EA"/>
-                      </a:solidFill>
-                      <a:prstDash val="solid"/>
-                      <a:round/>
-                      <a:headEnd type="none" w="med" len="med"/>
-                      <a:tailEnd type="none" w="med" len="med"/>
-                    </a:lnB>
-                    <a:solidFill>
-                      <a:srgbClr val="F2FAFB"/>
-                    </a:solidFill>
-                  </a:tcPr>
-                </a:tc>
-              </a:tr>
-              <a:tr h="628650">
-                <a:tc>
-                  <a:txBody>
-                    <a:bodyPr/>
-                    <a:lstStyle/>
-                    <a:p>
-                      <a:pPr indent="0" marL="0">
-                        <a:buNone/>
-                      </a:pPr>
-                      <a:r>
-                        <a:rPr lang="en-US" sz="1200" b="1" dirty="0">
-                          <a:solidFill>
-                            <a:srgbClr val="004671"/>
-                          </a:solidFill>
-                          <a:latin typeface="Noto Sans" pitchFamily="34" charset="0"/>
-                          <a:ea typeface="Noto Sans" pitchFamily="34" charset="-122"/>
-                          <a:cs typeface="Noto Sans" pitchFamily="34" charset="-120"/>
-                        </a:rPr>
-                        <a:t>Tháng 11/2026</a:t>
-                      </a:r>
-                      <a:endParaRPr lang="en-US" sz="1200" dirty="0">
-                        <a:latin typeface="Noto Sans" charset="0"/>
-                        <a:ea typeface="Noto Sans" charset="0"/>
-                        <a:cs typeface="Noto Sans" charset="0"/>
-                      </a:endParaRPr>
-                    </a:p>
-                  </a:txBody>
-                  <a:tcPr marL="101600" marR="101600" marT="63500" marB="63500" anchor="t">
-                    <a:lnL w="9525" cap="flat" cmpd="sng" algn="ctr">
-                      <a:solidFill>
-                        <a:srgbClr val="DCE7EA"/>
-                      </a:solidFill>
-                      <a:prstDash val="solid"/>
-                      <a:round/>
-                      <a:headEnd type="none" w="med" len="med"/>
-                      <a:tailEnd type="none" w="med" len="med"/>
-                    </a:lnL>
-                    <a:lnR w="9525" cap="flat" cmpd="sng" algn="ctr">
-                      <a:solidFill>
-                        <a:srgbClr val="DCE7EA"/>
-                      </a:solidFill>
-                      <a:prstDash val="solid"/>
-                      <a:round/>
-                      <a:headEnd type="none" w="med" len="med"/>
-                      <a:tailEnd type="none" w="med" len="med"/>
-                    </a:lnR>
-                    <a:lnT w="9525" cap="flat" cmpd="sng" algn="ctr">
-                      <a:solidFill>
-                        <a:srgbClr val="DCE7EA"/>
-                      </a:solidFill>
-                      <a:prstDash val="solid"/>
-                      <a:round/>
-                      <a:headEnd type="none" w="med" len="med"/>
-                      <a:tailEnd type="none" w="med" len="med"/>
-                    </a:lnT>
-                    <a:lnB w="9525" cap="flat" cmpd="sng" algn="ctr">
-                      <a:solidFill>
-                        <a:srgbClr val="DCE7EA"/>
-                      </a:solidFill>
-                      <a:prstDash val="solid"/>
-                      <a:round/>
-                      <a:headEnd type="none" w="med" len="med"/>
-                      <a:tailEnd type="none" w="med" len="med"/>
-                    </a:lnB>
-                    <a:solidFill>
-                      <a:srgbClr val="FFFFFF"/>
-                    </a:solidFill>
-                  </a:tcPr>
-                </a:tc>
-                <a:tc>
-                  <a:txBody>
-                    <a:bodyPr/>
-                    <a:lstStyle/>
-                    <a:p>
-                      <a:pPr indent="0" marL="0">
-                        <a:buNone/>
-                      </a:pPr>
-                      <a:r>
-                        <a:rPr lang="en-US" sz="1200" dirty="0">
-                          <a:solidFill>
-                            <a:srgbClr val="22333F"/>
-                          </a:solidFill>
-                          <a:latin typeface="Noto Sans" pitchFamily="34" charset="0"/>
-                          <a:ea typeface="Noto Sans" pitchFamily="34" charset="-122"/>
-                          <a:cs typeface="Noto Sans" pitchFamily="34" charset="-120"/>
-                        </a:rPr>
-                        <a:t>Test bán vòng 1 — quảng cáo + Sale gọi điện, thu tiền thật để đo tỷ lệ chốt; sau đó hoàn tiền + tặng 1 tháng học trải nghiệm</a:t>
-                      </a:r>
-                      <a:endParaRPr lang="en-US" sz="1200" dirty="0">
-                        <a:latin typeface="Noto Sans" charset="0"/>
-                        <a:ea typeface="Noto Sans" charset="0"/>
-                        <a:cs typeface="Noto Sans" charset="0"/>
-                      </a:endParaRPr>
-                    </a:p>
-                  </a:txBody>
-                  <a:tcPr marL="101600" marR="101600" marT="63500" marB="63500" anchor="t">
-                    <a:lnL w="9525" cap="flat" cmpd="sng" algn="ctr">
-                      <a:solidFill>
-                        <a:srgbClr val="DCE7EA"/>
-                      </a:solidFill>
-                      <a:prstDash val="solid"/>
-                      <a:round/>
-                      <a:headEnd type="none" w="med" len="med"/>
-                      <a:tailEnd type="none" w="med" len="med"/>
-                    </a:lnL>
-                    <a:lnR w="9525" cap="flat" cmpd="sng" algn="ctr">
-                      <a:solidFill>
-                        <a:srgbClr val="DCE7EA"/>
-                      </a:solidFill>
-                      <a:prstDash val="solid"/>
-                      <a:round/>
-                      <a:headEnd type="none" w="med" len="med"/>
-                      <a:tailEnd type="none" w="med" len="med"/>
-                    </a:lnR>
-                    <a:lnT w="9525" cap="flat" cmpd="sng" algn="ctr">
-                      <a:solidFill>
-                        <a:srgbClr val="DCE7EA"/>
-                      </a:solidFill>
-                      <a:prstDash val="solid"/>
-                      <a:round/>
-                      <a:headEnd type="none" w="med" len="med"/>
-                      <a:tailEnd type="none" w="med" len="med"/>
-                    </a:lnT>
-                    <a:lnB w="9525" cap="flat" cmpd="sng" algn="ctr">
-                      <a:solidFill>
-                        <a:srgbClr val="DCE7EA"/>
-                      </a:solidFill>
-                      <a:prstDash val="solid"/>
-                      <a:round/>
-                      <a:headEnd type="none" w="med" len="med"/>
-                      <a:tailEnd type="none" w="med" len="med"/>
-                    </a:lnB>
-                    <a:solidFill>
-                      <a:srgbClr val="FFFFFF"/>
-                    </a:solidFill>
-                  </a:tcPr>
-                </a:tc>
-              </a:tr>
-              <a:tr h="628650">
-                <a:tc>
-                  <a:txBody>
-                    <a:bodyPr/>
-                    <a:lstStyle/>
-                    <a:p>
-                      <a:pPr indent="0" marL="0">
-                        <a:buNone/>
-                      </a:pPr>
-                      <a:r>
-                        <a:rPr lang="en-US" sz="1200" b="1" dirty="0">
-                          <a:solidFill>
-                            <a:srgbClr val="004671"/>
-                          </a:solidFill>
-                          <a:latin typeface="Noto Sans" pitchFamily="34" charset="0"/>
-                          <a:ea typeface="Noto Sans" pitchFamily="34" charset="-122"/>
-                          <a:cs typeface="Noto Sans" pitchFamily="34" charset="-120"/>
-                        </a:rPr>
-                        <a:t>Tháng 12/2026</a:t>
-                      </a:r>
-                      <a:endParaRPr lang="en-US" sz="1200" dirty="0">
-                        <a:latin typeface="Noto Sans" charset="0"/>
-                        <a:ea typeface="Noto Sans" charset="0"/>
-                        <a:cs typeface="Noto Sans" charset="0"/>
-                      </a:endParaRPr>
-                    </a:p>
-                  </a:txBody>
-                  <a:tcPr marL="101600" marR="101600" marT="63500" marB="63500" anchor="t">
-                    <a:lnL w="9525" cap="flat" cmpd="sng" algn="ctr">
-                      <a:solidFill>
-                        <a:srgbClr val="DCE7EA"/>
-                      </a:solidFill>
-                      <a:prstDash val="solid"/>
-                      <a:round/>
-                      <a:headEnd type="none" w="med" len="med"/>
-                      <a:tailEnd type="none" w="med" len="med"/>
-                    </a:lnL>
-                    <a:lnR w="9525" cap="flat" cmpd="sng" algn="ctr">
-                      <a:solidFill>
-                        <a:srgbClr val="DCE7EA"/>
-                      </a:solidFill>
-                      <a:prstDash val="solid"/>
-                      <a:round/>
-                      <a:headEnd type="none" w="med" len="med"/>
-                      <a:tailEnd type="none" w="med" len="med"/>
-                    </a:lnR>
-                    <a:lnT w="9525" cap="flat" cmpd="sng" algn="ctr">
-                      <a:solidFill>
-                        <a:srgbClr val="DCE7EA"/>
-                      </a:solidFill>
-                      <a:prstDash val="solid"/>
-                      <a:round/>
-                      <a:headEnd type="none" w="med" len="med"/>
-                      <a:tailEnd type="none" w="med" len="med"/>
-                    </a:lnT>
-                    <a:lnB w="9525" cap="flat" cmpd="sng" algn="ctr">
-                      <a:solidFill>
-                        <a:srgbClr val="DCE7EA"/>
-                      </a:solidFill>
-                      <a:prstDash val="solid"/>
-                      <a:round/>
-                      <a:headEnd type="none" w="med" len="med"/>
-                      <a:tailEnd type="none" w="med" len="med"/>
-                    </a:lnB>
-                    <a:solidFill>
-                      <a:srgbClr val="F2FAFB"/>
-                    </a:solidFill>
-                  </a:tcPr>
-                </a:tc>
-                <a:tc>
-                  <a:txBody>
-                    <a:bodyPr/>
-                    <a:lstStyle/>
-                    <a:p>
-                      <a:pPr indent="0" marL="0">
-                        <a:buNone/>
-                      </a:pPr>
-                      <a:r>
-                        <a:rPr lang="en-US" sz="1200" dirty="0">
-                          <a:solidFill>
-                            <a:srgbClr val="22333F"/>
-                          </a:solidFill>
-                          <a:latin typeface="Noto Sans" pitchFamily="34" charset="0"/>
-                          <a:ea typeface="Noto Sans" pitchFamily="34" charset="-122"/>
-                          <a:cs typeface="Noto Sans" pitchFamily="34" charset="-120"/>
-                        </a:rPr>
-                        <a:t>Làm mịn kịch bản/sản phẩm theo phản hồi vòng 1 → test bán vòng 2</a:t>
-                      </a:r>
-                      <a:endParaRPr lang="en-US" sz="1200" dirty="0">
-                        <a:latin typeface="Noto Sans" charset="0"/>
-                        <a:ea typeface="Noto Sans" charset="0"/>
-                        <a:cs typeface="Noto Sans" charset="0"/>
-                      </a:endParaRPr>
-                    </a:p>
-                  </a:txBody>
-                  <a:tcPr marL="101600" marR="101600" marT="63500" marB="63500" anchor="t">
-                    <a:lnL w="9525" cap="flat" cmpd="sng" algn="ctr">
-                      <a:solidFill>
-                        <a:srgbClr val="DCE7EA"/>
-                      </a:solidFill>
-                      <a:prstDash val="solid"/>
-                      <a:round/>
-                      <a:headEnd type="none" w="med" len="med"/>
-                      <a:tailEnd type="none" w="med" len="med"/>
-                    </a:lnL>
-                    <a:lnR w="9525" cap="flat" cmpd="sng" algn="ctr">
-                      <a:solidFill>
-                        <a:srgbClr val="DCE7EA"/>
-                      </a:solidFill>
-                      <a:prstDash val="solid"/>
-                      <a:round/>
-                      <a:headEnd type="none" w="med" len="med"/>
-                      <a:tailEnd type="none" w="med" len="med"/>
-                    </a:lnR>
-                    <a:lnT w="9525" cap="flat" cmpd="sng" algn="ctr">
-                      <a:solidFill>
-                        <a:srgbClr val="DCE7EA"/>
-                      </a:solidFill>
-                      <a:prstDash val="solid"/>
-                      <a:round/>
-                      <a:headEnd type="none" w="med" len="med"/>
-                      <a:tailEnd type="none" w="med" len="med"/>
-                    </a:lnT>
-                    <a:lnB w="9525" cap="flat" cmpd="sng" algn="ctr">
-                      <a:solidFill>
-                        <a:srgbClr val="DCE7EA"/>
-                      </a:solidFill>
-                      <a:prstDash val="solid"/>
-                      <a:round/>
-                      <a:headEnd type="none" w="med" len="med"/>
-                      <a:tailEnd type="none" w="med" len="med"/>
-                    </a:lnB>
-                    <a:solidFill>
-                      <a:srgbClr val="F2FAFB"/>
-                    </a:solidFill>
-                  </a:tcPr>
-                </a:tc>
-              </a:tr>
-              <a:tr h="628650">
-                <a:tc>
-                  <a:txBody>
-                    <a:bodyPr/>
-                    <a:lstStyle/>
-                    <a:p>
-                      <a:pPr indent="0" marL="0">
-                        <a:buNone/>
-                      </a:pPr>
-                      <a:r>
-                        <a:rPr lang="en-US" sz="1200" b="1" dirty="0">
-                          <a:solidFill>
-                            <a:srgbClr val="004671"/>
-                          </a:solidFill>
-                          <a:latin typeface="Noto Sans" pitchFamily="34" charset="0"/>
-                          <a:ea typeface="Noto Sans" pitchFamily="34" charset="-122"/>
-                          <a:cs typeface="Noto Sans" pitchFamily="34" charset="-120"/>
-                        </a:rPr>
-                        <a:t>Tháng 1/2027</a:t>
-                      </a:r>
-                      <a:endParaRPr lang="en-US" sz="1200" dirty="0">
-                        <a:latin typeface="Noto Sans" charset="0"/>
-                        <a:ea typeface="Noto Sans" charset="0"/>
-                        <a:cs typeface="Noto Sans" charset="0"/>
-                      </a:endParaRPr>
-                    </a:p>
-                  </a:txBody>
-                  <a:tcPr marL="101600" marR="101600" marT="63500" marB="63500" anchor="t">
-                    <a:lnL w="9525" cap="flat" cmpd="sng" algn="ctr">
-                      <a:solidFill>
-                        <a:srgbClr val="DCE7EA"/>
-                      </a:solidFill>
-                      <a:prstDash val="solid"/>
-                      <a:round/>
-                      <a:headEnd type="none" w="med" len="med"/>
-                      <a:tailEnd type="none" w="med" len="med"/>
-                    </a:lnL>
-                    <a:lnR w="9525" cap="flat" cmpd="sng" algn="ctr">
-                      <a:solidFill>
-                        <a:srgbClr val="DCE7EA"/>
-                      </a:solidFill>
-                      <a:prstDash val="solid"/>
-                      <a:round/>
-                      <a:headEnd type="none" w="med" len="med"/>
-                      <a:tailEnd type="none" w="med" len="med"/>
-                    </a:lnR>
-                    <a:lnT w="9525" cap="flat" cmpd="sng" algn="ctr">
-                      <a:solidFill>
-                        <a:srgbClr val="DCE7EA"/>
-                      </a:solidFill>
-                      <a:prstDash val="solid"/>
-                      <a:round/>
-                      <a:headEnd type="none" w="med" len="med"/>
-                      <a:tailEnd type="none" w="med" len="med"/>
-                    </a:lnT>
-                    <a:lnB w="9525" cap="flat" cmpd="sng" algn="ctr">
-                      <a:solidFill>
-                        <a:srgbClr val="DCE7EA"/>
-                      </a:solidFill>
-                      <a:prstDash val="solid"/>
-                      <a:round/>
-                      <a:headEnd type="none" w="med" len="med"/>
-                      <a:tailEnd type="none" w="med" len="med"/>
-                    </a:lnB>
-                    <a:solidFill>
-                      <a:srgbClr val="FFFFFF"/>
-                    </a:solidFill>
-                  </a:tcPr>
-                </a:tc>
-                <a:tc>
-                  <a:txBody>
-                    <a:bodyPr/>
-                    <a:lstStyle/>
-                    <a:p>
-                      <a:pPr indent="0" marL="0">
-                        <a:buNone/>
-                      </a:pPr>
-                      <a:r>
-                        <a:rPr lang="en-US" sz="1200" dirty="0">
-                          <a:solidFill>
-                            <a:srgbClr val="22333F"/>
-                          </a:solidFill>
-                          <a:latin typeface="Noto Sans" pitchFamily="34" charset="0"/>
-                          <a:ea typeface="Noto Sans" pitchFamily="34" charset="-122"/>
-                          <a:cs typeface="Noto Sans" pitchFamily="34" charset="-120"/>
-                        </a:rPr>
-                        <a:t>Đổ nguồn lực chính thức code/hoàn thiện sản phẩm — 1-6 tháng tuỳ concept được chọn</a:t>
-                      </a:r>
-                      <a:endParaRPr lang="en-US" sz="1200" dirty="0">
-                        <a:latin typeface="Noto Sans" charset="0"/>
-                        <a:ea typeface="Noto Sans" charset="0"/>
-                        <a:cs typeface="Noto Sans" charset="0"/>
-                      </a:endParaRPr>
-                    </a:p>
-                  </a:txBody>
-                  <a:tcPr marL="101600" marR="101600" marT="63500" marB="63500" anchor="t">
-                    <a:lnL w="9525" cap="flat" cmpd="sng" algn="ctr">
-                      <a:solidFill>
-                        <a:srgbClr val="DCE7EA"/>
-                      </a:solidFill>
-                      <a:prstDash val="solid"/>
-                      <a:round/>
-                      <a:headEnd type="none" w="med" len="med"/>
-                      <a:tailEnd type="none" w="med" len="med"/>
-                    </a:lnL>
-                    <a:lnR w="9525" cap="flat" cmpd="sng" algn="ctr">
-                      <a:solidFill>
-                        <a:srgbClr val="DCE7EA"/>
-                      </a:solidFill>
-                      <a:prstDash val="solid"/>
-                      <a:round/>
-                      <a:headEnd type="none" w="med" len="med"/>
-                      <a:tailEnd type="none" w="med" len="med"/>
-                    </a:lnR>
-                    <a:lnT w="9525" cap="flat" cmpd="sng" algn="ctr">
-                      <a:solidFill>
-                        <a:srgbClr val="DCE7EA"/>
-                      </a:solidFill>
-                      <a:prstDash val="solid"/>
-                      <a:round/>
-                      <a:headEnd type="none" w="med" len="med"/>
-                      <a:tailEnd type="none" w="med" len="med"/>
-                    </a:lnT>
-                    <a:lnB w="9525" cap="flat" cmpd="sng" algn="ctr">
-                      <a:solidFill>
-                        <a:srgbClr val="DCE7EA"/>
-                      </a:solidFill>
-                      <a:prstDash val="solid"/>
-                      <a:round/>
-                      <a:headEnd type="none" w="med" len="med"/>
-                      <a:tailEnd type="none" w="med" len="med"/>
-                    </a:lnB>
-                    <a:solidFill>
-                      <a:srgbClr val="FFFFFF"/>
-                    </a:solidFill>
-                  </a:tcPr>
-                </a:tc>
-              </a:tr>
-            </a:tbl>
-          </a:graphicData>
-        </a:graphic>
-      </p:graphicFrame>
+      <p:sp>
+        <p:nvSpPr>
+          <p:cNvPr id="6" name="Text 3"/>
+          <p:cNvSpPr/>
+          <p:nvPr/>
+        </p:nvSpPr>
+        <p:spPr>
+          <a:xfrm>
+            <a:off x="502920" y="1280160"/>
+            <a:ext cx="11183112" cy="384048"/>
+          </a:xfrm>
+          <a:prstGeom prst="rect">
+            <a:avLst/>
+          </a:prstGeom>
+          <a:noFill/>
+          <a:ln/>
+        </p:spPr>
+        <p:txBody>
+          <a:bodyPr wrap="square" rtlCol="0" anchor="ctr"/>
+          <a:lstStyle/>
+          <a:p>
+            <a:pPr indent="0" marL="0">
+              <a:buNone/>
+            </a:pPr>
+            <a:r>
+              <a:rPr lang="en-US" sz="1050" i="1" dirty="0">
+                <a:solidFill>
+                  <a:srgbClr val="5B6472"/>
+                </a:solidFill>
+                <a:latin typeface="Noto Sans" pitchFamily="34" charset="0"/>
+                <a:ea typeface="Noto Sans" pitchFamily="34" charset="-122"/>
+                <a:cs typeface="Noto Sans" pitchFamily="34" charset="-120"/>
+              </a:rPr>
+              <a:t>Giữ nền Concept 1 nâng cấp làm mịn sản phẩm + thêm 1 buổi Live/tuần môn khác (ngoài tiếng Anh).</a:t>
+            </a:r>
+            <a:endParaRPr lang="en-US" sz="1050" dirty="0"/>
+          </a:p>
+        </p:txBody>
+      </p:sp>
+      <p:sp>
+        <p:nvSpPr>
+          <p:cNvPr id="7" name="Shape 4"/>
+          <p:cNvSpPr/>
+          <p:nvPr/>
+        </p:nvSpPr>
+        <p:spPr>
+          <a:xfrm>
+            <a:off x="502920" y="1664208"/>
+            <a:ext cx="73152" cy="1417320"/>
+          </a:xfrm>
+          <a:prstGeom prst="rect">
+            <a:avLst/>
+          </a:prstGeom>
+          <a:solidFill>
+            <a:srgbClr val="004671"/>
+          </a:solidFill>
+          <a:ln/>
+        </p:spPr>
+      </p:sp>
+      <p:sp>
+        <p:nvSpPr>
+          <p:cNvPr id="8" name="Text 5"/>
+          <p:cNvSpPr/>
+          <p:nvPr/>
+        </p:nvSpPr>
+        <p:spPr>
+          <a:xfrm>
+            <a:off x="731520" y="1664208"/>
+            <a:ext cx="10954512" cy="1463040"/>
+          </a:xfrm>
+          <a:prstGeom prst="rect">
+            <a:avLst/>
+          </a:prstGeom>
+          <a:noFill/>
+          <a:ln/>
+        </p:spPr>
+        <p:txBody>
+          <a:bodyPr wrap="square" rtlCol="0" anchor="t"/>
+          <a:lstStyle/>
+          <a:p>
+            <a:pPr indent="0" marL="0">
+              <a:lnSpc>
+                <a:spcPct val="102000"/>
+              </a:lnSpc>
+              <a:spcAft>
+                <a:spcPts val="200"/>
+              </a:spcAft>
+              <a:buNone/>
+            </a:pPr>
+            <a:r>
+              <a:rPr lang="en-US" sz="1300" b="1" dirty="0">
+                <a:solidFill>
+                  <a:srgbClr val="004671"/>
+                </a:solidFill>
+                <a:latin typeface="Noto Sans" pitchFamily="34" charset="0"/>
+                <a:ea typeface="Noto Sans" pitchFamily="34" charset="-122"/>
+                <a:cs typeface="Noto Sans" pitchFamily="34" charset="-120"/>
+              </a:rPr>
+              <a:t>Option 2.1 – Thêm môn học thuộc chương trình GDPT</a:t>
+            </a:r>
+            <a:endParaRPr lang="en-US" sz="1300" dirty="0"/>
+          </a:p>
+          <a:p>
+            <a:pPr indent="0" marL="0">
+              <a:lnSpc>
+                <a:spcPct val="102000"/>
+              </a:lnSpc>
+              <a:spcAft>
+                <a:spcPts val="300"/>
+              </a:spcAft>
+              <a:buNone/>
+            </a:pPr>
+            <a:r>
+              <a:rPr lang="en-US" sz="1000" i="1" dirty="0">
+                <a:solidFill>
+                  <a:srgbClr val="5B6472"/>
+                </a:solidFill>
+                <a:latin typeface="Noto Sans" pitchFamily="34" charset="0"/>
+                <a:ea typeface="Noto Sans" pitchFamily="34" charset="-122"/>
+                <a:cs typeface="Noto Sans" pitchFamily="34" charset="-120"/>
+              </a:rPr>
+              <a:t>(Toán, Tiếng Việt...)</a:t>
+            </a:r>
+            <a:endParaRPr lang="en-US" sz="1300" dirty="0"/>
+          </a:p>
+          <a:p>
+            <a:pPr marL="342900" indent="-342900">
+              <a:lnSpc>
+                <a:spcPct val="102000"/>
+              </a:lnSpc>
+              <a:spcAft>
+                <a:spcPts val="300"/>
+              </a:spcAft>
+              <a:buSzPct val="100000"/>
+              <a:buChar char="•"/>
+            </a:pPr>
+            <a:r>
+              <a:rPr lang="en-US" sz="1100" dirty="0">
+                <a:solidFill>
+                  <a:srgbClr val="22333F"/>
+                </a:solidFill>
+                <a:latin typeface="Noto Sans" pitchFamily="34" charset="0"/>
+                <a:ea typeface="Noto Sans" pitchFamily="34" charset="-122"/>
+                <a:cs typeface="Noto Sans" pitchFamily="34" charset="-120"/>
+              </a:rPr>
+              <a:t>Giữ nguyên Big Class + AI Practice + AI Speak + Edupia Club + GVCN (môn tiếng Anh) hiện có</a:t>
+            </a:r>
+            <a:endParaRPr lang="en-US" sz="1300" dirty="0"/>
+          </a:p>
+          <a:p>
+            <a:pPr marL="342900" indent="-342900">
+              <a:lnSpc>
+                <a:spcPct val="102000"/>
+              </a:lnSpc>
+              <a:spcAft>
+                <a:spcPts val="300"/>
+              </a:spcAft>
+              <a:buSzPct val="100000"/>
+              <a:buChar char="•"/>
+            </a:pPr>
+            <a:r>
+              <a:rPr lang="en-US" sz="1100" dirty="0">
+                <a:solidFill>
+                  <a:srgbClr val="22333F"/>
+                </a:solidFill>
+                <a:latin typeface="Noto Sans" pitchFamily="34" charset="0"/>
+                <a:ea typeface="Noto Sans" pitchFamily="34" charset="-122"/>
+                <a:cs typeface="Noto Sans" pitchFamily="34" charset="-120"/>
+              </a:rPr>
+              <a:t>Thêm 1 buổi live 1 môn GDPT/tuần</a:t>
+            </a:r>
+            <a:endParaRPr lang="en-US" sz="1300" dirty="0"/>
+          </a:p>
+        </p:txBody>
+      </p:sp>
+      <p:sp>
+        <p:nvSpPr>
+          <p:cNvPr id="9" name="Shape 6"/>
+          <p:cNvSpPr/>
+          <p:nvPr/>
+        </p:nvSpPr>
+        <p:spPr>
+          <a:xfrm>
+            <a:off x="502920" y="3310128"/>
+            <a:ext cx="73152" cy="1417320"/>
+          </a:xfrm>
+          <a:prstGeom prst="rect">
+            <a:avLst/>
+          </a:prstGeom>
+          <a:solidFill>
+            <a:srgbClr val="3B81B1"/>
+          </a:solidFill>
+          <a:ln/>
+        </p:spPr>
+      </p:sp>
+      <p:sp>
+        <p:nvSpPr>
+          <p:cNvPr id="10" name="Text 7"/>
+          <p:cNvSpPr/>
+          <p:nvPr/>
+        </p:nvSpPr>
+        <p:spPr>
+          <a:xfrm>
+            <a:off x="731520" y="3310128"/>
+            <a:ext cx="10954512" cy="1463040"/>
+          </a:xfrm>
+          <a:prstGeom prst="rect">
+            <a:avLst/>
+          </a:prstGeom>
+          <a:noFill/>
+          <a:ln/>
+        </p:spPr>
+        <p:txBody>
+          <a:bodyPr wrap="square" rtlCol="0" anchor="t"/>
+          <a:lstStyle/>
+          <a:p>
+            <a:pPr indent="0" marL="0">
+              <a:lnSpc>
+                <a:spcPct val="102000"/>
+              </a:lnSpc>
+              <a:spcAft>
+                <a:spcPts val="200"/>
+              </a:spcAft>
+              <a:buNone/>
+            </a:pPr>
+            <a:r>
+              <a:rPr lang="en-US" sz="1300" b="1" dirty="0">
+                <a:solidFill>
+                  <a:srgbClr val="004671"/>
+                </a:solidFill>
+                <a:latin typeface="Noto Sans" pitchFamily="34" charset="0"/>
+                <a:ea typeface="Noto Sans" pitchFamily="34" charset="-122"/>
+                <a:cs typeface="Noto Sans" pitchFamily="34" charset="-120"/>
+              </a:rPr>
+              <a:t>Option 2.2 – Thêm môn khác ngoài chương trình GDPT: STEM/STEAM/AI cơ bản/Kỹ năng sống</a:t>
+            </a:r>
+            <a:endParaRPr lang="en-US" sz="1300" dirty="0"/>
+          </a:p>
+          <a:p>
+            <a:pPr marL="342900" indent="-342900">
+              <a:lnSpc>
+                <a:spcPct val="102000"/>
+              </a:lnSpc>
+              <a:spcAft>
+                <a:spcPts val="300"/>
+              </a:spcAft>
+              <a:buSzPct val="100000"/>
+              <a:buChar char="•"/>
+            </a:pPr>
+            <a:r>
+              <a:rPr lang="en-US" sz="1100" dirty="0">
+                <a:solidFill>
+                  <a:srgbClr val="22333F"/>
+                </a:solidFill>
+                <a:latin typeface="Noto Sans" pitchFamily="34" charset="0"/>
+                <a:ea typeface="Noto Sans" pitchFamily="34" charset="-122"/>
+                <a:cs typeface="Noto Sans" pitchFamily="34" charset="-120"/>
+              </a:rPr>
+              <a:t>Giữ nguyên Big Class + AI Practice + AI Speak + Edupia Club + GVCN (môn tiếng Anh) hiện có</a:t>
+            </a:r>
+            <a:endParaRPr lang="en-US" sz="1300" dirty="0"/>
+          </a:p>
+          <a:p>
+            <a:pPr marL="342900" indent="-342900">
+              <a:lnSpc>
+                <a:spcPct val="102000"/>
+              </a:lnSpc>
+              <a:spcAft>
+                <a:spcPts val="300"/>
+              </a:spcAft>
+              <a:buSzPct val="100000"/>
+              <a:buChar char="•"/>
+            </a:pPr>
+            <a:r>
+              <a:rPr lang="en-US" sz="1100" dirty="0">
+                <a:solidFill>
+                  <a:srgbClr val="22333F"/>
+                </a:solidFill>
+                <a:latin typeface="Noto Sans" pitchFamily="34" charset="0"/>
+                <a:ea typeface="Noto Sans" pitchFamily="34" charset="-122"/>
+                <a:cs typeface="Noto Sans" pitchFamily="34" charset="-120"/>
+              </a:rPr>
+              <a:t>Thêm 1 buổi live 1 môn STEM/STEAM/AI cơ bản/Kỹ năng sống/tuần</a:t>
+            </a:r>
+            <a:endParaRPr lang="en-US" sz="1300" dirty="0"/>
+          </a:p>
+        </p:txBody>
+      </p:sp>
+      <p:sp>
+        <p:nvSpPr>
+          <p:cNvPr id="11" name="Shape 8"/>
+          <p:cNvSpPr/>
+          <p:nvPr/>
+        </p:nvSpPr>
+        <p:spPr>
+          <a:xfrm>
+            <a:off x="502920" y="5623560"/>
+            <a:ext cx="11183112" cy="621792"/>
+          </a:xfrm>
+          <a:prstGeom prst="rect">
+            <a:avLst/>
+          </a:prstGeom>
+          <a:solidFill>
+            <a:srgbClr val="004671"/>
+          </a:solidFill>
+          <a:ln/>
+        </p:spPr>
+      </p:sp>
+      <p:sp>
+        <p:nvSpPr>
+          <p:cNvPr id="12" name="Text 9"/>
+          <p:cNvSpPr/>
+          <p:nvPr/>
+        </p:nvSpPr>
+        <p:spPr>
+          <a:xfrm>
+            <a:off x="731520" y="5623560"/>
+            <a:ext cx="10725912" cy="621792"/>
+          </a:xfrm>
+          <a:prstGeom prst="rect">
+            <a:avLst/>
+          </a:prstGeom>
+          <a:noFill/>
+          <a:ln/>
+        </p:spPr>
+        <p:txBody>
+          <a:bodyPr wrap="square" rtlCol="0" anchor="ctr"/>
+          <a:lstStyle/>
+          <a:p>
+            <a:pPr indent="0" marL="0">
+              <a:buNone/>
+            </a:pPr>
+            <a:r>
+              <a:rPr lang="en-US" sz="1150" i="1" dirty="0">
+                <a:solidFill>
+                  <a:srgbClr val="FFFFFF"/>
+                </a:solidFill>
+                <a:latin typeface="Noto Sans" pitchFamily="34" charset="0"/>
+                <a:ea typeface="Noto Sans" pitchFamily="34" charset="-122"/>
+                <a:cs typeface="Noto Sans" pitchFamily="34" charset="-120"/>
+              </a:rPr>
+              <a:t>USP: “Chương trình tiếng Anh trực tuyến có thêm 1 buổi học với môn học khác mỗi tuần, giúp con phát triển toàn diện và phụ huynh không cần tìm thêm hoạt động bổ trợ ở nơi khác.”</a:t>
+            </a:r>
+            <a:endParaRPr lang="en-US" sz="1150" dirty="0"/>
+          </a:p>
+        </p:txBody>
+      </p:sp>
       <p:pic>
         <p:nvPicPr>
-          <p:cNvPr id="7" name="Image 1" descr="C:\Users\landa\AppData\Local\Temp\claude\c--Users-landa--Personal--D---n-AI-Class-new\8a85e8a7-bdeb-42d6-9168-79c96b849bd1\scratchpad\pptx-gen\logo-icon-only.png">    </p:cNvPr>
+          <p:cNvPr id="13" name="Image 1" descr="C:\Users\landa\AppData\Local\Temp\claude\c--Users-landa--Personal--D---n-AI-Class-new\8a85e8a7-bdeb-42d6-9168-79c96b849bd1\scratchpad\pptx-gen\logo-icon-only.png">    </p:cNvPr>
           <p:cNvPicPr>
             <a:picLocks noChangeAspect="1"/>
           </p:cNvPicPr>
@@ -10808,7 +13495,7 @@
       </p:pic>
       <p:sp>
         <p:nvSpPr>
-          <p:cNvPr id="8" name="Text 3"/>
+          <p:cNvPr id="14" name="Text 10"/>
           <p:cNvSpPr/>
           <p:nvPr/>
         </p:nvSpPr>
@@ -10847,7 +13534,7 @@
       </p:sp>
       <p:sp>
         <p:nvSpPr>
-          <p:cNvPr id="9" name="Text 4"/>
+          <p:cNvPr id="15" name="Text 11"/>
           <p:cNvSpPr/>
           <p:nvPr/>
         </p:nvSpPr>
@@ -10878,7 +13565,7 @@
                 <a:ea typeface="Noto Sans" pitchFamily="34" charset="-122"/>
                 <a:cs typeface="Noto Sans" pitchFamily="34" charset="-120"/>
               </a:rPr>
-              <a:t>8 / 9</a:t>
+              <a:t>8 / 11</a:t>
             </a:r>
             <a:endParaRPr lang="en-US" sz="850" dirty="0"/>
           </a:p>

--- a/03_product/concepts/AI-Class-New-slide-deck-FINAL-2026-08-21-branded.pptx
+++ b/03_product/concepts/AI-Class-New-slide-deck-FINAL-2026-08-21-branded.pptx
@@ -8,7 +8,8 @@
     <p:sldId id="256" r:id="rId2"/>
     <p:sldId id="257" r:id="rId3"/>
     <p:sldId id="258" r:id="rId4"/>
-    <p:sldId id="259" r:id="rId5"/>
+    <p:sldId id="268" r:id="rId19"/>
+    <p:sldId id="269" r:id="rId20"/>
     <p:sldId id="260" r:id="rId6"/>
     <p:sldId id="261" r:id="rId7"/>
     <p:sldId id="262" r:id="rId8"/>
@@ -977,94 +978,6 @@
             <a:fld id="{F7021451-1387-4CA6-816F-3879F97B5CBC}" type="slidenum">
               <a:rPr lang="en-US"/>
               <a:t>3</a:t>
-            </a:fld>
-            <a:endParaRPr lang="en-US"/>
-          </a:p>
-        </p:txBody>
-      </p:sp>
-    </p:spTree>
-    <p:extLst>
-      <p:ext uri="{BB962C8B-B14F-4D97-AF65-F5344CB8AC3E}">
-        <p14:creationId xmlns:p14="http://schemas.microsoft.com/office/powerpoint/2010/main" val="1024086991"/>
-      </p:ext>
-    </p:extLst>
-  </p:cSld>
-  <p:clrMapOvr>
-    <a:masterClrMapping/>
-  </p:clrMapOvr>
-</p:notes>
-</file>
-
-<file path=ppt/notesSlides/notesSlide4.xml><?xml version="1.0" encoding="utf-8"?>
-<p:notes xmlns:a="http://schemas.openxmlformats.org/drawingml/2006/main" xmlns:r="http://schemas.openxmlformats.org/officeDocument/2006/relationships" xmlns:p="http://schemas.openxmlformats.org/presentationml/2006/main">
-  <p:cSld>
-    <p:spTree>
-      <p:nvGrpSpPr>
-        <p:cNvPr id="1" name=""/>
-        <p:cNvGrpSpPr/>
-        <p:nvPr/>
-      </p:nvGrpSpPr>
-      <p:grpSpPr>
-        <a:xfrm>
-          <a:off x="0" y="0"/>
-          <a:ext cx="0" cy="0"/>
-          <a:chOff x="0" y="0"/>
-          <a:chExt cx="0" cy="0"/>
-        </a:xfrm>
-      </p:grpSpPr>
-      <p:sp>
-        <p:nvSpPr>
-          <p:cNvPr id="2" name="Slide Image Placeholder 1"/>
-          <p:cNvSpPr>
-            <a:spLocks noGrp="1" noRot="1" noChangeAspect="1"/>
-          </p:cNvSpPr>
-          <p:nvPr>
-            <p:ph type="sldImg"/>
-          </p:nvPr>
-        </p:nvSpPr>
-        <p:spPr/>
-      </p:sp>
-      <p:sp>
-        <p:nvSpPr>
-          <p:cNvPr id="3" name="Notes Placeholder 2"/>
-          <p:cNvSpPr>
-            <a:spLocks noGrp="1"/>
-          </p:cNvSpPr>
-          <p:nvPr>
-            <p:ph type="body" idx="1"/>
-          </p:nvPr>
-        </p:nvSpPr>
-        <p:spPr/>
-        <p:txBody>
-          <a:bodyPr/>
-          <a:lstStyle/>
-          <a:p>
-            <a:r>
-              <a:rPr lang="en-US" dirty="0"/>
-              <a:t/>
-            </a:r>
-            <a:endParaRPr lang="en-US" dirty="0"/>
-          </a:p>
-        </p:txBody>
-      </p:sp>
-      <p:sp>
-        <p:nvSpPr>
-          <p:cNvPr id="4" name="Slide Number Placeholder 3"/>
-          <p:cNvSpPr>
-            <a:spLocks noGrp="1"/>
-          </p:cNvSpPr>
-          <p:nvPr>
-            <p:ph type="sldNum" sz="quarter" idx="10"/>
-          </p:nvPr>
-        </p:nvSpPr>
-        <p:spPr/>
-        <p:txBody>
-          <a:bodyPr/>
-          <a:lstStyle/>
-          <a:p>
-            <a:fld id="{F7021451-1387-4CA6-816F-3879F97B5CBC}" type="slidenum">
-              <a:rPr lang="en-US"/>
-              <a:t>4</a:t>
             </a:fld>
             <a:endParaRPr lang="en-US"/>
           </a:p>
@@ -2163,7 +2076,7 @@
                 <a:ea typeface="Noto Sans" pitchFamily="34" charset="-122"/>
                 <a:cs typeface="Noto Sans" pitchFamily="34" charset="-120"/>
               </a:rPr>
-              <a:t>PHẦN 2 — ĐỊNH HƯỚNG CONCEPT SẢN PHẨM</a:t>
+              <a:t>PHẦN 3 — ĐỊNH HƯỚNG CONCEPT SẢN PHẨM</a:t>
             </a:r>
             <a:endParaRPr lang="en-US" sz="1100" dirty="0"/>
           </a:p>
@@ -2672,7 +2585,7 @@
                 <a:ea typeface="Noto Sans" pitchFamily="34" charset="-122"/>
                 <a:cs typeface="Noto Sans" pitchFamily="34" charset="-120"/>
               </a:rPr>
-              <a:t>9 / 11</a:t>
+              <a:t>10 / 12</a:t>
             </a:r>
             <a:endParaRPr lang="en-US" sz="850" dirty="0"/>
           </a:p>
@@ -2743,7 +2656,7 @@
                 <a:ea typeface="Noto Sans" pitchFamily="34" charset="-122"/>
                 <a:cs typeface="Noto Sans" pitchFamily="34" charset="-120"/>
               </a:rPr>
-              <a:t>PHẦN 3 — KẾ HOẠCH TRIỂN KHAI</a:t>
+              <a:t>PHẦN 4 — KẾ HOẠCH TRIỂN KHAI</a:t>
             </a:r>
             <a:endParaRPr lang="en-US" sz="1100" dirty="0"/>
           </a:p>
@@ -4062,7 +3975,7 @@
                 <a:ea typeface="Noto Sans" pitchFamily="34" charset="-122"/>
                 <a:cs typeface="Noto Sans" pitchFamily="34" charset="-120"/>
               </a:rPr>
-              <a:t>10 / 11</a:t>
+              <a:t>11 / 12</a:t>
             </a:r>
             <a:endParaRPr lang="en-US" sz="850" dirty="0"/>
           </a:p>
@@ -4133,7 +4046,7 @@
                 <a:ea typeface="Noto Sans" pitchFamily="34" charset="-122"/>
                 <a:cs typeface="Noto Sans" pitchFamily="34" charset="-120"/>
               </a:rPr>
-              <a:t>PHẦN 4 — SƠ ĐỒ PHÂN CHIA TRÁCH NHIỆM</a:t>
+              <a:t>PHẦN 5 — SƠ ĐỒ PHÂN CHIA TRÁCH NHIỆM</a:t>
             </a:r>
             <a:endParaRPr lang="en-US" sz="1100" dirty="0"/>
           </a:p>
@@ -6745,7 +6658,3333 @@
                 <a:ea typeface="Noto Sans" pitchFamily="34" charset="-122"/>
                 <a:cs typeface="Noto Sans" pitchFamily="34" charset="-120"/>
               </a:rPr>
-              <a:t>11 / 11</a:t>
+              <a:t>12 / 12</a:t>
+            </a:r>
+            <a:endParaRPr lang="en-US" sz="850" dirty="0"/>
+          </a:p>
+        </p:txBody>
+      </p:sp>
+    </p:spTree>
+  </p:cSld>
+  <p:clrMapOvr>
+    <a:masterClrMapping/>
+  </p:clrMapOvr>
+</p:sld>
+</file>
+
+<file path=ppt/slides/slide13.xml><?xml version="1.0" encoding="utf-8"?>
+<p:sld xmlns:a="http://schemas.openxmlformats.org/drawingml/2006/main" xmlns:r="http://schemas.openxmlformats.org/officeDocument/2006/relationships" xmlns:p="http://schemas.openxmlformats.org/presentationml/2006/main">
+  <p:cSld name="Slide 13">
+    <p:bg>
+      <p:bgPr>
+        <a:solidFill>
+          <a:srgbClr val="FFFFFF"/>
+        </a:solidFill>
+      </p:bgPr>
+    </p:bg>
+    <p:spTree>
+      <p:nvGrpSpPr>
+        <p:cNvPr id="1" name=""/>
+        <p:cNvGrpSpPr/>
+        <p:nvPr/>
+      </p:nvGrpSpPr>
+      <p:grpSpPr>
+        <a:xfrm>
+          <a:off x="0" y="0"/>
+          <a:ext cx="0" cy="0"/>
+          <a:chOff x="0" y="0"/>
+          <a:chExt cx="0" cy="0"/>
+        </a:xfrm>
+      </p:grpSpPr>
+      <p:sp>
+        <p:nvSpPr>
+          <p:cNvPr id="2" name="Text 0"/>
+          <p:cNvSpPr/>
+          <p:nvPr/>
+        </p:nvSpPr>
+        <p:spPr>
+          <a:xfrm>
+            <a:off x="502920" y="292608"/>
+            <a:ext cx="11183112" cy="274320"/>
+          </a:xfrm>
+          <a:prstGeom prst="rect">
+            <a:avLst/>
+          </a:prstGeom>
+          <a:noFill/>
+          <a:ln/>
+        </p:spPr>
+        <p:txBody>
+          <a:bodyPr wrap="square" rtlCol="0" anchor="ctr"/>
+          <a:lstStyle/>
+          <a:p>
+            <a:pPr indent="0" marL="0">
+              <a:buNone/>
+            </a:pPr>
+            <a:r>
+              <a:rPr lang="en-US" sz="1100" b="1" spc="120" kern="0" dirty="0">
+                <a:solidFill>
+                  <a:srgbClr val="3B81B1"/>
+                </a:solidFill>
+                <a:latin typeface="Noto Sans" pitchFamily="34" charset="0"/>
+                <a:ea typeface="Noto Sans" pitchFamily="34" charset="-122"/>
+                <a:cs typeface="Noto Sans" pitchFamily="34" charset="-120"/>
+              </a:rPr>
+              <a:t>PHẦN 2 — CHÂN DUNG KHÁCH HÀNG MỤC TIÊU</a:t>
+            </a:r>
+            <a:endParaRPr lang="en-US" sz="1100" dirty="0"/>
+          </a:p>
+        </p:txBody>
+      </p:sp>
+      <p:sp>
+        <p:nvSpPr>
+          <p:cNvPr id="3" name="Text 1"/>
+          <p:cNvSpPr/>
+          <p:nvPr/>
+        </p:nvSpPr>
+        <p:spPr>
+          <a:xfrm>
+            <a:off x="502920" y="548640"/>
+            <a:ext cx="10085832" cy="640080"/>
+          </a:xfrm>
+          <a:prstGeom prst="rect">
+            <a:avLst/>
+          </a:prstGeom>
+          <a:noFill/>
+          <a:ln/>
+        </p:spPr>
+        <p:txBody>
+          <a:bodyPr wrap="square" rtlCol="0" anchor="ctr"/>
+          <a:lstStyle/>
+          <a:p>
+            <a:pPr indent="0" marL="0">
+              <a:buNone/>
+            </a:pPr>
+            <a:r>
+              <a:rPr lang="en-US" sz="2600" b="1" dirty="0">
+                <a:solidFill>
+                  <a:srgbClr val="004671"/>
+                </a:solidFill>
+                <a:latin typeface="Noto Sans" pitchFamily="34" charset="0"/>
+                <a:ea typeface="Noto Sans" pitchFamily="34" charset="-122"/>
+                <a:cs typeface="Noto Sans" pitchFamily="34" charset="-120"/>
+              </a:rPr>
+              <a:t>Chân dung khách hàng mục tiêu (Tệp 1 — khách hàng cũ)</a:t>
+            </a:r>
+            <a:endParaRPr lang="en-US" sz="2600" dirty="0"/>
+          </a:p>
+        </p:txBody>
+      </p:sp>
+      <p:sp>
+        <p:nvSpPr>
+          <p:cNvPr id="4" name="Shape 2"/>
+          <p:cNvSpPr/>
+          <p:nvPr/>
+        </p:nvSpPr>
+        <p:spPr>
+          <a:xfrm>
+            <a:off x="502920" y="1170432"/>
+            <a:ext cx="777240" cy="45720"/>
+          </a:xfrm>
+          <a:prstGeom prst="rect">
+            <a:avLst/>
+          </a:prstGeom>
+          <a:solidFill>
+            <a:srgbClr val="A5BE00"/>
+          </a:solidFill>
+          <a:ln/>
+        </p:spPr>
+      </p:sp>
+      <p:pic>
+        <p:nvPicPr>
+          <p:cNvPr id="5" name="Image 0"/>
+          <p:cNvPicPr>
+            <a:picLocks noChangeAspect="1"/>
+          </p:cNvPicPr>
+          <p:nvPr/>
+        </p:nvPicPr>
+        <p:blipFill>
+          <a:blip r:embed="rId1"/>
+          <a:stretch>
+            <a:fillRect/>
+          </a:stretch>
+        </p:blipFill>
+        <p:spPr>
+          <a:xfrm>
+            <a:off x="11292840" y="365760"/>
+            <a:ext cx="502920" cy="502920"/>
+          </a:xfrm>
+          <a:prstGeom prst="rect">
+            <a:avLst/>
+          </a:prstGeom>
+        </p:spPr>
+      </p:pic>
+      <p:graphicFrame>
+        <p:nvGraphicFramePr>
+          <p:cNvPr id="12" name="Table 0"/>
+          <p:cNvGraphicFramePr>
+            <a:graphicFrameLocks noGrp="1"/>
+          </p:cNvGraphicFramePr>
+          <p:nvPr/>
+        </p:nvGraphicFramePr>
+        <p:xfrm>
+          <a:off x="502920" y="1371600"/>
+          <a:ext cx="11183112" cy="5029200"/>
+        </p:xfrm>
+        <a:graphic>
+          <a:graphicData uri="http://schemas.openxmlformats.org/drawingml/2006/table">
+            <a:tbl>
+              <a:tblPr/>
+              <a:tblGrid>
+                <a:gridCol w="2834640"/>
+                <a:gridCol w="8348472"/>
+              </a:tblGrid>
+              <a:tr h="628650">
+                <a:tc>
+                  <a:txBody>
+                    <a:bodyPr/>
+                    <a:lstStyle/>
+                    <a:p>
+                      <a:pPr indent="0" marL="0">
+                        <a:buNone/>
+                      </a:pPr>
+                      <a:r>
+                        <a:rPr lang="en-US" sz="1200" b="1" dirty="0">
+                          <a:solidFill>
+                            <a:srgbClr val="FFFFFF"/>
+                          </a:solidFill>
+                          <a:latin typeface="Noto Sans" pitchFamily="34" charset="0"/>
+                          <a:ea typeface="Noto Sans" pitchFamily="34" charset="-122"/>
+                          <a:cs typeface="Noto Sans" pitchFamily="34" charset="-120"/>
+                        </a:rPr>
+                        <a:t>Chiều</a:t>
+                      </a:r>
+                      <a:endParaRPr lang="en-US" sz="1200" dirty="0">
+                        <a:latin typeface="Noto Sans" charset="0"/>
+                        <a:ea typeface="Noto Sans" charset="0"/>
+                        <a:cs typeface="Noto Sans" charset="0"/>
+                      </a:endParaRPr>
+                    </a:p>
+                  </a:txBody>
+                  <a:tcPr marL="101600" marR="101600" marT="63500" marB="63500" anchor="t">
+                    <a:lnL w="9525" cap="flat" cmpd="sng" algn="ctr">
+                      <a:solidFill>
+                        <a:srgbClr val="DCE7EA"/>
+                      </a:solidFill>
+                      <a:prstDash val="solid"/>
+                      <a:round/>
+                      <a:headEnd type="none" w="med" len="med"/>
+                      <a:tailEnd type="none" w="med" len="med"/>
+                    </a:lnL>
+                    <a:lnR w="9525" cap="flat" cmpd="sng" algn="ctr">
+                      <a:solidFill>
+                        <a:srgbClr val="DCE7EA"/>
+                      </a:solidFill>
+                      <a:prstDash val="solid"/>
+                      <a:round/>
+                      <a:headEnd type="none" w="med" len="med"/>
+                      <a:tailEnd type="none" w="med" len="med"/>
+                    </a:lnR>
+                    <a:lnT w="9525" cap="flat" cmpd="sng" algn="ctr">
+                      <a:solidFill>
+                        <a:srgbClr val="DCE7EA"/>
+                      </a:solidFill>
+                      <a:prstDash val="solid"/>
+                      <a:round/>
+                      <a:headEnd type="none" w="med" len="med"/>
+                      <a:tailEnd type="none" w="med" len="med"/>
+                    </a:lnT>
+                    <a:lnB w="9525" cap="flat" cmpd="sng" algn="ctr">
+                      <a:solidFill>
+                        <a:srgbClr val="DCE7EA"/>
+                      </a:solidFill>
+                      <a:prstDash val="solid"/>
+                      <a:round/>
+                      <a:headEnd type="none" w="med" len="med"/>
+                      <a:tailEnd type="none" w="med" len="med"/>
+                    </a:lnB>
+                    <a:solidFill>
+                      <a:srgbClr val="004671"/>
+                    </a:solidFill>
+                  </a:tcPr>
+                </a:tc>
+                <a:tc>
+                  <a:txBody>
+                    <a:bodyPr/>
+                    <a:lstStyle/>
+                    <a:p>
+                      <a:pPr indent="0" marL="0">
+                        <a:buNone/>
+                      </a:pPr>
+                      <a:r>
+                        <a:rPr lang="en-US" sz="1200" b="1" dirty="0">
+                          <a:solidFill>
+                            <a:srgbClr val="FFFFFF"/>
+                          </a:solidFill>
+                          <a:latin typeface="Noto Sans" pitchFamily="34" charset="0"/>
+                          <a:ea typeface="Noto Sans" pitchFamily="34" charset="-122"/>
+                          <a:cs typeface="Noto Sans" pitchFamily="34" charset="-120"/>
+                        </a:rPr>
+                        <a:t>Nội dung</a:t>
+                      </a:r>
+                      <a:endParaRPr lang="en-US" sz="1200" dirty="0">
+                        <a:latin typeface="Noto Sans" charset="0"/>
+                        <a:ea typeface="Noto Sans" charset="0"/>
+                        <a:cs typeface="Noto Sans" charset="0"/>
+                      </a:endParaRPr>
+                    </a:p>
+                  </a:txBody>
+                  <a:tcPr marL="101600" marR="101600" marT="63500" marB="63500" anchor="t">
+                    <a:lnL w="9525" cap="flat" cmpd="sng" algn="ctr">
+                      <a:solidFill>
+                        <a:srgbClr val="DCE7EA"/>
+                      </a:solidFill>
+                      <a:prstDash val="solid"/>
+                      <a:round/>
+                      <a:headEnd type="none" w="med" len="med"/>
+                      <a:tailEnd type="none" w="med" len="med"/>
+                    </a:lnL>
+                    <a:lnR w="9525" cap="flat" cmpd="sng" algn="ctr">
+                      <a:solidFill>
+                        <a:srgbClr val="DCE7EA"/>
+                      </a:solidFill>
+                      <a:prstDash val="solid"/>
+                      <a:round/>
+                      <a:headEnd type="none" w="med" len="med"/>
+                      <a:tailEnd type="none" w="med" len="med"/>
+                    </a:lnR>
+                    <a:lnT w="9525" cap="flat" cmpd="sng" algn="ctr">
+                      <a:solidFill>
+                        <a:srgbClr val="DCE7EA"/>
+                      </a:solidFill>
+                      <a:prstDash val="solid"/>
+                      <a:round/>
+                      <a:headEnd type="none" w="med" len="med"/>
+                      <a:tailEnd type="none" w="med" len="med"/>
+                    </a:lnT>
+                    <a:lnB w="9525" cap="flat" cmpd="sng" algn="ctr">
+                      <a:solidFill>
+                        <a:srgbClr val="DCE7EA"/>
+                      </a:solidFill>
+                      <a:prstDash val="solid"/>
+                      <a:round/>
+                      <a:headEnd type="none" w="med" len="med"/>
+                      <a:tailEnd type="none" w="med" len="med"/>
+                    </a:lnB>
+                    <a:solidFill>
+                      <a:srgbClr val="004671"/>
+                    </a:solidFill>
+                  </a:tcPr>
+                </a:tc>
+              </a:tr>
+              <a:tr h="628650">
+                <a:tc>
+                  <a:txBody>
+                    <a:bodyPr/>
+                    <a:lstStyle/>
+                    <a:p>
+                      <a:pPr indent="0" marL="0">
+                        <a:buNone/>
+                      </a:pPr>
+                      <a:r>
+                        <a:rPr lang="en-US" sz="1200" b="1" dirty="0">
+                          <a:solidFill>
+                            <a:srgbClr val="004671"/>
+                          </a:solidFill>
+                          <a:latin typeface="Noto Sans" pitchFamily="34" charset="0"/>
+                          <a:ea typeface="Noto Sans" pitchFamily="34" charset="-122"/>
+                          <a:cs typeface="Noto Sans" pitchFamily="34" charset="-120"/>
+                        </a:rPr>
+                        <a:t>Ai ra quyết định</a:t>
+                      </a:r>
+                      <a:endParaRPr lang="en-US" sz="1200" dirty="0">
+                        <a:latin typeface="Noto Sans" charset="0"/>
+                        <a:ea typeface="Noto Sans" charset="0"/>
+                        <a:cs typeface="Noto Sans" charset="0"/>
+                      </a:endParaRPr>
+                    </a:p>
+                  </a:txBody>
+                  <a:tcPr marL="101600" marR="101600" marT="63500" marB="63500" anchor="t">
+                    <a:lnL w="9525" cap="flat" cmpd="sng" algn="ctr">
+                      <a:solidFill>
+                        <a:srgbClr val="DCE7EA"/>
+                      </a:solidFill>
+                      <a:prstDash val="solid"/>
+                      <a:round/>
+                      <a:headEnd type="none" w="med" len="med"/>
+                      <a:tailEnd type="none" w="med" len="med"/>
+                    </a:lnL>
+                    <a:lnR w="9525" cap="flat" cmpd="sng" algn="ctr">
+                      <a:solidFill>
+                        <a:srgbClr val="DCE7EA"/>
+                      </a:solidFill>
+                      <a:prstDash val="solid"/>
+                      <a:round/>
+                      <a:headEnd type="none" w="med" len="med"/>
+                      <a:tailEnd type="none" w="med" len="med"/>
+                    </a:lnR>
+                    <a:lnT w="9525" cap="flat" cmpd="sng" algn="ctr">
+                      <a:solidFill>
+                        <a:srgbClr val="DCE7EA"/>
+                      </a:solidFill>
+                      <a:prstDash val="solid"/>
+                      <a:round/>
+                      <a:headEnd type="none" w="med" len="med"/>
+                      <a:tailEnd type="none" w="med" len="med"/>
+                    </a:lnT>
+                    <a:lnB w="9525" cap="flat" cmpd="sng" algn="ctr">
+                      <a:solidFill>
+                        <a:srgbClr val="DCE7EA"/>
+                      </a:solidFill>
+                      <a:prstDash val="solid"/>
+                      <a:round/>
+                      <a:headEnd type="none" w="med" len="med"/>
+                      <a:tailEnd type="none" w="med" len="med"/>
+                    </a:lnB>
+                    <a:solidFill>
+                      <a:srgbClr val="FFFFFF"/>
+                    </a:solidFill>
+                  </a:tcPr>
+                </a:tc>
+                <a:tc>
+                  <a:txBody>
+                    <a:bodyPr/>
+                    <a:lstStyle/>
+                    <a:p>
+                      <a:pPr indent="0" marL="0">
+                        <a:buNone/>
+                      </a:pPr>
+                      <a:r>
+                        <a:rPr lang="en-US" sz="1200" dirty="0">
+                          <a:solidFill>
+                            <a:srgbClr val="22333F"/>
+                          </a:solidFill>
+                          <a:latin typeface="Noto Sans" pitchFamily="34" charset="0"/>
+                          <a:ea typeface="Noto Sans" pitchFamily="34" charset="-122"/>
+                          <a:cs typeface="Noto Sans" pitchFamily="34" charset="-120"/>
+                        </a:rPr>
+                        <a:t>Mẹ, 30–45 tuổi, có con lớp 1–6</a:t>
+                      </a:r>
+                      <a:endParaRPr lang="en-US" sz="1200" dirty="0">
+                        <a:latin typeface="Noto Sans" charset="0"/>
+                        <a:ea typeface="Noto Sans" charset="0"/>
+                        <a:cs typeface="Noto Sans" charset="0"/>
+                      </a:endParaRPr>
+                    </a:p>
+                  </a:txBody>
+                  <a:tcPr marL="101600" marR="101600" marT="63500" marB="63500" anchor="t">
+                    <a:lnL w="9525" cap="flat" cmpd="sng" algn="ctr">
+                      <a:solidFill>
+                        <a:srgbClr val="DCE7EA"/>
+                      </a:solidFill>
+                      <a:prstDash val="solid"/>
+                      <a:round/>
+                      <a:headEnd type="none" w="med" len="med"/>
+                      <a:tailEnd type="none" w="med" len="med"/>
+                    </a:lnL>
+                    <a:lnR w="9525" cap="flat" cmpd="sng" algn="ctr">
+                      <a:solidFill>
+                        <a:srgbClr val="DCE7EA"/>
+                      </a:solidFill>
+                      <a:prstDash val="solid"/>
+                      <a:round/>
+                      <a:headEnd type="none" w="med" len="med"/>
+                      <a:tailEnd type="none" w="med" len="med"/>
+                    </a:lnR>
+                    <a:lnT w="9525" cap="flat" cmpd="sng" algn="ctr">
+                      <a:solidFill>
+                        <a:srgbClr val="DCE7EA"/>
+                      </a:solidFill>
+                      <a:prstDash val="solid"/>
+                      <a:round/>
+                      <a:headEnd type="none" w="med" len="med"/>
+                      <a:tailEnd type="none" w="med" len="med"/>
+                    </a:lnT>
+                    <a:lnB w="9525" cap="flat" cmpd="sng" algn="ctr">
+                      <a:solidFill>
+                        <a:srgbClr val="DCE7EA"/>
+                      </a:solidFill>
+                      <a:prstDash val="solid"/>
+                      <a:round/>
+                      <a:headEnd type="none" w="med" len="med"/>
+                      <a:tailEnd type="none" w="med" len="med"/>
+                    </a:lnB>
+                    <a:solidFill>
+                      <a:srgbClr val="FFFFFF"/>
+                    </a:solidFill>
+                  </a:tcPr>
+                </a:tc>
+              </a:tr>
+              <a:tr h="628650">
+                <a:tc>
+                  <a:txBody>
+                    <a:bodyPr/>
+                    <a:lstStyle/>
+                    <a:p>
+                      <a:pPr indent="0" marL="0">
+                        <a:buNone/>
+                      </a:pPr>
+                      <a:r>
+                        <a:rPr lang="en-US" sz="1200" b="1" dirty="0">
+                          <a:solidFill>
+                            <a:srgbClr val="004671"/>
+                          </a:solidFill>
+                          <a:latin typeface="Noto Sans" pitchFamily="34" charset="0"/>
+                          <a:ea typeface="Noto Sans" pitchFamily="34" charset="-122"/>
+                          <a:cs typeface="Noto Sans" pitchFamily="34" charset="-120"/>
+                        </a:rPr>
+                        <a:t>Vị trí</a:t>
+                      </a:r>
+                      <a:endParaRPr lang="en-US" sz="1200" dirty="0">
+                        <a:latin typeface="Noto Sans" charset="0"/>
+                        <a:ea typeface="Noto Sans" charset="0"/>
+                        <a:cs typeface="Noto Sans" charset="0"/>
+                      </a:endParaRPr>
+                    </a:p>
+                  </a:txBody>
+                  <a:tcPr marL="101600" marR="101600" marT="63500" marB="63500" anchor="t">
+                    <a:lnL w="9525" cap="flat" cmpd="sng" algn="ctr">
+                      <a:solidFill>
+                        <a:srgbClr val="DCE7EA"/>
+                      </a:solidFill>
+                      <a:prstDash val="solid"/>
+                      <a:round/>
+                      <a:headEnd type="none" w="med" len="med"/>
+                      <a:tailEnd type="none" w="med" len="med"/>
+                    </a:lnL>
+                    <a:lnR w="9525" cap="flat" cmpd="sng" algn="ctr">
+                      <a:solidFill>
+                        <a:srgbClr val="DCE7EA"/>
+                      </a:solidFill>
+                      <a:prstDash val="solid"/>
+                      <a:round/>
+                      <a:headEnd type="none" w="med" len="med"/>
+                      <a:tailEnd type="none" w="med" len="med"/>
+                    </a:lnR>
+                    <a:lnT w="9525" cap="flat" cmpd="sng" algn="ctr">
+                      <a:solidFill>
+                        <a:srgbClr val="DCE7EA"/>
+                      </a:solidFill>
+                      <a:prstDash val="solid"/>
+                      <a:round/>
+                      <a:headEnd type="none" w="med" len="med"/>
+                      <a:tailEnd type="none" w="med" len="med"/>
+                    </a:lnT>
+                    <a:lnB w="9525" cap="flat" cmpd="sng" algn="ctr">
+                      <a:solidFill>
+                        <a:srgbClr val="DCE7EA"/>
+                      </a:solidFill>
+                      <a:prstDash val="solid"/>
+                      <a:round/>
+                      <a:headEnd type="none" w="med" len="med"/>
+                      <a:tailEnd type="none" w="med" len="med"/>
+                    </a:lnB>
+                    <a:solidFill>
+                      <a:srgbClr val="F2FAFB"/>
+                    </a:solidFill>
+                  </a:tcPr>
+                </a:tc>
+                <a:tc>
+                  <a:txBody>
+                    <a:bodyPr/>
+                    <a:lstStyle/>
+                    <a:p>
+                      <a:pPr indent="0" marL="0">
+                        <a:buNone/>
+                      </a:pPr>
+                      <a:r>
+                        <a:rPr lang="en-US" sz="1200" dirty="0">
+                          <a:solidFill>
+                            <a:srgbClr val="22333F"/>
+                          </a:solidFill>
+                          <a:latin typeface="Noto Sans" pitchFamily="34" charset="0"/>
+                          <a:ea typeface="Noto Sans" pitchFamily="34" charset="-122"/>
+                          <a:cs typeface="Noto Sans" pitchFamily="34" charset="-120"/>
+                        </a:rPr>
+                        <a:t>Thành phố tỉnh, thị xã, nông thôn (rộng hơn phạm vi Tier 3/4 mà chiến lược 390k đang nhắm cho khách hàng mới)</a:t>
+                      </a:r>
+                      <a:endParaRPr lang="en-US" sz="1200" dirty="0">
+                        <a:latin typeface="Noto Sans" charset="0"/>
+                        <a:ea typeface="Noto Sans" charset="0"/>
+                        <a:cs typeface="Noto Sans" charset="0"/>
+                      </a:endParaRPr>
+                    </a:p>
+                  </a:txBody>
+                  <a:tcPr marL="101600" marR="101600" marT="63500" marB="63500" anchor="t">
+                    <a:lnL w="9525" cap="flat" cmpd="sng" algn="ctr">
+                      <a:solidFill>
+                        <a:srgbClr val="DCE7EA"/>
+                      </a:solidFill>
+                      <a:prstDash val="solid"/>
+                      <a:round/>
+                      <a:headEnd type="none" w="med" len="med"/>
+                      <a:tailEnd type="none" w="med" len="med"/>
+                    </a:lnL>
+                    <a:lnR w="9525" cap="flat" cmpd="sng" algn="ctr">
+                      <a:solidFill>
+                        <a:srgbClr val="DCE7EA"/>
+                      </a:solidFill>
+                      <a:prstDash val="solid"/>
+                      <a:round/>
+                      <a:headEnd type="none" w="med" len="med"/>
+                      <a:tailEnd type="none" w="med" len="med"/>
+                    </a:lnR>
+                    <a:lnT w="9525" cap="flat" cmpd="sng" algn="ctr">
+                      <a:solidFill>
+                        <a:srgbClr val="DCE7EA"/>
+                      </a:solidFill>
+                      <a:prstDash val="solid"/>
+                      <a:round/>
+                      <a:headEnd type="none" w="med" len="med"/>
+                      <a:tailEnd type="none" w="med" len="med"/>
+                    </a:lnT>
+                    <a:lnB w="9525" cap="flat" cmpd="sng" algn="ctr">
+                      <a:solidFill>
+                        <a:srgbClr val="DCE7EA"/>
+                      </a:solidFill>
+                      <a:prstDash val="solid"/>
+                      <a:round/>
+                      <a:headEnd type="none" w="med" len="med"/>
+                      <a:tailEnd type="none" w="med" len="med"/>
+                    </a:lnB>
+                    <a:solidFill>
+                      <a:srgbClr val="F2FAFB"/>
+                    </a:solidFill>
+                  </a:tcPr>
+                </a:tc>
+              </a:tr>
+              <a:tr h="628650">
+                <a:tc>
+                  <a:txBody>
+                    <a:bodyPr/>
+                    <a:lstStyle/>
+                    <a:p>
+                      <a:pPr indent="0" marL="0">
+                        <a:buNone/>
+                      </a:pPr>
+                      <a:r>
+                        <a:rPr lang="en-US" sz="1200" b="1" dirty="0">
+                          <a:solidFill>
+                            <a:srgbClr val="004671"/>
+                          </a:solidFill>
+                          <a:latin typeface="Noto Sans" pitchFamily="34" charset="0"/>
+                          <a:ea typeface="Noto Sans" pitchFamily="34" charset="-122"/>
+                          <a:cs typeface="Noto Sans" pitchFamily="34" charset="-120"/>
+                        </a:rPr>
+                        <a:t>Nghề nghiệp</a:t>
+                      </a:r>
+                      <a:endParaRPr lang="en-US" sz="1200" dirty="0">
+                        <a:latin typeface="Noto Sans" charset="0"/>
+                        <a:ea typeface="Noto Sans" charset="0"/>
+                        <a:cs typeface="Noto Sans" charset="0"/>
+                      </a:endParaRPr>
+                    </a:p>
+                  </a:txBody>
+                  <a:tcPr marL="101600" marR="101600" marT="63500" marB="63500" anchor="t">
+                    <a:lnL w="9525" cap="flat" cmpd="sng" algn="ctr">
+                      <a:solidFill>
+                        <a:srgbClr val="DCE7EA"/>
+                      </a:solidFill>
+                      <a:prstDash val="solid"/>
+                      <a:round/>
+                      <a:headEnd type="none" w="med" len="med"/>
+                      <a:tailEnd type="none" w="med" len="med"/>
+                    </a:lnL>
+                    <a:lnR w="9525" cap="flat" cmpd="sng" algn="ctr">
+                      <a:solidFill>
+                        <a:srgbClr val="DCE7EA"/>
+                      </a:solidFill>
+                      <a:prstDash val="solid"/>
+                      <a:round/>
+                      <a:headEnd type="none" w="med" len="med"/>
+                      <a:tailEnd type="none" w="med" len="med"/>
+                    </a:lnR>
+                    <a:lnT w="9525" cap="flat" cmpd="sng" algn="ctr">
+                      <a:solidFill>
+                        <a:srgbClr val="DCE7EA"/>
+                      </a:solidFill>
+                      <a:prstDash val="solid"/>
+                      <a:round/>
+                      <a:headEnd type="none" w="med" len="med"/>
+                      <a:tailEnd type="none" w="med" len="med"/>
+                    </a:lnT>
+                    <a:lnB w="9525" cap="flat" cmpd="sng" algn="ctr">
+                      <a:solidFill>
+                        <a:srgbClr val="DCE7EA"/>
+                      </a:solidFill>
+                      <a:prstDash val="solid"/>
+                      <a:round/>
+                      <a:headEnd type="none" w="med" len="med"/>
+                      <a:tailEnd type="none" w="med" len="med"/>
+                    </a:lnB>
+                    <a:solidFill>
+                      <a:srgbClr val="FFFFFF"/>
+                    </a:solidFill>
+                  </a:tcPr>
+                </a:tc>
+                <a:tc>
+                  <a:txBody>
+                    <a:bodyPr/>
+                    <a:lstStyle/>
+                    <a:p>
+                      <a:pPr indent="0" marL="0">
+                        <a:buNone/>
+                      </a:pPr>
+                      <a:r>
+                        <a:rPr lang="en-US" sz="1200" dirty="0">
+                          <a:solidFill>
+                            <a:srgbClr val="22333F"/>
+                          </a:solidFill>
+                          <a:latin typeface="Noto Sans" pitchFamily="34" charset="0"/>
+                          <a:ea typeface="Noto Sans" pitchFamily="34" charset="-122"/>
+                          <a:cs typeface="Noto Sans" pitchFamily="34" charset="-120"/>
+                        </a:rPr>
+                        <a:t>Nhân viên văn phòng, kinh doanh nhỏ, lao động phổ thông — làm toàn thời gian (&gt;8h/ngày)</a:t>
+                      </a:r>
+                      <a:endParaRPr lang="en-US" sz="1200" dirty="0">
+                        <a:latin typeface="Noto Sans" charset="0"/>
+                        <a:ea typeface="Noto Sans" charset="0"/>
+                        <a:cs typeface="Noto Sans" charset="0"/>
+                      </a:endParaRPr>
+                    </a:p>
+                  </a:txBody>
+                  <a:tcPr marL="101600" marR="101600" marT="63500" marB="63500" anchor="t">
+                    <a:lnL w="9525" cap="flat" cmpd="sng" algn="ctr">
+                      <a:solidFill>
+                        <a:srgbClr val="DCE7EA"/>
+                      </a:solidFill>
+                      <a:prstDash val="solid"/>
+                      <a:round/>
+                      <a:headEnd type="none" w="med" len="med"/>
+                      <a:tailEnd type="none" w="med" len="med"/>
+                    </a:lnL>
+                    <a:lnR w="9525" cap="flat" cmpd="sng" algn="ctr">
+                      <a:solidFill>
+                        <a:srgbClr val="DCE7EA"/>
+                      </a:solidFill>
+                      <a:prstDash val="solid"/>
+                      <a:round/>
+                      <a:headEnd type="none" w="med" len="med"/>
+                      <a:tailEnd type="none" w="med" len="med"/>
+                    </a:lnR>
+                    <a:lnT w="9525" cap="flat" cmpd="sng" algn="ctr">
+                      <a:solidFill>
+                        <a:srgbClr val="DCE7EA"/>
+                      </a:solidFill>
+                      <a:prstDash val="solid"/>
+                      <a:round/>
+                      <a:headEnd type="none" w="med" len="med"/>
+                      <a:tailEnd type="none" w="med" len="med"/>
+                    </a:lnT>
+                    <a:lnB w="9525" cap="flat" cmpd="sng" algn="ctr">
+                      <a:solidFill>
+                        <a:srgbClr val="DCE7EA"/>
+                      </a:solidFill>
+                      <a:prstDash val="solid"/>
+                      <a:round/>
+                      <a:headEnd type="none" w="med" len="med"/>
+                      <a:tailEnd type="none" w="med" len="med"/>
+                    </a:lnB>
+                    <a:solidFill>
+                      <a:srgbClr val="FFFFFF"/>
+                    </a:solidFill>
+                  </a:tcPr>
+                </a:tc>
+              </a:tr>
+              <a:tr h="628650">
+                <a:tc>
+                  <a:txBody>
+                    <a:bodyPr/>
+                    <a:lstStyle/>
+                    <a:p>
+                      <a:pPr indent="0" marL="0">
+                        <a:buNone/>
+                      </a:pPr>
+                      <a:r>
+                        <a:rPr lang="en-US" sz="1200" b="1" dirty="0">
+                          <a:solidFill>
+                            <a:srgbClr val="004671"/>
+                          </a:solidFill>
+                          <a:latin typeface="Noto Sans" pitchFamily="34" charset="0"/>
+                          <a:ea typeface="Noto Sans" pitchFamily="34" charset="-122"/>
+                          <a:cs typeface="Noto Sans" pitchFamily="34" charset="-120"/>
+                        </a:rPr>
+                        <a:t>Thu nhập hộ gia đình</a:t>
+                      </a:r>
+                      <a:endParaRPr lang="en-US" sz="1200" dirty="0">
+                        <a:latin typeface="Noto Sans" charset="0"/>
+                        <a:ea typeface="Noto Sans" charset="0"/>
+                        <a:cs typeface="Noto Sans" charset="0"/>
+                      </a:endParaRPr>
+                    </a:p>
+                  </a:txBody>
+                  <a:tcPr marL="101600" marR="101600" marT="63500" marB="63500" anchor="t">
+                    <a:lnL w="9525" cap="flat" cmpd="sng" algn="ctr">
+                      <a:solidFill>
+                        <a:srgbClr val="DCE7EA"/>
+                      </a:solidFill>
+                      <a:prstDash val="solid"/>
+                      <a:round/>
+                      <a:headEnd type="none" w="med" len="med"/>
+                      <a:tailEnd type="none" w="med" len="med"/>
+                    </a:lnL>
+                    <a:lnR w="9525" cap="flat" cmpd="sng" algn="ctr">
+                      <a:solidFill>
+                        <a:srgbClr val="DCE7EA"/>
+                      </a:solidFill>
+                      <a:prstDash val="solid"/>
+                      <a:round/>
+                      <a:headEnd type="none" w="med" len="med"/>
+                      <a:tailEnd type="none" w="med" len="med"/>
+                    </a:lnR>
+                    <a:lnT w="9525" cap="flat" cmpd="sng" algn="ctr">
+                      <a:solidFill>
+                        <a:srgbClr val="DCE7EA"/>
+                      </a:solidFill>
+                      <a:prstDash val="solid"/>
+                      <a:round/>
+                      <a:headEnd type="none" w="med" len="med"/>
+                      <a:tailEnd type="none" w="med" len="med"/>
+                    </a:lnT>
+                    <a:lnB w="9525" cap="flat" cmpd="sng" algn="ctr">
+                      <a:solidFill>
+                        <a:srgbClr val="DCE7EA"/>
+                      </a:solidFill>
+                      <a:prstDash val="solid"/>
+                      <a:round/>
+                      <a:headEnd type="none" w="med" len="med"/>
+                      <a:tailEnd type="none" w="med" len="med"/>
+                    </a:lnB>
+                    <a:solidFill>
+                      <a:srgbClr val="F2FAFB"/>
+                    </a:solidFill>
+                  </a:tcPr>
+                </a:tc>
+                <a:tc>
+                  <a:txBody>
+                    <a:bodyPr/>
+                    <a:lstStyle/>
+                    <a:p>
+                      <a:pPr indent="0" marL="0">
+                        <a:buNone/>
+                      </a:pPr>
+                      <a:r>
+                        <a:rPr lang="en-US" sz="1200" dirty="0">
+                          <a:solidFill>
+                            <a:srgbClr val="22333F"/>
+                          </a:solidFill>
+                          <a:latin typeface="Noto Sans" pitchFamily="34" charset="0"/>
+                          <a:ea typeface="Noto Sans" pitchFamily="34" charset="-122"/>
+                          <a:cs typeface="Noto Sans" pitchFamily="34" charset="-120"/>
+                        </a:rPr>
+                        <a:t>10–20 triệu/tháng (phân khúc “Good”) — hiện chi trả được 200–250k/tháng</a:t>
+                      </a:r>
+                      <a:endParaRPr lang="en-US" sz="1200" dirty="0">
+                        <a:latin typeface="Noto Sans" charset="0"/>
+                        <a:ea typeface="Noto Sans" charset="0"/>
+                        <a:cs typeface="Noto Sans" charset="0"/>
+                      </a:endParaRPr>
+                    </a:p>
+                  </a:txBody>
+                  <a:tcPr marL="101600" marR="101600" marT="63500" marB="63500" anchor="t">
+                    <a:lnL w="9525" cap="flat" cmpd="sng" algn="ctr">
+                      <a:solidFill>
+                        <a:srgbClr val="DCE7EA"/>
+                      </a:solidFill>
+                      <a:prstDash val="solid"/>
+                      <a:round/>
+                      <a:headEnd type="none" w="med" len="med"/>
+                      <a:tailEnd type="none" w="med" len="med"/>
+                    </a:lnL>
+                    <a:lnR w="9525" cap="flat" cmpd="sng" algn="ctr">
+                      <a:solidFill>
+                        <a:srgbClr val="DCE7EA"/>
+                      </a:solidFill>
+                      <a:prstDash val="solid"/>
+                      <a:round/>
+                      <a:headEnd type="none" w="med" len="med"/>
+                      <a:tailEnd type="none" w="med" len="med"/>
+                    </a:lnR>
+                    <a:lnT w="9525" cap="flat" cmpd="sng" algn="ctr">
+                      <a:solidFill>
+                        <a:srgbClr val="DCE7EA"/>
+                      </a:solidFill>
+                      <a:prstDash val="solid"/>
+                      <a:round/>
+                      <a:headEnd type="none" w="med" len="med"/>
+                      <a:tailEnd type="none" w="med" len="med"/>
+                    </a:lnT>
+                    <a:lnB w="9525" cap="flat" cmpd="sng" algn="ctr">
+                      <a:solidFill>
+                        <a:srgbClr val="DCE7EA"/>
+                      </a:solidFill>
+                      <a:prstDash val="solid"/>
+                      <a:round/>
+                      <a:headEnd type="none" w="med" len="med"/>
+                      <a:tailEnd type="none" w="med" len="med"/>
+                    </a:lnB>
+                    <a:solidFill>
+                      <a:srgbClr val="F2FAFB"/>
+                    </a:solidFill>
+                  </a:tcPr>
+                </a:tc>
+              </a:tr>
+              <a:tr h="628650">
+                <a:tc>
+                  <a:txBody>
+                    <a:bodyPr/>
+                    <a:lstStyle/>
+                    <a:p>
+                      <a:pPr indent="0" marL="0">
+                        <a:buNone/>
+                      </a:pPr>
+                      <a:r>
+                        <a:rPr lang="en-US" sz="1200" b="1" dirty="0">
+                          <a:solidFill>
+                            <a:srgbClr val="004671"/>
+                          </a:solidFill>
+                          <a:latin typeface="Noto Sans" pitchFamily="34" charset="0"/>
+                          <a:ea typeface="Noto Sans" pitchFamily="34" charset="-122"/>
+                          <a:cs typeface="Noto Sans" pitchFamily="34" charset="-120"/>
+                        </a:rPr>
+                        <a:t>Trình độ tiếng Anh</a:t>
+                      </a:r>
+                      <a:endParaRPr lang="en-US" sz="1200" dirty="0">
+                        <a:latin typeface="Noto Sans" charset="0"/>
+                        <a:ea typeface="Noto Sans" charset="0"/>
+                        <a:cs typeface="Noto Sans" charset="0"/>
+                      </a:endParaRPr>
+                    </a:p>
+                  </a:txBody>
+                  <a:tcPr marL="101600" marR="101600" marT="63500" marB="63500" anchor="t">
+                    <a:lnL w="9525" cap="flat" cmpd="sng" algn="ctr">
+                      <a:solidFill>
+                        <a:srgbClr val="DCE7EA"/>
+                      </a:solidFill>
+                      <a:prstDash val="solid"/>
+                      <a:round/>
+                      <a:headEnd type="none" w="med" len="med"/>
+                      <a:tailEnd type="none" w="med" len="med"/>
+                    </a:lnL>
+                    <a:lnR w="9525" cap="flat" cmpd="sng" algn="ctr">
+                      <a:solidFill>
+                        <a:srgbClr val="DCE7EA"/>
+                      </a:solidFill>
+                      <a:prstDash val="solid"/>
+                      <a:round/>
+                      <a:headEnd type="none" w="med" len="med"/>
+                      <a:tailEnd type="none" w="med" len="med"/>
+                    </a:lnR>
+                    <a:lnT w="9525" cap="flat" cmpd="sng" algn="ctr">
+                      <a:solidFill>
+                        <a:srgbClr val="DCE7EA"/>
+                      </a:solidFill>
+                      <a:prstDash val="solid"/>
+                      <a:round/>
+                      <a:headEnd type="none" w="med" len="med"/>
+                      <a:tailEnd type="none" w="med" len="med"/>
+                    </a:lnT>
+                    <a:lnB w="9525" cap="flat" cmpd="sng" algn="ctr">
+                      <a:solidFill>
+                        <a:srgbClr val="DCE7EA"/>
+                      </a:solidFill>
+                      <a:prstDash val="solid"/>
+                      <a:round/>
+                      <a:headEnd type="none" w="med" len="med"/>
+                      <a:tailEnd type="none" w="med" len="med"/>
+                    </a:lnB>
+                    <a:solidFill>
+                      <a:srgbClr val="FFFFFF"/>
+                    </a:solidFill>
+                  </a:tcPr>
+                </a:tc>
+                <a:tc>
+                  <a:txBody>
+                    <a:bodyPr/>
+                    <a:lstStyle/>
+                    <a:p>
+                      <a:pPr indent="0" marL="0">
+                        <a:buNone/>
+                      </a:pPr>
+                      <a:r>
+                        <a:rPr lang="en-US" sz="1200" dirty="0">
+                          <a:solidFill>
+                            <a:srgbClr val="22333F"/>
+                          </a:solidFill>
+                          <a:latin typeface="Noto Sans" pitchFamily="34" charset="0"/>
+                          <a:ea typeface="Noto Sans" pitchFamily="34" charset="-122"/>
+                          <a:cs typeface="Noto Sans" pitchFamily="34" charset="-120"/>
+                        </a:rPr>
+                        <a:t>Đa số không biết tiếng Anh — không tự kèm con được</a:t>
+                      </a:r>
+                      <a:endParaRPr lang="en-US" sz="1200" dirty="0">
+                        <a:latin typeface="Noto Sans" charset="0"/>
+                        <a:ea typeface="Noto Sans" charset="0"/>
+                        <a:cs typeface="Noto Sans" charset="0"/>
+                      </a:endParaRPr>
+                    </a:p>
+                  </a:txBody>
+                  <a:tcPr marL="101600" marR="101600" marT="63500" marB="63500" anchor="t">
+                    <a:lnL w="9525" cap="flat" cmpd="sng" algn="ctr">
+                      <a:solidFill>
+                        <a:srgbClr val="DCE7EA"/>
+                      </a:solidFill>
+                      <a:prstDash val="solid"/>
+                      <a:round/>
+                      <a:headEnd type="none" w="med" len="med"/>
+                      <a:tailEnd type="none" w="med" len="med"/>
+                    </a:lnL>
+                    <a:lnR w="9525" cap="flat" cmpd="sng" algn="ctr">
+                      <a:solidFill>
+                        <a:srgbClr val="DCE7EA"/>
+                      </a:solidFill>
+                      <a:prstDash val="solid"/>
+                      <a:round/>
+                      <a:headEnd type="none" w="med" len="med"/>
+                      <a:tailEnd type="none" w="med" len="med"/>
+                    </a:lnR>
+                    <a:lnT w="9525" cap="flat" cmpd="sng" algn="ctr">
+                      <a:solidFill>
+                        <a:srgbClr val="DCE7EA"/>
+                      </a:solidFill>
+                      <a:prstDash val="solid"/>
+                      <a:round/>
+                      <a:headEnd type="none" w="med" len="med"/>
+                      <a:tailEnd type="none" w="med" len="med"/>
+                    </a:lnT>
+                    <a:lnB w="9525" cap="flat" cmpd="sng" algn="ctr">
+                      <a:solidFill>
+                        <a:srgbClr val="DCE7EA"/>
+                      </a:solidFill>
+                      <a:prstDash val="solid"/>
+                      <a:round/>
+                      <a:headEnd type="none" w="med" len="med"/>
+                      <a:tailEnd type="none" w="med" len="med"/>
+                    </a:lnB>
+                    <a:solidFill>
+                      <a:srgbClr val="FFFFFF"/>
+                    </a:solidFill>
+                  </a:tcPr>
+                </a:tc>
+              </a:tr>
+              <a:tr h="628650">
+                <a:tc>
+                  <a:txBody>
+                    <a:bodyPr/>
+                    <a:lstStyle/>
+                    <a:p>
+                      <a:pPr indent="0" marL="0">
+                        <a:buNone/>
+                      </a:pPr>
+                      <a:r>
+                        <a:rPr lang="en-US" sz="1200" b="1" dirty="0">
+                          <a:solidFill>
+                            <a:srgbClr val="004671"/>
+                          </a:solidFill>
+                          <a:latin typeface="Noto Sans" pitchFamily="34" charset="0"/>
+                          <a:ea typeface="Noto Sans" pitchFamily="34" charset="-122"/>
+                          <a:cs typeface="Noto Sans" pitchFamily="34" charset="-120"/>
+                        </a:rPr>
+                        <a:t>Bối cảnh</a:t>
+                      </a:r>
+                      <a:endParaRPr lang="en-US" sz="1200" dirty="0">
+                        <a:latin typeface="Noto Sans" charset="0"/>
+                        <a:ea typeface="Noto Sans" charset="0"/>
+                        <a:cs typeface="Noto Sans" charset="0"/>
+                      </a:endParaRPr>
+                    </a:p>
+                  </a:txBody>
+                  <a:tcPr marL="101600" marR="101600" marT="63500" marB="63500" anchor="t">
+                    <a:lnL w="9525" cap="flat" cmpd="sng" algn="ctr">
+                      <a:solidFill>
+                        <a:srgbClr val="DCE7EA"/>
+                      </a:solidFill>
+                      <a:prstDash val="solid"/>
+                      <a:round/>
+                      <a:headEnd type="none" w="med" len="med"/>
+                      <a:tailEnd type="none" w="med" len="med"/>
+                    </a:lnL>
+                    <a:lnR w="9525" cap="flat" cmpd="sng" algn="ctr">
+                      <a:solidFill>
+                        <a:srgbClr val="DCE7EA"/>
+                      </a:solidFill>
+                      <a:prstDash val="solid"/>
+                      <a:round/>
+                      <a:headEnd type="none" w="med" len="med"/>
+                      <a:tailEnd type="none" w="med" len="med"/>
+                    </a:lnR>
+                    <a:lnT w="9525" cap="flat" cmpd="sng" algn="ctr">
+                      <a:solidFill>
+                        <a:srgbClr val="DCE7EA"/>
+                      </a:solidFill>
+                      <a:prstDash val="solid"/>
+                      <a:round/>
+                      <a:headEnd type="none" w="med" len="med"/>
+                      <a:tailEnd type="none" w="med" len="med"/>
+                    </a:lnT>
+                    <a:lnB w="9525" cap="flat" cmpd="sng" algn="ctr">
+                      <a:solidFill>
+                        <a:srgbClr val="DCE7EA"/>
+                      </a:solidFill>
+                      <a:prstDash val="solid"/>
+                      <a:round/>
+                      <a:headEnd type="none" w="med" len="med"/>
+                      <a:tailEnd type="none" w="med" len="med"/>
+                    </a:lnB>
+                    <a:solidFill>
+                      <a:srgbClr val="F2FAFB"/>
+                    </a:solidFill>
+                  </a:tcPr>
+                </a:tc>
+                <a:tc>
+                  <a:txBody>
+                    <a:bodyPr/>
+                    <a:lstStyle/>
+                    <a:p>
+                      <a:pPr indent="0" marL="0">
+                        <a:buNone/>
+                      </a:pPr>
+                      <a:r>
+                        <a:rPr lang="en-US" sz="1200" dirty="0">
+                          <a:solidFill>
+                            <a:srgbClr val="22333F"/>
+                          </a:solidFill>
+                          <a:latin typeface="Noto Sans" pitchFamily="34" charset="0"/>
+                          <a:ea typeface="Noto Sans" pitchFamily="34" charset="-122"/>
+                          <a:cs typeface="Noto Sans" pitchFamily="34" charset="-120"/>
+                        </a:rPr>
+                        <a:t>Con đang học TA ở trường; ~50% từng/đang học thêm nhà giáo viên; đã nghe/thử vài sản phẩm TA online; một số đã học trung tâm</a:t>
+                      </a:r>
+                      <a:endParaRPr lang="en-US" sz="1200" dirty="0">
+                        <a:latin typeface="Noto Sans" charset="0"/>
+                        <a:ea typeface="Noto Sans" charset="0"/>
+                        <a:cs typeface="Noto Sans" charset="0"/>
+                      </a:endParaRPr>
+                    </a:p>
+                  </a:txBody>
+                  <a:tcPr marL="101600" marR="101600" marT="63500" marB="63500" anchor="t">
+                    <a:lnL w="9525" cap="flat" cmpd="sng" algn="ctr">
+                      <a:solidFill>
+                        <a:srgbClr val="DCE7EA"/>
+                      </a:solidFill>
+                      <a:prstDash val="solid"/>
+                      <a:round/>
+                      <a:headEnd type="none" w="med" len="med"/>
+                      <a:tailEnd type="none" w="med" len="med"/>
+                    </a:lnL>
+                    <a:lnR w="9525" cap="flat" cmpd="sng" algn="ctr">
+                      <a:solidFill>
+                        <a:srgbClr val="DCE7EA"/>
+                      </a:solidFill>
+                      <a:prstDash val="solid"/>
+                      <a:round/>
+                      <a:headEnd type="none" w="med" len="med"/>
+                      <a:tailEnd type="none" w="med" len="med"/>
+                    </a:lnR>
+                    <a:lnT w="9525" cap="flat" cmpd="sng" algn="ctr">
+                      <a:solidFill>
+                        <a:srgbClr val="DCE7EA"/>
+                      </a:solidFill>
+                      <a:prstDash val="solid"/>
+                      <a:round/>
+                      <a:headEnd type="none" w="med" len="med"/>
+                      <a:tailEnd type="none" w="med" len="med"/>
+                    </a:lnT>
+                    <a:lnB w="9525" cap="flat" cmpd="sng" algn="ctr">
+                      <a:solidFill>
+                        <a:srgbClr val="DCE7EA"/>
+                      </a:solidFill>
+                      <a:prstDash val="solid"/>
+                      <a:round/>
+                      <a:headEnd type="none" w="med" len="med"/>
+                      <a:tailEnd type="none" w="med" len="med"/>
+                    </a:lnB>
+                    <a:solidFill>
+                      <a:srgbClr val="F2FAFB"/>
+                    </a:solidFill>
+                  </a:tcPr>
+                </a:tc>
+              </a:tr>
+            </a:tbl>
+          </a:graphicData>
+        </a:graphic>
+      </p:graphicFrame>
+      <p:pic>
+        <p:nvPicPr>
+          <p:cNvPr id="7" name="Image 1"/>
+          <p:cNvPicPr>
+            <a:picLocks noChangeAspect="1"/>
+          </p:cNvPicPr>
+          <p:nvPr/>
+        </p:nvPicPr>
+        <p:blipFill>
+          <a:blip r:embed="rId2"/>
+          <a:stretch>
+            <a:fillRect/>
+          </a:stretch>
+        </p:blipFill>
+        <p:spPr>
+          <a:xfrm>
+            <a:off x="502920" y="6473952"/>
+            <a:ext cx="237744" cy="237744"/>
+          </a:xfrm>
+          <a:prstGeom prst="rect">
+            <a:avLst/>
+          </a:prstGeom>
+        </p:spPr>
+      </p:pic>
+      <p:sp>
+        <p:nvSpPr>
+          <p:cNvPr id="8" name="Text 3"/>
+          <p:cNvSpPr/>
+          <p:nvPr/>
+        </p:nvSpPr>
+        <p:spPr>
+          <a:xfrm>
+            <a:off x="795528" y="6473952"/>
+            <a:ext cx="3657600" cy="256032"/>
+          </a:xfrm>
+          <a:prstGeom prst="rect">
+            <a:avLst/>
+          </a:prstGeom>
+          <a:noFill/>
+          <a:ln/>
+        </p:spPr>
+        <p:txBody>
+          <a:bodyPr wrap="square" rtlCol="0" anchor="ctr"/>
+          <a:lstStyle/>
+          <a:p>
+            <a:pPr indent="0" marL="0">
+              <a:buNone/>
+            </a:pPr>
+            <a:r>
+              <a:rPr lang="en-US" sz="800" spc="100" kern="0" dirty="0">
+                <a:solidFill>
+                  <a:srgbClr val="5B6472"/>
+                </a:solidFill>
+                <a:latin typeface="Noto Sans" pitchFamily="34" charset="0"/>
+                <a:ea typeface="Noto Sans" pitchFamily="34" charset="-122"/>
+                <a:cs typeface="Noto Sans" pitchFamily="34" charset="-120"/>
+              </a:rPr>
+              <a:t>EDUPIA  AI CLASS NEW</a:t>
+            </a:r>
+            <a:endParaRPr lang="en-US" sz="800" dirty="0"/>
+          </a:p>
+        </p:txBody>
+      </p:sp>
+      <p:sp>
+        <p:nvSpPr>
+          <p:cNvPr id="9" name="Text 4"/>
+          <p:cNvSpPr/>
+          <p:nvPr/>
+        </p:nvSpPr>
+        <p:spPr>
+          <a:xfrm>
+            <a:off x="10789920" y="6473952"/>
+            <a:ext cx="914400" cy="256032"/>
+          </a:xfrm>
+          <a:prstGeom prst="rect">
+            <a:avLst/>
+          </a:prstGeom>
+          <a:noFill/>
+          <a:ln/>
+        </p:spPr>
+        <p:txBody>
+          <a:bodyPr wrap="square" rtlCol="0" anchor="ctr"/>
+          <a:lstStyle/>
+          <a:p>
+            <a:pPr algn="r" indent="0" marL="0">
+              <a:buNone/>
+            </a:pPr>
+            <a:r>
+              <a:rPr lang="en-US" sz="850" dirty="0">
+                <a:solidFill>
+                  <a:srgbClr val="5B6472"/>
+                </a:solidFill>
+                <a:latin typeface="Noto Sans" pitchFamily="34" charset="0"/>
+                <a:ea typeface="Noto Sans" pitchFamily="34" charset="-122"/>
+                <a:cs typeface="Noto Sans" pitchFamily="34" charset="-120"/>
+              </a:rPr>
+              <a:t>3 / 12</a:t>
+            </a:r>
+            <a:endParaRPr lang="en-US" sz="850" dirty="0"/>
+          </a:p>
+        </p:txBody>
+      </p:sp>
+    </p:spTree>
+  </p:cSld>
+  <p:clrMapOvr>
+    <a:masterClrMapping/>
+  </p:clrMapOvr>
+</p:sld>
+</file>
+
+<file path=ppt/slides/slide14.xml><?xml version="1.0" encoding="utf-8"?>
+<p:sld xmlns:a="http://schemas.openxmlformats.org/drawingml/2006/main" xmlns:r="http://schemas.openxmlformats.org/officeDocument/2006/relationships" xmlns:p="http://schemas.openxmlformats.org/presentationml/2006/main">
+  <p:cSld name="Slide 14">
+    <p:bg>
+      <p:bgPr>
+        <a:solidFill>
+          <a:srgbClr val="FFFFFF"/>
+        </a:solidFill>
+      </p:bgPr>
+    </p:bg>
+    <p:spTree>
+      <p:nvGrpSpPr>
+        <p:cNvPr id="1" name=""/>
+        <p:cNvGrpSpPr/>
+        <p:nvPr/>
+      </p:nvGrpSpPr>
+      <p:grpSpPr>
+        <a:xfrm>
+          <a:off x="0" y="0"/>
+          <a:ext cx="0" cy="0"/>
+          <a:chOff x="0" y="0"/>
+          <a:chExt cx="0" cy="0"/>
+        </a:xfrm>
+      </p:grpSpPr>
+      <p:sp>
+        <p:nvSpPr>
+          <p:cNvPr id="2" name="Text 0"/>
+          <p:cNvSpPr/>
+          <p:nvPr/>
+        </p:nvSpPr>
+        <p:spPr>
+          <a:xfrm>
+            <a:off x="502920" y="292608"/>
+            <a:ext cx="11183112" cy="274320"/>
+          </a:xfrm>
+          <a:prstGeom prst="rect">
+            <a:avLst/>
+          </a:prstGeom>
+          <a:noFill/>
+          <a:ln/>
+        </p:spPr>
+        <p:txBody>
+          <a:bodyPr wrap="square" rtlCol="0" anchor="ctr"/>
+          <a:lstStyle/>
+          <a:p>
+            <a:pPr indent="0" marL="0">
+              <a:buNone/>
+            </a:pPr>
+            <a:r>
+              <a:rPr lang="en-US" sz="1100" b="1" spc="120" kern="0" dirty="0">
+                <a:solidFill>
+                  <a:srgbClr val="3B81B1"/>
+                </a:solidFill>
+                <a:latin typeface="Noto Sans" pitchFamily="34" charset="0"/>
+                <a:ea typeface="Noto Sans" pitchFamily="34" charset="-122"/>
+                <a:cs typeface="Noto Sans" pitchFamily="34" charset="-120"/>
+              </a:rPr>
+              <a:t>PHẦN 2 — CHÂN DUNG KHÁCH HÀNG MỤC TIÊU</a:t>
+            </a:r>
+            <a:endParaRPr lang="en-US" sz="1100" dirty="0"/>
+          </a:p>
+        </p:txBody>
+      </p:sp>
+      <p:sp>
+        <p:nvSpPr>
+          <p:cNvPr id="3" name="Text 1"/>
+          <p:cNvSpPr/>
+          <p:nvPr/>
+        </p:nvSpPr>
+        <p:spPr>
+          <a:xfrm>
+            <a:off x="502920" y="548640"/>
+            <a:ext cx="10085832" cy="640080"/>
+          </a:xfrm>
+          <a:prstGeom prst="rect">
+            <a:avLst/>
+          </a:prstGeom>
+          <a:noFill/>
+          <a:ln/>
+        </p:spPr>
+        <p:txBody>
+          <a:bodyPr wrap="square" rtlCol="0" anchor="ctr"/>
+          <a:lstStyle/>
+          <a:p>
+            <a:pPr indent="0" marL="0">
+              <a:buNone/>
+            </a:pPr>
+            <a:r>
+              <a:rPr lang="en-US" sz="2600" b="1" dirty="0">
+                <a:solidFill>
+                  <a:srgbClr val="004671"/>
+                </a:solidFill>
+                <a:latin typeface="Noto Sans" pitchFamily="34" charset="0"/>
+                <a:ea typeface="Noto Sans" pitchFamily="34" charset="-122"/>
+                <a:cs typeface="Noto Sans" pitchFamily="34" charset="-120"/>
+              </a:rPr>
+              <a:t>Pain Point &amp; JTBD</a:t>
+            </a:r>
+            <a:endParaRPr lang="en-US" sz="2600" dirty="0"/>
+          </a:p>
+        </p:txBody>
+      </p:sp>
+      <p:sp>
+        <p:nvSpPr>
+          <p:cNvPr id="4" name="Shape 2"/>
+          <p:cNvSpPr/>
+          <p:nvPr/>
+        </p:nvSpPr>
+        <p:spPr>
+          <a:xfrm>
+            <a:off x="502920" y="1170432"/>
+            <a:ext cx="777240" cy="45720"/>
+          </a:xfrm>
+          <a:prstGeom prst="rect">
+            <a:avLst/>
+          </a:prstGeom>
+          <a:solidFill>
+            <a:srgbClr val="A5BE00"/>
+          </a:solidFill>
+          <a:ln/>
+        </p:spPr>
+      </p:sp>
+      <p:pic>
+        <p:nvPicPr>
+          <p:cNvPr id="5" name="Image 0"/>
+          <p:cNvPicPr>
+            <a:picLocks noChangeAspect="1"/>
+          </p:cNvPicPr>
+          <p:nvPr/>
+        </p:nvPicPr>
+        <p:blipFill>
+          <a:blip r:embed="rId1"/>
+          <a:stretch>
+            <a:fillRect/>
+          </a:stretch>
+        </p:blipFill>
+        <p:spPr>
+          <a:xfrm>
+            <a:off x="11292840" y="365760"/>
+            <a:ext cx="502920" cy="502920"/>
+          </a:xfrm>
+          <a:prstGeom prst="rect">
+            <a:avLst/>
+          </a:prstGeom>
+        </p:spPr>
+      </p:pic>
+      <p:graphicFrame>
+        <p:nvGraphicFramePr>
+          <p:cNvPr id="12" name="Table 0"/>
+          <p:cNvGraphicFramePr>
+            <a:graphicFrameLocks noGrp="1"/>
+          </p:cNvGraphicFramePr>
+          <p:nvPr/>
+        </p:nvGraphicFramePr>
+        <p:xfrm>
+          <a:off x="502920" y="1371600"/>
+          <a:ext cx="11183112" cy="5029200"/>
+        </p:xfrm>
+        <a:graphic>
+          <a:graphicData uri="http://schemas.openxmlformats.org/drawingml/2006/table">
+            <a:tbl>
+              <a:tblPr firstRow="1" bandRow="0"/>
+              <a:tblGrid>
+                <a:gridCol w="1300000"/>
+                <a:gridCol w="5100000"/>
+                <a:gridCol w="4783112"/>
+              </a:tblGrid>
+              <a:tr h="350000">
+                <a:tc>
+                  <a:txBody>
+                    <a:bodyPr/>
+                    <a:lstStyle/>
+                    <a:p>
+                      <a:pPr indent="0" marL="0">
+                        <a:buNone/>
+                      </a:pPr>
+                      <a:r>
+                        <a:rPr lang="en-US" sz="1200" b="1" dirty="0">
+                          <a:solidFill>
+                            <a:srgbClr val="FFFFFF"/>
+                          </a:solidFill>
+                          <a:latin typeface="Noto Sans" pitchFamily="34" charset="0"/>
+                          <a:ea typeface="Noto Sans" pitchFamily="34" charset="-122"/>
+                          <a:cs typeface="Noto Sans" pitchFamily="34" charset="-120"/>
+                        </a:rPr>
+                        <a:t>Tầng</a:t>
+                      </a:r>
+                      <a:endParaRPr lang="en-US" sz="1200" dirty="0">
+                        <a:latin typeface="Noto Sans" charset="0"/>
+                        <a:ea typeface="Noto Sans" charset="0"/>
+                        <a:cs typeface="Noto Sans" charset="0"/>
+                      </a:endParaRPr>
+                    </a:p>
+                  </a:txBody>
+                  <a:tcPr marL="101600" marR="101600" marT="63500" marB="63500" anchor="t">
+                    <a:lnL w="9525" cap="flat" cmpd="sng" algn="ctr">
+                      <a:solidFill>
+                        <a:srgbClr val="DCE7EA"/>
+                      </a:solidFill>
+                      <a:prstDash val="solid"/>
+                      <a:round/>
+                      <a:headEnd type="none" w="med" len="med"/>
+                      <a:tailEnd type="none" w="med" len="med"/>
+                    </a:lnL>
+                    <a:lnR w="9525" cap="flat" cmpd="sng" algn="ctr">
+                      <a:solidFill>
+                        <a:srgbClr val="DCE7EA"/>
+                      </a:solidFill>
+                      <a:prstDash val="solid"/>
+                      <a:round/>
+                      <a:headEnd type="none" w="med" len="med"/>
+                      <a:tailEnd type="none" w="med" len="med"/>
+                    </a:lnR>
+                    <a:lnT w="9525" cap="flat" cmpd="sng" algn="ctr">
+                      <a:solidFill>
+                        <a:srgbClr val="DCE7EA"/>
+                      </a:solidFill>
+                      <a:prstDash val="solid"/>
+                      <a:round/>
+                      <a:headEnd type="none" w="med" len="med"/>
+                      <a:tailEnd type="none" w="med" len="med"/>
+                    </a:lnT>
+                    <a:lnB w="9525" cap="flat" cmpd="sng" algn="ctr">
+                      <a:solidFill>
+                        <a:srgbClr val="DCE7EA"/>
+                      </a:solidFill>
+                      <a:prstDash val="solid"/>
+                      <a:round/>
+                      <a:headEnd type="none" w="med" len="med"/>
+                      <a:tailEnd type="none" w="med" len="med"/>
+                    </a:lnB>
+                    <a:solidFill>
+                      <a:srgbClr val="004671"/>
+                    </a:solidFill>
+                  </a:tcPr>
+                </a:tc>
+                <a:tc>
+                  <a:txBody>
+                    <a:bodyPr/>
+                    <a:lstStyle/>
+                    <a:p>
+                      <a:pPr indent="0" marL="0">
+                        <a:buNone/>
+                      </a:pPr>
+                      <a:r>
+                        <a:rPr lang="en-US" sz="1200" b="1" dirty="0">
+                          <a:solidFill>
+                            <a:srgbClr val="FFFFFF"/>
+                          </a:solidFill>
+                          <a:latin typeface="Noto Sans" pitchFamily="34" charset="0"/>
+                          <a:ea typeface="Noto Sans" pitchFamily="34" charset="-122"/>
+                          <a:cs typeface="Noto Sans" pitchFamily="34" charset="-120"/>
+                        </a:rPr>
+                        <a:t>Job (góc nhìn phụ huynh)</a:t>
+                      </a:r>
+                      <a:endParaRPr lang="en-US" sz="1200" dirty="0">
+                        <a:latin typeface="Noto Sans" charset="0"/>
+                        <a:ea typeface="Noto Sans" charset="0"/>
+                        <a:cs typeface="Noto Sans" charset="0"/>
+                      </a:endParaRPr>
+                    </a:p>
+                  </a:txBody>
+                  <a:tcPr marL="101600" marR="101600" marT="63500" marB="63500" anchor="t">
+                    <a:lnL w="9525" cap="flat" cmpd="sng" algn="ctr">
+                      <a:solidFill>
+                        <a:srgbClr val="DCE7EA"/>
+                      </a:solidFill>
+                      <a:prstDash val="solid"/>
+                      <a:round/>
+                      <a:headEnd type="none" w="med" len="med"/>
+                      <a:tailEnd type="none" w="med" len="med"/>
+                    </a:lnL>
+                    <a:lnR w="9525" cap="flat" cmpd="sng" algn="ctr">
+                      <a:solidFill>
+                        <a:srgbClr val="DCE7EA"/>
+                      </a:solidFill>
+                      <a:prstDash val="solid"/>
+                      <a:round/>
+                      <a:headEnd type="none" w="med" len="med"/>
+                      <a:tailEnd type="none" w="med" len="med"/>
+                    </a:lnR>
+                    <a:lnT w="9525" cap="flat" cmpd="sng" algn="ctr">
+                      <a:solidFill>
+                        <a:srgbClr val="DCE7EA"/>
+                      </a:solidFill>
+                      <a:prstDash val="solid"/>
+                      <a:round/>
+                      <a:headEnd type="none" w="med" len="med"/>
+                      <a:tailEnd type="none" w="med" len="med"/>
+                    </a:lnT>
+                    <a:lnB w="9525" cap="flat" cmpd="sng" algn="ctr">
+                      <a:solidFill>
+                        <a:srgbClr val="DCE7EA"/>
+                      </a:solidFill>
+                      <a:prstDash val="solid"/>
+                      <a:round/>
+                      <a:headEnd type="none" w="med" len="med"/>
+                      <a:tailEnd type="none" w="med" len="med"/>
+                    </a:lnB>
+                    <a:solidFill>
+                      <a:srgbClr val="004671"/>
+                    </a:solidFill>
+                  </a:tcPr>
+                </a:tc>
+                <a:tc>
+                  <a:txBody>
+                    <a:bodyPr/>
+                    <a:lstStyle/>
+                    <a:p>
+                      <a:pPr indent="0" marL="0">
+                        <a:buNone/>
+                      </a:pPr>
+                      <a:r>
+                        <a:rPr lang="en-US" sz="1200" b="1" dirty="0">
+                          <a:solidFill>
+                            <a:srgbClr val="FFFFFF"/>
+                          </a:solidFill>
+                          <a:latin typeface="Noto Sans" pitchFamily="34" charset="0"/>
+                          <a:ea typeface="Noto Sans" pitchFamily="34" charset="-122"/>
+                          <a:cs typeface="Noto Sans" pitchFamily="34" charset="-120"/>
+                        </a:rPr>
+                        <a:t>Pain point liên quan</a:t>
+                      </a:r>
+                      <a:endParaRPr lang="en-US" sz="1200" dirty="0">
+                        <a:latin typeface="Noto Sans" charset="0"/>
+                        <a:ea typeface="Noto Sans" charset="0"/>
+                        <a:cs typeface="Noto Sans" charset="0"/>
+                      </a:endParaRPr>
+                    </a:p>
+                  </a:txBody>
+                  <a:tcPr marL="101600" marR="101600" marT="63500" marB="63500" anchor="t">
+                    <a:lnL w="9525" cap="flat" cmpd="sng" algn="ctr">
+                      <a:solidFill>
+                        <a:srgbClr val="DCE7EA"/>
+                      </a:solidFill>
+                      <a:prstDash val="solid"/>
+                      <a:round/>
+                      <a:headEnd type="none" w="med" len="med"/>
+                      <a:tailEnd type="none" w="med" len="med"/>
+                    </a:lnL>
+                    <a:lnR w="9525" cap="flat" cmpd="sng" algn="ctr">
+                      <a:solidFill>
+                        <a:srgbClr val="DCE7EA"/>
+                      </a:solidFill>
+                      <a:prstDash val="solid"/>
+                      <a:round/>
+                      <a:headEnd type="none" w="med" len="med"/>
+                      <a:tailEnd type="none" w="med" len="med"/>
+                    </a:lnR>
+                    <a:lnT w="9525" cap="flat" cmpd="sng" algn="ctr">
+                      <a:solidFill>
+                        <a:srgbClr val="DCE7EA"/>
+                      </a:solidFill>
+                      <a:prstDash val="solid"/>
+                      <a:round/>
+                      <a:headEnd type="none" w="med" len="med"/>
+                      <a:tailEnd type="none" w="med" len="med"/>
+                    </a:lnT>
+                    <a:lnB w="9525" cap="flat" cmpd="sng" algn="ctr">
+                      <a:solidFill>
+                        <a:srgbClr val="DCE7EA"/>
+                      </a:solidFill>
+                      <a:prstDash val="solid"/>
+                      <a:round/>
+                      <a:headEnd type="none" w="med" len="med"/>
+                      <a:tailEnd type="none" w="med" len="med"/>
+                    </a:lnB>
+                    <a:solidFill>
+                      <a:srgbClr val="004671"/>
+                    </a:solidFill>
+                  </a:tcPr>
+                </a:tc>
+              </a:tr>
+              <a:tr h="584650">
+                <a:tc rowSpan="5">
+                  <a:txBody>
+                    <a:bodyPr/>
+                    <a:lstStyle/>
+                    <a:p>
+                      <a:pPr indent="0" marL="0">
+                        <a:buNone/>
+                      </a:pPr>
+                      <a:r>
+                        <a:rPr lang="en-US" sz="1200" b="1" dirty="0">
+                          <a:solidFill>
+                            <a:srgbClr val="004671"/>
+                          </a:solidFill>
+                          <a:latin typeface="Noto Sans" pitchFamily="34" charset="0"/>
+                          <a:ea typeface="Noto Sans" pitchFamily="34" charset="-122"/>
+                          <a:cs typeface="Noto Sans" pitchFamily="34" charset="-120"/>
+                        </a:rPr>
+                        <a:t>Functional</a:t>
+                      </a:r>
+                      <a:endParaRPr lang="en-US" sz="1200" dirty="0">
+                        <a:latin typeface="Noto Sans" charset="0"/>
+                        <a:ea typeface="Noto Sans" charset="0"/>
+                        <a:cs typeface="Noto Sans" charset="0"/>
+                      </a:endParaRPr>
+                    </a:p>
+                  </a:txBody>
+                  <a:tcPr marL="101600" marR="101600" marT="63500" marB="63500" anchor="t">
+                    <a:lnL w="9525" cap="flat" cmpd="sng" algn="ctr">
+                      <a:solidFill>
+                        <a:srgbClr val="DCE7EA"/>
+                      </a:solidFill>
+                      <a:prstDash val="solid"/>
+                      <a:round/>
+                      <a:headEnd type="none" w="med" len="med"/>
+                      <a:tailEnd type="none" w="med" len="med"/>
+                    </a:lnL>
+                    <a:lnR w="9525" cap="flat" cmpd="sng" algn="ctr">
+                      <a:solidFill>
+                        <a:srgbClr val="DCE7EA"/>
+                      </a:solidFill>
+                      <a:prstDash val="solid"/>
+                      <a:round/>
+                      <a:headEnd type="none" w="med" len="med"/>
+                      <a:tailEnd type="none" w="med" len="med"/>
+                    </a:lnR>
+                    <a:lnT w="9525" cap="flat" cmpd="sng" algn="ctr">
+                      <a:solidFill>
+                        <a:srgbClr val="DCE7EA"/>
+                      </a:solidFill>
+                      <a:prstDash val="solid"/>
+                      <a:round/>
+                      <a:headEnd type="none" w="med" len="med"/>
+                      <a:tailEnd type="none" w="med" len="med"/>
+                    </a:lnT>
+                    <a:lnB w="9525" cap="flat" cmpd="sng" algn="ctr">
+                      <a:solidFill>
+                        <a:srgbClr val="DCE7EA"/>
+                      </a:solidFill>
+                      <a:prstDash val="solid"/>
+                      <a:round/>
+                      <a:headEnd type="none" w="med" len="med"/>
+                      <a:tailEnd type="none" w="med" len="med"/>
+                    </a:lnB>
+                    <a:solidFill>
+                      <a:srgbClr val="FFFFFF"/>
+                    </a:solidFill>
+                  </a:tcPr>
+                </a:tc>
+                <a:tc>
+                  <a:txBody>
+                    <a:bodyPr/>
+                    <a:lstStyle/>
+                    <a:p>
+                      <a:pPr indent="0" marL="0">
+                        <a:buNone/>
+                      </a:pPr>
+                      <a:r>
+                        <a:rPr lang="en-US" sz="1200" dirty="0">
+                          <a:solidFill>
+                            <a:srgbClr val="22333F"/>
+                          </a:solidFill>
+                          <a:latin typeface="Noto Sans" pitchFamily="34" charset="0"/>
+                          <a:ea typeface="Noto Sans" pitchFamily="34" charset="-122"/>
+                          <a:cs typeface="Noto Sans" pitchFamily="34" charset="-120"/>
+                        </a:rPr>
+                        <a:t>Con học giỏi</a:t>
+                      </a:r>
+                      <a:endParaRPr lang="en-US" sz="1200" dirty="0">
+                        <a:latin typeface="Noto Sans" charset="0"/>
+                        <a:ea typeface="Noto Sans" charset="0"/>
+                        <a:cs typeface="Noto Sans" charset="0"/>
+                      </a:endParaRPr>
+                    </a:p>
+                  </a:txBody>
+                  <a:tcPr marL="101600" marR="101600" marT="63500" marB="63500" anchor="t">
+                    <a:lnL w="9525" cap="flat" cmpd="sng" algn="ctr">
+                      <a:solidFill>
+                        <a:srgbClr val="DCE7EA"/>
+                      </a:solidFill>
+                      <a:prstDash val="solid"/>
+                      <a:round/>
+                      <a:headEnd type="none" w="med" len="med"/>
+                      <a:tailEnd type="none" w="med" len="med"/>
+                    </a:lnL>
+                    <a:lnR w="9525" cap="flat" cmpd="sng" algn="ctr">
+                      <a:solidFill>
+                        <a:srgbClr val="DCE7EA"/>
+                      </a:solidFill>
+                      <a:prstDash val="solid"/>
+                      <a:round/>
+                      <a:headEnd type="none" w="med" len="med"/>
+                      <a:tailEnd type="none" w="med" len="med"/>
+                    </a:lnR>
+                    <a:lnT w="9525" cap="flat" cmpd="sng" algn="ctr">
+                      <a:solidFill>
+                        <a:srgbClr val="DCE7EA"/>
+                      </a:solidFill>
+                      <a:prstDash val="solid"/>
+                      <a:round/>
+                      <a:headEnd type="none" w="med" len="med"/>
+                      <a:tailEnd type="none" w="med" len="med"/>
+                    </a:lnT>
+                    <a:lnB w="9525" cap="flat" cmpd="sng" algn="ctr">
+                      <a:solidFill>
+                        <a:srgbClr val="DCE7EA"/>
+                      </a:solidFill>
+                      <a:prstDash val="solid"/>
+                      <a:round/>
+                      <a:headEnd type="none" w="med" len="med"/>
+                      <a:tailEnd type="none" w="med" len="med"/>
+                    </a:lnB>
+                    <a:solidFill>
+                      <a:srgbClr val="FFFFFF"/>
+                    </a:solidFill>
+                  </a:tcPr>
+                </a:tc>
+                <a:tc>
+                  <a:txBody>
+                    <a:bodyPr/>
+                    <a:lstStyle/>
+                    <a:p>
+                      <a:pPr indent="0" marL="0">
+                        <a:buNone/>
+                      </a:pPr>
+                      <a:r>
+                        <a:rPr lang="en-US" sz="1200" dirty="0">
+                          <a:solidFill>
+                            <a:srgbClr val="5B6472"/>
+                          </a:solidFill>
+                          <a:latin typeface="Noto Sans" pitchFamily="34" charset="0"/>
+                          <a:ea typeface="Noto Sans" pitchFamily="34" charset="-122"/>
+                          <a:cs typeface="Noto Sans" pitchFamily="34" charset="-120"/>
+                        </a:rPr>
+                        <a:t>Con học TA chưa tốt/tiến bộ chậm — phát âm sai, "câm" khi giao tiếp</a:t>
+                      </a:r>
+                      <a:endParaRPr lang="en-US" sz="1200" dirty="0">
+                        <a:latin typeface="Noto Sans" charset="0"/>
+                        <a:ea typeface="Noto Sans" charset="0"/>
+                        <a:cs typeface="Noto Sans" charset="0"/>
+                      </a:endParaRPr>
+                    </a:p>
+                  </a:txBody>
+                  <a:tcPr marL="101600" marR="101600" marT="63500" marB="63500" anchor="t">
+                    <a:lnL w="9525" cap="flat" cmpd="sng" algn="ctr">
+                      <a:solidFill>
+                        <a:srgbClr val="DCE7EA"/>
+                      </a:solidFill>
+                      <a:prstDash val="solid"/>
+                      <a:round/>
+                      <a:headEnd type="none" w="med" len="med"/>
+                      <a:tailEnd type="none" w="med" len="med"/>
+                    </a:lnL>
+                    <a:lnR w="9525" cap="flat" cmpd="sng" algn="ctr">
+                      <a:solidFill>
+                        <a:srgbClr val="DCE7EA"/>
+                      </a:solidFill>
+                      <a:prstDash val="solid"/>
+                      <a:round/>
+                      <a:headEnd type="none" w="med" len="med"/>
+                      <a:tailEnd type="none" w="med" len="med"/>
+                    </a:lnR>
+                    <a:lnT w="9525" cap="flat" cmpd="sng" algn="ctr">
+                      <a:solidFill>
+                        <a:srgbClr val="DCE7EA"/>
+                      </a:solidFill>
+                      <a:prstDash val="solid"/>
+                      <a:round/>
+                      <a:headEnd type="none" w="med" len="med"/>
+                      <a:tailEnd type="none" w="med" len="med"/>
+                    </a:lnT>
+                    <a:lnB w="9525" cap="flat" cmpd="sng" algn="ctr">
+                      <a:solidFill>
+                        <a:srgbClr val="DCE7EA"/>
+                      </a:solidFill>
+                      <a:prstDash val="solid"/>
+                      <a:round/>
+                      <a:headEnd type="none" w="med" len="med"/>
+                      <a:tailEnd type="none" w="med" len="med"/>
+                    </a:lnB>
+                    <a:solidFill>
+                      <a:srgbClr val="FFFFFF"/>
+                    </a:solidFill>
+                  </a:tcPr>
+                </a:tc>
+              </a:tr>
+              <a:tr h="584650">
+                <a:tc vMerge="1">
+                  <a:txBody>
+                    <a:bodyPr/>
+                    <a:lstStyle/>
+                    <a:p>
+                      <a:pPr indent="0" marL="0">
+                        <a:buNone/>
+                      </a:pPr>
+                      <a:endParaRPr lang="en-US" sz="1200" dirty="0">
+                        <a:latin typeface="Noto Sans" charset="0"/>
+                        <a:ea typeface="Noto Sans" charset="0"/>
+                        <a:cs typeface="Noto Sans" charset="0"/>
+                      </a:endParaRPr>
+                    </a:p>
+                  </a:txBody>
+                  <a:tcPr marL="101600" marR="101600" marT="63500" marB="63500" anchor="t">
+                    <a:lnL w="9525" cap="flat" cmpd="sng" algn="ctr">
+                      <a:solidFill>
+                        <a:srgbClr val="DCE7EA"/>
+                      </a:solidFill>
+                      <a:prstDash val="solid"/>
+                      <a:round/>
+                      <a:headEnd type="none" w="med" len="med"/>
+                      <a:tailEnd type="none" w="med" len="med"/>
+                    </a:lnL>
+                    <a:lnR w="9525" cap="flat" cmpd="sng" algn="ctr">
+                      <a:solidFill>
+                        <a:srgbClr val="DCE7EA"/>
+                      </a:solidFill>
+                      <a:prstDash val="solid"/>
+                      <a:round/>
+                      <a:headEnd type="none" w="med" len="med"/>
+                      <a:tailEnd type="none" w="med" len="med"/>
+                    </a:lnR>
+                    <a:lnT w="9525" cap="flat" cmpd="sng" algn="ctr">
+                      <a:solidFill>
+                        <a:srgbClr val="DCE7EA"/>
+                      </a:solidFill>
+                      <a:prstDash val="solid"/>
+                      <a:round/>
+                      <a:headEnd type="none" w="med" len="med"/>
+                      <a:tailEnd type="none" w="med" len="med"/>
+                    </a:lnT>
+                    <a:lnB w="9525" cap="flat" cmpd="sng" algn="ctr">
+                      <a:solidFill>
+                        <a:srgbClr val="DCE7EA"/>
+                      </a:solidFill>
+                      <a:prstDash val="solid"/>
+                      <a:round/>
+                      <a:headEnd type="none" w="med" len="med"/>
+                      <a:tailEnd type="none" w="med" len="med"/>
+                    </a:lnB>
+                    <a:solidFill>
+                      <a:srgbClr val="FFFFFF"/>
+                    </a:solidFill>
+                  </a:tcPr>
+                </a:tc>
+                <a:tc>
+                  <a:txBody>
+                    <a:bodyPr/>
+                    <a:lstStyle/>
+                    <a:p>
+                      <a:pPr indent="0" marL="0">
+                        <a:buNone/>
+                      </a:pPr>
+                      <a:r>
+                        <a:rPr lang="en-US" sz="1200" dirty="0">
+                          <a:solidFill>
+                            <a:srgbClr val="22333F"/>
+                          </a:solidFill>
+                          <a:latin typeface="Noto Sans" pitchFamily="34" charset="0"/>
+                          <a:ea typeface="Noto Sans" pitchFamily="34" charset="-122"/>
+                          <a:cs typeface="Noto Sans" pitchFamily="34" charset="-120"/>
+                        </a:rPr>
+                        <a:t>Có người giám sát, đốc thúc con học thay bố mẹ</a:t>
+                      </a:r>
+                      <a:endParaRPr lang="en-US" sz="1200" dirty="0">
+                        <a:latin typeface="Noto Sans" charset="0"/>
+                        <a:ea typeface="Noto Sans" charset="0"/>
+                        <a:cs typeface="Noto Sans" charset="0"/>
+                      </a:endParaRPr>
+                    </a:p>
+                  </a:txBody>
+                  <a:tcPr marL="101600" marR="101600" marT="63500" marB="63500" anchor="t">
+                    <a:lnL w="9525" cap="flat" cmpd="sng" algn="ctr">
+                      <a:solidFill>
+                        <a:srgbClr val="DCE7EA"/>
+                      </a:solidFill>
+                      <a:prstDash val="solid"/>
+                      <a:round/>
+                      <a:headEnd type="none" w="med" len="med"/>
+                      <a:tailEnd type="none" w="med" len="med"/>
+                    </a:lnL>
+                    <a:lnR w="9525" cap="flat" cmpd="sng" algn="ctr">
+                      <a:solidFill>
+                        <a:srgbClr val="DCE7EA"/>
+                      </a:solidFill>
+                      <a:prstDash val="solid"/>
+                      <a:round/>
+                      <a:headEnd type="none" w="med" len="med"/>
+                      <a:tailEnd type="none" w="med" len="med"/>
+                    </a:lnR>
+                    <a:lnT w="9525" cap="flat" cmpd="sng" algn="ctr">
+                      <a:solidFill>
+                        <a:srgbClr val="DCE7EA"/>
+                      </a:solidFill>
+                      <a:prstDash val="solid"/>
+                      <a:round/>
+                      <a:headEnd type="none" w="med" len="med"/>
+                      <a:tailEnd type="none" w="med" len="med"/>
+                    </a:lnT>
+                    <a:lnB w="9525" cap="flat" cmpd="sng" algn="ctr">
+                      <a:solidFill>
+                        <a:srgbClr val="DCE7EA"/>
+                      </a:solidFill>
+                      <a:prstDash val="solid"/>
+                      <a:round/>
+                      <a:headEnd type="none" w="med" len="med"/>
+                      <a:tailEnd type="none" w="med" len="med"/>
+                    </a:lnB>
+                    <a:solidFill>
+                      <a:srgbClr val="F2FAFB"/>
+                    </a:solidFill>
+                  </a:tcPr>
+                </a:tc>
+                <a:tc>
+                  <a:txBody>
+                    <a:bodyPr/>
+                    <a:lstStyle/>
+                    <a:p>
+                      <a:pPr indent="0" marL="0">
+                        <a:buNone/>
+                      </a:pPr>
+                      <a:r>
+                        <a:rPr lang="en-US" sz="1200" dirty="0">
+                          <a:solidFill>
+                            <a:srgbClr val="5B6472"/>
+                          </a:solidFill>
+                          <a:latin typeface="Noto Sans" pitchFamily="34" charset="0"/>
+                          <a:ea typeface="Noto Sans" pitchFamily="34" charset="-122"/>
+                          <a:cs typeface="Noto Sans" pitchFamily="34" charset="-120"/>
+                        </a:rPr>
+                        <a:t>Phụ huynh phải liên tục nhắc nhở, đốc thúc vì con chưa tự giác</a:t>
+                      </a:r>
+                      <a:endParaRPr lang="en-US" sz="1200" dirty="0">
+                        <a:latin typeface="Noto Sans" charset="0"/>
+                        <a:ea typeface="Noto Sans" charset="0"/>
+                        <a:cs typeface="Noto Sans" charset="0"/>
+                      </a:endParaRPr>
+                    </a:p>
+                  </a:txBody>
+                  <a:tcPr marL="101600" marR="101600" marT="63500" marB="63500" anchor="t">
+                    <a:lnL w="9525" cap="flat" cmpd="sng" algn="ctr">
+                      <a:solidFill>
+                        <a:srgbClr val="DCE7EA"/>
+                      </a:solidFill>
+                      <a:prstDash val="solid"/>
+                      <a:round/>
+                      <a:headEnd type="none" w="med" len="med"/>
+                      <a:tailEnd type="none" w="med" len="med"/>
+                    </a:lnL>
+                    <a:lnR w="9525" cap="flat" cmpd="sng" algn="ctr">
+                      <a:solidFill>
+                        <a:srgbClr val="DCE7EA"/>
+                      </a:solidFill>
+                      <a:prstDash val="solid"/>
+                      <a:round/>
+                      <a:headEnd type="none" w="med" len="med"/>
+                      <a:tailEnd type="none" w="med" len="med"/>
+                    </a:lnR>
+                    <a:lnT w="9525" cap="flat" cmpd="sng" algn="ctr">
+                      <a:solidFill>
+                        <a:srgbClr val="DCE7EA"/>
+                      </a:solidFill>
+                      <a:prstDash val="solid"/>
+                      <a:round/>
+                      <a:headEnd type="none" w="med" len="med"/>
+                      <a:tailEnd type="none" w="med" len="med"/>
+                    </a:lnT>
+                    <a:lnB w="9525" cap="flat" cmpd="sng" algn="ctr">
+                      <a:solidFill>
+                        <a:srgbClr val="DCE7EA"/>
+                      </a:solidFill>
+                      <a:prstDash val="solid"/>
+                      <a:round/>
+                      <a:headEnd type="none" w="med" len="med"/>
+                      <a:tailEnd type="none" w="med" len="med"/>
+                    </a:lnB>
+                    <a:solidFill>
+                      <a:srgbClr val="F2FAFB"/>
+                    </a:solidFill>
+                  </a:tcPr>
+                </a:tc>
+              </a:tr>
+              <a:tr h="584650">
+                <a:tc vMerge="1">
+                  <a:txBody>
+                    <a:bodyPr/>
+                    <a:lstStyle/>
+                    <a:p>
+                      <a:pPr indent="0" marL="0">
+                        <a:buNone/>
+                      </a:pPr>
+                      <a:endParaRPr lang="en-US" sz="1200" dirty="0">
+                        <a:latin typeface="Noto Sans" charset="0"/>
+                        <a:ea typeface="Noto Sans" charset="0"/>
+                        <a:cs typeface="Noto Sans" charset="0"/>
+                      </a:endParaRPr>
+                    </a:p>
+                  </a:txBody>
+                  <a:tcPr marL="101600" marR="101600" marT="63500" marB="63500" anchor="t">
+                    <a:lnL w="9525" cap="flat" cmpd="sng" algn="ctr">
+                      <a:solidFill>
+                        <a:srgbClr val="DCE7EA"/>
+                      </a:solidFill>
+                      <a:prstDash val="solid"/>
+                      <a:round/>
+                      <a:headEnd type="none" w="med" len="med"/>
+                      <a:tailEnd type="none" w="med" len="med"/>
+                    </a:lnL>
+                    <a:lnR w="9525" cap="flat" cmpd="sng" algn="ctr">
+                      <a:solidFill>
+                        <a:srgbClr val="DCE7EA"/>
+                      </a:solidFill>
+                      <a:prstDash val="solid"/>
+                      <a:round/>
+                      <a:headEnd type="none" w="med" len="med"/>
+                      <a:tailEnd type="none" w="med" len="med"/>
+                    </a:lnR>
+                    <a:lnT w="9525" cap="flat" cmpd="sng" algn="ctr">
+                      <a:solidFill>
+                        <a:srgbClr val="DCE7EA"/>
+                      </a:solidFill>
+                      <a:prstDash val="solid"/>
+                      <a:round/>
+                      <a:headEnd type="none" w="med" len="med"/>
+                      <a:tailEnd type="none" w="med" len="med"/>
+                    </a:lnT>
+                    <a:lnB w="9525" cap="flat" cmpd="sng" algn="ctr">
+                      <a:solidFill>
+                        <a:srgbClr val="DCE7EA"/>
+                      </a:solidFill>
+                      <a:prstDash val="solid"/>
+                      <a:round/>
+                      <a:headEnd type="none" w="med" len="med"/>
+                      <a:tailEnd type="none" w="med" len="med"/>
+                    </a:lnB>
+                    <a:solidFill>
+                      <a:srgbClr val="FFFFFF"/>
+                    </a:solidFill>
+                  </a:tcPr>
+                </a:tc>
+                <a:tc>
+                  <a:txBody>
+                    <a:bodyPr/>
+                    <a:lstStyle/>
+                    <a:p>
+                      <a:pPr indent="0" marL="0">
+                        <a:buNone/>
+                      </a:pPr>
+                      <a:r>
+                        <a:rPr lang="en-US" sz="1200" dirty="0">
+                          <a:solidFill>
+                            <a:srgbClr val="22333F"/>
+                          </a:solidFill>
+                          <a:latin typeface="Noto Sans" pitchFamily="34" charset="0"/>
+                          <a:ea typeface="Noto Sans" pitchFamily="34" charset="-122"/>
+                          <a:cs typeface="Noto Sans" pitchFamily="34" charset="-120"/>
+                        </a:rPr>
+                        <a:t>Muốn con không học lệch</a:t>
+                      </a:r>
+                      <a:endParaRPr lang="en-US" sz="1200" dirty="0">
+                        <a:latin typeface="Noto Sans" charset="0"/>
+                        <a:ea typeface="Noto Sans" charset="0"/>
+                        <a:cs typeface="Noto Sans" charset="0"/>
+                      </a:endParaRPr>
+                    </a:p>
+                  </a:txBody>
+                  <a:tcPr marL="101600" marR="101600" marT="63500" marB="63500" anchor="t">
+                    <a:lnL w="9525" cap="flat" cmpd="sng" algn="ctr">
+                      <a:solidFill>
+                        <a:srgbClr val="DCE7EA"/>
+                      </a:solidFill>
+                      <a:prstDash val="solid"/>
+                      <a:round/>
+                      <a:headEnd type="none" w="med" len="med"/>
+                      <a:tailEnd type="none" w="med" len="med"/>
+                    </a:lnL>
+                    <a:lnR w="9525" cap="flat" cmpd="sng" algn="ctr">
+                      <a:solidFill>
+                        <a:srgbClr val="DCE7EA"/>
+                      </a:solidFill>
+                      <a:prstDash val="solid"/>
+                      <a:round/>
+                      <a:headEnd type="none" w="med" len="med"/>
+                      <a:tailEnd type="none" w="med" len="med"/>
+                    </a:lnR>
+                    <a:lnT w="9525" cap="flat" cmpd="sng" algn="ctr">
+                      <a:solidFill>
+                        <a:srgbClr val="DCE7EA"/>
+                      </a:solidFill>
+                      <a:prstDash val="solid"/>
+                      <a:round/>
+                      <a:headEnd type="none" w="med" len="med"/>
+                      <a:tailEnd type="none" w="med" len="med"/>
+                    </a:lnT>
+                    <a:lnB w="9525" cap="flat" cmpd="sng" algn="ctr">
+                      <a:solidFill>
+                        <a:srgbClr val="DCE7EA"/>
+                      </a:solidFill>
+                      <a:prstDash val="solid"/>
+                      <a:round/>
+                      <a:headEnd type="none" w="med" len="med"/>
+                      <a:tailEnd type="none" w="med" len="med"/>
+                    </a:lnB>
+                    <a:solidFill>
+                      <a:srgbClr val="FFFFFF"/>
+                    </a:solidFill>
+                  </a:tcPr>
+                </a:tc>
+                <a:tc>
+                  <a:txBody>
+                    <a:bodyPr/>
+                    <a:lstStyle/>
+                    <a:p>
+                      <a:pPr indent="0" marL="0">
+                        <a:buNone/>
+                      </a:pPr>
+                      <a:r>
+                        <a:rPr lang="en-US" sz="1200" dirty="0">
+                          <a:solidFill>
+                            <a:srgbClr val="5B6472"/>
+                          </a:solidFill>
+                          <a:latin typeface="Noto Sans" pitchFamily="34" charset="0"/>
+                          <a:ea typeface="Noto Sans" pitchFamily="34" charset="-122"/>
+                          <a:cs typeface="Noto Sans" pitchFamily="34" charset="-120"/>
+                        </a:rPr>
+                        <a:t>◆ Con học lệch, thiếu cân bằng giữa các môn (giả định đa môn, chưa xác nhận)</a:t>
+                      </a:r>
+                      <a:endParaRPr lang="en-US" sz="1200" dirty="0">
+                        <a:latin typeface="Noto Sans" charset="0"/>
+                        <a:ea typeface="Noto Sans" charset="0"/>
+                        <a:cs typeface="Noto Sans" charset="0"/>
+                      </a:endParaRPr>
+                    </a:p>
+                  </a:txBody>
+                  <a:tcPr marL="101600" marR="101600" marT="63500" marB="63500" anchor="t">
+                    <a:lnL w="9525" cap="flat" cmpd="sng" algn="ctr">
+                      <a:solidFill>
+                        <a:srgbClr val="DCE7EA"/>
+                      </a:solidFill>
+                      <a:prstDash val="solid"/>
+                      <a:round/>
+                      <a:headEnd type="none" w="med" len="med"/>
+                      <a:tailEnd type="none" w="med" len="med"/>
+                    </a:lnL>
+                    <a:lnR w="9525" cap="flat" cmpd="sng" algn="ctr">
+                      <a:solidFill>
+                        <a:srgbClr val="DCE7EA"/>
+                      </a:solidFill>
+                      <a:prstDash val="solid"/>
+                      <a:round/>
+                      <a:headEnd type="none" w="med" len="med"/>
+                      <a:tailEnd type="none" w="med" len="med"/>
+                    </a:lnR>
+                    <a:lnT w="9525" cap="flat" cmpd="sng" algn="ctr">
+                      <a:solidFill>
+                        <a:srgbClr val="DCE7EA"/>
+                      </a:solidFill>
+                      <a:prstDash val="solid"/>
+                      <a:round/>
+                      <a:headEnd type="none" w="med" len="med"/>
+                      <a:tailEnd type="none" w="med" len="med"/>
+                    </a:lnT>
+                    <a:lnB w="9525" cap="flat" cmpd="sng" algn="ctr">
+                      <a:solidFill>
+                        <a:srgbClr val="DCE7EA"/>
+                      </a:solidFill>
+                      <a:prstDash val="solid"/>
+                      <a:round/>
+                      <a:headEnd type="none" w="med" len="med"/>
+                      <a:tailEnd type="none" w="med" len="med"/>
+                    </a:lnB>
+                    <a:solidFill>
+                      <a:srgbClr val="FFFFFF"/>
+                    </a:solidFill>
+                  </a:tcPr>
+                </a:tc>
+              </a:tr>
+              <a:tr h="584650">
+                <a:tc vMerge="1">
+                  <a:txBody>
+                    <a:bodyPr/>
+                    <a:lstStyle/>
+                    <a:p>
+                      <a:pPr indent="0" marL="0">
+                        <a:buNone/>
+                      </a:pPr>
+                      <a:endParaRPr lang="en-US" sz="1200" dirty="0">
+                        <a:latin typeface="Noto Sans" charset="0"/>
+                        <a:ea typeface="Noto Sans" charset="0"/>
+                        <a:cs typeface="Noto Sans" charset="0"/>
+                      </a:endParaRPr>
+                    </a:p>
+                  </a:txBody>
+                  <a:tcPr marL="101600" marR="101600" marT="63500" marB="63500" anchor="t">
+                    <a:lnL w="9525" cap="flat" cmpd="sng" algn="ctr">
+                      <a:solidFill>
+                        <a:srgbClr val="DCE7EA"/>
+                      </a:solidFill>
+                      <a:prstDash val="solid"/>
+                      <a:round/>
+                      <a:headEnd type="none" w="med" len="med"/>
+                      <a:tailEnd type="none" w="med" len="med"/>
+                    </a:lnL>
+                    <a:lnR w="9525" cap="flat" cmpd="sng" algn="ctr">
+                      <a:solidFill>
+                        <a:srgbClr val="DCE7EA"/>
+                      </a:solidFill>
+                      <a:prstDash val="solid"/>
+                      <a:round/>
+                      <a:headEnd type="none" w="med" len="med"/>
+                      <a:tailEnd type="none" w="med" len="med"/>
+                    </a:lnR>
+                    <a:lnT w="9525" cap="flat" cmpd="sng" algn="ctr">
+                      <a:solidFill>
+                        <a:srgbClr val="DCE7EA"/>
+                      </a:solidFill>
+                      <a:prstDash val="solid"/>
+                      <a:round/>
+                      <a:headEnd type="none" w="med" len="med"/>
+                      <a:tailEnd type="none" w="med" len="med"/>
+                    </a:lnT>
+                    <a:lnB w="9525" cap="flat" cmpd="sng" algn="ctr">
+                      <a:solidFill>
+                        <a:srgbClr val="DCE7EA"/>
+                      </a:solidFill>
+                      <a:prstDash val="solid"/>
+                      <a:round/>
+                      <a:headEnd type="none" w="med" len="med"/>
+                      <a:tailEnd type="none" w="med" len="med"/>
+                    </a:lnB>
+                    <a:solidFill>
+                      <a:srgbClr val="FFFFFF"/>
+                    </a:solidFill>
+                  </a:tcPr>
+                </a:tc>
+                <a:tc>
+                  <a:txBody>
+                    <a:bodyPr/>
+                    <a:lstStyle/>
+                    <a:p>
+                      <a:pPr indent="0" marL="0">
+                        <a:buNone/>
+                      </a:pPr>
+                      <a:r>
+                        <a:rPr lang="en-US" sz="1200" dirty="0">
+                          <a:solidFill>
+                            <a:srgbClr val="22333F"/>
+                          </a:solidFill>
+                          <a:latin typeface="Noto Sans" pitchFamily="34" charset="0"/>
+                          <a:ea typeface="Noto Sans" pitchFamily="34" charset="-122"/>
+                          <a:cs typeface="Noto Sans" pitchFamily="34" charset="-120"/>
+                        </a:rPr>
+                        <a:t>Duy trì việc học hiệu quả trong khả năng chi trả lâu dài</a:t>
+                      </a:r>
+                      <a:endParaRPr lang="en-US" sz="1200" dirty="0">
+                        <a:latin typeface="Noto Sans" charset="0"/>
+                        <a:ea typeface="Noto Sans" charset="0"/>
+                        <a:cs typeface="Noto Sans" charset="0"/>
+                      </a:endParaRPr>
+                    </a:p>
+                  </a:txBody>
+                  <a:tcPr marL="101600" marR="101600" marT="63500" marB="63500" anchor="t">
+                    <a:lnL w="9525" cap="flat" cmpd="sng" algn="ctr">
+                      <a:solidFill>
+                        <a:srgbClr val="DCE7EA"/>
+                      </a:solidFill>
+                      <a:prstDash val="solid"/>
+                      <a:round/>
+                      <a:headEnd type="none" w="med" len="med"/>
+                      <a:tailEnd type="none" w="med" len="med"/>
+                    </a:lnL>
+                    <a:lnR w="9525" cap="flat" cmpd="sng" algn="ctr">
+                      <a:solidFill>
+                        <a:srgbClr val="DCE7EA"/>
+                      </a:solidFill>
+                      <a:prstDash val="solid"/>
+                      <a:round/>
+                      <a:headEnd type="none" w="med" len="med"/>
+                      <a:tailEnd type="none" w="med" len="med"/>
+                    </a:lnR>
+                    <a:lnT w="9525" cap="flat" cmpd="sng" algn="ctr">
+                      <a:solidFill>
+                        <a:srgbClr val="DCE7EA"/>
+                      </a:solidFill>
+                      <a:prstDash val="solid"/>
+                      <a:round/>
+                      <a:headEnd type="none" w="med" len="med"/>
+                      <a:tailEnd type="none" w="med" len="med"/>
+                    </a:lnT>
+                    <a:lnB w="9525" cap="flat" cmpd="sng" algn="ctr">
+                      <a:solidFill>
+                        <a:srgbClr val="DCE7EA"/>
+                      </a:solidFill>
+                      <a:prstDash val="solid"/>
+                      <a:round/>
+                      <a:headEnd type="none" w="med" len="med"/>
+                      <a:tailEnd type="none" w="med" len="med"/>
+                    </a:lnB>
+                    <a:solidFill>
+                      <a:srgbClr val="F2FAFB"/>
+                    </a:solidFill>
+                  </a:tcPr>
+                </a:tc>
+                <a:tc>
+                  <a:txBody>
+                    <a:bodyPr/>
+                    <a:lstStyle/>
+                    <a:p>
+                      <a:pPr indent="0" marL="0">
+                        <a:buNone/>
+                      </a:pPr>
+                      <a:r>
+                        <a:rPr lang="en-US" sz="1200" dirty="0">
+                          <a:solidFill>
+                            <a:srgbClr val="5B6472"/>
+                          </a:solidFill>
+                          <a:latin typeface="Noto Sans" pitchFamily="34" charset="0"/>
+                          <a:ea typeface="Noto Sans" pitchFamily="34" charset="-122"/>
+                          <a:cs typeface="Noto Sans" pitchFamily="34" charset="-120"/>
+                        </a:rPr>
+                        <a:t>Chi phí cộng dồn nhiều lớp/trung tâm; tốn thời gian đưa đón</a:t>
+                      </a:r>
+                      <a:endParaRPr lang="en-US" sz="1200" dirty="0">
+                        <a:latin typeface="Noto Sans" charset="0"/>
+                        <a:ea typeface="Noto Sans" charset="0"/>
+                        <a:cs typeface="Noto Sans" charset="0"/>
+                      </a:endParaRPr>
+                    </a:p>
+                  </a:txBody>
+                  <a:tcPr marL="101600" marR="101600" marT="63500" marB="63500" anchor="t">
+                    <a:lnL w="9525" cap="flat" cmpd="sng" algn="ctr">
+                      <a:solidFill>
+                        <a:srgbClr val="DCE7EA"/>
+                      </a:solidFill>
+                      <a:prstDash val="solid"/>
+                      <a:round/>
+                      <a:headEnd type="none" w="med" len="med"/>
+                      <a:tailEnd type="none" w="med" len="med"/>
+                    </a:lnL>
+                    <a:lnR w="9525" cap="flat" cmpd="sng" algn="ctr">
+                      <a:solidFill>
+                        <a:srgbClr val="DCE7EA"/>
+                      </a:solidFill>
+                      <a:prstDash val="solid"/>
+                      <a:round/>
+                      <a:headEnd type="none" w="med" len="med"/>
+                      <a:tailEnd type="none" w="med" len="med"/>
+                    </a:lnR>
+                    <a:lnT w="9525" cap="flat" cmpd="sng" algn="ctr">
+                      <a:solidFill>
+                        <a:srgbClr val="DCE7EA"/>
+                      </a:solidFill>
+                      <a:prstDash val="solid"/>
+                      <a:round/>
+                      <a:headEnd type="none" w="med" len="med"/>
+                      <a:tailEnd type="none" w="med" len="med"/>
+                    </a:lnT>
+                    <a:lnB w="9525" cap="flat" cmpd="sng" algn="ctr">
+                      <a:solidFill>
+                        <a:srgbClr val="DCE7EA"/>
+                      </a:solidFill>
+                      <a:prstDash val="solid"/>
+                      <a:round/>
+                      <a:headEnd type="none" w="med" len="med"/>
+                      <a:tailEnd type="none" w="med" len="med"/>
+                    </a:lnB>
+                    <a:solidFill>
+                      <a:srgbClr val="F2FAFB"/>
+                    </a:solidFill>
+                  </a:tcPr>
+                </a:tc>
+              </a:tr>
+              <a:tr h="584650">
+                <a:tc vMerge="1">
+                  <a:txBody>
+                    <a:bodyPr/>
+                    <a:lstStyle/>
+                    <a:p>
+                      <a:pPr indent="0" marL="0">
+                        <a:buNone/>
+                      </a:pPr>
+                      <a:endParaRPr lang="en-US" sz="1200" dirty="0">
+                        <a:latin typeface="Noto Sans" charset="0"/>
+                        <a:ea typeface="Noto Sans" charset="0"/>
+                        <a:cs typeface="Noto Sans" charset="0"/>
+                      </a:endParaRPr>
+                    </a:p>
+                  </a:txBody>
+                  <a:tcPr marL="101600" marR="101600" marT="63500" marB="63500" anchor="t">
+                    <a:lnL w="9525" cap="flat" cmpd="sng" algn="ctr">
+                      <a:solidFill>
+                        <a:srgbClr val="DCE7EA"/>
+                      </a:solidFill>
+                      <a:prstDash val="solid"/>
+                      <a:round/>
+                      <a:headEnd type="none" w="med" len="med"/>
+                      <a:tailEnd type="none" w="med" len="med"/>
+                    </a:lnL>
+                    <a:lnR w="9525" cap="flat" cmpd="sng" algn="ctr">
+                      <a:solidFill>
+                        <a:srgbClr val="DCE7EA"/>
+                      </a:solidFill>
+                      <a:prstDash val="solid"/>
+                      <a:round/>
+                      <a:headEnd type="none" w="med" len="med"/>
+                      <a:tailEnd type="none" w="med" len="med"/>
+                    </a:lnR>
+                    <a:lnT w="9525" cap="flat" cmpd="sng" algn="ctr">
+                      <a:solidFill>
+                        <a:srgbClr val="DCE7EA"/>
+                      </a:solidFill>
+                      <a:prstDash val="solid"/>
+                      <a:round/>
+                      <a:headEnd type="none" w="med" len="med"/>
+                      <a:tailEnd type="none" w="med" len="med"/>
+                    </a:lnT>
+                    <a:lnB w="9525" cap="flat" cmpd="sng" algn="ctr">
+                      <a:solidFill>
+                        <a:srgbClr val="DCE7EA"/>
+                      </a:solidFill>
+                      <a:prstDash val="solid"/>
+                      <a:round/>
+                      <a:headEnd type="none" w="med" len="med"/>
+                      <a:tailEnd type="none" w="med" len="med"/>
+                    </a:lnB>
+                    <a:solidFill>
+                      <a:srgbClr val="FFFFFF"/>
+                    </a:solidFill>
+                  </a:tcPr>
+                </a:tc>
+                <a:tc>
+                  <a:txBody>
+                    <a:bodyPr/>
+                    <a:lstStyle/>
+                    <a:p>
+                      <a:pPr indent="0" marL="0">
+                        <a:buNone/>
+                      </a:pPr>
+                      <a:r>
+                        <a:rPr lang="en-US" sz="1200" dirty="0">
+                          <a:solidFill>
+                            <a:srgbClr val="22333F"/>
+                          </a:solidFill>
+                          <a:latin typeface="Noto Sans" pitchFamily="34" charset="0"/>
+                          <a:ea typeface="Noto Sans" pitchFamily="34" charset="-122"/>
+                          <a:cs typeface="Noto Sans" pitchFamily="34" charset="-120"/>
+                        </a:rPr>
+                        <a:t>Quản lý toàn bộ việc học của con ở một nơi, không phải tự tổng hợp</a:t>
+                      </a:r>
+                      <a:endParaRPr lang="en-US" sz="1200" dirty="0">
+                        <a:latin typeface="Noto Sans" charset="0"/>
+                        <a:ea typeface="Noto Sans" charset="0"/>
+                        <a:cs typeface="Noto Sans" charset="0"/>
+                      </a:endParaRPr>
+                    </a:p>
+                  </a:txBody>
+                  <a:tcPr marL="101600" marR="101600" marT="63500" marB="63500" anchor="t">
+                    <a:lnL w="9525" cap="flat" cmpd="sng" algn="ctr">
+                      <a:solidFill>
+                        <a:srgbClr val="DCE7EA"/>
+                      </a:solidFill>
+                      <a:prstDash val="solid"/>
+                      <a:round/>
+                      <a:headEnd type="none" w="med" len="med"/>
+                      <a:tailEnd type="none" w="med" len="med"/>
+                    </a:lnL>
+                    <a:lnR w="9525" cap="flat" cmpd="sng" algn="ctr">
+                      <a:solidFill>
+                        <a:srgbClr val="DCE7EA"/>
+                      </a:solidFill>
+                      <a:prstDash val="solid"/>
+                      <a:round/>
+                      <a:headEnd type="none" w="med" len="med"/>
+                      <a:tailEnd type="none" w="med" len="med"/>
+                    </a:lnR>
+                    <a:lnT w="9525" cap="flat" cmpd="sng" algn="ctr">
+                      <a:solidFill>
+                        <a:srgbClr val="DCE7EA"/>
+                      </a:solidFill>
+                      <a:prstDash val="solid"/>
+                      <a:round/>
+                      <a:headEnd type="none" w="med" len="med"/>
+                      <a:tailEnd type="none" w="med" len="med"/>
+                    </a:lnT>
+                    <a:lnB w="9525" cap="flat" cmpd="sng" algn="ctr">
+                      <a:solidFill>
+                        <a:srgbClr val="DCE7EA"/>
+                      </a:solidFill>
+                      <a:prstDash val="solid"/>
+                      <a:round/>
+                      <a:headEnd type="none" w="med" len="med"/>
+                      <a:tailEnd type="none" w="med" len="med"/>
+                    </a:lnB>
+                    <a:solidFill>
+                      <a:srgbClr val="FFFFFF"/>
+                    </a:solidFill>
+                  </a:tcPr>
+                </a:tc>
+                <a:tc>
+                  <a:txBody>
+                    <a:bodyPr/>
+                    <a:lstStyle/>
+                    <a:p>
+                      <a:pPr indent="0" marL="0">
+                        <a:buNone/>
+                      </a:pPr>
+                      <a:r>
+                        <a:rPr lang="en-US" sz="1200" dirty="0">
+                          <a:solidFill>
+                            <a:srgbClr val="5B6472"/>
+                          </a:solidFill>
+                          <a:latin typeface="Noto Sans" pitchFamily="34" charset="0"/>
+                          <a:ea typeface="Noto Sans" pitchFamily="34" charset="-122"/>
+                          <a:cs typeface="Noto Sans" pitchFamily="34" charset="-120"/>
+                        </a:rPr>
+                        <a:t>Khó quản lý khi con học nhiều môn/nhiều trung tâm</a:t>
+                      </a:r>
+                      <a:endParaRPr lang="en-US" sz="1200" dirty="0">
+                        <a:latin typeface="Noto Sans" charset="0"/>
+                        <a:ea typeface="Noto Sans" charset="0"/>
+                        <a:cs typeface="Noto Sans" charset="0"/>
+                      </a:endParaRPr>
+                    </a:p>
+                  </a:txBody>
+                  <a:tcPr marL="101600" marR="101600" marT="63500" marB="63500" anchor="t">
+                    <a:lnL w="9525" cap="flat" cmpd="sng" algn="ctr">
+                      <a:solidFill>
+                        <a:srgbClr val="DCE7EA"/>
+                      </a:solidFill>
+                      <a:prstDash val="solid"/>
+                      <a:round/>
+                      <a:headEnd type="none" w="med" len="med"/>
+                      <a:tailEnd type="none" w="med" len="med"/>
+                    </a:lnL>
+                    <a:lnR w="9525" cap="flat" cmpd="sng" algn="ctr">
+                      <a:solidFill>
+                        <a:srgbClr val="DCE7EA"/>
+                      </a:solidFill>
+                      <a:prstDash val="solid"/>
+                      <a:round/>
+                      <a:headEnd type="none" w="med" len="med"/>
+                      <a:tailEnd type="none" w="med" len="med"/>
+                    </a:lnR>
+                    <a:lnT w="9525" cap="flat" cmpd="sng" algn="ctr">
+                      <a:solidFill>
+                        <a:srgbClr val="DCE7EA"/>
+                      </a:solidFill>
+                      <a:prstDash val="solid"/>
+                      <a:round/>
+                      <a:headEnd type="none" w="med" len="med"/>
+                      <a:tailEnd type="none" w="med" len="med"/>
+                    </a:lnT>
+                    <a:lnB w="9525" cap="flat" cmpd="sng" algn="ctr">
+                      <a:solidFill>
+                        <a:srgbClr val="DCE7EA"/>
+                      </a:solidFill>
+                      <a:prstDash val="solid"/>
+                      <a:round/>
+                      <a:headEnd type="none" w="med" len="med"/>
+                      <a:tailEnd type="none" w="med" len="med"/>
+                    </a:lnB>
+                    <a:solidFill>
+                      <a:srgbClr val="FFFFFF"/>
+                    </a:solidFill>
+                  </a:tcPr>
+                </a:tc>
+              </a:tr>
+              <a:tr h="584650">
+                <a:tc rowSpan="2">
+                  <a:txBody>
+                    <a:bodyPr/>
+                    <a:lstStyle/>
+                    <a:p>
+                      <a:pPr indent="0" marL="0">
+                        <a:buNone/>
+                      </a:pPr>
+                      <a:r>
+                        <a:rPr lang="en-US" sz="1200" b="1" dirty="0">
+                          <a:solidFill>
+                            <a:srgbClr val="004671"/>
+                          </a:solidFill>
+                          <a:latin typeface="Noto Sans" pitchFamily="34" charset="0"/>
+                          <a:ea typeface="Noto Sans" pitchFamily="34" charset="-122"/>
+                          <a:cs typeface="Noto Sans" pitchFamily="34" charset="-120"/>
+                        </a:rPr>
+                        <a:t>Emotional</a:t>
+                      </a:r>
+                      <a:endParaRPr lang="en-US" sz="1200" dirty="0">
+                        <a:latin typeface="Noto Sans" charset="0"/>
+                        <a:ea typeface="Noto Sans" charset="0"/>
+                        <a:cs typeface="Noto Sans" charset="0"/>
+                      </a:endParaRPr>
+                    </a:p>
+                  </a:txBody>
+                  <a:tcPr marL="101600" marR="101600" marT="63500" marB="63500" anchor="t">
+                    <a:lnL w="9525" cap="flat" cmpd="sng" algn="ctr">
+                      <a:solidFill>
+                        <a:srgbClr val="DCE7EA"/>
+                      </a:solidFill>
+                      <a:prstDash val="solid"/>
+                      <a:round/>
+                      <a:headEnd type="none" w="med" len="med"/>
+                      <a:tailEnd type="none" w="med" len="med"/>
+                    </a:lnL>
+                    <a:lnR w="9525" cap="flat" cmpd="sng" algn="ctr">
+                      <a:solidFill>
+                        <a:srgbClr val="DCE7EA"/>
+                      </a:solidFill>
+                      <a:prstDash val="solid"/>
+                      <a:round/>
+                      <a:headEnd type="none" w="med" len="med"/>
+                      <a:tailEnd type="none" w="med" len="med"/>
+                    </a:lnR>
+                    <a:lnT w="9525" cap="flat" cmpd="sng" algn="ctr">
+                      <a:solidFill>
+                        <a:srgbClr val="DCE7EA"/>
+                      </a:solidFill>
+                      <a:prstDash val="solid"/>
+                      <a:round/>
+                      <a:headEnd type="none" w="med" len="med"/>
+                      <a:tailEnd type="none" w="med" len="med"/>
+                    </a:lnT>
+                    <a:lnB w="9525" cap="flat" cmpd="sng" algn="ctr">
+                      <a:solidFill>
+                        <a:srgbClr val="DCE7EA"/>
+                      </a:solidFill>
+                      <a:prstDash val="solid"/>
+                      <a:round/>
+                      <a:headEnd type="none" w="med" len="med"/>
+                      <a:tailEnd type="none" w="med" len="med"/>
+                    </a:lnB>
+                    <a:solidFill>
+                      <a:srgbClr val="F2FAFB"/>
+                    </a:solidFill>
+                  </a:tcPr>
+                </a:tc>
+                <a:tc>
+                  <a:txBody>
+                    <a:bodyPr/>
+                    <a:lstStyle/>
+                    <a:p>
+                      <a:pPr indent="0" marL="0">
+                        <a:buNone/>
+                      </a:pPr>
+                      <a:r>
+                        <a:rPr lang="en-US" sz="1200" dirty="0">
+                          <a:solidFill>
+                            <a:srgbClr val="22333F"/>
+                          </a:solidFill>
+                          <a:latin typeface="Noto Sans" pitchFamily="34" charset="0"/>
+                          <a:ea typeface="Noto Sans" pitchFamily="34" charset="-122"/>
+                          <a:cs typeface="Noto Sans" pitchFamily="34" charset="-120"/>
+                        </a:rPr>
+                        <a:t>Yên tâm con tiến bộ thực chất mà không cần tự kèm</a:t>
+                      </a:r>
+                      <a:endParaRPr lang="en-US" sz="1200" dirty="0">
+                        <a:latin typeface="Noto Sans" charset="0"/>
+                        <a:ea typeface="Noto Sans" charset="0"/>
+                        <a:cs typeface="Noto Sans" charset="0"/>
+                      </a:endParaRPr>
+                    </a:p>
+                  </a:txBody>
+                  <a:tcPr marL="101600" marR="101600" marT="63500" marB="63500" anchor="t">
+                    <a:lnL w="9525" cap="flat" cmpd="sng" algn="ctr">
+                      <a:solidFill>
+                        <a:srgbClr val="DCE7EA"/>
+                      </a:solidFill>
+                      <a:prstDash val="solid"/>
+                      <a:round/>
+                      <a:headEnd type="none" w="med" len="med"/>
+                      <a:tailEnd type="none" w="med" len="med"/>
+                    </a:lnL>
+                    <a:lnR w="9525" cap="flat" cmpd="sng" algn="ctr">
+                      <a:solidFill>
+                        <a:srgbClr val="DCE7EA"/>
+                      </a:solidFill>
+                      <a:prstDash val="solid"/>
+                      <a:round/>
+                      <a:headEnd type="none" w="med" len="med"/>
+                      <a:tailEnd type="none" w="med" len="med"/>
+                    </a:lnR>
+                    <a:lnT w="9525" cap="flat" cmpd="sng" algn="ctr">
+                      <a:solidFill>
+                        <a:srgbClr val="DCE7EA"/>
+                      </a:solidFill>
+                      <a:prstDash val="solid"/>
+                      <a:round/>
+                      <a:headEnd type="none" w="med" len="med"/>
+                      <a:tailEnd type="none" w="med" len="med"/>
+                    </a:lnT>
+                    <a:lnB w="9525" cap="flat" cmpd="sng" algn="ctr">
+                      <a:solidFill>
+                        <a:srgbClr val="DCE7EA"/>
+                      </a:solidFill>
+                      <a:prstDash val="solid"/>
+                      <a:round/>
+                      <a:headEnd type="none" w="med" len="med"/>
+                      <a:tailEnd type="none" w="med" len="med"/>
+                    </a:lnB>
+                    <a:solidFill>
+                      <a:srgbClr val="F2FAFB"/>
+                    </a:solidFill>
+                  </a:tcPr>
+                </a:tc>
+                <a:tc>
+                  <a:txBody>
+                    <a:bodyPr/>
+                    <a:lstStyle/>
+                    <a:p>
+                      <a:pPr indent="0" marL="0">
+                        <a:buNone/>
+                      </a:pPr>
+                      <a:r>
+                        <a:rPr lang="en-US" sz="1200" dirty="0">
+                          <a:solidFill>
+                            <a:srgbClr val="5B6472"/>
+                          </a:solidFill>
+                          <a:latin typeface="Noto Sans" pitchFamily="34" charset="0"/>
+                          <a:ea typeface="Noto Sans" pitchFamily="34" charset="-122"/>
+                          <a:cs typeface="Noto Sans" pitchFamily="34" charset="-120"/>
+                        </a:rPr>
+                        <a:t>Con học TA chưa tốt; phụ huynh phải nhắc nhở/đốc thúc con</a:t>
+                      </a:r>
+                      <a:endParaRPr lang="en-US" sz="1200" dirty="0">
+                        <a:latin typeface="Noto Sans" charset="0"/>
+                        <a:ea typeface="Noto Sans" charset="0"/>
+                        <a:cs typeface="Noto Sans" charset="0"/>
+                      </a:endParaRPr>
+                    </a:p>
+                  </a:txBody>
+                  <a:tcPr marL="101600" marR="101600" marT="63500" marB="63500" anchor="t">
+                    <a:lnL w="9525" cap="flat" cmpd="sng" algn="ctr">
+                      <a:solidFill>
+                        <a:srgbClr val="DCE7EA"/>
+                      </a:solidFill>
+                      <a:prstDash val="solid"/>
+                      <a:round/>
+                      <a:headEnd type="none" w="med" len="med"/>
+                      <a:tailEnd type="none" w="med" len="med"/>
+                    </a:lnL>
+                    <a:lnR w="9525" cap="flat" cmpd="sng" algn="ctr">
+                      <a:solidFill>
+                        <a:srgbClr val="DCE7EA"/>
+                      </a:solidFill>
+                      <a:prstDash val="solid"/>
+                      <a:round/>
+                      <a:headEnd type="none" w="med" len="med"/>
+                      <a:tailEnd type="none" w="med" len="med"/>
+                    </a:lnR>
+                    <a:lnT w="9525" cap="flat" cmpd="sng" algn="ctr">
+                      <a:solidFill>
+                        <a:srgbClr val="DCE7EA"/>
+                      </a:solidFill>
+                      <a:prstDash val="solid"/>
+                      <a:round/>
+                      <a:headEnd type="none" w="med" len="med"/>
+                      <a:tailEnd type="none" w="med" len="med"/>
+                    </a:lnT>
+                    <a:lnB w="9525" cap="flat" cmpd="sng" algn="ctr">
+                      <a:solidFill>
+                        <a:srgbClr val="DCE7EA"/>
+                      </a:solidFill>
+                      <a:prstDash val="solid"/>
+                      <a:round/>
+                      <a:headEnd type="none" w="med" len="med"/>
+                      <a:tailEnd type="none" w="med" len="med"/>
+                    </a:lnB>
+                    <a:solidFill>
+                      <a:srgbClr val="F2FAFB"/>
+                    </a:solidFill>
+                  </a:tcPr>
+                </a:tc>
+              </a:tr>
+              <a:tr h="584650">
+                <a:tc vMerge="1">
+                  <a:txBody>
+                    <a:bodyPr/>
+                    <a:lstStyle/>
+                    <a:p>
+                      <a:pPr indent="0" marL="0">
+                        <a:buNone/>
+                      </a:pPr>
+                      <a:endParaRPr lang="en-US" sz="1200" dirty="0">
+                        <a:latin typeface="Noto Sans" charset="0"/>
+                        <a:ea typeface="Noto Sans" charset="0"/>
+                        <a:cs typeface="Noto Sans" charset="0"/>
+                      </a:endParaRPr>
+                    </a:p>
+                  </a:txBody>
+                  <a:tcPr marL="101600" marR="101600" marT="63500" marB="63500" anchor="t">
+                    <a:lnL w="9525" cap="flat" cmpd="sng" algn="ctr">
+                      <a:solidFill>
+                        <a:srgbClr val="DCE7EA"/>
+                      </a:solidFill>
+                      <a:prstDash val="solid"/>
+                      <a:round/>
+                      <a:headEnd type="none" w="med" len="med"/>
+                      <a:tailEnd type="none" w="med" len="med"/>
+                    </a:lnL>
+                    <a:lnR w="9525" cap="flat" cmpd="sng" algn="ctr">
+                      <a:solidFill>
+                        <a:srgbClr val="DCE7EA"/>
+                      </a:solidFill>
+                      <a:prstDash val="solid"/>
+                      <a:round/>
+                      <a:headEnd type="none" w="med" len="med"/>
+                      <a:tailEnd type="none" w="med" len="med"/>
+                    </a:lnR>
+                    <a:lnT w="9525" cap="flat" cmpd="sng" algn="ctr">
+                      <a:solidFill>
+                        <a:srgbClr val="DCE7EA"/>
+                      </a:solidFill>
+                      <a:prstDash val="solid"/>
+                      <a:round/>
+                      <a:headEnd type="none" w="med" len="med"/>
+                      <a:tailEnd type="none" w="med" len="med"/>
+                    </a:lnT>
+                    <a:lnB w="9525" cap="flat" cmpd="sng" algn="ctr">
+                      <a:solidFill>
+                        <a:srgbClr val="DCE7EA"/>
+                      </a:solidFill>
+                      <a:prstDash val="solid"/>
+                      <a:round/>
+                      <a:headEnd type="none" w="med" len="med"/>
+                      <a:tailEnd type="none" w="med" len="med"/>
+                    </a:lnB>
+                    <a:solidFill>
+                      <a:srgbClr val="F2FAFB"/>
+                    </a:solidFill>
+                  </a:tcPr>
+                </a:tc>
+                <a:tc>
+                  <a:txBody>
+                    <a:bodyPr/>
+                    <a:lstStyle/>
+                    <a:p>
+                      <a:pPr indent="0" marL="0">
+                        <a:buNone/>
+                      </a:pPr>
+                      <a:r>
+                        <a:rPr lang="en-US" sz="1200" dirty="0">
+                          <a:solidFill>
+                            <a:srgbClr val="22333F"/>
+                          </a:solidFill>
+                          <a:latin typeface="Noto Sans" pitchFamily="34" charset="0"/>
+                          <a:ea typeface="Noto Sans" pitchFamily="34" charset="-122"/>
+                          <a:cs typeface="Noto Sans" pitchFamily="34" charset="-120"/>
+                        </a:rPr>
+                        <a:t>Tin mình đã chọn đúng, đầu tư đủ, không thua kém gia đình khác</a:t>
+                      </a:r>
+                      <a:endParaRPr lang="en-US" sz="1200" dirty="0">
+                        <a:latin typeface="Noto Sans" charset="0"/>
+                        <a:ea typeface="Noto Sans" charset="0"/>
+                        <a:cs typeface="Noto Sans" charset="0"/>
+                      </a:endParaRPr>
+                    </a:p>
+                  </a:txBody>
+                  <a:tcPr marL="101600" marR="101600" marT="63500" marB="63500" anchor="t">
+                    <a:lnL w="9525" cap="flat" cmpd="sng" algn="ctr">
+                      <a:solidFill>
+                        <a:srgbClr val="DCE7EA"/>
+                      </a:solidFill>
+                      <a:prstDash val="solid"/>
+                      <a:round/>
+                      <a:headEnd type="none" w="med" len="med"/>
+                      <a:tailEnd type="none" w="med" len="med"/>
+                    </a:lnL>
+                    <a:lnR w="9525" cap="flat" cmpd="sng" algn="ctr">
+                      <a:solidFill>
+                        <a:srgbClr val="DCE7EA"/>
+                      </a:solidFill>
+                      <a:prstDash val="solid"/>
+                      <a:round/>
+                      <a:headEnd type="none" w="med" len="med"/>
+                      <a:tailEnd type="none" w="med" len="med"/>
+                    </a:lnR>
+                    <a:lnT w="9525" cap="flat" cmpd="sng" algn="ctr">
+                      <a:solidFill>
+                        <a:srgbClr val="DCE7EA"/>
+                      </a:solidFill>
+                      <a:prstDash val="solid"/>
+                      <a:round/>
+                      <a:headEnd type="none" w="med" len="med"/>
+                      <a:tailEnd type="none" w="med" len="med"/>
+                    </a:lnT>
+                    <a:lnB w="9525" cap="flat" cmpd="sng" algn="ctr">
+                      <a:solidFill>
+                        <a:srgbClr val="DCE7EA"/>
+                      </a:solidFill>
+                      <a:prstDash val="solid"/>
+                      <a:round/>
+                      <a:headEnd type="none" w="med" len="med"/>
+                      <a:tailEnd type="none" w="med" len="med"/>
+                    </a:lnB>
+                    <a:solidFill>
+                      <a:srgbClr val="FFFFFF"/>
+                    </a:solidFill>
+                  </a:tcPr>
+                </a:tc>
+                <a:tc>
+                  <a:txBody>
+                    <a:bodyPr/>
+                    <a:lstStyle/>
+                    <a:p>
+                      <a:pPr indent="0" marL="0">
+                        <a:buNone/>
+                      </a:pPr>
+                      <a:r>
+                        <a:rPr lang="en-US" sz="1200" dirty="0">
+                          <a:solidFill>
+                            <a:srgbClr val="5B6472"/>
+                          </a:solidFill>
+                          <a:latin typeface="Noto Sans" pitchFamily="34" charset="0"/>
+                          <a:ea typeface="Noto Sans" pitchFamily="34" charset="-122"/>
+                          <a:cs typeface="Noto Sans" pitchFamily="34" charset="-120"/>
+                        </a:rPr>
+                        <a:t>Học online "không ai quản" nên không yên tâm; sợ mất tiền mà không hiệu quả</a:t>
+                      </a:r>
+                      <a:endParaRPr lang="en-US" sz="1200" dirty="0">
+                        <a:latin typeface="Noto Sans" charset="0"/>
+                        <a:ea typeface="Noto Sans" charset="0"/>
+                        <a:cs typeface="Noto Sans" charset="0"/>
+                      </a:endParaRPr>
+                    </a:p>
+                  </a:txBody>
+                  <a:tcPr marL="101600" marR="101600" marT="63500" marB="63500" anchor="t">
+                    <a:lnL w="9525" cap="flat" cmpd="sng" algn="ctr">
+                      <a:solidFill>
+                        <a:srgbClr val="DCE7EA"/>
+                      </a:solidFill>
+                      <a:prstDash val="solid"/>
+                      <a:round/>
+                      <a:headEnd type="none" w="med" len="med"/>
+                      <a:tailEnd type="none" w="med" len="med"/>
+                    </a:lnL>
+                    <a:lnR w="9525" cap="flat" cmpd="sng" algn="ctr">
+                      <a:solidFill>
+                        <a:srgbClr val="DCE7EA"/>
+                      </a:solidFill>
+                      <a:prstDash val="solid"/>
+                      <a:round/>
+                      <a:headEnd type="none" w="med" len="med"/>
+                      <a:tailEnd type="none" w="med" len="med"/>
+                    </a:lnR>
+                    <a:lnT w="9525" cap="flat" cmpd="sng" algn="ctr">
+                      <a:solidFill>
+                        <a:srgbClr val="DCE7EA"/>
+                      </a:solidFill>
+                      <a:prstDash val="solid"/>
+                      <a:round/>
+                      <a:headEnd type="none" w="med" len="med"/>
+                      <a:tailEnd type="none" w="med" len="med"/>
+                    </a:lnT>
+                    <a:lnB w="9525" cap="flat" cmpd="sng" algn="ctr">
+                      <a:solidFill>
+                        <a:srgbClr val="DCE7EA"/>
+                      </a:solidFill>
+                      <a:prstDash val="solid"/>
+                      <a:round/>
+                      <a:headEnd type="none" w="med" len="med"/>
+                      <a:tailEnd type="none" w="med" len="med"/>
+                    </a:lnB>
+                    <a:solidFill>
+                      <a:srgbClr val="FFFFFF"/>
+                    </a:solidFill>
+                  </a:tcPr>
+                </a:tc>
+              </a:tr>
+              <a:tr h="584650">
+                <a:tc rowSpan="1">
+                  <a:txBody>
+                    <a:bodyPr/>
+                    <a:lstStyle/>
+                    <a:p>
+                      <a:pPr indent="0" marL="0">
+                        <a:buNone/>
+                      </a:pPr>
+                      <a:r>
+                        <a:rPr lang="en-US" sz="1200" b="1" dirty="0">
+                          <a:solidFill>
+                            <a:srgbClr val="004671"/>
+                          </a:solidFill>
+                          <a:latin typeface="Noto Sans" pitchFamily="34" charset="0"/>
+                          <a:ea typeface="Noto Sans" pitchFamily="34" charset="-122"/>
+                          <a:cs typeface="Noto Sans" pitchFamily="34" charset="-120"/>
+                        </a:rPr>
+                        <a:t>Social</a:t>
+                      </a:r>
+                      <a:endParaRPr lang="en-US" sz="1200" dirty="0">
+                        <a:latin typeface="Noto Sans" charset="0"/>
+                        <a:ea typeface="Noto Sans" charset="0"/>
+                        <a:cs typeface="Noto Sans" charset="0"/>
+                      </a:endParaRPr>
+                    </a:p>
+                  </a:txBody>
+                  <a:tcPr marL="101600" marR="101600" marT="63500" marB="63500" anchor="t">
+                    <a:lnL w="9525" cap="flat" cmpd="sng" algn="ctr">
+                      <a:solidFill>
+                        <a:srgbClr val="DCE7EA"/>
+                      </a:solidFill>
+                      <a:prstDash val="solid"/>
+                      <a:round/>
+                      <a:headEnd type="none" w="med" len="med"/>
+                      <a:tailEnd type="none" w="med" len="med"/>
+                    </a:lnL>
+                    <a:lnR w="9525" cap="flat" cmpd="sng" algn="ctr">
+                      <a:solidFill>
+                        <a:srgbClr val="DCE7EA"/>
+                      </a:solidFill>
+                      <a:prstDash val="solid"/>
+                      <a:round/>
+                      <a:headEnd type="none" w="med" len="med"/>
+                      <a:tailEnd type="none" w="med" len="med"/>
+                    </a:lnR>
+                    <a:lnT w="9525" cap="flat" cmpd="sng" algn="ctr">
+                      <a:solidFill>
+                        <a:srgbClr val="DCE7EA"/>
+                      </a:solidFill>
+                      <a:prstDash val="solid"/>
+                      <a:round/>
+                      <a:headEnd type="none" w="med" len="med"/>
+                      <a:tailEnd type="none" w="med" len="med"/>
+                    </a:lnT>
+                    <a:lnB w="9525" cap="flat" cmpd="sng" algn="ctr">
+                      <a:solidFill>
+                        <a:srgbClr val="DCE7EA"/>
+                      </a:solidFill>
+                      <a:prstDash val="solid"/>
+                      <a:round/>
+                      <a:headEnd type="none" w="med" len="med"/>
+                      <a:tailEnd type="none" w="med" len="med"/>
+                    </a:lnB>
+                    <a:solidFill>
+                      <a:srgbClr val="FFFFFF"/>
+                    </a:solidFill>
+                  </a:tcPr>
+                </a:tc>
+                <a:tc>
+                  <a:txBody>
+                    <a:bodyPr/>
+                    <a:lstStyle/>
+                    <a:p>
+                      <a:pPr indent="0" marL="0">
+                        <a:buNone/>
+                      </a:pPr>
+                      <a:r>
+                        <a:rPr lang="en-US" sz="1200" dirty="0">
+                          <a:solidFill>
+                            <a:srgbClr val="22333F"/>
+                          </a:solidFill>
+                          <a:latin typeface="Noto Sans" pitchFamily="34" charset="0"/>
+                          <a:ea typeface="Noto Sans" pitchFamily="34" charset="-122"/>
+                          <a:cs typeface="Noto Sans" pitchFamily="34" charset="-120"/>
+                        </a:rPr>
+                        <a:t>Hãnh diện, tự hào với người thân, bạn bè khi con đạt thành tích cao, muốn chia sẻ</a:t>
+                      </a:r>
+                      <a:endParaRPr lang="en-US" sz="1200" dirty="0">
+                        <a:latin typeface="Noto Sans" charset="0"/>
+                        <a:ea typeface="Noto Sans" charset="0"/>
+                        <a:cs typeface="Noto Sans" charset="0"/>
+                      </a:endParaRPr>
+                    </a:p>
+                  </a:txBody>
+                  <a:tcPr marL="101600" marR="101600" marT="63500" marB="63500" anchor="t">
+                    <a:lnL w="9525" cap="flat" cmpd="sng" algn="ctr">
+                      <a:solidFill>
+                        <a:srgbClr val="DCE7EA"/>
+                      </a:solidFill>
+                      <a:prstDash val="solid"/>
+                      <a:round/>
+                      <a:headEnd type="none" w="med" len="med"/>
+                      <a:tailEnd type="none" w="med" len="med"/>
+                    </a:lnL>
+                    <a:lnR w="9525" cap="flat" cmpd="sng" algn="ctr">
+                      <a:solidFill>
+                        <a:srgbClr val="DCE7EA"/>
+                      </a:solidFill>
+                      <a:prstDash val="solid"/>
+                      <a:round/>
+                      <a:headEnd type="none" w="med" len="med"/>
+                      <a:tailEnd type="none" w="med" len="med"/>
+                    </a:lnR>
+                    <a:lnT w="9525" cap="flat" cmpd="sng" algn="ctr">
+                      <a:solidFill>
+                        <a:srgbClr val="DCE7EA"/>
+                      </a:solidFill>
+                      <a:prstDash val="solid"/>
+                      <a:round/>
+                      <a:headEnd type="none" w="med" len="med"/>
+                      <a:tailEnd type="none" w="med" len="med"/>
+                    </a:lnT>
+                    <a:lnB w="9525" cap="flat" cmpd="sng" algn="ctr">
+                      <a:solidFill>
+                        <a:srgbClr val="DCE7EA"/>
+                      </a:solidFill>
+                      <a:prstDash val="solid"/>
+                      <a:round/>
+                      <a:headEnd type="none" w="med" len="med"/>
+                      <a:tailEnd type="none" w="med" len="med"/>
+                    </a:lnB>
+                    <a:solidFill>
+                      <a:srgbClr val="F2FAFB"/>
+                    </a:solidFill>
+                  </a:tcPr>
+                </a:tc>
+                <a:tc>
+                  <a:txBody>
+                    <a:bodyPr/>
+                    <a:lstStyle/>
+                    <a:p>
+                      <a:pPr indent="0" marL="0">
+                        <a:buNone/>
+                      </a:pPr>
+                      <a:r>
+                        <a:rPr lang="en-US" sz="1200" dirty="0">
+                          <a:solidFill>
+                            <a:srgbClr val="5B6472"/>
+                          </a:solidFill>
+                          <a:latin typeface="Noto Sans" pitchFamily="34" charset="0"/>
+                          <a:ea typeface="Noto Sans" pitchFamily="34" charset="-122"/>
+                          <a:cs typeface="Noto Sans" pitchFamily="34" charset="-120"/>
+                        </a:rPr>
+                        <a:t>Lo con thua thiệt, thua kém "con nhà người ta"</a:t>
+                      </a:r>
+                      <a:endParaRPr lang="en-US" sz="1200" dirty="0">
+                        <a:latin typeface="Noto Sans" charset="0"/>
+                        <a:ea typeface="Noto Sans" charset="0"/>
+                        <a:cs typeface="Noto Sans" charset="0"/>
+                      </a:endParaRPr>
+                    </a:p>
+                  </a:txBody>
+                  <a:tcPr marL="101600" marR="101600" marT="63500" marB="63500" anchor="t">
+                    <a:lnL w="9525" cap="flat" cmpd="sng" algn="ctr">
+                      <a:solidFill>
+                        <a:srgbClr val="DCE7EA"/>
+                      </a:solidFill>
+                      <a:prstDash val="solid"/>
+                      <a:round/>
+                      <a:headEnd type="none" w="med" len="med"/>
+                      <a:tailEnd type="none" w="med" len="med"/>
+                    </a:lnL>
+                    <a:lnR w="9525" cap="flat" cmpd="sng" algn="ctr">
+                      <a:solidFill>
+                        <a:srgbClr val="DCE7EA"/>
+                      </a:solidFill>
+                      <a:prstDash val="solid"/>
+                      <a:round/>
+                      <a:headEnd type="none" w="med" len="med"/>
+                      <a:tailEnd type="none" w="med" len="med"/>
+                    </a:lnR>
+                    <a:lnT w="9525" cap="flat" cmpd="sng" algn="ctr">
+                      <a:solidFill>
+                        <a:srgbClr val="DCE7EA"/>
+                      </a:solidFill>
+                      <a:prstDash val="solid"/>
+                      <a:round/>
+                      <a:headEnd type="none" w="med" len="med"/>
+                      <a:tailEnd type="none" w="med" len="med"/>
+                    </a:lnT>
+                    <a:lnB w="9525" cap="flat" cmpd="sng" algn="ctr">
+                      <a:solidFill>
+                        <a:srgbClr val="DCE7EA"/>
+                      </a:solidFill>
+                      <a:prstDash val="solid"/>
+                      <a:round/>
+                      <a:headEnd type="none" w="med" len="med"/>
+                      <a:tailEnd type="none" w="med" len="med"/>
+                    </a:lnB>
+                    <a:solidFill>
+                      <a:srgbClr val="F2FAFB"/>
+                    </a:solidFill>
+                  </a:tcPr>
+                </a:tc>
+              </a:tr>
+            </a:tbl>
+          </a:graphicData>
+        </a:graphic>
+      </p:graphicFrame>
+      <p:pic>
+        <p:nvPicPr>
+          <p:cNvPr id="7" name="Image 1"/>
+          <p:cNvPicPr>
+            <a:picLocks noChangeAspect="1"/>
+          </p:cNvPicPr>
+          <p:nvPr/>
+        </p:nvPicPr>
+        <p:blipFill>
+          <a:blip r:embed="rId2"/>
+          <a:stretch>
+            <a:fillRect/>
+          </a:stretch>
+        </p:blipFill>
+        <p:spPr>
+          <a:xfrm>
+            <a:off x="502920" y="6473952"/>
+            <a:ext cx="237744" cy="237744"/>
+          </a:xfrm>
+          <a:prstGeom prst="rect">
+            <a:avLst/>
+          </a:prstGeom>
+        </p:spPr>
+      </p:pic>
+      <p:sp>
+        <p:nvSpPr>
+          <p:cNvPr id="8" name="Text 3"/>
+          <p:cNvSpPr/>
+          <p:nvPr/>
+        </p:nvSpPr>
+        <p:spPr>
+          <a:xfrm>
+            <a:off x="795528" y="6473952"/>
+            <a:ext cx="3657600" cy="256032"/>
+          </a:xfrm>
+          <a:prstGeom prst="rect">
+            <a:avLst/>
+          </a:prstGeom>
+          <a:noFill/>
+          <a:ln/>
+        </p:spPr>
+        <p:txBody>
+          <a:bodyPr wrap="square" rtlCol="0" anchor="ctr"/>
+          <a:lstStyle/>
+          <a:p>
+            <a:pPr indent="0" marL="0">
+              <a:buNone/>
+            </a:pPr>
+            <a:r>
+              <a:rPr lang="en-US" sz="800" spc="100" kern="0" dirty="0">
+                <a:solidFill>
+                  <a:srgbClr val="5B6472"/>
+                </a:solidFill>
+                <a:latin typeface="Noto Sans" pitchFamily="34" charset="0"/>
+                <a:ea typeface="Noto Sans" pitchFamily="34" charset="-122"/>
+                <a:cs typeface="Noto Sans" pitchFamily="34" charset="-120"/>
+              </a:rPr>
+              <a:t>EDUPIA  AI CLASS NEW</a:t>
+            </a:r>
+            <a:endParaRPr lang="en-US" sz="800" dirty="0"/>
+          </a:p>
+        </p:txBody>
+      </p:sp>
+      <p:sp>
+        <p:nvSpPr>
+          <p:cNvPr id="9" name="Text 4"/>
+          <p:cNvSpPr/>
+          <p:nvPr/>
+        </p:nvSpPr>
+        <p:spPr>
+          <a:xfrm>
+            <a:off x="10789920" y="6473952"/>
+            <a:ext cx="914400" cy="256032"/>
+          </a:xfrm>
+          <a:prstGeom prst="rect">
+            <a:avLst/>
+          </a:prstGeom>
+          <a:noFill/>
+          <a:ln/>
+        </p:spPr>
+        <p:txBody>
+          <a:bodyPr wrap="square" rtlCol="0" anchor="ctr"/>
+          <a:lstStyle/>
+          <a:p>
+            <a:pPr algn="r" indent="0" marL="0">
+              <a:buNone/>
+            </a:pPr>
+            <a:r>
+              <a:rPr lang="en-US" sz="850" dirty="0">
+                <a:solidFill>
+                  <a:srgbClr val="5B6472"/>
+                </a:solidFill>
+                <a:latin typeface="Noto Sans" pitchFamily="34" charset="0"/>
+                <a:ea typeface="Noto Sans" pitchFamily="34" charset="-122"/>
+                <a:cs typeface="Noto Sans" pitchFamily="34" charset="-120"/>
+              </a:rPr>
+              <a:t>4 / 12</a:t>
             </a:r>
             <a:endParaRPr lang="en-US" sz="850" dirty="0"/>
           </a:p>
@@ -7012,7 +10251,7 @@
         <p:spPr>
           <a:xfrm>
             <a:off x="786384" y="2761488"/>
-            <a:ext cx="0" cy="393192"/>
+            <a:ext cx="0" cy="153162"/>
           </a:xfrm>
           <a:prstGeom prst="line">
             <a:avLst/>
@@ -7034,7 +10273,128 @@
         </p:nvSpPr>
         <p:spPr>
           <a:xfrm>
-            <a:off x="502920" y="3154680"/>
+            <a:off x="502920" y="3634740"/>
+            <a:ext cx="566928" cy="566928"/>
+          </a:xfrm>
+          <a:prstGeom prst="ellipse">
+            <a:avLst/>
+          </a:prstGeom>
+          <a:solidFill>
+            <a:srgbClr val="004671"/>
+          </a:solidFill>
+          <a:ln/>
+        </p:spPr>
+      </p:sp>
+      <p:sp>
+        <p:nvSpPr>
+          <p:cNvPr id="11" name="Text 8"/>
+          <p:cNvSpPr/>
+          <p:nvPr/>
+        </p:nvSpPr>
+        <p:spPr>
+          <a:xfrm>
+            <a:off x="502920" y="3634740"/>
+            <a:ext cx="566928" cy="566928"/>
+          </a:xfrm>
+          <a:prstGeom prst="rect">
+            <a:avLst/>
+          </a:prstGeom>
+          <a:noFill/>
+          <a:ln/>
+        </p:spPr>
+        <p:txBody>
+          <a:bodyPr wrap="square" rtlCol="0" anchor="ctr"/>
+          <a:lstStyle/>
+          <a:p>
+            <a:pPr algn="ctr" indent="0" marL="0">
+              <a:buNone/>
+            </a:pPr>
+            <a:r>
+              <a:rPr lang="en-US" sz="2000" b="1" dirty="0">
+                <a:solidFill>
+                  <a:srgbClr val="FFFFFF"/>
+                </a:solidFill>
+                <a:latin typeface="Noto Sans" pitchFamily="34" charset="0"/>
+                <a:ea typeface="Noto Sans" pitchFamily="34" charset="-122"/>
+                <a:cs typeface="Noto Sans" pitchFamily="34" charset="-120"/>
+              </a:rPr>
+              <a:t>3</a:t>
+            </a:r>
+            <a:endParaRPr lang="en-US" sz="2000" dirty="0"/>
+          </a:p>
+        </p:txBody>
+      </p:sp>
+      <p:sp>
+        <p:nvSpPr>
+          <p:cNvPr id="12" name="Text 9"/>
+          <p:cNvSpPr/>
+          <p:nvPr/>
+        </p:nvSpPr>
+        <p:spPr>
+          <a:xfrm>
+            <a:off x="1371600" y="3662172"/>
+            <a:ext cx="8229600" cy="512064"/>
+          </a:xfrm>
+          <a:prstGeom prst="rect">
+            <a:avLst/>
+          </a:prstGeom>
+          <a:noFill/>
+          <a:ln/>
+        </p:spPr>
+        <p:txBody>
+          <a:bodyPr wrap="square" rtlCol="0" anchor="ctr"/>
+          <a:lstStyle/>
+          <a:p>
+            <a:pPr indent="0" marL="0">
+              <a:buNone/>
+            </a:pPr>
+            <a:r>
+              <a:rPr lang="en-US" sz="1800" b="1" dirty="0">
+                <a:solidFill>
+                  <a:srgbClr val="22333F"/>
+                </a:solidFill>
+                <a:latin typeface="Noto Sans" pitchFamily="34" charset="0"/>
+                <a:ea typeface="Noto Sans" pitchFamily="34" charset="-122"/>
+                <a:cs typeface="Noto Sans" pitchFamily="34" charset="-120"/>
+              </a:rPr>
+              <a:t>Định hướng concept sản phẩm</a:t>
+            </a:r>
+            <a:endParaRPr lang="en-US" sz="1800" dirty="0"/>
+          </a:p>
+        </p:txBody>
+      </p:sp>
+      <p:sp>
+        <p:nvSpPr>
+          <p:cNvPr id="13" name="Shape 10"/>
+          <p:cNvSpPr/>
+          <p:nvPr/>
+        </p:nvSpPr>
+        <p:spPr>
+          <a:xfrm>
+            <a:off x="786384" y="4201668"/>
+            <a:ext cx="0" cy="153162"/>
+          </a:xfrm>
+          <a:prstGeom prst="line">
+            <a:avLst/>
+          </a:prstGeom>
+          <a:noFill/>
+          <a:ln w="15875">
+            <a:solidFill>
+              <a:srgbClr val="DCE7EA"/>
+            </a:solidFill>
+            <a:prstDash val="dash"/>
+          </a:ln>
+        </p:spPr>
+      </p:sp>
+      <p:sp>
+        <p:nvSpPr>
+          <p:cNvPr id="14" name="Shape 11"/>
+          <p:cNvSpPr/>
+          <p:nvPr/>
+        </p:nvSpPr>
+        <p:spPr>
+          <a:xfrm>
+            <a:off x="502920" y="4354830"/>
             <a:ext cx="566928" cy="566928"/>
           </a:xfrm>
           <a:prstGeom prst="ellipse">
@@ -7048,13 +10408,334 @@
       </p:sp>
       <p:sp>
         <p:nvSpPr>
-          <p:cNvPr id="11" name="Text 8"/>
-          <p:cNvSpPr/>
-          <p:nvPr/>
-        </p:nvSpPr>
-        <p:spPr>
-          <a:xfrm>
-            <a:off x="502920" y="3154680"/>
+          <p:cNvPr id="15" name="Text 12"/>
+          <p:cNvSpPr/>
+          <p:nvPr/>
+        </p:nvSpPr>
+        <p:spPr>
+          <a:xfrm>
+            <a:off x="502920" y="4354830"/>
+            <a:ext cx="566928" cy="566928"/>
+          </a:xfrm>
+          <a:prstGeom prst="rect">
+            <a:avLst/>
+          </a:prstGeom>
+          <a:noFill/>
+          <a:ln/>
+        </p:spPr>
+        <p:txBody>
+          <a:bodyPr wrap="square" rtlCol="0" anchor="ctr"/>
+          <a:lstStyle/>
+          <a:p>
+            <a:pPr algn="ctr" indent="0" marL="0">
+              <a:buNone/>
+            </a:pPr>
+            <a:r>
+              <a:rPr lang="en-US" sz="2000" b="1" dirty="0">
+                <a:solidFill>
+                  <a:srgbClr val="FFFFFF"/>
+                </a:solidFill>
+                <a:latin typeface="Noto Sans" pitchFamily="34" charset="0"/>
+                <a:ea typeface="Noto Sans" pitchFamily="34" charset="-122"/>
+                <a:cs typeface="Noto Sans" pitchFamily="34" charset="-120"/>
+              </a:rPr>
+              <a:t>4</a:t>
+            </a:r>
+            <a:endParaRPr lang="en-US" sz="2000" dirty="0"/>
+          </a:p>
+        </p:txBody>
+      </p:sp>
+      <p:sp>
+        <p:nvSpPr>
+          <p:cNvPr id="16" name="Text 13"/>
+          <p:cNvSpPr/>
+          <p:nvPr/>
+        </p:nvSpPr>
+        <p:spPr>
+          <a:xfrm>
+            <a:off x="1371600" y="4382262"/>
+            <a:ext cx="8229600" cy="512064"/>
+          </a:xfrm>
+          <a:prstGeom prst="rect">
+            <a:avLst/>
+          </a:prstGeom>
+          <a:noFill/>
+          <a:ln/>
+        </p:spPr>
+        <p:txBody>
+          <a:bodyPr wrap="square" rtlCol="0" anchor="ctr"/>
+          <a:lstStyle/>
+          <a:p>
+            <a:pPr indent="0" marL="0">
+              <a:buNone/>
+            </a:pPr>
+            <a:r>
+              <a:rPr lang="en-US" sz="1800" b="1" dirty="0">
+                <a:solidFill>
+                  <a:srgbClr val="22333F"/>
+                </a:solidFill>
+                <a:latin typeface="Noto Sans" pitchFamily="34" charset="0"/>
+                <a:ea typeface="Noto Sans" pitchFamily="34" charset="-122"/>
+                <a:cs typeface="Noto Sans" pitchFamily="34" charset="-120"/>
+              </a:rPr>
+              <a:t>Kế hoạch triển khai</a:t>
+            </a:r>
+            <a:endParaRPr lang="en-US" sz="1800" dirty="0"/>
+          </a:p>
+        </p:txBody>
+      </p:sp>
+      <p:sp>
+        <p:nvSpPr>
+          <p:cNvPr id="17" name="Shape 14"/>
+          <p:cNvSpPr/>
+          <p:nvPr/>
+        </p:nvSpPr>
+        <p:spPr>
+          <a:xfrm>
+            <a:off x="786384" y="4921758"/>
+            <a:ext cx="0" cy="153162"/>
+          </a:xfrm>
+          <a:prstGeom prst="line">
+            <a:avLst/>
+          </a:prstGeom>
+          <a:noFill/>
+          <a:ln w="15875">
+            <a:solidFill>
+              <a:srgbClr val="DCE7EA"/>
+            </a:solidFill>
+            <a:prstDash val="dash"/>
+          </a:ln>
+        </p:spPr>
+      </p:sp>
+      <p:sp>
+        <p:nvSpPr>
+          <p:cNvPr id="18" name="Shape 15"/>
+          <p:cNvSpPr/>
+          <p:nvPr/>
+        </p:nvSpPr>
+        <p:spPr>
+          <a:xfrm>
+            <a:off x="502920" y="5074920"/>
+            <a:ext cx="566928" cy="566928"/>
+          </a:xfrm>
+          <a:prstGeom prst="ellipse">
+            <a:avLst/>
+          </a:prstGeom>
+          <a:solidFill>
+            <a:srgbClr val="004671"/>
+          </a:solidFill>
+          <a:ln/>
+        </p:spPr>
+      </p:sp>
+      <p:sp>
+        <p:nvSpPr>
+          <p:cNvPr id="19" name="Text 16"/>
+          <p:cNvSpPr/>
+          <p:nvPr/>
+        </p:nvSpPr>
+        <p:spPr>
+          <a:xfrm>
+            <a:off x="502920" y="5074920"/>
+            <a:ext cx="566928" cy="566928"/>
+          </a:xfrm>
+          <a:prstGeom prst="rect">
+            <a:avLst/>
+          </a:prstGeom>
+          <a:noFill/>
+          <a:ln/>
+        </p:spPr>
+        <p:txBody>
+          <a:bodyPr wrap="square" rtlCol="0" anchor="ctr"/>
+          <a:lstStyle/>
+          <a:p>
+            <a:pPr algn="ctr" indent="0" marL="0">
+              <a:buNone/>
+            </a:pPr>
+            <a:r>
+              <a:rPr lang="en-US" sz="2000" b="1" dirty="0">
+                <a:solidFill>
+                  <a:srgbClr val="FFFFFF"/>
+                </a:solidFill>
+                <a:latin typeface="Noto Sans" pitchFamily="34" charset="0"/>
+                <a:ea typeface="Noto Sans" pitchFamily="34" charset="-122"/>
+                <a:cs typeface="Noto Sans" pitchFamily="34" charset="-120"/>
+              </a:rPr>
+              <a:t>5</a:t>
+            </a:r>
+            <a:endParaRPr lang="en-US" sz="2000" dirty="0"/>
+          </a:p>
+        </p:txBody>
+      </p:sp>
+      <p:sp>
+        <p:nvSpPr>
+          <p:cNvPr id="20" name="Text 17"/>
+          <p:cNvSpPr/>
+          <p:nvPr/>
+        </p:nvSpPr>
+        <p:spPr>
+          <a:xfrm>
+            <a:off x="1371600" y="5102352"/>
+            <a:ext cx="8229600" cy="512064"/>
+          </a:xfrm>
+          <a:prstGeom prst="rect">
+            <a:avLst/>
+          </a:prstGeom>
+          <a:noFill/>
+          <a:ln/>
+        </p:spPr>
+        <p:txBody>
+          <a:bodyPr wrap="square" rtlCol="0" anchor="ctr"/>
+          <a:lstStyle/>
+          <a:p>
+            <a:pPr indent="0" marL="0">
+              <a:buNone/>
+            </a:pPr>
+            <a:r>
+              <a:rPr lang="en-US" sz="1800" b="1" dirty="0">
+                <a:solidFill>
+                  <a:srgbClr val="22333F"/>
+                </a:solidFill>
+                <a:latin typeface="Noto Sans" pitchFamily="34" charset="0"/>
+                <a:ea typeface="Noto Sans" pitchFamily="34" charset="-122"/>
+                <a:cs typeface="Noto Sans" pitchFamily="34" charset="-120"/>
+              </a:rPr>
+              <a:t>Phân chia trách nhiệm</a:t>
+            </a:r>
+            <a:endParaRPr lang="en-US" sz="1800" dirty="0"/>
+          </a:p>
+        </p:txBody>
+      </p:sp>
+      <p:pic>
+        <p:nvPicPr>
+          <p:cNvPr id="21" name="Image 1" descr="C:\Users\landa\AppData\Local\Temp\claude\c--Users-landa--Personal--D---n-AI-Class-new\8a85e8a7-bdeb-42d6-9168-79c96b849bd1\scratchpad\pptx-gen\logo-icon-only.png">    </p:cNvPr>
+          <p:cNvPicPr>
+            <a:picLocks noChangeAspect="1"/>
+          </p:cNvPicPr>
+          <p:nvPr/>
+        </p:nvPicPr>
+        <p:blipFill>
+          <a:blip r:embed="rId2"/>
+          <a:stretch>
+            <a:fillRect/>
+          </a:stretch>
+        </p:blipFill>
+        <p:spPr>
+          <a:xfrm>
+            <a:off x="502920" y="6473952"/>
+            <a:ext cx="237744" cy="237744"/>
+          </a:xfrm>
+          <a:prstGeom prst="rect">
+            <a:avLst/>
+          </a:prstGeom>
+        </p:spPr>
+      </p:pic>
+      <p:sp>
+        <p:nvSpPr>
+          <p:cNvPr id="22" name="Text 18"/>
+          <p:cNvSpPr/>
+          <p:nvPr/>
+        </p:nvSpPr>
+        <p:spPr>
+          <a:xfrm>
+            <a:off x="795528" y="6473952"/>
+            <a:ext cx="3657600" cy="256032"/>
+          </a:xfrm>
+          <a:prstGeom prst="rect">
+            <a:avLst/>
+          </a:prstGeom>
+          <a:noFill/>
+          <a:ln/>
+        </p:spPr>
+        <p:txBody>
+          <a:bodyPr wrap="square" rtlCol="0" anchor="ctr"/>
+          <a:lstStyle/>
+          <a:p>
+            <a:pPr indent="0" marL="0">
+              <a:buNone/>
+            </a:pPr>
+            <a:r>
+              <a:rPr lang="en-US" sz="800" spc="100" kern="0" dirty="0">
+                <a:solidFill>
+                  <a:srgbClr val="5B6472"/>
+                </a:solidFill>
+                <a:latin typeface="Noto Sans" pitchFamily="34" charset="0"/>
+                <a:ea typeface="Noto Sans" pitchFamily="34" charset="-122"/>
+                <a:cs typeface="Noto Sans" pitchFamily="34" charset="-120"/>
+              </a:rPr>
+              <a:t>EDUPIA  AI CLASS NEW</a:t>
+            </a:r>
+            <a:endParaRPr lang="en-US" sz="800" dirty="0"/>
+          </a:p>
+        </p:txBody>
+      </p:sp>
+      <p:sp>
+        <p:nvSpPr>
+          <p:cNvPr id="23" name="Text 19"/>
+          <p:cNvSpPr/>
+          <p:nvPr/>
+        </p:nvSpPr>
+        <p:spPr>
+          <a:xfrm>
+            <a:off x="10789920" y="6473952"/>
+            <a:ext cx="914400" cy="256032"/>
+          </a:xfrm>
+          <a:prstGeom prst="rect">
+            <a:avLst/>
+          </a:prstGeom>
+          <a:noFill/>
+          <a:ln/>
+        </p:spPr>
+        <p:txBody>
+          <a:bodyPr wrap="square" rtlCol="0" anchor="ctr"/>
+          <a:lstStyle/>
+          <a:p>
+            <a:pPr algn="r" indent="0" marL="0">
+              <a:buNone/>
+            </a:pPr>
+            <a:r>
+              <a:rPr lang="en-US" sz="850" dirty="0">
+                <a:solidFill>
+                  <a:srgbClr val="5B6472"/>
+                </a:solidFill>
+                <a:latin typeface="Noto Sans" pitchFamily="34" charset="0"/>
+                <a:ea typeface="Noto Sans" pitchFamily="34" charset="-122"/>
+                <a:cs typeface="Noto Sans" pitchFamily="34" charset="-120"/>
+              </a:rPr>
+              <a:t>1 / 12</a:t>
+            </a:r>
+            <a:endParaRPr lang="en-US" sz="850" dirty="0"/>
+          </a:p>
+        </p:txBody>
+      </p:sp>
+      <p:sp xmlns:p="http://schemas.openxmlformats.org/presentationml/2006/main" xmlns:a="http://schemas.openxmlformats.org/drawingml/2006/main">
+        <p:nvSpPr>
+          <p:cNvPr id="24" name="Shape 24"/>
+          <p:cNvSpPr/>
+          <p:nvPr/>
+        </p:nvSpPr>
+        <p:spPr>
+          <a:xfrm>
+            <a:off x="502920" y="2914650"/>
+            <a:ext cx="566928" cy="566928"/>
+          </a:xfrm>
+          <a:prstGeom prst="ellipse">
+            <a:avLst/>
+          </a:prstGeom>
+          <a:solidFill>
+            <a:srgbClr val="3B81B1"/>
+          </a:solidFill>
+          <a:ln/>
+        </p:spPr>
+      </p:sp>
+      <p:sp xmlns:p="http://schemas.openxmlformats.org/presentationml/2006/main" xmlns:a="http://schemas.openxmlformats.org/drawingml/2006/main">
+        <p:nvSpPr>
+          <p:cNvPr id="25" name="Text 25"/>
+          <p:cNvSpPr/>
+          <p:nvPr/>
+        </p:nvSpPr>
+        <p:spPr>
+          <a:xfrm>
+            <a:off x="502920" y="2914650"/>
             <a:ext cx="566928" cy="566928"/>
           </a:xfrm>
           <a:prstGeom prst="rect">
@@ -7085,15 +10766,15 @@
           </a:p>
         </p:txBody>
       </p:sp>
-      <p:sp>
-        <p:nvSpPr>
-          <p:cNvPr id="12" name="Text 9"/>
-          <p:cNvSpPr/>
-          <p:nvPr/>
-        </p:nvSpPr>
-        <p:spPr>
-          <a:xfrm>
-            <a:off x="1371600" y="3182112"/>
+      <p:sp xmlns:p="http://schemas.openxmlformats.org/presentationml/2006/main" xmlns:a="http://schemas.openxmlformats.org/drawingml/2006/main">
+        <p:nvSpPr>
+          <p:cNvPr id="26" name="Text 26"/>
+          <p:cNvSpPr/>
+          <p:nvPr/>
+        </p:nvSpPr>
+        <p:spPr>
+          <a:xfrm>
+            <a:off x="1371600" y="2942082"/>
             <a:ext cx="8229600" cy="512064"/>
           </a:xfrm>
           <a:prstGeom prst="rect">
@@ -7118,22 +10799,22 @@
                 <a:ea typeface="Noto Sans" pitchFamily="34" charset="-122"/>
                 <a:cs typeface="Noto Sans" pitchFamily="34" charset="-120"/>
               </a:rPr>
-              <a:t>Định hướng concept sản phẩm</a:t>
+              <a:t>Chân dung khách hàng mục tiêu</a:t>
             </a:r>
             <a:endParaRPr lang="en-US" sz="1800" dirty="0"/>
           </a:p>
         </p:txBody>
       </p:sp>
-      <p:sp>
-        <p:nvSpPr>
-          <p:cNvPr id="13" name="Shape 10"/>
-          <p:cNvSpPr/>
-          <p:nvPr/>
-        </p:nvSpPr>
-        <p:spPr>
-          <a:xfrm>
-            <a:off x="786384" y="3721608"/>
-            <a:ext cx="0" cy="393192"/>
+      <p:sp xmlns:p="http://schemas.openxmlformats.org/presentationml/2006/main" xmlns:a="http://schemas.openxmlformats.org/drawingml/2006/main">
+        <p:nvSpPr>
+          <p:cNvPr id="27" name="Shape 27"/>
+          <p:cNvSpPr/>
+          <p:nvPr/>
+        </p:nvSpPr>
+        <p:spPr>
+          <a:xfrm>
+            <a:off x="786384" y="3481578"/>
+            <a:ext cx="0" cy="153162"/>
           </a:xfrm>
           <a:prstGeom prst="line">
             <a:avLst/>
@@ -7146,327 +10827,6 @@
             <a:prstDash val="dash"/>
           </a:ln>
         </p:spPr>
-      </p:sp>
-      <p:sp>
-        <p:nvSpPr>
-          <p:cNvPr id="14" name="Shape 11"/>
-          <p:cNvSpPr/>
-          <p:nvPr/>
-        </p:nvSpPr>
-        <p:spPr>
-          <a:xfrm>
-            <a:off x="502920" y="4114800"/>
-            <a:ext cx="566928" cy="566928"/>
-          </a:xfrm>
-          <a:prstGeom prst="ellipse">
-            <a:avLst/>
-          </a:prstGeom>
-          <a:solidFill>
-            <a:srgbClr val="004671"/>
-          </a:solidFill>
-          <a:ln/>
-        </p:spPr>
-      </p:sp>
-      <p:sp>
-        <p:nvSpPr>
-          <p:cNvPr id="15" name="Text 12"/>
-          <p:cNvSpPr/>
-          <p:nvPr/>
-        </p:nvSpPr>
-        <p:spPr>
-          <a:xfrm>
-            <a:off x="502920" y="4114800"/>
-            <a:ext cx="566928" cy="566928"/>
-          </a:xfrm>
-          <a:prstGeom prst="rect">
-            <a:avLst/>
-          </a:prstGeom>
-          <a:noFill/>
-          <a:ln/>
-        </p:spPr>
-        <p:txBody>
-          <a:bodyPr wrap="square" rtlCol="0" anchor="ctr"/>
-          <a:lstStyle/>
-          <a:p>
-            <a:pPr algn="ctr" indent="0" marL="0">
-              <a:buNone/>
-            </a:pPr>
-            <a:r>
-              <a:rPr lang="en-US" sz="2000" b="1" dirty="0">
-                <a:solidFill>
-                  <a:srgbClr val="FFFFFF"/>
-                </a:solidFill>
-                <a:latin typeface="Noto Sans" pitchFamily="34" charset="0"/>
-                <a:ea typeface="Noto Sans" pitchFamily="34" charset="-122"/>
-                <a:cs typeface="Noto Sans" pitchFamily="34" charset="-120"/>
-              </a:rPr>
-              <a:t>3</a:t>
-            </a:r>
-            <a:endParaRPr lang="en-US" sz="2000" dirty="0"/>
-          </a:p>
-        </p:txBody>
-      </p:sp>
-      <p:sp>
-        <p:nvSpPr>
-          <p:cNvPr id="16" name="Text 13"/>
-          <p:cNvSpPr/>
-          <p:nvPr/>
-        </p:nvSpPr>
-        <p:spPr>
-          <a:xfrm>
-            <a:off x="1371600" y="4142232"/>
-            <a:ext cx="8229600" cy="512064"/>
-          </a:xfrm>
-          <a:prstGeom prst="rect">
-            <a:avLst/>
-          </a:prstGeom>
-          <a:noFill/>
-          <a:ln/>
-        </p:spPr>
-        <p:txBody>
-          <a:bodyPr wrap="square" rtlCol="0" anchor="ctr"/>
-          <a:lstStyle/>
-          <a:p>
-            <a:pPr indent="0" marL="0">
-              <a:buNone/>
-            </a:pPr>
-            <a:r>
-              <a:rPr lang="en-US" sz="1800" b="1" dirty="0">
-                <a:solidFill>
-                  <a:srgbClr val="22333F"/>
-                </a:solidFill>
-                <a:latin typeface="Noto Sans" pitchFamily="34" charset="0"/>
-                <a:ea typeface="Noto Sans" pitchFamily="34" charset="-122"/>
-                <a:cs typeface="Noto Sans" pitchFamily="34" charset="-120"/>
-              </a:rPr>
-              <a:t>Kế hoạch triển khai</a:t>
-            </a:r>
-            <a:endParaRPr lang="en-US" sz="1800" dirty="0"/>
-          </a:p>
-        </p:txBody>
-      </p:sp>
-      <p:sp>
-        <p:nvSpPr>
-          <p:cNvPr id="17" name="Shape 14"/>
-          <p:cNvSpPr/>
-          <p:nvPr/>
-        </p:nvSpPr>
-        <p:spPr>
-          <a:xfrm>
-            <a:off x="786384" y="4681728"/>
-            <a:ext cx="0" cy="393192"/>
-          </a:xfrm>
-          <a:prstGeom prst="line">
-            <a:avLst/>
-          </a:prstGeom>
-          <a:noFill/>
-          <a:ln w="15875">
-            <a:solidFill>
-              <a:srgbClr val="DCE7EA"/>
-            </a:solidFill>
-            <a:prstDash val="dash"/>
-          </a:ln>
-        </p:spPr>
-      </p:sp>
-      <p:sp>
-        <p:nvSpPr>
-          <p:cNvPr id="18" name="Shape 15"/>
-          <p:cNvSpPr/>
-          <p:nvPr/>
-        </p:nvSpPr>
-        <p:spPr>
-          <a:xfrm>
-            <a:off x="502920" y="5074920"/>
-            <a:ext cx="566928" cy="566928"/>
-          </a:xfrm>
-          <a:prstGeom prst="ellipse">
-            <a:avLst/>
-          </a:prstGeom>
-          <a:solidFill>
-            <a:srgbClr val="3B81B1"/>
-          </a:solidFill>
-          <a:ln/>
-        </p:spPr>
-      </p:sp>
-      <p:sp>
-        <p:nvSpPr>
-          <p:cNvPr id="19" name="Text 16"/>
-          <p:cNvSpPr/>
-          <p:nvPr/>
-        </p:nvSpPr>
-        <p:spPr>
-          <a:xfrm>
-            <a:off x="502920" y="5074920"/>
-            <a:ext cx="566928" cy="566928"/>
-          </a:xfrm>
-          <a:prstGeom prst="rect">
-            <a:avLst/>
-          </a:prstGeom>
-          <a:noFill/>
-          <a:ln/>
-        </p:spPr>
-        <p:txBody>
-          <a:bodyPr wrap="square" rtlCol="0" anchor="ctr"/>
-          <a:lstStyle/>
-          <a:p>
-            <a:pPr algn="ctr" indent="0" marL="0">
-              <a:buNone/>
-            </a:pPr>
-            <a:r>
-              <a:rPr lang="en-US" sz="2000" b="1" dirty="0">
-                <a:solidFill>
-                  <a:srgbClr val="FFFFFF"/>
-                </a:solidFill>
-                <a:latin typeface="Noto Sans" pitchFamily="34" charset="0"/>
-                <a:ea typeface="Noto Sans" pitchFamily="34" charset="-122"/>
-                <a:cs typeface="Noto Sans" pitchFamily="34" charset="-120"/>
-              </a:rPr>
-              <a:t>4</a:t>
-            </a:r>
-            <a:endParaRPr lang="en-US" sz="2000" dirty="0"/>
-          </a:p>
-        </p:txBody>
-      </p:sp>
-      <p:sp>
-        <p:nvSpPr>
-          <p:cNvPr id="20" name="Text 17"/>
-          <p:cNvSpPr/>
-          <p:nvPr/>
-        </p:nvSpPr>
-        <p:spPr>
-          <a:xfrm>
-            <a:off x="1371600" y="5102352"/>
-            <a:ext cx="8229600" cy="512064"/>
-          </a:xfrm>
-          <a:prstGeom prst="rect">
-            <a:avLst/>
-          </a:prstGeom>
-          <a:noFill/>
-          <a:ln/>
-        </p:spPr>
-        <p:txBody>
-          <a:bodyPr wrap="square" rtlCol="0" anchor="ctr"/>
-          <a:lstStyle/>
-          <a:p>
-            <a:pPr indent="0" marL="0">
-              <a:buNone/>
-            </a:pPr>
-            <a:r>
-              <a:rPr lang="en-US" sz="1800" b="1" dirty="0">
-                <a:solidFill>
-                  <a:srgbClr val="22333F"/>
-                </a:solidFill>
-                <a:latin typeface="Noto Sans" pitchFamily="34" charset="0"/>
-                <a:ea typeface="Noto Sans" pitchFamily="34" charset="-122"/>
-                <a:cs typeface="Noto Sans" pitchFamily="34" charset="-120"/>
-              </a:rPr>
-              <a:t>Phân chia trách nhiệm</a:t>
-            </a:r>
-            <a:endParaRPr lang="en-US" sz="1800" dirty="0"/>
-          </a:p>
-        </p:txBody>
-      </p:sp>
-      <p:pic>
-        <p:nvPicPr>
-          <p:cNvPr id="21" name="Image 1" descr="C:\Users\landa\AppData\Local\Temp\claude\c--Users-landa--Personal--D---n-AI-Class-new\8a85e8a7-bdeb-42d6-9168-79c96b849bd1\scratchpad\pptx-gen\logo-icon-only.png">    </p:cNvPr>
-          <p:cNvPicPr>
-            <a:picLocks noChangeAspect="1"/>
-          </p:cNvPicPr>
-          <p:nvPr/>
-        </p:nvPicPr>
-        <p:blipFill>
-          <a:blip r:embed="rId2"/>
-          <a:stretch>
-            <a:fillRect/>
-          </a:stretch>
-        </p:blipFill>
-        <p:spPr>
-          <a:xfrm>
-            <a:off x="502920" y="6473952"/>
-            <a:ext cx="237744" cy="237744"/>
-          </a:xfrm>
-          <a:prstGeom prst="rect">
-            <a:avLst/>
-          </a:prstGeom>
-        </p:spPr>
-      </p:pic>
-      <p:sp>
-        <p:nvSpPr>
-          <p:cNvPr id="22" name="Text 18"/>
-          <p:cNvSpPr/>
-          <p:nvPr/>
-        </p:nvSpPr>
-        <p:spPr>
-          <a:xfrm>
-            <a:off x="795528" y="6473952"/>
-            <a:ext cx="3657600" cy="256032"/>
-          </a:xfrm>
-          <a:prstGeom prst="rect">
-            <a:avLst/>
-          </a:prstGeom>
-          <a:noFill/>
-          <a:ln/>
-        </p:spPr>
-        <p:txBody>
-          <a:bodyPr wrap="square" rtlCol="0" anchor="ctr"/>
-          <a:lstStyle/>
-          <a:p>
-            <a:pPr indent="0" marL="0">
-              <a:buNone/>
-            </a:pPr>
-            <a:r>
-              <a:rPr lang="en-US" sz="800" spc="100" kern="0" dirty="0">
-                <a:solidFill>
-                  <a:srgbClr val="5B6472"/>
-                </a:solidFill>
-                <a:latin typeface="Noto Sans" pitchFamily="34" charset="0"/>
-                <a:ea typeface="Noto Sans" pitchFamily="34" charset="-122"/>
-                <a:cs typeface="Noto Sans" pitchFamily="34" charset="-120"/>
-              </a:rPr>
-              <a:t>EDUPIA  AI CLASS NEW</a:t>
-            </a:r>
-            <a:endParaRPr lang="en-US" sz="800" dirty="0"/>
-          </a:p>
-        </p:txBody>
-      </p:sp>
-      <p:sp>
-        <p:nvSpPr>
-          <p:cNvPr id="23" name="Text 19"/>
-          <p:cNvSpPr/>
-          <p:nvPr/>
-        </p:nvSpPr>
-        <p:spPr>
-          <a:xfrm>
-            <a:off x="10789920" y="6473952"/>
-            <a:ext cx="914400" cy="256032"/>
-          </a:xfrm>
-          <a:prstGeom prst="rect">
-            <a:avLst/>
-          </a:prstGeom>
-          <a:noFill/>
-          <a:ln/>
-        </p:spPr>
-        <p:txBody>
-          <a:bodyPr wrap="square" rtlCol="0" anchor="ctr"/>
-          <a:lstStyle/>
-          <a:p>
-            <a:pPr algn="r" indent="0" marL="0">
-              <a:buNone/>
-            </a:pPr>
-            <a:r>
-              <a:rPr lang="en-US" sz="850" dirty="0">
-                <a:solidFill>
-                  <a:srgbClr val="5B6472"/>
-                </a:solidFill>
-                <a:latin typeface="Noto Sans" pitchFamily="34" charset="0"/>
-                <a:ea typeface="Noto Sans" pitchFamily="34" charset="-122"/>
-                <a:cs typeface="Noto Sans" pitchFamily="34" charset="-120"/>
-              </a:rPr>
-              <a:t>1 / 11</a:t>
-            </a:r>
-            <a:endParaRPr lang="en-US" sz="850" dirty="0"/>
-          </a:p>
-        </p:txBody>
       </p:sp>
     </p:spTree>
   </p:cSld>
@@ -7966,687 +11326,7 @@
                 <a:ea typeface="Noto Sans" pitchFamily="34" charset="-122"/>
                 <a:cs typeface="Noto Sans" pitchFamily="34" charset="-120"/>
               </a:rPr>
-              <a:t>2 / 11</a:t>
-            </a:r>
-            <a:endParaRPr lang="en-US" sz="850" dirty="0"/>
-          </a:p>
-        </p:txBody>
-      </p:sp>
-    </p:spTree>
-  </p:cSld>
-  <p:clrMapOvr>
-    <a:masterClrMapping/>
-  </p:clrMapOvr>
-</p:sld>
-</file>
-
-<file path=ppt/slides/slide4.xml><?xml version="1.0" encoding="utf-8"?>
-<p:sld xmlns:a="http://schemas.openxmlformats.org/drawingml/2006/main" xmlns:r="http://schemas.openxmlformats.org/officeDocument/2006/relationships" xmlns:p="http://schemas.openxmlformats.org/presentationml/2006/main">
-  <p:cSld name="Slide 4">
-    <p:bg>
-      <p:bgPr>
-        <a:solidFill>
-          <a:srgbClr val="FFFFFF"/>
-        </a:solidFill>
-      </p:bgPr>
-    </p:bg>
-    <p:spTree>
-      <p:nvGrpSpPr>
-        <p:cNvPr id="1" name=""/>
-        <p:cNvGrpSpPr/>
-        <p:nvPr/>
-      </p:nvGrpSpPr>
-      <p:grpSpPr>
-        <a:xfrm>
-          <a:off x="0" y="0"/>
-          <a:ext cx="0" cy="0"/>
-          <a:chOff x="0" y="0"/>
-          <a:chExt cx="0" cy="0"/>
-        </a:xfrm>
-      </p:grpSpPr>
-      <p:sp>
-        <p:nvSpPr>
-          <p:cNvPr id="2" name="Text 0"/>
-          <p:cNvSpPr/>
-          <p:nvPr/>
-        </p:nvSpPr>
-        <p:spPr>
-          <a:xfrm>
-            <a:off x="502920" y="292608"/>
-            <a:ext cx="11183112" cy="274320"/>
-          </a:xfrm>
-          <a:prstGeom prst="rect">
-            <a:avLst/>
-          </a:prstGeom>
-          <a:noFill/>
-          <a:ln/>
-        </p:spPr>
-        <p:txBody>
-          <a:bodyPr wrap="square" rtlCol="0" anchor="ctr"/>
-          <a:lstStyle/>
-          <a:p>
-            <a:pPr indent="0" marL="0">
-              <a:buNone/>
-            </a:pPr>
-            <a:r>
-              <a:rPr lang="en-US" sz="1100" b="1" spc="120" kern="0" dirty="0">
-                <a:solidFill>
-                  <a:srgbClr val="3B81B1"/>
-                </a:solidFill>
-                <a:latin typeface="Noto Sans" pitchFamily="34" charset="0"/>
-                <a:ea typeface="Noto Sans" pitchFamily="34" charset="-122"/>
-                <a:cs typeface="Noto Sans" pitchFamily="34" charset="-120"/>
-              </a:rPr>
-              <a:t>PHẦN 1 — MỤC TIÊU CHIẾN LƯỢC</a:t>
-            </a:r>
-            <a:endParaRPr lang="en-US" sz="1100" dirty="0"/>
-          </a:p>
-        </p:txBody>
-      </p:sp>
-      <p:sp>
-        <p:nvSpPr>
-          <p:cNvPr id="3" name="Text 1"/>
-          <p:cNvSpPr/>
-          <p:nvPr/>
-        </p:nvSpPr>
-        <p:spPr>
-          <a:xfrm>
-            <a:off x="502920" y="548640"/>
-            <a:ext cx="10085832" cy="640080"/>
-          </a:xfrm>
-          <a:prstGeom prst="rect">
-            <a:avLst/>
-          </a:prstGeom>
-          <a:noFill/>
-          <a:ln/>
-        </p:spPr>
-        <p:txBody>
-          <a:bodyPr wrap="square" rtlCol="0" anchor="ctr"/>
-          <a:lstStyle/>
-          <a:p>
-            <a:pPr indent="0" marL="0">
-              <a:buNone/>
-            </a:pPr>
-            <a:r>
-              <a:rPr lang="en-US" sz="2600" b="1" dirty="0">
-                <a:solidFill>
-                  <a:srgbClr val="004671"/>
-                </a:solidFill>
-                <a:latin typeface="Noto Sans" pitchFamily="34" charset="0"/>
-                <a:ea typeface="Noto Sans" pitchFamily="34" charset="-122"/>
-                <a:cs typeface="Noto Sans" pitchFamily="34" charset="-120"/>
-              </a:rPr>
-              <a:t>Quy mô thị trường Tier 3/4</a:t>
-            </a:r>
-            <a:endParaRPr lang="en-US" sz="2600" dirty="0"/>
-          </a:p>
-        </p:txBody>
-      </p:sp>
-      <p:sp>
-        <p:nvSpPr>
-          <p:cNvPr id="4" name="Shape 2"/>
-          <p:cNvSpPr/>
-          <p:nvPr/>
-        </p:nvSpPr>
-        <p:spPr>
-          <a:xfrm>
-            <a:off x="502920" y="1170432"/>
-            <a:ext cx="777240" cy="45720"/>
-          </a:xfrm>
-          <a:prstGeom prst="rect">
-            <a:avLst/>
-          </a:prstGeom>
-          <a:solidFill>
-            <a:srgbClr val="A5BE00"/>
-          </a:solidFill>
-          <a:ln/>
-        </p:spPr>
-      </p:sp>
-      <p:pic>
-        <p:nvPicPr>
-          <p:cNvPr id="5" name="Image 0" descr="C:\Users\landa\AppData\Local\Temp\claude\c--Users-landa--Personal--D---n-AI-Class-new\8a85e8a7-bdeb-42d6-9168-79c96b849bd1\scratchpad\pptx-gen\logo-icon-only.png">    </p:cNvPr>
-          <p:cNvPicPr>
-            <a:picLocks noChangeAspect="1"/>
-          </p:cNvPicPr>
-          <p:nvPr/>
-        </p:nvPicPr>
-        <p:blipFill>
-          <a:blip r:embed="rId1"/>
-          <a:stretch>
-            <a:fillRect/>
-          </a:stretch>
-        </p:blipFill>
-        <p:spPr>
-          <a:xfrm>
-            <a:off x="11292840" y="365760"/>
-            <a:ext cx="502920" cy="502920"/>
-          </a:xfrm>
-          <a:prstGeom prst="rect">
-            <a:avLst/>
-          </a:prstGeom>
-        </p:spPr>
-      </p:pic>
-      <p:sp>
-        <p:nvSpPr>
-          <p:cNvPr id="6" name="Text 3"/>
-          <p:cNvSpPr/>
-          <p:nvPr/>
-        </p:nvSpPr>
-        <p:spPr>
-          <a:xfrm>
-            <a:off x="502920" y="1280160"/>
-            <a:ext cx="11183112" cy="384048"/>
-          </a:xfrm>
-          <a:prstGeom prst="rect">
-            <a:avLst/>
-          </a:prstGeom>
-          <a:noFill/>
-          <a:ln/>
-        </p:spPr>
-        <p:txBody>
-          <a:bodyPr wrap="square" rtlCol="0" anchor="ctr"/>
-          <a:lstStyle/>
-          <a:p>
-            <a:pPr indent="0" marL="0">
-              <a:buNone/>
-            </a:pPr>
-            <a:r>
-              <a:rPr lang="en-US" sz="1050" i="1" dirty="0">
-                <a:solidFill>
-                  <a:srgbClr val="5B6472"/>
-                </a:solidFill>
-                <a:latin typeface="Noto Sans" pitchFamily="34" charset="0"/>
-                <a:ea typeface="Noto Sans" pitchFamily="34" charset="-122"/>
-                <a:cs typeface="Noto Sans" pitchFamily="34" charset="-120"/>
-              </a:rPr>
-              <a:t>Số liệu tham khảo, có sai số — suy luận từ dữ liệu thu nhập GSO (KSMS 2024), chưa có khảo sát trực tiếp tier 3/4. Sẽ được xác nhận lại qua khảo sát WTP tháng 9.</a:t>
-            </a:r>
-            <a:endParaRPr lang="en-US" sz="1050" dirty="0"/>
-          </a:p>
-        </p:txBody>
-      </p:sp>
-      <p:sp>
-        <p:nvSpPr>
-          <p:cNvPr id="7" name="Shape 4"/>
-          <p:cNvSpPr/>
-          <p:nvPr/>
-        </p:nvSpPr>
-        <p:spPr>
-          <a:xfrm>
-            <a:off x="502920" y="1664208"/>
-            <a:ext cx="3605784" cy="1234440"/>
-          </a:xfrm>
-          <a:prstGeom prst="rect">
-            <a:avLst/>
-          </a:prstGeom>
-          <a:solidFill>
-            <a:srgbClr val="D6F1F2"/>
-          </a:solidFill>
-          <a:ln/>
-        </p:spPr>
-      </p:sp>
-      <p:sp>
-        <p:nvSpPr>
-          <p:cNvPr id="8" name="Text 5"/>
-          <p:cNvSpPr/>
-          <p:nvPr/>
-        </p:nvSpPr>
-        <p:spPr>
-          <a:xfrm>
-            <a:off x="640080" y="1773936"/>
-            <a:ext cx="3331464" cy="548640"/>
-          </a:xfrm>
-          <a:prstGeom prst="rect">
-            <a:avLst/>
-          </a:prstGeom>
-          <a:noFill/>
-          <a:ln/>
-        </p:spPr>
-        <p:txBody>
-          <a:bodyPr wrap="square" rtlCol="0" anchor="ctr"/>
-          <a:lstStyle/>
-          <a:p>
-            <a:pPr indent="0" marL="0">
-              <a:buNone/>
-            </a:pPr>
-            <a:r>
-              <a:rPr lang="en-US" sz="2200" b="1" dirty="0">
-                <a:solidFill>
-                  <a:srgbClr val="004671"/>
-                </a:solidFill>
-                <a:latin typeface="Noto Sans" pitchFamily="34" charset="0"/>
-                <a:ea typeface="Noto Sans" pitchFamily="34" charset="-122"/>
-                <a:cs typeface="Noto Sans" pitchFamily="34" charset="-120"/>
-              </a:rPr>
-              <a:t>~75-78 triệu</a:t>
-            </a:r>
-            <a:endParaRPr lang="en-US" sz="2200" dirty="0"/>
-          </a:p>
-        </p:txBody>
-      </p:sp>
-      <p:sp>
-        <p:nvSpPr>
-          <p:cNvPr id="9" name="Text 6"/>
-          <p:cNvSpPr/>
-          <p:nvPr/>
-        </p:nvSpPr>
-        <p:spPr>
-          <a:xfrm>
-            <a:off x="640080" y="2350008"/>
-            <a:ext cx="3331464" cy="502920"/>
-          </a:xfrm>
-          <a:prstGeom prst="rect">
-            <a:avLst/>
-          </a:prstGeom>
-          <a:noFill/>
-          <a:ln/>
-        </p:spPr>
-        <p:txBody>
-          <a:bodyPr wrap="square" rtlCol="0" anchor="t"/>
-          <a:lstStyle/>
-          <a:p>
-            <a:pPr indent="0" marL="0">
-              <a:buNone/>
-            </a:pPr>
-            <a:r>
-              <a:rPr lang="en-US" sz="1000" dirty="0">
-                <a:solidFill>
-                  <a:srgbClr val="5B6472"/>
-                </a:solidFill>
-                <a:latin typeface="Noto Sans" pitchFamily="34" charset="0"/>
-                <a:ea typeface="Noto Sans" pitchFamily="34" charset="-122"/>
-                <a:cs typeface="Noto Sans" pitchFamily="34" charset="-120"/>
-              </a:rPr>
-              <a:t>người dân ngoài 5 TP trực thuộc TW</a:t>
-            </a:r>
-            <a:endParaRPr lang="en-US" sz="1000" dirty="0"/>
-          </a:p>
-        </p:txBody>
-      </p:sp>
-      <p:sp>
-        <p:nvSpPr>
-          <p:cNvPr id="10" name="Shape 7"/>
-          <p:cNvSpPr/>
-          <p:nvPr/>
-        </p:nvSpPr>
-        <p:spPr>
-          <a:xfrm>
-            <a:off x="4291584" y="1664208"/>
-            <a:ext cx="3605784" cy="1234440"/>
-          </a:xfrm>
-          <a:prstGeom prst="rect">
-            <a:avLst/>
-          </a:prstGeom>
-          <a:solidFill>
-            <a:srgbClr val="004671"/>
-          </a:solidFill>
-          <a:ln/>
-        </p:spPr>
-      </p:sp>
-      <p:sp>
-        <p:nvSpPr>
-          <p:cNvPr id="11" name="Text 8"/>
-          <p:cNvSpPr/>
-          <p:nvPr/>
-        </p:nvSpPr>
-        <p:spPr>
-          <a:xfrm>
-            <a:off x="4428744" y="1773936"/>
-            <a:ext cx="3331464" cy="548640"/>
-          </a:xfrm>
-          <a:prstGeom prst="rect">
-            <a:avLst/>
-          </a:prstGeom>
-          <a:noFill/>
-          <a:ln/>
-        </p:spPr>
-        <p:txBody>
-          <a:bodyPr wrap="square" rtlCol="0" anchor="ctr"/>
-          <a:lstStyle/>
-          <a:p>
-            <a:pPr indent="0" marL="0">
-              <a:buNone/>
-            </a:pPr>
-            <a:r>
-              <a:rPr lang="en-US" sz="2200" b="1" dirty="0">
-                <a:solidFill>
-                  <a:srgbClr val="FFFFFF"/>
-                </a:solidFill>
-                <a:latin typeface="Noto Sans" pitchFamily="34" charset="0"/>
-                <a:ea typeface="Noto Sans" pitchFamily="34" charset="-122"/>
-                <a:cs typeface="Noto Sans" pitchFamily="34" charset="-120"/>
-              </a:rPr>
-              <a:t>~4,5 triệu</a:t>
-            </a:r>
-            <a:endParaRPr lang="en-US" sz="2200" dirty="0"/>
-          </a:p>
-        </p:txBody>
-      </p:sp>
-      <p:sp>
-        <p:nvSpPr>
-          <p:cNvPr id="12" name="Text 9"/>
-          <p:cNvSpPr/>
-          <p:nvPr/>
-        </p:nvSpPr>
-        <p:spPr>
-          <a:xfrm>
-            <a:off x="4428744" y="2350008"/>
-            <a:ext cx="3331464" cy="502920"/>
-          </a:xfrm>
-          <a:prstGeom prst="rect">
-            <a:avLst/>
-          </a:prstGeom>
-          <a:noFill/>
-          <a:ln/>
-        </p:spPr>
-        <p:txBody>
-          <a:bodyPr wrap="square" rtlCol="0" anchor="t"/>
-          <a:lstStyle/>
-          <a:p>
-            <a:pPr indent="0" marL="0">
-              <a:buNone/>
-            </a:pPr>
-            <a:r>
-              <a:rPr lang="en-US" sz="1000" dirty="0">
-                <a:solidFill>
-                  <a:srgbClr val="CFE3EE"/>
-                </a:solidFill>
-                <a:latin typeface="Noto Sans" pitchFamily="34" charset="0"/>
-                <a:ea typeface="Noto Sans" pitchFamily="34" charset="-122"/>
-                <a:cs typeface="Noto Sans" pitchFamily="34" charset="-120"/>
-              </a:rPr>
-              <a:t>thu nhập b.quân đầu người/tháng (nông thôn, toàn quốc)</a:t>
-            </a:r>
-            <a:endParaRPr lang="en-US" sz="1000" dirty="0"/>
-          </a:p>
-        </p:txBody>
-      </p:sp>
-      <p:sp>
-        <p:nvSpPr>
-          <p:cNvPr id="13" name="Shape 10"/>
-          <p:cNvSpPr/>
-          <p:nvPr/>
-        </p:nvSpPr>
-        <p:spPr>
-          <a:xfrm>
-            <a:off x="8080248" y="1664208"/>
-            <a:ext cx="3605784" cy="1234440"/>
-          </a:xfrm>
-          <a:prstGeom prst="rect">
-            <a:avLst/>
-          </a:prstGeom>
-          <a:solidFill>
-            <a:srgbClr val="D6F1F2"/>
-          </a:solidFill>
-          <a:ln/>
-        </p:spPr>
-      </p:sp>
-      <p:sp>
-        <p:nvSpPr>
-          <p:cNvPr id="14" name="Text 11"/>
-          <p:cNvSpPr/>
-          <p:nvPr/>
-        </p:nvSpPr>
-        <p:spPr>
-          <a:xfrm>
-            <a:off x="8217408" y="1773936"/>
-            <a:ext cx="3331464" cy="548640"/>
-          </a:xfrm>
-          <a:prstGeom prst="rect">
-            <a:avLst/>
-          </a:prstGeom>
-          <a:noFill/>
-          <a:ln/>
-        </p:spPr>
-        <p:txBody>
-          <a:bodyPr wrap="square" rtlCol="0" anchor="ctr"/>
-          <a:lstStyle/>
-          <a:p>
-            <a:pPr indent="0" marL="0">
-              <a:buNone/>
-            </a:pPr>
-            <a:r>
-              <a:rPr lang="en-US" sz="2200" b="1" dirty="0">
-                <a:solidFill>
-                  <a:srgbClr val="004671"/>
-                </a:solidFill>
-                <a:latin typeface="Noto Sans" pitchFamily="34" charset="0"/>
-                <a:ea typeface="Noto Sans" pitchFamily="34" charset="-122"/>
-                <a:cs typeface="Noto Sans" pitchFamily="34" charset="-120"/>
-              </a:rPr>
-              <a:t>2,4% – 10,5%</a:t>
-            </a:r>
-            <a:endParaRPr lang="en-US" sz="2200" dirty="0"/>
-          </a:p>
-        </p:txBody>
-      </p:sp>
-      <p:sp>
-        <p:nvSpPr>
-          <p:cNvPr id="15" name="Text 12"/>
-          <p:cNvSpPr/>
-          <p:nvPr/>
-        </p:nvSpPr>
-        <p:spPr>
-          <a:xfrm>
-            <a:off x="8217408" y="2350008"/>
-            <a:ext cx="3331464" cy="502920"/>
-          </a:xfrm>
-          <a:prstGeom prst="rect">
-            <a:avLst/>
-          </a:prstGeom>
-          <a:noFill/>
-          <a:ln/>
-        </p:spPr>
-        <p:txBody>
-          <a:bodyPr wrap="square" rtlCol="0" anchor="t"/>
-          <a:lstStyle/>
-          <a:p>
-            <a:pPr indent="0" marL="0">
-              <a:buNone/>
-            </a:pPr>
-            <a:r>
-              <a:rPr lang="en-US" sz="1000" dirty="0">
-                <a:solidFill>
-                  <a:srgbClr val="5B6472"/>
-                </a:solidFill>
-                <a:latin typeface="Noto Sans" pitchFamily="34" charset="0"/>
-                <a:ea typeface="Noto Sans" pitchFamily="34" charset="-122"/>
-                <a:cs typeface="Noto Sans" pitchFamily="34" charset="-120"/>
-              </a:rPr>
-              <a:t>tỷ trọng 390-400k/tháng trong thu nhập, tuỳ vùng</a:t>
-            </a:r>
-            <a:endParaRPr lang="en-US" sz="1000" dirty="0"/>
-          </a:p>
-        </p:txBody>
-      </p:sp>
-      <p:sp>
-        <p:nvSpPr>
-          <p:cNvPr id="16" name="Text 13"/>
-          <p:cNvSpPr/>
-          <p:nvPr/>
-        </p:nvSpPr>
-        <p:spPr>
-          <a:xfrm>
-            <a:off x="502920" y="3172968"/>
-            <a:ext cx="11183112" cy="3227832"/>
-          </a:xfrm>
-          <a:prstGeom prst="rect">
-            <a:avLst/>
-          </a:prstGeom>
-          <a:noFill/>
-          <a:ln/>
-        </p:spPr>
-        <p:txBody>
-          <a:bodyPr wrap="square" rtlCol="0" anchor="t"/>
-          <a:lstStyle/>
-          <a:p>
-            <a:pPr marL="342900" indent="-342900">
-              <a:lnSpc>
-                <a:spcPct val="110000"/>
-              </a:lnSpc>
-              <a:spcAft>
-                <a:spcPts val="600"/>
-              </a:spcAft>
-              <a:buSzPct val="100000"/>
-              <a:buChar char="•"/>
-            </a:pPr>
-            <a:r>
-              <a:rPr lang="en-US" sz="1250" dirty="0">
-                <a:solidFill>
-                  <a:srgbClr val="22333F"/>
-                </a:solidFill>
-                <a:latin typeface="Noto Sans" pitchFamily="34" charset="0"/>
-                <a:ea typeface="Noto Sans" pitchFamily="34" charset="-122"/>
-                <a:cs typeface="Noto Sans" pitchFamily="34" charset="-120"/>
-              </a:rPr>
-              <a:t>Thu nhập chênh lệch vùng miền lớn, từ ~7,1 triệu (Đông Nam Bộ) đến ~3,8 triệu (Trung du miền núi phía Bắc).</a:t>
-            </a:r>
-            <a:endParaRPr lang="en-US" sz="1250" dirty="0"/>
-          </a:p>
-          <a:p>
-            <a:pPr marL="342900" indent="-342900">
-              <a:lnSpc>
-                <a:spcPct val="110000"/>
-              </a:lnSpc>
-              <a:spcAft>
-                <a:spcPts val="600"/>
-              </a:spcAft>
-              <a:buSzPct val="100000"/>
-              <a:buChar char="•"/>
-            </a:pPr>
-            <a:r>
-              <a:rPr lang="en-US" sz="1250" dirty="0">
-                <a:solidFill>
-                  <a:srgbClr val="22333F"/>
-                </a:solidFill>
-                <a:latin typeface="Noto Sans" pitchFamily="34" charset="0"/>
-                <a:ea typeface="Noto Sans" pitchFamily="34" charset="-122"/>
-                <a:cs typeface="Noto Sans" pitchFamily="34" charset="-120"/>
-              </a:rPr>
-              <a:t>Ở mức thu nhập nông thôn trung bình, 390-400k/tháng là khoản chi tương đối nhỏ (≈2,4-2,5% thu nhập hộ gia đình). Ở vùng thu nhập thấp nhất cả nước, cùng mức giá chiếm ~10-10,5% thu nhập đầu người — sát ngưỡng chi tiêu định kỳ chấp nhận được.</a:t>
-            </a:r>
-            <a:endParaRPr lang="en-US" sz="1250" dirty="0"/>
-          </a:p>
-          <a:p>
-            <a:pPr marL="342900" indent="-342900">
-              <a:lnSpc>
-                <a:spcPct val="110000"/>
-              </a:lnSpc>
-              <a:buSzPct val="100000"/>
-              <a:buChar char="•"/>
-            </a:pPr>
-            <a:r>
-              <a:rPr lang="en-US" sz="1250" dirty="0">
-                <a:solidFill>
-                  <a:srgbClr val="22333F"/>
-                </a:solidFill>
-                <a:latin typeface="Noto Sans" pitchFamily="34" charset="0"/>
-                <a:ea typeface="Noto Sans" pitchFamily="34" charset="-122"/>
-                <a:cs typeface="Noto Sans" pitchFamily="34" charset="-120"/>
-              </a:rPr>
-              <a:t>“Tier 3/4” không phải một phân khúc thu nhập đồng nhất — nên đọc là 2 nhóm: (A) tỉnh/huyện khá giả (rào cản chính là niềm tin, không phải giá) và (B) vùng khó khăn (rào cản kép: nhận thức + khả năng chi trả).</a:t>
-            </a:r>
-            <a:endParaRPr lang="en-US" sz="1250" dirty="0"/>
-          </a:p>
-        </p:txBody>
-      </p:sp>
-      <p:pic>
-        <p:nvPicPr>
-          <p:cNvPr id="17" name="Image 1" descr="C:\Users\landa\AppData\Local\Temp\claude\c--Users-landa--Personal--D---n-AI-Class-new\8a85e8a7-bdeb-42d6-9168-79c96b849bd1\scratchpad\pptx-gen\logo-icon-only.png">    </p:cNvPr>
-          <p:cNvPicPr>
-            <a:picLocks noChangeAspect="1"/>
-          </p:cNvPicPr>
-          <p:nvPr/>
-        </p:nvPicPr>
-        <p:blipFill>
-          <a:blip r:embed="rId2"/>
-          <a:stretch>
-            <a:fillRect/>
-          </a:stretch>
-        </p:blipFill>
-        <p:spPr>
-          <a:xfrm>
-            <a:off x="502920" y="6473952"/>
-            <a:ext cx="237744" cy="237744"/>
-          </a:xfrm>
-          <a:prstGeom prst="rect">
-            <a:avLst/>
-          </a:prstGeom>
-        </p:spPr>
-      </p:pic>
-      <p:sp>
-        <p:nvSpPr>
-          <p:cNvPr id="18" name="Text 14"/>
-          <p:cNvSpPr/>
-          <p:nvPr/>
-        </p:nvSpPr>
-        <p:spPr>
-          <a:xfrm>
-            <a:off x="795528" y="6473952"/>
-            <a:ext cx="3657600" cy="256032"/>
-          </a:xfrm>
-          <a:prstGeom prst="rect">
-            <a:avLst/>
-          </a:prstGeom>
-          <a:noFill/>
-          <a:ln/>
-        </p:spPr>
-        <p:txBody>
-          <a:bodyPr wrap="square" rtlCol="0" anchor="ctr"/>
-          <a:lstStyle/>
-          <a:p>
-            <a:pPr indent="0" marL="0">
-              <a:buNone/>
-            </a:pPr>
-            <a:r>
-              <a:rPr lang="en-US" sz="800" spc="100" kern="0" dirty="0">
-                <a:solidFill>
-                  <a:srgbClr val="5B6472"/>
-                </a:solidFill>
-                <a:latin typeface="Noto Sans" pitchFamily="34" charset="0"/>
-                <a:ea typeface="Noto Sans" pitchFamily="34" charset="-122"/>
-                <a:cs typeface="Noto Sans" pitchFamily="34" charset="-120"/>
-              </a:rPr>
-              <a:t>EDUPIA  AI CLASS NEW</a:t>
-            </a:r>
-            <a:endParaRPr lang="en-US" sz="800" dirty="0"/>
-          </a:p>
-        </p:txBody>
-      </p:sp>
-      <p:sp>
-        <p:nvSpPr>
-          <p:cNvPr id="19" name="Text 15"/>
-          <p:cNvSpPr/>
-          <p:nvPr/>
-        </p:nvSpPr>
-        <p:spPr>
-          <a:xfrm>
-            <a:off x="10789920" y="6473952"/>
-            <a:ext cx="914400" cy="256032"/>
-          </a:xfrm>
-          <a:prstGeom prst="rect">
-            <a:avLst/>
-          </a:prstGeom>
-          <a:noFill/>
-          <a:ln/>
-        </p:spPr>
-        <p:txBody>
-          <a:bodyPr wrap="square" rtlCol="0" anchor="ctr"/>
-          <a:lstStyle/>
-          <a:p>
-            <a:pPr algn="r" indent="0" marL="0">
-              <a:buNone/>
-            </a:pPr>
-            <a:r>
-              <a:rPr lang="en-US" sz="850" dirty="0">
-                <a:solidFill>
-                  <a:srgbClr val="5B6472"/>
-                </a:solidFill>
-                <a:latin typeface="Noto Sans" pitchFamily="34" charset="0"/>
-                <a:ea typeface="Noto Sans" pitchFamily="34" charset="-122"/>
-                <a:cs typeface="Noto Sans" pitchFamily="34" charset="-120"/>
-              </a:rPr>
-              <a:t>3 / 11</a:t>
+              <a:t>2 / 12</a:t>
             </a:r>
             <a:endParaRPr lang="en-US" sz="850" dirty="0"/>
           </a:p>
@@ -8717,7 +11397,7 @@
                 <a:ea typeface="Noto Sans" pitchFamily="34" charset="-122"/>
                 <a:cs typeface="Noto Sans" pitchFamily="34" charset="-120"/>
               </a:rPr>
-              <a:t>PHẦN 2 — ĐỊNH HƯỚNG CONCEPT SẢN PHẨM</a:t>
+              <a:t>PHẦN 3 — ĐỊNH HƯỚNG CONCEPT SẢN PHẨM</a:t>
             </a:r>
             <a:endParaRPr lang="en-US" sz="1100" dirty="0"/>
           </a:p>
@@ -9749,7 +12429,7 @@
                 <a:ea typeface="Noto Sans" pitchFamily="34" charset="-122"/>
                 <a:cs typeface="Noto Sans" pitchFamily="34" charset="-120"/>
               </a:rPr>
-              <a:t>4 / 11</a:t>
+              <a:t>5 / 12</a:t>
             </a:r>
             <a:endParaRPr lang="en-US" sz="850" dirty="0"/>
           </a:p>
@@ -9820,7 +12500,7 @@
                 <a:ea typeface="Noto Sans" pitchFamily="34" charset="-122"/>
                 <a:cs typeface="Noto Sans" pitchFamily="34" charset="-120"/>
               </a:rPr>
-              <a:t>PHẦN 2 — ĐỊNH HƯỚNG CONCEPT SẢN PHẨM</a:t>
+              <a:t>PHẦN 3 — ĐỊNH HƯỚNG CONCEPT SẢN PHẨM</a:t>
             </a:r>
             <a:endParaRPr lang="en-US" sz="1100" dirty="0"/>
           </a:p>
@@ -11155,7 +13835,7 @@
                 <a:ea typeface="Noto Sans" pitchFamily="34" charset="-122"/>
                 <a:cs typeface="Noto Sans" pitchFamily="34" charset="-120"/>
               </a:rPr>
-              <a:t>5 / 11</a:t>
+              <a:t>6 / 12</a:t>
             </a:r>
             <a:endParaRPr lang="en-US" sz="850" dirty="0"/>
           </a:p>
@@ -11226,7 +13906,7 @@
                 <a:ea typeface="Noto Sans" pitchFamily="34" charset="-122"/>
                 <a:cs typeface="Noto Sans" pitchFamily="34" charset="-120"/>
               </a:rPr>
-              <a:t>PHẦN 2 — ĐỊNH HƯỚNG CONCEPT SẢN PHẨM</a:t>
+              <a:t>PHẦN 3 — ĐỊNH HƯỚNG CONCEPT SẢN PHẨM</a:t>
             </a:r>
             <a:endParaRPr lang="en-US" sz="1100" dirty="0"/>
           </a:p>
@@ -12221,7 +14901,7 @@
                 <a:ea typeface="Noto Sans" pitchFamily="34" charset="-122"/>
                 <a:cs typeface="Noto Sans" pitchFamily="34" charset="-120"/>
               </a:rPr>
-              <a:t>6 / 11</a:t>
+              <a:t>7 / 12</a:t>
             </a:r>
             <a:endParaRPr lang="en-US" sz="850" dirty="0"/>
           </a:p>
@@ -12292,7 +14972,7 @@
                 <a:ea typeface="Noto Sans" pitchFamily="34" charset="-122"/>
                 <a:cs typeface="Noto Sans" pitchFamily="34" charset="-120"/>
               </a:rPr>
-              <a:t>PHẦN 2 — ĐỊNH HƯỚNG CONCEPT SẢN PHẨM</a:t>
+              <a:t>PHẦN 3 — ĐỊNH HƯỚNG CONCEPT SẢN PHẨM</a:t>
             </a:r>
             <a:endParaRPr lang="en-US" sz="1100" dirty="0"/>
           </a:p>
@@ -12962,7 +15642,7 @@
                 <a:ea typeface="Noto Sans" pitchFamily="34" charset="-122"/>
                 <a:cs typeface="Noto Sans" pitchFamily="34" charset="-120"/>
               </a:rPr>
-              <a:t>7 / 11</a:t>
+              <a:t>8 / 12</a:t>
             </a:r>
             <a:endParaRPr lang="en-US" sz="850" dirty="0"/>
           </a:p>
@@ -13033,7 +15713,7 @@
                 <a:ea typeface="Noto Sans" pitchFamily="34" charset="-122"/>
                 <a:cs typeface="Noto Sans" pitchFamily="34" charset="-120"/>
               </a:rPr>
-              <a:t>PHẦN 2 — ĐỊNH HƯỚNG CONCEPT SẢN PHẨM</a:t>
+              <a:t>PHẦN 3 — ĐỊNH HƯỚNG CONCEPT SẢN PHẨM</a:t>
             </a:r>
             <a:endParaRPr lang="en-US" sz="1100" dirty="0"/>
           </a:p>
@@ -13565,7 +16245,7 @@
                 <a:ea typeface="Noto Sans" pitchFamily="34" charset="-122"/>
                 <a:cs typeface="Noto Sans" pitchFamily="34" charset="-120"/>
               </a:rPr>
-              <a:t>8 / 11</a:t>
+              <a:t>9 / 12</a:t>
             </a:r>
             <a:endParaRPr lang="en-US" sz="850" dirty="0"/>
           </a:p>

--- a/03_product/concepts/AI-Class-New-slide-deck-FINAL-2026-08-21-branded.pptx
+++ b/03_product/concepts/AI-Class-New-slide-deck-FINAL-2026-08-21-branded.pptx
@@ -8081,79 +8081,11 @@
             <a:tbl>
               <a:tblPr firstRow="1" bandRow="0"/>
               <a:tblGrid>
-                <a:gridCol w="1300000"/>
-                <a:gridCol w="5100000"/>
-                <a:gridCol w="4783112"/>
+                <a:gridCol w="5200000"/>
+                <a:gridCol w="3583112"/>
+                <a:gridCol w="2400000"/>
               </a:tblGrid>
               <a:tr h="350000">
-                <a:tc>
-                  <a:txBody>
-                    <a:bodyPr/>
-                    <a:lstStyle/>
-                    <a:p>
-                      <a:pPr indent="0" marL="0">
-                        <a:buNone/>
-                      </a:pPr>
-                      <a:r>
-                        <a:rPr lang="en-US" sz="1200" b="1" dirty="0">
-                          <a:solidFill>
-                            <a:srgbClr val="FFFFFF"/>
-                          </a:solidFill>
-                          <a:latin typeface="Noto Sans" pitchFamily="34" charset="0"/>
-                          <a:ea typeface="Noto Sans" pitchFamily="34" charset="-122"/>
-                          <a:cs typeface="Noto Sans" pitchFamily="34" charset="-120"/>
-                        </a:rPr>
-                        <a:t>Tầng</a:t>
-                      </a:r>
-                      <a:endParaRPr lang="en-US" sz="1200" dirty="0">
-                        <a:latin typeface="Noto Sans" charset="0"/>
-                        <a:ea typeface="Noto Sans" charset="0"/>
-                        <a:cs typeface="Noto Sans" charset="0"/>
-                      </a:endParaRPr>
-                    </a:p>
-                  </a:txBody>
-                  <a:tcPr marL="101600" marR="101600" marT="63500" marB="63500" anchor="t">
-                    <a:lnL w="9525" cap="flat" cmpd="sng" algn="ctr">
-                      <a:solidFill>
-                        <a:srgbClr val="DCE7EA"/>
-                      </a:solidFill>
-                      <a:prstDash val="solid"/>
-                      <a:round/>
-                      <a:headEnd type="none" w="med" len="med"/>
-                      <a:tailEnd type="none" w="med" len="med"/>
-                    </a:lnL>
-                    <a:lnR w="9525" cap="flat" cmpd="sng" algn="ctr">
-                      <a:solidFill>
-                        <a:srgbClr val="DCE7EA"/>
-                      </a:solidFill>
-                      <a:prstDash val="solid"/>
-                      <a:round/>
-                      <a:headEnd type="none" w="med" len="med"/>
-                      <a:tailEnd type="none" w="med" len="med"/>
-                    </a:lnR>
-                    <a:lnT w="9525" cap="flat" cmpd="sng" algn="ctr">
-                      <a:solidFill>
-                        <a:srgbClr val="DCE7EA"/>
-                      </a:solidFill>
-                      <a:prstDash val="solid"/>
-                      <a:round/>
-                      <a:headEnd type="none" w="med" len="med"/>
-                      <a:tailEnd type="none" w="med" len="med"/>
-                    </a:lnT>
-                    <a:lnB w="9525" cap="flat" cmpd="sng" algn="ctr">
-                      <a:solidFill>
-                        <a:srgbClr val="DCE7EA"/>
-                      </a:solidFill>
-                      <a:prstDash val="solid"/>
-                      <a:round/>
-                      <a:headEnd type="none" w="med" len="med"/>
-                      <a:tailEnd type="none" w="med" len="med"/>
-                    </a:lnB>
-                    <a:solidFill>
-                      <a:srgbClr val="004671"/>
-                    </a:solidFill>
-                  </a:tcPr>
-                </a:tc>
                 <a:tc>
                   <a:txBody>
                     <a:bodyPr/>
@@ -8290,9 +8222,7 @@
                     </a:solidFill>
                   </a:tcPr>
                 </a:tc>
-              </a:tr>
-              <a:tr h="584650">
-                <a:tc rowSpan="5">
+                <a:tc>
                   <a:txBody>
                     <a:bodyPr/>
                     <a:lstStyle/>
@@ -8303,13 +8233,13 @@
                       <a:r>
                         <a:rPr lang="en-US" sz="1200" b="1" dirty="0">
                           <a:solidFill>
-                            <a:srgbClr val="004671"/>
+                            <a:srgbClr val="FFFFFF"/>
                           </a:solidFill>
                           <a:latin typeface="Noto Sans" pitchFamily="34" charset="0"/>
                           <a:ea typeface="Noto Sans" pitchFamily="34" charset="-122"/>
                           <a:cs typeface="Noto Sans" pitchFamily="34" charset="-120"/>
                         </a:rPr>
-                        <a:t>Functional</a:t>
+                        <a:t>Nhu cầu</a:t>
                       </a:r>
                       <a:endParaRPr lang="en-US" sz="1200" dirty="0">
                         <a:latin typeface="Noto Sans" charset="0"/>
@@ -8356,10 +8286,12 @@
                       <a:tailEnd type="none" w="med" len="med"/>
                     </a:lnB>
                     <a:solidFill>
-                      <a:srgbClr val="FFFFFF"/>
+                      <a:srgbClr val="004671"/>
                     </a:solidFill>
                   </a:tcPr>
                 </a:tc>
+              </a:tr>
+              <a:tr h="584650">
                 <a:tc>
                   <a:txBody>
                     <a:bodyPr/>
@@ -8369,6 +8301,17 @@
                         <a:buNone/>
                       </a:pPr>
                       <a:r>
+                        <a:rPr lang="en-US" sz="1200" b="1" dirty="0">
+                          <a:solidFill>
+                            <a:srgbClr val="3B81B1"/>
+                          </a:solidFill>
+                          <a:latin typeface="Noto Sans" pitchFamily="34" charset="0"/>
+                          <a:ea typeface="Noto Sans" pitchFamily="34" charset="-122"/>
+                          <a:cs typeface="Noto Sans" pitchFamily="34" charset="-120"/>
+                        </a:rPr>
+                        <a:t>[Functional] </a:t>
+                      </a:r>
+                      <a:r>
                         <a:rPr lang="en-US" sz="1200" dirty="0">
                           <a:solidFill>
                             <a:srgbClr val="22333F"/>
@@ -8377,7 +8320,7 @@
                           <a:ea typeface="Noto Sans" pitchFamily="34" charset="-122"/>
                           <a:cs typeface="Noto Sans" pitchFamily="34" charset="-120"/>
                         </a:rPr>
-                        <a:t>Con học giỏi</a:t>
+                        <a:t>Muốn con học giỏi môn tiếng Anh</a:t>
                       </a:r>
                       <a:endParaRPr lang="en-US" sz="1200" dirty="0">
                         <a:latin typeface="Noto Sans" charset="0"/>
@@ -8445,7 +8388,7 @@
                           <a:ea typeface="Noto Sans" pitchFamily="34" charset="-122"/>
                           <a:cs typeface="Noto Sans" pitchFamily="34" charset="-120"/>
                         </a:rPr>
-                        <a:t>Con học TA chưa tốt/tiến bộ chậm — phát âm sai, "câm" khi giao tiếp</a:t>
+                        <a:t>Con học TA chưa tốt/tiến bộ chậm — phát âm sai, không tự tin khi giao tiếp</a:t>
                       </a:r>
                       <a:endParaRPr lang="en-US" sz="1200" dirty="0">
                         <a:latin typeface="Noto Sans" charset="0"/>
@@ -8496,8 +8439,223 @@
                     </a:solidFill>
                   </a:tcPr>
                 </a:tc>
+                <a:tc rowSpan="2">
+                  <a:txBody>
+                    <a:bodyPr/>
+                    <a:lstStyle/>
+                    <a:p>
+                      <a:pPr indent="0" marL="0">
+                        <a:buNone/>
+                      </a:pPr>
+                      <a:r>
+                        <a:rPr lang="en-US" sz="1200" b="1" dirty="0">
+                          <a:solidFill>
+                            <a:srgbClr val="004671"/>
+                          </a:solidFill>
+                          <a:latin typeface="Noto Sans" pitchFamily="34" charset="0"/>
+                          <a:ea typeface="Noto Sans" pitchFamily="34" charset="-122"/>
+                          <a:cs typeface="Noto Sans" pitchFamily="34" charset="-120"/>
+                        </a:rPr>
+                        <a:t>Muốn con học giỏi tiếng Anh</a:t>
+                      </a:r>
+                      <a:endParaRPr lang="en-US" sz="1200" dirty="0">
+                        <a:latin typeface="Noto Sans" charset="0"/>
+                        <a:ea typeface="Noto Sans" charset="0"/>
+                        <a:cs typeface="Noto Sans" charset="0"/>
+                      </a:endParaRPr>
+                    </a:p>
+                  </a:txBody>
+                  <a:tcPr marL="101600" marR="101600" marT="63500" marB="63500" anchor="t">
+                    <a:lnL w="9525" cap="flat" cmpd="sng" algn="ctr">
+                      <a:solidFill>
+                        <a:srgbClr val="DCE7EA"/>
+                      </a:solidFill>
+                      <a:prstDash val="solid"/>
+                      <a:round/>
+                      <a:headEnd type="none" w="med" len="med"/>
+                      <a:tailEnd type="none" w="med" len="med"/>
+                    </a:lnL>
+                    <a:lnR w="9525" cap="flat" cmpd="sng" algn="ctr">
+                      <a:solidFill>
+                        <a:srgbClr val="DCE7EA"/>
+                      </a:solidFill>
+                      <a:prstDash val="solid"/>
+                      <a:round/>
+                      <a:headEnd type="none" w="med" len="med"/>
+                      <a:tailEnd type="none" w="med" len="med"/>
+                    </a:lnR>
+                    <a:lnT w="9525" cap="flat" cmpd="sng" algn="ctr">
+                      <a:solidFill>
+                        <a:srgbClr val="DCE7EA"/>
+                      </a:solidFill>
+                      <a:prstDash val="solid"/>
+                      <a:round/>
+                      <a:headEnd type="none" w="med" len="med"/>
+                      <a:tailEnd type="none" w="med" len="med"/>
+                    </a:lnT>
+                    <a:lnB w="9525" cap="flat" cmpd="sng" algn="ctr">
+                      <a:solidFill>
+                        <a:srgbClr val="DCE7EA"/>
+                      </a:solidFill>
+                      <a:prstDash val="solid"/>
+                      <a:round/>
+                      <a:headEnd type="none" w="med" len="med"/>
+                      <a:tailEnd type="none" w="med" len="med"/>
+                    </a:lnB>
+                    <a:solidFill>
+                      <a:srgbClr val="FFFFFF"/>
+                    </a:solidFill>
+                  </a:tcPr>
+                </a:tc>
               </a:tr>
               <a:tr h="584650">
+                <a:tc>
+                  <a:txBody>
+                    <a:bodyPr/>
+                    <a:lstStyle/>
+                    <a:p>
+                      <a:pPr indent="0" marL="0">
+                        <a:buNone/>
+                      </a:pPr>
+                      <a:r>
+                        <a:rPr lang="en-US" sz="1200" b="1" dirty="0">
+                          <a:solidFill>
+                            <a:srgbClr val="A5BE00"/>
+                          </a:solidFill>
+                          <a:latin typeface="Noto Sans" pitchFamily="34" charset="0"/>
+                          <a:ea typeface="Noto Sans" pitchFamily="34" charset="-122"/>
+                          <a:cs typeface="Noto Sans" pitchFamily="34" charset="-120"/>
+                        </a:rPr>
+                        <a:t>[Emotional] </a:t>
+                      </a:r>
+                      <a:r>
+                        <a:rPr lang="en-US" sz="1200" dirty="0">
+                          <a:solidFill>
+                            <a:srgbClr val="22333F"/>
+                          </a:solidFill>
+                          <a:latin typeface="Noto Sans" pitchFamily="34" charset="0"/>
+                          <a:ea typeface="Noto Sans" pitchFamily="34" charset="-122"/>
+                          <a:cs typeface="Noto Sans" pitchFamily="34" charset="-120"/>
+                        </a:rPr>
+                        <a:t>Yên tâm con tiến bộ thực chất mà không cần tự kèm</a:t>
+                      </a:r>
+                      <a:endParaRPr lang="en-US" sz="1200" dirty="0">
+                        <a:latin typeface="Noto Sans" charset="0"/>
+                        <a:ea typeface="Noto Sans" charset="0"/>
+                        <a:cs typeface="Noto Sans" charset="0"/>
+                      </a:endParaRPr>
+                    </a:p>
+                  </a:txBody>
+                  <a:tcPr marL="101600" marR="101600" marT="63500" marB="63500" anchor="t">
+                    <a:lnL w="9525" cap="flat" cmpd="sng" algn="ctr">
+                      <a:solidFill>
+                        <a:srgbClr val="DCE7EA"/>
+                      </a:solidFill>
+                      <a:prstDash val="solid"/>
+                      <a:round/>
+                      <a:headEnd type="none" w="med" len="med"/>
+                      <a:tailEnd type="none" w="med" len="med"/>
+                    </a:lnL>
+                    <a:lnR w="9525" cap="flat" cmpd="sng" algn="ctr">
+                      <a:solidFill>
+                        <a:srgbClr val="DCE7EA"/>
+                      </a:solidFill>
+                      <a:prstDash val="solid"/>
+                      <a:round/>
+                      <a:headEnd type="none" w="med" len="med"/>
+                      <a:tailEnd type="none" w="med" len="med"/>
+                    </a:lnR>
+                    <a:lnT w="9525" cap="flat" cmpd="sng" algn="ctr">
+                      <a:solidFill>
+                        <a:srgbClr val="DCE7EA"/>
+                      </a:solidFill>
+                      <a:prstDash val="solid"/>
+                      <a:round/>
+                      <a:headEnd type="none" w="med" len="med"/>
+                      <a:tailEnd type="none" w="med" len="med"/>
+                    </a:lnT>
+                    <a:lnB w="9525" cap="flat" cmpd="sng" algn="ctr">
+                      <a:solidFill>
+                        <a:srgbClr val="DCE7EA"/>
+                      </a:solidFill>
+                      <a:prstDash val="solid"/>
+                      <a:round/>
+                      <a:headEnd type="none" w="med" len="med"/>
+                      <a:tailEnd type="none" w="med" len="med"/>
+                    </a:lnB>
+                    <a:solidFill>
+                      <a:srgbClr val="F2FAFB"/>
+                    </a:solidFill>
+                  </a:tcPr>
+                </a:tc>
+                <a:tc>
+                  <a:txBody>
+                    <a:bodyPr/>
+                    <a:lstStyle/>
+                    <a:p>
+                      <a:pPr indent="0" marL="0">
+                        <a:buNone/>
+                      </a:pPr>
+                      <a:r>
+                        <a:rPr lang="en-US" sz="1200" dirty="0">
+                          <a:solidFill>
+                            <a:srgbClr val="5B6472"/>
+                          </a:solidFill>
+                          <a:latin typeface="Noto Sans" pitchFamily="34" charset="0"/>
+                          <a:ea typeface="Noto Sans" pitchFamily="34" charset="-122"/>
+                          <a:cs typeface="Noto Sans" pitchFamily="34" charset="-120"/>
+                        </a:rPr>
+                        <a:t>Con học TA chưa tốt; phụ huynh bận, phải nhắc nhở/đốc thúc con</a:t>
+                      </a:r>
+                      <a:endParaRPr lang="en-US" sz="1200" dirty="0">
+                        <a:latin typeface="Noto Sans" charset="0"/>
+                        <a:ea typeface="Noto Sans" charset="0"/>
+                        <a:cs typeface="Noto Sans" charset="0"/>
+                      </a:endParaRPr>
+                    </a:p>
+                  </a:txBody>
+                  <a:tcPr marL="101600" marR="101600" marT="63500" marB="63500" anchor="t">
+                    <a:lnL w="9525" cap="flat" cmpd="sng" algn="ctr">
+                      <a:solidFill>
+                        <a:srgbClr val="DCE7EA"/>
+                      </a:solidFill>
+                      <a:prstDash val="solid"/>
+                      <a:round/>
+                      <a:headEnd type="none" w="med" len="med"/>
+                      <a:tailEnd type="none" w="med" len="med"/>
+                    </a:lnL>
+                    <a:lnR w="9525" cap="flat" cmpd="sng" algn="ctr">
+                      <a:solidFill>
+                        <a:srgbClr val="DCE7EA"/>
+                      </a:solidFill>
+                      <a:prstDash val="solid"/>
+                      <a:round/>
+                      <a:headEnd type="none" w="med" len="med"/>
+                      <a:tailEnd type="none" w="med" len="med"/>
+                    </a:lnR>
+                    <a:lnT w="9525" cap="flat" cmpd="sng" algn="ctr">
+                      <a:solidFill>
+                        <a:srgbClr val="DCE7EA"/>
+                      </a:solidFill>
+                      <a:prstDash val="solid"/>
+                      <a:round/>
+                      <a:headEnd type="none" w="med" len="med"/>
+                      <a:tailEnd type="none" w="med" len="med"/>
+                    </a:lnT>
+                    <a:lnB w="9525" cap="flat" cmpd="sng" algn="ctr">
+                      <a:solidFill>
+                        <a:srgbClr val="DCE7EA"/>
+                      </a:solidFill>
+                      <a:prstDash val="solid"/>
+                      <a:round/>
+                      <a:headEnd type="none" w="med" len="med"/>
+                      <a:tailEnd type="none" w="med" len="med"/>
+                    </a:lnB>
+                    <a:solidFill>
+                      <a:srgbClr val="F2FAFB"/>
+                    </a:solidFill>
+                  </a:tcPr>
+                </a:tc>
                 <a:tc vMerge="1">
                   <a:txBody>
                     <a:bodyPr/>
@@ -8555,6 +8713,87 @@
                     </a:solidFill>
                   </a:tcPr>
                 </a:tc>
+              </a:tr>
+              <a:tr h="584650">
+                <a:tc>
+                  <a:txBody>
+                    <a:bodyPr/>
+                    <a:lstStyle/>
+                    <a:p>
+                      <a:pPr indent="0" marL="0">
+                        <a:buNone/>
+                      </a:pPr>
+                      <a:r>
+                        <a:rPr lang="en-US" sz="1200" b="1" dirty="0">
+                          <a:solidFill>
+                            <a:srgbClr val="3B81B1"/>
+                          </a:solidFill>
+                          <a:latin typeface="Noto Sans" pitchFamily="34" charset="0"/>
+                          <a:ea typeface="Noto Sans" pitchFamily="34" charset="-122"/>
+                          <a:cs typeface="Noto Sans" pitchFamily="34" charset="-120"/>
+                        </a:rPr>
+                        <a:t>[Functional] </a:t>
+                      </a:r>
+                      <a:r>
+                        <a:rPr lang="en-US" sz="1200" dirty="0">
+                          <a:solidFill>
+                            <a:srgbClr val="22333F"/>
+                          </a:solidFill>
+                          <a:latin typeface="Noto Sans" pitchFamily="34" charset="0"/>
+                          <a:ea typeface="Noto Sans" pitchFamily="34" charset="-122"/>
+                          <a:cs typeface="Noto Sans" pitchFamily="34" charset="-120"/>
+                        </a:rPr>
+                        <a:t>Muốn con phát triển toàn diện, không học lệch</a:t>
+                      </a:r>
+                      <a:endParaRPr lang="en-US" sz="1200" dirty="0">
+                        <a:latin typeface="Noto Sans" charset="0"/>
+                        <a:ea typeface="Noto Sans" charset="0"/>
+                        <a:cs typeface="Noto Sans" charset="0"/>
+                      </a:endParaRPr>
+                    </a:p>
+                  </a:txBody>
+                  <a:tcPr marL="101600" marR="101600" marT="63500" marB="63500" anchor="t">
+                    <a:lnL w="9525" cap="flat" cmpd="sng" algn="ctr">
+                      <a:solidFill>
+                        <a:srgbClr val="DCE7EA"/>
+                      </a:solidFill>
+                      <a:prstDash val="solid"/>
+                      <a:round/>
+                      <a:headEnd type="none" w="med" len="med"/>
+                      <a:tailEnd type="none" w="med" len="med"/>
+                    </a:lnL>
+                    <a:lnR w="9525" cap="flat" cmpd="sng" algn="ctr">
+                      <a:solidFill>
+                        <a:srgbClr val="DCE7EA"/>
+                      </a:solidFill>
+                      <a:prstDash val="solid"/>
+                      <a:round/>
+                      <a:headEnd type="none" w="med" len="med"/>
+                      <a:tailEnd type="none" w="med" len="med"/>
+                    </a:lnR>
+                    <a:lnT w="9525" cap="flat" cmpd="sng" algn="ctr">
+                      <a:solidFill>
+                        <a:srgbClr val="DCE7EA"/>
+                      </a:solidFill>
+                      <a:prstDash val="solid"/>
+                      <a:round/>
+                      <a:headEnd type="none" w="med" len="med"/>
+                      <a:tailEnd type="none" w="med" len="med"/>
+                    </a:lnT>
+                    <a:lnB w="9525" cap="flat" cmpd="sng" algn="ctr">
+                      <a:solidFill>
+                        <a:srgbClr val="DCE7EA"/>
+                      </a:solidFill>
+                      <a:prstDash val="solid"/>
+                      <a:round/>
+                      <a:headEnd type="none" w="med" len="med"/>
+                      <a:tailEnd type="none" w="med" len="med"/>
+                    </a:lnB>
+                    <a:solidFill>
+                      <a:srgbClr val="FFFFFF"/>
+                    </a:solidFill>
+                  </a:tcPr>
+                </a:tc>
                 <a:tc>
                   <a:txBody>
                     <a:bodyPr/>
@@ -8566,13 +8805,574 @@
                       <a:r>
                         <a:rPr lang="en-US" sz="1200" dirty="0">
                           <a:solidFill>
+                            <a:srgbClr val="5B6472"/>
+                          </a:solidFill>
+                          <a:latin typeface="Noto Sans" pitchFamily="34" charset="0"/>
+                          <a:ea typeface="Noto Sans" pitchFamily="34" charset="-122"/>
+                          <a:cs typeface="Noto Sans" pitchFamily="34" charset="-120"/>
+                        </a:rPr>
+                        <a:t>◆ Con học lệch, thiếu cân bằng giữa các môn (giả định đa môn, chưa xác nhận)</a:t>
+                      </a:r>
+                      <a:endParaRPr lang="en-US" sz="1200" dirty="0">
+                        <a:latin typeface="Noto Sans" charset="0"/>
+                        <a:ea typeface="Noto Sans" charset="0"/>
+                        <a:cs typeface="Noto Sans" charset="0"/>
+                      </a:endParaRPr>
+                    </a:p>
+                  </a:txBody>
+                  <a:tcPr marL="101600" marR="101600" marT="63500" marB="63500" anchor="t">
+                    <a:lnL w="9525" cap="flat" cmpd="sng" algn="ctr">
+                      <a:solidFill>
+                        <a:srgbClr val="DCE7EA"/>
+                      </a:solidFill>
+                      <a:prstDash val="solid"/>
+                      <a:round/>
+                      <a:headEnd type="none" w="med" len="med"/>
+                      <a:tailEnd type="none" w="med" len="med"/>
+                    </a:lnL>
+                    <a:lnR w="9525" cap="flat" cmpd="sng" algn="ctr">
+                      <a:solidFill>
+                        <a:srgbClr val="DCE7EA"/>
+                      </a:solidFill>
+                      <a:prstDash val="solid"/>
+                      <a:round/>
+                      <a:headEnd type="none" w="med" len="med"/>
+                      <a:tailEnd type="none" w="med" len="med"/>
+                    </a:lnR>
+                    <a:lnT w="9525" cap="flat" cmpd="sng" algn="ctr">
+                      <a:solidFill>
+                        <a:srgbClr val="DCE7EA"/>
+                      </a:solidFill>
+                      <a:prstDash val="solid"/>
+                      <a:round/>
+                      <a:headEnd type="none" w="med" len="med"/>
+                      <a:tailEnd type="none" w="med" len="med"/>
+                    </a:lnT>
+                    <a:lnB w="9525" cap="flat" cmpd="sng" algn="ctr">
+                      <a:solidFill>
+                        <a:srgbClr val="DCE7EA"/>
+                      </a:solidFill>
+                      <a:prstDash val="solid"/>
+                      <a:round/>
+                      <a:headEnd type="none" w="med" len="med"/>
+                      <a:tailEnd type="none" w="med" len="med"/>
+                    </a:lnB>
+                    <a:solidFill>
+                      <a:srgbClr val="FFFFFF"/>
+                    </a:solidFill>
+                  </a:tcPr>
+                </a:tc>
+                <a:tc rowSpan="3">
+                  <a:txBody>
+                    <a:bodyPr/>
+                    <a:lstStyle/>
+                    <a:p>
+                      <a:pPr indent="0" marL="0">
+                        <a:buNone/>
+                      </a:pPr>
+                      <a:r>
+                        <a:rPr lang="en-US" sz="1200" b="1" dirty="0">
+                          <a:solidFill>
+                            <a:srgbClr val="004671"/>
+                          </a:solidFill>
+                          <a:latin typeface="Noto Sans" pitchFamily="34" charset="0"/>
+                          <a:ea typeface="Noto Sans" pitchFamily="34" charset="-122"/>
+                          <a:cs typeface="Noto Sans" pitchFamily="34" charset="-120"/>
+                        </a:rPr>
+                        <a:t>Muốn con học giỏi toàn diện</a:t>
+                      </a:r>
+                      <a:endParaRPr lang="en-US" sz="1200" dirty="0">
+                        <a:latin typeface="Noto Sans" charset="0"/>
+                        <a:ea typeface="Noto Sans" charset="0"/>
+                        <a:cs typeface="Noto Sans" charset="0"/>
+                      </a:endParaRPr>
+                    </a:p>
+                  </a:txBody>
+                  <a:tcPr marL="101600" marR="101600" marT="63500" marB="63500" anchor="t">
+                    <a:lnL w="9525" cap="flat" cmpd="sng" algn="ctr">
+                      <a:solidFill>
+                        <a:srgbClr val="DCE7EA"/>
+                      </a:solidFill>
+                      <a:prstDash val="solid"/>
+                      <a:round/>
+                      <a:headEnd type="none" w="med" len="med"/>
+                      <a:tailEnd type="none" w="med" len="med"/>
+                    </a:lnL>
+                    <a:lnR w="9525" cap="flat" cmpd="sng" algn="ctr">
+                      <a:solidFill>
+                        <a:srgbClr val="DCE7EA"/>
+                      </a:solidFill>
+                      <a:prstDash val="solid"/>
+                      <a:round/>
+                      <a:headEnd type="none" w="med" len="med"/>
+                      <a:tailEnd type="none" w="med" len="med"/>
+                    </a:lnR>
+                    <a:lnT w="9525" cap="flat" cmpd="sng" algn="ctr">
+                      <a:solidFill>
+                        <a:srgbClr val="DCE7EA"/>
+                      </a:solidFill>
+                      <a:prstDash val="solid"/>
+                      <a:round/>
+                      <a:headEnd type="none" w="med" len="med"/>
+                      <a:tailEnd type="none" w="med" len="med"/>
+                    </a:lnT>
+                    <a:lnB w="9525" cap="flat" cmpd="sng" algn="ctr">
+                      <a:solidFill>
+                        <a:srgbClr val="DCE7EA"/>
+                      </a:solidFill>
+                      <a:prstDash val="solid"/>
+                      <a:round/>
+                      <a:headEnd type="none" w="med" len="med"/>
+                      <a:tailEnd type="none" w="med" len="med"/>
+                    </a:lnB>
+                    <a:solidFill>
+                      <a:srgbClr val="F2FAFB"/>
+                    </a:solidFill>
+                  </a:tcPr>
+                </a:tc>
+              </a:tr>
+              <a:tr h="584650">
+                <a:tc>
+                  <a:txBody>
+                    <a:bodyPr/>
+                    <a:lstStyle/>
+                    <a:p>
+                      <a:pPr indent="0" marL="0">
+                        <a:buNone/>
+                      </a:pPr>
+                      <a:r>
+                        <a:rPr lang="en-US" sz="1200" b="1" dirty="0">
+                          <a:solidFill>
+                            <a:srgbClr val="3B81B1"/>
+                          </a:solidFill>
+                          <a:latin typeface="Noto Sans" pitchFamily="34" charset="0"/>
+                          <a:ea typeface="Noto Sans" pitchFamily="34" charset="-122"/>
+                          <a:cs typeface="Noto Sans" pitchFamily="34" charset="-120"/>
+                        </a:rPr>
+                        <a:t>[Functional] </a:t>
+                      </a:r>
+                      <a:r>
+                        <a:rPr lang="en-US" sz="1200" dirty="0">
+                          <a:solidFill>
                             <a:srgbClr val="22333F"/>
                           </a:solidFill>
                           <a:latin typeface="Noto Sans" pitchFamily="34" charset="0"/>
                           <a:ea typeface="Noto Sans" pitchFamily="34" charset="-122"/>
                           <a:cs typeface="Noto Sans" pitchFamily="34" charset="-120"/>
                         </a:rPr>
-                        <a:t>Có người giám sát, đốc thúc con học thay bố mẹ</a:t>
+                        <a:t>Quản lý toàn bộ việc học của con ở một nơi, không phải tự tổng hợp</a:t>
+                      </a:r>
+                      <a:endParaRPr lang="en-US" sz="1200" dirty="0">
+                        <a:latin typeface="Noto Sans" charset="0"/>
+                        <a:ea typeface="Noto Sans" charset="0"/>
+                        <a:cs typeface="Noto Sans" charset="0"/>
+                      </a:endParaRPr>
+                    </a:p>
+                  </a:txBody>
+                  <a:tcPr marL="101600" marR="101600" marT="63500" marB="63500" anchor="t">
+                    <a:lnL w="9525" cap="flat" cmpd="sng" algn="ctr">
+                      <a:solidFill>
+                        <a:srgbClr val="DCE7EA"/>
+                      </a:solidFill>
+                      <a:prstDash val="solid"/>
+                      <a:round/>
+                      <a:headEnd type="none" w="med" len="med"/>
+                      <a:tailEnd type="none" w="med" len="med"/>
+                    </a:lnL>
+                    <a:lnR w="9525" cap="flat" cmpd="sng" algn="ctr">
+                      <a:solidFill>
+                        <a:srgbClr val="DCE7EA"/>
+                      </a:solidFill>
+                      <a:prstDash val="solid"/>
+                      <a:round/>
+                      <a:headEnd type="none" w="med" len="med"/>
+                      <a:tailEnd type="none" w="med" len="med"/>
+                    </a:lnR>
+                    <a:lnT w="9525" cap="flat" cmpd="sng" algn="ctr">
+                      <a:solidFill>
+                        <a:srgbClr val="DCE7EA"/>
+                      </a:solidFill>
+                      <a:prstDash val="solid"/>
+                      <a:round/>
+                      <a:headEnd type="none" w="med" len="med"/>
+                      <a:tailEnd type="none" w="med" len="med"/>
+                    </a:lnT>
+                    <a:lnB w="9525" cap="flat" cmpd="sng" algn="ctr">
+                      <a:solidFill>
+                        <a:srgbClr val="DCE7EA"/>
+                      </a:solidFill>
+                      <a:prstDash val="solid"/>
+                      <a:round/>
+                      <a:headEnd type="none" w="med" len="med"/>
+                      <a:tailEnd type="none" w="med" len="med"/>
+                    </a:lnB>
+                    <a:solidFill>
+                      <a:srgbClr val="F2FAFB"/>
+                    </a:solidFill>
+                  </a:tcPr>
+                </a:tc>
+                <a:tc>
+                  <a:txBody>
+                    <a:bodyPr/>
+                    <a:lstStyle/>
+                    <a:p>
+                      <a:pPr indent="0" marL="0">
+                        <a:buNone/>
+                      </a:pPr>
+                      <a:r>
+                        <a:rPr lang="en-US" sz="1200" dirty="0">
+                          <a:solidFill>
+                            <a:srgbClr val="5B6472"/>
+                          </a:solidFill>
+                          <a:latin typeface="Noto Sans" pitchFamily="34" charset="0"/>
+                          <a:ea typeface="Noto Sans" pitchFamily="34" charset="-122"/>
+                          <a:cs typeface="Noto Sans" pitchFamily="34" charset="-120"/>
+                        </a:rPr>
+                        <a:t>Khó quản lý khi con học nhiều môn/nhiều trung tâm</a:t>
+                      </a:r>
+                      <a:endParaRPr lang="en-US" sz="1200" dirty="0">
+                        <a:latin typeface="Noto Sans" charset="0"/>
+                        <a:ea typeface="Noto Sans" charset="0"/>
+                        <a:cs typeface="Noto Sans" charset="0"/>
+                      </a:endParaRPr>
+                    </a:p>
+                  </a:txBody>
+                  <a:tcPr marL="101600" marR="101600" marT="63500" marB="63500" anchor="t">
+                    <a:lnL w="9525" cap="flat" cmpd="sng" algn="ctr">
+                      <a:solidFill>
+                        <a:srgbClr val="DCE7EA"/>
+                      </a:solidFill>
+                      <a:prstDash val="solid"/>
+                      <a:round/>
+                      <a:headEnd type="none" w="med" len="med"/>
+                      <a:tailEnd type="none" w="med" len="med"/>
+                    </a:lnL>
+                    <a:lnR w="9525" cap="flat" cmpd="sng" algn="ctr">
+                      <a:solidFill>
+                        <a:srgbClr val="DCE7EA"/>
+                      </a:solidFill>
+                      <a:prstDash val="solid"/>
+                      <a:round/>
+                      <a:headEnd type="none" w="med" len="med"/>
+                      <a:tailEnd type="none" w="med" len="med"/>
+                    </a:lnR>
+                    <a:lnT w="9525" cap="flat" cmpd="sng" algn="ctr">
+                      <a:solidFill>
+                        <a:srgbClr val="DCE7EA"/>
+                      </a:solidFill>
+                      <a:prstDash val="solid"/>
+                      <a:round/>
+                      <a:headEnd type="none" w="med" len="med"/>
+                      <a:tailEnd type="none" w="med" len="med"/>
+                    </a:lnT>
+                    <a:lnB w="9525" cap="flat" cmpd="sng" algn="ctr">
+                      <a:solidFill>
+                        <a:srgbClr val="DCE7EA"/>
+                      </a:solidFill>
+                      <a:prstDash val="solid"/>
+                      <a:round/>
+                      <a:headEnd type="none" w="med" len="med"/>
+                      <a:tailEnd type="none" w="med" len="med"/>
+                    </a:lnB>
+                    <a:solidFill>
+                      <a:srgbClr val="F2FAFB"/>
+                    </a:solidFill>
+                  </a:tcPr>
+                </a:tc>
+                <a:tc vMerge="1">
+                  <a:txBody>
+                    <a:bodyPr/>
+                    <a:lstStyle/>
+                    <a:p>
+                      <a:pPr indent="0" marL="0">
+                        <a:buNone/>
+                      </a:pPr>
+                      <a:endParaRPr lang="en-US" sz="1200" dirty="0">
+                        <a:latin typeface="Noto Sans" charset="0"/>
+                        <a:ea typeface="Noto Sans" charset="0"/>
+                        <a:cs typeface="Noto Sans" charset="0"/>
+                      </a:endParaRPr>
+                    </a:p>
+                  </a:txBody>
+                  <a:tcPr marL="101600" marR="101600" marT="63500" marB="63500" anchor="t">
+                    <a:lnL w="9525" cap="flat" cmpd="sng" algn="ctr">
+                      <a:solidFill>
+                        <a:srgbClr val="DCE7EA"/>
+                      </a:solidFill>
+                      <a:prstDash val="solid"/>
+                      <a:round/>
+                      <a:headEnd type="none" w="med" len="med"/>
+                      <a:tailEnd type="none" w="med" len="med"/>
+                    </a:lnL>
+                    <a:lnR w="9525" cap="flat" cmpd="sng" algn="ctr">
+                      <a:solidFill>
+                        <a:srgbClr val="DCE7EA"/>
+                      </a:solidFill>
+                      <a:prstDash val="solid"/>
+                      <a:round/>
+                      <a:headEnd type="none" w="med" len="med"/>
+                      <a:tailEnd type="none" w="med" len="med"/>
+                    </a:lnR>
+                    <a:lnT w="9525" cap="flat" cmpd="sng" algn="ctr">
+                      <a:solidFill>
+                        <a:srgbClr val="DCE7EA"/>
+                      </a:solidFill>
+                      <a:prstDash val="solid"/>
+                      <a:round/>
+                      <a:headEnd type="none" w="med" len="med"/>
+                      <a:tailEnd type="none" w="med" len="med"/>
+                    </a:lnT>
+                    <a:lnB w="9525" cap="flat" cmpd="sng" algn="ctr">
+                      <a:solidFill>
+                        <a:srgbClr val="DCE7EA"/>
+                      </a:solidFill>
+                      <a:prstDash val="solid"/>
+                      <a:round/>
+                      <a:headEnd type="none" w="med" len="med"/>
+                      <a:tailEnd type="none" w="med" len="med"/>
+                    </a:lnB>
+                    <a:solidFill>
+                      <a:srgbClr val="F2FAFB"/>
+                    </a:solidFill>
+                  </a:tcPr>
+                </a:tc>
+              </a:tr>
+              <a:tr h="584650">
+                <a:tc>
+                  <a:txBody>
+                    <a:bodyPr/>
+                    <a:lstStyle/>
+                    <a:p>
+                      <a:pPr indent="0" marL="0">
+                        <a:buNone/>
+                      </a:pPr>
+                      <a:r>
+                        <a:rPr lang="en-US" sz="1200" b="1" dirty="0">
+                          <a:solidFill>
+                            <a:srgbClr val="3B81B1"/>
+                          </a:solidFill>
+                          <a:latin typeface="Noto Sans" pitchFamily="34" charset="0"/>
+                          <a:ea typeface="Noto Sans" pitchFamily="34" charset="-122"/>
+                          <a:cs typeface="Noto Sans" pitchFamily="34" charset="-120"/>
+                        </a:rPr>
+                        <a:t>[Functional] </a:t>
+                      </a:r>
+                      <a:r>
+                        <a:rPr lang="en-US" sz="1200" dirty="0">
+                          <a:solidFill>
+                            <a:srgbClr val="22333F"/>
+                          </a:solidFill>
+                          <a:latin typeface="Noto Sans" pitchFamily="34" charset="0"/>
+                          <a:ea typeface="Noto Sans" pitchFamily="34" charset="-122"/>
+                          <a:cs typeface="Noto Sans" pitchFamily="34" charset="-120"/>
+                        </a:rPr>
+                        <a:t>Duy trì việc học hiệu quả trong khả năng chi trả lâu dài</a:t>
+                      </a:r>
+                      <a:endParaRPr lang="en-US" sz="1200" dirty="0">
+                        <a:latin typeface="Noto Sans" charset="0"/>
+                        <a:ea typeface="Noto Sans" charset="0"/>
+                        <a:cs typeface="Noto Sans" charset="0"/>
+                      </a:endParaRPr>
+                    </a:p>
+                  </a:txBody>
+                  <a:tcPr marL="101600" marR="101600" marT="63500" marB="63500" anchor="t">
+                    <a:lnL w="9525" cap="flat" cmpd="sng" algn="ctr">
+                      <a:solidFill>
+                        <a:srgbClr val="DCE7EA"/>
+                      </a:solidFill>
+                      <a:prstDash val="solid"/>
+                      <a:round/>
+                      <a:headEnd type="none" w="med" len="med"/>
+                      <a:tailEnd type="none" w="med" len="med"/>
+                    </a:lnL>
+                    <a:lnR w="9525" cap="flat" cmpd="sng" algn="ctr">
+                      <a:solidFill>
+                        <a:srgbClr val="DCE7EA"/>
+                      </a:solidFill>
+                      <a:prstDash val="solid"/>
+                      <a:round/>
+                      <a:headEnd type="none" w="med" len="med"/>
+                      <a:tailEnd type="none" w="med" len="med"/>
+                    </a:lnR>
+                    <a:lnT w="9525" cap="flat" cmpd="sng" algn="ctr">
+                      <a:solidFill>
+                        <a:srgbClr val="DCE7EA"/>
+                      </a:solidFill>
+                      <a:prstDash val="solid"/>
+                      <a:round/>
+                      <a:headEnd type="none" w="med" len="med"/>
+                      <a:tailEnd type="none" w="med" len="med"/>
+                    </a:lnT>
+                    <a:lnB w="9525" cap="flat" cmpd="sng" algn="ctr">
+                      <a:solidFill>
+                        <a:srgbClr val="DCE7EA"/>
+                      </a:solidFill>
+                      <a:prstDash val="solid"/>
+                      <a:round/>
+                      <a:headEnd type="none" w="med" len="med"/>
+                      <a:tailEnd type="none" w="med" len="med"/>
+                    </a:lnB>
+                    <a:solidFill>
+                      <a:srgbClr val="FFFFFF"/>
+                    </a:solidFill>
+                  </a:tcPr>
+                </a:tc>
+                <a:tc>
+                  <a:txBody>
+                    <a:bodyPr/>
+                    <a:lstStyle/>
+                    <a:p>
+                      <a:pPr indent="0" marL="0">
+                        <a:buNone/>
+                      </a:pPr>
+                      <a:r>
+                        <a:rPr lang="en-US" sz="1200" dirty="0">
+                          <a:solidFill>
+                            <a:srgbClr val="5B6472"/>
+                          </a:solidFill>
+                          <a:latin typeface="Noto Sans" pitchFamily="34" charset="0"/>
+                          <a:ea typeface="Noto Sans" pitchFamily="34" charset="-122"/>
+                          <a:cs typeface="Noto Sans" pitchFamily="34" charset="-120"/>
+                        </a:rPr>
+                        <a:t>Chi phí cộng dồn nhiều lớp/trung tâm; tốn thời gian đưa đón</a:t>
+                      </a:r>
+                      <a:endParaRPr lang="en-US" sz="1200" dirty="0">
+                        <a:latin typeface="Noto Sans" charset="0"/>
+                        <a:ea typeface="Noto Sans" charset="0"/>
+                        <a:cs typeface="Noto Sans" charset="0"/>
+                      </a:endParaRPr>
+                    </a:p>
+                  </a:txBody>
+                  <a:tcPr marL="101600" marR="101600" marT="63500" marB="63500" anchor="t">
+                    <a:lnL w="9525" cap="flat" cmpd="sng" algn="ctr">
+                      <a:solidFill>
+                        <a:srgbClr val="DCE7EA"/>
+                      </a:solidFill>
+                      <a:prstDash val="solid"/>
+                      <a:round/>
+                      <a:headEnd type="none" w="med" len="med"/>
+                      <a:tailEnd type="none" w="med" len="med"/>
+                    </a:lnL>
+                    <a:lnR w="9525" cap="flat" cmpd="sng" algn="ctr">
+                      <a:solidFill>
+                        <a:srgbClr val="DCE7EA"/>
+                      </a:solidFill>
+                      <a:prstDash val="solid"/>
+                      <a:round/>
+                      <a:headEnd type="none" w="med" len="med"/>
+                      <a:tailEnd type="none" w="med" len="med"/>
+                    </a:lnR>
+                    <a:lnT w="9525" cap="flat" cmpd="sng" algn="ctr">
+                      <a:solidFill>
+                        <a:srgbClr val="DCE7EA"/>
+                      </a:solidFill>
+                      <a:prstDash val="solid"/>
+                      <a:round/>
+                      <a:headEnd type="none" w="med" len="med"/>
+                      <a:tailEnd type="none" w="med" len="med"/>
+                    </a:lnT>
+                    <a:lnB w="9525" cap="flat" cmpd="sng" algn="ctr">
+                      <a:solidFill>
+                        <a:srgbClr val="DCE7EA"/>
+                      </a:solidFill>
+                      <a:prstDash val="solid"/>
+                      <a:round/>
+                      <a:headEnd type="none" w="med" len="med"/>
+                      <a:tailEnd type="none" w="med" len="med"/>
+                    </a:lnB>
+                    <a:solidFill>
+                      <a:srgbClr val="FFFFFF"/>
+                    </a:solidFill>
+                  </a:tcPr>
+                </a:tc>
+                <a:tc vMerge="1">
+                  <a:txBody>
+                    <a:bodyPr/>
+                    <a:lstStyle/>
+                    <a:p>
+                      <a:pPr indent="0" marL="0">
+                        <a:buNone/>
+                      </a:pPr>
+                      <a:endParaRPr lang="en-US" sz="1200" dirty="0">
+                        <a:latin typeface="Noto Sans" charset="0"/>
+                        <a:ea typeface="Noto Sans" charset="0"/>
+                        <a:cs typeface="Noto Sans" charset="0"/>
+                      </a:endParaRPr>
+                    </a:p>
+                  </a:txBody>
+                  <a:tcPr marL="101600" marR="101600" marT="63500" marB="63500" anchor="t">
+                    <a:lnL w="9525" cap="flat" cmpd="sng" algn="ctr">
+                      <a:solidFill>
+                        <a:srgbClr val="DCE7EA"/>
+                      </a:solidFill>
+                      <a:prstDash val="solid"/>
+                      <a:round/>
+                      <a:headEnd type="none" w="med" len="med"/>
+                      <a:tailEnd type="none" w="med" len="med"/>
+                    </a:lnL>
+                    <a:lnR w="9525" cap="flat" cmpd="sng" algn="ctr">
+                      <a:solidFill>
+                        <a:srgbClr val="DCE7EA"/>
+                      </a:solidFill>
+                      <a:prstDash val="solid"/>
+                      <a:round/>
+                      <a:headEnd type="none" w="med" len="med"/>
+                      <a:tailEnd type="none" w="med" len="med"/>
+                    </a:lnR>
+                    <a:lnT w="9525" cap="flat" cmpd="sng" algn="ctr">
+                      <a:solidFill>
+                        <a:srgbClr val="DCE7EA"/>
+                      </a:solidFill>
+                      <a:prstDash val="solid"/>
+                      <a:round/>
+                      <a:headEnd type="none" w="med" len="med"/>
+                      <a:tailEnd type="none" w="med" len="med"/>
+                    </a:lnT>
+                    <a:lnB w="9525" cap="flat" cmpd="sng" algn="ctr">
+                      <a:solidFill>
+                        <a:srgbClr val="DCE7EA"/>
+                      </a:solidFill>
+                      <a:prstDash val="solid"/>
+                      <a:round/>
+                      <a:headEnd type="none" w="med" len="med"/>
+                      <a:tailEnd type="none" w="med" len="med"/>
+                    </a:lnB>
+                    <a:solidFill>
+                      <a:srgbClr val="F2FAFB"/>
+                    </a:solidFill>
+                  </a:tcPr>
+                </a:tc>
+              </a:tr>
+              <a:tr h="584650">
+                <a:tc>
+                  <a:txBody>
+                    <a:bodyPr/>
+                    <a:lstStyle/>
+                    <a:p>
+                      <a:pPr indent="0" marL="0">
+                        <a:buNone/>
+                      </a:pPr>
+                      <a:r>
+                        <a:rPr lang="en-US" sz="1200" b="1" dirty="0">
+                          <a:solidFill>
+                            <a:srgbClr val="3B81B1"/>
+                          </a:solidFill>
+                          <a:latin typeface="Noto Sans" pitchFamily="34" charset="0"/>
+                          <a:ea typeface="Noto Sans" pitchFamily="34" charset="-122"/>
+                          <a:cs typeface="Noto Sans" pitchFamily="34" charset="-120"/>
+                        </a:rPr>
+                        <a:t>[Functional] </a:t>
+                      </a:r>
+                      <a:r>
+                        <a:rPr lang="en-US" sz="1200" dirty="0">
+                          <a:solidFill>
+                            <a:srgbClr val="22333F"/>
+                          </a:solidFill>
+                          <a:latin typeface="Noto Sans" pitchFamily="34" charset="0"/>
+                          <a:ea typeface="Noto Sans" pitchFamily="34" charset="-122"/>
+                          <a:cs typeface="Noto Sans" pitchFamily="34" charset="-120"/>
+                        </a:rPr>
+                        <a:t>Có người giám sát, đốc thúc con học thay bố mẹ, con được học cá nhân hóa</a:t>
                       </a:r>
                       <a:endParaRPr lang="en-US" sz="1200" dirty="0">
                         <a:latin typeface="Noto Sans" charset="0"/>
@@ -8691,594 +9491,7 @@
                     </a:solidFill>
                   </a:tcPr>
                 </a:tc>
-              </a:tr>
-              <a:tr h="584650">
-                <a:tc vMerge="1">
-                  <a:txBody>
-                    <a:bodyPr/>
-                    <a:lstStyle/>
-                    <a:p>
-                      <a:pPr indent="0" marL="0">
-                        <a:buNone/>
-                      </a:pPr>
-                      <a:endParaRPr lang="en-US" sz="1200" dirty="0">
-                        <a:latin typeface="Noto Sans" charset="0"/>
-                        <a:ea typeface="Noto Sans" charset="0"/>
-                        <a:cs typeface="Noto Sans" charset="0"/>
-                      </a:endParaRPr>
-                    </a:p>
-                  </a:txBody>
-                  <a:tcPr marL="101600" marR="101600" marT="63500" marB="63500" anchor="t">
-                    <a:lnL w="9525" cap="flat" cmpd="sng" algn="ctr">
-                      <a:solidFill>
-                        <a:srgbClr val="DCE7EA"/>
-                      </a:solidFill>
-                      <a:prstDash val="solid"/>
-                      <a:round/>
-                      <a:headEnd type="none" w="med" len="med"/>
-                      <a:tailEnd type="none" w="med" len="med"/>
-                    </a:lnL>
-                    <a:lnR w="9525" cap="flat" cmpd="sng" algn="ctr">
-                      <a:solidFill>
-                        <a:srgbClr val="DCE7EA"/>
-                      </a:solidFill>
-                      <a:prstDash val="solid"/>
-                      <a:round/>
-                      <a:headEnd type="none" w="med" len="med"/>
-                      <a:tailEnd type="none" w="med" len="med"/>
-                    </a:lnR>
-                    <a:lnT w="9525" cap="flat" cmpd="sng" algn="ctr">
-                      <a:solidFill>
-                        <a:srgbClr val="DCE7EA"/>
-                      </a:solidFill>
-                      <a:prstDash val="solid"/>
-                      <a:round/>
-                      <a:headEnd type="none" w="med" len="med"/>
-                      <a:tailEnd type="none" w="med" len="med"/>
-                    </a:lnT>
-                    <a:lnB w="9525" cap="flat" cmpd="sng" algn="ctr">
-                      <a:solidFill>
-                        <a:srgbClr val="DCE7EA"/>
-                      </a:solidFill>
-                      <a:prstDash val="solid"/>
-                      <a:round/>
-                      <a:headEnd type="none" w="med" len="med"/>
-                      <a:tailEnd type="none" w="med" len="med"/>
-                    </a:lnB>
-                    <a:solidFill>
-                      <a:srgbClr val="FFFFFF"/>
-                    </a:solidFill>
-                  </a:tcPr>
-                </a:tc>
-                <a:tc>
-                  <a:txBody>
-                    <a:bodyPr/>
-                    <a:lstStyle/>
-                    <a:p>
-                      <a:pPr indent="0" marL="0">
-                        <a:buNone/>
-                      </a:pPr>
-                      <a:r>
-                        <a:rPr lang="en-US" sz="1200" dirty="0">
-                          <a:solidFill>
-                            <a:srgbClr val="22333F"/>
-                          </a:solidFill>
-                          <a:latin typeface="Noto Sans" pitchFamily="34" charset="0"/>
-                          <a:ea typeface="Noto Sans" pitchFamily="34" charset="-122"/>
-                          <a:cs typeface="Noto Sans" pitchFamily="34" charset="-120"/>
-                        </a:rPr>
-                        <a:t>Muốn con không học lệch</a:t>
-                      </a:r>
-                      <a:endParaRPr lang="en-US" sz="1200" dirty="0">
-                        <a:latin typeface="Noto Sans" charset="0"/>
-                        <a:ea typeface="Noto Sans" charset="0"/>
-                        <a:cs typeface="Noto Sans" charset="0"/>
-                      </a:endParaRPr>
-                    </a:p>
-                  </a:txBody>
-                  <a:tcPr marL="101600" marR="101600" marT="63500" marB="63500" anchor="t">
-                    <a:lnL w="9525" cap="flat" cmpd="sng" algn="ctr">
-                      <a:solidFill>
-                        <a:srgbClr val="DCE7EA"/>
-                      </a:solidFill>
-                      <a:prstDash val="solid"/>
-                      <a:round/>
-                      <a:headEnd type="none" w="med" len="med"/>
-                      <a:tailEnd type="none" w="med" len="med"/>
-                    </a:lnL>
-                    <a:lnR w="9525" cap="flat" cmpd="sng" algn="ctr">
-                      <a:solidFill>
-                        <a:srgbClr val="DCE7EA"/>
-                      </a:solidFill>
-                      <a:prstDash val="solid"/>
-                      <a:round/>
-                      <a:headEnd type="none" w="med" len="med"/>
-                      <a:tailEnd type="none" w="med" len="med"/>
-                    </a:lnR>
-                    <a:lnT w="9525" cap="flat" cmpd="sng" algn="ctr">
-                      <a:solidFill>
-                        <a:srgbClr val="DCE7EA"/>
-                      </a:solidFill>
-                      <a:prstDash val="solid"/>
-                      <a:round/>
-                      <a:headEnd type="none" w="med" len="med"/>
-                      <a:tailEnd type="none" w="med" len="med"/>
-                    </a:lnT>
-                    <a:lnB w="9525" cap="flat" cmpd="sng" algn="ctr">
-                      <a:solidFill>
-                        <a:srgbClr val="DCE7EA"/>
-                      </a:solidFill>
-                      <a:prstDash val="solid"/>
-                      <a:round/>
-                      <a:headEnd type="none" w="med" len="med"/>
-                      <a:tailEnd type="none" w="med" len="med"/>
-                    </a:lnB>
-                    <a:solidFill>
-                      <a:srgbClr val="FFFFFF"/>
-                    </a:solidFill>
-                  </a:tcPr>
-                </a:tc>
-                <a:tc>
-                  <a:txBody>
-                    <a:bodyPr/>
-                    <a:lstStyle/>
-                    <a:p>
-                      <a:pPr indent="0" marL="0">
-                        <a:buNone/>
-                      </a:pPr>
-                      <a:r>
-                        <a:rPr lang="en-US" sz="1200" dirty="0">
-                          <a:solidFill>
-                            <a:srgbClr val="5B6472"/>
-                          </a:solidFill>
-                          <a:latin typeface="Noto Sans" pitchFamily="34" charset="0"/>
-                          <a:ea typeface="Noto Sans" pitchFamily="34" charset="-122"/>
-                          <a:cs typeface="Noto Sans" pitchFamily="34" charset="-120"/>
-                        </a:rPr>
-                        <a:t>◆ Con học lệch, thiếu cân bằng giữa các môn (giả định đa môn, chưa xác nhận)</a:t>
-                      </a:r>
-                      <a:endParaRPr lang="en-US" sz="1200" dirty="0">
-                        <a:latin typeface="Noto Sans" charset="0"/>
-                        <a:ea typeface="Noto Sans" charset="0"/>
-                        <a:cs typeface="Noto Sans" charset="0"/>
-                      </a:endParaRPr>
-                    </a:p>
-                  </a:txBody>
-                  <a:tcPr marL="101600" marR="101600" marT="63500" marB="63500" anchor="t">
-                    <a:lnL w="9525" cap="flat" cmpd="sng" algn="ctr">
-                      <a:solidFill>
-                        <a:srgbClr val="DCE7EA"/>
-                      </a:solidFill>
-                      <a:prstDash val="solid"/>
-                      <a:round/>
-                      <a:headEnd type="none" w="med" len="med"/>
-                      <a:tailEnd type="none" w="med" len="med"/>
-                    </a:lnL>
-                    <a:lnR w="9525" cap="flat" cmpd="sng" algn="ctr">
-                      <a:solidFill>
-                        <a:srgbClr val="DCE7EA"/>
-                      </a:solidFill>
-                      <a:prstDash val="solid"/>
-                      <a:round/>
-                      <a:headEnd type="none" w="med" len="med"/>
-                      <a:tailEnd type="none" w="med" len="med"/>
-                    </a:lnR>
-                    <a:lnT w="9525" cap="flat" cmpd="sng" algn="ctr">
-                      <a:solidFill>
-                        <a:srgbClr val="DCE7EA"/>
-                      </a:solidFill>
-                      <a:prstDash val="solid"/>
-                      <a:round/>
-                      <a:headEnd type="none" w="med" len="med"/>
-                      <a:tailEnd type="none" w="med" len="med"/>
-                    </a:lnT>
-                    <a:lnB w="9525" cap="flat" cmpd="sng" algn="ctr">
-                      <a:solidFill>
-                        <a:srgbClr val="DCE7EA"/>
-                      </a:solidFill>
-                      <a:prstDash val="solid"/>
-                      <a:round/>
-                      <a:headEnd type="none" w="med" len="med"/>
-                      <a:tailEnd type="none" w="med" len="med"/>
-                    </a:lnB>
-                    <a:solidFill>
-                      <a:srgbClr val="FFFFFF"/>
-                    </a:solidFill>
-                  </a:tcPr>
-                </a:tc>
-              </a:tr>
-              <a:tr h="584650">
-                <a:tc vMerge="1">
-                  <a:txBody>
-                    <a:bodyPr/>
-                    <a:lstStyle/>
-                    <a:p>
-                      <a:pPr indent="0" marL="0">
-                        <a:buNone/>
-                      </a:pPr>
-                      <a:endParaRPr lang="en-US" sz="1200" dirty="0">
-                        <a:latin typeface="Noto Sans" charset="0"/>
-                        <a:ea typeface="Noto Sans" charset="0"/>
-                        <a:cs typeface="Noto Sans" charset="0"/>
-                      </a:endParaRPr>
-                    </a:p>
-                  </a:txBody>
-                  <a:tcPr marL="101600" marR="101600" marT="63500" marB="63500" anchor="t">
-                    <a:lnL w="9525" cap="flat" cmpd="sng" algn="ctr">
-                      <a:solidFill>
-                        <a:srgbClr val="DCE7EA"/>
-                      </a:solidFill>
-                      <a:prstDash val="solid"/>
-                      <a:round/>
-                      <a:headEnd type="none" w="med" len="med"/>
-                      <a:tailEnd type="none" w="med" len="med"/>
-                    </a:lnL>
-                    <a:lnR w="9525" cap="flat" cmpd="sng" algn="ctr">
-                      <a:solidFill>
-                        <a:srgbClr val="DCE7EA"/>
-                      </a:solidFill>
-                      <a:prstDash val="solid"/>
-                      <a:round/>
-                      <a:headEnd type="none" w="med" len="med"/>
-                      <a:tailEnd type="none" w="med" len="med"/>
-                    </a:lnR>
-                    <a:lnT w="9525" cap="flat" cmpd="sng" algn="ctr">
-                      <a:solidFill>
-                        <a:srgbClr val="DCE7EA"/>
-                      </a:solidFill>
-                      <a:prstDash val="solid"/>
-                      <a:round/>
-                      <a:headEnd type="none" w="med" len="med"/>
-                      <a:tailEnd type="none" w="med" len="med"/>
-                    </a:lnT>
-                    <a:lnB w="9525" cap="flat" cmpd="sng" algn="ctr">
-                      <a:solidFill>
-                        <a:srgbClr val="DCE7EA"/>
-                      </a:solidFill>
-                      <a:prstDash val="solid"/>
-                      <a:round/>
-                      <a:headEnd type="none" w="med" len="med"/>
-                      <a:tailEnd type="none" w="med" len="med"/>
-                    </a:lnB>
-                    <a:solidFill>
-                      <a:srgbClr val="FFFFFF"/>
-                    </a:solidFill>
-                  </a:tcPr>
-                </a:tc>
-                <a:tc>
-                  <a:txBody>
-                    <a:bodyPr/>
-                    <a:lstStyle/>
-                    <a:p>
-                      <a:pPr indent="0" marL="0">
-                        <a:buNone/>
-                      </a:pPr>
-                      <a:r>
-                        <a:rPr lang="en-US" sz="1200" dirty="0">
-                          <a:solidFill>
-                            <a:srgbClr val="22333F"/>
-                          </a:solidFill>
-                          <a:latin typeface="Noto Sans" pitchFamily="34" charset="0"/>
-                          <a:ea typeface="Noto Sans" pitchFamily="34" charset="-122"/>
-                          <a:cs typeface="Noto Sans" pitchFamily="34" charset="-120"/>
-                        </a:rPr>
-                        <a:t>Duy trì việc học hiệu quả trong khả năng chi trả lâu dài</a:t>
-                      </a:r>
-                      <a:endParaRPr lang="en-US" sz="1200" dirty="0">
-                        <a:latin typeface="Noto Sans" charset="0"/>
-                        <a:ea typeface="Noto Sans" charset="0"/>
-                        <a:cs typeface="Noto Sans" charset="0"/>
-                      </a:endParaRPr>
-                    </a:p>
-                  </a:txBody>
-                  <a:tcPr marL="101600" marR="101600" marT="63500" marB="63500" anchor="t">
-                    <a:lnL w="9525" cap="flat" cmpd="sng" algn="ctr">
-                      <a:solidFill>
-                        <a:srgbClr val="DCE7EA"/>
-                      </a:solidFill>
-                      <a:prstDash val="solid"/>
-                      <a:round/>
-                      <a:headEnd type="none" w="med" len="med"/>
-                      <a:tailEnd type="none" w="med" len="med"/>
-                    </a:lnL>
-                    <a:lnR w="9525" cap="flat" cmpd="sng" algn="ctr">
-                      <a:solidFill>
-                        <a:srgbClr val="DCE7EA"/>
-                      </a:solidFill>
-                      <a:prstDash val="solid"/>
-                      <a:round/>
-                      <a:headEnd type="none" w="med" len="med"/>
-                      <a:tailEnd type="none" w="med" len="med"/>
-                    </a:lnR>
-                    <a:lnT w="9525" cap="flat" cmpd="sng" algn="ctr">
-                      <a:solidFill>
-                        <a:srgbClr val="DCE7EA"/>
-                      </a:solidFill>
-                      <a:prstDash val="solid"/>
-                      <a:round/>
-                      <a:headEnd type="none" w="med" len="med"/>
-                      <a:tailEnd type="none" w="med" len="med"/>
-                    </a:lnT>
-                    <a:lnB w="9525" cap="flat" cmpd="sng" algn="ctr">
-                      <a:solidFill>
-                        <a:srgbClr val="DCE7EA"/>
-                      </a:solidFill>
-                      <a:prstDash val="solid"/>
-                      <a:round/>
-                      <a:headEnd type="none" w="med" len="med"/>
-                      <a:tailEnd type="none" w="med" len="med"/>
-                    </a:lnB>
-                    <a:solidFill>
-                      <a:srgbClr val="F2FAFB"/>
-                    </a:solidFill>
-                  </a:tcPr>
-                </a:tc>
-                <a:tc>
-                  <a:txBody>
-                    <a:bodyPr/>
-                    <a:lstStyle/>
-                    <a:p>
-                      <a:pPr indent="0" marL="0">
-                        <a:buNone/>
-                      </a:pPr>
-                      <a:r>
-                        <a:rPr lang="en-US" sz="1200" dirty="0">
-                          <a:solidFill>
-                            <a:srgbClr val="5B6472"/>
-                          </a:solidFill>
-                          <a:latin typeface="Noto Sans" pitchFamily="34" charset="0"/>
-                          <a:ea typeface="Noto Sans" pitchFamily="34" charset="-122"/>
-                          <a:cs typeface="Noto Sans" pitchFamily="34" charset="-120"/>
-                        </a:rPr>
-                        <a:t>Chi phí cộng dồn nhiều lớp/trung tâm; tốn thời gian đưa đón</a:t>
-                      </a:r>
-                      <a:endParaRPr lang="en-US" sz="1200" dirty="0">
-                        <a:latin typeface="Noto Sans" charset="0"/>
-                        <a:ea typeface="Noto Sans" charset="0"/>
-                        <a:cs typeface="Noto Sans" charset="0"/>
-                      </a:endParaRPr>
-                    </a:p>
-                  </a:txBody>
-                  <a:tcPr marL="101600" marR="101600" marT="63500" marB="63500" anchor="t">
-                    <a:lnL w="9525" cap="flat" cmpd="sng" algn="ctr">
-                      <a:solidFill>
-                        <a:srgbClr val="DCE7EA"/>
-                      </a:solidFill>
-                      <a:prstDash val="solid"/>
-                      <a:round/>
-                      <a:headEnd type="none" w="med" len="med"/>
-                      <a:tailEnd type="none" w="med" len="med"/>
-                    </a:lnL>
-                    <a:lnR w="9525" cap="flat" cmpd="sng" algn="ctr">
-                      <a:solidFill>
-                        <a:srgbClr val="DCE7EA"/>
-                      </a:solidFill>
-                      <a:prstDash val="solid"/>
-                      <a:round/>
-                      <a:headEnd type="none" w="med" len="med"/>
-                      <a:tailEnd type="none" w="med" len="med"/>
-                    </a:lnR>
-                    <a:lnT w="9525" cap="flat" cmpd="sng" algn="ctr">
-                      <a:solidFill>
-                        <a:srgbClr val="DCE7EA"/>
-                      </a:solidFill>
-                      <a:prstDash val="solid"/>
-                      <a:round/>
-                      <a:headEnd type="none" w="med" len="med"/>
-                      <a:tailEnd type="none" w="med" len="med"/>
-                    </a:lnT>
-                    <a:lnB w="9525" cap="flat" cmpd="sng" algn="ctr">
-                      <a:solidFill>
-                        <a:srgbClr val="DCE7EA"/>
-                      </a:solidFill>
-                      <a:prstDash val="solid"/>
-                      <a:round/>
-                      <a:headEnd type="none" w="med" len="med"/>
-                      <a:tailEnd type="none" w="med" len="med"/>
-                    </a:lnB>
-                    <a:solidFill>
-                      <a:srgbClr val="F2FAFB"/>
-                    </a:solidFill>
-                  </a:tcPr>
-                </a:tc>
-              </a:tr>
-              <a:tr h="584650">
-                <a:tc vMerge="1">
-                  <a:txBody>
-                    <a:bodyPr/>
-                    <a:lstStyle/>
-                    <a:p>
-                      <a:pPr indent="0" marL="0">
-                        <a:buNone/>
-                      </a:pPr>
-                      <a:endParaRPr lang="en-US" sz="1200" dirty="0">
-                        <a:latin typeface="Noto Sans" charset="0"/>
-                        <a:ea typeface="Noto Sans" charset="0"/>
-                        <a:cs typeface="Noto Sans" charset="0"/>
-                      </a:endParaRPr>
-                    </a:p>
-                  </a:txBody>
-                  <a:tcPr marL="101600" marR="101600" marT="63500" marB="63500" anchor="t">
-                    <a:lnL w="9525" cap="flat" cmpd="sng" algn="ctr">
-                      <a:solidFill>
-                        <a:srgbClr val="DCE7EA"/>
-                      </a:solidFill>
-                      <a:prstDash val="solid"/>
-                      <a:round/>
-                      <a:headEnd type="none" w="med" len="med"/>
-                      <a:tailEnd type="none" w="med" len="med"/>
-                    </a:lnL>
-                    <a:lnR w="9525" cap="flat" cmpd="sng" algn="ctr">
-                      <a:solidFill>
-                        <a:srgbClr val="DCE7EA"/>
-                      </a:solidFill>
-                      <a:prstDash val="solid"/>
-                      <a:round/>
-                      <a:headEnd type="none" w="med" len="med"/>
-                      <a:tailEnd type="none" w="med" len="med"/>
-                    </a:lnR>
-                    <a:lnT w="9525" cap="flat" cmpd="sng" algn="ctr">
-                      <a:solidFill>
-                        <a:srgbClr val="DCE7EA"/>
-                      </a:solidFill>
-                      <a:prstDash val="solid"/>
-                      <a:round/>
-                      <a:headEnd type="none" w="med" len="med"/>
-                      <a:tailEnd type="none" w="med" len="med"/>
-                    </a:lnT>
-                    <a:lnB w="9525" cap="flat" cmpd="sng" algn="ctr">
-                      <a:solidFill>
-                        <a:srgbClr val="DCE7EA"/>
-                      </a:solidFill>
-                      <a:prstDash val="solid"/>
-                      <a:round/>
-                      <a:headEnd type="none" w="med" len="med"/>
-                      <a:tailEnd type="none" w="med" len="med"/>
-                    </a:lnB>
-                    <a:solidFill>
-                      <a:srgbClr val="FFFFFF"/>
-                    </a:solidFill>
-                  </a:tcPr>
-                </a:tc>
-                <a:tc>
-                  <a:txBody>
-                    <a:bodyPr/>
-                    <a:lstStyle/>
-                    <a:p>
-                      <a:pPr indent="0" marL="0">
-                        <a:buNone/>
-                      </a:pPr>
-                      <a:r>
-                        <a:rPr lang="en-US" sz="1200" dirty="0">
-                          <a:solidFill>
-                            <a:srgbClr val="22333F"/>
-                          </a:solidFill>
-                          <a:latin typeface="Noto Sans" pitchFamily="34" charset="0"/>
-                          <a:ea typeface="Noto Sans" pitchFamily="34" charset="-122"/>
-                          <a:cs typeface="Noto Sans" pitchFamily="34" charset="-120"/>
-                        </a:rPr>
-                        <a:t>Quản lý toàn bộ việc học của con ở một nơi, không phải tự tổng hợp</a:t>
-                      </a:r>
-                      <a:endParaRPr lang="en-US" sz="1200" dirty="0">
-                        <a:latin typeface="Noto Sans" charset="0"/>
-                        <a:ea typeface="Noto Sans" charset="0"/>
-                        <a:cs typeface="Noto Sans" charset="0"/>
-                      </a:endParaRPr>
-                    </a:p>
-                  </a:txBody>
-                  <a:tcPr marL="101600" marR="101600" marT="63500" marB="63500" anchor="t">
-                    <a:lnL w="9525" cap="flat" cmpd="sng" algn="ctr">
-                      <a:solidFill>
-                        <a:srgbClr val="DCE7EA"/>
-                      </a:solidFill>
-                      <a:prstDash val="solid"/>
-                      <a:round/>
-                      <a:headEnd type="none" w="med" len="med"/>
-                      <a:tailEnd type="none" w="med" len="med"/>
-                    </a:lnL>
-                    <a:lnR w="9525" cap="flat" cmpd="sng" algn="ctr">
-                      <a:solidFill>
-                        <a:srgbClr val="DCE7EA"/>
-                      </a:solidFill>
-                      <a:prstDash val="solid"/>
-                      <a:round/>
-                      <a:headEnd type="none" w="med" len="med"/>
-                      <a:tailEnd type="none" w="med" len="med"/>
-                    </a:lnR>
-                    <a:lnT w="9525" cap="flat" cmpd="sng" algn="ctr">
-                      <a:solidFill>
-                        <a:srgbClr val="DCE7EA"/>
-                      </a:solidFill>
-                      <a:prstDash val="solid"/>
-                      <a:round/>
-                      <a:headEnd type="none" w="med" len="med"/>
-                      <a:tailEnd type="none" w="med" len="med"/>
-                    </a:lnT>
-                    <a:lnB w="9525" cap="flat" cmpd="sng" algn="ctr">
-                      <a:solidFill>
-                        <a:srgbClr val="DCE7EA"/>
-                      </a:solidFill>
-                      <a:prstDash val="solid"/>
-                      <a:round/>
-                      <a:headEnd type="none" w="med" len="med"/>
-                      <a:tailEnd type="none" w="med" len="med"/>
-                    </a:lnB>
-                    <a:solidFill>
-                      <a:srgbClr val="FFFFFF"/>
-                    </a:solidFill>
-                  </a:tcPr>
-                </a:tc>
-                <a:tc>
-                  <a:txBody>
-                    <a:bodyPr/>
-                    <a:lstStyle/>
-                    <a:p>
-                      <a:pPr indent="0" marL="0">
-                        <a:buNone/>
-                      </a:pPr>
-                      <a:r>
-                        <a:rPr lang="en-US" sz="1200" dirty="0">
-                          <a:solidFill>
-                            <a:srgbClr val="5B6472"/>
-                          </a:solidFill>
-                          <a:latin typeface="Noto Sans" pitchFamily="34" charset="0"/>
-                          <a:ea typeface="Noto Sans" pitchFamily="34" charset="-122"/>
-                          <a:cs typeface="Noto Sans" pitchFamily="34" charset="-120"/>
-                        </a:rPr>
-                        <a:t>Khó quản lý khi con học nhiều môn/nhiều trung tâm</a:t>
-                      </a:r>
-                      <a:endParaRPr lang="en-US" sz="1200" dirty="0">
-                        <a:latin typeface="Noto Sans" charset="0"/>
-                        <a:ea typeface="Noto Sans" charset="0"/>
-                        <a:cs typeface="Noto Sans" charset="0"/>
-                      </a:endParaRPr>
-                    </a:p>
-                  </a:txBody>
-                  <a:tcPr marL="101600" marR="101600" marT="63500" marB="63500" anchor="t">
-                    <a:lnL w="9525" cap="flat" cmpd="sng" algn="ctr">
-                      <a:solidFill>
-                        <a:srgbClr val="DCE7EA"/>
-                      </a:solidFill>
-                      <a:prstDash val="solid"/>
-                      <a:round/>
-                      <a:headEnd type="none" w="med" len="med"/>
-                      <a:tailEnd type="none" w="med" len="med"/>
-                    </a:lnL>
-                    <a:lnR w="9525" cap="flat" cmpd="sng" algn="ctr">
-                      <a:solidFill>
-                        <a:srgbClr val="DCE7EA"/>
-                      </a:solidFill>
-                      <a:prstDash val="solid"/>
-                      <a:round/>
-                      <a:headEnd type="none" w="med" len="med"/>
-                      <a:tailEnd type="none" w="med" len="med"/>
-                    </a:lnR>
-                    <a:lnT w="9525" cap="flat" cmpd="sng" algn="ctr">
-                      <a:solidFill>
-                        <a:srgbClr val="DCE7EA"/>
-                      </a:solidFill>
-                      <a:prstDash val="solid"/>
-                      <a:round/>
-                      <a:headEnd type="none" w="med" len="med"/>
-                      <a:tailEnd type="none" w="med" len="med"/>
-                    </a:lnT>
-                    <a:lnB w="9525" cap="flat" cmpd="sng" algn="ctr">
-                      <a:solidFill>
-                        <a:srgbClr val="DCE7EA"/>
-                      </a:solidFill>
-                      <a:prstDash val="solid"/>
-                      <a:round/>
-                      <a:headEnd type="none" w="med" len="med"/>
-                      <a:tailEnd type="none" w="med" len="med"/>
-                    </a:lnB>
-                    <a:solidFill>
-                      <a:srgbClr val="FFFFFF"/>
-                    </a:solidFill>
-                  </a:tcPr>
-                </a:tc>
-              </a:tr>
-              <a:tr h="584650">
-                <a:tc rowSpan="2">
+                <a:tc rowSpan="3">
                   <a:txBody>
                     <a:bodyPr/>
                     <a:lstStyle/>
@@ -9295,7 +9508,7 @@
                           <a:ea typeface="Noto Sans" pitchFamily="34" charset="-122"/>
                           <a:cs typeface="Noto Sans" pitchFamily="34" charset="-120"/>
                         </a:rPr>
-                        <a:t>Emotional</a:t>
+                        <a:t>Muốn con được đồng hành, đốc thúc học tập</a:t>
                       </a:r>
                       <a:endParaRPr lang="en-US" sz="1200" dirty="0">
                         <a:latin typeface="Noto Sans" charset="0"/>
@@ -9342,10 +9555,12 @@
                       <a:tailEnd type="none" w="med" len="med"/>
                     </a:lnB>
                     <a:solidFill>
-                      <a:srgbClr val="F2FAFB"/>
+                      <a:srgbClr val="FFFFFF"/>
                     </a:solidFill>
                   </a:tcPr>
                 </a:tc>
+              </a:tr>
+              <a:tr h="584650">
                 <a:tc>
                   <a:txBody>
                     <a:bodyPr/>
@@ -9355,200 +9570,16 @@
                         <a:buNone/>
                       </a:pPr>
                       <a:r>
-                        <a:rPr lang="en-US" sz="1200" dirty="0">
+                        <a:rPr lang="en-US" sz="1200" b="1" dirty="0">
                           <a:solidFill>
-                            <a:srgbClr val="22333F"/>
+                            <a:srgbClr val="A5BE00"/>
                           </a:solidFill>
                           <a:latin typeface="Noto Sans" pitchFamily="34" charset="0"/>
                           <a:ea typeface="Noto Sans" pitchFamily="34" charset="-122"/>
                           <a:cs typeface="Noto Sans" pitchFamily="34" charset="-120"/>
                         </a:rPr>
-                        <a:t>Yên tâm con tiến bộ thực chất mà không cần tự kèm</a:t>
+                        <a:t>[Emotional] </a:t>
                       </a:r>
-                      <a:endParaRPr lang="en-US" sz="1200" dirty="0">
-                        <a:latin typeface="Noto Sans" charset="0"/>
-                        <a:ea typeface="Noto Sans" charset="0"/>
-                        <a:cs typeface="Noto Sans" charset="0"/>
-                      </a:endParaRPr>
-                    </a:p>
-                  </a:txBody>
-                  <a:tcPr marL="101600" marR="101600" marT="63500" marB="63500" anchor="t">
-                    <a:lnL w="9525" cap="flat" cmpd="sng" algn="ctr">
-                      <a:solidFill>
-                        <a:srgbClr val="DCE7EA"/>
-                      </a:solidFill>
-                      <a:prstDash val="solid"/>
-                      <a:round/>
-                      <a:headEnd type="none" w="med" len="med"/>
-                      <a:tailEnd type="none" w="med" len="med"/>
-                    </a:lnL>
-                    <a:lnR w="9525" cap="flat" cmpd="sng" algn="ctr">
-                      <a:solidFill>
-                        <a:srgbClr val="DCE7EA"/>
-                      </a:solidFill>
-                      <a:prstDash val="solid"/>
-                      <a:round/>
-                      <a:headEnd type="none" w="med" len="med"/>
-                      <a:tailEnd type="none" w="med" len="med"/>
-                    </a:lnR>
-                    <a:lnT w="9525" cap="flat" cmpd="sng" algn="ctr">
-                      <a:solidFill>
-                        <a:srgbClr val="DCE7EA"/>
-                      </a:solidFill>
-                      <a:prstDash val="solid"/>
-                      <a:round/>
-                      <a:headEnd type="none" w="med" len="med"/>
-                      <a:tailEnd type="none" w="med" len="med"/>
-                    </a:lnT>
-                    <a:lnB w="9525" cap="flat" cmpd="sng" algn="ctr">
-                      <a:solidFill>
-                        <a:srgbClr val="DCE7EA"/>
-                      </a:solidFill>
-                      <a:prstDash val="solid"/>
-                      <a:round/>
-                      <a:headEnd type="none" w="med" len="med"/>
-                      <a:tailEnd type="none" w="med" len="med"/>
-                    </a:lnB>
-                    <a:solidFill>
-                      <a:srgbClr val="F2FAFB"/>
-                    </a:solidFill>
-                  </a:tcPr>
-                </a:tc>
-                <a:tc>
-                  <a:txBody>
-                    <a:bodyPr/>
-                    <a:lstStyle/>
-                    <a:p>
-                      <a:pPr indent="0" marL="0">
-                        <a:buNone/>
-                      </a:pPr>
-                      <a:r>
-                        <a:rPr lang="en-US" sz="1200" dirty="0">
-                          <a:solidFill>
-                            <a:srgbClr val="5B6472"/>
-                          </a:solidFill>
-                          <a:latin typeface="Noto Sans" pitchFamily="34" charset="0"/>
-                          <a:ea typeface="Noto Sans" pitchFamily="34" charset="-122"/>
-                          <a:cs typeface="Noto Sans" pitchFamily="34" charset="-120"/>
-                        </a:rPr>
-                        <a:t>Con học TA chưa tốt; phụ huynh phải nhắc nhở/đốc thúc con</a:t>
-                      </a:r>
-                      <a:endParaRPr lang="en-US" sz="1200" dirty="0">
-                        <a:latin typeface="Noto Sans" charset="0"/>
-                        <a:ea typeface="Noto Sans" charset="0"/>
-                        <a:cs typeface="Noto Sans" charset="0"/>
-                      </a:endParaRPr>
-                    </a:p>
-                  </a:txBody>
-                  <a:tcPr marL="101600" marR="101600" marT="63500" marB="63500" anchor="t">
-                    <a:lnL w="9525" cap="flat" cmpd="sng" algn="ctr">
-                      <a:solidFill>
-                        <a:srgbClr val="DCE7EA"/>
-                      </a:solidFill>
-                      <a:prstDash val="solid"/>
-                      <a:round/>
-                      <a:headEnd type="none" w="med" len="med"/>
-                      <a:tailEnd type="none" w="med" len="med"/>
-                    </a:lnL>
-                    <a:lnR w="9525" cap="flat" cmpd="sng" algn="ctr">
-                      <a:solidFill>
-                        <a:srgbClr val="DCE7EA"/>
-                      </a:solidFill>
-                      <a:prstDash val="solid"/>
-                      <a:round/>
-                      <a:headEnd type="none" w="med" len="med"/>
-                      <a:tailEnd type="none" w="med" len="med"/>
-                    </a:lnR>
-                    <a:lnT w="9525" cap="flat" cmpd="sng" algn="ctr">
-                      <a:solidFill>
-                        <a:srgbClr val="DCE7EA"/>
-                      </a:solidFill>
-                      <a:prstDash val="solid"/>
-                      <a:round/>
-                      <a:headEnd type="none" w="med" len="med"/>
-                      <a:tailEnd type="none" w="med" len="med"/>
-                    </a:lnT>
-                    <a:lnB w="9525" cap="flat" cmpd="sng" algn="ctr">
-                      <a:solidFill>
-                        <a:srgbClr val="DCE7EA"/>
-                      </a:solidFill>
-                      <a:prstDash val="solid"/>
-                      <a:round/>
-                      <a:headEnd type="none" w="med" len="med"/>
-                      <a:tailEnd type="none" w="med" len="med"/>
-                    </a:lnB>
-                    <a:solidFill>
-                      <a:srgbClr val="F2FAFB"/>
-                    </a:solidFill>
-                  </a:tcPr>
-                </a:tc>
-              </a:tr>
-              <a:tr h="584650">
-                <a:tc vMerge="1">
-                  <a:txBody>
-                    <a:bodyPr/>
-                    <a:lstStyle/>
-                    <a:p>
-                      <a:pPr indent="0" marL="0">
-                        <a:buNone/>
-                      </a:pPr>
-                      <a:endParaRPr lang="en-US" sz="1200" dirty="0">
-                        <a:latin typeface="Noto Sans" charset="0"/>
-                        <a:ea typeface="Noto Sans" charset="0"/>
-                        <a:cs typeface="Noto Sans" charset="0"/>
-                      </a:endParaRPr>
-                    </a:p>
-                  </a:txBody>
-                  <a:tcPr marL="101600" marR="101600" marT="63500" marB="63500" anchor="t">
-                    <a:lnL w="9525" cap="flat" cmpd="sng" algn="ctr">
-                      <a:solidFill>
-                        <a:srgbClr val="DCE7EA"/>
-                      </a:solidFill>
-                      <a:prstDash val="solid"/>
-                      <a:round/>
-                      <a:headEnd type="none" w="med" len="med"/>
-                      <a:tailEnd type="none" w="med" len="med"/>
-                    </a:lnL>
-                    <a:lnR w="9525" cap="flat" cmpd="sng" algn="ctr">
-                      <a:solidFill>
-                        <a:srgbClr val="DCE7EA"/>
-                      </a:solidFill>
-                      <a:prstDash val="solid"/>
-                      <a:round/>
-                      <a:headEnd type="none" w="med" len="med"/>
-                      <a:tailEnd type="none" w="med" len="med"/>
-                    </a:lnR>
-                    <a:lnT w="9525" cap="flat" cmpd="sng" algn="ctr">
-                      <a:solidFill>
-                        <a:srgbClr val="DCE7EA"/>
-                      </a:solidFill>
-                      <a:prstDash val="solid"/>
-                      <a:round/>
-                      <a:headEnd type="none" w="med" len="med"/>
-                      <a:tailEnd type="none" w="med" len="med"/>
-                    </a:lnT>
-                    <a:lnB w="9525" cap="flat" cmpd="sng" algn="ctr">
-                      <a:solidFill>
-                        <a:srgbClr val="DCE7EA"/>
-                      </a:solidFill>
-                      <a:prstDash val="solid"/>
-                      <a:round/>
-                      <a:headEnd type="none" w="med" len="med"/>
-                      <a:tailEnd type="none" w="med" len="med"/>
-                    </a:lnB>
-                    <a:solidFill>
-                      <a:srgbClr val="F2FAFB"/>
-                    </a:solidFill>
-                  </a:tcPr>
-                </a:tc>
-                <a:tc>
-                  <a:txBody>
-                    <a:bodyPr/>
-                    <a:lstStyle/>
-                    <a:p>
-                      <a:pPr indent="0" marL="0">
-                        <a:buNone/>
-                      </a:pPr>
                       <a:r>
                         <a:rPr lang="en-US" sz="1200" dirty="0">
                           <a:solidFill>
@@ -9677,9 +9708,66 @@
                     </a:solidFill>
                   </a:tcPr>
                 </a:tc>
+                <a:tc vMerge="1">
+                  <a:txBody>
+                    <a:bodyPr/>
+                    <a:lstStyle/>
+                    <a:p>
+                      <a:pPr indent="0" marL="0">
+                        <a:buNone/>
+                      </a:pPr>
+                      <a:endParaRPr lang="en-US" sz="1200" dirty="0">
+                        <a:latin typeface="Noto Sans" charset="0"/>
+                        <a:ea typeface="Noto Sans" charset="0"/>
+                        <a:cs typeface="Noto Sans" charset="0"/>
+                      </a:endParaRPr>
+                    </a:p>
+                  </a:txBody>
+                  <a:tcPr marL="101600" marR="101600" marT="63500" marB="63500" anchor="t">
+                    <a:lnL w="9525" cap="flat" cmpd="sng" algn="ctr">
+                      <a:solidFill>
+                        <a:srgbClr val="DCE7EA"/>
+                      </a:solidFill>
+                      <a:prstDash val="solid"/>
+                      <a:round/>
+                      <a:headEnd type="none" w="med" len="med"/>
+                      <a:tailEnd type="none" w="med" len="med"/>
+                    </a:lnL>
+                    <a:lnR w="9525" cap="flat" cmpd="sng" algn="ctr">
+                      <a:solidFill>
+                        <a:srgbClr val="DCE7EA"/>
+                      </a:solidFill>
+                      <a:prstDash val="solid"/>
+                      <a:round/>
+                      <a:headEnd type="none" w="med" len="med"/>
+                      <a:tailEnd type="none" w="med" len="med"/>
+                    </a:lnR>
+                    <a:lnT w="9525" cap="flat" cmpd="sng" algn="ctr">
+                      <a:solidFill>
+                        <a:srgbClr val="DCE7EA"/>
+                      </a:solidFill>
+                      <a:prstDash val="solid"/>
+                      <a:round/>
+                      <a:headEnd type="none" w="med" len="med"/>
+                      <a:tailEnd type="none" w="med" len="med"/>
+                    </a:lnT>
+                    <a:lnB w="9525" cap="flat" cmpd="sng" algn="ctr">
+                      <a:solidFill>
+                        <a:srgbClr val="DCE7EA"/>
+                      </a:solidFill>
+                      <a:prstDash val="solid"/>
+                      <a:round/>
+                      <a:headEnd type="none" w="med" len="med"/>
+                      <a:tailEnd type="none" w="med" len="med"/>
+                    </a:lnB>
+                    <a:solidFill>
+                      <a:srgbClr val="FFFFFF"/>
+                    </a:solidFill>
+                  </a:tcPr>
+                </a:tc>
               </a:tr>
               <a:tr h="584650">
-                <a:tc rowSpan="1">
+                <a:tc>
                   <a:txBody>
                     <a:bodyPr/>
                     <a:lstStyle/>
@@ -9696,65 +9784,8 @@
                           <a:ea typeface="Noto Sans" pitchFamily="34" charset="-122"/>
                           <a:cs typeface="Noto Sans" pitchFamily="34" charset="-120"/>
                         </a:rPr>
-                        <a:t>Social</a:t>
+                        <a:t>[Social] </a:t>
                       </a:r>
-                      <a:endParaRPr lang="en-US" sz="1200" dirty="0">
-                        <a:latin typeface="Noto Sans" charset="0"/>
-                        <a:ea typeface="Noto Sans" charset="0"/>
-                        <a:cs typeface="Noto Sans" charset="0"/>
-                      </a:endParaRPr>
-                    </a:p>
-                  </a:txBody>
-                  <a:tcPr marL="101600" marR="101600" marT="63500" marB="63500" anchor="t">
-                    <a:lnL w="9525" cap="flat" cmpd="sng" algn="ctr">
-                      <a:solidFill>
-                        <a:srgbClr val="DCE7EA"/>
-                      </a:solidFill>
-                      <a:prstDash val="solid"/>
-                      <a:round/>
-                      <a:headEnd type="none" w="med" len="med"/>
-                      <a:tailEnd type="none" w="med" len="med"/>
-                    </a:lnL>
-                    <a:lnR w="9525" cap="flat" cmpd="sng" algn="ctr">
-                      <a:solidFill>
-                        <a:srgbClr val="DCE7EA"/>
-                      </a:solidFill>
-                      <a:prstDash val="solid"/>
-                      <a:round/>
-                      <a:headEnd type="none" w="med" len="med"/>
-                      <a:tailEnd type="none" w="med" len="med"/>
-                    </a:lnR>
-                    <a:lnT w="9525" cap="flat" cmpd="sng" algn="ctr">
-                      <a:solidFill>
-                        <a:srgbClr val="DCE7EA"/>
-                      </a:solidFill>
-                      <a:prstDash val="solid"/>
-                      <a:round/>
-                      <a:headEnd type="none" w="med" len="med"/>
-                      <a:tailEnd type="none" w="med" len="med"/>
-                    </a:lnT>
-                    <a:lnB w="9525" cap="flat" cmpd="sng" algn="ctr">
-                      <a:solidFill>
-                        <a:srgbClr val="DCE7EA"/>
-                      </a:solidFill>
-                      <a:prstDash val="solid"/>
-                      <a:round/>
-                      <a:headEnd type="none" w="med" len="med"/>
-                      <a:tailEnd type="none" w="med" len="med"/>
-                    </a:lnB>
-                    <a:solidFill>
-                      <a:srgbClr val="FFFFFF"/>
-                    </a:solidFill>
-                  </a:tcPr>
-                </a:tc>
-                <a:tc>
-                  <a:txBody>
-                    <a:bodyPr/>
-                    <a:lstStyle/>
-                    <a:p>
-                      <a:pPr indent="0" marL="0">
-                        <a:buNone/>
-                      </a:pPr>
                       <a:r>
                         <a:rPr lang="en-US" sz="1200" dirty="0">
                           <a:solidFill>
@@ -9880,6 +9911,63 @@
                     </a:lnB>
                     <a:solidFill>
                       <a:srgbClr val="F2FAFB"/>
+                    </a:solidFill>
+                  </a:tcPr>
+                </a:tc>
+                <a:tc vMerge="1">
+                  <a:txBody>
+                    <a:bodyPr/>
+                    <a:lstStyle/>
+                    <a:p>
+                      <a:pPr indent="0" marL="0">
+                        <a:buNone/>
+                      </a:pPr>
+                      <a:endParaRPr lang="en-US" sz="1200" dirty="0">
+                        <a:latin typeface="Noto Sans" charset="0"/>
+                        <a:ea typeface="Noto Sans" charset="0"/>
+                        <a:cs typeface="Noto Sans" charset="0"/>
+                      </a:endParaRPr>
+                    </a:p>
+                  </a:txBody>
+                  <a:tcPr marL="101600" marR="101600" marT="63500" marB="63500" anchor="t">
+                    <a:lnL w="9525" cap="flat" cmpd="sng" algn="ctr">
+                      <a:solidFill>
+                        <a:srgbClr val="DCE7EA"/>
+                      </a:solidFill>
+                      <a:prstDash val="solid"/>
+                      <a:round/>
+                      <a:headEnd type="none" w="med" len="med"/>
+                      <a:tailEnd type="none" w="med" len="med"/>
+                    </a:lnL>
+                    <a:lnR w="9525" cap="flat" cmpd="sng" algn="ctr">
+                      <a:solidFill>
+                        <a:srgbClr val="DCE7EA"/>
+                      </a:solidFill>
+                      <a:prstDash val="solid"/>
+                      <a:round/>
+                      <a:headEnd type="none" w="med" len="med"/>
+                      <a:tailEnd type="none" w="med" len="med"/>
+                    </a:lnR>
+                    <a:lnT w="9525" cap="flat" cmpd="sng" algn="ctr">
+                      <a:solidFill>
+                        <a:srgbClr val="DCE7EA"/>
+                      </a:solidFill>
+                      <a:prstDash val="solid"/>
+                      <a:round/>
+                      <a:headEnd type="none" w="med" len="med"/>
+                      <a:tailEnd type="none" w="med" len="med"/>
+                    </a:lnT>
+                    <a:lnB w="9525" cap="flat" cmpd="sng" algn="ctr">
+                      <a:solidFill>
+                        <a:srgbClr val="DCE7EA"/>
+                      </a:solidFill>
+                      <a:prstDash val="solid"/>
+                      <a:round/>
+                      <a:headEnd type="none" w="med" len="med"/>
+                      <a:tailEnd type="none" w="med" len="med"/>
+                    </a:lnB>
+                    <a:solidFill>
+                      <a:srgbClr val="FFFFFF"/>
                     </a:solidFill>
                   </a:tcPr>
                 </a:tc>

--- a/03_product/concepts/AI-Class-New-slide-deck-FINAL-2026-08-21-branded.pptx
+++ b/03_product/concepts/AI-Class-New-slide-deck-FINAL-2026-08-21-branded.pptx
@@ -10,6 +10,8 @@
     <p:sldId id="258" r:id="rId4"/>
     <p:sldId id="268" r:id="rId19"/>
     <p:sldId id="269" r:id="rId20"/>
+    <p:sldId id="270" r:id="rId21"/>
+    <p:sldId id="271" r:id="rId22"/>
     <p:sldId id="260" r:id="rId6"/>
     <p:sldId id="261" r:id="rId7"/>
     <p:sldId id="262" r:id="rId8"/>
@@ -2585,7 +2587,7 @@
                 <a:ea typeface="Noto Sans" pitchFamily="34" charset="-122"/>
                 <a:cs typeface="Noto Sans" pitchFamily="34" charset="-120"/>
               </a:rPr>
-              <a:t>10 / 12</a:t>
+              <a:t>12 / 14</a:t>
             </a:r>
             <a:endParaRPr lang="en-US" sz="850" dirty="0"/>
           </a:p>
@@ -3975,7 +3977,7 @@
                 <a:ea typeface="Noto Sans" pitchFamily="34" charset="-122"/>
                 <a:cs typeface="Noto Sans" pitchFamily="34" charset="-120"/>
               </a:rPr>
-              <a:t>11 / 12</a:t>
+              <a:t>13 / 14</a:t>
             </a:r>
             <a:endParaRPr lang="en-US" sz="850" dirty="0"/>
           </a:p>
@@ -6658,7 +6660,7 @@
                 <a:ea typeface="Noto Sans" pitchFamily="34" charset="-122"/>
                 <a:cs typeface="Noto Sans" pitchFamily="34" charset="-120"/>
               </a:rPr>
-              <a:t>12 / 12</a:t>
+              <a:t>14 / 14</a:t>
             </a:r>
             <a:endParaRPr lang="en-US" sz="850" dirty="0"/>
           </a:p>
@@ -7904,7 +7906,7 @@
                 <a:ea typeface="Noto Sans" pitchFamily="34" charset="-122"/>
                 <a:cs typeface="Noto Sans" pitchFamily="34" charset="-120"/>
               </a:rPr>
-              <a:t>3 / 12</a:t>
+              <a:t>3 / 14</a:t>
             </a:r>
             <a:endParaRPr lang="en-US" sz="850" dirty="0"/>
           </a:p>
@@ -7920,7 +7922,7 @@
 
 <file path=ppt/slides/slide14.xml><?xml version="1.0" encoding="utf-8"?>
 <p:sld xmlns:a="http://schemas.openxmlformats.org/drawingml/2006/main" xmlns:r="http://schemas.openxmlformats.org/officeDocument/2006/relationships" xmlns:p="http://schemas.openxmlformats.org/presentationml/2006/main">
-  <p:cSld name="Slide 14">
+  <p:cSld name="Slide 8">
     <p:bg>
       <p:bgPr>
         <a:solidFill>
@@ -7944,9 +7946,11 @@
       </p:grpSpPr>
       <p:sp>
         <p:nvSpPr>
-          <p:cNvPr id="2" name="Text 0"/>
-          <p:cNvSpPr/>
-          <p:nvPr/>
+          <p:cNvPr id="2" name="Text 0">
+</p:cNvPr>
+          <p:cNvSpPr/>
+          <p:nvPr>
+</p:nvPr>
         </p:nvSpPr>
         <p:spPr>
           <a:xfrm>
@@ -7954,13 +7958,16 @@
             <a:ext cx="11183112" cy="274320"/>
           </a:xfrm>
           <a:prstGeom prst="rect">
-            <a:avLst/>
+            <a:avLst>
+</a:avLst>
           </a:prstGeom>
           <a:noFill/>
-          <a:ln/>
+          <a:ln>
+</a:ln>
         </p:spPr>
         <p:txBody>
-          <a:bodyPr wrap="square" rtlCol="0" anchor="ctr"/>
+          <a:bodyPr wrap="square" rtlCol="0" anchor="ctr">
+</a:bodyPr>
           <a:lstStyle/>
           <a:p>
             <a:pPr indent="0" marL="0">
@@ -7983,9 +7990,11 @@
       </p:sp>
       <p:sp>
         <p:nvSpPr>
-          <p:cNvPr id="3" name="Text 1"/>
-          <p:cNvSpPr/>
-          <p:nvPr/>
+          <p:cNvPr id="3" name="Text 1">
+</p:cNvPr>
+          <p:cNvSpPr/>
+          <p:nvPr>
+</p:nvPr>
         </p:nvSpPr>
         <p:spPr>
           <a:xfrm>
@@ -7993,13 +8002,16 @@
             <a:ext cx="10085832" cy="640080"/>
           </a:xfrm>
           <a:prstGeom prst="rect">
-            <a:avLst/>
+            <a:avLst>
+</a:avLst>
           </a:prstGeom>
           <a:noFill/>
-          <a:ln/>
+          <a:ln>
+</a:ln>
         </p:spPr>
         <p:txBody>
-          <a:bodyPr wrap="square" rtlCol="0" anchor="ctr"/>
+          <a:bodyPr wrap="square" rtlCol="0" anchor="ctr">
+</a:bodyPr>
           <a:lstStyle/>
           <a:p>
             <a:pPr indent="0" marL="0">
@@ -8022,9 +8034,11 @@
       </p:sp>
       <p:sp>
         <p:nvSpPr>
-          <p:cNvPr id="4" name="Shape 2"/>
-          <p:cNvSpPr/>
-          <p:nvPr/>
+          <p:cNvPr id="4" name="Shape 2">
+</p:cNvPr>
+          <p:cNvSpPr/>
+          <p:nvPr>
+</p:nvPr>
         </p:nvSpPr>
         <p:spPr>
           <a:xfrm>
@@ -8032,24 +8046,28 @@
             <a:ext cx="777240" cy="45720"/>
           </a:xfrm>
           <a:prstGeom prst="rect">
-            <a:avLst/>
+            <a:avLst>
+</a:avLst>
           </a:prstGeom>
           <a:solidFill>
             <a:srgbClr val="A5BE00"/>
           </a:solidFill>
-          <a:ln/>
+          <a:ln>
+</a:ln>
         </p:spPr>
       </p:sp>
       <p:pic>
         <p:nvPicPr>
-          <p:cNvPr id="5" name="Image 0"/>
+          <p:cNvPr id="5" name="Image 0" descr="C:\Users\landa\AppData\Local\Temp\claude\c--Users-landa--Personal--D---n-AI-Class-new\8a85e8a7-bdeb-42d6-9168-79c96b849bd1\scratchpad\pptx-gen\logo-icon-only.png">    </p:cNvPr>
           <p:cNvPicPr>
             <a:picLocks noChangeAspect="1"/>
           </p:cNvPicPr>
-          <p:nvPr/>
+          <p:nvPr>
+</p:nvPr>
         </p:nvPicPr>
         <p:blipFill>
-          <a:blip r:embed="rId1"/>
+          <a:blip r:embed="rId1">
+</a:blip>
           <a:stretch>
             <a:fillRect/>
           </a:stretch>
@@ -8064,6 +8082,1708 @@
           </a:prstGeom>
         </p:spPr>
       </p:pic>
+      <p:sp>
+        <p:nvSpPr>
+          <p:cNvPr id="6" name="Text 3">
+</p:cNvPr>
+          <p:cNvSpPr/>
+          <p:nvPr>
+</p:nvPr>
+        </p:nvSpPr>
+        <p:spPr>
+          <a:xfrm>
+            <a:off x="502920" y="1280160"/>
+            <a:ext cx="11183112" cy="384048"/>
+          </a:xfrm>
+          <a:prstGeom prst="rect">
+            <a:avLst>
+</a:avLst>
+          </a:prstGeom>
+          <a:noFill/>
+          <a:ln>
+</a:ln>
+        </p:spPr>
+        <p:txBody>
+          <a:bodyPr wrap="square" rtlCol="0" anchor="ctr">
+</a:bodyPr>
+          <a:lstStyle/>
+          <a:p>
+            <a:pPr indent="0" marL="0">
+              <a:buNone/>
+            </a:pPr>
+            <a:r>
+              <a:rPr lang="en-US" sz="1050" i="1" dirty="0">
+                <a:solidFill>
+                  <a:srgbClr val="5B6472"/>
+                </a:solidFill>
+                <a:latin typeface="Noto Sans" pitchFamily="34" charset="0"/>
+                <a:ea typeface="Noto Sans" pitchFamily="34" charset="-122"/>
+                <a:cs typeface="Noto Sans" pitchFamily="34" charset="-120"/>
+              </a:rPr>
+              <a:t>Nhóm I — Đầu tư mạnh phát triển năng lực Tiếng Anh</a:t>
+            </a:r>
+            <a:endParaRPr lang="en-US" sz="1050" dirty="0"/>
+          </a:p>
+        </p:txBody>
+      </p:sp>
+      <p:sp>
+        <p:nvSpPr>
+          <p:cNvPr id="7" name="Shape 4">
+</p:cNvPr>
+          <p:cNvSpPr/>
+          <p:nvPr>
+</p:nvPr>
+        </p:nvSpPr>
+        <p:spPr>
+          <a:xfrm>
+            <a:off x="502920" y="1664208"/>
+            <a:ext cx="73152" cy="1100000"/>
+          </a:xfrm>
+          <a:prstGeom prst="rect">
+            <a:avLst>
+</a:avLst>
+          </a:prstGeom>
+          <a:solidFill>
+            <a:srgbClr val="004671"/>
+          </a:solidFill>
+          <a:ln>
+</a:ln>
+        </p:spPr>
+      </p:sp>
+      <p:sp>
+        <p:nvSpPr>
+          <p:cNvPr id="8" name="Text 5">
+</p:cNvPr>
+          <p:cNvSpPr/>
+          <p:nvPr>
+</p:nvPr>
+        </p:nvSpPr>
+        <p:spPr>
+          <a:xfrm>
+            <a:off x="731520" y="1664208"/>
+            <a:ext cx="10954512" cy="1100000"/>
+          </a:xfrm>
+          <a:prstGeom prst="rect">
+            <a:avLst>
+</a:avLst>
+          </a:prstGeom>
+          <a:noFill/>
+          <a:ln>
+</a:ln>
+        </p:spPr>
+        <p:txBody>
+          <a:bodyPr wrap="square" rtlCol="0" anchor="t">
+            <a:normAutofit/>
+          </a:bodyPr>
+          <a:lstStyle/>
+          <a:p>
+            <a:pPr indent="0" marL="0">
+              <a:lnSpc>
+                <a:spcPct val="102000"/>
+              </a:lnSpc>
+              <a:spcAft>
+                <a:spcPts val="200"/>
+              </a:spcAft>
+              <a:buNone/>
+            </a:pPr>
+            <a:r>
+              <a:rPr lang="en-US" sz="1300" b="1" dirty="0">
+                <a:solidFill>
+                  <a:srgbClr val="004671"/>
+                </a:solidFill>
+                <a:latin typeface="Noto Sans" pitchFamily="34" charset="0"/>
+                <a:ea typeface="Noto Sans" pitchFamily="34" charset="-122"/>
+                <a:cs typeface="Noto Sans" pitchFamily="34" charset="-120"/>
+              </a:rPr>
+              <a:t>JTBD 1: Đạt thành tích học thuật rõ ràng, đo lường được về Tiếng Anh</a:t>
+            </a:r>
+            <a:endParaRPr lang="en-US" sz="1300" dirty="0"/>
+          </a:p>
+          <a:p>
+            <a:pPr indent="0" marL="0">
+              <a:lnSpc>
+                <a:spcPct val="102000"/>
+              </a:lnSpc>
+              <a:spcAft>
+                <a:spcPts val="300"/>
+              </a:spcAft>
+              <a:buNone/>
+            </a:pPr>
+            <a:r>
+              <a:rPr lang="en-US" sz="1100" b="1" dirty="0">
+                <a:solidFill>
+                  <a:srgbClr val="22333F"/>
+                </a:solidFill>
+                <a:latin typeface="Noto Sans" pitchFamily="34" charset="0"/>
+                <a:ea typeface="Noto Sans" pitchFamily="34" charset="-122"/>
+                <a:cs typeface="Noto Sans" pitchFamily="34" charset="-120"/>
+              </a:rPr>
+              <a:t>Mục tiêu: </a:t>
+            </a:r>
+            <a:r>
+              <a:rPr lang="en-US" sz="1100" dirty="0">
+                <a:solidFill>
+                  <a:srgbClr val="22333F"/>
+                </a:solidFill>
+                <a:latin typeface="Noto Sans" pitchFamily="34" charset="0"/>
+                <a:ea typeface="Noto Sans" pitchFamily="34" charset="-122"/>
+                <a:cs typeface="Noto Sans" pitchFamily="34" charset="-120"/>
+              </a:rPr>
+              <a:t>Con đạt điểm cao tiếng Anh trên trường và thi đạt các chứng chỉ theo lộ trình — bằng chứng cụ thể cho hiệu quả đầu tư.</a:t>
+            </a:r>
+            <a:endParaRPr lang="en-US" sz="1300" dirty="0"/>
+          </a:p>
+          <a:p>
+            <a:pPr indent="0" marL="0">
+              <a:lnSpc>
+                <a:spcPct val="102000"/>
+              </a:lnSpc>
+              <a:spcAft>
+                <a:spcPts val="300"/>
+              </a:spcAft>
+              <a:buNone/>
+            </a:pPr>
+            <a:r>
+              <a:rPr lang="en-US" sz="1100" b="1" dirty="0">
+                <a:solidFill>
+                  <a:srgbClr val="22333F"/>
+                </a:solidFill>
+                <a:latin typeface="Noto Sans" pitchFamily="34" charset="0"/>
+                <a:ea typeface="Noto Sans" pitchFamily="34" charset="-122"/>
+                <a:cs typeface="Noto Sans" pitchFamily="34" charset="-120"/>
+              </a:rPr>
+              <a:t>Pain point: </a:t>
+            </a:r>
+            <a:r>
+              <a:rPr lang="en-US" sz="1100" dirty="0">
+                <a:solidFill>
+                  <a:srgbClr val="22333F"/>
+                </a:solidFill>
+                <a:latin typeface="Noto Sans" pitchFamily="34" charset="0"/>
+                <a:ea typeface="Noto Sans" pitchFamily="34" charset="-122"/>
+                <a:cs typeface="Noto Sans" pitchFamily="34" charset="-120"/>
+              </a:rPr>
+              <a:t>Con học tiếng Anh chưa tốt/tiến bộ chậm — phát âm sai, giỏi ngữ pháp nhưng không tự tin khi giao tiếp.</a:t>
+            </a:r>
+            <a:endParaRPr lang="en-US" sz="1300" dirty="0"/>
+          </a:p>
+        </p:txBody>
+      </p:sp>
+      <p:sp>
+        <p:nvSpPr>
+          <p:cNvPr id="9" name="Shape 6">
+</p:cNvPr>
+          <p:cNvSpPr/>
+          <p:nvPr>
+</p:nvPr>
+        </p:nvSpPr>
+        <p:spPr>
+          <a:xfrm>
+            <a:off x="502920" y="2900789"/>
+            <a:ext cx="73152" cy="1100000"/>
+          </a:xfrm>
+          <a:prstGeom prst="rect">
+            <a:avLst>
+</a:avLst>
+          </a:prstGeom>
+          <a:solidFill>
+            <a:srgbClr val="3B81B1"/>
+          </a:solidFill>
+          <a:ln>
+</a:ln>
+        </p:spPr>
+      </p:sp>
+      <p:sp>
+        <p:nvSpPr>
+          <p:cNvPr id="10" name="Text 7">
+</p:cNvPr>
+          <p:cNvSpPr/>
+          <p:nvPr>
+</p:nvPr>
+        </p:nvSpPr>
+        <p:spPr>
+          <a:xfrm>
+            <a:off x="731520" y="2900789"/>
+            <a:ext cx="10954512" cy="1100000"/>
+          </a:xfrm>
+          <a:prstGeom prst="rect">
+            <a:avLst>
+</a:avLst>
+          </a:prstGeom>
+          <a:noFill/>
+          <a:ln>
+</a:ln>
+        </p:spPr>
+        <p:txBody>
+          <a:bodyPr wrap="square" rtlCol="0" anchor="t">
+            <a:normAutofit/>
+          </a:bodyPr>
+          <a:lstStyle/>
+          <a:p>
+            <a:pPr indent="0" marL="0">
+              <a:lnSpc>
+                <a:spcPct val="102000"/>
+              </a:lnSpc>
+              <a:spcAft>
+                <a:spcPts val="200"/>
+              </a:spcAft>
+              <a:buNone/>
+            </a:pPr>
+            <a:r>
+              <a:rPr lang="en-US" sz="1300" b="1" dirty="0">
+                <a:solidFill>
+                  <a:srgbClr val="004671"/>
+                </a:solidFill>
+                <a:latin typeface="Noto Sans" pitchFamily="34" charset="0"/>
+                <a:ea typeface="Noto Sans" pitchFamily="34" charset="-122"/>
+                <a:cs typeface="Noto Sans" pitchFamily="34" charset="-120"/>
+              </a:rPr>
+              <a:t>JTBD 2: Tự tin giao tiếp bằng tiếng Anh trong thực tế</a:t>
+            </a:r>
+            <a:endParaRPr lang="en-US" sz="1300" dirty="0"/>
+          </a:p>
+          <a:p>
+            <a:pPr indent="0" marL="0">
+              <a:lnSpc>
+                <a:spcPct val="102000"/>
+              </a:lnSpc>
+              <a:spcAft>
+                <a:spcPts val="300"/>
+              </a:spcAft>
+              <a:buNone/>
+            </a:pPr>
+            <a:r>
+              <a:rPr lang="en-US" sz="1100" b="1" dirty="0">
+                <a:solidFill>
+                  <a:srgbClr val="22333F"/>
+                </a:solidFill>
+                <a:latin typeface="Noto Sans" pitchFamily="34" charset="0"/>
+                <a:ea typeface="Noto Sans" pitchFamily="34" charset="-122"/>
+                <a:cs typeface="Noto Sans" pitchFamily="34" charset="-120"/>
+              </a:rPr>
+              <a:t>Mục tiêu: </a:t>
+            </a:r>
+            <a:r>
+              <a:rPr lang="en-US" sz="1100" dirty="0">
+                <a:solidFill>
+                  <a:srgbClr val="22333F"/>
+                </a:solidFill>
+                <a:latin typeface="Noto Sans" pitchFamily="34" charset="0"/>
+                <a:ea typeface="Noto Sans" pitchFamily="34" charset="-122"/>
+                <a:cs typeface="Noto Sans" pitchFamily="34" charset="-120"/>
+              </a:rPr>
+              <a:t>Con nghe – nói được, dạn dĩ khi dùng tiếng Anh ngoài đời — không chỉ giỏi trên giấy.</a:t>
+            </a:r>
+            <a:endParaRPr lang="en-US" sz="1300" dirty="0"/>
+          </a:p>
+          <a:p>
+            <a:pPr indent="0" marL="0">
+              <a:lnSpc>
+                <a:spcPct val="102000"/>
+              </a:lnSpc>
+              <a:spcAft>
+                <a:spcPts val="300"/>
+              </a:spcAft>
+              <a:buNone/>
+            </a:pPr>
+            <a:r>
+              <a:rPr lang="en-US" sz="1100" b="1" dirty="0">
+                <a:solidFill>
+                  <a:srgbClr val="22333F"/>
+                </a:solidFill>
+                <a:latin typeface="Noto Sans" pitchFamily="34" charset="0"/>
+                <a:ea typeface="Noto Sans" pitchFamily="34" charset="-122"/>
+                <a:cs typeface="Noto Sans" pitchFamily="34" charset="-120"/>
+              </a:rPr>
+              <a:t>Pain point: </a:t>
+            </a:r>
+            <a:r>
+              <a:rPr lang="en-US" sz="1100" dirty="0">
+                <a:solidFill>
+                  <a:srgbClr val="22333F"/>
+                </a:solidFill>
+                <a:latin typeface="Noto Sans" pitchFamily="34" charset="0"/>
+                <a:ea typeface="Noto Sans" pitchFamily="34" charset="-122"/>
+                <a:cs typeface="Noto Sans" pitchFamily="34" charset="-120"/>
+              </a:rPr>
+              <a:t>Phát âm sai, giỏi ngữ pháp nhưng chưa tự tin khi giao tiếp thực tế — cùng gốc pain point với JTBD 1, khác khía cạnh ứng dụng.</a:t>
+            </a:r>
+            <a:endParaRPr lang="en-US" sz="1300" dirty="0"/>
+          </a:p>
+        </p:txBody>
+      </p:sp>
+      <p:sp>
+        <p:nvSpPr>
+          <p:cNvPr id="11" name="Shape 8">
+</p:cNvPr>
+          <p:cNvSpPr/>
+          <p:nvPr>
+</p:nvPr>
+        </p:nvSpPr>
+        <p:spPr>
+          <a:xfrm>
+            <a:off x="502920" y="4137370"/>
+            <a:ext cx="73152" cy="1100000"/>
+          </a:xfrm>
+          <a:prstGeom prst="rect">
+            <a:avLst>
+</a:avLst>
+          </a:prstGeom>
+          <a:solidFill>
+            <a:srgbClr val="518E0D"/>
+          </a:solidFill>
+          <a:ln>
+</a:ln>
+        </p:spPr>
+      </p:sp>
+      <p:sp>
+        <p:nvSpPr>
+          <p:cNvPr id="12" name="Text 9">
+</p:cNvPr>
+          <p:cNvSpPr/>
+          <p:nvPr>
+</p:nvPr>
+        </p:nvSpPr>
+        <p:spPr>
+          <a:xfrm>
+            <a:off x="731520" y="4137370"/>
+            <a:ext cx="10954512" cy="1100000"/>
+          </a:xfrm>
+          <a:prstGeom prst="rect">
+            <a:avLst>
+</a:avLst>
+          </a:prstGeom>
+          <a:noFill/>
+          <a:ln>
+</a:ln>
+        </p:spPr>
+        <p:txBody>
+          <a:bodyPr wrap="square" rtlCol="0" anchor="t">
+            <a:normAutofit/>
+          </a:bodyPr>
+          <a:lstStyle/>
+          <a:p>
+            <a:pPr indent="0" marL="0">
+              <a:lnSpc>
+                <a:spcPct val="102000"/>
+              </a:lnSpc>
+              <a:spcAft>
+                <a:spcPts val="200"/>
+              </a:spcAft>
+              <a:buNone/>
+            </a:pPr>
+            <a:r>
+              <a:rPr lang="en-US" sz="1300" b="1" dirty="0">
+                <a:solidFill>
+                  <a:srgbClr val="004671"/>
+                </a:solidFill>
+                <a:latin typeface="Noto Sans" pitchFamily="34" charset="0"/>
+                <a:ea typeface="Noto Sans" pitchFamily="34" charset="-122"/>
+                <a:cs typeface="Noto Sans" pitchFamily="34" charset="-120"/>
+              </a:rPr>
+              <a:t>JTBD 3: Nuôi dưỡng sự yêu thích và tự giác học</a:t>
+            </a:r>
+            <a:endParaRPr lang="en-US" sz="1300" dirty="0"/>
+          </a:p>
+          <a:p>
+            <a:pPr indent="0" marL="0">
+              <a:lnSpc>
+                <a:spcPct val="102000"/>
+              </a:lnSpc>
+              <a:spcAft>
+                <a:spcPts val="300"/>
+              </a:spcAft>
+              <a:buNone/>
+            </a:pPr>
+            <a:r>
+              <a:rPr lang="en-US" sz="1100" b="1" dirty="0">
+                <a:solidFill>
+                  <a:srgbClr val="22333F"/>
+                </a:solidFill>
+                <a:latin typeface="Noto Sans" pitchFamily="34" charset="0"/>
+                <a:ea typeface="Noto Sans" pitchFamily="34" charset="-122"/>
+                <a:cs typeface="Noto Sans" pitchFamily="34" charset="-120"/>
+              </a:rPr>
+              <a:t>Mục tiêu: </a:t>
+            </a:r>
+            <a:r>
+              <a:rPr lang="en-US" sz="1100" dirty="0">
+                <a:solidFill>
+                  <a:srgbClr val="22333F"/>
+                </a:solidFill>
+                <a:latin typeface="Noto Sans" pitchFamily="34" charset="0"/>
+                <a:ea typeface="Noto Sans" pitchFamily="34" charset="-122"/>
+                <a:cs typeface="Noto Sans" pitchFamily="34" charset="-120"/>
+              </a:rPr>
+              <a:t>Con chủ động, hào hứng học tiếng Anh thay vì học đối phó — đầu tư mới bền vững lâu dài.</a:t>
+            </a:r>
+            <a:endParaRPr lang="en-US" sz="1300" dirty="0"/>
+          </a:p>
+          <a:p>
+            <a:pPr indent="0" marL="0">
+              <a:lnSpc>
+                <a:spcPct val="102000"/>
+              </a:lnSpc>
+              <a:spcAft>
+                <a:spcPts val="300"/>
+              </a:spcAft>
+              <a:buNone/>
+            </a:pPr>
+            <a:r>
+              <a:rPr lang="en-US" sz="1100" b="1" dirty="0">
+                <a:solidFill>
+                  <a:srgbClr val="22333F"/>
+                </a:solidFill>
+                <a:latin typeface="Noto Sans" pitchFamily="34" charset="0"/>
+                <a:ea typeface="Noto Sans" pitchFamily="34" charset="-122"/>
+                <a:cs typeface="Noto Sans" pitchFamily="34" charset="-120"/>
+              </a:rPr>
+              <a:t>Pain point: </a:t>
+            </a:r>
+            <a:r>
+              <a:rPr lang="en-US" sz="1100" dirty="0">
+                <a:solidFill>
+                  <a:srgbClr val="22333F"/>
+                </a:solidFill>
+                <a:latin typeface="Noto Sans" pitchFamily="34" charset="0"/>
+                <a:ea typeface="Noto Sans" pitchFamily="34" charset="-122"/>
+                <a:cs typeface="Noto Sans" pitchFamily="34" charset="-120"/>
+              </a:rPr>
+              <a:t>Phải liên tục nhắc nhở, đốc thúc vì con chưa tự giác, dễ sao nhãng.</a:t>
+            </a:r>
+            <a:endParaRPr lang="en-US" sz="1300" dirty="0"/>
+          </a:p>
+        </p:txBody>
+      </p:sp>
+      <p:sp>
+        <p:nvSpPr>
+          <p:cNvPr id="18" name="Shape 14">
+</p:cNvPr>
+          <p:cNvSpPr/>
+          <p:nvPr>
+</p:nvPr>
+        </p:nvSpPr>
+        <p:spPr>
+          <a:xfrm>
+            <a:off x="502920" y="5373951"/>
+            <a:ext cx="73152" cy="1100000"/>
+          </a:xfrm>
+          <a:prstGeom prst="rect">
+            <a:avLst>
+</a:avLst>
+          </a:prstGeom>
+          <a:solidFill>
+            <a:srgbClr val="A5BE00"/>
+          </a:solidFill>
+          <a:ln>
+</a:ln>
+        </p:spPr>
+      </p:sp>
+      <p:sp>
+        <p:nvSpPr>
+          <p:cNvPr id="19" name="Text 15">
+</p:cNvPr>
+          <p:cNvSpPr/>
+          <p:nvPr>
+</p:nvPr>
+        </p:nvSpPr>
+        <p:spPr>
+          <a:xfrm>
+            <a:off x="731520" y="5373951"/>
+            <a:ext cx="10954512" cy="1100000"/>
+          </a:xfrm>
+          <a:prstGeom prst="rect">
+            <a:avLst>
+</a:avLst>
+          </a:prstGeom>
+          <a:noFill/>
+          <a:ln>
+</a:ln>
+        </p:spPr>
+        <p:txBody>
+          <a:bodyPr wrap="square" rtlCol="0" anchor="t">
+            <a:normAutofit/>
+          </a:bodyPr>
+          <a:lstStyle/>
+          <a:p>
+            <a:pPr indent="0" marL="0">
+              <a:lnSpc>
+                <a:spcPct val="102000"/>
+              </a:lnSpc>
+              <a:spcAft>
+                <a:spcPts val="200"/>
+              </a:spcAft>
+              <a:buNone/>
+            </a:pPr>
+            <a:r>
+              <a:rPr lang="en-US" sz="1300" b="1" dirty="0">
+                <a:solidFill>
+                  <a:srgbClr val="004671"/>
+                </a:solidFill>
+                <a:latin typeface="Noto Sans" pitchFamily="34" charset="0"/>
+                <a:ea typeface="Noto Sans" pitchFamily="34" charset="-122"/>
+                <a:cs typeface="Noto Sans" pitchFamily="34" charset="-120"/>
+              </a:rPr>
+              <a:t>JTBD 4: Giải phóng thời gian và áp lực kèm con cho bố mẹ</a:t>
+            </a:r>
+            <a:endParaRPr lang="en-US" sz="1300" dirty="0"/>
+          </a:p>
+          <a:p>
+            <a:pPr indent="0" marL="0">
+              <a:lnSpc>
+                <a:spcPct val="102000"/>
+              </a:lnSpc>
+              <a:spcAft>
+                <a:spcPts val="300"/>
+              </a:spcAft>
+              <a:buNone/>
+            </a:pPr>
+            <a:r>
+              <a:rPr lang="en-US" sz="1100" b="1" dirty="0">
+                <a:solidFill>
+                  <a:srgbClr val="22333F"/>
+                </a:solidFill>
+                <a:latin typeface="Noto Sans" pitchFamily="34" charset="0"/>
+                <a:ea typeface="Noto Sans" pitchFamily="34" charset="-122"/>
+                <a:cs typeface="Noto Sans" pitchFamily="34" charset="-120"/>
+              </a:rPr>
+              <a:t>Mục tiêu: </a:t>
+            </a:r>
+            <a:r>
+              <a:rPr lang="en-US" sz="1100" dirty="0">
+                <a:solidFill>
+                  <a:srgbClr val="22333F"/>
+                </a:solidFill>
+                <a:latin typeface="Noto Sans" pitchFamily="34" charset="0"/>
+                <a:ea typeface="Noto Sans" pitchFamily="34" charset="-122"/>
+                <a:cs typeface="Noto Sans" pitchFamily="34" charset="-120"/>
+              </a:rPr>
+              <a:t>Cần giải pháp đảm nhiệm việc kèm tiếng Anh thay bố mẹ — không phải giám sát, kèm cặp mỗi ngày.</a:t>
+            </a:r>
+            <a:endParaRPr lang="en-US" sz="1300" dirty="0"/>
+          </a:p>
+          <a:p>
+            <a:pPr indent="0" marL="0">
+              <a:lnSpc>
+                <a:spcPct val="102000"/>
+              </a:lnSpc>
+              <a:spcAft>
+                <a:spcPts val="300"/>
+              </a:spcAft>
+              <a:buNone/>
+            </a:pPr>
+            <a:r>
+              <a:rPr lang="en-US" sz="1100" b="1" dirty="0">
+                <a:solidFill>
+                  <a:srgbClr val="22333F"/>
+                </a:solidFill>
+                <a:latin typeface="Noto Sans" pitchFamily="34" charset="0"/>
+                <a:ea typeface="Noto Sans" pitchFamily="34" charset="-122"/>
+                <a:cs typeface="Noto Sans" pitchFamily="34" charset="-120"/>
+              </a:rPr>
+              <a:t>Pain point: </a:t>
+            </a:r>
+            <a:r>
+              <a:rPr lang="en-US" sz="1100" dirty="0">
+                <a:solidFill>
+                  <a:srgbClr val="22333F"/>
+                </a:solidFill>
+                <a:latin typeface="Noto Sans" pitchFamily="34" charset="0"/>
+                <a:ea typeface="Noto Sans" pitchFamily="34" charset="-122"/>
+                <a:cs typeface="Noto Sans" pitchFamily="34" charset="-120"/>
+              </a:rPr>
+              <a:t>Phụ huynh bận, không có thời gian kèm con; không giỏi tiếng Anh nên không tự hỗ trợ được con.</a:t>
+            </a:r>
+            <a:endParaRPr lang="en-US" sz="1300" dirty="0"/>
+          </a:p>
+        </p:txBody>
+      </p:sp>
+      <p:pic>
+        <p:nvPicPr>
+          <p:cNvPr id="15" name="Image 1" descr="C:\Users\landa\AppData\Local\Temp\claude\c--Users-landa--Personal--D---n-AI-Class-new\8a85e8a7-bdeb-42d6-9168-79c96b849bd1\scratchpad\pptx-gen\logo-icon-only.png">    </p:cNvPr>
+          <p:cNvPicPr>
+            <a:picLocks noChangeAspect="1"/>
+          </p:cNvPicPr>
+          <p:nvPr>
+</p:nvPr>
+        </p:nvPicPr>
+        <p:blipFill>
+          <a:blip r:embed="rId2">
+</a:blip>
+          <a:stretch>
+            <a:fillRect/>
+          </a:stretch>
+        </p:blipFill>
+        <p:spPr>
+          <a:xfrm>
+            <a:off x="502920" y="6473952"/>
+            <a:ext cx="237744" cy="237744"/>
+          </a:xfrm>
+          <a:prstGeom prst="rect">
+            <a:avLst/>
+          </a:prstGeom>
+        </p:spPr>
+      </p:pic>
+      <p:sp>
+        <p:nvSpPr>
+          <p:cNvPr id="16" name="Text 12">
+</p:cNvPr>
+          <p:cNvSpPr/>
+          <p:nvPr>
+</p:nvPr>
+        </p:nvSpPr>
+        <p:spPr>
+          <a:xfrm>
+            <a:off x="795528" y="6473952"/>
+            <a:ext cx="3657600" cy="256032"/>
+          </a:xfrm>
+          <a:prstGeom prst="rect">
+            <a:avLst>
+</a:avLst>
+          </a:prstGeom>
+          <a:noFill/>
+          <a:ln>
+</a:ln>
+        </p:spPr>
+        <p:txBody>
+          <a:bodyPr wrap="square" rtlCol="0" anchor="ctr">
+</a:bodyPr>
+          <a:lstStyle/>
+          <a:p>
+            <a:pPr indent="0" marL="0">
+              <a:buNone/>
+            </a:pPr>
+            <a:r>
+              <a:rPr lang="en-US" sz="800" spc="100" kern="0" dirty="0">
+                <a:solidFill>
+                  <a:srgbClr val="5B6472"/>
+                </a:solidFill>
+                <a:latin typeface="Noto Sans" pitchFamily="34" charset="0"/>
+                <a:ea typeface="Noto Sans" pitchFamily="34" charset="-122"/>
+                <a:cs typeface="Noto Sans" pitchFamily="34" charset="-120"/>
+              </a:rPr>
+              <a:t>EDUPIA  AI CLASS NEW</a:t>
+            </a:r>
+            <a:endParaRPr lang="en-US" sz="800" dirty="0"/>
+          </a:p>
+        </p:txBody>
+      </p:sp>
+      <p:sp>
+        <p:nvSpPr>
+          <p:cNvPr id="17" name="Text 13">
+</p:cNvPr>
+          <p:cNvSpPr/>
+          <p:nvPr>
+</p:nvPr>
+        </p:nvSpPr>
+        <p:spPr>
+          <a:xfrm>
+            <a:off x="10789920" y="6473952"/>
+            <a:ext cx="914400" cy="256032"/>
+          </a:xfrm>
+          <a:prstGeom prst="rect">
+            <a:avLst>
+</a:avLst>
+          </a:prstGeom>
+          <a:noFill/>
+          <a:ln>
+</a:ln>
+        </p:spPr>
+        <p:txBody>
+          <a:bodyPr wrap="square" rtlCol="0" anchor="ctr">
+</a:bodyPr>
+          <a:lstStyle/>
+          <a:p>
+            <a:pPr algn="r" indent="0" marL="0">
+              <a:buNone/>
+            </a:pPr>
+            <a:r>
+              <a:rPr lang="en-US" sz="850" dirty="0">
+                <a:solidFill>
+                  <a:srgbClr val="5B6472"/>
+                </a:solidFill>
+                <a:latin typeface="Noto Sans" pitchFamily="34" charset="0"/>
+                <a:ea typeface="Noto Sans" pitchFamily="34" charset="-122"/>
+                <a:cs typeface="Noto Sans" pitchFamily="34" charset="-120"/>
+              </a:rPr>
+              <a:t>4 / 14</a:t>
+            </a:r>
+            <a:endParaRPr lang="en-US" sz="850" dirty="0"/>
+          </a:p>
+        </p:txBody>
+      </p:sp>
+    </p:spTree>
+  </p:cSld>
+  <p:clrMapOvr>
+    <a:masterClrMapping/>
+  </p:clrMapOvr>
+</p:sld>
+</file>
+
+<file path=ppt/slides/slide15.xml><?xml version="1.0" encoding="utf-8"?>
+<p:sld xmlns:a="http://schemas.openxmlformats.org/drawingml/2006/main" xmlns:r="http://schemas.openxmlformats.org/officeDocument/2006/relationships" xmlns:p="http://schemas.openxmlformats.org/presentationml/2006/main">
+  <p:cSld name="Slide 8">
+    <p:bg>
+      <p:bgPr>
+        <a:solidFill>
+          <a:srgbClr val="FFFFFF"/>
+        </a:solidFill>
+      </p:bgPr>
+    </p:bg>
+    <p:spTree>
+      <p:nvGrpSpPr>
+        <p:cNvPr id="1" name=""/>
+        <p:cNvGrpSpPr/>
+        <p:nvPr/>
+      </p:nvGrpSpPr>
+      <p:grpSpPr>
+        <a:xfrm>
+          <a:off x="0" y="0"/>
+          <a:ext cx="0" cy="0"/>
+          <a:chOff x="0" y="0"/>
+          <a:chExt cx="0" cy="0"/>
+        </a:xfrm>
+      </p:grpSpPr>
+      <p:sp>
+        <p:nvSpPr>
+          <p:cNvPr id="2" name="Text 0">
+</p:cNvPr>
+          <p:cNvSpPr/>
+          <p:nvPr>
+</p:nvPr>
+        </p:nvSpPr>
+        <p:spPr>
+          <a:xfrm>
+            <a:off x="502920" y="292608"/>
+            <a:ext cx="11183112" cy="274320"/>
+          </a:xfrm>
+          <a:prstGeom prst="rect">
+            <a:avLst>
+</a:avLst>
+          </a:prstGeom>
+          <a:noFill/>
+          <a:ln>
+</a:ln>
+        </p:spPr>
+        <p:txBody>
+          <a:bodyPr wrap="square" rtlCol="0" anchor="ctr">
+</a:bodyPr>
+          <a:lstStyle/>
+          <a:p>
+            <a:pPr indent="0" marL="0">
+              <a:buNone/>
+            </a:pPr>
+            <a:r>
+              <a:rPr lang="en-US" sz="1100" b="1" spc="120" kern="0" dirty="0">
+                <a:solidFill>
+                  <a:srgbClr val="3B81B1"/>
+                </a:solidFill>
+                <a:latin typeface="Noto Sans" pitchFamily="34" charset="0"/>
+                <a:ea typeface="Noto Sans" pitchFamily="34" charset="-122"/>
+                <a:cs typeface="Noto Sans" pitchFamily="34" charset="-120"/>
+              </a:rPr>
+              <a:t>PHẦN 2 — CHÂN DUNG KHÁCH HÀNG MỤC TIÊU</a:t>
+            </a:r>
+            <a:endParaRPr lang="en-US" sz="1100" dirty="0"/>
+          </a:p>
+        </p:txBody>
+      </p:sp>
+      <p:sp>
+        <p:nvSpPr>
+          <p:cNvPr id="3" name="Text 1">
+</p:cNvPr>
+          <p:cNvSpPr/>
+          <p:nvPr>
+</p:nvPr>
+        </p:nvSpPr>
+        <p:spPr>
+          <a:xfrm>
+            <a:off x="502920" y="548640"/>
+            <a:ext cx="10085832" cy="640080"/>
+          </a:xfrm>
+          <a:prstGeom prst="rect">
+            <a:avLst>
+</a:avLst>
+          </a:prstGeom>
+          <a:noFill/>
+          <a:ln>
+</a:ln>
+        </p:spPr>
+        <p:txBody>
+          <a:bodyPr wrap="square" rtlCol="0" anchor="ctr">
+</a:bodyPr>
+          <a:lstStyle/>
+          <a:p>
+            <a:pPr indent="0" marL="0">
+              <a:buNone/>
+            </a:pPr>
+            <a:r>
+              <a:rPr lang="en-US" sz="2600" b="1" dirty="0">
+                <a:solidFill>
+                  <a:srgbClr val="004671"/>
+                </a:solidFill>
+                <a:latin typeface="Noto Sans" pitchFamily="34" charset="0"/>
+                <a:ea typeface="Noto Sans" pitchFamily="34" charset="-122"/>
+                <a:cs typeface="Noto Sans" pitchFamily="34" charset="-120"/>
+              </a:rPr>
+              <a:t>Pain Point &amp; JTBD</a:t>
+            </a:r>
+            <a:endParaRPr lang="en-US" sz="2600" dirty="0"/>
+          </a:p>
+        </p:txBody>
+      </p:sp>
+      <p:sp>
+        <p:nvSpPr>
+          <p:cNvPr id="4" name="Shape 2">
+</p:cNvPr>
+          <p:cNvSpPr/>
+          <p:nvPr>
+</p:nvPr>
+        </p:nvSpPr>
+        <p:spPr>
+          <a:xfrm>
+            <a:off x="502920" y="1170432"/>
+            <a:ext cx="777240" cy="45720"/>
+          </a:xfrm>
+          <a:prstGeom prst="rect">
+            <a:avLst>
+</a:avLst>
+          </a:prstGeom>
+          <a:solidFill>
+            <a:srgbClr val="A5BE00"/>
+          </a:solidFill>
+          <a:ln>
+</a:ln>
+        </p:spPr>
+      </p:sp>
+      <p:pic>
+        <p:nvPicPr>
+          <p:cNvPr id="5" name="Image 0" descr="C:\Users\landa\AppData\Local\Temp\claude\c--Users-landa--Personal--D---n-AI-Class-new\8a85e8a7-bdeb-42d6-9168-79c96b849bd1\scratchpad\pptx-gen\logo-icon-only.png">    </p:cNvPr>
+          <p:cNvPicPr>
+            <a:picLocks noChangeAspect="1"/>
+          </p:cNvPicPr>
+          <p:nvPr>
+</p:nvPr>
+        </p:nvPicPr>
+        <p:blipFill>
+          <a:blip r:embed="rId1">
+</a:blip>
+          <a:stretch>
+            <a:fillRect/>
+          </a:stretch>
+        </p:blipFill>
+        <p:spPr>
+          <a:xfrm>
+            <a:off x="11292840" y="365760"/>
+            <a:ext cx="502920" cy="502920"/>
+          </a:xfrm>
+          <a:prstGeom prst="rect">
+            <a:avLst/>
+          </a:prstGeom>
+        </p:spPr>
+      </p:pic>
+      <p:sp>
+        <p:nvSpPr>
+          <p:cNvPr id="6" name="Text 3">
+</p:cNvPr>
+          <p:cNvSpPr/>
+          <p:nvPr>
+</p:nvPr>
+        </p:nvSpPr>
+        <p:spPr>
+          <a:xfrm>
+            <a:off x="502920" y="1280160"/>
+            <a:ext cx="11183112" cy="384048"/>
+          </a:xfrm>
+          <a:prstGeom prst="rect">
+            <a:avLst>
+</a:avLst>
+          </a:prstGeom>
+          <a:noFill/>
+          <a:ln>
+</a:ln>
+        </p:spPr>
+        <p:txBody>
+          <a:bodyPr wrap="square" rtlCol="0" anchor="ctr">
+</a:bodyPr>
+          <a:lstStyle/>
+          <a:p>
+            <a:pPr indent="0" marL="0">
+              <a:buNone/>
+            </a:pPr>
+            <a:r>
+              <a:rPr lang="en-US" sz="1050" i="1" dirty="0">
+                <a:solidFill>
+                  <a:srgbClr val="5B6472"/>
+                </a:solidFill>
+                <a:latin typeface="Noto Sans" pitchFamily="34" charset="0"/>
+                <a:ea typeface="Noto Sans" pitchFamily="34" charset="-122"/>
+                <a:cs typeface="Noto Sans" pitchFamily="34" charset="-120"/>
+              </a:rPr>
+              <a:t>Nhóm II — Phát triển toàn diện, giỏi đều các môn</a:t>
+            </a:r>
+            <a:endParaRPr lang="en-US" sz="1050" dirty="0"/>
+          </a:p>
+        </p:txBody>
+      </p:sp>
+      <p:sp>
+        <p:nvSpPr>
+          <p:cNvPr id="7" name="Shape 4">
+</p:cNvPr>
+          <p:cNvSpPr/>
+          <p:nvPr>
+</p:nvPr>
+        </p:nvSpPr>
+        <p:spPr>
+          <a:xfrm>
+            <a:off x="502920" y="1664208"/>
+            <a:ext cx="73152" cy="1289304"/>
+          </a:xfrm>
+          <a:prstGeom prst="rect">
+            <a:avLst>
+</a:avLst>
+          </a:prstGeom>
+          <a:solidFill>
+            <a:srgbClr val="004671"/>
+          </a:solidFill>
+          <a:ln>
+</a:ln>
+        </p:spPr>
+      </p:sp>
+      <p:sp>
+        <p:nvSpPr>
+          <p:cNvPr id="8" name="Text 5">
+</p:cNvPr>
+          <p:cNvSpPr/>
+          <p:nvPr>
+</p:nvPr>
+        </p:nvSpPr>
+        <p:spPr>
+          <a:xfrm>
+            <a:off x="731520" y="1664208"/>
+            <a:ext cx="10954512" cy="1289304"/>
+          </a:xfrm>
+          <a:prstGeom prst="rect">
+            <a:avLst>
+</a:avLst>
+          </a:prstGeom>
+          <a:noFill/>
+          <a:ln>
+</a:ln>
+        </p:spPr>
+        <p:txBody>
+          <a:bodyPr wrap="square" rtlCol="0" anchor="t">
+            <a:normAutofit/>
+          </a:bodyPr>
+          <a:lstStyle/>
+          <a:p>
+            <a:pPr indent="0" marL="0">
+              <a:lnSpc>
+                <a:spcPct val="102000"/>
+              </a:lnSpc>
+              <a:spcAft>
+                <a:spcPts val="200"/>
+              </a:spcAft>
+              <a:buNone/>
+            </a:pPr>
+            <a:r>
+              <a:rPr lang="en-US" sz="1300" b="1" dirty="0">
+                <a:solidFill>
+                  <a:srgbClr val="004671"/>
+                </a:solidFill>
+                <a:latin typeface="Noto Sans" pitchFamily="34" charset="0"/>
+                <a:ea typeface="Noto Sans" pitchFamily="34" charset="-122"/>
+                <a:cs typeface="Noto Sans" pitchFamily="34" charset="-120"/>
+              </a:rPr>
+              <a:t>JTBD 1: Đạt điểm cao đồng đều ở tất cả các môn</a:t>
+            </a:r>
+            <a:endParaRPr lang="en-US" sz="1300" dirty="0"/>
+          </a:p>
+          <a:p>
+            <a:pPr indent="0" marL="0">
+              <a:lnSpc>
+                <a:spcPct val="102000"/>
+              </a:lnSpc>
+              <a:spcAft>
+                <a:spcPts val="300"/>
+              </a:spcAft>
+              <a:buNone/>
+            </a:pPr>
+            <a:r>
+              <a:rPr lang="en-US" sz="1100" b="1" dirty="0">
+                <a:solidFill>
+                  <a:srgbClr val="22333F"/>
+                </a:solidFill>
+                <a:latin typeface="Noto Sans" pitchFamily="34" charset="0"/>
+                <a:ea typeface="Noto Sans" pitchFamily="34" charset="-122"/>
+                <a:cs typeface="Noto Sans" pitchFamily="34" charset="-120"/>
+              </a:rPr>
+              <a:t>Mục tiêu: </a:t>
+            </a:r>
+            <a:r>
+              <a:rPr lang="en-US" sz="1100" dirty="0">
+                <a:solidFill>
+                  <a:srgbClr val="22333F"/>
+                </a:solidFill>
+                <a:latin typeface="Noto Sans" pitchFamily="34" charset="0"/>
+                <a:ea typeface="Noto Sans" pitchFamily="34" charset="-122"/>
+                <a:cs typeface="Noto Sans" pitchFamily="34" charset="-120"/>
+              </a:rPr>
+              <a:t>Con không bị lệch môn hay hổng kiến thức ở bất kỳ môn chính khóa nào — đảm bảo nền tảng học thuật toàn diện.</a:t>
+            </a:r>
+            <a:endParaRPr lang="en-US" sz="1300" dirty="0"/>
+          </a:p>
+          <a:p>
+            <a:pPr indent="0" marL="0">
+              <a:lnSpc>
+                <a:spcPct val="102000"/>
+              </a:lnSpc>
+              <a:spcAft>
+                <a:spcPts val="300"/>
+              </a:spcAft>
+              <a:buNone/>
+            </a:pPr>
+            <a:r>
+              <a:rPr lang="en-US" sz="1100" b="1" dirty="0">
+                <a:solidFill>
+                  <a:srgbClr val="22333F"/>
+                </a:solidFill>
+                <a:latin typeface="Noto Sans" pitchFamily="34" charset="0"/>
+                <a:ea typeface="Noto Sans" pitchFamily="34" charset="-122"/>
+                <a:cs typeface="Noto Sans" pitchFamily="34" charset="-120"/>
+              </a:rPr>
+              <a:t>Pain point: </a:t>
+            </a:r>
+            <a:r>
+              <a:rPr lang="en-US" sz="1100" dirty="0">
+                <a:solidFill>
+                  <a:srgbClr val="22333F"/>
+                </a:solidFill>
+                <a:latin typeface="Noto Sans" pitchFamily="34" charset="0"/>
+                <a:ea typeface="Noto Sans" pitchFamily="34" charset="-122"/>
+                <a:cs typeface="Noto Sans" pitchFamily="34" charset="-120"/>
+              </a:rPr>
+              <a:t>◆ Con học lệch, thiếu cân bằng giữa các môn — giả định, chưa xác nhận.</a:t>
+            </a:r>
+            <a:endParaRPr lang="en-US" sz="1300" dirty="0"/>
+          </a:p>
+        </p:txBody>
+      </p:sp>
+      <p:sp>
+        <p:nvSpPr>
+          <p:cNvPr id="9" name="Shape 6">
+</p:cNvPr>
+          <p:cNvSpPr/>
+          <p:nvPr>
+</p:nvPr>
+        </p:nvSpPr>
+        <p:spPr>
+          <a:xfrm>
+            <a:off x="502920" y="3136392"/>
+            <a:ext cx="73152" cy="1289304"/>
+          </a:xfrm>
+          <a:prstGeom prst="rect">
+            <a:avLst>
+</a:avLst>
+          </a:prstGeom>
+          <a:solidFill>
+            <a:srgbClr val="3B81B1"/>
+          </a:solidFill>
+          <a:ln>
+</a:ln>
+        </p:spPr>
+      </p:sp>
+      <p:sp>
+        <p:nvSpPr>
+          <p:cNvPr id="10" name="Text 7">
+</p:cNvPr>
+          <p:cNvSpPr/>
+          <p:nvPr>
+</p:nvPr>
+        </p:nvSpPr>
+        <p:spPr>
+          <a:xfrm>
+            <a:off x="731520" y="3136392"/>
+            <a:ext cx="10954512" cy="1289304"/>
+          </a:xfrm>
+          <a:prstGeom prst="rect">
+            <a:avLst>
+</a:avLst>
+          </a:prstGeom>
+          <a:noFill/>
+          <a:ln>
+</a:ln>
+        </p:spPr>
+        <p:txBody>
+          <a:bodyPr wrap="square" rtlCol="0" anchor="t">
+            <a:normAutofit/>
+          </a:bodyPr>
+          <a:lstStyle/>
+          <a:p>
+            <a:pPr indent="0" marL="0">
+              <a:lnSpc>
+                <a:spcPct val="102000"/>
+              </a:lnSpc>
+              <a:spcAft>
+                <a:spcPts val="200"/>
+              </a:spcAft>
+              <a:buNone/>
+            </a:pPr>
+            <a:r>
+              <a:rPr lang="en-US" sz="1300" b="1" dirty="0">
+                <a:solidFill>
+                  <a:srgbClr val="004671"/>
+                </a:solidFill>
+                <a:latin typeface="Noto Sans" pitchFamily="34" charset="0"/>
+                <a:ea typeface="Noto Sans" pitchFamily="34" charset="-122"/>
+                <a:cs typeface="Noto Sans" pitchFamily="34" charset="-120"/>
+              </a:rPr>
+              <a:t>JTBD 2: Vượt qua các kỳ thi mang tính bước ngoặt (chuyển cấp, Đại học)</a:t>
+            </a:r>
+            <a:endParaRPr lang="en-US" sz="1300" dirty="0"/>
+          </a:p>
+          <a:p>
+            <a:pPr indent="0" marL="0">
+              <a:lnSpc>
+                <a:spcPct val="102000"/>
+              </a:lnSpc>
+              <a:spcAft>
+                <a:spcPts val="300"/>
+              </a:spcAft>
+              <a:buNone/>
+            </a:pPr>
+            <a:r>
+              <a:rPr lang="en-US" sz="1100" b="1" dirty="0">
+                <a:solidFill>
+                  <a:srgbClr val="22333F"/>
+                </a:solidFill>
+                <a:latin typeface="Noto Sans" pitchFamily="34" charset="0"/>
+                <a:ea typeface="Noto Sans" pitchFamily="34" charset="-122"/>
+                <a:cs typeface="Noto Sans" pitchFamily="34" charset="-120"/>
+              </a:rPr>
+              <a:t>Mục tiêu: </a:t>
+            </a:r>
+            <a:r>
+              <a:rPr lang="en-US" sz="1100" dirty="0">
+                <a:solidFill>
+                  <a:srgbClr val="22333F"/>
+                </a:solidFill>
+                <a:latin typeface="Noto Sans" pitchFamily="34" charset="0"/>
+                <a:ea typeface="Noto Sans" pitchFamily="34" charset="-122"/>
+                <a:cs typeface="Noto Sans" pitchFamily="34" charset="-120"/>
+              </a:rPr>
+              <a:t>Con có đủ năng lực tổng hợp để vượt qua các kỳ thi quan trọng (thi vào 10, thi tốt nghiệp/Đại học).</a:t>
+            </a:r>
+            <a:endParaRPr lang="en-US" sz="1300" dirty="0"/>
+          </a:p>
+          <a:p>
+            <a:pPr indent="0" marL="0">
+              <a:lnSpc>
+                <a:spcPct val="102000"/>
+              </a:lnSpc>
+              <a:spcAft>
+                <a:spcPts val="300"/>
+              </a:spcAft>
+              <a:buNone/>
+            </a:pPr>
+            <a:r>
+              <a:rPr lang="en-US" sz="1100" b="1" dirty="0">
+                <a:solidFill>
+                  <a:srgbClr val="22333F"/>
+                </a:solidFill>
+                <a:latin typeface="Noto Sans" pitchFamily="34" charset="0"/>
+                <a:ea typeface="Noto Sans" pitchFamily="34" charset="-122"/>
+                <a:cs typeface="Noto Sans" pitchFamily="34" charset="-120"/>
+              </a:rPr>
+              <a:t>Pain point: </a:t>
+            </a:r>
+            <a:r>
+              <a:rPr lang="en-US" sz="1100" dirty="0">
+                <a:solidFill>
+                  <a:srgbClr val="22333F"/>
+                </a:solidFill>
+                <a:latin typeface="Noto Sans" pitchFamily="34" charset="0"/>
+                <a:ea typeface="Noto Sans" pitchFamily="34" charset="-122"/>
+                <a:cs typeface="Noto Sans" pitchFamily="34" charset="-120"/>
+              </a:rPr>
+              <a:t>◆ Lo con không đủ điểm/năng lực để đỗ trường mong muốn — giả định, cần validate ở khảo sát T9.</a:t>
+            </a:r>
+            <a:endParaRPr lang="en-US" sz="1300" dirty="0"/>
+          </a:p>
+        </p:txBody>
+      </p:sp>
+      <p:sp>
+        <p:nvSpPr>
+          <p:cNvPr id="11" name="Shape 8">
+</p:cNvPr>
+          <p:cNvSpPr/>
+          <p:nvPr>
+</p:nvPr>
+        </p:nvSpPr>
+        <p:spPr>
+          <a:xfrm>
+            <a:off x="502920" y="4608576"/>
+            <a:ext cx="73152" cy="1289304"/>
+          </a:xfrm>
+          <a:prstGeom prst="rect">
+            <a:avLst>
+</a:avLst>
+          </a:prstGeom>
+          <a:solidFill>
+            <a:srgbClr val="518E0D"/>
+          </a:solidFill>
+          <a:ln>
+</a:ln>
+        </p:spPr>
+      </p:sp>
+      <p:sp>
+        <p:nvSpPr>
+          <p:cNvPr id="12" name="Text 9">
+</p:cNvPr>
+          <p:cNvSpPr/>
+          <p:nvPr>
+</p:nvPr>
+        </p:nvSpPr>
+        <p:spPr>
+          <a:xfrm>
+            <a:off x="731520" y="4608576"/>
+            <a:ext cx="10954512" cy="1289304"/>
+          </a:xfrm>
+          <a:prstGeom prst="rect">
+            <a:avLst>
+</a:avLst>
+          </a:prstGeom>
+          <a:noFill/>
+          <a:ln>
+</a:ln>
+        </p:spPr>
+        <p:txBody>
+          <a:bodyPr wrap="square" rtlCol="0" anchor="t">
+            <a:normAutofit/>
+          </a:bodyPr>
+          <a:lstStyle/>
+          <a:p>
+            <a:pPr indent="0" marL="0">
+              <a:lnSpc>
+                <a:spcPct val="102000"/>
+              </a:lnSpc>
+              <a:spcAft>
+                <a:spcPts val="200"/>
+              </a:spcAft>
+              <a:buNone/>
+            </a:pPr>
+            <a:r>
+              <a:rPr lang="en-US" sz="1300" b="1" dirty="0">
+                <a:solidFill>
+                  <a:srgbClr val="004671"/>
+                </a:solidFill>
+                <a:latin typeface="Noto Sans" pitchFamily="34" charset="0"/>
+                <a:ea typeface="Noto Sans" pitchFamily="34" charset="-122"/>
+                <a:cs typeface="Noto Sans" pitchFamily="34" charset="-120"/>
+              </a:rPr>
+              <a:t>JTBD 3: Giải phóng thời gian và áp lực kèm con cho bố mẹ</a:t>
+            </a:r>
+            <a:endParaRPr lang="en-US" sz="1300" dirty="0"/>
+          </a:p>
+          <a:p>
+            <a:pPr indent="0" marL="0">
+              <a:lnSpc>
+                <a:spcPct val="102000"/>
+              </a:lnSpc>
+              <a:spcAft>
+                <a:spcPts val="300"/>
+              </a:spcAft>
+              <a:buNone/>
+            </a:pPr>
+            <a:r>
+              <a:rPr lang="en-US" sz="1100" b="1" dirty="0">
+                <a:solidFill>
+                  <a:srgbClr val="22333F"/>
+                </a:solidFill>
+                <a:latin typeface="Noto Sans" pitchFamily="34" charset="0"/>
+                <a:ea typeface="Noto Sans" pitchFamily="34" charset="-122"/>
+                <a:cs typeface="Noto Sans" pitchFamily="34" charset="-120"/>
+              </a:rPr>
+              <a:t>Mục tiêu: </a:t>
+            </a:r>
+            <a:r>
+              <a:rPr lang="en-US" sz="1100" dirty="0">
+                <a:solidFill>
+                  <a:srgbClr val="22333F"/>
+                </a:solidFill>
+                <a:latin typeface="Noto Sans" pitchFamily="34" charset="0"/>
+                <a:ea typeface="Noto Sans" pitchFamily="34" charset="-122"/>
+                <a:cs typeface="Noto Sans" pitchFamily="34" charset="-120"/>
+              </a:rPr>
+              <a:t>Cần giải pháp "đóng gói" nhiều môn — không phải tự tìm, quản lý, sắp xếp ở nhiều nơi khác nhau.</a:t>
+            </a:r>
+            <a:endParaRPr lang="en-US" sz="1300" dirty="0"/>
+          </a:p>
+          <a:p>
+            <a:pPr indent="0" marL="0">
+              <a:lnSpc>
+                <a:spcPct val="102000"/>
+              </a:lnSpc>
+              <a:spcAft>
+                <a:spcPts val="300"/>
+              </a:spcAft>
+              <a:buNone/>
+            </a:pPr>
+            <a:r>
+              <a:rPr lang="en-US" sz="1100" b="1" dirty="0">
+                <a:solidFill>
+                  <a:srgbClr val="22333F"/>
+                </a:solidFill>
+                <a:latin typeface="Noto Sans" pitchFamily="34" charset="0"/>
+                <a:ea typeface="Noto Sans" pitchFamily="34" charset="-122"/>
+                <a:cs typeface="Noto Sans" pitchFamily="34" charset="-120"/>
+              </a:rPr>
+              <a:t>Pain point: </a:t>
+            </a:r>
+            <a:r>
+              <a:rPr lang="en-US" sz="1100" dirty="0">
+                <a:solidFill>
+                  <a:srgbClr val="22333F"/>
+                </a:solidFill>
+                <a:latin typeface="Noto Sans" pitchFamily="34" charset="0"/>
+                <a:ea typeface="Noto Sans" pitchFamily="34" charset="-122"/>
+                <a:cs typeface="Noto Sans" pitchFamily="34" charset="-120"/>
+              </a:rPr>
+              <a:t>◆ Khó quản lý việc học đa môn/đa trung tâm; chi phí và thời gian đưa đón cộng dồn.</a:t>
+            </a:r>
+            <a:endParaRPr lang="en-US" sz="1300" dirty="0"/>
+          </a:p>
+        </p:txBody>
+      </p:sp>
+      <p:pic>
+        <p:nvPicPr>
+          <p:cNvPr id="15" name="Image 1" descr="C:\Users\landa\AppData\Local\Temp\claude\c--Users-landa--Personal--D---n-AI-Class-new\8a85e8a7-bdeb-42d6-9168-79c96b849bd1\scratchpad\pptx-gen\logo-icon-only.png">    </p:cNvPr>
+          <p:cNvPicPr>
+            <a:picLocks noChangeAspect="1"/>
+          </p:cNvPicPr>
+          <p:nvPr>
+</p:nvPr>
+        </p:nvPicPr>
+        <p:blipFill>
+          <a:blip r:embed="rId2">
+</a:blip>
+          <a:stretch>
+            <a:fillRect/>
+          </a:stretch>
+        </p:blipFill>
+        <p:spPr>
+          <a:xfrm>
+            <a:off x="502920" y="6473952"/>
+            <a:ext cx="237744" cy="237744"/>
+          </a:xfrm>
+          <a:prstGeom prst="rect">
+            <a:avLst/>
+          </a:prstGeom>
+        </p:spPr>
+      </p:pic>
+      <p:sp>
+        <p:nvSpPr>
+          <p:cNvPr id="16" name="Text 12">
+</p:cNvPr>
+          <p:cNvSpPr/>
+          <p:nvPr>
+</p:nvPr>
+        </p:nvSpPr>
+        <p:spPr>
+          <a:xfrm>
+            <a:off x="795528" y="6473952"/>
+            <a:ext cx="3657600" cy="256032"/>
+          </a:xfrm>
+          <a:prstGeom prst="rect">
+            <a:avLst>
+</a:avLst>
+          </a:prstGeom>
+          <a:noFill/>
+          <a:ln>
+</a:ln>
+        </p:spPr>
+        <p:txBody>
+          <a:bodyPr wrap="square" rtlCol="0" anchor="ctr">
+</a:bodyPr>
+          <a:lstStyle/>
+          <a:p>
+            <a:pPr indent="0" marL="0">
+              <a:buNone/>
+            </a:pPr>
+            <a:r>
+              <a:rPr lang="en-US" sz="800" spc="100" kern="0" dirty="0">
+                <a:solidFill>
+                  <a:srgbClr val="5B6472"/>
+                </a:solidFill>
+                <a:latin typeface="Noto Sans" pitchFamily="34" charset="0"/>
+                <a:ea typeface="Noto Sans" pitchFamily="34" charset="-122"/>
+                <a:cs typeface="Noto Sans" pitchFamily="34" charset="-120"/>
+              </a:rPr>
+              <a:t>EDUPIA  AI CLASS NEW</a:t>
+            </a:r>
+            <a:endParaRPr lang="en-US" sz="800" dirty="0"/>
+          </a:p>
+        </p:txBody>
+      </p:sp>
+      <p:sp>
+        <p:nvSpPr>
+          <p:cNvPr id="17" name="Text 13">
+</p:cNvPr>
+          <p:cNvSpPr/>
+          <p:nvPr>
+</p:nvPr>
+        </p:nvSpPr>
+        <p:spPr>
+          <a:xfrm>
+            <a:off x="10789920" y="6473952"/>
+            <a:ext cx="914400" cy="256032"/>
+          </a:xfrm>
+          <a:prstGeom prst="rect">
+            <a:avLst>
+</a:avLst>
+          </a:prstGeom>
+          <a:noFill/>
+          <a:ln>
+</a:ln>
+        </p:spPr>
+        <p:txBody>
+          <a:bodyPr wrap="square" rtlCol="0" anchor="ctr">
+</a:bodyPr>
+          <a:lstStyle/>
+          <a:p>
+            <a:pPr algn="r" indent="0" marL="0">
+              <a:buNone/>
+            </a:pPr>
+            <a:r>
+              <a:rPr lang="en-US" sz="850" dirty="0">
+                <a:solidFill>
+                  <a:srgbClr val="5B6472"/>
+                </a:solidFill>
+                <a:latin typeface="Noto Sans" pitchFamily="34" charset="0"/>
+                <a:ea typeface="Noto Sans" pitchFamily="34" charset="-122"/>
+                <a:cs typeface="Noto Sans" pitchFamily="34" charset="-120"/>
+              </a:rPr>
+              <a:t>5 / 14</a:t>
+            </a:r>
+            <a:endParaRPr lang="en-US" sz="850" dirty="0"/>
+          </a:p>
+        </p:txBody>
+      </p:sp>
+    </p:spTree>
+  </p:cSld>
+  <p:clrMapOvr>
+    <a:masterClrMapping/>
+  </p:clrMapOvr>
+</p:sld>
+</file>
+
+<file path=ppt/slides/slide16.xml><?xml version="1.0" encoding="utf-8"?>
+<p:sld xmlns:a="http://schemas.openxmlformats.org/drawingml/2006/main" xmlns:r="http://schemas.openxmlformats.org/officeDocument/2006/relationships" xmlns:p="http://schemas.openxmlformats.org/presentationml/2006/main">
+  <p:cSld name="Slide 16">
+    <p:bg>
+      <p:bgPr>
+        <a:solidFill>
+          <a:srgbClr val="FFFFFF"/>
+        </a:solidFill>
+      </p:bgPr>
+    </p:bg>
+    <p:spTree>
+      <p:nvGrpSpPr>
+        <p:cNvPr id="1" name=""/>
+        <p:cNvGrpSpPr/>
+        <p:nvPr/>
+      </p:nvGrpSpPr>
+      <p:grpSpPr>
+        <a:xfrm>
+          <a:off x="0" y="0"/>
+          <a:ext cx="0" cy="0"/>
+          <a:chOff x="0" y="0"/>
+          <a:chExt cx="0" cy="0"/>
+        </a:xfrm>
+      </p:grpSpPr>
+      <p:sp>
+        <p:nvSpPr>
+          <p:cNvPr id="2" name="Text 0">
+</p:cNvPr>
+          <p:cNvSpPr/>
+          <p:nvPr>
+</p:nvPr>
+        </p:nvSpPr>
+        <p:spPr>
+          <a:xfrm>
+            <a:off x="502920" y="292608"/>
+            <a:ext cx="11183112" cy="274320"/>
+          </a:xfrm>
+          <a:prstGeom prst="rect">
+            <a:avLst>
+</a:avLst>
+          </a:prstGeom>
+          <a:noFill/>
+          <a:ln>
+</a:ln>
+        </p:spPr>
+        <p:txBody>
+          <a:bodyPr wrap="square" rtlCol="0" anchor="ctr">
+</a:bodyPr>
+          <a:lstStyle/>
+          <a:p>
+            <a:pPr indent="0" marL="0">
+              <a:buNone/>
+            </a:pPr>
+            <a:r>
+              <a:rPr lang="en-US" sz="1100" b="1" spc="120" kern="0" dirty="0">
+                <a:solidFill>
+                  <a:srgbClr val="3B81B1"/>
+                </a:solidFill>
+                <a:latin typeface="Noto Sans" pitchFamily="34" charset="0"/>
+                <a:ea typeface="Noto Sans" pitchFamily="34" charset="-122"/>
+                <a:cs typeface="Noto Sans" pitchFamily="34" charset="-120"/>
+              </a:rPr>
+              <a:t>PHẦN 2 — CHÂN DUNG KHÁCH HÀNG MỤC TIÊU</a:t>
+            </a:r>
+            <a:endParaRPr lang="en-US" sz="1100" dirty="0"/>
+          </a:p>
+        </p:txBody>
+      </p:sp>
+      <p:sp>
+        <p:nvSpPr>
+          <p:cNvPr id="3" name="Text 1">
+</p:cNvPr>
+          <p:cNvSpPr/>
+          <p:nvPr>
+</p:nvPr>
+        </p:nvSpPr>
+        <p:spPr>
+          <a:xfrm>
+            <a:off x="502920" y="548640"/>
+            <a:ext cx="10085832" cy="640080"/>
+          </a:xfrm>
+          <a:prstGeom prst="rect">
+            <a:avLst>
+</a:avLst>
+          </a:prstGeom>
+          <a:noFill/>
+          <a:ln>
+</a:ln>
+        </p:spPr>
+        <p:txBody>
+          <a:bodyPr wrap="square" rtlCol="0" anchor="ctr">
+</a:bodyPr>
+          <a:lstStyle/>
+          <a:p>
+            <a:pPr indent="0" marL="0">
+              <a:buNone/>
+            </a:pPr>
+            <a:r>
+              <a:rPr lang="en-US" sz="2600" b="1" dirty="0">
+                <a:solidFill>
+                  <a:srgbClr val="004671"/>
+                </a:solidFill>
+                <a:latin typeface="Noto Sans" pitchFamily="34" charset="0"/>
+                <a:ea typeface="Noto Sans" pitchFamily="34" charset="-122"/>
+                <a:cs typeface="Noto Sans" pitchFamily="34" charset="-120"/>
+              </a:rPr>
+              <a:t>Phân tích, Đánh giá Concept hiện tại</a:t>
+            </a:r>
+            <a:endParaRPr lang="en-US" sz="2600" dirty="0"/>
+          </a:p>
+        </p:txBody>
+      </p:sp>
+      <p:sp>
+        <p:nvSpPr>
+          <p:cNvPr id="4" name="Shape 2">
+</p:cNvPr>
+          <p:cNvSpPr/>
+          <p:nvPr>
+</p:nvPr>
+        </p:nvSpPr>
+        <p:spPr>
+          <a:xfrm>
+            <a:off x="502920" y="1170432"/>
+            <a:ext cx="777240" cy="45720"/>
+          </a:xfrm>
+          <a:prstGeom prst="rect">
+            <a:avLst>
+</a:avLst>
+          </a:prstGeom>
+          <a:solidFill>
+            <a:srgbClr val="A5BE00"/>
+          </a:solidFill>
+          <a:ln>
+</a:ln>
+        </p:spPr>
+      </p:sp>
+      <p:pic>
+        <p:nvPicPr>
+          <p:cNvPr id="5" name="Image 0">
+</p:cNvPr>
+          <p:cNvPicPr>
+            <a:picLocks noChangeAspect="1"/>
+          </p:cNvPicPr>
+          <p:nvPr>
+</p:nvPr>
+        </p:nvPicPr>
+        <p:blipFill>
+          <a:blip r:embed="rId1">
+</a:blip>
+          <a:stretch>
+            <a:fillRect/>
+          </a:stretch>
+        </p:blipFill>
+        <p:spPr>
+          <a:xfrm>
+            <a:off x="11292840" y="365760"/>
+            <a:ext cx="502920" cy="502920"/>
+          </a:xfrm>
+          <a:prstGeom prst="rect">
+            <a:avLst/>
+          </a:prstGeom>
+        </p:spPr>
+      </p:pic>
+      <p:sp>
+        <p:nvSpPr>
+          <p:cNvPr id="6" name="Text 3">
+</p:cNvPr>
+          <p:cNvSpPr/>
+          <p:nvPr>
+</p:nvPr>
+        </p:nvSpPr>
+        <p:spPr>
+          <a:xfrm>
+            <a:off x="502920" y="1280160"/>
+            <a:ext cx="11183112" cy="384048"/>
+          </a:xfrm>
+          <a:prstGeom prst="rect">
+            <a:avLst>
+</a:avLst>
+          </a:prstGeom>
+          <a:noFill/>
+          <a:ln>
+</a:ln>
+        </p:spPr>
+        <p:txBody>
+          <a:bodyPr wrap="square" rtlCol="0" anchor="ctr">
+</a:bodyPr>
+          <a:lstStyle/>
+          <a:p>
+            <a:pPr indent="0" marL="0">
+              <a:buNone/>
+            </a:pPr>
+            <a:r>
+              <a:rPr lang="en-US" sz="1050" i="1" dirty="0">
+                <a:solidFill>
+                  <a:srgbClr val="5B6472"/>
+                </a:solidFill>
+                <a:latin typeface="Noto Sans" pitchFamily="34" charset="0"/>
+                <a:ea typeface="Noto Sans" pitchFamily="34" charset="-122"/>
+                <a:cs typeface="Noto Sans" pitchFamily="34" charset="-120"/>
+              </a:rPr>
+              <a:t>Concept hiện tại đang giải quyết được gì? Và còn thiếu gì?</a:t>
+            </a:r>
+            <a:endParaRPr lang="en-US" sz="1050" dirty="0"/>
+          </a:p>
+        </p:txBody>
+      </p:sp>
       <p:graphicFrame>
         <p:nvGraphicFramePr>
           <p:cNvPr id="12" name="Table 0"/>
@@ -8073,19 +9793,19 @@
           <p:nvPr/>
         </p:nvGraphicFramePr>
         <p:xfrm>
-          <a:off x="502920" y="1371600"/>
-          <a:ext cx="11183112" cy="5029200"/>
+          <a:off x="502920" y="1730000"/>
+          <a:ext cx="11183112" cy="3143250"/>
         </p:xfrm>
         <a:graphic>
           <a:graphicData uri="http://schemas.openxmlformats.org/drawingml/2006/table">
             <a:tbl>
-              <a:tblPr firstRow="1" bandRow="0"/>
+              <a:tblPr/>
               <a:tblGrid>
-                <a:gridCol w="5200000"/>
-                <a:gridCol w="3583112"/>
+                <a:gridCol w="3200000"/>
+                <a:gridCol w="5583112"/>
                 <a:gridCol w="2400000"/>
               </a:tblGrid>
-              <a:tr h="350000">
+              <a:tr h="628650">
                 <a:tc>
                   <a:txBody>
                     <a:bodyPr/>
@@ -8095,7 +9815,7 @@
                         <a:buNone/>
                       </a:pPr>
                       <a:r>
-                        <a:rPr lang="en-US" sz="1200" b="1" dirty="0">
+                        <a:rPr lang="en-US" sz="1150" b="1" dirty="0">
                           <a:solidFill>
                             <a:srgbClr val="FFFFFF"/>
                           </a:solidFill>
@@ -8103,9 +9823,9 @@
                           <a:ea typeface="Noto Sans" pitchFamily="34" charset="-122"/>
                           <a:cs typeface="Noto Sans" pitchFamily="34" charset="-120"/>
                         </a:rPr>
-                        <a:t>Job (góc nhìn phụ huynh)</a:t>
+                        <a:t>Cấu phần hiện tại</a:t>
                       </a:r>
-                      <a:endParaRPr lang="en-US" sz="1200" dirty="0">
+                      <a:endParaRPr lang="en-US" sz="1150" dirty="0">
                         <a:latin typeface="Noto Sans" charset="0"/>
                         <a:ea typeface="Noto Sans" charset="0"/>
                         <a:cs typeface="Noto Sans" charset="0"/>
@@ -8163,7 +9883,7 @@
                         <a:buNone/>
                       </a:pPr>
                       <a:r>
-                        <a:rPr lang="en-US" sz="1200" b="1" dirty="0">
+                        <a:rPr lang="en-US" sz="1150" b="1" dirty="0">
                           <a:solidFill>
                             <a:srgbClr val="FFFFFF"/>
                           </a:solidFill>
@@ -8171,9 +9891,9 @@
                           <a:ea typeface="Noto Sans" pitchFamily="34" charset="-122"/>
                           <a:cs typeface="Noto Sans" pitchFamily="34" charset="-120"/>
                         </a:rPr>
-                        <a:t>Pain point liên quan</a:t>
+                        <a:t>JTBD được giải quyết (Slide 5)</a:t>
                       </a:r>
-                      <a:endParaRPr lang="en-US" sz="1200" dirty="0">
+                      <a:endParaRPr lang="en-US" sz="1150" dirty="0">
                         <a:latin typeface="Noto Sans" charset="0"/>
                         <a:ea typeface="Noto Sans" charset="0"/>
                         <a:cs typeface="Noto Sans" charset="0"/>
@@ -8231,7 +9951,7 @@
                         <a:buNone/>
                       </a:pPr>
                       <a:r>
-                        <a:rPr lang="en-US" sz="1200" b="1" dirty="0">
+                        <a:rPr lang="en-US" sz="1150" b="1" dirty="0">
                           <a:solidFill>
                             <a:srgbClr val="FFFFFF"/>
                           </a:solidFill>
@@ -8239,9 +9959,9 @@
                           <a:ea typeface="Noto Sans" pitchFamily="34" charset="-122"/>
                           <a:cs typeface="Noto Sans" pitchFamily="34" charset="-120"/>
                         </a:rPr>
-                        <a:t>Nhu cầu</a:t>
+                        <a:t>Đánh giá</a:t>
                       </a:r>
-                      <a:endParaRPr lang="en-US" sz="1200" dirty="0">
+                      <a:endParaRPr lang="en-US" sz="1150" dirty="0">
                         <a:latin typeface="Noto Sans" charset="0"/>
                         <a:ea typeface="Noto Sans" charset="0"/>
                         <a:cs typeface="Noto Sans" charset="0"/>
@@ -8291,7 +10011,7 @@
                   </a:tcPr>
                 </a:tc>
               </a:tr>
-              <a:tr h="584650">
+              <a:tr h="628650">
                 <a:tc>
                   <a:txBody>
                     <a:bodyPr/>
@@ -8301,28 +10021,17 @@
                         <a:buNone/>
                       </a:pPr>
                       <a:r>
-                        <a:rPr lang="en-US" sz="1200" b="1" dirty="0">
+                        <a:rPr lang="en-US" sz="1100" b="1" dirty="0">
                           <a:solidFill>
-                            <a:srgbClr val="3B81B1"/>
+                            <a:srgbClr val="004671"/>
                           </a:solidFill>
                           <a:latin typeface="Noto Sans" pitchFamily="34" charset="0"/>
                           <a:ea typeface="Noto Sans" pitchFamily="34" charset="-122"/>
                           <a:cs typeface="Noto Sans" pitchFamily="34" charset="-120"/>
                         </a:rPr>
-                        <a:t>[Functional] </a:t>
+                        <a:t>Big Class + AI Practice — GV bám sát SGK (2 buổi/tuần)</a:t>
                       </a:r>
-                      <a:r>
-                        <a:rPr lang="en-US" sz="1200" dirty="0">
-                          <a:solidFill>
-                            <a:srgbClr val="22333F"/>
-                          </a:solidFill>
-                          <a:latin typeface="Noto Sans" pitchFamily="34" charset="0"/>
-                          <a:ea typeface="Noto Sans" pitchFamily="34" charset="-122"/>
-                          <a:cs typeface="Noto Sans" pitchFamily="34" charset="-120"/>
-                        </a:rPr>
-                        <a:t>Muốn con học giỏi môn tiếng Anh</a:t>
-                      </a:r>
-                      <a:endParaRPr lang="en-US" sz="1200" dirty="0">
+                      <a:endParaRPr lang="en-US" sz="1100" dirty="0">
                         <a:latin typeface="Noto Sans" charset="0"/>
                         <a:ea typeface="Noto Sans" charset="0"/>
                         <a:cs typeface="Noto Sans" charset="0"/>
@@ -8380,156 +10089,7 @@
                         <a:buNone/>
                       </a:pPr>
                       <a:r>
-                        <a:rPr lang="en-US" sz="1200" dirty="0">
-                          <a:solidFill>
-                            <a:srgbClr val="5B6472"/>
-                          </a:solidFill>
-                          <a:latin typeface="Noto Sans" pitchFamily="34" charset="0"/>
-                          <a:ea typeface="Noto Sans" pitchFamily="34" charset="-122"/>
-                          <a:cs typeface="Noto Sans" pitchFamily="34" charset="-120"/>
-                        </a:rPr>
-                        <a:t>Con học TA chưa tốt/tiến bộ chậm — phát âm sai, không tự tin khi giao tiếp</a:t>
-                      </a:r>
-                      <a:endParaRPr lang="en-US" sz="1200" dirty="0">
-                        <a:latin typeface="Noto Sans" charset="0"/>
-                        <a:ea typeface="Noto Sans" charset="0"/>
-                        <a:cs typeface="Noto Sans" charset="0"/>
-                      </a:endParaRPr>
-                    </a:p>
-                  </a:txBody>
-                  <a:tcPr marL="101600" marR="101600" marT="63500" marB="63500" anchor="t">
-                    <a:lnL w="9525" cap="flat" cmpd="sng" algn="ctr">
-                      <a:solidFill>
-                        <a:srgbClr val="DCE7EA"/>
-                      </a:solidFill>
-                      <a:prstDash val="solid"/>
-                      <a:round/>
-                      <a:headEnd type="none" w="med" len="med"/>
-                      <a:tailEnd type="none" w="med" len="med"/>
-                    </a:lnL>
-                    <a:lnR w="9525" cap="flat" cmpd="sng" algn="ctr">
-                      <a:solidFill>
-                        <a:srgbClr val="DCE7EA"/>
-                      </a:solidFill>
-                      <a:prstDash val="solid"/>
-                      <a:round/>
-                      <a:headEnd type="none" w="med" len="med"/>
-                      <a:tailEnd type="none" w="med" len="med"/>
-                    </a:lnR>
-                    <a:lnT w="9525" cap="flat" cmpd="sng" algn="ctr">
-                      <a:solidFill>
-                        <a:srgbClr val="DCE7EA"/>
-                      </a:solidFill>
-                      <a:prstDash val="solid"/>
-                      <a:round/>
-                      <a:headEnd type="none" w="med" len="med"/>
-                      <a:tailEnd type="none" w="med" len="med"/>
-                    </a:lnT>
-                    <a:lnB w="9525" cap="flat" cmpd="sng" algn="ctr">
-                      <a:solidFill>
-                        <a:srgbClr val="DCE7EA"/>
-                      </a:solidFill>
-                      <a:prstDash val="solid"/>
-                      <a:round/>
-                      <a:headEnd type="none" w="med" len="med"/>
-                      <a:tailEnd type="none" w="med" len="med"/>
-                    </a:lnB>
-                    <a:solidFill>
-                      <a:srgbClr val="FFFFFF"/>
-                    </a:solidFill>
-                  </a:tcPr>
-                </a:tc>
-                <a:tc rowSpan="2">
-                  <a:txBody>
-                    <a:bodyPr/>
-                    <a:lstStyle/>
-                    <a:p>
-                      <a:pPr indent="0" marL="0">
-                        <a:buNone/>
-                      </a:pPr>
-                      <a:r>
-                        <a:rPr lang="en-US" sz="1200" b="1" dirty="0">
-                          <a:solidFill>
-                            <a:srgbClr val="004671"/>
-                          </a:solidFill>
-                          <a:latin typeface="Noto Sans" pitchFamily="34" charset="0"/>
-                          <a:ea typeface="Noto Sans" pitchFamily="34" charset="-122"/>
-                          <a:cs typeface="Noto Sans" pitchFamily="34" charset="-120"/>
-                        </a:rPr>
-                        <a:t>Muốn con học giỏi tiếng Anh</a:t>
-                      </a:r>
-                      <a:endParaRPr lang="en-US" sz="1200" dirty="0">
-                        <a:latin typeface="Noto Sans" charset="0"/>
-                        <a:ea typeface="Noto Sans" charset="0"/>
-                        <a:cs typeface="Noto Sans" charset="0"/>
-                      </a:endParaRPr>
-                    </a:p>
-                  </a:txBody>
-                  <a:tcPr marL="101600" marR="101600" marT="63500" marB="63500" anchor="t">
-                    <a:lnL w="9525" cap="flat" cmpd="sng" algn="ctr">
-                      <a:solidFill>
-                        <a:srgbClr val="DCE7EA"/>
-                      </a:solidFill>
-                      <a:prstDash val="solid"/>
-                      <a:round/>
-                      <a:headEnd type="none" w="med" len="med"/>
-                      <a:tailEnd type="none" w="med" len="med"/>
-                    </a:lnL>
-                    <a:lnR w="9525" cap="flat" cmpd="sng" algn="ctr">
-                      <a:solidFill>
-                        <a:srgbClr val="DCE7EA"/>
-                      </a:solidFill>
-                      <a:prstDash val="solid"/>
-                      <a:round/>
-                      <a:headEnd type="none" w="med" len="med"/>
-                      <a:tailEnd type="none" w="med" len="med"/>
-                    </a:lnR>
-                    <a:lnT w="9525" cap="flat" cmpd="sng" algn="ctr">
-                      <a:solidFill>
-                        <a:srgbClr val="DCE7EA"/>
-                      </a:solidFill>
-                      <a:prstDash val="solid"/>
-                      <a:round/>
-                      <a:headEnd type="none" w="med" len="med"/>
-                      <a:tailEnd type="none" w="med" len="med"/>
-                    </a:lnT>
-                    <a:lnB w="9525" cap="flat" cmpd="sng" algn="ctr">
-                      <a:solidFill>
-                        <a:srgbClr val="DCE7EA"/>
-                      </a:solidFill>
-                      <a:prstDash val="solid"/>
-                      <a:round/>
-                      <a:headEnd type="none" w="med" len="med"/>
-                      <a:tailEnd type="none" w="med" len="med"/>
-                    </a:lnB>
-                    <a:solidFill>
-                      <a:srgbClr val="FFFFFF"/>
-                    </a:solidFill>
-                  </a:tcPr>
-                </a:tc>
-              </a:tr>
-              <a:tr h="584650">
-                <a:tc>
-                  <a:txBody>
-                    <a:bodyPr/>
-                    <a:lstStyle/>
-                    <a:p>
-                      <a:pPr indent="0" marL="0">
-                        <a:buNone/>
-                      </a:pPr>
-                      <a:r>
-                        <a:rPr lang="en-US" sz="1200" b="1" dirty="0">
-                          <a:solidFill>
-                            <a:srgbClr val="A5BE00"/>
-                          </a:solidFill>
-                          <a:latin typeface="Noto Sans" pitchFamily="34" charset="0"/>
-                          <a:ea typeface="Noto Sans" pitchFamily="34" charset="-122"/>
-                          <a:cs typeface="Noto Sans" pitchFamily="34" charset="-120"/>
-                        </a:rPr>
-                        <a:t>[Emotional] </a:t>
-                      </a:r>
-                      <a:r>
-                        <a:rPr lang="en-US" sz="1200" dirty="0">
+                        <a:rPr lang="en-US" sz="1100" dirty="0">
                           <a:solidFill>
                             <a:srgbClr val="22333F"/>
                           </a:solidFill>
@@ -8537,215 +10097,9 @@
                           <a:ea typeface="Noto Sans" pitchFamily="34" charset="-122"/>
                           <a:cs typeface="Noto Sans" pitchFamily="34" charset="-120"/>
                         </a:rPr>
-                        <a:t>Yên tâm con tiến bộ thực chất mà không cần tự kèm</a:t>
+                        <a:t>JTBD 1: Đạt thành tích học thuật rõ ràng về Tiếng Anh</a:t>
                       </a:r>
-                      <a:endParaRPr lang="en-US" sz="1200" dirty="0">
-                        <a:latin typeface="Noto Sans" charset="0"/>
-                        <a:ea typeface="Noto Sans" charset="0"/>
-                        <a:cs typeface="Noto Sans" charset="0"/>
-                      </a:endParaRPr>
-                    </a:p>
-                  </a:txBody>
-                  <a:tcPr marL="101600" marR="101600" marT="63500" marB="63500" anchor="t">
-                    <a:lnL w="9525" cap="flat" cmpd="sng" algn="ctr">
-                      <a:solidFill>
-                        <a:srgbClr val="DCE7EA"/>
-                      </a:solidFill>
-                      <a:prstDash val="solid"/>
-                      <a:round/>
-                      <a:headEnd type="none" w="med" len="med"/>
-                      <a:tailEnd type="none" w="med" len="med"/>
-                    </a:lnL>
-                    <a:lnR w="9525" cap="flat" cmpd="sng" algn="ctr">
-                      <a:solidFill>
-                        <a:srgbClr val="DCE7EA"/>
-                      </a:solidFill>
-                      <a:prstDash val="solid"/>
-                      <a:round/>
-                      <a:headEnd type="none" w="med" len="med"/>
-                      <a:tailEnd type="none" w="med" len="med"/>
-                    </a:lnR>
-                    <a:lnT w="9525" cap="flat" cmpd="sng" algn="ctr">
-                      <a:solidFill>
-                        <a:srgbClr val="DCE7EA"/>
-                      </a:solidFill>
-                      <a:prstDash val="solid"/>
-                      <a:round/>
-                      <a:headEnd type="none" w="med" len="med"/>
-                      <a:tailEnd type="none" w="med" len="med"/>
-                    </a:lnT>
-                    <a:lnB w="9525" cap="flat" cmpd="sng" algn="ctr">
-                      <a:solidFill>
-                        <a:srgbClr val="DCE7EA"/>
-                      </a:solidFill>
-                      <a:prstDash val="solid"/>
-                      <a:round/>
-                      <a:headEnd type="none" w="med" len="med"/>
-                      <a:tailEnd type="none" w="med" len="med"/>
-                    </a:lnB>
-                    <a:solidFill>
-                      <a:srgbClr val="F2FAFB"/>
-                    </a:solidFill>
-                  </a:tcPr>
-                </a:tc>
-                <a:tc>
-                  <a:txBody>
-                    <a:bodyPr/>
-                    <a:lstStyle/>
-                    <a:p>
-                      <a:pPr indent="0" marL="0">
-                        <a:buNone/>
-                      </a:pPr>
-                      <a:r>
-                        <a:rPr lang="en-US" sz="1200" dirty="0">
-                          <a:solidFill>
-                            <a:srgbClr val="5B6472"/>
-                          </a:solidFill>
-                          <a:latin typeface="Noto Sans" pitchFamily="34" charset="0"/>
-                          <a:ea typeface="Noto Sans" pitchFamily="34" charset="-122"/>
-                          <a:cs typeface="Noto Sans" pitchFamily="34" charset="-120"/>
-                        </a:rPr>
-                        <a:t>Con học TA chưa tốt; phụ huynh bận, phải nhắc nhở/đốc thúc con</a:t>
-                      </a:r>
-                      <a:endParaRPr lang="en-US" sz="1200" dirty="0">
-                        <a:latin typeface="Noto Sans" charset="0"/>
-                        <a:ea typeface="Noto Sans" charset="0"/>
-                        <a:cs typeface="Noto Sans" charset="0"/>
-                      </a:endParaRPr>
-                    </a:p>
-                  </a:txBody>
-                  <a:tcPr marL="101600" marR="101600" marT="63500" marB="63500" anchor="t">
-                    <a:lnL w="9525" cap="flat" cmpd="sng" algn="ctr">
-                      <a:solidFill>
-                        <a:srgbClr val="DCE7EA"/>
-                      </a:solidFill>
-                      <a:prstDash val="solid"/>
-                      <a:round/>
-                      <a:headEnd type="none" w="med" len="med"/>
-                      <a:tailEnd type="none" w="med" len="med"/>
-                    </a:lnL>
-                    <a:lnR w="9525" cap="flat" cmpd="sng" algn="ctr">
-                      <a:solidFill>
-                        <a:srgbClr val="DCE7EA"/>
-                      </a:solidFill>
-                      <a:prstDash val="solid"/>
-                      <a:round/>
-                      <a:headEnd type="none" w="med" len="med"/>
-                      <a:tailEnd type="none" w="med" len="med"/>
-                    </a:lnR>
-                    <a:lnT w="9525" cap="flat" cmpd="sng" algn="ctr">
-                      <a:solidFill>
-                        <a:srgbClr val="DCE7EA"/>
-                      </a:solidFill>
-                      <a:prstDash val="solid"/>
-                      <a:round/>
-                      <a:headEnd type="none" w="med" len="med"/>
-                      <a:tailEnd type="none" w="med" len="med"/>
-                    </a:lnT>
-                    <a:lnB w="9525" cap="flat" cmpd="sng" algn="ctr">
-                      <a:solidFill>
-                        <a:srgbClr val="DCE7EA"/>
-                      </a:solidFill>
-                      <a:prstDash val="solid"/>
-                      <a:round/>
-                      <a:headEnd type="none" w="med" len="med"/>
-                      <a:tailEnd type="none" w="med" len="med"/>
-                    </a:lnB>
-                    <a:solidFill>
-                      <a:srgbClr val="F2FAFB"/>
-                    </a:solidFill>
-                  </a:tcPr>
-                </a:tc>
-                <a:tc vMerge="1">
-                  <a:txBody>
-                    <a:bodyPr/>
-                    <a:lstStyle/>
-                    <a:p>
-                      <a:pPr indent="0" marL="0">
-                        <a:buNone/>
-                      </a:pPr>
-                      <a:endParaRPr lang="en-US" sz="1200" dirty="0">
-                        <a:latin typeface="Noto Sans" charset="0"/>
-                        <a:ea typeface="Noto Sans" charset="0"/>
-                        <a:cs typeface="Noto Sans" charset="0"/>
-                      </a:endParaRPr>
-                    </a:p>
-                  </a:txBody>
-                  <a:tcPr marL="101600" marR="101600" marT="63500" marB="63500" anchor="t">
-                    <a:lnL w="9525" cap="flat" cmpd="sng" algn="ctr">
-                      <a:solidFill>
-                        <a:srgbClr val="DCE7EA"/>
-                      </a:solidFill>
-                      <a:prstDash val="solid"/>
-                      <a:round/>
-                      <a:headEnd type="none" w="med" len="med"/>
-                      <a:tailEnd type="none" w="med" len="med"/>
-                    </a:lnL>
-                    <a:lnR w="9525" cap="flat" cmpd="sng" algn="ctr">
-                      <a:solidFill>
-                        <a:srgbClr val="DCE7EA"/>
-                      </a:solidFill>
-                      <a:prstDash val="solid"/>
-                      <a:round/>
-                      <a:headEnd type="none" w="med" len="med"/>
-                      <a:tailEnd type="none" w="med" len="med"/>
-                    </a:lnR>
-                    <a:lnT w="9525" cap="flat" cmpd="sng" algn="ctr">
-                      <a:solidFill>
-                        <a:srgbClr val="DCE7EA"/>
-                      </a:solidFill>
-                      <a:prstDash val="solid"/>
-                      <a:round/>
-                      <a:headEnd type="none" w="med" len="med"/>
-                      <a:tailEnd type="none" w="med" len="med"/>
-                    </a:lnT>
-                    <a:lnB w="9525" cap="flat" cmpd="sng" algn="ctr">
-                      <a:solidFill>
-                        <a:srgbClr val="DCE7EA"/>
-                      </a:solidFill>
-                      <a:prstDash val="solid"/>
-                      <a:round/>
-                      <a:headEnd type="none" w="med" len="med"/>
-                      <a:tailEnd type="none" w="med" len="med"/>
-                    </a:lnB>
-                    <a:solidFill>
-                      <a:srgbClr val="FFFFFF"/>
-                    </a:solidFill>
-                  </a:tcPr>
-                </a:tc>
-              </a:tr>
-              <a:tr h="584650">
-                <a:tc>
-                  <a:txBody>
-                    <a:bodyPr/>
-                    <a:lstStyle/>
-                    <a:p>
-                      <a:pPr indent="0" marL="0">
-                        <a:buNone/>
-                      </a:pPr>
-                      <a:r>
-                        <a:rPr lang="en-US" sz="1200" b="1" dirty="0">
-                          <a:solidFill>
-                            <a:srgbClr val="3B81B1"/>
-                          </a:solidFill>
-                          <a:latin typeface="Noto Sans" pitchFamily="34" charset="0"/>
-                          <a:ea typeface="Noto Sans" pitchFamily="34" charset="-122"/>
-                          <a:cs typeface="Noto Sans" pitchFamily="34" charset="-120"/>
-                        </a:rPr>
-                        <a:t>[Functional] </a:t>
-                      </a:r>
-                      <a:r>
-                        <a:rPr lang="en-US" sz="1200" dirty="0">
-                          <a:solidFill>
-                            <a:srgbClr val="22333F"/>
-                          </a:solidFill>
-                          <a:latin typeface="Noto Sans" pitchFamily="34" charset="0"/>
-                          <a:ea typeface="Noto Sans" pitchFamily="34" charset="-122"/>
-                          <a:cs typeface="Noto Sans" pitchFamily="34" charset="-120"/>
-                        </a:rPr>
-                        <a:t>Muốn con phát triển toàn diện, không học lệch</a:t>
-                      </a:r>
-                      <a:endParaRPr lang="en-US" sz="1200" dirty="0">
+                      <a:endParaRPr lang="en-US" sz="1100" dirty="0">
                         <a:latin typeface="Noto Sans" charset="0"/>
                         <a:ea typeface="Noto Sans" charset="0"/>
                         <a:cs typeface="Noto Sans" charset="0"/>
@@ -8803,17 +10157,17 @@
                         <a:buNone/>
                       </a:pPr>
                       <a:r>
-                        <a:rPr lang="en-US" sz="1200" dirty="0">
+                        <a:rPr lang="en-US" sz="1100" b="1" dirty="0">
                           <a:solidFill>
-                            <a:srgbClr val="5B6472"/>
+                            <a:srgbClr val="518E0D"/>
                           </a:solidFill>
                           <a:latin typeface="Noto Sans" pitchFamily="34" charset="0"/>
                           <a:ea typeface="Noto Sans" pitchFamily="34" charset="-122"/>
                           <a:cs typeface="Noto Sans" pitchFamily="34" charset="-120"/>
                         </a:rPr>
-                        <a:t>◆ Con học lệch, thiếu cân bằng giữa các môn (giả định đa môn, chưa xác nhận)</a:t>
+                        <a:t>Đã giải quyết</a:t>
                       </a:r>
-                      <a:endParaRPr lang="en-US" sz="1200" dirty="0">
+                      <a:endParaRPr lang="en-US" sz="1100" dirty="0">
                         <a:latin typeface="Noto Sans" charset="0"/>
                         <a:ea typeface="Noto Sans" charset="0"/>
                         <a:cs typeface="Noto Sans" charset="0"/>
@@ -8862,76 +10216,8 @@
                     </a:solidFill>
                   </a:tcPr>
                 </a:tc>
-                <a:tc rowSpan="3">
-                  <a:txBody>
-                    <a:bodyPr/>
-                    <a:lstStyle/>
-                    <a:p>
-                      <a:pPr indent="0" marL="0">
-                        <a:buNone/>
-                      </a:pPr>
-                      <a:r>
-                        <a:rPr lang="en-US" sz="1200" b="1" dirty="0">
-                          <a:solidFill>
-                            <a:srgbClr val="004671"/>
-                          </a:solidFill>
-                          <a:latin typeface="Noto Sans" pitchFamily="34" charset="0"/>
-                          <a:ea typeface="Noto Sans" pitchFamily="34" charset="-122"/>
-                          <a:cs typeface="Noto Sans" pitchFamily="34" charset="-120"/>
-                        </a:rPr>
-                        <a:t>Muốn con học giỏi toàn diện</a:t>
-                      </a:r>
-                      <a:endParaRPr lang="en-US" sz="1200" dirty="0">
-                        <a:latin typeface="Noto Sans" charset="0"/>
-                        <a:ea typeface="Noto Sans" charset="0"/>
-                        <a:cs typeface="Noto Sans" charset="0"/>
-                      </a:endParaRPr>
-                    </a:p>
-                  </a:txBody>
-                  <a:tcPr marL="101600" marR="101600" marT="63500" marB="63500" anchor="t">
-                    <a:lnL w="9525" cap="flat" cmpd="sng" algn="ctr">
-                      <a:solidFill>
-                        <a:srgbClr val="DCE7EA"/>
-                      </a:solidFill>
-                      <a:prstDash val="solid"/>
-                      <a:round/>
-                      <a:headEnd type="none" w="med" len="med"/>
-                      <a:tailEnd type="none" w="med" len="med"/>
-                    </a:lnL>
-                    <a:lnR w="9525" cap="flat" cmpd="sng" algn="ctr">
-                      <a:solidFill>
-                        <a:srgbClr val="DCE7EA"/>
-                      </a:solidFill>
-                      <a:prstDash val="solid"/>
-                      <a:round/>
-                      <a:headEnd type="none" w="med" len="med"/>
-                      <a:tailEnd type="none" w="med" len="med"/>
-                    </a:lnR>
-                    <a:lnT w="9525" cap="flat" cmpd="sng" algn="ctr">
-                      <a:solidFill>
-                        <a:srgbClr val="DCE7EA"/>
-                      </a:solidFill>
-                      <a:prstDash val="solid"/>
-                      <a:round/>
-                      <a:headEnd type="none" w="med" len="med"/>
-                      <a:tailEnd type="none" w="med" len="med"/>
-                    </a:lnT>
-                    <a:lnB w="9525" cap="flat" cmpd="sng" algn="ctr">
-                      <a:solidFill>
-                        <a:srgbClr val="DCE7EA"/>
-                      </a:solidFill>
-                      <a:prstDash val="solid"/>
-                      <a:round/>
-                      <a:headEnd type="none" w="med" len="med"/>
-                      <a:tailEnd type="none" w="med" len="med"/>
-                    </a:lnB>
-                    <a:solidFill>
-                      <a:srgbClr val="F2FAFB"/>
-                    </a:solidFill>
-                  </a:tcPr>
-                </a:tc>
               </a:tr>
-              <a:tr h="584650">
+              <a:tr h="628650">
                 <a:tc>
                   <a:txBody>
                     <a:bodyPr/>
@@ -8941,234 +10227,17 @@
                         <a:buNone/>
                       </a:pPr>
                       <a:r>
-                        <a:rPr lang="en-US" sz="1200" b="1" dirty="0">
+                        <a:rPr lang="en-US" sz="1100" b="1" dirty="0">
                           <a:solidFill>
-                            <a:srgbClr val="3B81B1"/>
+                            <a:srgbClr val="004671"/>
                           </a:solidFill>
                           <a:latin typeface="Noto Sans" pitchFamily="34" charset="0"/>
                           <a:ea typeface="Noto Sans" pitchFamily="34" charset="-122"/>
                           <a:cs typeface="Noto Sans" pitchFamily="34" charset="-120"/>
                         </a:rPr>
-                        <a:t>[Functional] </a:t>
+                        <a:t>AI Speak — 1h luyện nói</a:t>
                       </a:r>
-                      <a:r>
-                        <a:rPr lang="en-US" sz="1200" dirty="0">
-                          <a:solidFill>
-                            <a:srgbClr val="22333F"/>
-                          </a:solidFill>
-                          <a:latin typeface="Noto Sans" pitchFamily="34" charset="0"/>
-                          <a:ea typeface="Noto Sans" pitchFamily="34" charset="-122"/>
-                          <a:cs typeface="Noto Sans" pitchFamily="34" charset="-120"/>
-                        </a:rPr>
-                        <a:t>Quản lý toàn bộ việc học của con ở một nơi, không phải tự tổng hợp</a:t>
-                      </a:r>
-                      <a:endParaRPr lang="en-US" sz="1200" dirty="0">
-                        <a:latin typeface="Noto Sans" charset="0"/>
-                        <a:ea typeface="Noto Sans" charset="0"/>
-                        <a:cs typeface="Noto Sans" charset="0"/>
-                      </a:endParaRPr>
-                    </a:p>
-                  </a:txBody>
-                  <a:tcPr marL="101600" marR="101600" marT="63500" marB="63500" anchor="t">
-                    <a:lnL w="9525" cap="flat" cmpd="sng" algn="ctr">
-                      <a:solidFill>
-                        <a:srgbClr val="DCE7EA"/>
-                      </a:solidFill>
-                      <a:prstDash val="solid"/>
-                      <a:round/>
-                      <a:headEnd type="none" w="med" len="med"/>
-                      <a:tailEnd type="none" w="med" len="med"/>
-                    </a:lnL>
-                    <a:lnR w="9525" cap="flat" cmpd="sng" algn="ctr">
-                      <a:solidFill>
-                        <a:srgbClr val="DCE7EA"/>
-                      </a:solidFill>
-                      <a:prstDash val="solid"/>
-                      <a:round/>
-                      <a:headEnd type="none" w="med" len="med"/>
-                      <a:tailEnd type="none" w="med" len="med"/>
-                    </a:lnR>
-                    <a:lnT w="9525" cap="flat" cmpd="sng" algn="ctr">
-                      <a:solidFill>
-                        <a:srgbClr val="DCE7EA"/>
-                      </a:solidFill>
-                      <a:prstDash val="solid"/>
-                      <a:round/>
-                      <a:headEnd type="none" w="med" len="med"/>
-                      <a:tailEnd type="none" w="med" len="med"/>
-                    </a:lnT>
-                    <a:lnB w="9525" cap="flat" cmpd="sng" algn="ctr">
-                      <a:solidFill>
-                        <a:srgbClr val="DCE7EA"/>
-                      </a:solidFill>
-                      <a:prstDash val="solid"/>
-                      <a:round/>
-                      <a:headEnd type="none" w="med" len="med"/>
-                      <a:tailEnd type="none" w="med" len="med"/>
-                    </a:lnB>
-                    <a:solidFill>
-                      <a:srgbClr val="F2FAFB"/>
-                    </a:solidFill>
-                  </a:tcPr>
-                </a:tc>
-                <a:tc>
-                  <a:txBody>
-                    <a:bodyPr/>
-                    <a:lstStyle/>
-                    <a:p>
-                      <a:pPr indent="0" marL="0">
-                        <a:buNone/>
-                      </a:pPr>
-                      <a:r>
-                        <a:rPr lang="en-US" sz="1200" dirty="0">
-                          <a:solidFill>
-                            <a:srgbClr val="5B6472"/>
-                          </a:solidFill>
-                          <a:latin typeface="Noto Sans" pitchFamily="34" charset="0"/>
-                          <a:ea typeface="Noto Sans" pitchFamily="34" charset="-122"/>
-                          <a:cs typeface="Noto Sans" pitchFamily="34" charset="-120"/>
-                        </a:rPr>
-                        <a:t>Khó quản lý khi con học nhiều môn/nhiều trung tâm</a:t>
-                      </a:r>
-                      <a:endParaRPr lang="en-US" sz="1200" dirty="0">
-                        <a:latin typeface="Noto Sans" charset="0"/>
-                        <a:ea typeface="Noto Sans" charset="0"/>
-                        <a:cs typeface="Noto Sans" charset="0"/>
-                      </a:endParaRPr>
-                    </a:p>
-                  </a:txBody>
-                  <a:tcPr marL="101600" marR="101600" marT="63500" marB="63500" anchor="t">
-                    <a:lnL w="9525" cap="flat" cmpd="sng" algn="ctr">
-                      <a:solidFill>
-                        <a:srgbClr val="DCE7EA"/>
-                      </a:solidFill>
-                      <a:prstDash val="solid"/>
-                      <a:round/>
-                      <a:headEnd type="none" w="med" len="med"/>
-                      <a:tailEnd type="none" w="med" len="med"/>
-                    </a:lnL>
-                    <a:lnR w="9525" cap="flat" cmpd="sng" algn="ctr">
-                      <a:solidFill>
-                        <a:srgbClr val="DCE7EA"/>
-                      </a:solidFill>
-                      <a:prstDash val="solid"/>
-                      <a:round/>
-                      <a:headEnd type="none" w="med" len="med"/>
-                      <a:tailEnd type="none" w="med" len="med"/>
-                    </a:lnR>
-                    <a:lnT w="9525" cap="flat" cmpd="sng" algn="ctr">
-                      <a:solidFill>
-                        <a:srgbClr val="DCE7EA"/>
-                      </a:solidFill>
-                      <a:prstDash val="solid"/>
-                      <a:round/>
-                      <a:headEnd type="none" w="med" len="med"/>
-                      <a:tailEnd type="none" w="med" len="med"/>
-                    </a:lnT>
-                    <a:lnB w="9525" cap="flat" cmpd="sng" algn="ctr">
-                      <a:solidFill>
-                        <a:srgbClr val="DCE7EA"/>
-                      </a:solidFill>
-                      <a:prstDash val="solid"/>
-                      <a:round/>
-                      <a:headEnd type="none" w="med" len="med"/>
-                      <a:tailEnd type="none" w="med" len="med"/>
-                    </a:lnB>
-                    <a:solidFill>
-                      <a:srgbClr val="F2FAFB"/>
-                    </a:solidFill>
-                  </a:tcPr>
-                </a:tc>
-                <a:tc vMerge="1">
-                  <a:txBody>
-                    <a:bodyPr/>
-                    <a:lstStyle/>
-                    <a:p>
-                      <a:pPr indent="0" marL="0">
-                        <a:buNone/>
-                      </a:pPr>
-                      <a:endParaRPr lang="en-US" sz="1200" dirty="0">
-                        <a:latin typeface="Noto Sans" charset="0"/>
-                        <a:ea typeface="Noto Sans" charset="0"/>
-                        <a:cs typeface="Noto Sans" charset="0"/>
-                      </a:endParaRPr>
-                    </a:p>
-                  </a:txBody>
-                  <a:tcPr marL="101600" marR="101600" marT="63500" marB="63500" anchor="t">
-                    <a:lnL w="9525" cap="flat" cmpd="sng" algn="ctr">
-                      <a:solidFill>
-                        <a:srgbClr val="DCE7EA"/>
-                      </a:solidFill>
-                      <a:prstDash val="solid"/>
-                      <a:round/>
-                      <a:headEnd type="none" w="med" len="med"/>
-                      <a:tailEnd type="none" w="med" len="med"/>
-                    </a:lnL>
-                    <a:lnR w="9525" cap="flat" cmpd="sng" algn="ctr">
-                      <a:solidFill>
-                        <a:srgbClr val="DCE7EA"/>
-                      </a:solidFill>
-                      <a:prstDash val="solid"/>
-                      <a:round/>
-                      <a:headEnd type="none" w="med" len="med"/>
-                      <a:tailEnd type="none" w="med" len="med"/>
-                    </a:lnR>
-                    <a:lnT w="9525" cap="flat" cmpd="sng" algn="ctr">
-                      <a:solidFill>
-                        <a:srgbClr val="DCE7EA"/>
-                      </a:solidFill>
-                      <a:prstDash val="solid"/>
-                      <a:round/>
-                      <a:headEnd type="none" w="med" len="med"/>
-                      <a:tailEnd type="none" w="med" len="med"/>
-                    </a:lnT>
-                    <a:lnB w="9525" cap="flat" cmpd="sng" algn="ctr">
-                      <a:solidFill>
-                        <a:srgbClr val="DCE7EA"/>
-                      </a:solidFill>
-                      <a:prstDash val="solid"/>
-                      <a:round/>
-                      <a:headEnd type="none" w="med" len="med"/>
-                      <a:tailEnd type="none" w="med" len="med"/>
-                    </a:lnB>
-                    <a:solidFill>
-                      <a:srgbClr val="F2FAFB"/>
-                    </a:solidFill>
-                  </a:tcPr>
-                </a:tc>
-              </a:tr>
-              <a:tr h="584650">
-                <a:tc>
-                  <a:txBody>
-                    <a:bodyPr/>
-                    <a:lstStyle/>
-                    <a:p>
-                      <a:pPr indent="0" marL="0">
-                        <a:buNone/>
-                      </a:pPr>
-                      <a:r>
-                        <a:rPr lang="en-US" sz="1200" b="1" dirty="0">
-                          <a:solidFill>
-                            <a:srgbClr val="3B81B1"/>
-                          </a:solidFill>
-                          <a:latin typeface="Noto Sans" pitchFamily="34" charset="0"/>
-                          <a:ea typeface="Noto Sans" pitchFamily="34" charset="-122"/>
-                          <a:cs typeface="Noto Sans" pitchFamily="34" charset="-120"/>
-                        </a:rPr>
-                        <a:t>[Functional] </a:t>
-                      </a:r>
-                      <a:r>
-                        <a:rPr lang="en-US" sz="1200" dirty="0">
-                          <a:solidFill>
-                            <a:srgbClr val="22333F"/>
-                          </a:solidFill>
-                          <a:latin typeface="Noto Sans" pitchFamily="34" charset="0"/>
-                          <a:ea typeface="Noto Sans" pitchFamily="34" charset="-122"/>
-                          <a:cs typeface="Noto Sans" pitchFamily="34" charset="-120"/>
-                        </a:rPr>
-                        <a:t>Duy trì việc học hiệu quả trong khả năng chi trả lâu dài</a:t>
-                      </a:r>
-                      <a:endParaRPr lang="en-US" sz="1200" dirty="0">
+                      <a:endParaRPr lang="en-US" sz="1100" dirty="0">
                         <a:latin typeface="Noto Sans" charset="0"/>
                         <a:ea typeface="Noto Sans" charset="0"/>
                         <a:cs typeface="Noto Sans" charset="0"/>
@@ -9226,145 +10295,7 @@
                         <a:buNone/>
                       </a:pPr>
                       <a:r>
-                        <a:rPr lang="en-US" sz="1200" dirty="0">
-                          <a:solidFill>
-                            <a:srgbClr val="5B6472"/>
-                          </a:solidFill>
-                          <a:latin typeface="Noto Sans" pitchFamily="34" charset="0"/>
-                          <a:ea typeface="Noto Sans" pitchFamily="34" charset="-122"/>
-                          <a:cs typeface="Noto Sans" pitchFamily="34" charset="-120"/>
-                        </a:rPr>
-                        <a:t>Chi phí cộng dồn nhiều lớp/trung tâm; tốn thời gian đưa đón</a:t>
-                      </a:r>
-                      <a:endParaRPr lang="en-US" sz="1200" dirty="0">
-                        <a:latin typeface="Noto Sans" charset="0"/>
-                        <a:ea typeface="Noto Sans" charset="0"/>
-                        <a:cs typeface="Noto Sans" charset="0"/>
-                      </a:endParaRPr>
-                    </a:p>
-                  </a:txBody>
-                  <a:tcPr marL="101600" marR="101600" marT="63500" marB="63500" anchor="t">
-                    <a:lnL w="9525" cap="flat" cmpd="sng" algn="ctr">
-                      <a:solidFill>
-                        <a:srgbClr val="DCE7EA"/>
-                      </a:solidFill>
-                      <a:prstDash val="solid"/>
-                      <a:round/>
-                      <a:headEnd type="none" w="med" len="med"/>
-                      <a:tailEnd type="none" w="med" len="med"/>
-                    </a:lnL>
-                    <a:lnR w="9525" cap="flat" cmpd="sng" algn="ctr">
-                      <a:solidFill>
-                        <a:srgbClr val="DCE7EA"/>
-                      </a:solidFill>
-                      <a:prstDash val="solid"/>
-                      <a:round/>
-                      <a:headEnd type="none" w="med" len="med"/>
-                      <a:tailEnd type="none" w="med" len="med"/>
-                    </a:lnR>
-                    <a:lnT w="9525" cap="flat" cmpd="sng" algn="ctr">
-                      <a:solidFill>
-                        <a:srgbClr val="DCE7EA"/>
-                      </a:solidFill>
-                      <a:prstDash val="solid"/>
-                      <a:round/>
-                      <a:headEnd type="none" w="med" len="med"/>
-                      <a:tailEnd type="none" w="med" len="med"/>
-                    </a:lnT>
-                    <a:lnB w="9525" cap="flat" cmpd="sng" algn="ctr">
-                      <a:solidFill>
-                        <a:srgbClr val="DCE7EA"/>
-                      </a:solidFill>
-                      <a:prstDash val="solid"/>
-                      <a:round/>
-                      <a:headEnd type="none" w="med" len="med"/>
-                      <a:tailEnd type="none" w="med" len="med"/>
-                    </a:lnB>
-                    <a:solidFill>
-                      <a:srgbClr val="FFFFFF"/>
-                    </a:solidFill>
-                  </a:tcPr>
-                </a:tc>
-                <a:tc vMerge="1">
-                  <a:txBody>
-                    <a:bodyPr/>
-                    <a:lstStyle/>
-                    <a:p>
-                      <a:pPr indent="0" marL="0">
-                        <a:buNone/>
-                      </a:pPr>
-                      <a:endParaRPr lang="en-US" sz="1200" dirty="0">
-                        <a:latin typeface="Noto Sans" charset="0"/>
-                        <a:ea typeface="Noto Sans" charset="0"/>
-                        <a:cs typeface="Noto Sans" charset="0"/>
-                      </a:endParaRPr>
-                    </a:p>
-                  </a:txBody>
-                  <a:tcPr marL="101600" marR="101600" marT="63500" marB="63500" anchor="t">
-                    <a:lnL w="9525" cap="flat" cmpd="sng" algn="ctr">
-                      <a:solidFill>
-                        <a:srgbClr val="DCE7EA"/>
-                      </a:solidFill>
-                      <a:prstDash val="solid"/>
-                      <a:round/>
-                      <a:headEnd type="none" w="med" len="med"/>
-                      <a:tailEnd type="none" w="med" len="med"/>
-                    </a:lnL>
-                    <a:lnR w="9525" cap="flat" cmpd="sng" algn="ctr">
-                      <a:solidFill>
-                        <a:srgbClr val="DCE7EA"/>
-                      </a:solidFill>
-                      <a:prstDash val="solid"/>
-                      <a:round/>
-                      <a:headEnd type="none" w="med" len="med"/>
-                      <a:tailEnd type="none" w="med" len="med"/>
-                    </a:lnR>
-                    <a:lnT w="9525" cap="flat" cmpd="sng" algn="ctr">
-                      <a:solidFill>
-                        <a:srgbClr val="DCE7EA"/>
-                      </a:solidFill>
-                      <a:prstDash val="solid"/>
-                      <a:round/>
-                      <a:headEnd type="none" w="med" len="med"/>
-                      <a:tailEnd type="none" w="med" len="med"/>
-                    </a:lnT>
-                    <a:lnB w="9525" cap="flat" cmpd="sng" algn="ctr">
-                      <a:solidFill>
-                        <a:srgbClr val="DCE7EA"/>
-                      </a:solidFill>
-                      <a:prstDash val="solid"/>
-                      <a:round/>
-                      <a:headEnd type="none" w="med" len="med"/>
-                      <a:tailEnd type="none" w="med" len="med"/>
-                    </a:lnB>
-                    <a:solidFill>
-                      <a:srgbClr val="F2FAFB"/>
-                    </a:solidFill>
-                  </a:tcPr>
-                </a:tc>
-              </a:tr>
-              <a:tr h="584650">
-                <a:tc>
-                  <a:txBody>
-                    <a:bodyPr/>
-                    <a:lstStyle/>
-                    <a:p>
-                      <a:pPr indent="0" marL="0">
-                        <a:buNone/>
-                      </a:pPr>
-                      <a:r>
-                        <a:rPr lang="en-US" sz="1200" b="1" dirty="0">
-                          <a:solidFill>
-                            <a:srgbClr val="3B81B1"/>
-                          </a:solidFill>
-                          <a:latin typeface="Noto Sans" pitchFamily="34" charset="0"/>
-                          <a:ea typeface="Noto Sans" pitchFamily="34" charset="-122"/>
-                          <a:cs typeface="Noto Sans" pitchFamily="34" charset="-120"/>
-                        </a:rPr>
-                        <a:t>[Functional] </a:t>
-                      </a:r>
-                      <a:r>
-                        <a:rPr lang="en-US" sz="1200" dirty="0">
+                        <a:rPr lang="en-US" sz="1100" dirty="0">
                           <a:solidFill>
                             <a:srgbClr val="22333F"/>
                           </a:solidFill>
@@ -9372,226 +10303,9 @@
                           <a:ea typeface="Noto Sans" pitchFamily="34" charset="-122"/>
                           <a:cs typeface="Noto Sans" pitchFamily="34" charset="-120"/>
                         </a:rPr>
-                        <a:t>Có người giám sát, đốc thúc con học thay bố mẹ, con được học cá nhân hóa</a:t>
+                        <a:t>JTBD 2: Tự tin giao tiếp bằng tiếng Anh trong thực tế</a:t>
                       </a:r>
-                      <a:endParaRPr lang="en-US" sz="1200" dirty="0">
-                        <a:latin typeface="Noto Sans" charset="0"/>
-                        <a:ea typeface="Noto Sans" charset="0"/>
-                        <a:cs typeface="Noto Sans" charset="0"/>
-                      </a:endParaRPr>
-                    </a:p>
-                  </a:txBody>
-                  <a:tcPr marL="101600" marR="101600" marT="63500" marB="63500" anchor="t">
-                    <a:lnL w="9525" cap="flat" cmpd="sng" algn="ctr">
-                      <a:solidFill>
-                        <a:srgbClr val="DCE7EA"/>
-                      </a:solidFill>
-                      <a:prstDash val="solid"/>
-                      <a:round/>
-                      <a:headEnd type="none" w="med" len="med"/>
-                      <a:tailEnd type="none" w="med" len="med"/>
-                    </a:lnL>
-                    <a:lnR w="9525" cap="flat" cmpd="sng" algn="ctr">
-                      <a:solidFill>
-                        <a:srgbClr val="DCE7EA"/>
-                      </a:solidFill>
-                      <a:prstDash val="solid"/>
-                      <a:round/>
-                      <a:headEnd type="none" w="med" len="med"/>
-                      <a:tailEnd type="none" w="med" len="med"/>
-                    </a:lnR>
-                    <a:lnT w="9525" cap="flat" cmpd="sng" algn="ctr">
-                      <a:solidFill>
-                        <a:srgbClr val="DCE7EA"/>
-                      </a:solidFill>
-                      <a:prstDash val="solid"/>
-                      <a:round/>
-                      <a:headEnd type="none" w="med" len="med"/>
-                      <a:tailEnd type="none" w="med" len="med"/>
-                    </a:lnT>
-                    <a:lnB w="9525" cap="flat" cmpd="sng" algn="ctr">
-                      <a:solidFill>
-                        <a:srgbClr val="DCE7EA"/>
-                      </a:solidFill>
-                      <a:prstDash val="solid"/>
-                      <a:round/>
-                      <a:headEnd type="none" w="med" len="med"/>
-                      <a:tailEnd type="none" w="med" len="med"/>
-                    </a:lnB>
-                    <a:solidFill>
-                      <a:srgbClr val="F2FAFB"/>
-                    </a:solidFill>
-                  </a:tcPr>
-                </a:tc>
-                <a:tc>
-                  <a:txBody>
-                    <a:bodyPr/>
-                    <a:lstStyle/>
-                    <a:p>
-                      <a:pPr indent="0" marL="0">
-                        <a:buNone/>
-                      </a:pPr>
-                      <a:r>
-                        <a:rPr lang="en-US" sz="1200" dirty="0">
-                          <a:solidFill>
-                            <a:srgbClr val="5B6472"/>
-                          </a:solidFill>
-                          <a:latin typeface="Noto Sans" pitchFamily="34" charset="0"/>
-                          <a:ea typeface="Noto Sans" pitchFamily="34" charset="-122"/>
-                          <a:cs typeface="Noto Sans" pitchFamily="34" charset="-120"/>
-                        </a:rPr>
-                        <a:t>Phụ huynh phải liên tục nhắc nhở, đốc thúc vì con chưa tự giác</a:t>
-                      </a:r>
-                      <a:endParaRPr lang="en-US" sz="1200" dirty="0">
-                        <a:latin typeface="Noto Sans" charset="0"/>
-                        <a:ea typeface="Noto Sans" charset="0"/>
-                        <a:cs typeface="Noto Sans" charset="0"/>
-                      </a:endParaRPr>
-                    </a:p>
-                  </a:txBody>
-                  <a:tcPr marL="101600" marR="101600" marT="63500" marB="63500" anchor="t">
-                    <a:lnL w="9525" cap="flat" cmpd="sng" algn="ctr">
-                      <a:solidFill>
-                        <a:srgbClr val="DCE7EA"/>
-                      </a:solidFill>
-                      <a:prstDash val="solid"/>
-                      <a:round/>
-                      <a:headEnd type="none" w="med" len="med"/>
-                      <a:tailEnd type="none" w="med" len="med"/>
-                    </a:lnL>
-                    <a:lnR w="9525" cap="flat" cmpd="sng" algn="ctr">
-                      <a:solidFill>
-                        <a:srgbClr val="DCE7EA"/>
-                      </a:solidFill>
-                      <a:prstDash val="solid"/>
-                      <a:round/>
-                      <a:headEnd type="none" w="med" len="med"/>
-                      <a:tailEnd type="none" w="med" len="med"/>
-                    </a:lnR>
-                    <a:lnT w="9525" cap="flat" cmpd="sng" algn="ctr">
-                      <a:solidFill>
-                        <a:srgbClr val="DCE7EA"/>
-                      </a:solidFill>
-                      <a:prstDash val="solid"/>
-                      <a:round/>
-                      <a:headEnd type="none" w="med" len="med"/>
-                      <a:tailEnd type="none" w="med" len="med"/>
-                    </a:lnT>
-                    <a:lnB w="9525" cap="flat" cmpd="sng" algn="ctr">
-                      <a:solidFill>
-                        <a:srgbClr val="DCE7EA"/>
-                      </a:solidFill>
-                      <a:prstDash val="solid"/>
-                      <a:round/>
-                      <a:headEnd type="none" w="med" len="med"/>
-                      <a:tailEnd type="none" w="med" len="med"/>
-                    </a:lnB>
-                    <a:solidFill>
-                      <a:srgbClr val="F2FAFB"/>
-                    </a:solidFill>
-                  </a:tcPr>
-                </a:tc>
-                <a:tc rowSpan="3">
-                  <a:txBody>
-                    <a:bodyPr/>
-                    <a:lstStyle/>
-                    <a:p>
-                      <a:pPr indent="0" marL="0">
-                        <a:buNone/>
-                      </a:pPr>
-                      <a:r>
-                        <a:rPr lang="en-US" sz="1200" b="1" dirty="0">
-                          <a:solidFill>
-                            <a:srgbClr val="004671"/>
-                          </a:solidFill>
-                          <a:latin typeface="Noto Sans" pitchFamily="34" charset="0"/>
-                          <a:ea typeface="Noto Sans" pitchFamily="34" charset="-122"/>
-                          <a:cs typeface="Noto Sans" pitchFamily="34" charset="-120"/>
-                        </a:rPr>
-                        <a:t>Muốn con được đồng hành, đốc thúc học tập</a:t>
-                      </a:r>
-                      <a:endParaRPr lang="en-US" sz="1200" dirty="0">
-                        <a:latin typeface="Noto Sans" charset="0"/>
-                        <a:ea typeface="Noto Sans" charset="0"/>
-                        <a:cs typeface="Noto Sans" charset="0"/>
-                      </a:endParaRPr>
-                    </a:p>
-                  </a:txBody>
-                  <a:tcPr marL="101600" marR="101600" marT="63500" marB="63500" anchor="t">
-                    <a:lnL w="9525" cap="flat" cmpd="sng" algn="ctr">
-                      <a:solidFill>
-                        <a:srgbClr val="DCE7EA"/>
-                      </a:solidFill>
-                      <a:prstDash val="solid"/>
-                      <a:round/>
-                      <a:headEnd type="none" w="med" len="med"/>
-                      <a:tailEnd type="none" w="med" len="med"/>
-                    </a:lnL>
-                    <a:lnR w="9525" cap="flat" cmpd="sng" algn="ctr">
-                      <a:solidFill>
-                        <a:srgbClr val="DCE7EA"/>
-                      </a:solidFill>
-                      <a:prstDash val="solid"/>
-                      <a:round/>
-                      <a:headEnd type="none" w="med" len="med"/>
-                      <a:tailEnd type="none" w="med" len="med"/>
-                    </a:lnR>
-                    <a:lnT w="9525" cap="flat" cmpd="sng" algn="ctr">
-                      <a:solidFill>
-                        <a:srgbClr val="DCE7EA"/>
-                      </a:solidFill>
-                      <a:prstDash val="solid"/>
-                      <a:round/>
-                      <a:headEnd type="none" w="med" len="med"/>
-                      <a:tailEnd type="none" w="med" len="med"/>
-                    </a:lnT>
-                    <a:lnB w="9525" cap="flat" cmpd="sng" algn="ctr">
-                      <a:solidFill>
-                        <a:srgbClr val="DCE7EA"/>
-                      </a:solidFill>
-                      <a:prstDash val="solid"/>
-                      <a:round/>
-                      <a:headEnd type="none" w="med" len="med"/>
-                      <a:tailEnd type="none" w="med" len="med"/>
-                    </a:lnB>
-                    <a:solidFill>
-                      <a:srgbClr val="FFFFFF"/>
-                    </a:solidFill>
-                  </a:tcPr>
-                </a:tc>
-              </a:tr>
-              <a:tr h="584650">
-                <a:tc>
-                  <a:txBody>
-                    <a:bodyPr/>
-                    <a:lstStyle/>
-                    <a:p>
-                      <a:pPr indent="0" marL="0">
-                        <a:buNone/>
-                      </a:pPr>
-                      <a:r>
-                        <a:rPr lang="en-US" sz="1200" b="1" dirty="0">
-                          <a:solidFill>
-                            <a:srgbClr val="A5BE00"/>
-                          </a:solidFill>
-                          <a:latin typeface="Noto Sans" pitchFamily="34" charset="0"/>
-                          <a:ea typeface="Noto Sans" pitchFamily="34" charset="-122"/>
-                          <a:cs typeface="Noto Sans" pitchFamily="34" charset="-120"/>
-                        </a:rPr>
-                        <a:t>[Emotional] </a:t>
-                      </a:r>
-                      <a:r>
-                        <a:rPr lang="en-US" sz="1200" dirty="0">
-                          <a:solidFill>
-                            <a:srgbClr val="22333F"/>
-                          </a:solidFill>
-                          <a:latin typeface="Noto Sans" pitchFamily="34" charset="0"/>
-                          <a:ea typeface="Noto Sans" pitchFamily="34" charset="-122"/>
-                          <a:cs typeface="Noto Sans" pitchFamily="34" charset="-120"/>
-                        </a:rPr>
-                        <a:t>Tin mình đã chọn đúng, đầu tư đủ, không thua kém gia đình khác</a:t>
-                      </a:r>
-                      <a:endParaRPr lang="en-US" sz="1200" dirty="0">
+                      <a:endParaRPr lang="en-US" sz="1100" dirty="0">
                         <a:latin typeface="Noto Sans" charset="0"/>
                         <a:ea typeface="Noto Sans" charset="0"/>
                         <a:cs typeface="Noto Sans" charset="0"/>
@@ -9649,17 +10363,17 @@
                         <a:buNone/>
                       </a:pPr>
                       <a:r>
-                        <a:rPr lang="en-US" sz="1200" dirty="0">
+                        <a:rPr lang="en-US" sz="1100" b="1" dirty="0">
                           <a:solidFill>
-                            <a:srgbClr val="5B6472"/>
+                            <a:srgbClr val="518E0D"/>
                           </a:solidFill>
                           <a:latin typeface="Noto Sans" pitchFamily="34" charset="0"/>
                           <a:ea typeface="Noto Sans" pitchFamily="34" charset="-122"/>
                           <a:cs typeface="Noto Sans" pitchFamily="34" charset="-120"/>
                         </a:rPr>
-                        <a:t>Học online "không ai quản" nên không yên tâm; sợ mất tiền mà không hiệu quả</a:t>
+                        <a:t>Đã giải quyết</a:t>
                       </a:r>
-                      <a:endParaRPr lang="en-US" sz="1200" dirty="0">
+                      <a:endParaRPr lang="en-US" sz="1100" dirty="0">
                         <a:latin typeface="Noto Sans" charset="0"/>
                         <a:ea typeface="Noto Sans" charset="0"/>
                         <a:cs typeface="Noto Sans" charset="0"/>
@@ -9708,65 +10422,8 @@
                     </a:solidFill>
                   </a:tcPr>
                 </a:tc>
-                <a:tc vMerge="1">
-                  <a:txBody>
-                    <a:bodyPr/>
-                    <a:lstStyle/>
-                    <a:p>
-                      <a:pPr indent="0" marL="0">
-                        <a:buNone/>
-                      </a:pPr>
-                      <a:endParaRPr lang="en-US" sz="1200" dirty="0">
-                        <a:latin typeface="Noto Sans" charset="0"/>
-                        <a:ea typeface="Noto Sans" charset="0"/>
-                        <a:cs typeface="Noto Sans" charset="0"/>
-                      </a:endParaRPr>
-                    </a:p>
-                  </a:txBody>
-                  <a:tcPr marL="101600" marR="101600" marT="63500" marB="63500" anchor="t">
-                    <a:lnL w="9525" cap="flat" cmpd="sng" algn="ctr">
-                      <a:solidFill>
-                        <a:srgbClr val="DCE7EA"/>
-                      </a:solidFill>
-                      <a:prstDash val="solid"/>
-                      <a:round/>
-                      <a:headEnd type="none" w="med" len="med"/>
-                      <a:tailEnd type="none" w="med" len="med"/>
-                    </a:lnL>
-                    <a:lnR w="9525" cap="flat" cmpd="sng" algn="ctr">
-                      <a:solidFill>
-                        <a:srgbClr val="DCE7EA"/>
-                      </a:solidFill>
-                      <a:prstDash val="solid"/>
-                      <a:round/>
-                      <a:headEnd type="none" w="med" len="med"/>
-                      <a:tailEnd type="none" w="med" len="med"/>
-                    </a:lnR>
-                    <a:lnT w="9525" cap="flat" cmpd="sng" algn="ctr">
-                      <a:solidFill>
-                        <a:srgbClr val="DCE7EA"/>
-                      </a:solidFill>
-                      <a:prstDash val="solid"/>
-                      <a:round/>
-                      <a:headEnd type="none" w="med" len="med"/>
-                      <a:tailEnd type="none" w="med" len="med"/>
-                    </a:lnT>
-                    <a:lnB w="9525" cap="flat" cmpd="sng" algn="ctr">
-                      <a:solidFill>
-                        <a:srgbClr val="DCE7EA"/>
-                      </a:solidFill>
-                      <a:prstDash val="solid"/>
-                      <a:round/>
-                      <a:headEnd type="none" w="med" len="med"/>
-                      <a:tailEnd type="none" w="med" len="med"/>
-                    </a:lnB>
-                    <a:solidFill>
-                      <a:srgbClr val="FFFFFF"/>
-                    </a:solidFill>
-                  </a:tcPr>
-                </a:tc>
               </a:tr>
-              <a:tr h="584650">
+              <a:tr h="628650">
                 <a:tc>
                   <a:txBody>
                     <a:bodyPr/>
@@ -9776,7 +10433,7 @@
                         <a:buNone/>
                       </a:pPr>
                       <a:r>
-                        <a:rPr lang="en-US" sz="1200" b="1" dirty="0">
+                        <a:rPr lang="en-US" sz="1100" b="1" dirty="0">
                           <a:solidFill>
                             <a:srgbClr val="004671"/>
                           </a:solidFill>
@@ -9784,20 +10441,9 @@
                           <a:ea typeface="Noto Sans" pitchFamily="34" charset="-122"/>
                           <a:cs typeface="Noto Sans" pitchFamily="34" charset="-120"/>
                         </a:rPr>
-                        <a:t>[Social] </a:t>
+                        <a:t>Edupia Club — Quốc tế</a:t>
                       </a:r>
-                      <a:r>
-                        <a:rPr lang="en-US" sz="1200" dirty="0">
-                          <a:solidFill>
-                            <a:srgbClr val="22333F"/>
-                          </a:solidFill>
-                          <a:latin typeface="Noto Sans" pitchFamily="34" charset="0"/>
-                          <a:ea typeface="Noto Sans" pitchFamily="34" charset="-122"/>
-                          <a:cs typeface="Noto Sans" pitchFamily="34" charset="-120"/>
-                        </a:rPr>
-                        <a:t>Hãnh diện, tự hào với người thân, bạn bè khi con đạt thành tích cao, muốn chia sẻ</a:t>
-                      </a:r>
-                      <a:endParaRPr lang="en-US" sz="1200" dirty="0">
+                      <a:endParaRPr lang="en-US" sz="1100" dirty="0">
                         <a:latin typeface="Noto Sans" charset="0"/>
                         <a:ea typeface="Noto Sans" charset="0"/>
                         <a:cs typeface="Noto Sans" charset="0"/>
@@ -9842,7 +10488,7 @@
                       <a:tailEnd type="none" w="med" len="med"/>
                     </a:lnB>
                     <a:solidFill>
-                      <a:srgbClr val="F2FAFB"/>
+                      <a:srgbClr val="FFFFFF"/>
                     </a:solidFill>
                   </a:tcPr>
                 </a:tc>
@@ -9855,17 +10501,17 @@
                         <a:buNone/>
                       </a:pPr>
                       <a:r>
-                        <a:rPr lang="en-US" sz="1200" dirty="0">
+                        <a:rPr lang="en-US" sz="1100" dirty="0">
                           <a:solidFill>
-                            <a:srgbClr val="5B6472"/>
+                            <a:srgbClr val="22333F"/>
                           </a:solidFill>
                           <a:latin typeface="Noto Sans" pitchFamily="34" charset="0"/>
                           <a:ea typeface="Noto Sans" pitchFamily="34" charset="-122"/>
                           <a:cs typeface="Noto Sans" pitchFamily="34" charset="-120"/>
                         </a:rPr>
-                        <a:t>Lo con thua thiệt, thua kém "con nhà người ta"</a:t>
+                        <a:t>JTBD 3: Nuôi dưỡng sự yêu thích và tự giác học</a:t>
                       </a:r>
-                      <a:endParaRPr lang="en-US" sz="1200" dirty="0">
+                      <a:endParaRPr lang="en-US" sz="1100" dirty="0">
                         <a:latin typeface="Noto Sans" charset="0"/>
                         <a:ea typeface="Noto Sans" charset="0"/>
                         <a:cs typeface="Noto Sans" charset="0"/>
@@ -9910,11 +10556,11 @@
                       <a:tailEnd type="none" w="med" len="med"/>
                     </a:lnB>
                     <a:solidFill>
-                      <a:srgbClr val="F2FAFB"/>
+                      <a:srgbClr val="FFFFFF"/>
                     </a:solidFill>
                   </a:tcPr>
                 </a:tc>
-                <a:tc vMerge="1">
+                <a:tc>
                   <a:txBody>
                     <a:bodyPr/>
                     <a:lstStyle/>
@@ -9922,7 +10568,224 @@
                       <a:pPr indent="0" marL="0">
                         <a:buNone/>
                       </a:pPr>
-                      <a:endParaRPr lang="en-US" sz="1200" dirty="0">
+                      <a:r>
+                        <a:rPr lang="en-US" sz="1100" b="1" dirty="0">
+                          <a:solidFill>
+                            <a:srgbClr val="518E0D"/>
+                          </a:solidFill>
+                          <a:latin typeface="Noto Sans" pitchFamily="34" charset="0"/>
+                          <a:ea typeface="Noto Sans" pitchFamily="34" charset="-122"/>
+                          <a:cs typeface="Noto Sans" pitchFamily="34" charset="-120"/>
+                        </a:rPr>
+                        <a:t>Đã giải quyết</a:t>
+                      </a:r>
+                      <a:endParaRPr lang="en-US" sz="1100" dirty="0">
+                        <a:latin typeface="Noto Sans" charset="0"/>
+                        <a:ea typeface="Noto Sans" charset="0"/>
+                        <a:cs typeface="Noto Sans" charset="0"/>
+                      </a:endParaRPr>
+                    </a:p>
+                  </a:txBody>
+                  <a:tcPr marL="101600" marR="101600" marT="63500" marB="63500" anchor="t">
+                    <a:lnL w="9525" cap="flat" cmpd="sng" algn="ctr">
+                      <a:solidFill>
+                        <a:srgbClr val="DCE7EA"/>
+                      </a:solidFill>
+                      <a:prstDash val="solid"/>
+                      <a:round/>
+                      <a:headEnd type="none" w="med" len="med"/>
+                      <a:tailEnd type="none" w="med" len="med"/>
+                    </a:lnL>
+                    <a:lnR w="9525" cap="flat" cmpd="sng" algn="ctr">
+                      <a:solidFill>
+                        <a:srgbClr val="DCE7EA"/>
+                      </a:solidFill>
+                      <a:prstDash val="solid"/>
+                      <a:round/>
+                      <a:headEnd type="none" w="med" len="med"/>
+                      <a:tailEnd type="none" w="med" len="med"/>
+                    </a:lnR>
+                    <a:lnT w="9525" cap="flat" cmpd="sng" algn="ctr">
+                      <a:solidFill>
+                        <a:srgbClr val="DCE7EA"/>
+                      </a:solidFill>
+                      <a:prstDash val="solid"/>
+                      <a:round/>
+                      <a:headEnd type="none" w="med" len="med"/>
+                      <a:tailEnd type="none" w="med" len="med"/>
+                    </a:lnT>
+                    <a:lnB w="9525" cap="flat" cmpd="sng" algn="ctr">
+                      <a:solidFill>
+                        <a:srgbClr val="DCE7EA"/>
+                      </a:solidFill>
+                      <a:prstDash val="solid"/>
+                      <a:round/>
+                      <a:headEnd type="none" w="med" len="med"/>
+                      <a:tailEnd type="none" w="med" len="med"/>
+                    </a:lnB>
+                    <a:solidFill>
+                      <a:srgbClr val="FFFFFF"/>
+                    </a:solidFill>
+                  </a:tcPr>
+                </a:tc>
+              </a:tr>
+              <a:tr h="628650">
+                <a:tc>
+                  <a:txBody>
+                    <a:bodyPr/>
+                    <a:lstStyle/>
+                    <a:p>
+                      <a:pPr indent="0" marL="0">
+                        <a:buNone/>
+                      </a:pPr>
+                      <a:r>
+                        <a:rPr lang="en-US" sz="1100" b="1" dirty="0">
+                          <a:solidFill>
+                            <a:srgbClr val="004671"/>
+                          </a:solidFill>
+                          <a:latin typeface="Noto Sans" pitchFamily="34" charset="0"/>
+                          <a:ea typeface="Noto Sans" pitchFamily="34" charset="-122"/>
+                          <a:cs typeface="Noto Sans" pitchFamily="34" charset="-120"/>
+                        </a:rPr>
+                        <a:t>GVCN kèm con</a:t>
+                      </a:r>
+                      <a:endParaRPr lang="en-US" sz="1100" dirty="0">
+                        <a:latin typeface="Noto Sans" charset="0"/>
+                        <a:ea typeface="Noto Sans" charset="0"/>
+                        <a:cs typeface="Noto Sans" charset="0"/>
+                      </a:endParaRPr>
+                    </a:p>
+                  </a:txBody>
+                  <a:tcPr marL="101600" marR="101600" marT="63500" marB="63500" anchor="t">
+                    <a:lnL w="9525" cap="flat" cmpd="sng" algn="ctr">
+                      <a:solidFill>
+                        <a:srgbClr val="DCE7EA"/>
+                      </a:solidFill>
+                      <a:prstDash val="solid"/>
+                      <a:round/>
+                      <a:headEnd type="none" w="med" len="med"/>
+                      <a:tailEnd type="none" w="med" len="med"/>
+                    </a:lnL>
+                    <a:lnR w="9525" cap="flat" cmpd="sng" algn="ctr">
+                      <a:solidFill>
+                        <a:srgbClr val="DCE7EA"/>
+                      </a:solidFill>
+                      <a:prstDash val="solid"/>
+                      <a:round/>
+                      <a:headEnd type="none" w="med" len="med"/>
+                      <a:tailEnd type="none" w="med" len="med"/>
+                    </a:lnR>
+                    <a:lnT w="9525" cap="flat" cmpd="sng" algn="ctr">
+                      <a:solidFill>
+                        <a:srgbClr val="DCE7EA"/>
+                      </a:solidFill>
+                      <a:prstDash val="solid"/>
+                      <a:round/>
+                      <a:headEnd type="none" w="med" len="med"/>
+                      <a:tailEnd type="none" w="med" len="med"/>
+                    </a:lnT>
+                    <a:lnB w="9525" cap="flat" cmpd="sng" algn="ctr">
+                      <a:solidFill>
+                        <a:srgbClr val="DCE7EA"/>
+                      </a:solidFill>
+                      <a:prstDash val="solid"/>
+                      <a:round/>
+                      <a:headEnd type="none" w="med" len="med"/>
+                      <a:tailEnd type="none" w="med" len="med"/>
+                    </a:lnB>
+                    <a:solidFill>
+                      <a:srgbClr val="FFFFFF"/>
+                    </a:solidFill>
+                  </a:tcPr>
+                </a:tc>
+                <a:tc>
+                  <a:txBody>
+                    <a:bodyPr/>
+                    <a:lstStyle/>
+                    <a:p>
+                      <a:pPr indent="0" marL="0">
+                        <a:buNone/>
+                      </a:pPr>
+                      <a:r>
+                        <a:rPr lang="en-US" sz="1100" dirty="0">
+                          <a:solidFill>
+                            <a:srgbClr val="22333F"/>
+                          </a:solidFill>
+                          <a:latin typeface="Noto Sans" pitchFamily="34" charset="0"/>
+                          <a:ea typeface="Noto Sans" pitchFamily="34" charset="-122"/>
+                          <a:cs typeface="Noto Sans" pitchFamily="34" charset="-120"/>
+                        </a:rPr>
+                        <a:t>JTBD 4: Giải phóng thời gian và áp lực kèm con cho bố mẹ</a:t>
+                      </a:r>
+                      <a:endParaRPr lang="en-US" sz="1100" dirty="0">
+                        <a:latin typeface="Noto Sans" charset="0"/>
+                        <a:ea typeface="Noto Sans" charset="0"/>
+                        <a:cs typeface="Noto Sans" charset="0"/>
+                      </a:endParaRPr>
+                    </a:p>
+                  </a:txBody>
+                  <a:tcPr marL="101600" marR="101600" marT="63500" marB="63500" anchor="t">
+                    <a:lnL w="9525" cap="flat" cmpd="sng" algn="ctr">
+                      <a:solidFill>
+                        <a:srgbClr val="DCE7EA"/>
+                      </a:solidFill>
+                      <a:prstDash val="solid"/>
+                      <a:round/>
+                      <a:headEnd type="none" w="med" len="med"/>
+                      <a:tailEnd type="none" w="med" len="med"/>
+                    </a:lnL>
+                    <a:lnR w="9525" cap="flat" cmpd="sng" algn="ctr">
+                      <a:solidFill>
+                        <a:srgbClr val="DCE7EA"/>
+                      </a:solidFill>
+                      <a:prstDash val="solid"/>
+                      <a:round/>
+                      <a:headEnd type="none" w="med" len="med"/>
+                      <a:tailEnd type="none" w="med" len="med"/>
+                    </a:lnR>
+                    <a:lnT w="9525" cap="flat" cmpd="sng" algn="ctr">
+                      <a:solidFill>
+                        <a:srgbClr val="DCE7EA"/>
+                      </a:solidFill>
+                      <a:prstDash val="solid"/>
+                      <a:round/>
+                      <a:headEnd type="none" w="med" len="med"/>
+                      <a:tailEnd type="none" w="med" len="med"/>
+                    </a:lnT>
+                    <a:lnB w="9525" cap="flat" cmpd="sng" algn="ctr">
+                      <a:solidFill>
+                        <a:srgbClr val="DCE7EA"/>
+                      </a:solidFill>
+                      <a:prstDash val="solid"/>
+                      <a:round/>
+                      <a:headEnd type="none" w="med" len="med"/>
+                      <a:tailEnd type="none" w="med" len="med"/>
+                    </a:lnB>
+                    <a:solidFill>
+                      <a:srgbClr val="FFFFFF"/>
+                    </a:solidFill>
+                  </a:tcPr>
+                </a:tc>
+                <a:tc>
+                  <a:txBody>
+                    <a:bodyPr/>
+                    <a:lstStyle/>
+                    <a:p>
+                      <a:pPr indent="0" marL="0">
+                        <a:buNone/>
+                      </a:pPr>
+                      <a:r>
+                        <a:rPr lang="en-US" sz="1100" b="1" dirty="0">
+                          <a:solidFill>
+                            <a:srgbClr val="22333F"/>
+                          </a:solidFill>
+                          <a:latin typeface="Noto Sans" pitchFamily="34" charset="0"/>
+                          <a:ea typeface="Noto Sans" pitchFamily="34" charset="-122"/>
+                          <a:cs typeface="Noto Sans" pitchFamily="34" charset="-120"/>
+                        </a:rPr>
+                        <a:t>⚠ Chưa rõ ràng</a:t>
+                      </a:r>
+                      <a:endParaRPr lang="en-US" sz="1100" dirty="0">
                         <a:latin typeface="Noto Sans" charset="0"/>
                         <a:ea typeface="Noto Sans" charset="0"/>
                         <a:cs typeface="Noto Sans" charset="0"/>
@@ -9976,16 +10839,139 @@
           </a:graphicData>
         </a:graphic>
       </p:graphicFrame>
+      <p:sp>
+        <p:nvSpPr>
+          <p:cNvPr id="13" name="Text 10">
+</p:cNvPr>
+          <p:cNvSpPr/>
+          <p:nvPr>
+</p:nvPr>
+        </p:nvSpPr>
+        <p:spPr>
+          <a:xfrm>
+            <a:off x="502920" y="5000000"/>
+            <a:ext cx="11183112" cy="550000"/>
+          </a:xfrm>
+          <a:prstGeom prst="rect">
+            <a:avLst>
+</a:avLst>
+          </a:prstGeom>
+          <a:noFill/>
+          <a:ln>
+</a:ln>
+        </p:spPr>
+        <p:txBody>
+          <a:bodyPr wrap="square" rtlCol="0" anchor="t">
+            <a:normAutofit/>
+          </a:bodyPr>
+          <a:lstStyle/>
+          <a:p>
+            <a:pPr indent="0" marL="0">
+              <a:lnSpc>
+                <a:spcPct val="105000"/>
+              </a:lnSpc>
+              <a:buNone/>
+            </a:pPr>
+            <a:r>
+              <a:rPr lang="en-US" sz="1100" b="1" dirty="0">
+                <a:solidFill>
+                  <a:srgbClr val="004671"/>
+                </a:solidFill>
+                <a:latin typeface="Noto Sans" pitchFamily="34" charset="0"/>
+                <a:ea typeface="Noto Sans" pitchFamily="34" charset="-122"/>
+                <a:cs typeface="Noto Sans" pitchFamily="34" charset="-120"/>
+              </a:rPr>
+              <a:t>Nhóm II — Phát triển toàn diện, giỏi đều các môn: </a:t>
+            </a:r>
+            <a:r>
+              <a:rPr lang="en-US" sz="1100" dirty="0">
+                <a:solidFill>
+                  <a:srgbClr val="22333F"/>
+                </a:solidFill>
+                <a:latin typeface="Noto Sans" pitchFamily="34" charset="0"/>
+                <a:ea typeface="Noto Sans" pitchFamily="34" charset="-122"/>
+                <a:cs typeface="Noto Sans" pitchFamily="34" charset="-120"/>
+              </a:rPr>
+              <a:t>⚠ Concept hiện tại chưa đáp ứng được nhu cầu này — cả 3 JTBD ở Slide 6 đều chưa có cấu phần sản phẩm nào giải quyết.</a:t>
+            </a:r>
+            <a:endParaRPr lang="en-US" sz="1100" dirty="0"/>
+          </a:p>
+        </p:txBody>
+      </p:sp>
+      <p:sp>
+        <p:nvSpPr>
+          <p:cNvPr id="14" name="Text 11">
+</p:cNvPr>
+          <p:cNvSpPr/>
+          <p:nvPr>
+</p:nvPr>
+        </p:nvSpPr>
+        <p:spPr>
+          <a:xfrm>
+            <a:off x="502920" y="5620000"/>
+            <a:ext cx="11183112" cy="750000"/>
+          </a:xfrm>
+          <a:prstGeom prst="rect">
+            <a:avLst>
+</a:avLst>
+          </a:prstGeom>
+          <a:solidFill>
+            <a:srgbClr val="F2FAFB"/>
+          </a:solidFill>
+          <a:ln>
+</a:ln>
+        </p:spPr>
+        <p:txBody>
+          <a:bodyPr wrap="square" rtlCol="0" anchor="t">
+            <a:normAutofit/>
+          </a:bodyPr>
+          <a:lstStyle/>
+          <a:p>
+            <a:pPr indent="0" marL="101600">
+              <a:lnSpc>
+                <a:spcPct val="105000"/>
+              </a:lnSpc>
+              <a:buNone/>
+            </a:pPr>
+            <a:r>
+              <a:rPr lang="en-US" sz="1100" b="1" dirty="0">
+                <a:solidFill>
+                  <a:srgbClr val="004671"/>
+                </a:solidFill>
+                <a:latin typeface="Noto Sans" pitchFamily="34" charset="0"/>
+                <a:ea typeface="Noto Sans" pitchFamily="34" charset="-122"/>
+                <a:cs typeface="Noto Sans" pitchFamily="34" charset="-120"/>
+              </a:rPr>
+              <a:t>Đánh giá tổng thể: </a:t>
+            </a:r>
+            <a:r>
+              <a:rPr lang="en-US" sz="1100" dirty="0">
+                <a:solidFill>
+                  <a:srgbClr val="22333F"/>
+                </a:solidFill>
+                <a:latin typeface="Noto Sans" pitchFamily="34" charset="0"/>
+                <a:ea typeface="Noto Sans" pitchFamily="34" charset="-122"/>
+                <a:cs typeface="Noto Sans" pitchFamily="34" charset="-120"/>
+              </a:rPr>
+              <a:t>Concept hiện tại giải quyết tốt 3/4 JTBD ở Nhóm I, còn khoảng trống rõ ở JTBD 4 và hoàn toàn chưa chạm tới Nhóm II — đây là 2 khoảng trống mà 3 định hướng concept ở Phần 3 cần trả lời.</a:t>
+            </a:r>
+            <a:endParaRPr lang="en-US" sz="1100" dirty="0"/>
+          </a:p>
+        </p:txBody>
+      </p:sp>
       <p:pic>
         <p:nvPicPr>
-          <p:cNvPr id="7" name="Image 1"/>
+          <p:cNvPr id="7" name="Image 1">
+</p:cNvPr>
           <p:cNvPicPr>
             <a:picLocks noChangeAspect="1"/>
           </p:cNvPicPr>
-          <p:nvPr/>
+          <p:nvPr>
+</p:nvPr>
         </p:nvPicPr>
         <p:blipFill>
-          <a:blip r:embed="rId2"/>
+          <a:blip r:embed="rId2">
+</a:blip>
           <a:stretch>
             <a:fillRect/>
           </a:stretch>
@@ -10002,9 +10988,11 @@
       </p:pic>
       <p:sp>
         <p:nvSpPr>
-          <p:cNvPr id="8" name="Text 3"/>
-          <p:cNvSpPr/>
-          <p:nvPr/>
+          <p:cNvPr id="8" name="Text 3">
+</p:cNvPr>
+          <p:cNvSpPr/>
+          <p:nvPr>
+</p:nvPr>
         </p:nvSpPr>
         <p:spPr>
           <a:xfrm>
@@ -10012,13 +11000,16 @@
             <a:ext cx="3657600" cy="256032"/>
           </a:xfrm>
           <a:prstGeom prst="rect">
-            <a:avLst/>
+            <a:avLst>
+</a:avLst>
           </a:prstGeom>
           <a:noFill/>
-          <a:ln/>
+          <a:ln>
+</a:ln>
         </p:spPr>
         <p:txBody>
-          <a:bodyPr wrap="square" rtlCol="0" anchor="ctr"/>
+          <a:bodyPr wrap="square" rtlCol="0" anchor="ctr">
+</a:bodyPr>
           <a:lstStyle/>
           <a:p>
             <a:pPr indent="0" marL="0">
@@ -10041,9 +11032,11 @@
       </p:sp>
       <p:sp>
         <p:nvSpPr>
-          <p:cNvPr id="9" name="Text 4"/>
-          <p:cNvSpPr/>
-          <p:nvPr/>
+          <p:cNvPr id="9" name="Text 4">
+</p:cNvPr>
+          <p:cNvSpPr/>
+          <p:nvPr>
+</p:nvPr>
         </p:nvSpPr>
         <p:spPr>
           <a:xfrm>
@@ -10051,13 +11044,16 @@
             <a:ext cx="914400" cy="256032"/>
           </a:xfrm>
           <a:prstGeom prst="rect">
-            <a:avLst/>
+            <a:avLst>
+</a:avLst>
           </a:prstGeom>
           <a:noFill/>
-          <a:ln/>
+          <a:ln>
+</a:ln>
         </p:spPr>
         <p:txBody>
-          <a:bodyPr wrap="square" rtlCol="0" anchor="ctr"/>
+          <a:bodyPr wrap="square" rtlCol="0" anchor="ctr">
+</a:bodyPr>
           <a:lstStyle/>
           <a:p>
             <a:pPr algn="r" indent="0" marL="0">
@@ -10072,7 +11068,7 @@
                 <a:ea typeface="Noto Sans" pitchFamily="34" charset="-122"/>
                 <a:cs typeface="Noto Sans" pitchFamily="34" charset="-120"/>
               </a:rPr>
-              <a:t>4 / 12</a:t>
+              <a:t>6 / 14</a:t>
             </a:r>
             <a:endParaRPr lang="en-US" sz="850" dirty="0"/>
           </a:p>
@@ -10789,7 +11785,7 @@
                 <a:ea typeface="Noto Sans" pitchFamily="34" charset="-122"/>
                 <a:cs typeface="Noto Sans" pitchFamily="34" charset="-120"/>
               </a:rPr>
-              <a:t>1 / 12</a:t>
+              <a:t>1 / 14</a:t>
             </a:r>
             <a:endParaRPr lang="en-US" sz="850" dirty="0"/>
           </a:p>
@@ -11414,7 +12410,7 @@
                 <a:ea typeface="Noto Sans" pitchFamily="34" charset="-122"/>
                 <a:cs typeface="Noto Sans" pitchFamily="34" charset="-120"/>
               </a:rPr>
-              <a:t>2 / 12</a:t>
+              <a:t>2 / 14</a:t>
             </a:r>
             <a:endParaRPr lang="en-US" sz="850" dirty="0"/>
           </a:p>
@@ -12517,7 +13513,7 @@
                 <a:ea typeface="Noto Sans" pitchFamily="34" charset="-122"/>
                 <a:cs typeface="Noto Sans" pitchFamily="34" charset="-120"/>
               </a:rPr>
-              <a:t>5 / 12</a:t>
+              <a:t>7 / 14</a:t>
             </a:r>
             <a:endParaRPr lang="en-US" sz="850" dirty="0"/>
           </a:p>
@@ -13923,7 +14919,7 @@
                 <a:ea typeface="Noto Sans" pitchFamily="34" charset="-122"/>
                 <a:cs typeface="Noto Sans" pitchFamily="34" charset="-120"/>
               </a:rPr>
-              <a:t>6 / 12</a:t>
+              <a:t>8 / 14</a:t>
             </a:r>
             <a:endParaRPr lang="en-US" sz="850" dirty="0"/>
           </a:p>
@@ -14989,7 +15985,7 @@
                 <a:ea typeface="Noto Sans" pitchFamily="34" charset="-122"/>
                 <a:cs typeface="Noto Sans" pitchFamily="34" charset="-120"/>
               </a:rPr>
-              <a:t>7 / 12</a:t>
+              <a:t>9 / 14</a:t>
             </a:r>
             <a:endParaRPr lang="en-US" sz="850" dirty="0"/>
           </a:p>
@@ -15730,7 +16726,7 @@
                 <a:ea typeface="Noto Sans" pitchFamily="34" charset="-122"/>
                 <a:cs typeface="Noto Sans" pitchFamily="34" charset="-120"/>
               </a:rPr>
-              <a:t>8 / 12</a:t>
+              <a:t>10 / 14</a:t>
             </a:r>
             <a:endParaRPr lang="en-US" sz="850" dirty="0"/>
           </a:p>
@@ -16333,7 +17329,7 @@
                 <a:ea typeface="Noto Sans" pitchFamily="34" charset="-122"/>
                 <a:cs typeface="Noto Sans" pitchFamily="34" charset="-120"/>
               </a:rPr>
-              <a:t>9 / 12</a:t>
+              <a:t>11 / 14</a:t>
             </a:r>
             <a:endParaRPr lang="en-US" sz="850" dirty="0"/>
           </a:p>

--- a/03_product/concepts/AI-Class-New-slide-deck-FINAL-2026-08-21-branded.pptx
+++ b/03_product/concepts/AI-Class-New-slide-deck-FINAL-2026-08-21-branded.pptx
@@ -20,6 +20,7 @@
     <p:sldId id="265" r:id="rId11"/>
     <p:sldId id="266" r:id="rId12"/>
     <p:sldId id="267" r:id="rId13"/>
+    <p:sldId id="272" r:id="rId23"/>
   </p:sldIdLst>
   <p:notesMasterIdLst>
     <p:notesMasterId r:id="rId14"/>
@@ -11082,6 +11083,1681 @@
 </p:sld>
 </file>
 
+<file path=ppt/slides/slide17.xml><?xml version="1.0" encoding="utf-8"?>
+<p:sld xmlns:a="http://schemas.openxmlformats.org/drawingml/2006/main" xmlns:r="http://schemas.openxmlformats.org/officeDocument/2006/relationships" xmlns:p="http://schemas.openxmlformats.org/presentationml/2006/main">
+  <p:cSld name="Slide 17">
+    <p:bg>
+      <p:bgPr>
+        <a:solidFill>
+          <a:srgbClr val="FFFFFF"/>
+        </a:solidFill>
+      </p:bgPr>
+    </p:bg>
+    <p:spTree>
+      <p:nvGrpSpPr>
+        <p:cNvPr id="1" name=""/>
+        <p:cNvGrpSpPr/>
+        <p:nvPr/>
+      </p:nvGrpSpPr>
+      <p:grpSpPr>
+        <a:xfrm>
+          <a:off x="0" y="0"/>
+          <a:ext cx="0" cy="0"/>
+          <a:chOff x="0" y="0"/>
+          <a:chExt cx="0" cy="0"/>
+        </a:xfrm>
+      </p:grpSpPr>
+      <p:sp>
+        <p:nvSpPr>
+          <p:cNvPr id="2" name="Text 0"/>
+          <p:cNvSpPr/>
+          <p:nvPr/>
+        </p:nvSpPr>
+        <p:spPr>
+          <a:xfrm>
+            <a:off x="502920" y="292608"/>
+            <a:ext cx="11183112" cy="274320"/>
+          </a:xfrm>
+          <a:prstGeom prst="rect">
+            <a:avLst/>
+          </a:prstGeom>
+          <a:noFill/>
+          <a:ln/>
+        </p:spPr>
+        <p:txBody>
+          <a:bodyPr wrap="square" rtlCol="0" anchor="ctr"/>
+          <a:lstStyle/>
+          <a:p>
+            <a:pPr indent="0" marL="0">
+              <a:lnSpc>
+                <a:spcPct val="102000"/>
+              </a:lnSpc>
+              <a:spcAft>
+                <a:spcPts val="0"/>
+              </a:spcAft>
+              <a:buNone/>
+            </a:pPr>
+            <a:r>
+              <a:rPr lang="en-US" sz="1100" b="1" dirty="0">
+                <a:solidFill>
+                  <a:srgbClr val="3B81B1"/>
+                </a:solidFill>
+                <a:latin typeface="Noto Sans" pitchFamily="34" charset="0"/>
+                <a:ea typeface="Noto Sans" pitchFamily="34" charset="-122"/>
+                <a:cs typeface="Noto Sans" pitchFamily="34" charset="-120"/>
+              </a:rPr>
+              <a:t>PHỤ LỤC — HƯỚNG PHÂN TÍCH JTBD THAY THẾ</a:t>
+            </a:r>
+            <a:endParaRPr lang="en-US" sz="1100" dirty="0"/>
+          </a:p>
+        </p:txBody>
+      </p:sp>
+      <p:sp>
+        <p:nvSpPr>
+          <p:cNvPr id="3" name="Text 1"/>
+          <p:cNvSpPr/>
+          <p:nvPr/>
+        </p:nvSpPr>
+        <p:spPr>
+          <a:xfrm>
+            <a:off x="502920" y="548640"/>
+            <a:ext cx="11183112" cy="520000"/>
+          </a:xfrm>
+          <a:prstGeom prst="rect">
+            <a:avLst/>
+          </a:prstGeom>
+          <a:noFill/>
+          <a:ln/>
+        </p:spPr>
+        <p:txBody>
+          <a:bodyPr wrap="square" rtlCol="0" anchor="ctr"/>
+          <a:lstStyle/>
+          <a:p>
+            <a:pPr indent="0" marL="0">
+              <a:lnSpc>
+                <a:spcPct val="102000"/>
+              </a:lnSpc>
+              <a:spcAft>
+                <a:spcPts val="0"/>
+              </a:spcAft>
+              <a:buNone/>
+            </a:pPr>
+            <a:r>
+              <a:rPr lang="en-US" sz="2600" b="1" dirty="0">
+                <a:solidFill>
+                  <a:srgbClr val="004671"/>
+                </a:solidFill>
+                <a:latin typeface="Noto Sans" pitchFamily="34" charset="0"/>
+                <a:ea typeface="Noto Sans" pitchFamily="34" charset="-122"/>
+                <a:cs typeface="Noto Sans" pitchFamily="34" charset="-120"/>
+              </a:rPr>
+              <a:t>Phân tích sâu JTBD — góc nhìn đầy đủ 3 tầng</a:t>
+            </a:r>
+            <a:endParaRPr lang="en-US" sz="2600" dirty="0"/>
+          </a:p>
+        </p:txBody>
+      </p:sp>
+      <p:sp>
+        <p:nvSpPr>
+          <p:cNvPr id="4" name="Shape 2"/>
+          <p:cNvSpPr/>
+          <p:nvPr/>
+        </p:nvSpPr>
+        <p:spPr>
+          <a:xfrm>
+            <a:off x="502920" y="1170432"/>
+            <a:ext cx="777240" cy="45720"/>
+          </a:xfrm>
+          <a:prstGeom prst="rect">
+            <a:avLst/>
+          </a:prstGeom>
+          <a:solidFill>
+            <a:srgbClr val="A5BE00"/>
+          </a:solidFill>
+          <a:ln/>
+        </p:spPr>
+      </p:sp>
+      <p:pic>
+        <p:nvPicPr>
+          <p:cNvPr id="5" name="Image 0"/>
+          <p:cNvPicPr>
+            <a:picLocks noChangeAspect="1"/>
+          </p:cNvPicPr>
+          <p:nvPr/>
+        </p:nvPicPr>
+        <p:blipFill>
+          <a:blip r:embed="rId1"/>
+          <a:stretch>
+            <a:fillRect/>
+          </a:stretch>
+        </p:blipFill>
+        <p:spPr>
+          <a:xfrm>
+            <a:off x="11292840" y="365760"/>
+            <a:ext cx="502920" cy="502920"/>
+          </a:xfrm>
+          <a:prstGeom prst="rect">
+            <a:avLst/>
+          </a:prstGeom>
+        </p:spPr>
+      </p:pic>
+      <p:sp>
+        <p:nvSpPr>
+          <p:cNvPr id="6" name="Text 3"/>
+          <p:cNvSpPr/>
+          <p:nvPr/>
+        </p:nvSpPr>
+        <p:spPr>
+          <a:xfrm>
+            <a:off x="502920" y="1230000"/>
+            <a:ext cx="10600000" cy="560000"/>
+          </a:xfrm>
+          <a:prstGeom prst="rect">
+            <a:avLst/>
+          </a:prstGeom>
+          <a:noFill/>
+          <a:ln/>
+        </p:spPr>
+        <p:txBody>
+          <a:bodyPr wrap="square" rtlCol="0" anchor="t">
+            <a:normAutofit/>
+          </a:bodyPr>
+          <a:lstStyle/>
+          <a:p>
+            <a:pPr indent="0" marL="0">
+              <a:lnSpc>
+                <a:spcPct val="105000"/>
+              </a:lnSpc>
+              <a:spcAft>
+                <a:spcPts val="0"/>
+              </a:spcAft>
+              <a:buNone/>
+            </a:pPr>
+            <a:r>
+              <a:rPr lang="en-US" sz="1000" i="1" dirty="0">
+                <a:solidFill>
+                  <a:srgbClr val="5B6472"/>
+                </a:solidFill>
+                <a:latin typeface="Noto Sans" pitchFamily="34" charset="0"/>
+                <a:ea typeface="Noto Sans" pitchFamily="34" charset="-122"/>
+                <a:cs typeface="Noto Sans" pitchFamily="34" charset="-120"/>
+              </a:rPr>
+              <a:t>Giữ đủ 3 tầng Chức năng / Cảm xúc / Xã hội cho mỗi JTBD (Slide 5–6 đã lược bớt cho gọn). Đề xuất khung để thảo luận: (1) Nhóm II là giai đoạn chuyển cấp nối tiếp Nhóm I, không phải phân khúc song song; (2) bổ sung 2 JTBD ẩn.</a:t>
+            </a:r>
+            <a:endParaRPr lang="en-US" sz="1000" dirty="0"/>
+          </a:p>
+        </p:txBody>
+      </p:sp>
+      <p:sp>
+        <p:nvSpPr>
+          <p:cNvPr id="7" name="Text 4"/>
+          <p:cNvSpPr/>
+          <p:nvPr/>
+        </p:nvSpPr>
+        <p:spPr>
+          <a:xfrm>
+            <a:off x="502920" y="1810000"/>
+            <a:ext cx="5466556" cy="300000"/>
+          </a:xfrm>
+          <a:prstGeom prst="rect">
+            <a:avLst/>
+          </a:prstGeom>
+          <a:noFill/>
+          <a:ln/>
+        </p:spPr>
+        <p:txBody>
+          <a:bodyPr wrap="square" rtlCol="0" anchor="ctr"/>
+          <a:lstStyle/>
+          <a:p>
+            <a:pPr indent="0" marL="0">
+              <a:lnSpc>
+                <a:spcPct val="102000"/>
+              </a:lnSpc>
+              <a:spcAft>
+                <a:spcPts val="0"/>
+              </a:spcAft>
+              <a:buNone/>
+            </a:pPr>
+            <a:r>
+              <a:rPr lang="en-US" sz="1000" b="1" dirty="0">
+                <a:solidFill>
+                  <a:srgbClr val="004671"/>
+                </a:solidFill>
+                <a:latin typeface="Noto Sans" pitchFamily="34" charset="0"/>
+                <a:ea typeface="Noto Sans" pitchFamily="34" charset="-122"/>
+                <a:cs typeface="Noto Sans" pitchFamily="34" charset="-120"/>
+              </a:rPr>
+              <a:t>NHÓM I — ĐẦU TƯ MẠNH PHÁT TRIỂN NĂNG LỰC TIẾNG ANH</a:t>
+            </a:r>
+            <a:endParaRPr lang="en-US" sz="1000" dirty="0"/>
+          </a:p>
+        </p:txBody>
+      </p:sp>
+      <p:sp>
+        <p:nvSpPr>
+          <p:cNvPr id="8" name="Text 5"/>
+          <p:cNvSpPr/>
+          <p:nvPr/>
+        </p:nvSpPr>
+        <p:spPr>
+          <a:xfrm>
+            <a:off x="6219476" y="1760000"/>
+            <a:ext cx="5466556" cy="400000"/>
+          </a:xfrm>
+          <a:prstGeom prst="rect">
+            <a:avLst/>
+          </a:prstGeom>
+          <a:noFill/>
+          <a:ln/>
+        </p:spPr>
+        <p:txBody>
+          <a:bodyPr wrap="square" rtlCol="0" anchor="t">
+            <a:normAutofit/>
+          </a:bodyPr>
+          <a:lstStyle/>
+          <a:p>
+            <a:pPr indent="0" marL="0">
+              <a:lnSpc>
+                <a:spcPct val="102000"/>
+              </a:lnSpc>
+              <a:spcAft>
+                <a:spcPts val="100"/>
+              </a:spcAft>
+              <a:buNone/>
+            </a:pPr>
+            <a:r>
+              <a:rPr lang="en-US" sz="1000" b="1" dirty="0">
+                <a:solidFill>
+                  <a:srgbClr val="004671"/>
+                </a:solidFill>
+                <a:latin typeface="Noto Sans" pitchFamily="34" charset="0"/>
+                <a:ea typeface="Noto Sans" pitchFamily="34" charset="-122"/>
+                <a:cs typeface="Noto Sans" pitchFamily="34" charset="-120"/>
+              </a:rPr>
+              <a:t>NHÓM II — GIAI ĐOẠN CHUYỂN CẤP, NỐI TIẾP NHÓM I</a:t>
+            </a:r>
+            <a:endParaRPr lang="en-US" sz="1000" dirty="0"/>
+          </a:p>
+          <a:p>
+            <a:pPr indent="0" marL="0">
+              <a:lnSpc>
+                <a:spcPct val="102000"/>
+              </a:lnSpc>
+              <a:spcAft>
+                <a:spcPts val="0"/>
+              </a:spcAft>
+              <a:buNone/>
+            </a:pPr>
+            <a:r>
+              <a:rPr lang="en-US" sz="800" i="1" dirty="0">
+                <a:solidFill>
+                  <a:srgbClr val="5B6472"/>
+                </a:solidFill>
+                <a:latin typeface="Noto Sans" pitchFamily="34" charset="0"/>
+                <a:ea typeface="Noto Sans" pitchFamily="34" charset="-122"/>
+                <a:cs typeface="Noto Sans" pitchFamily="34" charset="-120"/>
+              </a:rPr>
+              <a:t>Dữ liệu VN (Dang Hai-Anh; VnExpress): hành trình theo cấp học, không phải phân khúc khách hàng khác.</a:t>
+            </a:r>
+            <a:endParaRPr lang="en-US" sz="800" dirty="0"/>
+          </a:p>
+        </p:txBody>
+      </p:sp>
+      <p:sp>
+        <p:nvSpPr>
+          <p:cNvPr id="9" name="Bar 9"/>
+          <p:cNvSpPr/>
+          <p:nvPr/>
+        </p:nvSpPr>
+        <p:spPr>
+          <a:xfrm>
+            <a:off x="502920" y="2210000"/>
+            <a:ext cx="73152" cy="1000000"/>
+          </a:xfrm>
+          <a:prstGeom prst="rect">
+            <a:avLst/>
+          </a:prstGeom>
+          <a:solidFill>
+            <a:srgbClr val="004671"/>
+          </a:solidFill>
+          <a:ln/>
+        </p:spPr>
+      </p:sp>
+      <p:sp>
+        <p:nvSpPr>
+          <p:cNvPr id="10" name="Text 10"/>
+          <p:cNvSpPr/>
+          <p:nvPr/>
+        </p:nvSpPr>
+        <p:spPr>
+          <a:xfrm>
+            <a:off x="685800" y="2210000"/>
+            <a:ext cx="5283676" cy="1000000"/>
+          </a:xfrm>
+          <a:prstGeom prst="rect">
+            <a:avLst/>
+          </a:prstGeom>
+          <a:noFill/>
+          <a:ln/>
+        </p:spPr>
+        <p:txBody>
+          <a:bodyPr wrap="square" rtlCol="0" anchor="t">
+            <a:normAutofit/>
+          </a:bodyPr>
+          <a:lstStyle/>
+          <a:p>
+            <a:pPr indent="0" marL="0">
+              <a:lnSpc>
+                <a:spcPct val="102000"/>
+              </a:lnSpc>
+              <a:spcAft>
+                <a:spcPts val="200"/>
+              </a:spcAft>
+              <a:buNone/>
+            </a:pPr>
+            <a:r>
+              <a:rPr lang="en-US" sz="1150" b="1" dirty="0">
+                <a:solidFill>
+                  <a:srgbClr val="004671"/>
+                </a:solidFill>
+                <a:latin typeface="Noto Sans" pitchFamily="34" charset="0"/>
+                <a:ea typeface="Noto Sans" pitchFamily="34" charset="-122"/>
+                <a:cs typeface="Noto Sans" pitchFamily="34" charset="-120"/>
+              </a:rPr>
+              <a:t>JTBD 1 — Thành tích đo lường được</a:t>
+            </a:r>
+            <a:endParaRPr lang="en-US" sz="1150" dirty="0"/>
+          </a:p>
+          <a:p>
+            <a:pPr indent="0" marL="0">
+              <a:lnSpc>
+                <a:spcPct val="102000"/>
+              </a:lnSpc>
+              <a:spcAft>
+                <a:spcPts val="200"/>
+              </a:spcAft>
+              <a:buNone/>
+            </a:pPr>
+            <a:r>
+              <a:rPr lang="en-US" sz="950" b="1" dirty="0">
+                <a:solidFill>
+                  <a:srgbClr val="22333F"/>
+                </a:solidFill>
+                <a:latin typeface="Noto Sans" pitchFamily="34" charset="0"/>
+                <a:ea typeface="Noto Sans" pitchFamily="34" charset="-122"/>
+                <a:cs typeface="Noto Sans" pitchFamily="34" charset="-120"/>
+              </a:rPr>
+              <a:t>Chức năng: </a:t>
+            </a:r>
+            <a:r>
+              <a:rPr lang="en-US" sz="950" dirty="0">
+                <a:solidFill>
+                  <a:srgbClr val="22333F"/>
+                </a:solidFill>
+                <a:latin typeface="Noto Sans" pitchFamily="34" charset="0"/>
+                <a:ea typeface="Noto Sans" pitchFamily="34" charset="-122"/>
+                <a:cs typeface="Noto Sans" pitchFamily="34" charset="-120"/>
+              </a:rPr>
+              <a:t>Điểm cao, có chứng chỉ tiếng Anh theo lộ trình.</a:t>
+            </a:r>
+            <a:endParaRPr lang="en-US" sz="950" dirty="0"/>
+          </a:p>
+          <a:p>
+            <a:pPr indent="0" marL="0">
+              <a:lnSpc>
+                <a:spcPct val="102000"/>
+              </a:lnSpc>
+              <a:spcAft>
+                <a:spcPts val="200"/>
+              </a:spcAft>
+              <a:buNone/>
+            </a:pPr>
+            <a:r>
+              <a:rPr lang="en-US" sz="950" b="1" dirty="0">
+                <a:solidFill>
+                  <a:srgbClr val="22333F"/>
+                </a:solidFill>
+                <a:latin typeface="Noto Sans" pitchFamily="34" charset="0"/>
+                <a:ea typeface="Noto Sans" pitchFamily="34" charset="-122"/>
+                <a:cs typeface="Noto Sans" pitchFamily="34" charset="-120"/>
+              </a:rPr>
+              <a:t>Cảm xúc: </a:t>
+            </a:r>
+            <a:r>
+              <a:rPr lang="en-US" sz="950" dirty="0">
+                <a:solidFill>
+                  <a:srgbClr val="22333F"/>
+                </a:solidFill>
+                <a:latin typeface="Noto Sans" pitchFamily="34" charset="0"/>
+                <a:ea typeface="Noto Sans" pitchFamily="34" charset="-122"/>
+                <a:cs typeface="Noto Sans" pitchFamily="34" charset="-120"/>
+              </a:rPr>
+              <a:t>Giải tỏa lo “đầu tư mà không có kết quả” — mạnh với phụ huynh từng thất vọng ở sản phẩm khác.</a:t>
+            </a:r>
+            <a:endParaRPr lang="en-US" sz="950" dirty="0"/>
+          </a:p>
+          <a:p>
+            <a:pPr indent="0" marL="0">
+              <a:lnSpc>
+                <a:spcPct val="102000"/>
+              </a:lnSpc>
+              <a:spcAft>
+                <a:spcPts val="200"/>
+              </a:spcAft>
+              <a:buNone/>
+            </a:pPr>
+            <a:r>
+              <a:rPr lang="en-US" sz="950" b="1" dirty="0">
+                <a:solidFill>
+                  <a:srgbClr val="22333F"/>
+                </a:solidFill>
+                <a:latin typeface="Noto Sans" pitchFamily="34" charset="0"/>
+                <a:ea typeface="Noto Sans" pitchFamily="34" charset="-122"/>
+                <a:cs typeface="Noto Sans" pitchFamily="34" charset="-120"/>
+              </a:rPr>
+              <a:t>Xã hội: </a:t>
+            </a:r>
+            <a:r>
+              <a:rPr lang="en-US" sz="950" dirty="0">
+                <a:solidFill>
+                  <a:srgbClr val="22333F"/>
+                </a:solidFill>
+                <a:latin typeface="Noto Sans" pitchFamily="34" charset="0"/>
+                <a:ea typeface="Noto Sans" pitchFamily="34" charset="-122"/>
+                <a:cs typeface="Noto Sans" pitchFamily="34" charset="-120"/>
+              </a:rPr>
+              <a:t>Có “bằng chứng” để nói với chồng, ông bà, bạn bè rằng quyết định của mình là đúng.</a:t>
+            </a:r>
+            <a:endParaRPr lang="en-US" sz="950" dirty="0"/>
+          </a:p>
+        </p:txBody>
+      </p:sp>
+      <p:sp>
+        <p:nvSpPr>
+          <p:cNvPr id="11" name="Bar 11"/>
+          <p:cNvSpPr/>
+          <p:nvPr/>
+        </p:nvSpPr>
+        <p:spPr>
+          <a:xfrm>
+            <a:off x="502920" y="3250000"/>
+            <a:ext cx="73152" cy="1000000"/>
+          </a:xfrm>
+          <a:prstGeom prst="rect">
+            <a:avLst/>
+          </a:prstGeom>
+          <a:solidFill>
+            <a:srgbClr val="3B81B1"/>
+          </a:solidFill>
+          <a:ln/>
+        </p:spPr>
+      </p:sp>
+      <p:sp>
+        <p:nvSpPr>
+          <p:cNvPr id="12" name="Text 12"/>
+          <p:cNvSpPr/>
+          <p:nvPr/>
+        </p:nvSpPr>
+        <p:spPr>
+          <a:xfrm>
+            <a:off x="685800" y="3250000"/>
+            <a:ext cx="5283676" cy="1000000"/>
+          </a:xfrm>
+          <a:prstGeom prst="rect">
+            <a:avLst/>
+          </a:prstGeom>
+          <a:noFill/>
+          <a:ln/>
+        </p:spPr>
+        <p:txBody>
+          <a:bodyPr wrap="square" rtlCol="0" anchor="t">
+            <a:normAutofit/>
+          </a:bodyPr>
+          <a:lstStyle/>
+          <a:p>
+            <a:pPr indent="0" marL="0">
+              <a:lnSpc>
+                <a:spcPct val="102000"/>
+              </a:lnSpc>
+              <a:spcAft>
+                <a:spcPts val="200"/>
+              </a:spcAft>
+              <a:buNone/>
+            </a:pPr>
+            <a:r>
+              <a:rPr lang="en-US" sz="1150" b="1" dirty="0">
+                <a:solidFill>
+                  <a:srgbClr val="004671"/>
+                </a:solidFill>
+                <a:latin typeface="Noto Sans" pitchFamily="34" charset="0"/>
+                <a:ea typeface="Noto Sans" pitchFamily="34" charset="-122"/>
+                <a:cs typeface="Noto Sans" pitchFamily="34" charset="-120"/>
+              </a:rPr>
+              <a:t>JTBD 2 — Tự tin giao tiếp thực tế</a:t>
+            </a:r>
+            <a:endParaRPr lang="en-US" sz="1150" dirty="0"/>
+          </a:p>
+          <a:p>
+            <a:pPr indent="0" marL="0">
+              <a:lnSpc>
+                <a:spcPct val="102000"/>
+              </a:lnSpc>
+              <a:spcAft>
+                <a:spcPts val="200"/>
+              </a:spcAft>
+              <a:buNone/>
+            </a:pPr>
+            <a:r>
+              <a:rPr lang="en-US" sz="950" b="1" dirty="0">
+                <a:solidFill>
+                  <a:srgbClr val="22333F"/>
+                </a:solidFill>
+                <a:latin typeface="Noto Sans" pitchFamily="34" charset="0"/>
+                <a:ea typeface="Noto Sans" pitchFamily="34" charset="-122"/>
+                <a:cs typeface="Noto Sans" pitchFamily="34" charset="-120"/>
+              </a:rPr>
+              <a:t>Chức năng: </a:t>
+            </a:r>
+            <a:r>
+              <a:rPr lang="en-US" sz="950" dirty="0">
+                <a:solidFill>
+                  <a:srgbClr val="22333F"/>
+                </a:solidFill>
+                <a:latin typeface="Noto Sans" pitchFamily="34" charset="0"/>
+                <a:ea typeface="Noto Sans" pitchFamily="34" charset="-122"/>
+                <a:cs typeface="Noto Sans" pitchFamily="34" charset="-120"/>
+              </a:rPr>
+              <a:t>Nghe – nói được, phát âm chuẩn.</a:t>
+            </a:r>
+            <a:endParaRPr lang="en-US" sz="950" dirty="0"/>
+          </a:p>
+          <a:p>
+            <a:pPr indent="0" marL="0">
+              <a:lnSpc>
+                <a:spcPct val="102000"/>
+              </a:lnSpc>
+              <a:spcAft>
+                <a:spcPts val="200"/>
+              </a:spcAft>
+              <a:buNone/>
+            </a:pPr>
+            <a:r>
+              <a:rPr lang="en-US" sz="950" b="1" dirty="0">
+                <a:solidFill>
+                  <a:srgbClr val="22333F"/>
+                </a:solidFill>
+                <a:latin typeface="Noto Sans" pitchFamily="34" charset="0"/>
+                <a:ea typeface="Noto Sans" pitchFamily="34" charset="-122"/>
+                <a:cs typeface="Noto Sans" pitchFamily="34" charset="-120"/>
+              </a:rPr>
+              <a:t>Cảm xúc: </a:t>
+            </a:r>
+            <a:r>
+              <a:rPr lang="en-US" sz="950" dirty="0">
+                <a:solidFill>
+                  <a:srgbClr val="22333F"/>
+                </a:solidFill>
+                <a:latin typeface="Noto Sans" pitchFamily="34" charset="0"/>
+                <a:ea typeface="Noto Sans" pitchFamily="34" charset="-122"/>
+                <a:cs typeface="Noto Sans" pitchFamily="34" charset="-120"/>
+              </a:rPr>
+              <a:t>Nỗi sợ “học nhiều năm mà vẫn câm tiếng Anh” — giống chính phụ huynh từng trải qua.</a:t>
+            </a:r>
+            <a:endParaRPr lang="en-US" sz="950" dirty="0"/>
+          </a:p>
+          <a:p>
+            <a:pPr indent="0" marL="0">
+              <a:lnSpc>
+                <a:spcPct val="102000"/>
+              </a:lnSpc>
+              <a:spcAft>
+                <a:spcPts val="200"/>
+              </a:spcAft>
+              <a:buNone/>
+            </a:pPr>
+            <a:r>
+              <a:rPr lang="en-US" sz="950" b="1" dirty="0">
+                <a:solidFill>
+                  <a:srgbClr val="22333F"/>
+                </a:solidFill>
+                <a:latin typeface="Noto Sans" pitchFamily="34" charset="0"/>
+                <a:ea typeface="Noto Sans" pitchFamily="34" charset="-122"/>
+                <a:cs typeface="Noto Sans" pitchFamily="34" charset="-120"/>
+              </a:rPr>
+              <a:t>Xã hội: </a:t>
+            </a:r>
+            <a:r>
+              <a:rPr lang="en-US" sz="950" dirty="0">
+                <a:solidFill>
+                  <a:srgbClr val="22333F"/>
+                </a:solidFill>
+                <a:latin typeface="Noto Sans" pitchFamily="34" charset="0"/>
+                <a:ea typeface="Noto Sans" pitchFamily="34" charset="-122"/>
+                <a:cs typeface="Noto Sans" pitchFamily="34" charset="-120"/>
+              </a:rPr>
+              <a:t>Mong con có thứ mình không có được — gắn JTBD ẩn “đổi đời qua ngoại ngữ”.</a:t>
+            </a:r>
+            <a:endParaRPr lang="en-US" sz="950" dirty="0"/>
+          </a:p>
+        </p:txBody>
+      </p:sp>
+      <p:sp>
+        <p:nvSpPr>
+          <p:cNvPr id="13" name="Bar 13"/>
+          <p:cNvSpPr/>
+          <p:nvPr/>
+        </p:nvSpPr>
+        <p:spPr>
+          <a:xfrm>
+            <a:off x="502920" y="4290000"/>
+            <a:ext cx="73152" cy="1000000"/>
+          </a:xfrm>
+          <a:prstGeom prst="rect">
+            <a:avLst/>
+          </a:prstGeom>
+          <a:solidFill>
+            <a:srgbClr val="518E0D"/>
+          </a:solidFill>
+          <a:ln/>
+        </p:spPr>
+      </p:sp>
+      <p:sp>
+        <p:nvSpPr>
+          <p:cNvPr id="14" name="Text 14"/>
+          <p:cNvSpPr/>
+          <p:nvPr/>
+        </p:nvSpPr>
+        <p:spPr>
+          <a:xfrm>
+            <a:off x="685800" y="4290000"/>
+            <a:ext cx="5283676" cy="1000000"/>
+          </a:xfrm>
+          <a:prstGeom prst="rect">
+            <a:avLst/>
+          </a:prstGeom>
+          <a:noFill/>
+          <a:ln/>
+        </p:spPr>
+        <p:txBody>
+          <a:bodyPr wrap="square" rtlCol="0" anchor="t">
+            <a:normAutofit/>
+          </a:bodyPr>
+          <a:lstStyle/>
+          <a:p>
+            <a:pPr indent="0" marL="0">
+              <a:lnSpc>
+                <a:spcPct val="102000"/>
+              </a:lnSpc>
+              <a:spcAft>
+                <a:spcPts val="200"/>
+              </a:spcAft>
+              <a:buNone/>
+            </a:pPr>
+            <a:r>
+              <a:rPr lang="en-US" sz="1150" b="1" dirty="0">
+                <a:solidFill>
+                  <a:srgbClr val="004671"/>
+                </a:solidFill>
+                <a:latin typeface="Noto Sans" pitchFamily="34" charset="0"/>
+                <a:ea typeface="Noto Sans" pitchFamily="34" charset="-122"/>
+                <a:cs typeface="Noto Sans" pitchFamily="34" charset="-120"/>
+              </a:rPr>
+              <a:t>JTBD 3 — Yêu thích, tự giác học</a:t>
+            </a:r>
+            <a:endParaRPr lang="en-US" sz="1150" dirty="0"/>
+          </a:p>
+          <a:p>
+            <a:pPr indent="0" marL="0">
+              <a:lnSpc>
+                <a:spcPct val="102000"/>
+              </a:lnSpc>
+              <a:spcAft>
+                <a:spcPts val="200"/>
+              </a:spcAft>
+              <a:buNone/>
+            </a:pPr>
+            <a:r>
+              <a:rPr lang="en-US" sz="950" b="1" dirty="0">
+                <a:solidFill>
+                  <a:srgbClr val="22333F"/>
+                </a:solidFill>
+                <a:latin typeface="Noto Sans" pitchFamily="34" charset="0"/>
+                <a:ea typeface="Noto Sans" pitchFamily="34" charset="-122"/>
+                <a:cs typeface="Noto Sans" pitchFamily="34" charset="-120"/>
+              </a:rPr>
+              <a:t>Chức năng: </a:t>
+            </a:r>
+            <a:r>
+              <a:rPr lang="en-US" sz="950" dirty="0">
+                <a:solidFill>
+                  <a:srgbClr val="22333F"/>
+                </a:solidFill>
+                <a:latin typeface="Noto Sans" pitchFamily="34" charset="0"/>
+                <a:ea typeface="Noto Sans" pitchFamily="34" charset="-122"/>
+                <a:cs typeface="Noto Sans" pitchFamily="34" charset="-120"/>
+              </a:rPr>
+              <a:t>Chủ động học, không đối phó.</a:t>
+            </a:r>
+            <a:endParaRPr lang="en-US" sz="950" dirty="0"/>
+          </a:p>
+          <a:p>
+            <a:pPr indent="0" marL="0">
+              <a:lnSpc>
+                <a:spcPct val="102000"/>
+              </a:lnSpc>
+              <a:spcAft>
+                <a:spcPts val="200"/>
+              </a:spcAft>
+              <a:buNone/>
+            </a:pPr>
+            <a:r>
+              <a:rPr lang="en-US" sz="950" b="1" dirty="0">
+                <a:solidFill>
+                  <a:srgbClr val="22333F"/>
+                </a:solidFill>
+                <a:latin typeface="Noto Sans" pitchFamily="34" charset="0"/>
+                <a:ea typeface="Noto Sans" pitchFamily="34" charset="-122"/>
+                <a:cs typeface="Noto Sans" pitchFamily="34" charset="-120"/>
+              </a:rPr>
+              <a:t>Cảm xúc: </a:t>
+            </a:r>
+            <a:r>
+              <a:rPr lang="en-US" sz="950" dirty="0">
+                <a:solidFill>
+                  <a:srgbClr val="22333F"/>
+                </a:solidFill>
+                <a:latin typeface="Noto Sans" pitchFamily="34" charset="0"/>
+                <a:ea typeface="Noto Sans" pitchFamily="34" charset="-122"/>
+                <a:cs typeface="Noto Sans" pitchFamily="34" charset="-120"/>
+              </a:rPr>
+              <a:t>Mệt mỏi vì xung đột hằng ngày với con; cảm giác tội lỗi khi phải quát mắng.</a:t>
+            </a:r>
+            <a:endParaRPr lang="en-US" sz="950" dirty="0"/>
+          </a:p>
+          <a:p>
+            <a:pPr indent="0" marL="0">
+              <a:lnSpc>
+                <a:spcPct val="102000"/>
+              </a:lnSpc>
+              <a:spcAft>
+                <a:spcPts val="200"/>
+              </a:spcAft>
+              <a:buNone/>
+            </a:pPr>
+            <a:r>
+              <a:rPr lang="en-US" sz="950" b="1" dirty="0">
+                <a:solidFill>
+                  <a:srgbClr val="22333F"/>
+                </a:solidFill>
+                <a:latin typeface="Noto Sans" pitchFamily="34" charset="0"/>
+                <a:ea typeface="Noto Sans" pitchFamily="34" charset="-122"/>
+                <a:cs typeface="Noto Sans" pitchFamily="34" charset="-120"/>
+              </a:rPr>
+              <a:t>Xã hội: </a:t>
+            </a:r>
+            <a:r>
+              <a:rPr lang="en-US" sz="950" dirty="0">
+                <a:solidFill>
+                  <a:srgbClr val="22333F"/>
+                </a:solidFill>
+                <a:latin typeface="Noto Sans" pitchFamily="34" charset="0"/>
+                <a:ea typeface="Noto Sans" pitchFamily="34" charset="-122"/>
+                <a:cs typeface="Noto Sans" pitchFamily="34" charset="-120"/>
+              </a:rPr>
+              <a:t>Giữ hòa khí gia đình.</a:t>
+            </a:r>
+            <a:endParaRPr lang="en-US" sz="950" dirty="0"/>
+          </a:p>
+          <a:p>
+            <a:pPr indent="0" marL="0">
+              <a:lnSpc>
+                <a:spcPct val="102000"/>
+              </a:lnSpc>
+              <a:spcAft>
+                <a:spcPts val="200"/>
+              </a:spcAft>
+              <a:buNone/>
+            </a:pPr>
+            <a:r>
+              <a:rPr lang="en-US" sz="950" b="1" dirty="0">
+                <a:solidFill>
+                  <a:srgbClr val="B23B2E"/>
+                </a:solidFill>
+                <a:latin typeface="Noto Sans" pitchFamily="34" charset="0"/>
+                <a:ea typeface="Noto Sans" pitchFamily="34" charset="-122"/>
+                <a:cs typeface="Noto Sans" pitchFamily="34" charset="-120"/>
+              </a:rPr>
+              <a:t>⚠ </a:t>
+            </a:r>
+            <a:r>
+              <a:rPr lang="en-US" sz="950" dirty="0">
+                <a:solidFill>
+                  <a:srgbClr val="B23B2E"/>
+                </a:solidFill>
+                <a:latin typeface="Noto Sans" pitchFamily="34" charset="0"/>
+                <a:ea typeface="Noto Sans" pitchFamily="34" charset="-122"/>
+                <a:cs typeface="Noto Sans" pitchFamily="34" charset="-120"/>
+              </a:rPr>
+              <a:t>Dễ mâu thuẫn JTBD 1 nếu sản phẩm nặng điểm số/thi đua để “chứng minh”.</a:t>
+            </a:r>
+            <a:endParaRPr lang="en-US" sz="950" dirty="0"/>
+          </a:p>
+        </p:txBody>
+      </p:sp>
+      <p:sp>
+        <p:nvSpPr>
+          <p:cNvPr id="15" name="Bar 15"/>
+          <p:cNvSpPr/>
+          <p:nvPr/>
+        </p:nvSpPr>
+        <p:spPr>
+          <a:xfrm>
+            <a:off x="502920" y="5330000"/>
+            <a:ext cx="73152" cy="1000000"/>
+          </a:xfrm>
+          <a:prstGeom prst="rect">
+            <a:avLst/>
+          </a:prstGeom>
+          <a:solidFill>
+            <a:srgbClr val="A5BE00"/>
+          </a:solidFill>
+          <a:ln/>
+        </p:spPr>
+      </p:sp>
+      <p:sp>
+        <p:nvSpPr>
+          <p:cNvPr id="16" name="Text 16"/>
+          <p:cNvSpPr/>
+          <p:nvPr/>
+        </p:nvSpPr>
+        <p:spPr>
+          <a:xfrm>
+            <a:off x="685800" y="5330000"/>
+            <a:ext cx="5283676" cy="1000000"/>
+          </a:xfrm>
+          <a:prstGeom prst="rect">
+            <a:avLst/>
+          </a:prstGeom>
+          <a:noFill/>
+          <a:ln/>
+        </p:spPr>
+        <p:txBody>
+          <a:bodyPr wrap="square" rtlCol="0" anchor="t">
+            <a:normAutofit/>
+          </a:bodyPr>
+          <a:lstStyle/>
+          <a:p>
+            <a:pPr indent="0" marL="0">
+              <a:lnSpc>
+                <a:spcPct val="102000"/>
+              </a:lnSpc>
+              <a:spcAft>
+                <a:spcPts val="200"/>
+              </a:spcAft>
+              <a:buNone/>
+            </a:pPr>
+            <a:r>
+              <a:rPr lang="en-US" sz="1150" b="1" dirty="0">
+                <a:solidFill>
+                  <a:srgbClr val="004671"/>
+                </a:solidFill>
+                <a:latin typeface="Noto Sans" pitchFamily="34" charset="0"/>
+                <a:ea typeface="Noto Sans" pitchFamily="34" charset="-122"/>
+                <a:cs typeface="Noto Sans" pitchFamily="34" charset="-120"/>
+              </a:rPr>
+              <a:t>JTBD 4 — Giải phóng thời gian, áp lực kèm con</a:t>
+            </a:r>
+            <a:endParaRPr lang="en-US" sz="1150" dirty="0"/>
+          </a:p>
+          <a:p>
+            <a:pPr indent="0" marL="0">
+              <a:lnSpc>
+                <a:spcPct val="102000"/>
+              </a:lnSpc>
+              <a:spcAft>
+                <a:spcPts val="200"/>
+              </a:spcAft>
+              <a:buNone/>
+            </a:pPr>
+            <a:r>
+              <a:rPr lang="en-US" sz="950" b="1" dirty="0">
+                <a:solidFill>
+                  <a:srgbClr val="22333F"/>
+                </a:solidFill>
+                <a:latin typeface="Noto Sans" pitchFamily="34" charset="0"/>
+                <a:ea typeface="Noto Sans" pitchFamily="34" charset="-122"/>
+                <a:cs typeface="Noto Sans" pitchFamily="34" charset="-120"/>
+              </a:rPr>
+              <a:t>Chức năng: </a:t>
+            </a:r>
+            <a:r>
+              <a:rPr lang="en-US" sz="950" dirty="0">
+                <a:solidFill>
+                  <a:srgbClr val="22333F"/>
+                </a:solidFill>
+                <a:latin typeface="Noto Sans" pitchFamily="34" charset="0"/>
+                <a:ea typeface="Noto Sans" pitchFamily="34" charset="-122"/>
+                <a:cs typeface="Noto Sans" pitchFamily="34" charset="-120"/>
+              </a:rPr>
+              <a:t>Không cần giám sát/kèm cặp con hằng ngày.</a:t>
+            </a:r>
+            <a:endParaRPr lang="en-US" sz="950" dirty="0"/>
+          </a:p>
+          <a:p>
+            <a:pPr indent="0" marL="0">
+              <a:lnSpc>
+                <a:spcPct val="102000"/>
+              </a:lnSpc>
+              <a:spcAft>
+                <a:spcPts val="200"/>
+              </a:spcAft>
+              <a:buNone/>
+            </a:pPr>
+            <a:r>
+              <a:rPr lang="en-US" sz="950" b="1" dirty="0">
+                <a:solidFill>
+                  <a:srgbClr val="22333F"/>
+                </a:solidFill>
+                <a:latin typeface="Noto Sans" pitchFamily="34" charset="0"/>
+                <a:ea typeface="Noto Sans" pitchFamily="34" charset="-122"/>
+                <a:cs typeface="Noto Sans" pitchFamily="34" charset="-120"/>
+              </a:rPr>
+              <a:t>Cảm xúc: </a:t>
+            </a:r>
+            <a:r>
+              <a:rPr lang="en-US" sz="950" dirty="0">
+                <a:solidFill>
+                  <a:srgbClr val="22333F"/>
+                </a:solidFill>
+                <a:latin typeface="Noto Sans" pitchFamily="34" charset="0"/>
+                <a:ea typeface="Noto Sans" pitchFamily="34" charset="-122"/>
+                <a:cs typeface="Noto Sans" pitchFamily="34" charset="-120"/>
+              </a:rPr>
+              <a:t>Giải tỏa mặc cảm/tội lỗi vì không giỏi tiếng Anh, không có thời gian — phần thiếu nhất ở slide gốc.</a:t>
+            </a:r>
+            <a:endParaRPr lang="en-US" sz="950" dirty="0"/>
+          </a:p>
+          <a:p>
+            <a:pPr indent="0" marL="0">
+              <a:lnSpc>
+                <a:spcPct val="102000"/>
+              </a:lnSpc>
+              <a:spcAft>
+                <a:spcPts val="200"/>
+              </a:spcAft>
+              <a:buNone/>
+            </a:pPr>
+            <a:r>
+              <a:rPr lang="en-US" sz="950" b="1" dirty="0">
+                <a:solidFill>
+                  <a:srgbClr val="22333F"/>
+                </a:solidFill>
+                <a:latin typeface="Noto Sans" pitchFamily="34" charset="0"/>
+                <a:ea typeface="Noto Sans" pitchFamily="34" charset="-122"/>
+                <a:cs typeface="Noto Sans" pitchFamily="34" charset="-120"/>
+              </a:rPr>
+              <a:t>Xã hội: </a:t>
+            </a:r>
+            <a:r>
+              <a:rPr lang="en-US" sz="950" dirty="0">
+                <a:solidFill>
+                  <a:srgbClr val="22333F"/>
+                </a:solidFill>
+                <a:latin typeface="Noto Sans" pitchFamily="34" charset="0"/>
+                <a:ea typeface="Noto Sans" pitchFamily="34" charset="-122"/>
+                <a:cs typeface="Noto Sans" pitchFamily="34" charset="-120"/>
+              </a:rPr>
+              <a:t>Vẫn được nhìn nhận là “mẹ có trách nhiệm” dù bận.</a:t>
+            </a:r>
+            <a:endParaRPr lang="en-US" sz="950" dirty="0"/>
+          </a:p>
+        </p:txBody>
+      </p:sp>
+      <p:sp>
+        <p:nvSpPr>
+          <p:cNvPr id="17" name="Bar 17"/>
+          <p:cNvSpPr/>
+          <p:nvPr/>
+        </p:nvSpPr>
+        <p:spPr>
+          <a:xfrm>
+            <a:off x="6219476" y="2210000"/>
+            <a:ext cx="73152" cy="1000000"/>
+          </a:xfrm>
+          <a:prstGeom prst="rect">
+            <a:avLst/>
+          </a:prstGeom>
+          <a:solidFill>
+            <a:srgbClr val="004671"/>
+          </a:solidFill>
+          <a:ln/>
+        </p:spPr>
+      </p:sp>
+      <p:sp>
+        <p:nvSpPr>
+          <p:cNvPr id="18" name="Text 18"/>
+          <p:cNvSpPr/>
+          <p:nvPr/>
+        </p:nvSpPr>
+        <p:spPr>
+          <a:xfrm>
+            <a:off x="6402356" y="2210000"/>
+            <a:ext cx="5283676" cy="1000000"/>
+          </a:xfrm>
+          <a:prstGeom prst="rect">
+            <a:avLst/>
+          </a:prstGeom>
+          <a:noFill/>
+          <a:ln/>
+        </p:spPr>
+        <p:txBody>
+          <a:bodyPr wrap="square" rtlCol="0" anchor="t">
+            <a:normAutofit/>
+          </a:bodyPr>
+          <a:lstStyle/>
+          <a:p>
+            <a:pPr indent="0" marL="0">
+              <a:lnSpc>
+                <a:spcPct val="102000"/>
+              </a:lnSpc>
+              <a:spcAft>
+                <a:spcPts val="200"/>
+              </a:spcAft>
+              <a:buNone/>
+            </a:pPr>
+            <a:r>
+              <a:rPr lang="en-US" sz="1150" b="1" dirty="0">
+                <a:solidFill>
+                  <a:srgbClr val="004671"/>
+                </a:solidFill>
+                <a:latin typeface="Noto Sans" pitchFamily="34" charset="0"/>
+                <a:ea typeface="Noto Sans" pitchFamily="34" charset="-122"/>
+                <a:cs typeface="Noto Sans" pitchFamily="34" charset="-120"/>
+              </a:rPr>
+              <a:t>JTBD 5 — Không hổng môn khi áp lực chuyển cấp tới gần</a:t>
+            </a:r>
+            <a:endParaRPr lang="en-US" sz="1150" dirty="0"/>
+          </a:p>
+          <a:p>
+            <a:pPr indent="0" marL="0">
+              <a:lnSpc>
+                <a:spcPct val="102000"/>
+              </a:lnSpc>
+              <a:spcAft>
+                <a:spcPts val="200"/>
+              </a:spcAft>
+              <a:buNone/>
+            </a:pPr>
+            <a:r>
+              <a:rPr lang="en-US" sz="950" b="1" dirty="0">
+                <a:solidFill>
+                  <a:srgbClr val="22333F"/>
+                </a:solidFill>
+                <a:latin typeface="Noto Sans" pitchFamily="34" charset="0"/>
+                <a:ea typeface="Noto Sans" pitchFamily="34" charset="-122"/>
+                <a:cs typeface="Noto Sans" pitchFamily="34" charset="-120"/>
+              </a:rPr>
+              <a:t>Chức năng: </a:t>
+            </a:r>
+            <a:r>
+              <a:rPr lang="en-US" sz="950" dirty="0">
+                <a:solidFill>
+                  <a:srgbClr val="22333F"/>
+                </a:solidFill>
+                <a:latin typeface="Noto Sans" pitchFamily="34" charset="0"/>
+                <a:ea typeface="Noto Sans" pitchFamily="34" charset="-122"/>
+                <a:cs typeface="Noto Sans" pitchFamily="34" charset="-120"/>
+              </a:rPr>
+              <a:t>Điểm đồng đều, đủ năng lực thi (lớp 6, lớp 10).</a:t>
+            </a:r>
+            <a:endParaRPr lang="en-US" sz="950" dirty="0"/>
+          </a:p>
+          <a:p>
+            <a:pPr indent="0" marL="0">
+              <a:lnSpc>
+                <a:spcPct val="102000"/>
+              </a:lnSpc>
+              <a:spcAft>
+                <a:spcPts val="200"/>
+              </a:spcAft>
+              <a:buNone/>
+            </a:pPr>
+            <a:r>
+              <a:rPr lang="en-US" sz="950" b="1" dirty="0">
+                <a:solidFill>
+                  <a:srgbClr val="22333F"/>
+                </a:solidFill>
+                <a:latin typeface="Noto Sans" pitchFamily="34" charset="0"/>
+                <a:ea typeface="Noto Sans" pitchFamily="34" charset="-122"/>
+                <a:cs typeface="Noto Sans" pitchFamily="34" charset="-120"/>
+              </a:rPr>
+              <a:t>Cảm xúc: </a:t>
+            </a:r>
+            <a:r>
+              <a:rPr lang="en-US" sz="950" dirty="0">
+                <a:solidFill>
+                  <a:srgbClr val="22333F"/>
+                </a:solidFill>
+                <a:latin typeface="Noto Sans" pitchFamily="34" charset="0"/>
+                <a:ea typeface="Noto Sans" pitchFamily="34" charset="-122"/>
+                <a:cs typeface="Noto Sans" pitchFamily="34" charset="-120"/>
+              </a:rPr>
+              <a:t>Lo âu so sánh xã hội — sợ “ai cũng học mà mình không cho con học”.</a:t>
+            </a:r>
+            <a:endParaRPr lang="en-US" sz="950" dirty="0"/>
+          </a:p>
+          <a:p>
+            <a:pPr indent="0" marL="0">
+              <a:lnSpc>
+                <a:spcPct val="102000"/>
+              </a:lnSpc>
+              <a:spcAft>
+                <a:spcPts val="200"/>
+              </a:spcAft>
+              <a:buNone/>
+            </a:pPr>
+            <a:r>
+              <a:rPr lang="en-US" sz="950" b="1" dirty="0">
+                <a:solidFill>
+                  <a:srgbClr val="22333F"/>
+                </a:solidFill>
+                <a:latin typeface="Noto Sans" pitchFamily="34" charset="0"/>
+                <a:ea typeface="Noto Sans" pitchFamily="34" charset="-122"/>
+                <a:cs typeface="Noto Sans" pitchFamily="34" charset="-120"/>
+              </a:rPr>
+              <a:t>Xã hội: </a:t>
+            </a:r>
+            <a:r>
+              <a:rPr lang="en-US" sz="950" dirty="0">
+                <a:solidFill>
+                  <a:srgbClr val="22333F"/>
+                </a:solidFill>
+                <a:latin typeface="Noto Sans" pitchFamily="34" charset="0"/>
+                <a:ea typeface="Noto Sans" pitchFamily="34" charset="-122"/>
+                <a:cs typeface="Noto Sans" pitchFamily="34" charset="-120"/>
+              </a:rPr>
+              <a:t>Áp lực đồng thuận của cộng đồng phụ huynh quanh kỳ thi chuyển cấp.</a:t>
+            </a:r>
+            <a:endParaRPr lang="en-US" sz="950" dirty="0"/>
+          </a:p>
+        </p:txBody>
+      </p:sp>
+      <p:sp>
+        <p:nvSpPr>
+          <p:cNvPr id="19" name="Bar 19"/>
+          <p:cNvSpPr/>
+          <p:nvPr/>
+        </p:nvSpPr>
+        <p:spPr>
+          <a:xfrm>
+            <a:off x="6219476" y="3250000"/>
+            <a:ext cx="73152" cy="1000000"/>
+          </a:xfrm>
+          <a:prstGeom prst="rect">
+            <a:avLst/>
+          </a:prstGeom>
+          <a:solidFill>
+            <a:srgbClr val="3B81B1"/>
+          </a:solidFill>
+          <a:ln/>
+        </p:spPr>
+      </p:sp>
+      <p:sp>
+        <p:nvSpPr>
+          <p:cNvPr id="20" name="Text 20"/>
+          <p:cNvSpPr/>
+          <p:nvPr/>
+        </p:nvSpPr>
+        <p:spPr>
+          <a:xfrm>
+            <a:off x="6402356" y="3250000"/>
+            <a:ext cx="5283676" cy="1000000"/>
+          </a:xfrm>
+          <a:prstGeom prst="rect">
+            <a:avLst/>
+          </a:prstGeom>
+          <a:noFill/>
+          <a:ln/>
+        </p:spPr>
+        <p:txBody>
+          <a:bodyPr wrap="square" rtlCol="0" anchor="t">
+            <a:normAutofit/>
+          </a:bodyPr>
+          <a:lstStyle/>
+          <a:p>
+            <a:pPr indent="0" marL="0">
+              <a:lnSpc>
+                <a:spcPct val="102000"/>
+              </a:lnSpc>
+              <a:spcAft>
+                <a:spcPts val="200"/>
+              </a:spcAft>
+              <a:buNone/>
+            </a:pPr>
+            <a:r>
+              <a:rPr lang="en-US" sz="1150" b="1" dirty="0">
+                <a:solidFill>
+                  <a:srgbClr val="004671"/>
+                </a:solidFill>
+                <a:latin typeface="Noto Sans" pitchFamily="34" charset="0"/>
+                <a:ea typeface="Noto Sans" pitchFamily="34" charset="-122"/>
+                <a:cs typeface="Noto Sans" pitchFamily="34" charset="-120"/>
+              </a:rPr>
+              <a:t>JTBD 6 — Không phải quản lý nhiều nơi cùng lúc</a:t>
+            </a:r>
+            <a:endParaRPr lang="en-US" sz="1150" dirty="0"/>
+          </a:p>
+          <a:p>
+            <a:pPr indent="0" marL="0">
+              <a:lnSpc>
+                <a:spcPct val="102000"/>
+              </a:lnSpc>
+              <a:spcAft>
+                <a:spcPts val="200"/>
+              </a:spcAft>
+              <a:buNone/>
+            </a:pPr>
+            <a:r>
+              <a:rPr lang="en-US" sz="950" b="1" dirty="0">
+                <a:solidFill>
+                  <a:srgbClr val="22333F"/>
+                </a:solidFill>
+                <a:latin typeface="Noto Sans" pitchFamily="34" charset="0"/>
+                <a:ea typeface="Noto Sans" pitchFamily="34" charset="-122"/>
+                <a:cs typeface="Noto Sans" pitchFamily="34" charset="-120"/>
+              </a:rPr>
+              <a:t>Chức năng: </a:t>
+            </a:r>
+            <a:r>
+              <a:rPr lang="en-US" sz="950" dirty="0">
+                <a:solidFill>
+                  <a:srgbClr val="22333F"/>
+                </a:solidFill>
+                <a:latin typeface="Noto Sans" pitchFamily="34" charset="0"/>
+                <a:ea typeface="Noto Sans" pitchFamily="34" charset="-122"/>
+                <a:cs typeface="Noto Sans" pitchFamily="34" charset="-120"/>
+              </a:rPr>
+              <a:t>Đóng gói đa môn về một chỗ.</a:t>
+            </a:r>
+            <a:endParaRPr lang="en-US" sz="950" dirty="0"/>
+          </a:p>
+          <a:p>
+            <a:pPr indent="0" marL="0">
+              <a:lnSpc>
+                <a:spcPct val="102000"/>
+              </a:lnSpc>
+              <a:spcAft>
+                <a:spcPts val="200"/>
+              </a:spcAft>
+              <a:buNone/>
+            </a:pPr>
+            <a:r>
+              <a:rPr lang="en-US" sz="950" b="1" dirty="0">
+                <a:solidFill>
+                  <a:srgbClr val="22333F"/>
+                </a:solidFill>
+                <a:latin typeface="Noto Sans" pitchFamily="34" charset="0"/>
+                <a:ea typeface="Noto Sans" pitchFamily="34" charset="-122"/>
+                <a:cs typeface="Noto Sans" pitchFamily="34" charset="-120"/>
+              </a:rPr>
+              <a:t>Cảm xúc: </a:t>
+            </a:r>
+            <a:r>
+              <a:rPr lang="en-US" sz="950" dirty="0">
+                <a:solidFill>
+                  <a:srgbClr val="22333F"/>
+                </a:solidFill>
+                <a:latin typeface="Noto Sans" pitchFamily="34" charset="0"/>
+                <a:ea typeface="Noto Sans" pitchFamily="34" charset="-122"/>
+                <a:cs typeface="Noto Sans" pitchFamily="34" charset="-120"/>
+              </a:rPr>
+              <a:t>Mệt mỏi vì quản lý phân mảnh; muốn bớt đưa đón, bớt nhớ nhiều lịch và khoản chi.</a:t>
+            </a:r>
+            <a:endParaRPr lang="en-US" sz="950" dirty="0"/>
+          </a:p>
+        </p:txBody>
+      </p:sp>
+      <p:sp>
+        <p:nvSpPr>
+          <p:cNvPr id="21" name="Text 6"/>
+          <p:cNvSpPr/>
+          <p:nvPr/>
+        </p:nvSpPr>
+        <p:spPr>
+          <a:xfrm>
+            <a:off x="6219476" y="4300000"/>
+            <a:ext cx="5466556" cy="260000"/>
+          </a:xfrm>
+          <a:prstGeom prst="rect">
+            <a:avLst/>
+          </a:prstGeom>
+          <a:noFill/>
+          <a:ln/>
+        </p:spPr>
+        <p:txBody>
+          <a:bodyPr wrap="square" rtlCol="0" anchor="ctr"/>
+          <a:lstStyle/>
+          <a:p>
+            <a:pPr indent="0" marL="0">
+              <a:lnSpc>
+                <a:spcPct val="102000"/>
+              </a:lnSpc>
+              <a:spcAft>
+                <a:spcPts val="0"/>
+              </a:spcAft>
+              <a:buNone/>
+            </a:pPr>
+            <a:r>
+              <a:rPr lang="en-US" sz="900" b="1" dirty="0">
+                <a:solidFill>
+                  <a:srgbClr val="5B6472"/>
+                </a:solidFill>
+                <a:latin typeface="Noto Sans" pitchFamily="34" charset="0"/>
+                <a:ea typeface="Noto Sans" pitchFamily="34" charset="-122"/>
+                <a:cs typeface="Noto Sans" pitchFamily="34" charset="-120"/>
+              </a:rPr>
+              <a:t>JTBD ẨN — có bằng chứng mạnh, chưa đưa vào Slide 5–6 (chưa bóc tách 3 tầng)</a:t>
+            </a:r>
+            <a:endParaRPr lang="en-US" sz="900" dirty="0"/>
+          </a:p>
+        </p:txBody>
+      </p:sp>
+      <p:sp>
+        <p:nvSpPr>
+          <p:cNvPr id="22" name="Bar 22"/>
+          <p:cNvSpPr/>
+          <p:nvPr/>
+        </p:nvSpPr>
+        <p:spPr>
+          <a:xfrm>
+            <a:off x="6219476" y="4610000"/>
+            <a:ext cx="73152" cy="830000"/>
+          </a:xfrm>
+          <a:prstGeom prst="rect">
+            <a:avLst/>
+          </a:prstGeom>
+          <a:solidFill>
+            <a:srgbClr val="8A94A6"/>
+          </a:solidFill>
+          <a:ln/>
+        </p:spPr>
+      </p:sp>
+      <p:sp>
+        <p:nvSpPr>
+          <p:cNvPr id="23" name="Text 23"/>
+          <p:cNvSpPr/>
+          <p:nvPr/>
+        </p:nvSpPr>
+        <p:spPr>
+          <a:xfrm>
+            <a:off x="6402356" y="4610000"/>
+            <a:ext cx="5283676" cy="830000"/>
+          </a:xfrm>
+          <a:prstGeom prst="rect">
+            <a:avLst/>
+          </a:prstGeom>
+          <a:noFill/>
+          <a:ln/>
+        </p:spPr>
+        <p:txBody>
+          <a:bodyPr wrap="square" rtlCol="0" anchor="t">
+            <a:normAutofit/>
+          </a:bodyPr>
+          <a:lstStyle/>
+          <a:p>
+            <a:pPr indent="0" marL="0">
+              <a:lnSpc>
+                <a:spcPct val="102000"/>
+              </a:lnSpc>
+              <a:spcAft>
+                <a:spcPts val="200"/>
+              </a:spcAft>
+              <a:buNone/>
+            </a:pPr>
+            <a:r>
+              <a:rPr lang="en-US" sz="1100" b="1" dirty="0">
+                <a:solidFill>
+                  <a:srgbClr val="004671"/>
+                </a:solidFill>
+                <a:latin typeface="Noto Sans" pitchFamily="34" charset="0"/>
+                <a:ea typeface="Noto Sans" pitchFamily="34" charset="-122"/>
+                <a:cs typeface="Noto Sans" pitchFamily="34" charset="-120"/>
+              </a:rPr>
+              <a:t>JTBD 7 — Trấn an sau thất bại trước đó</a:t>
+            </a:r>
+            <a:endParaRPr lang="en-US" sz="1100" dirty="0"/>
+          </a:p>
+          <a:p>
+            <a:pPr indent="0" marL="0">
+              <a:lnSpc>
+                <a:spcPct val="102000"/>
+              </a:lnSpc>
+              <a:spcAft>
+                <a:spcPts val="100"/>
+              </a:spcAft>
+              <a:buNone/>
+            </a:pPr>
+            <a:r>
+              <a:rPr lang="en-US" sz="950" dirty="0">
+                <a:solidFill>
+                  <a:srgbClr val="5B6472"/>
+                </a:solidFill>
+                <a:latin typeface="Noto Sans" pitchFamily="34" charset="0"/>
+                <a:ea typeface="Noto Sans" pitchFamily="34" charset="-122"/>
+                <a:cs typeface="Noto Sans" pitchFamily="34" charset="-120"/>
+              </a:rPr>
+              <a:t>Đã từng bỏ tiền cho giải pháp không hiệu quả → muốn bằng chứng/cam kết rõ ràng trước khi bỏ tiền lần nữa, để tin “lần này sẽ khác”.</a:t>
+            </a:r>
+            <a:endParaRPr lang="en-US" sz="950" dirty="0"/>
+          </a:p>
+        </p:txBody>
+      </p:sp>
+      <p:sp>
+        <p:nvSpPr>
+          <p:cNvPr id="24" name="Bar 24"/>
+          <p:cNvSpPr/>
+          <p:nvPr/>
+        </p:nvSpPr>
+        <p:spPr>
+          <a:xfrm>
+            <a:off x="6219476" y="5470000"/>
+            <a:ext cx="73152" cy="830000"/>
+          </a:xfrm>
+          <a:prstGeom prst="rect">
+            <a:avLst/>
+          </a:prstGeom>
+          <a:solidFill>
+            <a:srgbClr val="8A94A6"/>
+          </a:solidFill>
+          <a:ln/>
+        </p:spPr>
+      </p:sp>
+      <p:sp>
+        <p:nvSpPr>
+          <p:cNvPr id="25" name="Text 25"/>
+          <p:cNvSpPr/>
+          <p:nvPr/>
+        </p:nvSpPr>
+        <p:spPr>
+          <a:xfrm>
+            <a:off x="6402356" y="5470000"/>
+            <a:ext cx="5283676" cy="830000"/>
+          </a:xfrm>
+          <a:prstGeom prst="rect">
+            <a:avLst/>
+          </a:prstGeom>
+          <a:noFill/>
+          <a:ln/>
+        </p:spPr>
+        <p:txBody>
+          <a:bodyPr wrap="square" rtlCol="0" anchor="t">
+            <a:normAutofit/>
+          </a:bodyPr>
+          <a:lstStyle/>
+          <a:p>
+            <a:pPr indent="0" marL="0">
+              <a:lnSpc>
+                <a:spcPct val="102000"/>
+              </a:lnSpc>
+              <a:spcAft>
+                <a:spcPts val="200"/>
+              </a:spcAft>
+              <a:buNone/>
+            </a:pPr>
+            <a:r>
+              <a:rPr lang="en-US" sz="1100" b="1" dirty="0">
+                <a:solidFill>
+                  <a:srgbClr val="004671"/>
+                </a:solidFill>
+                <a:latin typeface="Noto Sans" pitchFamily="34" charset="0"/>
+                <a:ea typeface="Noto Sans" pitchFamily="34" charset="-122"/>
+                <a:cs typeface="Noto Sans" pitchFamily="34" charset="-120"/>
+              </a:rPr>
+              <a:t>JTBD 8 — Không thua kém “con nhà người ta”</a:t>
+            </a:r>
+            <a:endParaRPr lang="en-US" sz="1100" dirty="0"/>
+          </a:p>
+          <a:p>
+            <a:pPr indent="0" marL="0">
+              <a:lnSpc>
+                <a:spcPct val="102000"/>
+              </a:lnSpc>
+              <a:spcAft>
+                <a:spcPts val="100"/>
+              </a:spcAft>
+              <a:buNone/>
+            </a:pPr>
+            <a:r>
+              <a:rPr lang="en-US" sz="950" dirty="0">
+                <a:solidFill>
+                  <a:srgbClr val="5B6472"/>
+                </a:solidFill>
+                <a:latin typeface="Noto Sans" pitchFamily="34" charset="0"/>
+                <a:ea typeface="Noto Sans" pitchFamily="34" charset="-122"/>
+                <a:cs typeface="Noto Sans" pitchFamily="34" charset="-120"/>
+              </a:rPr>
+              <a:t>Nghe hàng xóm/bạn bè khoe con đạt chứng chỉ hay đỗ trường tốt → muốn con mình có thành tích tương đương hoặc hơn để tự tin khi so sánh.</a:t>
+            </a:r>
+            <a:endParaRPr lang="en-US" sz="950" dirty="0"/>
+          </a:p>
+        </p:txBody>
+      </p:sp>
+      <p:pic>
+        <p:nvPicPr>
+          <p:cNvPr id="26" name="Image 1"/>
+          <p:cNvPicPr>
+            <a:picLocks noChangeAspect="1"/>
+          </p:cNvPicPr>
+          <p:nvPr/>
+        </p:nvPicPr>
+        <p:blipFill>
+          <a:blip r:embed="rId2"/>
+          <a:stretch>
+            <a:fillRect/>
+          </a:stretch>
+        </p:blipFill>
+        <p:spPr>
+          <a:xfrm>
+            <a:off x="502920" y="6473952"/>
+            <a:ext cx="237744" cy="237744"/>
+          </a:xfrm>
+          <a:prstGeom prst="rect">
+            <a:avLst/>
+          </a:prstGeom>
+        </p:spPr>
+      </p:pic>
+      <p:sp>
+        <p:nvSpPr>
+          <p:cNvPr id="27" name="Text 12"/>
+          <p:cNvSpPr/>
+          <p:nvPr/>
+        </p:nvSpPr>
+        <p:spPr>
+          <a:xfrm>
+            <a:off x="795528" y="6473952"/>
+            <a:ext cx="3657600" cy="256032"/>
+          </a:xfrm>
+          <a:prstGeom prst="rect">
+            <a:avLst/>
+          </a:prstGeom>
+          <a:noFill/>
+          <a:ln/>
+        </p:spPr>
+        <p:txBody>
+          <a:bodyPr wrap="square" rtlCol="0" anchor="ctr"/>
+          <a:lstStyle/>
+          <a:p>
+            <a:pPr indent="0" marL="0">
+              <a:lnSpc>
+                <a:spcPct val="102000"/>
+              </a:lnSpc>
+              <a:spcAft>
+                <a:spcPts val="0"/>
+              </a:spcAft>
+              <a:buNone/>
+            </a:pPr>
+            <a:r>
+              <a:rPr lang="en-US" sz="800" dirty="0">
+                <a:solidFill>
+                  <a:srgbClr val="5B6472"/>
+                </a:solidFill>
+                <a:latin typeface="Noto Sans" pitchFamily="34" charset="0"/>
+                <a:ea typeface="Noto Sans" pitchFamily="34" charset="-122"/>
+                <a:cs typeface="Noto Sans" pitchFamily="34" charset="-120"/>
+              </a:rPr>
+              <a:t>EDUPIA  AI CLASS NEW</a:t>
+            </a:r>
+            <a:endParaRPr lang="en-US" sz="800" dirty="0"/>
+          </a:p>
+        </p:txBody>
+      </p:sp>
+      <p:sp>
+        <p:nvSpPr>
+          <p:cNvPr id="28" name="Text 13"/>
+          <p:cNvSpPr/>
+          <p:nvPr/>
+        </p:nvSpPr>
+        <p:spPr>
+          <a:xfrm>
+            <a:off x="10789920" y="6473952"/>
+            <a:ext cx="914400" cy="256032"/>
+          </a:xfrm>
+          <a:prstGeom prst="rect">
+            <a:avLst/>
+          </a:prstGeom>
+          <a:noFill/>
+          <a:ln/>
+        </p:spPr>
+        <p:txBody>
+          <a:bodyPr wrap="square" rtlCol="0" anchor="ctr"/>
+          <a:lstStyle/>
+          <a:p>
+            <a:pPr algn="r" indent="0" marL="0">
+              <a:buNone/>
+            </a:pPr>
+            <a:r>
+              <a:rPr lang="en-US" sz="850" dirty="0">
+                <a:solidFill>
+                  <a:srgbClr val="5B6472"/>
+                </a:solidFill>
+                <a:latin typeface="Noto Sans" pitchFamily="34" charset="0"/>
+                <a:ea typeface="Noto Sans" pitchFamily="34" charset="-122"/>
+                <a:cs typeface="Noto Sans" pitchFamily="34" charset="-120"/>
+              </a:rPr>
+              <a:t>PHỤ LỤC</a:t>
+            </a:r>
+            <a:endParaRPr lang="en-US" sz="850" dirty="0"/>
+          </a:p>
+        </p:txBody>
+      </p:sp>
+    </p:spTree>
+  </p:cSld>
+  <p:clrMapOvr>
+    <a:masterClrMapping/>
+  </p:clrMapOvr>
+</p:sld>
+</file>
+
 <file path=ppt/slides/slide2.xml><?xml version="1.0" encoding="utf-8"?>
 <p:sld xmlns:a="http://schemas.openxmlformats.org/drawingml/2006/main" xmlns:r="http://schemas.openxmlformats.org/officeDocument/2006/relationships" xmlns:p="http://schemas.openxmlformats.org/presentationml/2006/main">
   <p:cSld name="Slide 2">
